--- a/frontend/public/markit.pptx
+++ b/frontend/public/markit.pptx
@@ -5,7 +5,7 @@
     <p:sldMasterId id="2147483648" r:id="rId1"/>
   </p:sldMasterIdLst>
   <p:notesMasterIdLst>
-    <p:notesMasterId r:id="rId22"/>
+    <p:notesMasterId r:id="rId23"/>
   </p:notesMasterIdLst>
   <p:sldIdLst>
     <p:sldId id="256" r:id="rId3"/>
@@ -27,6 +27,7 @@
     <p:sldId id="272" r:id="rId19"/>
     <p:sldId id="273" r:id="rId20"/>
     <p:sldId id="274" r:id="rId21"/>
+    <p:sldId id="275" r:id="rId22"/>
   </p:sldIdLst>
   <p:sldSz cx="12191695" cy="6858000"/>
   <p:notesSz cx="6858000" cy="12191695"/>
@@ -149,7 +150,7 @@
       </p:grpSpPr>
       <p:sp>
         <p:nvSpPr>
-          <p:cNvPr id="870318391" name="Header Placeholder 1"/>
+          <p:cNvPr id="500858054" name="Header Placeholder 1"/>
           <p:cNvSpPr>
             <a:spLocks noGrp="1"/>
           </p:cNvSpPr>
@@ -183,7 +184,7 @@
       </p:sp>
       <p:sp>
         <p:nvSpPr>
-          <p:cNvPr id="792948296" name="Date Placeholder 2"/>
+          <p:cNvPr id="89810848" name="Date Placeholder 2"/>
           <p:cNvSpPr>
             <a:spLocks noGrp="1"/>
           </p:cNvSpPr>
@@ -221,7 +222,7 @@
       </p:sp>
       <p:sp>
         <p:nvSpPr>
-          <p:cNvPr id="1483162170" name="Slide Image Placeholder 3"/>
+          <p:cNvPr id="1114513611" name="Slide Image Placeholder 3"/>
           <p:cNvSpPr>
             <a:spLocks noChangeAspect="1" noGrp="1" noRot="1"/>
           </p:cNvSpPr>
@@ -257,7 +258,7 @@
       </p:sp>
       <p:sp>
         <p:nvSpPr>
-          <p:cNvPr id="1360631842" name="Notes Placeholder 4"/>
+          <p:cNvPr id="2029038135" name="Notes Placeholder 4"/>
           <p:cNvSpPr>
             <a:spLocks noGrp="1"/>
           </p:cNvSpPr>
@@ -331,7 +332,7 @@
       </p:sp>
       <p:sp>
         <p:nvSpPr>
-          <p:cNvPr id="1259497048" name="Footer Placeholder 5"/>
+          <p:cNvPr id="1885633453" name="Footer Placeholder 5"/>
           <p:cNvSpPr>
             <a:spLocks noGrp="1"/>
           </p:cNvSpPr>
@@ -365,7 +366,7 @@
       </p:sp>
       <p:sp>
         <p:nvSpPr>
-          <p:cNvPr id="63783456" name="Slide Number Placeholder 6"/>
+          <p:cNvPr id="1665892560" name="Slide Number Placeholder 6"/>
           <p:cNvSpPr>
             <a:spLocks noGrp="1"/>
           </p:cNvSpPr>
@@ -518,7 +519,7 @@
       </p:grpSpPr>
       <p:sp>
         <p:nvSpPr>
-          <p:cNvPr id="827521789" name="Slide Image Placeholder 1"/>
+          <p:cNvPr id="2051703698" name="Slide Image Placeholder 1"/>
           <p:cNvSpPr>
             <a:spLocks noChangeAspect="1" noGrp="1" noRot="1"/>
           </p:cNvSpPr>
@@ -530,7 +531,7 @@
       </p:sp>
       <p:sp>
         <p:nvSpPr>
-          <p:cNvPr id="513765130" name="Notes Placeholder 2"/>
+          <p:cNvPr id="1806865832" name="Notes Placeholder 2"/>
           <p:cNvSpPr>
             <a:spLocks noGrp="1"/>
           </p:cNvSpPr>
@@ -552,7 +553,7 @@
       </p:sp>
       <p:sp>
         <p:nvSpPr>
-          <p:cNvPr id="141602922" name="Slide Number Placeholder 3"/>
+          <p:cNvPr id="1551152959" name="Slide Number Placeholder 3"/>
           <p:cNvSpPr>
             <a:spLocks noGrp="1"/>
           </p:cNvSpPr>
@@ -603,7 +604,7 @@
       </p:grpSpPr>
       <p:sp>
         <p:nvSpPr>
-          <p:cNvPr id="858637710" name="Slide Image Placeholder 1"/>
+          <p:cNvPr id="1226238952" name="Slide Image Placeholder 1"/>
           <p:cNvSpPr>
             <a:spLocks noChangeAspect="1" noGrp="1" noRot="1"/>
           </p:cNvSpPr>
@@ -615,7 +616,7 @@
       </p:sp>
       <p:sp>
         <p:nvSpPr>
-          <p:cNvPr id="1838649208" name="Notes Placeholder 2"/>
+          <p:cNvPr id="1747095243" name="Notes Placeholder 2"/>
           <p:cNvSpPr>
             <a:spLocks noGrp="1"/>
           </p:cNvSpPr>
@@ -641,7 +642,7 @@
       </p:sp>
       <p:sp>
         <p:nvSpPr>
-          <p:cNvPr id="1427304449" name="Slide Number Placeholder 3"/>
+          <p:cNvPr id="1991730613" name="Slide Number Placeholder 3"/>
           <p:cNvSpPr>
             <a:spLocks noGrp="1"/>
           </p:cNvSpPr>
@@ -692,7 +693,7 @@
       </p:grpSpPr>
       <p:sp>
         <p:nvSpPr>
-          <p:cNvPr id="2057146809" name="Slide Image Placeholder 1"/>
+          <p:cNvPr id="557645747" name="Slide Image Placeholder 1"/>
           <p:cNvSpPr>
             <a:spLocks noChangeAspect="1" noGrp="1" noRot="1"/>
           </p:cNvSpPr>
@@ -704,7 +705,7 @@
       </p:sp>
       <p:sp>
         <p:nvSpPr>
-          <p:cNvPr id="698484984" name="Notes Placeholder 2"/>
+          <p:cNvPr id="1038669835" name="Notes Placeholder 2"/>
           <p:cNvSpPr>
             <a:spLocks noGrp="1"/>
           </p:cNvSpPr>
@@ -726,7 +727,7 @@
       </p:sp>
       <p:sp>
         <p:nvSpPr>
-          <p:cNvPr id="101521273" name="Slide Number Placeholder 3"/>
+          <p:cNvPr id="919056079" name="Slide Number Placeholder 3"/>
           <p:cNvSpPr>
             <a:spLocks noGrp="1"/>
           </p:cNvSpPr>
@@ -777,7 +778,7 @@
       </p:grpSpPr>
       <p:sp>
         <p:nvSpPr>
-          <p:cNvPr id="1949022577" name="Slide Image Placeholder 1"/>
+          <p:cNvPr id="1792238419" name="Slide Image Placeholder 1"/>
           <p:cNvSpPr>
             <a:spLocks noChangeAspect="1" noGrp="1" noRot="1"/>
           </p:cNvSpPr>
@@ -789,7 +790,7 @@
       </p:sp>
       <p:sp>
         <p:nvSpPr>
-          <p:cNvPr id="1577534556" name="Notes Placeholder 2"/>
+          <p:cNvPr id="443640011" name="Notes Placeholder 2"/>
           <p:cNvSpPr>
             <a:spLocks noGrp="1"/>
           </p:cNvSpPr>
@@ -805,17 +806,13 @@
             <a:pPr>
               <a:defRPr/>
             </a:pPr>
-            <a:r>
-              <a:rPr lang="en-US"/>
-              <a:t>Teachers and admins can browse the full attendance history by class or day, view interactive summaries, and export everything to PDF or CSV with one click. Teachers can also keep private, course-specific rosters separate from the official university list, which stays view-only for admins.</a:t>
-            </a:r>
-            <a:endParaRPr lang="en-US"/>
-          </a:p>
-        </p:txBody>
-      </p:sp>
-      <p:sp>
-        <p:nvSpPr>
-          <p:cNvPr id="1737920045" name="Slide Number Placeholder 3"/>
+            <a:endParaRPr/>
+          </a:p>
+        </p:txBody>
+      </p:sp>
+      <p:sp>
+        <p:nvSpPr>
+          <p:cNvPr id="1316722892" name="Slide Number Placeholder 3"/>
           <p:cNvSpPr>
             <a:spLocks noGrp="1"/>
           </p:cNvSpPr>
@@ -831,11 +828,11 @@
             <a:pPr>
               <a:defRPr/>
             </a:pPr>
-            <a:fld id="{F7021451-1387-4CA6-816F-3879F97B5CBC}" type="slidenum">
-              <a:rPr lang="en-US"/>
-              <a:t>10</a:t>
+            <a:fld id="{8CBB3073-BBD4-AC00-C268-CFC249FACC9B}" type="slidenum">
+              <a:rPr/>
+              <a:t/>
             </a:fld>
-            <a:endParaRPr lang="en-US"/>
+            <a:endParaRPr/>
           </a:p>
         </p:txBody>
       </p:sp>
@@ -866,7 +863,7 @@
       </p:grpSpPr>
       <p:sp>
         <p:nvSpPr>
-          <p:cNvPr id="1504973572" name="Slide Image Placeholder 1"/>
+          <p:cNvPr id="588901087" name="Slide Image Placeholder 1"/>
           <p:cNvSpPr>
             <a:spLocks noChangeAspect="1" noGrp="1" noRot="1"/>
           </p:cNvSpPr>
@@ -878,7 +875,7 @@
       </p:sp>
       <p:sp>
         <p:nvSpPr>
-          <p:cNvPr id="67425866" name="Notes Placeholder 2"/>
+          <p:cNvPr id="815535041" name="Notes Placeholder 2"/>
           <p:cNvSpPr>
             <a:spLocks noGrp="1"/>
           </p:cNvSpPr>
@@ -895,16 +892,16 @@
               <a:defRPr/>
             </a:pPr>
             <a:r>
-              <a:rPr/>
-              <a:t>MarkIt separates duties cleanly across three roles. Admins manage the university-wide roster, sessions, and teacher assignments but cannot alter attendance records. Teachers take attendance only for their assigned sections. Students are strictly read-only: they view their own dashboard, courses, and history, manage their own password and photo, and can never mark or edit attendance.</a:t>
-            </a:r>
-            <a:endParaRPr/>
-          </a:p>
-        </p:txBody>
-      </p:sp>
-      <p:sp>
-        <p:nvSpPr>
-          <p:cNvPr id="1561368878" name="Slide Number Placeholder 3"/>
+              <a:rPr lang="en-US"/>
+              <a:t>Teachers and admins can browse the full attendance history by class or day, view interactive summaries, and export everything to PDF or CSV with one click. Teachers can also keep private, course-specific rosters separate from the official university list, which stays view-only for admins.</a:t>
+            </a:r>
+            <a:endParaRPr lang="en-US"/>
+          </a:p>
+        </p:txBody>
+      </p:sp>
+      <p:sp>
+        <p:nvSpPr>
+          <p:cNvPr id="783118135" name="Slide Number Placeholder 3"/>
           <p:cNvSpPr>
             <a:spLocks noGrp="1"/>
           </p:cNvSpPr>
@@ -920,9 +917,9 @@
             <a:pPr>
               <a:defRPr/>
             </a:pPr>
-            <a:fld id="{5F15E29E-7190-6A74-6547-A05BB4D6BC16}" type="slidenum">
+            <a:fld id="{F7021451-1387-4CA6-816F-3879F97B5CBC}" type="slidenum">
               <a:rPr lang="en-US"/>
-              <a:t>11</a:t>
+              <a:t>10</a:t>
             </a:fld>
             <a:endParaRPr lang="en-US"/>
           </a:p>
@@ -955,7 +952,7 @@
       </p:grpSpPr>
       <p:sp>
         <p:nvSpPr>
-          <p:cNvPr id="1469283891" name="Slide Image Placeholder 1"/>
+          <p:cNvPr id="1270861045" name="Slide Image Placeholder 1"/>
           <p:cNvSpPr>
             <a:spLocks noChangeAspect="1" noGrp="1" noRot="1"/>
           </p:cNvSpPr>
@@ -967,7 +964,7 @@
       </p:sp>
       <p:sp>
         <p:nvSpPr>
-          <p:cNvPr id="1639727467" name="Notes Placeholder 2"/>
+          <p:cNvPr id="2091277502" name="Notes Placeholder 2"/>
           <p:cNvSpPr>
             <a:spLocks noGrp="1"/>
           </p:cNvSpPr>
@@ -984,16 +981,16 @@
               <a:defRPr/>
             </a:pPr>
             <a:r>
-              <a:rPr lang="en-US"/>
-              <a:t>For teachers day to day, the difference is stark: a 10-15 minute paper roll-call becomes a few seconds with Quick Select, monthly reports go from manual compilation to an instant export, and proxy attendance is prevented rather than just hoped against.</a:t>
-            </a:r>
-            <a:endParaRPr lang="en-US"/>
-          </a:p>
-        </p:txBody>
-      </p:sp>
-      <p:sp>
-        <p:nvSpPr>
-          <p:cNvPr id="1841321580" name="Slide Number Placeholder 3"/>
+              <a:rPr/>
+              <a:t>MarkIt separates duties cleanly across three roles. Admins manage the university-wide roster, sessions, and teacher assignments but cannot alter attendance records. Teachers take attendance only for their assigned sections. Students are strictly read-only: they view their own dashboard, courses, and history, manage their own password and photo, and can never mark or edit attendance.</a:t>
+            </a:r>
+            <a:endParaRPr/>
+          </a:p>
+        </p:txBody>
+      </p:sp>
+      <p:sp>
+        <p:nvSpPr>
+          <p:cNvPr id="67832073" name="Slide Number Placeholder 3"/>
           <p:cNvSpPr>
             <a:spLocks noGrp="1"/>
           </p:cNvSpPr>
@@ -1009,9 +1006,9 @@
             <a:pPr>
               <a:defRPr/>
             </a:pPr>
-            <a:fld id="{F7021451-1387-4CA6-816F-3879F97B5CBC}" type="slidenum">
+            <a:fld id="{5F15E29E-7190-6A74-6547-A05BB4D6BC16}" type="slidenum">
               <a:rPr lang="en-US"/>
-              <a:t>12</a:t>
+              <a:t>11</a:t>
             </a:fld>
             <a:endParaRPr lang="en-US"/>
           </a:p>
@@ -1044,7 +1041,7 @@
       </p:grpSpPr>
       <p:sp>
         <p:nvSpPr>
-          <p:cNvPr id="1956481450" name="Slide Image Placeholder 1"/>
+          <p:cNvPr id="153183141" name="Slide Image Placeholder 1"/>
           <p:cNvSpPr>
             <a:spLocks noChangeAspect="1" noGrp="1" noRot="1"/>
           </p:cNvSpPr>
@@ -1056,7 +1053,7 @@
       </p:sp>
       <p:sp>
         <p:nvSpPr>
-          <p:cNvPr id="1977444776" name="Notes Placeholder 2"/>
+          <p:cNvPr id="615458454" name="Notes Placeholder 2"/>
           <p:cNvSpPr>
             <a:spLocks noGrp="1"/>
           </p:cNvSpPr>
@@ -1074,7 +1071,7 @@
             </a:pPr>
             <a:r>
               <a:rPr lang="en-US"/>
-              <a:t>MarkIt ships with a fully serverless deployment: the React frontend is a static build served from Vercel's edge network, the Express backend runs as Vercel serverless functions that scale automatically with demand, and MongoDB Atlas provides a managed, auto-scaling database with built-in backups. There is no server to patch or provision.</a:t>
+              <a:t>For teachers day to day, the difference is stark: a 10-15 minute paper roll-call becomes a few seconds with Quick Select, monthly reports go from manual compilation to an instant export, and proxy attendance is prevented rather than just hoped against.</a:t>
             </a:r>
             <a:endParaRPr lang="en-US"/>
           </a:p>
@@ -1082,7 +1079,7 @@
       </p:sp>
       <p:sp>
         <p:nvSpPr>
-          <p:cNvPr id="603955122" name="Slide Number Placeholder 3"/>
+          <p:cNvPr id="73932602" name="Slide Number Placeholder 3"/>
           <p:cNvSpPr>
             <a:spLocks noGrp="1"/>
           </p:cNvSpPr>
@@ -1100,7 +1097,7 @@
             </a:pPr>
             <a:fld id="{F7021451-1387-4CA6-816F-3879F97B5CBC}" type="slidenum">
               <a:rPr lang="en-US"/>
-              <a:t>13</a:t>
+              <a:t>12</a:t>
             </a:fld>
             <a:endParaRPr lang="en-US"/>
           </a:p>
@@ -1133,7 +1130,7 @@
       </p:grpSpPr>
       <p:sp>
         <p:nvSpPr>
-          <p:cNvPr id="2052506504" name="Slide Image Placeholder 1"/>
+          <p:cNvPr id="1760217864" name="Slide Image Placeholder 1"/>
           <p:cNvSpPr>
             <a:spLocks noChangeAspect="1" noGrp="1" noRot="1"/>
           </p:cNvSpPr>
@@ -1145,7 +1142,7 @@
       </p:sp>
       <p:sp>
         <p:nvSpPr>
-          <p:cNvPr id="254904862" name="Notes Placeholder 2"/>
+          <p:cNvPr id="1127805179" name="Notes Placeholder 2"/>
           <p:cNvSpPr>
             <a:spLocks noGrp="1"/>
           </p:cNvSpPr>
@@ -1163,7 +1160,7 @@
             </a:pPr>
             <a:r>
               <a:rPr lang="en-US"/>
-              <a:t>Looking ahead, the roadmap includes QR-code self check-in, automatic SMS and email absence alerts for guardians, biometric verification for high-stakes exams, dedicated mobile apps, and richer analytics dashboards that surface attendance trends over a term.</a:t>
+              <a:t>MarkIt ships with a fully serverless deployment: the React frontend is a static build served from Vercel's edge network, the Express backend runs as Vercel serverless functions that scale automatically with demand, and MongoDB Atlas provides a managed, auto-scaling database with built-in backups. There is no server to patch or provision.</a:t>
             </a:r>
             <a:endParaRPr lang="en-US"/>
           </a:p>
@@ -1171,7 +1168,7 @@
       </p:sp>
       <p:sp>
         <p:nvSpPr>
-          <p:cNvPr id="816125136" name="Slide Number Placeholder 3"/>
+          <p:cNvPr id="757139042" name="Slide Number Placeholder 3"/>
           <p:cNvSpPr>
             <a:spLocks noGrp="1"/>
           </p:cNvSpPr>
@@ -1189,7 +1186,7 @@
             </a:pPr>
             <a:fld id="{F7021451-1387-4CA6-816F-3879F97B5CBC}" type="slidenum">
               <a:rPr lang="en-US"/>
-              <a:t>14</a:t>
+              <a:t>13</a:t>
             </a:fld>
             <a:endParaRPr lang="en-US"/>
           </a:p>
@@ -1222,7 +1219,7 @@
       </p:grpSpPr>
       <p:sp>
         <p:nvSpPr>
-          <p:cNvPr id="381604203" name="Slide Image Placeholder 1"/>
+          <p:cNvPr id="752875092" name="Slide Image Placeholder 1"/>
           <p:cNvSpPr>
             <a:spLocks noChangeAspect="1" noGrp="1" noRot="1"/>
           </p:cNvSpPr>
@@ -1234,7 +1231,7 @@
       </p:sp>
       <p:sp>
         <p:nvSpPr>
-          <p:cNvPr id="1711751549" name="Notes Placeholder 2"/>
+          <p:cNvPr id="292734397" name="Notes Placeholder 2"/>
           <p:cNvSpPr>
             <a:spLocks noGrp="1"/>
           </p:cNvSpPr>
@@ -1250,13 +1247,17 @@
             <a:pPr>
               <a:defRPr/>
             </a:pPr>
+            <a:r>
+              <a:rPr lang="en-US"/>
+              <a:t>Looking ahead, the roadmap includes QR-code self check-in, automatic SMS and email absence alerts for guardians, biometric verification for high-stakes exams, dedicated mobile apps, and richer analytics dashboards that surface attendance trends over a term.</a:t>
+            </a:r>
             <a:endParaRPr lang="en-US"/>
           </a:p>
         </p:txBody>
       </p:sp>
       <p:sp>
         <p:nvSpPr>
-          <p:cNvPr id="1648640030" name="Slide Number Placeholder 3"/>
+          <p:cNvPr id="795447650" name="Slide Number Placeholder 3"/>
           <p:cNvSpPr>
             <a:spLocks noGrp="1"/>
           </p:cNvSpPr>
@@ -1272,9 +1273,9 @@
             <a:pPr>
               <a:defRPr/>
             </a:pPr>
-            <a:fld id="{46FBD41B-9507-358D-AF39-C213BCEE2E71}" type="slidenum">
+            <a:fld id="{F7021451-1387-4CA6-816F-3879F97B5CBC}" type="slidenum">
               <a:rPr lang="en-US"/>
-              <a:t>1</a:t>
+              <a:t>14</a:t>
             </a:fld>
             <a:endParaRPr lang="en-US"/>
           </a:p>
@@ -1307,7 +1308,7 @@
       </p:grpSpPr>
       <p:sp>
         <p:nvSpPr>
-          <p:cNvPr id="1729498072" name="Slide Image Placeholder 1"/>
+          <p:cNvPr id="2138980787" name="Slide Image Placeholder 1"/>
           <p:cNvSpPr>
             <a:spLocks noChangeAspect="1" noGrp="1" noRot="1"/>
           </p:cNvSpPr>
@@ -1319,7 +1320,7 @@
       </p:sp>
       <p:sp>
         <p:nvSpPr>
-          <p:cNvPr id="1861001815" name="Notes Placeholder 2"/>
+          <p:cNvPr id="67094029" name="Notes Placeholder 2"/>
           <p:cNvSpPr>
             <a:spLocks noGrp="1"/>
           </p:cNvSpPr>
@@ -1335,13 +1336,13 @@
             <a:pPr>
               <a:defRPr/>
             </a:pPr>
-            <a:endParaRPr/>
-          </a:p>
-        </p:txBody>
-      </p:sp>
-      <p:sp>
-        <p:nvSpPr>
-          <p:cNvPr id="525917015" name="Slide Number Placeholder 3"/>
+            <a:endParaRPr lang="en-US"/>
+          </a:p>
+        </p:txBody>
+      </p:sp>
+      <p:sp>
+        <p:nvSpPr>
+          <p:cNvPr id="2005807148" name="Slide Number Placeholder 3"/>
           <p:cNvSpPr>
             <a:spLocks noGrp="1"/>
           </p:cNvSpPr>
@@ -1357,11 +1358,11 @@
             <a:pPr>
               <a:defRPr/>
             </a:pPr>
-            <a:fld id="{CD573848-80BA-DD87-0D0A-23B76C75FD81}" type="slidenum">
-              <a:rPr/>
-              <a:t/>
+            <a:fld id="{46FBD41B-9507-358D-AF39-C213BCEE2E71}" type="slidenum">
+              <a:rPr lang="en-US"/>
+              <a:t>1</a:t>
             </a:fld>
-            <a:endParaRPr/>
+            <a:endParaRPr lang="en-US"/>
           </a:p>
         </p:txBody>
       </p:sp>
@@ -1392,7 +1393,7 @@
       </p:grpSpPr>
       <p:sp>
         <p:nvSpPr>
-          <p:cNvPr id="1983284129" name="Slide Image Placeholder 1"/>
+          <p:cNvPr id="620199505" name="Slide Image Placeholder 1"/>
           <p:cNvSpPr>
             <a:spLocks noChangeAspect="1" noGrp="1" noRot="1"/>
           </p:cNvSpPr>
@@ -1404,7 +1405,7 @@
       </p:sp>
       <p:sp>
         <p:nvSpPr>
-          <p:cNvPr id="500320130" name="Notes Placeholder 2"/>
+          <p:cNvPr id="1128065393" name="Notes Placeholder 2"/>
           <p:cNvSpPr>
             <a:spLocks noGrp="1"/>
           </p:cNvSpPr>
@@ -1420,17 +1421,13 @@
             <a:pPr>
               <a:defRPr/>
             </a:pPr>
-            <a:r>
-              <a:rPr lang="en-US"/>
-              <a:t>Thank the audience and open the floor for questions. Be ready to speak to the tech stack choices, the security model, and the Quick Select feature, since those tend to draw the most questions.</a:t>
-            </a:r>
-            <a:endParaRPr lang="en-US"/>
-          </a:p>
-        </p:txBody>
-      </p:sp>
-      <p:sp>
-        <p:nvSpPr>
-          <p:cNvPr id="382723026" name="Slide Number Placeholder 3"/>
+            <a:endParaRPr/>
+          </a:p>
+        </p:txBody>
+      </p:sp>
+      <p:sp>
+        <p:nvSpPr>
+          <p:cNvPr id="1732746712" name="Slide Number Placeholder 3"/>
           <p:cNvSpPr>
             <a:spLocks noGrp="1"/>
           </p:cNvSpPr>
@@ -1446,11 +1443,11 @@
             <a:pPr>
               <a:defRPr/>
             </a:pPr>
-            <a:fld id="{F7021451-1387-4CA6-816F-3879F97B5CBC}" type="slidenum">
-              <a:rPr lang="en-US"/>
-              <a:t>16</a:t>
+            <a:fld id="{CD573848-80BA-DD87-0D0A-23B76C75FD81}" type="slidenum">
+              <a:rPr/>
+              <a:t/>
             </a:fld>
-            <a:endParaRPr lang="en-US"/>
+            <a:endParaRPr/>
           </a:p>
         </p:txBody>
       </p:sp>
@@ -1481,7 +1478,7 @@
       </p:grpSpPr>
       <p:sp>
         <p:nvSpPr>
-          <p:cNvPr id="1475063741" name="Slide Image Placeholder 1"/>
+          <p:cNvPr id="749803413" name="Slide Image Placeholder 1"/>
           <p:cNvSpPr>
             <a:spLocks noChangeAspect="1" noGrp="1" noRot="1"/>
           </p:cNvSpPr>
@@ -1493,7 +1490,7 @@
       </p:sp>
       <p:sp>
         <p:nvSpPr>
-          <p:cNvPr id="1559087120" name="Notes Placeholder 2"/>
+          <p:cNvPr id="1407365272" name="Notes Placeholder 2"/>
           <p:cNvSpPr>
             <a:spLocks noGrp="1"/>
           </p:cNvSpPr>
@@ -1519,7 +1516,7 @@
       </p:sp>
       <p:sp>
         <p:nvSpPr>
-          <p:cNvPr id="622390284" name="Slide Number Placeholder 3"/>
+          <p:cNvPr id="283503507" name="Slide Number Placeholder 3"/>
           <p:cNvSpPr>
             <a:spLocks noGrp="1"/>
           </p:cNvSpPr>
@@ -1538,6 +1535,95 @@
             <a:fld id="{F7021451-1387-4CA6-816F-3879F97B5CBC}" type="slidenum">
               <a:rPr lang="en-US"/>
               <a:t>15</a:t>
+            </a:fld>
+            <a:endParaRPr lang="en-US"/>
+          </a:p>
+        </p:txBody>
+      </p:sp>
+    </p:spTree>
+  </p:cSld>
+  <p:clrMapOvr>
+    <a:masterClrMapping/>
+  </p:clrMapOvr>
+</p:notes>
+</file>
+
+<file path=ppt/notesSlides/notesSlide20.xml><?xml version="1.0" encoding="utf-8"?>
+<p:notes xmlns:a="http://schemas.openxmlformats.org/drawingml/2006/main" xmlns:r="http://schemas.openxmlformats.org/officeDocument/2006/relationships" xmlns:p="http://schemas.openxmlformats.org/presentationml/2006/main" xmlns:m="http://schemas.openxmlformats.org/officeDocument/2006/math" xmlns:w="http://schemas.openxmlformats.org/wordprocessingml/2006/main">
+  <p:cSld name="">
+    <p:spTree>
+      <p:nvGrpSpPr>
+        <p:cNvPr id="1" name=""/>
+        <p:cNvGrpSpPr/>
+        <p:nvPr/>
+      </p:nvGrpSpPr>
+      <p:grpSpPr bwMode="auto">
+        <a:xfrm>
+          <a:off x="0" y="0"/>
+          <a:ext cx="0" cy="0"/>
+          <a:chOff x="0" y="0"/>
+          <a:chExt cx="0" cy="0"/>
+        </a:xfrm>
+      </p:grpSpPr>
+      <p:sp>
+        <p:nvSpPr>
+          <p:cNvPr id="813829618" name="Slide Image Placeholder 1"/>
+          <p:cNvSpPr>
+            <a:spLocks noChangeAspect="1" noGrp="1" noRot="1"/>
+          </p:cNvSpPr>
+          <p:nvPr>
+            <p:ph type="sldImg"/>
+          </p:nvPr>
+        </p:nvSpPr>
+        <p:spPr bwMode="auto"/>
+      </p:sp>
+      <p:sp>
+        <p:nvSpPr>
+          <p:cNvPr id="27821499" name="Notes Placeholder 2"/>
+          <p:cNvSpPr>
+            <a:spLocks noGrp="1"/>
+          </p:cNvSpPr>
+          <p:nvPr>
+            <p:ph type="body" idx="1"/>
+          </p:nvPr>
+        </p:nvSpPr>
+        <p:spPr bwMode="auto"/>
+        <p:txBody>
+          <a:bodyPr/>
+          <a:lstStyle/>
+          <a:p>
+            <a:pPr>
+              <a:defRPr/>
+            </a:pPr>
+            <a:r>
+              <a:rPr lang="en-US"/>
+              <a:t>Thank the audience and open the floor for questions. Be ready to speak to the tech stack choices, the security model, and the Quick Select feature, since those tend to draw the most questions.</a:t>
+            </a:r>
+            <a:endParaRPr lang="en-US"/>
+          </a:p>
+        </p:txBody>
+      </p:sp>
+      <p:sp>
+        <p:nvSpPr>
+          <p:cNvPr id="652231342" name="Slide Number Placeholder 3"/>
+          <p:cNvSpPr>
+            <a:spLocks noGrp="1"/>
+          </p:cNvSpPr>
+          <p:nvPr>
+            <p:ph type="sldNum" sz="quarter" idx="10"/>
+          </p:nvPr>
+        </p:nvSpPr>
+        <p:spPr bwMode="auto"/>
+        <p:txBody>
+          <a:bodyPr/>
+          <a:lstStyle/>
+          <a:p>
+            <a:pPr>
+              <a:defRPr/>
+            </a:pPr>
+            <a:fld id="{F7021451-1387-4CA6-816F-3879F97B5CBC}" type="slidenum">
+              <a:rPr lang="en-US"/>
+              <a:t>16</a:t>
             </a:fld>
             <a:endParaRPr lang="en-US"/>
           </a:p>
@@ -1570,7 +1656,7 @@
       </p:grpSpPr>
       <p:sp>
         <p:nvSpPr>
-          <p:cNvPr id="754272039" name="Slide Image Placeholder 1"/>
+          <p:cNvPr id="1564087268" name="Slide Image Placeholder 1"/>
           <p:cNvSpPr>
             <a:spLocks noChangeAspect="1" noGrp="1" noRot="1"/>
           </p:cNvSpPr>
@@ -1582,7 +1668,7 @@
       </p:sp>
       <p:sp>
         <p:nvSpPr>
-          <p:cNvPr id="1982552563" name="Notes Placeholder 2"/>
+          <p:cNvPr id="891163704" name="Notes Placeholder 2"/>
           <p:cNvSpPr>
             <a:spLocks noGrp="1"/>
           </p:cNvSpPr>
@@ -1608,7 +1694,7 @@
       </p:sp>
       <p:sp>
         <p:nvSpPr>
-          <p:cNvPr id="1270841845" name="Slide Number Placeholder 3"/>
+          <p:cNvPr id="236243724" name="Slide Number Placeholder 3"/>
           <p:cNvSpPr>
             <a:spLocks noGrp="1"/>
           </p:cNvSpPr>
@@ -1659,7 +1745,7 @@
       </p:grpSpPr>
       <p:sp>
         <p:nvSpPr>
-          <p:cNvPr id="277650263" name="Slide Image Placeholder 1"/>
+          <p:cNvPr id="694992334" name="Slide Image Placeholder 1"/>
           <p:cNvSpPr>
             <a:spLocks noChangeAspect="1" noGrp="1" noRot="1"/>
           </p:cNvSpPr>
@@ -1671,7 +1757,7 @@
       </p:sp>
       <p:sp>
         <p:nvSpPr>
-          <p:cNvPr id="834518881" name="Notes Placeholder 2"/>
+          <p:cNvPr id="1408429592" name="Notes Placeholder 2"/>
           <p:cNvSpPr>
             <a:spLocks noGrp="1"/>
           </p:cNvSpPr>
@@ -1697,7 +1783,7 @@
       </p:sp>
       <p:sp>
         <p:nvSpPr>
-          <p:cNvPr id="863450364" name="Slide Number Placeholder 3"/>
+          <p:cNvPr id="1717265713" name="Slide Number Placeholder 3"/>
           <p:cNvSpPr>
             <a:spLocks noGrp="1"/>
           </p:cNvSpPr>
@@ -1748,7 +1834,7 @@
       </p:grpSpPr>
       <p:sp>
         <p:nvSpPr>
-          <p:cNvPr id="1588903034" name="Slide Image Placeholder 1"/>
+          <p:cNvPr id="551009241" name="Slide Image Placeholder 1"/>
           <p:cNvSpPr>
             <a:spLocks noChangeAspect="1" noGrp="1" noRot="1"/>
           </p:cNvSpPr>
@@ -1760,7 +1846,7 @@
       </p:sp>
       <p:sp>
         <p:nvSpPr>
-          <p:cNvPr id="1715161688" name="Notes Placeholder 2"/>
+          <p:cNvPr id="515791929" name="Notes Placeholder 2"/>
           <p:cNvSpPr>
             <a:spLocks noGrp="1"/>
           </p:cNvSpPr>
@@ -1786,7 +1872,7 @@
       </p:sp>
       <p:sp>
         <p:nvSpPr>
-          <p:cNvPr id="1406296517" name="Slide Number Placeholder 3"/>
+          <p:cNvPr id="1071427782" name="Slide Number Placeholder 3"/>
           <p:cNvSpPr>
             <a:spLocks noGrp="1"/>
           </p:cNvSpPr>
@@ -1837,7 +1923,7 @@
       </p:grpSpPr>
       <p:sp>
         <p:nvSpPr>
-          <p:cNvPr id="496962855" name="Slide Image Placeholder 1"/>
+          <p:cNvPr id="972834427" name="Slide Image Placeholder 1"/>
           <p:cNvSpPr>
             <a:spLocks noChangeAspect="1" noGrp="1" noRot="1"/>
           </p:cNvSpPr>
@@ -1849,7 +1935,7 @@
       </p:sp>
       <p:sp>
         <p:nvSpPr>
-          <p:cNvPr id="124163035" name="Notes Placeholder 2"/>
+          <p:cNvPr id="739705261" name="Notes Placeholder 2"/>
           <p:cNvSpPr>
             <a:spLocks noGrp="1"/>
           </p:cNvSpPr>
@@ -1875,7 +1961,7 @@
       </p:sp>
       <p:sp>
         <p:nvSpPr>
-          <p:cNvPr id="1471855252" name="Slide Number Placeholder 3"/>
+          <p:cNvPr id="1535531513" name="Slide Number Placeholder 3"/>
           <p:cNvSpPr>
             <a:spLocks noGrp="1"/>
           </p:cNvSpPr>
@@ -1926,7 +2012,7 @@
       </p:grpSpPr>
       <p:sp>
         <p:nvSpPr>
-          <p:cNvPr id="1523936969" name="Slide Image Placeholder 1"/>
+          <p:cNvPr id="257194497" name="Slide Image Placeholder 1"/>
           <p:cNvSpPr>
             <a:spLocks noChangeAspect="1" noGrp="1" noRot="1"/>
           </p:cNvSpPr>
@@ -1938,7 +2024,7 @@
       </p:sp>
       <p:sp>
         <p:nvSpPr>
-          <p:cNvPr id="148693723" name="Notes Placeholder 2"/>
+          <p:cNvPr id="1834186386" name="Notes Placeholder 2"/>
           <p:cNvSpPr>
             <a:spLocks noGrp="1"/>
           </p:cNvSpPr>
@@ -1964,7 +2050,7 @@
       </p:sp>
       <p:sp>
         <p:nvSpPr>
-          <p:cNvPr id="294035266" name="Slide Number Placeholder 3"/>
+          <p:cNvPr id="929448184" name="Slide Number Placeholder 3"/>
           <p:cNvSpPr>
             <a:spLocks noGrp="1"/>
           </p:cNvSpPr>
@@ -2015,7 +2101,7 @@
       </p:grpSpPr>
       <p:sp>
         <p:nvSpPr>
-          <p:cNvPr id="272533082" name="Slide Image Placeholder 1"/>
+          <p:cNvPr id="300704597" name="Slide Image Placeholder 1"/>
           <p:cNvSpPr>
             <a:spLocks noChangeAspect="1" noGrp="1" noRot="1"/>
           </p:cNvSpPr>
@@ -2027,7 +2113,7 @@
       </p:sp>
       <p:sp>
         <p:nvSpPr>
-          <p:cNvPr id="1184813837" name="Notes Placeholder 2"/>
+          <p:cNvPr id="312730915" name="Notes Placeholder 2"/>
           <p:cNvSpPr>
             <a:spLocks noGrp="1"/>
           </p:cNvSpPr>
@@ -2053,7 +2139,7 @@
       </p:sp>
       <p:sp>
         <p:nvSpPr>
-          <p:cNvPr id="317050981" name="Slide Number Placeholder 3"/>
+          <p:cNvPr id="1821933091" name="Slide Number Placeholder 3"/>
           <p:cNvSpPr>
             <a:spLocks noGrp="1"/>
           </p:cNvSpPr>
@@ -2104,7 +2190,7 @@
       </p:grpSpPr>
       <p:sp>
         <p:nvSpPr>
-          <p:cNvPr id="859249165" name="Slide Image Placeholder 1"/>
+          <p:cNvPr id="2051216881" name="Slide Image Placeholder 1"/>
           <p:cNvSpPr>
             <a:spLocks noChangeAspect="1" noGrp="1" noRot="1"/>
           </p:cNvSpPr>
@@ -2116,7 +2202,7 @@
       </p:sp>
       <p:sp>
         <p:nvSpPr>
-          <p:cNvPr id="1649141823" name="Notes Placeholder 2"/>
+          <p:cNvPr id="917979046" name="Notes Placeholder 2"/>
           <p:cNvSpPr>
             <a:spLocks noGrp="1"/>
           </p:cNvSpPr>
@@ -2142,7 +2228,7 @@
       </p:sp>
       <p:sp>
         <p:nvSpPr>
-          <p:cNvPr id="1315376915" name="Slide Number Placeholder 3"/>
+          <p:cNvPr id="30410792" name="Slide Number Placeholder 3"/>
           <p:cNvSpPr>
             <a:spLocks noGrp="1"/>
           </p:cNvSpPr>
@@ -2507,7 +2593,7 @@
       </p:grpSpPr>
       <p:pic>
         <p:nvPicPr>
-          <p:cNvPr id="900149773" name="Image 0" descr="preencoded.png"/>
+          <p:cNvPr id="370161673" name="Image 0" descr="preencoded.png"/>
           <p:cNvPicPr>
             <a:picLocks noChangeAspect="1"/>
           </p:cNvPicPr>
@@ -2529,7 +2615,7 @@
       </p:pic>
       <p:pic>
         <p:nvPicPr>
-          <p:cNvPr id="687677856" name="Image 1" descr="preencoded.png"/>
+          <p:cNvPr id="618146814" name="Image 1" descr="preencoded.png"/>
           <p:cNvPicPr>
             <a:picLocks noChangeAspect="1"/>
           </p:cNvPicPr>
@@ -2551,7 +2637,7 @@
       </p:pic>
       <p:sp>
         <p:nvSpPr>
-          <p:cNvPr id="1021051317" name="Text 0"/>
+          <p:cNvPr id="2006069492" name="Text 0"/>
           <p:cNvSpPr/>
           <p:nvPr/>
         </p:nvSpPr>
@@ -2591,7 +2677,7 @@
       </p:sp>
       <p:sp>
         <p:nvSpPr>
-          <p:cNvPr id="2020973763" name="Text 1"/>
+          <p:cNvPr id="762986180" name="Text 1"/>
           <p:cNvSpPr/>
           <p:nvPr/>
         </p:nvSpPr>
@@ -2631,7 +2717,7 @@
       </p:sp>
       <p:sp>
         <p:nvSpPr>
-          <p:cNvPr id="280036075" name="Text 2"/>
+          <p:cNvPr id="896495429" name="Text 2"/>
           <p:cNvSpPr/>
           <p:nvPr/>
         </p:nvSpPr>
@@ -2671,7 +2757,7 @@
       </p:sp>
       <p:sp>
         <p:nvSpPr>
-          <p:cNvPr id="899723947" name="Text 3"/>
+          <p:cNvPr id="1834092880" name="Text 3"/>
           <p:cNvSpPr/>
           <p:nvPr/>
         </p:nvSpPr>
@@ -2751,7 +2837,7 @@
       </p:grpSpPr>
       <p:sp>
         <p:nvSpPr>
-          <p:cNvPr id="1211177658" name="Text 0"/>
+          <p:cNvPr id="252180674" name="Text 0"/>
           <p:cNvSpPr/>
           <p:nvPr/>
         </p:nvSpPr>
@@ -2791,7 +2877,7 @@
       </p:sp>
       <p:sp>
         <p:nvSpPr>
-          <p:cNvPr id="66968958" name="Text 1"/>
+          <p:cNvPr id="156086084" name="Text 1"/>
           <p:cNvSpPr/>
           <p:nvPr/>
         </p:nvSpPr>
@@ -2831,7 +2917,7 @@
       </p:sp>
       <p:sp>
         <p:nvSpPr>
-          <p:cNvPr id="88753838" name="Text 2"/>
+          <p:cNvPr id="911317718" name="Text 2"/>
           <p:cNvSpPr/>
           <p:nvPr/>
         </p:nvSpPr>
@@ -2871,7 +2957,7 @@
       </p:sp>
       <p:pic>
         <p:nvPicPr>
-          <p:cNvPr id="1941253752" name="Image 0" descr="preencoded.png"/>
+          <p:cNvPr id="1618276133" name="Image 0" descr="preencoded.png"/>
           <p:cNvPicPr>
             <a:picLocks noChangeAspect="1"/>
           </p:cNvPicPr>
@@ -2893,7 +2979,7 @@
       </p:pic>
       <p:sp>
         <p:nvSpPr>
-          <p:cNvPr id="740727854" name="Text 3"/>
+          <p:cNvPr id="1696447138" name="Text 3"/>
           <p:cNvSpPr/>
           <p:nvPr/>
         </p:nvSpPr>
@@ -2933,7 +3019,7 @@
       </p:sp>
       <p:sp>
         <p:nvSpPr>
-          <p:cNvPr id="859429665" name="Text 4"/>
+          <p:cNvPr id="621220845" name="Text 4"/>
           <p:cNvSpPr/>
           <p:nvPr/>
         </p:nvSpPr>
@@ -2973,7 +3059,7 @@
       </p:sp>
       <p:pic>
         <p:nvPicPr>
-          <p:cNvPr id="456793423" name="Image 1" descr="preencoded.png"/>
+          <p:cNvPr id="1651434310" name="Image 1" descr="preencoded.png"/>
           <p:cNvPicPr>
             <a:picLocks noChangeAspect="1"/>
           </p:cNvPicPr>
@@ -2995,7 +3081,7 @@
       </p:pic>
       <p:sp>
         <p:nvSpPr>
-          <p:cNvPr id="1708588510" name="Text 5"/>
+          <p:cNvPr id="306582360" name="Text 5"/>
           <p:cNvSpPr/>
           <p:nvPr/>
         </p:nvSpPr>
@@ -3035,7 +3121,7 @@
       </p:sp>
       <p:sp>
         <p:nvSpPr>
-          <p:cNvPr id="800875444" name="Text 6"/>
+          <p:cNvPr id="416438038" name="Text 6"/>
           <p:cNvSpPr/>
           <p:nvPr/>
         </p:nvSpPr>
@@ -3075,7 +3161,7 @@
       </p:sp>
       <p:sp>
         <p:nvSpPr>
-          <p:cNvPr id="1997168638" name="Text 7"/>
+          <p:cNvPr id="1795610834" name="Text 7"/>
           <p:cNvSpPr/>
           <p:nvPr/>
         </p:nvSpPr>
@@ -3115,7 +3201,7 @@
       </p:sp>
       <p:sp>
         <p:nvSpPr>
-          <p:cNvPr id="1810661841" name="Shape 8"/>
+          <p:cNvPr id="1139372119" name="Shape 8"/>
           <p:cNvSpPr/>
           <p:nvPr/>
         </p:nvSpPr>
@@ -3137,7 +3223,7 @@
       </p:sp>
       <p:pic>
         <p:nvPicPr>
-          <p:cNvPr id="909185721" name="Image 2" descr="preencoded.png"/>
+          <p:cNvPr id="193775977" name="Image 2" descr="preencoded.png"/>
           <p:cNvPicPr>
             <a:picLocks noChangeAspect="1"/>
           </p:cNvPicPr>
@@ -3159,7 +3245,7 @@
       </p:pic>
       <p:sp>
         <p:nvSpPr>
-          <p:cNvPr id="1238334851" name="Text 9"/>
+          <p:cNvPr id="1803550351" name="Text 9"/>
           <p:cNvSpPr/>
           <p:nvPr/>
         </p:nvSpPr>
@@ -3199,7 +3285,7 @@
       </p:sp>
       <p:sp>
         <p:nvSpPr>
-          <p:cNvPr id="539239055" name="Text 10"/>
+          <p:cNvPr id="934609058" name="Text 10"/>
           <p:cNvSpPr/>
           <p:nvPr/>
         </p:nvSpPr>
@@ -3239,7 +3325,7 @@
       </p:sp>
       <p:sp>
         <p:nvSpPr>
-          <p:cNvPr id="378384164" name="Shape 11"/>
+          <p:cNvPr id="1537517881" name="Shape 11"/>
           <p:cNvSpPr/>
           <p:nvPr/>
         </p:nvSpPr>
@@ -3263,7 +3349,7 @@
       </p:sp>
       <p:sp>
         <p:nvSpPr>
-          <p:cNvPr id="331720052" name="Text 12"/>
+          <p:cNvPr id="487689877" name="Text 12"/>
           <p:cNvSpPr/>
           <p:nvPr/>
         </p:nvSpPr>
@@ -3303,7 +3389,7 @@
       </p:sp>
       <p:sp>
         <p:nvSpPr>
-          <p:cNvPr id="1726302432" name="Text 13"/>
+          <p:cNvPr id="418163086" name="Text 13"/>
           <p:cNvSpPr/>
           <p:nvPr/>
         </p:nvSpPr>
@@ -3343,7 +3429,7 @@
       </p:sp>
       <p:sp>
         <p:nvSpPr>
-          <p:cNvPr id="2040326049" name="Text 14"/>
+          <p:cNvPr id="1896617963" name="Text 14"/>
           <p:cNvSpPr/>
           <p:nvPr/>
         </p:nvSpPr>
@@ -3383,7 +3469,7 @@
       </p:sp>
       <p:sp>
         <p:nvSpPr>
-          <p:cNvPr id="1700172541" name="Text 15"/>
+          <p:cNvPr id="1375400001" name="Text 15"/>
           <p:cNvSpPr/>
           <p:nvPr/>
         </p:nvSpPr>
@@ -3423,7 +3509,7 @@
       </p:sp>
       <p:sp>
         <p:nvSpPr>
-          <p:cNvPr id="1118398008" name="Text 16"/>
+          <p:cNvPr id="1774811298" name="Text 16"/>
           <p:cNvSpPr/>
           <p:nvPr/>
         </p:nvSpPr>
@@ -3463,7 +3549,7 @@
       </p:sp>
       <p:sp>
         <p:nvSpPr>
-          <p:cNvPr id="1615445219" name="Text 17"/>
+          <p:cNvPr id="102860229" name="Text 17"/>
           <p:cNvSpPr/>
           <p:nvPr/>
         </p:nvSpPr>
@@ -3503,7 +3589,7 @@
       </p:sp>
       <p:pic>
         <p:nvPicPr>
-          <p:cNvPr id="175586397" name="Image 1" descr="preencoded.png"/>
+          <p:cNvPr id="1926575897" name="Image 1" descr="preencoded.png"/>
           <p:cNvPicPr>
             <a:picLocks noChangeAspect="1"/>
           </p:cNvPicPr>
@@ -3525,7 +3611,7 @@
       </p:pic>
       <p:sp>
         <p:nvSpPr>
-          <p:cNvPr id="451919223" name="Text 5"/>
+          <p:cNvPr id="176797725" name="Text 5"/>
           <p:cNvSpPr/>
           <p:nvPr/>
         </p:nvSpPr>
@@ -3565,7 +3651,7 @@
       </p:sp>
       <p:sp>
         <p:nvSpPr>
-          <p:cNvPr id="466534095" name="Text 6"/>
+          <p:cNvPr id="1401912907" name="Text 6"/>
           <p:cNvSpPr/>
           <p:nvPr/>
         </p:nvSpPr>
@@ -3605,7 +3691,7 @@
       </p:sp>
       <p:pic>
         <p:nvPicPr>
-          <p:cNvPr id="1302800682" name=""/>
+          <p:cNvPr id="1567321296" name=""/>
           <p:cNvPicPr>
             <a:picLocks noChangeAspect="1"/>
           </p:cNvPicPr>
@@ -3660,7 +3746,7 @@
       </p:grpSpPr>
       <p:sp>
         <p:nvSpPr>
-          <p:cNvPr id="609570713" name="TextBox 1"/>
+          <p:cNvPr id="382169674" name="TextBox 1"/>
           <p:cNvSpPr txBox="1"/>
           <p:nvPr/>
         </p:nvSpPr>
@@ -3698,7 +3784,7 @@
       </p:sp>
       <p:sp>
         <p:nvSpPr>
-          <p:cNvPr id="1003503354" name="TextBox 2"/>
+          <p:cNvPr id="1517435657" name="TextBox 2"/>
           <p:cNvSpPr txBox="1"/>
           <p:nvPr/>
         </p:nvSpPr>
@@ -3736,7 +3822,7 @@
       </p:sp>
       <p:sp>
         <p:nvSpPr>
-          <p:cNvPr id="1873544758" name="TextBox 3"/>
+          <p:cNvPr id="1736804108" name="TextBox 3"/>
           <p:cNvSpPr txBox="1"/>
           <p:nvPr/>
         </p:nvSpPr>
@@ -3774,7 +3860,7 @@
       </p:sp>
       <p:sp>
         <p:nvSpPr>
-          <p:cNvPr id="1526889685" name="TextBox 33"/>
+          <p:cNvPr id="1877261483" name="TextBox 33"/>
           <p:cNvSpPr txBox="1"/>
           <p:nvPr/>
         </p:nvSpPr>
@@ -3812,7 +3898,7 @@
       </p:sp>
       <p:sp>
         <p:nvSpPr>
-          <p:cNvPr id="684336052" name="TextBox 34"/>
+          <p:cNvPr id="1676972356" name="TextBox 34"/>
           <p:cNvSpPr txBox="1"/>
           <p:nvPr/>
         </p:nvSpPr>
@@ -3850,7 +3936,7 @@
       </p:sp>
       <p:pic>
         <p:nvPicPr>
-          <p:cNvPr id="2116687503" name=""/>
+          <p:cNvPr id="688414260" name=""/>
           <p:cNvPicPr>
             <a:picLocks noChangeAspect="1"/>
           </p:cNvPicPr>
@@ -3862,418 +3948,14 @@
         </p:blipFill>
         <p:spPr bwMode="auto">
           <a:xfrm flipH="0" flipV="0">
-            <a:off x="548640" y="1961863"/>
-            <a:ext cx="6510786" cy="4228814"/>
+            <a:off x="2257448" y="1854001"/>
+            <a:ext cx="7676797" cy="4318198"/>
           </a:xfrm>
           <a:prstGeom prst="rect">
             <a:avLst/>
           </a:prstGeom>
         </p:spPr>
       </p:pic>
-      <p:sp>
-        <p:nvSpPr>
-          <p:cNvPr id="930734829" name="Rounded Rectangle 27"/>
-          <p:cNvSpPr/>
-          <p:nvPr/>
-        </p:nvSpPr>
-        <p:spPr bwMode="auto">
-          <a:xfrm flipH="0" flipV="0">
-            <a:off x="7609312" y="1961863"/>
-            <a:ext cx="4122439" cy="1970246"/>
-          </a:xfrm>
-          <a:prstGeom prst="roundRect">
-            <a:avLst>
-              <a:gd name="adj" fmla="val 5128"/>
-            </a:avLst>
-          </a:prstGeom>
-          <a:solidFill>
-            <a:srgbClr val="F8FAFC"/>
-          </a:solidFill>
-          <a:ln w="12700">
-            <a:solidFill>
-              <a:srgbClr val="E2E8F0"/>
-            </a:solidFill>
-          </a:ln>
-          <a:effectLst/>
-        </p:spPr>
-        <p:style>
-          <a:lnRef idx="1">
-            <a:schemeClr val="accent1"/>
-          </a:lnRef>
-          <a:fillRef idx="3">
-            <a:schemeClr val="accent1"/>
-          </a:fillRef>
-          <a:effectRef idx="2">
-            <a:schemeClr val="accent1"/>
-          </a:effectRef>
-          <a:fontRef idx="minor">
-            <a:schemeClr val="lt1"/>
-          </a:fontRef>
-        </p:style>
-        <p:txBody>
-          <a:bodyPr rtlCol="0" anchor="ctr"/>
-          <a:lstStyle/>
-          <a:p>
-            <a:pPr algn="ctr">
-              <a:defRPr/>
-            </a:pPr>
-            <a:endParaRPr/>
-          </a:p>
-        </p:txBody>
-      </p:sp>
-      <p:sp>
-        <p:nvSpPr>
-          <p:cNvPr id="707030150" name="TextBox 28"/>
-          <p:cNvSpPr txBox="1"/>
-          <p:nvPr/>
-        </p:nvSpPr>
-        <p:spPr bwMode="auto">
-          <a:xfrm flipH="0" flipV="0">
-            <a:off x="7774309" y="2267902"/>
-            <a:ext cx="3639201" cy="228960"/>
-          </a:xfrm>
-          <a:prstGeom prst="rect">
-            <a:avLst/>
-          </a:prstGeom>
-          <a:noFill/>
-        </p:spPr>
-        <p:txBody>
-          <a:bodyPr wrap="square" lIns="0" tIns="0" rIns="0" bIns="0" anchor="t">
-            <a:spAutoFit/>
-          </a:bodyPr>
-          <a:lstStyle/>
-          <a:p>
-            <a:pPr>
-              <a:defRPr/>
-            </a:pPr>
-            <a:r>
-              <a:rPr sz="1500" b="1">
-                <a:solidFill>
-                  <a:srgbClr val="0F172A"/>
-                </a:solidFill>
-                <a:latin typeface="Arial"/>
-              </a:rPr>
-              <a:t>Cheat-proof by design</a:t>
-            </a:r>
-            <a:endParaRPr/>
-          </a:p>
-        </p:txBody>
-      </p:sp>
-      <p:sp>
-        <p:nvSpPr>
-          <p:cNvPr id="915306176" name="TextBox 29"/>
-          <p:cNvSpPr txBox="1"/>
-          <p:nvPr/>
-        </p:nvSpPr>
-        <p:spPr bwMode="auto">
-          <a:xfrm flipH="0" flipV="0">
-            <a:off x="7795095" y="2651950"/>
-            <a:ext cx="3618416" cy="1164289"/>
-          </a:xfrm>
-          <a:prstGeom prst="rect">
-            <a:avLst/>
-          </a:prstGeom>
-          <a:noFill/>
-        </p:spPr>
-        <p:txBody>
-          <a:bodyPr wrap="square" lIns="0" tIns="0" rIns="0" bIns="0" anchor="t">
-            <a:spAutoFit/>
-          </a:bodyPr>
-          <a:lstStyle/>
-          <a:p>
-            <a:pPr>
-              <a:lnSpc>
-                <a:spcPct val="108000"/>
-              </a:lnSpc>
-              <a:spcAft>
-                <a:spcPts val="499"/>
-              </a:spcAft>
-              <a:defRPr/>
-            </a:pPr>
-            <a:r>
-              <a:rPr sz="1050" b="1">
-                <a:solidFill>
-                  <a:srgbClr val="4F46E5"/>
-                </a:solidFill>
-                <a:latin typeface="Calibri"/>
-              </a:rPr>
-              <a:t>•  </a:t>
-            </a:r>
-            <a:r>
-              <a:rPr sz="1050" b="0">
-                <a:solidFill>
-                  <a:srgbClr val="475569"/>
-                </a:solidFill>
-                <a:latin typeface="Calibri"/>
-              </a:rPr>
-              <a:t>Tokens expire in ~30 seconds — screenshots are worthless to absent friends</a:t>
-            </a:r>
-            <a:endParaRPr/>
-          </a:p>
-          <a:p>
-            <a:pPr>
-              <a:lnSpc>
-                <a:spcPct val="108000"/>
-              </a:lnSpc>
-              <a:spcAft>
-                <a:spcPts val="499"/>
-              </a:spcAft>
-              <a:defRPr/>
-            </a:pPr>
-            <a:r>
-              <a:rPr sz="1050" b="1">
-                <a:solidFill>
-                  <a:srgbClr val="4F46E5"/>
-                </a:solidFill>
-                <a:latin typeface="Calibri"/>
-              </a:rPr>
-              <a:t>•  </a:t>
-            </a:r>
-            <a:r>
-              <a:rPr sz="1050" b="0">
-                <a:solidFill>
-                  <a:srgbClr val="475569"/>
-                </a:solidFill>
-                <a:latin typeface="Calibri"/>
-              </a:rPr>
-              <a:t>Every credential is cryptographically bound to one student's device</a:t>
-            </a:r>
-            <a:endParaRPr/>
-          </a:p>
-          <a:p>
-            <a:pPr>
-              <a:lnSpc>
-                <a:spcPct val="108000"/>
-              </a:lnSpc>
-              <a:spcAft>
-                <a:spcPts val="499"/>
-              </a:spcAft>
-              <a:defRPr/>
-            </a:pPr>
-            <a:r>
-              <a:rPr sz="1050" b="1">
-                <a:solidFill>
-                  <a:srgbClr val="4F46E5"/>
-                </a:solidFill>
-                <a:latin typeface="Calibri"/>
-              </a:rPr>
-              <a:t>•  </a:t>
-            </a:r>
-            <a:r>
-              <a:rPr sz="1050" b="1">
-                <a:solidFill>
-                  <a:srgbClr val="0F172A"/>
-                </a:solidFill>
-                <a:latin typeface="Calibri"/>
-              </a:rPr>
-              <a:t>Biometric data never leaves the phone — only a signed proof reaches the server</a:t>
-            </a:r>
-            <a:endParaRPr/>
-          </a:p>
-        </p:txBody>
-      </p:sp>
-      <p:sp>
-        <p:nvSpPr>
-          <p:cNvPr id="2105221758" name="Rounded Rectangle 30"/>
-          <p:cNvSpPr/>
-          <p:nvPr/>
-        </p:nvSpPr>
-        <p:spPr bwMode="auto">
-          <a:xfrm flipH="0" flipV="0">
-            <a:off x="7609312" y="4143374"/>
-            <a:ext cx="4122439" cy="2047303"/>
-          </a:xfrm>
-          <a:prstGeom prst="roundRect">
-            <a:avLst>
-              <a:gd name="adj" fmla="val 5128"/>
-            </a:avLst>
-          </a:prstGeom>
-          <a:solidFill>
-            <a:srgbClr val="F8FAFC"/>
-          </a:solidFill>
-          <a:ln w="12700">
-            <a:solidFill>
-              <a:srgbClr val="E2E8F0"/>
-            </a:solidFill>
-          </a:ln>
-          <a:effectLst/>
-        </p:spPr>
-        <p:style>
-          <a:lnRef idx="1">
-            <a:schemeClr val="accent1"/>
-          </a:lnRef>
-          <a:fillRef idx="3">
-            <a:schemeClr val="accent1"/>
-          </a:fillRef>
-          <a:effectRef idx="2">
-            <a:schemeClr val="accent1"/>
-          </a:effectRef>
-          <a:fontRef idx="minor">
-            <a:schemeClr val="lt1"/>
-          </a:fontRef>
-        </p:style>
-        <p:txBody>
-          <a:bodyPr rtlCol="0" anchor="ctr"/>
-          <a:lstStyle/>
-          <a:p>
-            <a:pPr algn="ctr">
-              <a:defRPr/>
-            </a:pPr>
-            <a:endParaRPr/>
-          </a:p>
-        </p:txBody>
-      </p:sp>
-      <p:sp>
-        <p:nvSpPr>
-          <p:cNvPr id="186665110" name="TextBox 31"/>
-          <p:cNvSpPr txBox="1"/>
-          <p:nvPr/>
-        </p:nvSpPr>
-        <p:spPr bwMode="auto">
-          <a:xfrm flipH="0" flipV="0">
-            <a:off x="7763600" y="4501652"/>
-            <a:ext cx="3639895" cy="228960"/>
-          </a:xfrm>
-          <a:prstGeom prst="rect">
-            <a:avLst/>
-          </a:prstGeom>
-          <a:noFill/>
-        </p:spPr>
-        <p:txBody>
-          <a:bodyPr wrap="square" lIns="0" tIns="0" rIns="0" bIns="0" anchor="t">
-            <a:spAutoFit/>
-          </a:bodyPr>
-          <a:lstStyle/>
-          <a:p>
-            <a:pPr>
-              <a:defRPr/>
-            </a:pPr>
-            <a:r>
-              <a:rPr sz="1500" b="1">
-                <a:solidFill>
-                  <a:srgbClr val="0F172A"/>
-                </a:solidFill>
-                <a:latin typeface="Arial"/>
-              </a:rPr>
-              <a:t>Teacher stays in command</a:t>
-            </a:r>
-            <a:endParaRPr/>
-          </a:p>
-        </p:txBody>
-      </p:sp>
-      <p:sp>
-        <p:nvSpPr>
-          <p:cNvPr id="908936869" name="TextBox 32"/>
-          <p:cNvSpPr txBox="1"/>
-          <p:nvPr/>
-        </p:nvSpPr>
-        <p:spPr bwMode="auto">
-          <a:xfrm flipH="0" flipV="0">
-            <a:off x="7783925" y="4940843"/>
-            <a:ext cx="3619110" cy="818646"/>
-          </a:xfrm>
-          <a:prstGeom prst="rect">
-            <a:avLst/>
-          </a:prstGeom>
-          <a:noFill/>
-        </p:spPr>
-        <p:txBody>
-          <a:bodyPr wrap="square" lIns="0" tIns="0" rIns="0" bIns="0" anchor="t">
-            <a:spAutoFit/>
-          </a:bodyPr>
-          <a:lstStyle/>
-          <a:p>
-            <a:pPr>
-              <a:lnSpc>
-                <a:spcPct val="108000"/>
-              </a:lnSpc>
-              <a:spcAft>
-                <a:spcPts val="499"/>
-              </a:spcAft>
-              <a:defRPr/>
-            </a:pPr>
-            <a:r>
-              <a:rPr sz="1050" b="1">
-                <a:solidFill>
-                  <a:srgbClr val="4F46E5"/>
-                </a:solidFill>
-                <a:latin typeface="Calibri"/>
-              </a:rPr>
-              <a:t>•  </a:t>
-            </a:r>
-            <a:r>
-              <a:rPr sz="1050" b="0">
-                <a:solidFill>
-                  <a:srgbClr val="475569"/>
-                </a:solidFill>
-                <a:latin typeface="Calibri"/>
-              </a:rPr>
-              <a:t>Verified students auto-tick on the projected roster in real time</a:t>
-            </a:r>
-            <a:endParaRPr/>
-          </a:p>
-          <a:p>
-            <a:pPr>
-              <a:lnSpc>
-                <a:spcPct val="108000"/>
-              </a:lnSpc>
-              <a:spcAft>
-                <a:spcPts val="499"/>
-              </a:spcAft>
-              <a:defRPr/>
-            </a:pPr>
-            <a:r>
-              <a:rPr sz="1050" b="1">
-                <a:solidFill>
-                  <a:srgbClr val="4F46E5"/>
-                </a:solidFill>
-                <a:latin typeface="Calibri"/>
-              </a:rPr>
-              <a:t>•  </a:t>
-            </a:r>
-            <a:r>
-              <a:rPr sz="1050" b="0">
-                <a:solidFill>
-                  <a:srgbClr val="475569"/>
-                </a:solidFill>
-                <a:latin typeface="Calibri"/>
-              </a:rPr>
-              <a:t>Manual selection stays available side-by-side as a fallback</a:t>
-            </a:r>
-            <a:endParaRPr/>
-          </a:p>
-          <a:p>
-            <a:pPr>
-              <a:lnSpc>
-                <a:spcPct val="108000"/>
-              </a:lnSpc>
-              <a:spcAft>
-                <a:spcPts val="499"/>
-              </a:spcAft>
-              <a:defRPr/>
-            </a:pPr>
-            <a:r>
-              <a:rPr sz="1050" b="1">
-                <a:solidFill>
-                  <a:srgbClr val="4F46E5"/>
-                </a:solidFill>
-                <a:latin typeface="Calibri"/>
-              </a:rPr>
-              <a:t>•  </a:t>
-            </a:r>
-            <a:r>
-              <a:rPr sz="1050" b="1">
-                <a:solidFill>
-                  <a:srgbClr val="0F172A"/>
-                </a:solidFill>
-                <a:latin typeface="Calibri"/>
-              </a:rPr>
-              <a:t>Attendance is written to the database only after teacher review &amp; submit</a:t>
-            </a:r>
-            <a:endParaRPr/>
-          </a:p>
-        </p:txBody>
-      </p:sp>
     </p:spTree>
   </p:cSld>
   <p:clrMapOvr>
@@ -4291,6 +3973,655 @@
 </file>
 
 <file path=ppt/slides/slide12.xml><?xml version="1.0" encoding="utf-8"?>
+<p:sld xmlns:a="http://schemas.openxmlformats.org/drawingml/2006/main" xmlns:r="http://schemas.openxmlformats.org/officeDocument/2006/relationships" xmlns:p="http://schemas.openxmlformats.org/presentationml/2006/main" xmlns:m="http://schemas.openxmlformats.org/officeDocument/2006/math" xmlns:w="http://schemas.openxmlformats.org/wordprocessingml/2006/main" xmlns:mc="http://schemas.openxmlformats.org/markup-compatibility/2006" showMasterPhAnim="0" showMasterSp="1" show="1">
+  <p:cSld name="">
+    <p:spTree>
+      <p:nvGrpSpPr>
+        <p:cNvPr id="1" name=""/>
+        <p:cNvGrpSpPr/>
+        <p:nvPr/>
+      </p:nvGrpSpPr>
+      <p:grpSpPr bwMode="auto">
+        <a:xfrm>
+          <a:off x="0" y="0"/>
+          <a:ext cx="0" cy="0"/>
+          <a:chOff x="0" y="0"/>
+          <a:chExt cx="0" cy="0"/>
+        </a:xfrm>
+      </p:grpSpPr>
+      <p:sp>
+        <p:nvSpPr>
+          <p:cNvPr id="2112911429" name="TextBox 1"/>
+          <p:cNvSpPr txBox="1"/>
+          <p:nvPr/>
+        </p:nvSpPr>
+        <p:spPr bwMode="auto">
+          <a:xfrm>
+            <a:off x="548640" y="384048"/>
+            <a:ext cx="10515600" cy="274320"/>
+          </a:xfrm>
+          <a:prstGeom prst="rect">
+            <a:avLst/>
+          </a:prstGeom>
+          <a:noFill/>
+        </p:spPr>
+        <p:txBody>
+          <a:bodyPr wrap="square" lIns="0" tIns="0" rIns="0" bIns="0" anchor="t">
+            <a:spAutoFit/>
+          </a:bodyPr>
+          <a:lstStyle/>
+          <a:p>
+            <a:pPr>
+              <a:defRPr/>
+            </a:pPr>
+            <a:r>
+              <a:rPr sz="1200" b="1">
+                <a:solidFill>
+                  <a:srgbClr val="4F46E5"/>
+                </a:solidFill>
+                <a:latin typeface="Calibri"/>
+              </a:rPr>
+              <a:t>CORE FEATURE</a:t>
+            </a:r>
+            <a:endParaRPr/>
+          </a:p>
+        </p:txBody>
+      </p:sp>
+      <p:sp>
+        <p:nvSpPr>
+          <p:cNvPr id="857698579" name="TextBox 2"/>
+          <p:cNvSpPr txBox="1"/>
+          <p:nvPr/>
+        </p:nvSpPr>
+        <p:spPr bwMode="auto">
+          <a:xfrm>
+            <a:off x="548640" y="658368"/>
+            <a:ext cx="10515600" cy="685800"/>
+          </a:xfrm>
+          <a:prstGeom prst="rect">
+            <a:avLst/>
+          </a:prstGeom>
+          <a:noFill/>
+        </p:spPr>
+        <p:txBody>
+          <a:bodyPr wrap="square" lIns="0" tIns="0" rIns="0" bIns="0" anchor="t">
+            <a:spAutoFit/>
+          </a:bodyPr>
+          <a:lstStyle/>
+          <a:p>
+            <a:pPr>
+              <a:defRPr/>
+            </a:pPr>
+            <a:r>
+              <a:rPr sz="3400" b="1">
+                <a:solidFill>
+                  <a:srgbClr val="0F172A"/>
+                </a:solidFill>
+                <a:latin typeface="Arial"/>
+              </a:rPr>
+              <a:t>Dynamic QR + Biometric Attendance</a:t>
+            </a:r>
+            <a:endParaRPr/>
+          </a:p>
+        </p:txBody>
+      </p:sp>
+      <p:sp>
+        <p:nvSpPr>
+          <p:cNvPr id="2059685306" name="TextBox 3"/>
+          <p:cNvSpPr txBox="1"/>
+          <p:nvPr/>
+        </p:nvSpPr>
+        <p:spPr bwMode="auto">
+          <a:xfrm>
+            <a:off x="548640" y="1298448"/>
+            <a:ext cx="10515600" cy="365760"/>
+          </a:xfrm>
+          <a:prstGeom prst="rect">
+            <a:avLst/>
+          </a:prstGeom>
+          <a:noFill/>
+        </p:spPr>
+        <p:txBody>
+          <a:bodyPr wrap="square" lIns="0" tIns="0" rIns="0" bIns="0" anchor="t">
+            <a:spAutoFit/>
+          </a:bodyPr>
+          <a:lstStyle/>
+          <a:p>
+            <a:pPr>
+              <a:defRPr/>
+            </a:pPr>
+            <a:r>
+              <a:rPr sz="1500" b="0">
+                <a:solidFill>
+                  <a:srgbClr val="475569"/>
+                </a:solidFill>
+                <a:latin typeface="Calibri"/>
+              </a:rPr>
+              <a:t>From projection to a verified check-in on the teacher's screen — in seconds, and impossible to fake</a:t>
+            </a:r>
+            <a:endParaRPr/>
+          </a:p>
+        </p:txBody>
+      </p:sp>
+      <p:sp>
+        <p:nvSpPr>
+          <p:cNvPr id="309563727" name="TextBox 33"/>
+          <p:cNvSpPr txBox="1"/>
+          <p:nvPr/>
+        </p:nvSpPr>
+        <p:spPr bwMode="auto">
+          <a:xfrm>
+            <a:off x="457200" y="6473952"/>
+            <a:ext cx="5486400" cy="274320"/>
+          </a:xfrm>
+          <a:prstGeom prst="rect">
+            <a:avLst/>
+          </a:prstGeom>
+          <a:noFill/>
+        </p:spPr>
+        <p:txBody>
+          <a:bodyPr wrap="square" lIns="0" tIns="0" rIns="0" bIns="0" anchor="t">
+            <a:spAutoFit/>
+          </a:bodyPr>
+          <a:lstStyle/>
+          <a:p>
+            <a:pPr algn="l">
+              <a:defRPr/>
+            </a:pPr>
+            <a:r>
+              <a:rPr sz="900" b="0">
+                <a:solidFill>
+                  <a:srgbClr val="64748B"/>
+                </a:solidFill>
+                <a:latin typeface="Calibri"/>
+              </a:rPr>
+              <a:t>MarkIt  ·  Dynamic QR + Biometric Attendance</a:t>
+            </a:r>
+            <a:endParaRPr/>
+          </a:p>
+        </p:txBody>
+      </p:sp>
+      <p:sp>
+        <p:nvSpPr>
+          <p:cNvPr id="215181487" name="TextBox 34"/>
+          <p:cNvSpPr txBox="1"/>
+          <p:nvPr/>
+        </p:nvSpPr>
+        <p:spPr bwMode="auto">
+          <a:xfrm>
+            <a:off x="11274552" y="6473952"/>
+            <a:ext cx="457920" cy="137518"/>
+          </a:xfrm>
+          <a:prstGeom prst="rect">
+            <a:avLst/>
+          </a:prstGeom>
+          <a:noFill/>
+        </p:spPr>
+        <p:txBody>
+          <a:bodyPr wrap="square" lIns="0" tIns="0" rIns="0" bIns="0" anchor="t">
+            <a:spAutoFit/>
+          </a:bodyPr>
+          <a:lstStyle/>
+          <a:p>
+            <a:pPr algn="r">
+              <a:defRPr/>
+            </a:pPr>
+            <a:r>
+              <a:rPr sz="900" b="0">
+                <a:solidFill>
+                  <a:srgbClr val="64748B"/>
+                </a:solidFill>
+                <a:latin typeface="Calibri"/>
+              </a:rPr>
+              <a:t>11</a:t>
+            </a:r>
+            <a:endParaRPr/>
+          </a:p>
+        </p:txBody>
+      </p:sp>
+      <p:pic>
+        <p:nvPicPr>
+          <p:cNvPr id="274739466" name=""/>
+          <p:cNvPicPr>
+            <a:picLocks noChangeAspect="1"/>
+          </p:cNvPicPr>
+          <p:nvPr/>
+        </p:nvPicPr>
+        <p:blipFill rotWithShape="1">
+          <a:blip r:embed="rId3"/>
+          <a:stretch/>
+        </p:blipFill>
+        <p:spPr bwMode="auto">
+          <a:xfrm flipH="0" flipV="0">
+            <a:off x="548640" y="1961862"/>
+            <a:ext cx="6510785" cy="4228813"/>
+          </a:xfrm>
+          <a:prstGeom prst="rect">
+            <a:avLst/>
+          </a:prstGeom>
+        </p:spPr>
+      </p:pic>
+      <p:sp>
+        <p:nvSpPr>
+          <p:cNvPr id="1251397600" name="Rounded Rectangle 27"/>
+          <p:cNvSpPr/>
+          <p:nvPr/>
+        </p:nvSpPr>
+        <p:spPr bwMode="auto">
+          <a:xfrm flipH="0" flipV="0">
+            <a:off x="7609311" y="1961862"/>
+            <a:ext cx="4122438" cy="1970245"/>
+          </a:xfrm>
+          <a:prstGeom prst="roundRect">
+            <a:avLst>
+              <a:gd name="adj" fmla="val 5128"/>
+            </a:avLst>
+          </a:prstGeom>
+          <a:solidFill>
+            <a:srgbClr val="F8FAFC"/>
+          </a:solidFill>
+          <a:ln w="12700">
+            <a:solidFill>
+              <a:srgbClr val="E2E8F0"/>
+            </a:solidFill>
+          </a:ln>
+          <a:effectLst/>
+        </p:spPr>
+        <p:style>
+          <a:lnRef idx="1">
+            <a:schemeClr val="accent1"/>
+          </a:lnRef>
+          <a:fillRef idx="3">
+            <a:schemeClr val="accent1"/>
+          </a:fillRef>
+          <a:effectRef idx="2">
+            <a:schemeClr val="accent1"/>
+          </a:effectRef>
+          <a:fontRef idx="minor">
+            <a:schemeClr val="lt1"/>
+          </a:fontRef>
+        </p:style>
+        <p:txBody>
+          <a:bodyPr rtlCol="0" anchor="ctr"/>
+          <a:lstStyle/>
+          <a:p>
+            <a:pPr algn="ctr">
+              <a:defRPr/>
+            </a:pPr>
+            <a:endParaRPr/>
+          </a:p>
+        </p:txBody>
+      </p:sp>
+      <p:sp>
+        <p:nvSpPr>
+          <p:cNvPr id="1310662602" name="TextBox 28"/>
+          <p:cNvSpPr txBox="1"/>
+          <p:nvPr/>
+        </p:nvSpPr>
+        <p:spPr bwMode="auto">
+          <a:xfrm flipH="0" flipV="0">
+            <a:off x="7774308" y="2267901"/>
+            <a:ext cx="3639200" cy="228960"/>
+          </a:xfrm>
+          <a:prstGeom prst="rect">
+            <a:avLst/>
+          </a:prstGeom>
+          <a:noFill/>
+        </p:spPr>
+        <p:txBody>
+          <a:bodyPr wrap="square" lIns="0" tIns="0" rIns="0" bIns="0" anchor="t">
+            <a:spAutoFit/>
+          </a:bodyPr>
+          <a:lstStyle/>
+          <a:p>
+            <a:pPr>
+              <a:defRPr/>
+            </a:pPr>
+            <a:r>
+              <a:rPr sz="1500" b="1">
+                <a:solidFill>
+                  <a:srgbClr val="0F172A"/>
+                </a:solidFill>
+                <a:latin typeface="Arial"/>
+              </a:rPr>
+              <a:t>Cheat-proof by design</a:t>
+            </a:r>
+            <a:endParaRPr/>
+          </a:p>
+        </p:txBody>
+      </p:sp>
+      <p:sp>
+        <p:nvSpPr>
+          <p:cNvPr id="942221033" name="TextBox 29"/>
+          <p:cNvSpPr txBox="1"/>
+          <p:nvPr/>
+        </p:nvSpPr>
+        <p:spPr bwMode="auto">
+          <a:xfrm flipH="0" flipV="0">
+            <a:off x="7795094" y="2651949"/>
+            <a:ext cx="3618415" cy="1164288"/>
+          </a:xfrm>
+          <a:prstGeom prst="rect">
+            <a:avLst/>
+          </a:prstGeom>
+          <a:noFill/>
+        </p:spPr>
+        <p:txBody>
+          <a:bodyPr wrap="square" lIns="0" tIns="0" rIns="0" bIns="0" anchor="t">
+            <a:spAutoFit/>
+          </a:bodyPr>
+          <a:lstStyle/>
+          <a:p>
+            <a:pPr>
+              <a:lnSpc>
+                <a:spcPct val="108000"/>
+              </a:lnSpc>
+              <a:spcAft>
+                <a:spcPts val="498"/>
+              </a:spcAft>
+              <a:defRPr/>
+            </a:pPr>
+            <a:r>
+              <a:rPr sz="1050" b="1">
+                <a:solidFill>
+                  <a:srgbClr val="4F46E5"/>
+                </a:solidFill>
+                <a:latin typeface="Calibri"/>
+              </a:rPr>
+              <a:t>•  </a:t>
+            </a:r>
+            <a:r>
+              <a:rPr sz="1050" b="0">
+                <a:solidFill>
+                  <a:srgbClr val="475569"/>
+                </a:solidFill>
+                <a:latin typeface="Calibri"/>
+              </a:rPr>
+              <a:t>Tokens expire in ~30 seconds — screenshots are worthless to absent friends</a:t>
+            </a:r>
+            <a:endParaRPr/>
+          </a:p>
+          <a:p>
+            <a:pPr>
+              <a:lnSpc>
+                <a:spcPct val="108000"/>
+              </a:lnSpc>
+              <a:spcAft>
+                <a:spcPts val="498"/>
+              </a:spcAft>
+              <a:defRPr/>
+            </a:pPr>
+            <a:r>
+              <a:rPr sz="1050" b="1">
+                <a:solidFill>
+                  <a:srgbClr val="4F46E5"/>
+                </a:solidFill>
+                <a:latin typeface="Calibri"/>
+              </a:rPr>
+              <a:t>•  </a:t>
+            </a:r>
+            <a:r>
+              <a:rPr sz="1050" b="0">
+                <a:solidFill>
+                  <a:srgbClr val="475569"/>
+                </a:solidFill>
+                <a:latin typeface="Calibri"/>
+              </a:rPr>
+              <a:t>Every credential is cryptographically bound to one student's device</a:t>
+            </a:r>
+            <a:endParaRPr/>
+          </a:p>
+          <a:p>
+            <a:pPr>
+              <a:lnSpc>
+                <a:spcPct val="108000"/>
+              </a:lnSpc>
+              <a:spcAft>
+                <a:spcPts val="498"/>
+              </a:spcAft>
+              <a:defRPr/>
+            </a:pPr>
+            <a:r>
+              <a:rPr sz="1050" b="1">
+                <a:solidFill>
+                  <a:srgbClr val="4F46E5"/>
+                </a:solidFill>
+                <a:latin typeface="Calibri"/>
+              </a:rPr>
+              <a:t>•  </a:t>
+            </a:r>
+            <a:r>
+              <a:rPr sz="1050" b="1">
+                <a:solidFill>
+                  <a:srgbClr val="0F172A"/>
+                </a:solidFill>
+                <a:latin typeface="Calibri"/>
+              </a:rPr>
+              <a:t>Biometric data never leaves the phone — only a signed proof reaches the server</a:t>
+            </a:r>
+            <a:endParaRPr/>
+          </a:p>
+        </p:txBody>
+      </p:sp>
+      <p:sp>
+        <p:nvSpPr>
+          <p:cNvPr id="1636600733" name="Rounded Rectangle 30"/>
+          <p:cNvSpPr/>
+          <p:nvPr/>
+        </p:nvSpPr>
+        <p:spPr bwMode="auto">
+          <a:xfrm flipH="0" flipV="0">
+            <a:off x="7609311" y="4143373"/>
+            <a:ext cx="4122438" cy="2047302"/>
+          </a:xfrm>
+          <a:prstGeom prst="roundRect">
+            <a:avLst>
+              <a:gd name="adj" fmla="val 5128"/>
+            </a:avLst>
+          </a:prstGeom>
+          <a:solidFill>
+            <a:srgbClr val="F8FAFC"/>
+          </a:solidFill>
+          <a:ln w="12700">
+            <a:solidFill>
+              <a:srgbClr val="E2E8F0"/>
+            </a:solidFill>
+          </a:ln>
+          <a:effectLst/>
+        </p:spPr>
+        <p:style>
+          <a:lnRef idx="1">
+            <a:schemeClr val="accent1"/>
+          </a:lnRef>
+          <a:fillRef idx="3">
+            <a:schemeClr val="accent1"/>
+          </a:fillRef>
+          <a:effectRef idx="2">
+            <a:schemeClr val="accent1"/>
+          </a:effectRef>
+          <a:fontRef idx="minor">
+            <a:schemeClr val="lt1"/>
+          </a:fontRef>
+        </p:style>
+        <p:txBody>
+          <a:bodyPr rtlCol="0" anchor="ctr"/>
+          <a:lstStyle/>
+          <a:p>
+            <a:pPr algn="ctr">
+              <a:defRPr/>
+            </a:pPr>
+            <a:endParaRPr/>
+          </a:p>
+        </p:txBody>
+      </p:sp>
+      <p:sp>
+        <p:nvSpPr>
+          <p:cNvPr id="82543830" name="TextBox 31"/>
+          <p:cNvSpPr txBox="1"/>
+          <p:nvPr/>
+        </p:nvSpPr>
+        <p:spPr bwMode="auto">
+          <a:xfrm flipH="0" flipV="0">
+            <a:off x="7763599" y="4501651"/>
+            <a:ext cx="3639894" cy="228960"/>
+          </a:xfrm>
+          <a:prstGeom prst="rect">
+            <a:avLst/>
+          </a:prstGeom>
+          <a:noFill/>
+        </p:spPr>
+        <p:txBody>
+          <a:bodyPr wrap="square" lIns="0" tIns="0" rIns="0" bIns="0" anchor="t">
+            <a:spAutoFit/>
+          </a:bodyPr>
+          <a:lstStyle/>
+          <a:p>
+            <a:pPr>
+              <a:defRPr/>
+            </a:pPr>
+            <a:r>
+              <a:rPr sz="1500" b="1">
+                <a:solidFill>
+                  <a:srgbClr val="0F172A"/>
+                </a:solidFill>
+                <a:latin typeface="Arial"/>
+              </a:rPr>
+              <a:t>Teacher stays in command</a:t>
+            </a:r>
+            <a:endParaRPr/>
+          </a:p>
+        </p:txBody>
+      </p:sp>
+      <p:sp>
+        <p:nvSpPr>
+          <p:cNvPr id="1029694993" name="TextBox 32"/>
+          <p:cNvSpPr txBox="1"/>
+          <p:nvPr/>
+        </p:nvSpPr>
+        <p:spPr bwMode="auto">
+          <a:xfrm flipH="0" flipV="0">
+            <a:off x="7783924" y="4940842"/>
+            <a:ext cx="3619109" cy="818645"/>
+          </a:xfrm>
+          <a:prstGeom prst="rect">
+            <a:avLst/>
+          </a:prstGeom>
+          <a:noFill/>
+        </p:spPr>
+        <p:txBody>
+          <a:bodyPr wrap="square" lIns="0" tIns="0" rIns="0" bIns="0" anchor="t">
+            <a:spAutoFit/>
+          </a:bodyPr>
+          <a:lstStyle/>
+          <a:p>
+            <a:pPr>
+              <a:lnSpc>
+                <a:spcPct val="108000"/>
+              </a:lnSpc>
+              <a:spcAft>
+                <a:spcPts val="498"/>
+              </a:spcAft>
+              <a:defRPr/>
+            </a:pPr>
+            <a:r>
+              <a:rPr sz="1050" b="1">
+                <a:solidFill>
+                  <a:srgbClr val="4F46E5"/>
+                </a:solidFill>
+                <a:latin typeface="Calibri"/>
+              </a:rPr>
+              <a:t>•  </a:t>
+            </a:r>
+            <a:r>
+              <a:rPr sz="1050" b="0">
+                <a:solidFill>
+                  <a:srgbClr val="475569"/>
+                </a:solidFill>
+                <a:latin typeface="Calibri"/>
+              </a:rPr>
+              <a:t>Verified students auto-tick on the projected roster in real time</a:t>
+            </a:r>
+            <a:endParaRPr/>
+          </a:p>
+          <a:p>
+            <a:pPr>
+              <a:lnSpc>
+                <a:spcPct val="108000"/>
+              </a:lnSpc>
+              <a:spcAft>
+                <a:spcPts val="498"/>
+              </a:spcAft>
+              <a:defRPr/>
+            </a:pPr>
+            <a:r>
+              <a:rPr sz="1050" b="1">
+                <a:solidFill>
+                  <a:srgbClr val="4F46E5"/>
+                </a:solidFill>
+                <a:latin typeface="Calibri"/>
+              </a:rPr>
+              <a:t>•  </a:t>
+            </a:r>
+            <a:r>
+              <a:rPr sz="1050" b="0">
+                <a:solidFill>
+                  <a:srgbClr val="475569"/>
+                </a:solidFill>
+                <a:latin typeface="Calibri"/>
+              </a:rPr>
+              <a:t>Manual selection stays available side-by-side as a fallback</a:t>
+            </a:r>
+            <a:endParaRPr/>
+          </a:p>
+          <a:p>
+            <a:pPr>
+              <a:lnSpc>
+                <a:spcPct val="108000"/>
+              </a:lnSpc>
+              <a:spcAft>
+                <a:spcPts val="498"/>
+              </a:spcAft>
+              <a:defRPr/>
+            </a:pPr>
+            <a:r>
+              <a:rPr sz="1050" b="1">
+                <a:solidFill>
+                  <a:srgbClr val="4F46E5"/>
+                </a:solidFill>
+                <a:latin typeface="Calibri"/>
+              </a:rPr>
+              <a:t>•  </a:t>
+            </a:r>
+            <a:r>
+              <a:rPr sz="1050" b="1">
+                <a:solidFill>
+                  <a:srgbClr val="0F172A"/>
+                </a:solidFill>
+                <a:latin typeface="Calibri"/>
+              </a:rPr>
+              <a:t>Attendance is written to the database only after teacher review &amp; submit</a:t>
+            </a:r>
+            <a:endParaRPr/>
+          </a:p>
+        </p:txBody>
+      </p:sp>
+    </p:spTree>
+  </p:cSld>
+  <p:clrMapOvr>
+    <a:masterClrMapping/>
+  </p:clrMapOvr>
+  <mc:AlternateContent xmlns:mc="http://schemas.openxmlformats.org/markup-compatibility/2006">
+    <mc:Choice xmlns:p159="http://schemas.microsoft.com/office/powerpoint/2015/09/main" xmlns:p14="http://schemas.microsoft.com/office/powerpoint/2010/main" Requires="p159">
+      <p:transition p14:dur="500" advClick="1"/>
+    </mc:Choice>
+    <mc:Fallback>
+      <p:transition advClick="1"/>
+    </mc:Fallback>
+  </mc:AlternateContent>
+</p:sld>
+</file>
+
+<file path=ppt/slides/slide13.xml><?xml version="1.0" encoding="utf-8"?>
 <p:sld xmlns:a="http://schemas.openxmlformats.org/drawingml/2006/main" xmlns:r="http://schemas.openxmlformats.org/officeDocument/2006/relationships" xmlns:p="http://schemas.openxmlformats.org/presentationml/2006/main" xmlns:m="http://schemas.openxmlformats.org/officeDocument/2006/math" xmlns:w="http://schemas.openxmlformats.org/wordprocessingml/2006/main" xmlns:mc="http://schemas.openxmlformats.org/markup-compatibility/2006" showMasterPhAnim="0" showMasterSp="1" show="1">
   <p:cSld name="Slide 10">
     <p:bg>
@@ -4316,7 +4647,7 @@
       </p:grpSpPr>
       <p:sp>
         <p:nvSpPr>
-          <p:cNvPr id="1942047700" name="Text 0"/>
+          <p:cNvPr id="1555106392" name="Text 0"/>
           <p:cNvSpPr/>
           <p:nvPr/>
         </p:nvSpPr>
@@ -4356,7 +4687,7 @@
       </p:sp>
       <p:sp>
         <p:nvSpPr>
-          <p:cNvPr id="1579911761" name="Text 1"/>
+          <p:cNvPr id="843441076" name="Text 1"/>
           <p:cNvSpPr/>
           <p:nvPr/>
         </p:nvSpPr>
@@ -4396,7 +4727,7 @@
       </p:sp>
       <p:sp>
         <p:nvSpPr>
-          <p:cNvPr id="90482257" name="Text 2"/>
+          <p:cNvPr id="516144656" name="Text 2"/>
           <p:cNvSpPr/>
           <p:nvPr/>
         </p:nvSpPr>
@@ -4436,7 +4767,7 @@
       </p:sp>
       <p:sp>
         <p:nvSpPr>
-          <p:cNvPr id="1783572227" name="Shape 3"/>
+          <p:cNvPr id="1270643941" name="Shape 3"/>
           <p:cNvSpPr/>
           <p:nvPr/>
         </p:nvSpPr>
@@ -4463,7 +4794,7 @@
       </p:sp>
       <p:pic>
         <p:nvPicPr>
-          <p:cNvPr id="1287387474" name="Image 0" descr="preencoded.png"/>
+          <p:cNvPr id="232118946" name="Image 0" descr="preencoded.png"/>
           <p:cNvPicPr>
             <a:picLocks noChangeAspect="1"/>
           </p:cNvPicPr>
@@ -4485,7 +4816,7 @@
       </p:pic>
       <p:sp>
         <p:nvSpPr>
-          <p:cNvPr id="1956628838" name="Text 4"/>
+          <p:cNvPr id="944339885" name="Text 4"/>
           <p:cNvSpPr/>
           <p:nvPr/>
         </p:nvSpPr>
@@ -4525,7 +4856,7 @@
       </p:sp>
       <p:sp>
         <p:nvSpPr>
-          <p:cNvPr id="327925603" name="Text 5"/>
+          <p:cNvPr id="1803440281" name="Text 5"/>
           <p:cNvSpPr/>
           <p:nvPr/>
         </p:nvSpPr>
@@ -4565,7 +4896,7 @@
       </p:sp>
       <p:sp>
         <p:nvSpPr>
-          <p:cNvPr id="1884627935" name="Shape 6"/>
+          <p:cNvPr id="1009681547" name="Shape 6"/>
           <p:cNvSpPr/>
           <p:nvPr/>
         </p:nvSpPr>
@@ -4592,7 +4923,7 @@
       </p:sp>
       <p:pic>
         <p:nvPicPr>
-          <p:cNvPr id="1864151627" name="Image 1" descr="preencoded.png"/>
+          <p:cNvPr id="202705139" name="Image 1" descr="preencoded.png"/>
           <p:cNvPicPr>
             <a:picLocks noChangeAspect="1"/>
           </p:cNvPicPr>
@@ -4614,7 +4945,7 @@
       </p:pic>
       <p:sp>
         <p:nvSpPr>
-          <p:cNvPr id="2024645385" name="Text 7"/>
+          <p:cNvPr id="1162852759" name="Text 7"/>
           <p:cNvSpPr/>
           <p:nvPr/>
         </p:nvSpPr>
@@ -4654,7 +4985,7 @@
       </p:sp>
       <p:sp>
         <p:nvSpPr>
-          <p:cNvPr id="1298663419" name="Text 8"/>
+          <p:cNvPr id="597300484" name="Text 8"/>
           <p:cNvSpPr/>
           <p:nvPr/>
         </p:nvSpPr>
@@ -4694,7 +5025,7 @@
       </p:sp>
       <p:sp>
         <p:nvSpPr>
-          <p:cNvPr id="82771843" name="Shape 9"/>
+          <p:cNvPr id="769269885" name="Shape 9"/>
           <p:cNvSpPr/>
           <p:nvPr/>
         </p:nvSpPr>
@@ -4721,7 +5052,7 @@
       </p:sp>
       <p:pic>
         <p:nvPicPr>
-          <p:cNvPr id="787735029" name="Image 2" descr="preencoded.png"/>
+          <p:cNvPr id="162514990" name="Image 2" descr="preencoded.png"/>
           <p:cNvPicPr>
             <a:picLocks noChangeAspect="1"/>
           </p:cNvPicPr>
@@ -4743,7 +5074,7 @@
       </p:pic>
       <p:sp>
         <p:nvSpPr>
-          <p:cNvPr id="1288592732" name="Text 10"/>
+          <p:cNvPr id="1374213502" name="Text 10"/>
           <p:cNvSpPr/>
           <p:nvPr/>
         </p:nvSpPr>
@@ -4783,7 +5114,7 @@
       </p:sp>
       <p:sp>
         <p:nvSpPr>
-          <p:cNvPr id="2115771815" name="Text 11"/>
+          <p:cNvPr id="196892560" name="Text 11"/>
           <p:cNvSpPr/>
           <p:nvPr/>
         </p:nvSpPr>
@@ -4823,7 +5154,7 @@
       </p:sp>
       <p:sp>
         <p:nvSpPr>
-          <p:cNvPr id="1963130748" name="Text 12"/>
+          <p:cNvPr id="965508076" name="Text 12"/>
           <p:cNvSpPr/>
           <p:nvPr/>
         </p:nvSpPr>
@@ -4863,7 +5194,7 @@
       </p:sp>
       <p:sp>
         <p:nvSpPr>
-          <p:cNvPr id="885316802" name="Text 13"/>
+          <p:cNvPr id="645844512" name="Text 13"/>
           <p:cNvSpPr/>
           <p:nvPr/>
         </p:nvSpPr>
@@ -4903,7 +5234,7 @@
       </p:sp>
       <p:sp>
         <p:nvSpPr>
-          <p:cNvPr id="1813739356" name="Text 14"/>
+          <p:cNvPr id="1517362273" name="Text 14"/>
           <p:cNvSpPr/>
           <p:nvPr/>
         </p:nvSpPr>
@@ -4943,7 +5274,7 @@
       </p:sp>
       <p:sp>
         <p:nvSpPr>
-          <p:cNvPr id="1522366186" name="Text 15"/>
+          <p:cNvPr id="2103337338" name="Text 15"/>
           <p:cNvSpPr/>
           <p:nvPr/>
         </p:nvSpPr>
@@ -4983,7 +5314,7 @@
       </p:sp>
       <p:sp>
         <p:nvSpPr>
-          <p:cNvPr id="1508646950" name="Text 16"/>
+          <p:cNvPr id="834155631" name="Text 16"/>
           <p:cNvSpPr/>
           <p:nvPr/>
         </p:nvSpPr>
@@ -5023,7 +5354,7 @@
       </p:sp>
       <p:sp>
         <p:nvSpPr>
-          <p:cNvPr id="1743761384" name="Text 17"/>
+          <p:cNvPr id="240956569" name="Text 17"/>
           <p:cNvSpPr/>
           <p:nvPr/>
         </p:nvSpPr>
@@ -5063,7 +5394,7 @@
       </p:sp>
       <p:sp>
         <p:nvSpPr>
-          <p:cNvPr id="284867503" name="Text 18"/>
+          <p:cNvPr id="1177966689" name="Text 18"/>
           <p:cNvSpPr/>
           <p:nvPr/>
         </p:nvSpPr>
@@ -5103,7 +5434,7 @@
       </p:sp>
       <p:sp>
         <p:nvSpPr>
-          <p:cNvPr id="266296070" name="Text 19"/>
+          <p:cNvPr id="413342043" name="Text 19"/>
           <p:cNvSpPr/>
           <p:nvPr/>
         </p:nvSpPr>
@@ -5157,7 +5488,7 @@
 </p:sld>
 </file>
 
-<file path=ppt/slides/slide13.xml><?xml version="1.0" encoding="utf-8"?>
+<file path=ppt/slides/slide14.xml><?xml version="1.0" encoding="utf-8"?>
 <p:sld xmlns:a="http://schemas.openxmlformats.org/drawingml/2006/main" xmlns:r="http://schemas.openxmlformats.org/officeDocument/2006/relationships" xmlns:p="http://schemas.openxmlformats.org/presentationml/2006/main" xmlns:m="http://schemas.openxmlformats.org/officeDocument/2006/math" xmlns:w="http://schemas.openxmlformats.org/wordprocessingml/2006/main" xmlns:mc="http://schemas.openxmlformats.org/markup-compatibility/2006" showMasterPhAnim="0" showMasterSp="1" show="1">
   <p:cSld name="Slide 11">
     <p:bg>
@@ -5183,7 +5514,7 @@
       </p:grpSpPr>
       <p:sp>
         <p:nvSpPr>
-          <p:cNvPr id="703081645" name="Text 0"/>
+          <p:cNvPr id="323665065" name="Text 0"/>
           <p:cNvSpPr/>
           <p:nvPr/>
         </p:nvSpPr>
@@ -5223,7 +5554,7 @@
       </p:sp>
       <p:sp>
         <p:nvSpPr>
-          <p:cNvPr id="422995764" name="Text 1"/>
+          <p:cNvPr id="1039868372" name="Text 1"/>
           <p:cNvSpPr/>
           <p:nvPr/>
         </p:nvSpPr>
@@ -5263,7 +5594,7 @@
       </p:sp>
       <p:sp>
         <p:nvSpPr>
-          <p:cNvPr id="1964665395" name="Text 2"/>
+          <p:cNvPr id="1063627659" name="Text 2"/>
           <p:cNvSpPr/>
           <p:nvPr/>
         </p:nvSpPr>
@@ -5303,7 +5634,7 @@
       </p:sp>
       <p:sp>
         <p:nvSpPr>
-          <p:cNvPr id="1669403691" name="Shape 3"/>
+          <p:cNvPr id="1830875728" name="Shape 3"/>
           <p:cNvSpPr/>
           <p:nvPr/>
         </p:nvSpPr>
@@ -5334,7 +5665,7 @@
       </p:sp>
       <p:pic>
         <p:nvPicPr>
-          <p:cNvPr id="963390777" name="Image 0" descr="preencoded.png"/>
+          <p:cNvPr id="2027389354" name="Image 0" descr="preencoded.png"/>
           <p:cNvPicPr>
             <a:picLocks noChangeAspect="1"/>
           </p:cNvPicPr>
@@ -5356,7 +5687,7 @@
       </p:pic>
       <p:sp>
         <p:nvSpPr>
-          <p:cNvPr id="76668351" name="Text 4"/>
+          <p:cNvPr id="1450660825" name="Text 4"/>
           <p:cNvSpPr/>
           <p:nvPr/>
         </p:nvSpPr>
@@ -5396,7 +5727,7 @@
       </p:sp>
       <p:sp>
         <p:nvSpPr>
-          <p:cNvPr id="1921091113" name="Shape 5"/>
+          <p:cNvPr id="323794504" name="Shape 5"/>
           <p:cNvSpPr/>
           <p:nvPr/>
         </p:nvSpPr>
@@ -5427,7 +5758,7 @@
       </p:sp>
       <p:pic>
         <p:nvPicPr>
-          <p:cNvPr id="916439665" name="Image 1" descr="preencoded.png"/>
+          <p:cNvPr id="2095595528" name="Image 1" descr="preencoded.png"/>
           <p:cNvPicPr>
             <a:picLocks noChangeAspect="1"/>
           </p:cNvPicPr>
@@ -5449,7 +5780,7 @@
       </p:pic>
       <p:sp>
         <p:nvSpPr>
-          <p:cNvPr id="943353170" name="Text 6"/>
+          <p:cNvPr id="144021038" name="Text 6"/>
           <p:cNvSpPr/>
           <p:nvPr/>
         </p:nvSpPr>
@@ -5489,7 +5820,7 @@
       </p:sp>
       <p:sp>
         <p:nvSpPr>
-          <p:cNvPr id="1458121061" name="Shape 7"/>
+          <p:cNvPr id="995714765" name="Shape 7"/>
           <p:cNvSpPr/>
           <p:nvPr/>
         </p:nvSpPr>
@@ -5520,7 +5851,7 @@
       </p:sp>
       <p:sp>
         <p:nvSpPr>
-          <p:cNvPr id="126755490" name="Text 8"/>
+          <p:cNvPr id="964128607" name="Text 8"/>
           <p:cNvSpPr/>
           <p:nvPr/>
         </p:nvSpPr>
@@ -5560,7 +5891,7 @@
       </p:sp>
       <p:sp>
         <p:nvSpPr>
-          <p:cNvPr id="1042123109" name="Shape 9"/>
+          <p:cNvPr id="1779184397" name="Shape 9"/>
           <p:cNvSpPr/>
           <p:nvPr/>
         </p:nvSpPr>
@@ -5591,7 +5922,7 @@
       </p:sp>
       <p:sp>
         <p:nvSpPr>
-          <p:cNvPr id="1973182584" name="Text 10"/>
+          <p:cNvPr id="384929670" name="Text 10"/>
           <p:cNvSpPr/>
           <p:nvPr/>
         </p:nvSpPr>
@@ -5631,7 +5962,7 @@
       </p:sp>
       <p:sp>
         <p:nvSpPr>
-          <p:cNvPr id="1799792906" name="Shape 11"/>
+          <p:cNvPr id="820214618" name="Shape 11"/>
           <p:cNvSpPr/>
           <p:nvPr/>
         </p:nvSpPr>
@@ -5662,7 +5993,7 @@
       </p:sp>
       <p:sp>
         <p:nvSpPr>
-          <p:cNvPr id="104727503" name="Text 12"/>
+          <p:cNvPr id="774349302" name="Text 12"/>
           <p:cNvSpPr/>
           <p:nvPr/>
         </p:nvSpPr>
@@ -5702,7 +6033,7 @@
       </p:sp>
       <p:sp>
         <p:nvSpPr>
-          <p:cNvPr id="1447763998" name="Shape 13"/>
+          <p:cNvPr id="1393324999" name="Shape 13"/>
           <p:cNvSpPr/>
           <p:nvPr/>
         </p:nvSpPr>
@@ -5733,7 +6064,7 @@
       </p:sp>
       <p:sp>
         <p:nvSpPr>
-          <p:cNvPr id="1341648636" name="Text 14"/>
+          <p:cNvPr id="503897682" name="Text 14"/>
           <p:cNvSpPr/>
           <p:nvPr/>
         </p:nvSpPr>
@@ -5773,7 +6104,7 @@
       </p:sp>
       <p:sp>
         <p:nvSpPr>
-          <p:cNvPr id="613852681" name="Shape 15"/>
+          <p:cNvPr id="1817558135" name="Shape 15"/>
           <p:cNvSpPr/>
           <p:nvPr/>
         </p:nvSpPr>
@@ -5804,7 +6135,7 @@
       </p:sp>
       <p:sp>
         <p:nvSpPr>
-          <p:cNvPr id="789294757" name="Text 16"/>
+          <p:cNvPr id="1677208692" name="Text 16"/>
           <p:cNvSpPr/>
           <p:nvPr/>
         </p:nvSpPr>
@@ -5844,7 +6175,7 @@
       </p:sp>
       <p:sp>
         <p:nvSpPr>
-          <p:cNvPr id="1548878206" name="Shape 17"/>
+          <p:cNvPr id="1458389065" name="Shape 17"/>
           <p:cNvSpPr/>
           <p:nvPr/>
         </p:nvSpPr>
@@ -5875,7 +6206,7 @@
       </p:sp>
       <p:sp>
         <p:nvSpPr>
-          <p:cNvPr id="1791891188" name="Text 18"/>
+          <p:cNvPr id="652585617" name="Text 18"/>
           <p:cNvSpPr/>
           <p:nvPr/>
         </p:nvSpPr>
@@ -5915,7 +6246,7 @@
       </p:sp>
       <p:sp>
         <p:nvSpPr>
-          <p:cNvPr id="97104658" name="Shape 19"/>
+          <p:cNvPr id="1338763272" name="Shape 19"/>
           <p:cNvSpPr/>
           <p:nvPr/>
         </p:nvSpPr>
@@ -5946,7 +6277,7 @@
       </p:sp>
       <p:sp>
         <p:nvSpPr>
-          <p:cNvPr id="483203797" name="Text 20"/>
+          <p:cNvPr id="69268337" name="Text 20"/>
           <p:cNvSpPr/>
           <p:nvPr/>
         </p:nvSpPr>
@@ -5986,7 +6317,7 @@
       </p:sp>
       <p:sp>
         <p:nvSpPr>
-          <p:cNvPr id="1049892455" name="Shape 21"/>
+          <p:cNvPr id="2141523942" name="Shape 21"/>
           <p:cNvSpPr/>
           <p:nvPr/>
         </p:nvSpPr>
@@ -6017,7 +6348,7 @@
       </p:sp>
       <p:sp>
         <p:nvSpPr>
-          <p:cNvPr id="1884371503" name="Text 22"/>
+          <p:cNvPr id="158937293" name="Text 22"/>
           <p:cNvSpPr/>
           <p:nvPr/>
         </p:nvSpPr>
@@ -6057,7 +6388,7 @@
       </p:sp>
       <p:sp>
         <p:nvSpPr>
-          <p:cNvPr id="2135836148" name="Shape 23"/>
+          <p:cNvPr id="1813704463" name="Shape 23"/>
           <p:cNvSpPr/>
           <p:nvPr/>
         </p:nvSpPr>
@@ -6088,7 +6419,7 @@
       </p:sp>
       <p:sp>
         <p:nvSpPr>
-          <p:cNvPr id="832739616" name="Text 24"/>
+          <p:cNvPr id="566545283" name="Text 24"/>
           <p:cNvSpPr/>
           <p:nvPr/>
         </p:nvSpPr>
@@ -6128,7 +6459,7 @@
       </p:sp>
       <p:sp>
         <p:nvSpPr>
-          <p:cNvPr id="729039341" name="Shape 25"/>
+          <p:cNvPr id="170585383" name="Shape 25"/>
           <p:cNvSpPr/>
           <p:nvPr/>
         </p:nvSpPr>
@@ -6159,7 +6490,7 @@
       </p:sp>
       <p:sp>
         <p:nvSpPr>
-          <p:cNvPr id="1477613459" name="Text 26"/>
+          <p:cNvPr id="818929464" name="Text 26"/>
           <p:cNvSpPr/>
           <p:nvPr/>
         </p:nvSpPr>
@@ -6199,7 +6530,7 @@
       </p:sp>
       <p:sp>
         <p:nvSpPr>
-          <p:cNvPr id="1775212029" name="Text 29"/>
+          <p:cNvPr id="1233913165" name="Text 29"/>
           <p:cNvSpPr/>
           <p:nvPr/>
         </p:nvSpPr>
@@ -6239,7 +6570,7 @@
       </p:sp>
       <p:sp>
         <p:nvSpPr>
-          <p:cNvPr id="2050611338" name="Text 30"/>
+          <p:cNvPr id="1203271816" name="Text 30"/>
           <p:cNvSpPr/>
           <p:nvPr/>
         </p:nvSpPr>
@@ -6279,7 +6610,7 @@
       </p:sp>
       <p:sp>
         <p:nvSpPr>
-          <p:cNvPr id="1271923616" name="Shape 5"/>
+          <p:cNvPr id="380547442" name="Shape 5"/>
           <p:cNvSpPr/>
           <p:nvPr/>
         </p:nvSpPr>
@@ -6310,7 +6641,7 @@
       </p:sp>
       <p:sp>
         <p:nvSpPr>
-          <p:cNvPr id="1427598751" name="Text 6"/>
+          <p:cNvPr id="1313177332" name="Text 6"/>
           <p:cNvSpPr/>
           <p:nvPr/>
         </p:nvSpPr>
@@ -6350,7 +6681,7 @@
       </p:sp>
       <p:pic>
         <p:nvPicPr>
-          <p:cNvPr id="418215531" name="Image 1" descr="preencoded.png"/>
+          <p:cNvPr id="7118470" name="Image 1" descr="preencoded.png"/>
           <p:cNvPicPr>
             <a:picLocks noChangeAspect="1"/>
           </p:cNvPicPr>
@@ -6372,7 +6703,7 @@
       </p:pic>
       <p:sp>
         <p:nvSpPr>
-          <p:cNvPr id="1760963639" name="Shape 9"/>
+          <p:cNvPr id="743031638" name="Shape 9"/>
           <p:cNvSpPr/>
           <p:nvPr/>
         </p:nvSpPr>
@@ -6403,7 +6734,7 @@
       </p:sp>
       <p:sp>
         <p:nvSpPr>
-          <p:cNvPr id="1169819240" name="Text 10"/>
+          <p:cNvPr id="1150475302" name="Text 10"/>
           <p:cNvSpPr/>
           <p:nvPr/>
         </p:nvSpPr>
@@ -6443,7 +6774,7 @@
       </p:sp>
       <p:sp>
         <p:nvSpPr>
-          <p:cNvPr id="1108846632" name="Shape 13"/>
+          <p:cNvPr id="429015640" name="Shape 13"/>
           <p:cNvSpPr/>
           <p:nvPr/>
         </p:nvSpPr>
@@ -6474,7 +6805,7 @@
       </p:sp>
       <p:sp>
         <p:nvSpPr>
-          <p:cNvPr id="1243354952" name="Text 14"/>
+          <p:cNvPr id="1812811135" name="Text 14"/>
           <p:cNvSpPr/>
           <p:nvPr/>
         </p:nvSpPr>
@@ -6514,7 +6845,7 @@
       </p:sp>
       <p:sp>
         <p:nvSpPr>
-          <p:cNvPr id="820462275" name="Shape 17"/>
+          <p:cNvPr id="1640724801" name="Shape 17"/>
           <p:cNvSpPr/>
           <p:nvPr/>
         </p:nvSpPr>
@@ -6545,7 +6876,7 @@
       </p:sp>
       <p:sp>
         <p:nvSpPr>
-          <p:cNvPr id="1008996721" name="Text 18"/>
+          <p:cNvPr id="1204179055" name="Text 18"/>
           <p:cNvSpPr/>
           <p:nvPr/>
         </p:nvSpPr>
@@ -6585,7 +6916,7 @@
       </p:sp>
       <p:sp>
         <p:nvSpPr>
-          <p:cNvPr id="952430534" name="Shape 21"/>
+          <p:cNvPr id="1394532279" name="Shape 21"/>
           <p:cNvSpPr/>
           <p:nvPr/>
         </p:nvSpPr>
@@ -6616,7 +6947,7 @@
       </p:sp>
       <p:sp>
         <p:nvSpPr>
-          <p:cNvPr id="1969546257" name="Text 22"/>
+          <p:cNvPr id="2002473528" name="Text 22"/>
           <p:cNvSpPr/>
           <p:nvPr/>
         </p:nvSpPr>
@@ -6656,7 +6987,7 @@
       </p:sp>
       <p:sp>
         <p:nvSpPr>
-          <p:cNvPr id="1650732553" name="Shape 25"/>
+          <p:cNvPr id="309737992" name="Shape 25"/>
           <p:cNvSpPr/>
           <p:nvPr/>
         </p:nvSpPr>
@@ -6687,7 +7018,7 @@
       </p:sp>
       <p:sp>
         <p:nvSpPr>
-          <p:cNvPr id="267250904" name="Text 26"/>
+          <p:cNvPr id="2094107702" name="Text 26"/>
           <p:cNvSpPr/>
           <p:nvPr/>
         </p:nvSpPr>
@@ -6741,7 +7072,7 @@
 </p:sld>
 </file>
 
-<file path=ppt/slides/slide14.xml><?xml version="1.0" encoding="utf-8"?>
+<file path=ppt/slides/slide15.xml><?xml version="1.0" encoding="utf-8"?>
 <p:sld xmlns:a="http://schemas.openxmlformats.org/drawingml/2006/main" xmlns:r="http://schemas.openxmlformats.org/officeDocument/2006/relationships" xmlns:p="http://schemas.openxmlformats.org/presentationml/2006/main" xmlns:m="http://schemas.openxmlformats.org/officeDocument/2006/math" xmlns:w="http://schemas.openxmlformats.org/wordprocessingml/2006/main" xmlns:mc="http://schemas.openxmlformats.org/markup-compatibility/2006" showMasterPhAnim="0" showMasterSp="1" show="1">
   <p:cSld name="Slide 12">
     <p:bg>
@@ -6767,7 +7098,7 @@
       </p:grpSpPr>
       <p:sp>
         <p:nvSpPr>
-          <p:cNvPr id="1081623739" name="Text 0"/>
+          <p:cNvPr id="1285912001" name="Text 0"/>
           <p:cNvSpPr/>
           <p:nvPr/>
         </p:nvSpPr>
@@ -6807,7 +7138,7 @@
       </p:sp>
       <p:sp>
         <p:nvSpPr>
-          <p:cNvPr id="470586247" name="Text 1"/>
+          <p:cNvPr id="893700580" name="Text 1"/>
           <p:cNvSpPr/>
           <p:nvPr/>
         </p:nvSpPr>
@@ -6847,7 +7178,7 @@
       </p:sp>
       <p:sp>
         <p:nvSpPr>
-          <p:cNvPr id="1544487401" name="Text 2"/>
+          <p:cNvPr id="1638605303" name="Text 2"/>
           <p:cNvSpPr/>
           <p:nvPr/>
         </p:nvSpPr>
@@ -6887,7 +7218,7 @@
       </p:sp>
       <p:sp>
         <p:nvSpPr>
-          <p:cNvPr id="690897150" name="Shape 3"/>
+          <p:cNvPr id="490641621" name="Shape 3"/>
           <p:cNvSpPr/>
           <p:nvPr/>
         </p:nvSpPr>
@@ -6909,7 +7240,7 @@
       </p:sp>
       <p:sp>
         <p:nvSpPr>
-          <p:cNvPr id="1389817495" name="Text 4"/>
+          <p:cNvPr id="2067826101" name="Text 4"/>
           <p:cNvSpPr/>
           <p:nvPr/>
         </p:nvSpPr>
@@ -6949,7 +7280,7 @@
       </p:sp>
       <p:sp>
         <p:nvSpPr>
-          <p:cNvPr id="1548884804" name="Shape 5"/>
+          <p:cNvPr id="261400660" name="Shape 5"/>
           <p:cNvSpPr/>
           <p:nvPr/>
         </p:nvSpPr>
@@ -6971,7 +7302,7 @@
       </p:sp>
       <p:sp>
         <p:nvSpPr>
-          <p:cNvPr id="895401534" name="Text 6"/>
+          <p:cNvPr id="1886403877" name="Text 6"/>
           <p:cNvSpPr/>
           <p:nvPr/>
         </p:nvSpPr>
@@ -7011,7 +7342,7 @@
       </p:sp>
       <p:sp>
         <p:nvSpPr>
-          <p:cNvPr id="1580007626" name="Shape 7"/>
+          <p:cNvPr id="1554400430" name="Shape 7"/>
           <p:cNvSpPr/>
           <p:nvPr/>
         </p:nvSpPr>
@@ -7038,7 +7369,7 @@
       </p:sp>
       <p:pic>
         <p:nvPicPr>
-          <p:cNvPr id="1136401550" name="Image 0" descr="preencoded.png"/>
+          <p:cNvPr id="517986320" name="Image 0" descr="preencoded.png"/>
           <p:cNvPicPr>
             <a:picLocks noChangeAspect="1"/>
           </p:cNvPicPr>
@@ -7060,7 +7391,7 @@
       </p:pic>
       <p:sp>
         <p:nvSpPr>
-          <p:cNvPr id="853926547" name="Text 8"/>
+          <p:cNvPr id="472861076" name="Text 8"/>
           <p:cNvSpPr/>
           <p:nvPr/>
         </p:nvSpPr>
@@ -7100,7 +7431,7 @@
       </p:sp>
       <p:sp>
         <p:nvSpPr>
-          <p:cNvPr id="1321752756" name="Shape 9"/>
+          <p:cNvPr id="1115625295" name="Shape 9"/>
           <p:cNvSpPr/>
           <p:nvPr/>
         </p:nvSpPr>
@@ -7122,7 +7453,7 @@
       </p:sp>
       <p:pic>
         <p:nvPicPr>
-          <p:cNvPr id="986487988" name="Image 1" descr="preencoded.png"/>
+          <p:cNvPr id="276619523" name="Image 1" descr="preencoded.png"/>
           <p:cNvPicPr>
             <a:picLocks noChangeAspect="1"/>
           </p:cNvPicPr>
@@ -7144,7 +7475,7 @@
       </p:pic>
       <p:sp>
         <p:nvSpPr>
-          <p:cNvPr id="415090814" name="Text 10"/>
+          <p:cNvPr id="1357583058" name="Text 10"/>
           <p:cNvSpPr/>
           <p:nvPr/>
         </p:nvSpPr>
@@ -7184,7 +7515,7 @@
       </p:sp>
       <p:pic>
         <p:nvPicPr>
-          <p:cNvPr id="302738948" name="Image 2" descr="preencoded.png"/>
+          <p:cNvPr id="1918268937" name="Image 2" descr="preencoded.png"/>
           <p:cNvPicPr>
             <a:picLocks noChangeAspect="1"/>
           </p:cNvPicPr>
@@ -7206,7 +7537,7 @@
       </p:pic>
       <p:sp>
         <p:nvSpPr>
-          <p:cNvPr id="1805372852" name="Shape 11"/>
+          <p:cNvPr id="1426842098" name="Shape 11"/>
           <p:cNvSpPr/>
           <p:nvPr/>
         </p:nvSpPr>
@@ -7233,7 +7564,7 @@
       </p:sp>
       <p:pic>
         <p:nvPicPr>
-          <p:cNvPr id="26281143" name="Image 3" descr="preencoded.png"/>
+          <p:cNvPr id="1721207671" name="Image 3" descr="preencoded.png"/>
           <p:cNvPicPr>
             <a:picLocks noChangeAspect="1"/>
           </p:cNvPicPr>
@@ -7255,7 +7586,7 @@
       </p:pic>
       <p:sp>
         <p:nvSpPr>
-          <p:cNvPr id="850175834" name="Text 12"/>
+          <p:cNvPr id="260710137" name="Text 12"/>
           <p:cNvSpPr/>
           <p:nvPr/>
         </p:nvSpPr>
@@ -7295,7 +7626,7 @@
       </p:sp>
       <p:sp>
         <p:nvSpPr>
-          <p:cNvPr id="611298099" name="Shape 13"/>
+          <p:cNvPr id="1805847328" name="Shape 13"/>
           <p:cNvSpPr/>
           <p:nvPr/>
         </p:nvSpPr>
@@ -7317,7 +7648,7 @@
       </p:sp>
       <p:pic>
         <p:nvPicPr>
-          <p:cNvPr id="1991223787" name="Image 4" descr="preencoded.png"/>
+          <p:cNvPr id="1698303158" name="Image 4" descr="preencoded.png"/>
           <p:cNvPicPr>
             <a:picLocks noChangeAspect="1"/>
           </p:cNvPicPr>
@@ -7339,7 +7670,7 @@
       </p:pic>
       <p:sp>
         <p:nvSpPr>
-          <p:cNvPr id="181328218" name="Text 14"/>
+          <p:cNvPr id="663634340" name="Text 14"/>
           <p:cNvSpPr/>
           <p:nvPr/>
         </p:nvSpPr>
@@ -7379,7 +7710,7 @@
       </p:sp>
       <p:pic>
         <p:nvPicPr>
-          <p:cNvPr id="1333664944" name="Image 5" descr="preencoded.png"/>
+          <p:cNvPr id="1905501594" name="Image 5" descr="preencoded.png"/>
           <p:cNvPicPr>
             <a:picLocks noChangeAspect="1"/>
           </p:cNvPicPr>
@@ -7401,7 +7732,7 @@
       </p:pic>
       <p:sp>
         <p:nvSpPr>
-          <p:cNvPr id="1776769370" name="Shape 15"/>
+          <p:cNvPr id="1633079293" name="Shape 15"/>
           <p:cNvSpPr/>
           <p:nvPr/>
         </p:nvSpPr>
@@ -7428,7 +7759,7 @@
       </p:sp>
       <p:pic>
         <p:nvPicPr>
-          <p:cNvPr id="80010968" name="Image 6" descr="preencoded.png"/>
+          <p:cNvPr id="1880012600" name="Image 6" descr="preencoded.png"/>
           <p:cNvPicPr>
             <a:picLocks noChangeAspect="1"/>
           </p:cNvPicPr>
@@ -7450,7 +7781,7 @@
       </p:pic>
       <p:sp>
         <p:nvSpPr>
-          <p:cNvPr id="104276845" name="Text 16"/>
+          <p:cNvPr id="97932304" name="Text 16"/>
           <p:cNvSpPr/>
           <p:nvPr/>
         </p:nvSpPr>
@@ -7490,7 +7821,7 @@
       </p:sp>
       <p:sp>
         <p:nvSpPr>
-          <p:cNvPr id="1955416287" name="Shape 17"/>
+          <p:cNvPr id="508898561" name="Shape 17"/>
           <p:cNvSpPr/>
           <p:nvPr/>
         </p:nvSpPr>
@@ -7512,7 +7843,7 @@
       </p:sp>
       <p:pic>
         <p:nvPicPr>
-          <p:cNvPr id="412915210" name="Image 7" descr="preencoded.png"/>
+          <p:cNvPr id="1791838451" name="Image 7" descr="preencoded.png"/>
           <p:cNvPicPr>
             <a:picLocks noChangeAspect="1"/>
           </p:cNvPicPr>
@@ -7534,7 +7865,7 @@
       </p:pic>
       <p:sp>
         <p:nvSpPr>
-          <p:cNvPr id="2048489571" name="Text 18"/>
+          <p:cNvPr id="1498874664" name="Text 18"/>
           <p:cNvSpPr/>
           <p:nvPr/>
         </p:nvSpPr>
@@ -7574,7 +7905,7 @@
       </p:sp>
       <p:pic>
         <p:nvPicPr>
-          <p:cNvPr id="205631526" name="Image 8" descr="preencoded.png"/>
+          <p:cNvPr id="847348489" name="Image 8" descr="preencoded.png"/>
           <p:cNvPicPr>
             <a:picLocks noChangeAspect="1"/>
           </p:cNvPicPr>
@@ -7596,7 +7927,7 @@
       </p:pic>
       <p:sp>
         <p:nvSpPr>
-          <p:cNvPr id="1702085206" name="Shape 19"/>
+          <p:cNvPr id="1953729026" name="Shape 19"/>
           <p:cNvSpPr/>
           <p:nvPr/>
         </p:nvSpPr>
@@ -7623,7 +7954,7 @@
       </p:sp>
       <p:pic>
         <p:nvPicPr>
-          <p:cNvPr id="676245563" name="Image 9" descr="preencoded.png"/>
+          <p:cNvPr id="1931022953" name="Image 9" descr="preencoded.png"/>
           <p:cNvPicPr>
             <a:picLocks noChangeAspect="1"/>
           </p:cNvPicPr>
@@ -7645,7 +7976,7 @@
       </p:pic>
       <p:sp>
         <p:nvSpPr>
-          <p:cNvPr id="1977099734" name="Text 20"/>
+          <p:cNvPr id="1106649639" name="Text 20"/>
           <p:cNvSpPr/>
           <p:nvPr/>
         </p:nvSpPr>
@@ -7685,7 +8016,7 @@
       </p:sp>
       <p:sp>
         <p:nvSpPr>
-          <p:cNvPr id="960288565" name="Shape 21"/>
+          <p:cNvPr id="12158433" name="Shape 21"/>
           <p:cNvSpPr/>
           <p:nvPr/>
         </p:nvSpPr>
@@ -7707,7 +8038,7 @@
       </p:sp>
       <p:pic>
         <p:nvPicPr>
-          <p:cNvPr id="551814628" name="Image 10" descr="preencoded.png"/>
+          <p:cNvPr id="324649955" name="Image 10" descr="preencoded.png"/>
           <p:cNvPicPr>
             <a:picLocks noChangeAspect="1"/>
           </p:cNvPicPr>
@@ -7729,7 +8060,7 @@
       </p:pic>
       <p:sp>
         <p:nvSpPr>
-          <p:cNvPr id="1381789958" name="Text 22"/>
+          <p:cNvPr id="1161221996" name="Text 22"/>
           <p:cNvSpPr/>
           <p:nvPr/>
         </p:nvSpPr>
@@ -7769,7 +8100,7 @@
       </p:sp>
       <p:pic>
         <p:nvPicPr>
-          <p:cNvPr id="1491236343" name="Image 11" descr="preencoded.png"/>
+          <p:cNvPr id="101360355" name="Image 11" descr="preencoded.png"/>
           <p:cNvPicPr>
             <a:picLocks noChangeAspect="1"/>
           </p:cNvPicPr>
@@ -7791,7 +8122,7 @@
       </p:pic>
       <p:sp>
         <p:nvSpPr>
-          <p:cNvPr id="377617997" name="Text 23"/>
+          <p:cNvPr id="964697904" name="Text 23"/>
           <p:cNvSpPr/>
           <p:nvPr/>
         </p:nvSpPr>
@@ -7831,7 +8162,7 @@
       </p:sp>
       <p:sp>
         <p:nvSpPr>
-          <p:cNvPr id="1378328643" name="Text 24"/>
+          <p:cNvPr id="1758896381" name="Text 24"/>
           <p:cNvSpPr/>
           <p:nvPr/>
         </p:nvSpPr>
@@ -7885,7 +8216,7 @@
 </p:sld>
 </file>
 
-<file path=ppt/slides/slide15.xml><?xml version="1.0" encoding="utf-8"?>
+<file path=ppt/slides/slide16.xml><?xml version="1.0" encoding="utf-8"?>
 <p:sld xmlns:a="http://schemas.openxmlformats.org/drawingml/2006/main" xmlns:r="http://schemas.openxmlformats.org/officeDocument/2006/relationships" xmlns:p="http://schemas.openxmlformats.org/presentationml/2006/main" xmlns:m="http://schemas.openxmlformats.org/officeDocument/2006/math" xmlns:w="http://schemas.openxmlformats.org/wordprocessingml/2006/main" xmlns:mc="http://schemas.openxmlformats.org/markup-compatibility/2006" showMasterPhAnim="0" showMasterSp="1" show="1">
   <p:cSld name="Slide 13">
     <p:bg>
@@ -7911,7 +8242,7 @@
       </p:grpSpPr>
       <p:sp>
         <p:nvSpPr>
-          <p:cNvPr id="983670220" name="Text 0"/>
+          <p:cNvPr id="1054047271" name="Text 0"/>
           <p:cNvSpPr/>
           <p:nvPr/>
         </p:nvSpPr>
@@ -7955,7 +8286,7 @@
       </p:sp>
       <p:sp>
         <p:nvSpPr>
-          <p:cNvPr id="812985650" name="Text 1"/>
+          <p:cNvPr id="1646126991" name="Text 1"/>
           <p:cNvSpPr/>
           <p:nvPr/>
         </p:nvSpPr>
@@ -7999,7 +8330,7 @@
       </p:sp>
       <p:sp>
         <p:nvSpPr>
-          <p:cNvPr id="1456687906" name="Text 2"/>
+          <p:cNvPr id="2088511702" name="Text 2"/>
           <p:cNvSpPr/>
           <p:nvPr/>
         </p:nvSpPr>
@@ -8043,7 +8374,7 @@
       </p:sp>
       <p:sp>
         <p:nvSpPr>
-          <p:cNvPr id="411193776" name="Shape 3"/>
+          <p:cNvPr id="870240640" name="Shape 3"/>
           <p:cNvSpPr/>
           <p:nvPr/>
         </p:nvSpPr>
@@ -8087,7 +8418,7 @@
       </p:sp>
       <p:pic>
         <p:nvPicPr>
-          <p:cNvPr id="1794958559" name="Image 1" descr="preencoded.png"/>
+          <p:cNvPr id="687472282" name="Image 1" descr="preencoded.png"/>
           <p:cNvPicPr>
             <a:picLocks noChangeAspect="1"/>
           </p:cNvPicPr>
@@ -8109,7 +8440,7 @@
       </p:pic>
       <p:sp>
         <p:nvSpPr>
-          <p:cNvPr id="1021250985" name="Text 4"/>
+          <p:cNvPr id="616662899" name="Text 4"/>
           <p:cNvSpPr/>
           <p:nvPr/>
         </p:nvSpPr>
@@ -8153,7 +8484,7 @@
       </p:sp>
       <p:sp>
         <p:nvSpPr>
-          <p:cNvPr id="1368109174" name="Text 5"/>
+          <p:cNvPr id="1458695600" name="Text 5"/>
           <p:cNvSpPr/>
           <p:nvPr/>
         </p:nvSpPr>
@@ -8197,7 +8528,7 @@
       </p:sp>
       <p:pic>
         <p:nvPicPr>
-          <p:cNvPr id="376131285" name="Image 2" descr="preencoded.png"/>
+          <p:cNvPr id="1619896171" name="Image 2" descr="preencoded.png"/>
           <p:cNvPicPr>
             <a:picLocks noChangeAspect="1"/>
           </p:cNvPicPr>
@@ -8219,7 +8550,7 @@
       </p:pic>
       <p:sp>
         <p:nvSpPr>
-          <p:cNvPr id="660828735" name="Shape 6"/>
+          <p:cNvPr id="570923223" name="Shape 6"/>
           <p:cNvSpPr/>
           <p:nvPr/>
         </p:nvSpPr>
@@ -8263,7 +8594,7 @@
       </p:sp>
       <p:pic>
         <p:nvPicPr>
-          <p:cNvPr id="1919259909" name="Image 3" descr="preencoded.png"/>
+          <p:cNvPr id="842850208" name="Image 3" descr="preencoded.png"/>
           <p:cNvPicPr>
             <a:picLocks noChangeAspect="1"/>
           </p:cNvPicPr>
@@ -8285,7 +8616,7 @@
       </p:pic>
       <p:sp>
         <p:nvSpPr>
-          <p:cNvPr id="471765669" name="Text 7"/>
+          <p:cNvPr id="2096475622" name="Text 7"/>
           <p:cNvSpPr/>
           <p:nvPr/>
         </p:nvSpPr>
@@ -8329,7 +8660,7 @@
       </p:sp>
       <p:sp>
         <p:nvSpPr>
-          <p:cNvPr id="1380614242" name="Text 8"/>
+          <p:cNvPr id="1253703631" name="Text 8"/>
           <p:cNvSpPr/>
           <p:nvPr/>
         </p:nvSpPr>
@@ -8373,7 +8704,7 @@
       </p:sp>
       <p:pic>
         <p:nvPicPr>
-          <p:cNvPr id="61426528" name="Image 4" descr="preencoded.png"/>
+          <p:cNvPr id="1102486125" name="Image 4" descr="preencoded.png"/>
           <p:cNvPicPr>
             <a:picLocks noChangeAspect="1"/>
           </p:cNvPicPr>
@@ -8395,7 +8726,7 @@
       </p:pic>
       <p:sp>
         <p:nvSpPr>
-          <p:cNvPr id="866539698" name="Shape 9"/>
+          <p:cNvPr id="479803" name="Shape 9"/>
           <p:cNvSpPr/>
           <p:nvPr/>
         </p:nvSpPr>
@@ -8439,7 +8770,7 @@
       </p:sp>
       <p:pic>
         <p:nvPicPr>
-          <p:cNvPr id="1311056119" name="Image 5" descr="preencoded.png"/>
+          <p:cNvPr id="1433020278" name="Image 5" descr="preencoded.png"/>
           <p:cNvPicPr>
             <a:picLocks noChangeAspect="1"/>
           </p:cNvPicPr>
@@ -8461,7 +8792,7 @@
       </p:pic>
       <p:sp>
         <p:nvSpPr>
-          <p:cNvPr id="1948421125" name="Text 10"/>
+          <p:cNvPr id="1937971886" name="Text 10"/>
           <p:cNvSpPr/>
           <p:nvPr/>
         </p:nvSpPr>
@@ -8505,7 +8836,7 @@
       </p:sp>
       <p:sp>
         <p:nvSpPr>
-          <p:cNvPr id="86892631" name="Text 11"/>
+          <p:cNvPr id="1170663096" name="Text 11"/>
           <p:cNvSpPr/>
           <p:nvPr/>
         </p:nvSpPr>
@@ -8549,7 +8880,7 @@
       </p:sp>
       <p:sp>
         <p:nvSpPr>
-          <p:cNvPr id="554137798" name="Text 12"/>
+          <p:cNvPr id="344153557" name="Text 12"/>
           <p:cNvSpPr/>
           <p:nvPr/>
         </p:nvSpPr>
@@ -8593,7 +8924,7 @@
       </p:sp>
       <p:sp>
         <p:nvSpPr>
-          <p:cNvPr id="1334544673" name="Text 13"/>
+          <p:cNvPr id="1296426069" name="Text 13"/>
           <p:cNvSpPr/>
           <p:nvPr/>
         </p:nvSpPr>
@@ -8651,7 +8982,7 @@
 </p:sld>
 </file>
 
-<file path=ppt/slides/slide16.xml><?xml version="1.0" encoding="utf-8"?>
+<file path=ppt/slides/slide17.xml><?xml version="1.0" encoding="utf-8"?>
 <p:sld xmlns:a="http://schemas.openxmlformats.org/drawingml/2006/main" xmlns:r="http://schemas.openxmlformats.org/officeDocument/2006/relationships" xmlns:p="http://schemas.openxmlformats.org/presentationml/2006/main" xmlns:m="http://schemas.openxmlformats.org/officeDocument/2006/math" xmlns:w="http://schemas.openxmlformats.org/wordprocessingml/2006/main" xmlns:mc="http://schemas.openxmlformats.org/markup-compatibility/2006" showMasterPhAnim="0" showMasterSp="1" show="1">
   <p:cSld name="Slide 14">
     <p:bg>
@@ -8677,7 +9008,7 @@
       </p:grpSpPr>
       <p:sp>
         <p:nvSpPr>
-          <p:cNvPr id="708235477" name="Text 0"/>
+          <p:cNvPr id="1523609990" name="Text 0"/>
           <p:cNvSpPr/>
           <p:nvPr/>
         </p:nvSpPr>
@@ -8717,7 +9048,7 @@
       </p:sp>
       <p:sp>
         <p:nvSpPr>
-          <p:cNvPr id="1554549611" name="Text 1"/>
+          <p:cNvPr id="1274310721" name="Text 1"/>
           <p:cNvSpPr/>
           <p:nvPr/>
         </p:nvSpPr>
@@ -8757,7 +9088,7 @@
       </p:sp>
       <p:sp>
         <p:nvSpPr>
-          <p:cNvPr id="393414265" name="Text 2"/>
+          <p:cNvPr id="1531671494" name="Text 2"/>
           <p:cNvSpPr/>
           <p:nvPr/>
         </p:nvSpPr>
@@ -8797,7 +9128,7 @@
       </p:sp>
       <p:sp>
         <p:nvSpPr>
-          <p:cNvPr id="1331533944" name="Text 18"/>
+          <p:cNvPr id="1483208597" name="Text 18"/>
           <p:cNvSpPr/>
           <p:nvPr/>
         </p:nvSpPr>
@@ -8837,7 +9168,7 @@
       </p:sp>
       <p:sp>
         <p:nvSpPr>
-          <p:cNvPr id="1768747500" name="Text 19"/>
+          <p:cNvPr id="844817201" name="Text 19"/>
           <p:cNvSpPr/>
           <p:nvPr/>
         </p:nvSpPr>
@@ -8877,7 +9208,7 @@
       </p:sp>
       <p:sp>
         <p:nvSpPr>
-          <p:cNvPr id="656771413" name="Shape 6"/>
+          <p:cNvPr id="1707347303" name="Shape 6"/>
           <p:cNvSpPr/>
           <p:nvPr/>
         </p:nvSpPr>
@@ -8899,7 +9230,7 @@
       </p:sp>
       <p:pic>
         <p:nvPicPr>
-          <p:cNvPr id="1098741391" name="Image 1" descr="preencoded.png"/>
+          <p:cNvPr id="803669266" name="Image 1" descr="preencoded.png"/>
           <p:cNvPicPr>
             <a:picLocks noChangeAspect="1"/>
           </p:cNvPicPr>
@@ -8921,7 +9252,7 @@
       </p:pic>
       <p:sp>
         <p:nvSpPr>
-          <p:cNvPr id="780326524" name="Text 7"/>
+          <p:cNvPr id="1676541733" name="Text 7"/>
           <p:cNvSpPr/>
           <p:nvPr/>
         </p:nvSpPr>
@@ -8961,7 +9292,7 @@
       </p:sp>
       <p:sp>
         <p:nvSpPr>
-          <p:cNvPr id="1206042569" name="Text 8"/>
+          <p:cNvPr id="279425583" name="Text 8"/>
           <p:cNvSpPr/>
           <p:nvPr/>
         </p:nvSpPr>
@@ -9001,7 +9332,7 @@
       </p:sp>
       <p:sp>
         <p:nvSpPr>
-          <p:cNvPr id="1893999567" name="Shape 9"/>
+          <p:cNvPr id="675038367" name="Shape 9"/>
           <p:cNvSpPr/>
           <p:nvPr/>
         </p:nvSpPr>
@@ -9023,7 +9354,7 @@
       </p:sp>
       <p:pic>
         <p:nvPicPr>
-          <p:cNvPr id="563638663" name="Image 2" descr="preencoded.png"/>
+          <p:cNvPr id="746707388" name="Image 2" descr="preencoded.png"/>
           <p:cNvPicPr>
             <a:picLocks noChangeAspect="1"/>
           </p:cNvPicPr>
@@ -9045,7 +9376,7 @@
       </p:pic>
       <p:sp>
         <p:nvSpPr>
-          <p:cNvPr id="1849260120" name="Text 10"/>
+          <p:cNvPr id="1066671676" name="Text 10"/>
           <p:cNvSpPr/>
           <p:nvPr/>
         </p:nvSpPr>
@@ -9085,7 +9416,7 @@
       </p:sp>
       <p:sp>
         <p:nvSpPr>
-          <p:cNvPr id="1714482402" name="Text 11"/>
+          <p:cNvPr id="680557794" name="Text 11"/>
           <p:cNvSpPr/>
           <p:nvPr/>
         </p:nvSpPr>
@@ -9125,7 +9456,7 @@
       </p:sp>
       <p:sp>
         <p:nvSpPr>
-          <p:cNvPr id="795730589" name="Shape 12"/>
+          <p:cNvPr id="1562000481" name="Shape 12"/>
           <p:cNvSpPr/>
           <p:nvPr/>
         </p:nvSpPr>
@@ -9147,7 +9478,7 @@
       </p:sp>
       <p:pic>
         <p:nvPicPr>
-          <p:cNvPr id="1335131656" name="Image 3" descr="preencoded.png"/>
+          <p:cNvPr id="1043770939" name="Image 3" descr="preencoded.png"/>
           <p:cNvPicPr>
             <a:picLocks noChangeAspect="1"/>
           </p:cNvPicPr>
@@ -9169,7 +9500,7 @@
       </p:pic>
       <p:sp>
         <p:nvSpPr>
-          <p:cNvPr id="279756862" name="Text 13"/>
+          <p:cNvPr id="1893673707" name="Text 13"/>
           <p:cNvSpPr/>
           <p:nvPr/>
         </p:nvSpPr>
@@ -9209,7 +9540,7 @@
       </p:sp>
       <p:sp>
         <p:nvSpPr>
-          <p:cNvPr id="143801638" name="Text 14"/>
+          <p:cNvPr id="310529238" name="Text 14"/>
           <p:cNvSpPr/>
           <p:nvPr/>
         </p:nvSpPr>
@@ -9249,7 +9580,7 @@
       </p:sp>
       <p:sp>
         <p:nvSpPr>
-          <p:cNvPr id="448521272" name="Shape 15"/>
+          <p:cNvPr id="1844576749" name="Shape 15"/>
           <p:cNvSpPr/>
           <p:nvPr/>
         </p:nvSpPr>
@@ -9271,7 +9602,7 @@
       </p:sp>
       <p:pic>
         <p:nvPicPr>
-          <p:cNvPr id="1664026404" name="Image 4" descr="preencoded.png"/>
+          <p:cNvPr id="218024376" name="Image 4" descr="preencoded.png"/>
           <p:cNvPicPr>
             <a:picLocks noChangeAspect="1"/>
           </p:cNvPicPr>
@@ -9293,7 +9624,7 @@
       </p:pic>
       <p:sp>
         <p:nvSpPr>
-          <p:cNvPr id="1152635229" name="Text 16"/>
+          <p:cNvPr id="1960784844" name="Text 16"/>
           <p:cNvSpPr/>
           <p:nvPr/>
         </p:nvSpPr>
@@ -9333,7 +9664,7 @@
       </p:sp>
       <p:sp>
         <p:nvSpPr>
-          <p:cNvPr id="1981522057" name="Text 17"/>
+          <p:cNvPr id="870698225" name="Text 17"/>
           <p:cNvSpPr/>
           <p:nvPr/>
         </p:nvSpPr>
@@ -9387,7 +9718,7 @@
 </p:sld>
 </file>
 
-<file path=ppt/slides/slide17.xml><?xml version="1.0" encoding="utf-8"?>
+<file path=ppt/slides/slide18.xml><?xml version="1.0" encoding="utf-8"?>
 <p:sld xmlns:a="http://schemas.openxmlformats.org/drawingml/2006/main" xmlns:r="http://schemas.openxmlformats.org/officeDocument/2006/relationships" xmlns:p="http://schemas.openxmlformats.org/presentationml/2006/main" xmlns:m="http://schemas.openxmlformats.org/officeDocument/2006/math" xmlns:w="http://schemas.openxmlformats.org/wordprocessingml/2006/main" xmlns:mc="http://schemas.openxmlformats.org/markup-compatibility/2006" showMasterPhAnim="0" showMasterSp="1" show="1">
   <p:cSld name="Slide 1">
     <p:bg>
@@ -9413,7 +9744,7 @@
       </p:grpSpPr>
       <p:sp>
         <p:nvSpPr>
-          <p:cNvPr id="909311052" name="Text 0"/>
+          <p:cNvPr id="770571526" name="Text 0"/>
           <p:cNvSpPr/>
           <p:nvPr/>
         </p:nvSpPr>
@@ -9453,7 +9784,7 @@
       </p:sp>
       <p:sp>
         <p:nvSpPr>
-          <p:cNvPr id="260425681" name="Text 1"/>
+          <p:cNvPr id="281819236" name="Text 1"/>
           <p:cNvSpPr/>
           <p:nvPr/>
         </p:nvSpPr>
@@ -9493,7 +9824,7 @@
       </p:sp>
       <p:sp>
         <p:nvSpPr>
-          <p:cNvPr id="289530840" name="Shape 5"/>
+          <p:cNvPr id="2055085229" name="Shape 5"/>
           <p:cNvSpPr/>
           <p:nvPr/>
         </p:nvSpPr>
@@ -9522,7 +9853,7 @@
       </p:sp>
       <p:sp>
         <p:nvSpPr>
-          <p:cNvPr id="1134274628" name="Shape 6"/>
+          <p:cNvPr id="1896132992" name="Shape 6"/>
           <p:cNvSpPr/>
           <p:nvPr/>
         </p:nvSpPr>
@@ -9542,7 +9873,7 @@
       </p:sp>
       <p:pic>
         <p:nvPicPr>
-          <p:cNvPr id="2135373552" name="Image 0" descr="shieldCheck.png"/>
+          <p:cNvPr id="1108003513" name="Image 0" descr="shieldCheck.png"/>
           <p:cNvPicPr>
             <a:picLocks noChangeAspect="1"/>
           </p:cNvPicPr>
@@ -9564,7 +9895,7 @@
       </p:pic>
       <p:sp>
         <p:nvSpPr>
-          <p:cNvPr id="1157695577" name="Text 7"/>
+          <p:cNvPr id="954115414" name="Text 7"/>
           <p:cNvSpPr/>
           <p:nvPr/>
         </p:nvSpPr>
@@ -9604,7 +9935,7 @@
       </p:sp>
       <p:sp>
         <p:nvSpPr>
-          <p:cNvPr id="1656696335" name="Text 8"/>
+          <p:cNvPr id="278879778" name="Text 8"/>
           <p:cNvSpPr/>
           <p:nvPr/>
         </p:nvSpPr>
@@ -9644,7 +9975,7 @@
       </p:sp>
       <p:sp>
         <p:nvSpPr>
-          <p:cNvPr id="474064816" name="Text 9"/>
+          <p:cNvPr id="1000732988" name="Text 9"/>
           <p:cNvSpPr/>
           <p:nvPr/>
         </p:nvSpPr>
@@ -9684,7 +10015,7 @@
       </p:sp>
       <p:sp>
         <p:nvSpPr>
-          <p:cNvPr id="567441994" name="Shape 10"/>
+          <p:cNvPr id="1441007722" name="Shape 10"/>
           <p:cNvSpPr/>
           <p:nvPr/>
         </p:nvSpPr>
@@ -9713,7 +10044,7 @@
       </p:sp>
       <p:sp>
         <p:nvSpPr>
-          <p:cNvPr id="878467247" name="Shape 11"/>
+          <p:cNvPr id="1116976517" name="Shape 11"/>
           <p:cNvSpPr/>
           <p:nvPr/>
         </p:nvSpPr>
@@ -9733,7 +10064,7 @@
       </p:sp>
       <p:pic>
         <p:nvPicPr>
-          <p:cNvPr id="968912364" name="Image 1" descr="ban.png"/>
+          <p:cNvPr id="2140804440" name="Image 1" descr="ban.png"/>
           <p:cNvPicPr>
             <a:picLocks noChangeAspect="1"/>
           </p:cNvPicPr>
@@ -9755,7 +10086,7 @@
       </p:pic>
       <p:sp>
         <p:nvSpPr>
-          <p:cNvPr id="1303422193" name="Text 12"/>
+          <p:cNvPr id="1172952048" name="Text 12"/>
           <p:cNvSpPr/>
           <p:nvPr/>
         </p:nvSpPr>
@@ -9795,7 +10126,7 @@
       </p:sp>
       <p:sp>
         <p:nvSpPr>
-          <p:cNvPr id="1512755079" name="Text 13"/>
+          <p:cNvPr id="1901710812" name="Text 13"/>
           <p:cNvSpPr/>
           <p:nvPr/>
         </p:nvSpPr>
@@ -9835,7 +10166,7 @@
       </p:sp>
       <p:sp>
         <p:nvSpPr>
-          <p:cNvPr id="292770041" name="Text 14"/>
+          <p:cNvPr id="1842363599" name="Text 14"/>
           <p:cNvSpPr/>
           <p:nvPr/>
         </p:nvSpPr>
@@ -9875,7 +10206,7 @@
       </p:sp>
       <p:sp>
         <p:nvSpPr>
-          <p:cNvPr id="1212528384" name="Shape 15"/>
+          <p:cNvPr id="44770837" name="Shape 15"/>
           <p:cNvSpPr/>
           <p:nvPr/>
         </p:nvSpPr>
@@ -9904,7 +10235,7 @@
       </p:sp>
       <p:sp>
         <p:nvSpPr>
-          <p:cNvPr id="1805362671" name="Shape 16"/>
+          <p:cNvPr id="1058309546" name="Shape 16"/>
           <p:cNvSpPr/>
           <p:nvPr/>
         </p:nvSpPr>
@@ -9924,7 +10255,7 @@
       </p:sp>
       <p:pic>
         <p:nvPicPr>
-          <p:cNvPr id="1157957156" name="Image 2" descr="clock.png"/>
+          <p:cNvPr id="1428647665" name="Image 2" descr="clock.png"/>
           <p:cNvPicPr>
             <a:picLocks noChangeAspect="1"/>
           </p:cNvPicPr>
@@ -9946,7 +10277,7 @@
       </p:pic>
       <p:sp>
         <p:nvSpPr>
-          <p:cNvPr id="884621882" name="Text 17"/>
+          <p:cNvPr id="1536826190" name="Text 17"/>
           <p:cNvSpPr/>
           <p:nvPr/>
         </p:nvSpPr>
@@ -9986,7 +10317,7 @@
       </p:sp>
       <p:sp>
         <p:nvSpPr>
-          <p:cNvPr id="722967521" name="Text 18"/>
+          <p:cNvPr id="539994455" name="Text 18"/>
           <p:cNvSpPr/>
           <p:nvPr/>
         </p:nvSpPr>
@@ -10026,7 +10357,7 @@
       </p:sp>
       <p:sp>
         <p:nvSpPr>
-          <p:cNvPr id="2092448760" name="Text 19"/>
+          <p:cNvPr id="1677647139" name="Text 19"/>
           <p:cNvSpPr/>
           <p:nvPr/>
         </p:nvSpPr>
@@ -10066,7 +10397,7 @@
       </p:sp>
       <p:sp>
         <p:nvSpPr>
-          <p:cNvPr id="510287075" name="Shape 20"/>
+          <p:cNvPr id="661726934" name="Shape 20"/>
           <p:cNvSpPr/>
           <p:nvPr/>
         </p:nvSpPr>
@@ -10095,7 +10426,7 @@
       </p:sp>
       <p:sp>
         <p:nvSpPr>
-          <p:cNvPr id="446485275" name="Shape 21"/>
+          <p:cNvPr id="300100848" name="Shape 21"/>
           <p:cNvSpPr/>
           <p:nvPr/>
         </p:nvSpPr>
@@ -10115,7 +10446,7 @@
       </p:sp>
       <p:pic>
         <p:nvPicPr>
-          <p:cNvPr id="1236292866" name="Image 3" descr="qr.png"/>
+          <p:cNvPr id="611029356" name="Image 3" descr="qr.png"/>
           <p:cNvPicPr>
             <a:picLocks noChangeAspect="1"/>
           </p:cNvPicPr>
@@ -10137,7 +10468,7 @@
       </p:pic>
       <p:sp>
         <p:nvSpPr>
-          <p:cNvPr id="513939070" name="Text 22"/>
+          <p:cNvPr id="1552030793" name="Text 22"/>
           <p:cNvSpPr/>
           <p:nvPr/>
         </p:nvSpPr>
@@ -10177,7 +10508,7 @@
       </p:sp>
       <p:sp>
         <p:nvSpPr>
-          <p:cNvPr id="1752425860" name="Text 23"/>
+          <p:cNvPr id="636995486" name="Text 23"/>
           <p:cNvSpPr/>
           <p:nvPr/>
         </p:nvSpPr>
@@ -10217,7 +10548,7 @@
       </p:sp>
       <p:sp>
         <p:nvSpPr>
-          <p:cNvPr id="1482948435" name="Text 24"/>
+          <p:cNvPr id="891331238" name="Text 24"/>
           <p:cNvSpPr/>
           <p:nvPr/>
         </p:nvSpPr>
@@ -10257,7 +10588,7 @@
       </p:sp>
       <p:sp>
         <p:nvSpPr>
-          <p:cNvPr id="627433027" name="Shape 25"/>
+          <p:cNvPr id="614556470" name="Shape 25"/>
           <p:cNvSpPr/>
           <p:nvPr/>
         </p:nvSpPr>
@@ -10286,7 +10617,7 @@
       </p:sp>
       <p:sp>
         <p:nvSpPr>
-          <p:cNvPr id="1297596562" name="Shape 26"/>
+          <p:cNvPr id="1303912834" name="Shape 26"/>
           <p:cNvSpPr/>
           <p:nvPr/>
         </p:nvSpPr>
@@ -10306,7 +10637,7 @@
       </p:sp>
       <p:pic>
         <p:nvPicPr>
-          <p:cNvPr id="1929287752" name="Image 4" descr="phone.png"/>
+          <p:cNvPr id="84527758" name="Image 4" descr="phone.png"/>
           <p:cNvPicPr>
             <a:picLocks noChangeAspect="1"/>
           </p:cNvPicPr>
@@ -10328,7 +10659,7 @@
       </p:pic>
       <p:sp>
         <p:nvSpPr>
-          <p:cNvPr id="2001353737" name="Text 27"/>
+          <p:cNvPr id="1525602589" name="Text 27"/>
           <p:cNvSpPr/>
           <p:nvPr/>
         </p:nvSpPr>
@@ -10368,7 +10699,7 @@
       </p:sp>
       <p:sp>
         <p:nvSpPr>
-          <p:cNvPr id="133975450" name="Text 28"/>
+          <p:cNvPr id="623868941" name="Text 28"/>
           <p:cNvSpPr/>
           <p:nvPr/>
         </p:nvSpPr>
@@ -10408,7 +10739,7 @@
       </p:sp>
       <p:sp>
         <p:nvSpPr>
-          <p:cNvPr id="638997980" name="Text 29"/>
+          <p:cNvPr id="930101415" name="Text 29"/>
           <p:cNvSpPr/>
           <p:nvPr/>
         </p:nvSpPr>
@@ -10448,7 +10779,7 @@
       </p:sp>
       <p:sp>
         <p:nvSpPr>
-          <p:cNvPr id="988252741" name="Shape 30"/>
+          <p:cNvPr id="2095214932" name="Shape 30"/>
           <p:cNvSpPr/>
           <p:nvPr/>
         </p:nvSpPr>
@@ -10477,7 +10808,7 @@
       </p:sp>
       <p:sp>
         <p:nvSpPr>
-          <p:cNvPr id="2143320688" name="Shape 31"/>
+          <p:cNvPr id="123546357" name="Shape 31"/>
           <p:cNvSpPr/>
           <p:nvPr/>
         </p:nvSpPr>
@@ -10497,7 +10828,7 @@
       </p:sp>
       <p:pic>
         <p:nvPicPr>
-          <p:cNvPr id="299464185" name="Image 5" descr="fingerprint.png"/>
+          <p:cNvPr id="855635134" name="Image 5" descr="fingerprint.png"/>
           <p:cNvPicPr>
             <a:picLocks noChangeAspect="1"/>
           </p:cNvPicPr>
@@ -10519,7 +10850,7 @@
       </p:pic>
       <p:sp>
         <p:nvSpPr>
-          <p:cNvPr id="1199256499" name="Text 32"/>
+          <p:cNvPr id="442472138" name="Text 32"/>
           <p:cNvSpPr/>
           <p:nvPr/>
         </p:nvSpPr>
@@ -10559,7 +10890,7 @@
       </p:sp>
       <p:sp>
         <p:nvSpPr>
-          <p:cNvPr id="646678030" name="Text 33"/>
+          <p:cNvPr id="1245626241" name="Text 33"/>
           <p:cNvSpPr/>
           <p:nvPr/>
         </p:nvSpPr>
@@ -10599,7 +10930,7 @@
       </p:sp>
       <p:sp>
         <p:nvSpPr>
-          <p:cNvPr id="280631309" name="Text 34"/>
+          <p:cNvPr id="1076633589" name="Text 34"/>
           <p:cNvSpPr/>
           <p:nvPr/>
         </p:nvSpPr>
@@ -10639,7 +10970,7 @@
       </p:sp>
       <p:sp>
         <p:nvSpPr>
-          <p:cNvPr id="721203007" name="Text 35"/>
+          <p:cNvPr id="665110296" name="Text 35"/>
           <p:cNvSpPr/>
           <p:nvPr/>
         </p:nvSpPr>
@@ -10674,751 +11005,6 @@
               <a:t>Illustrative sample metrics shaped around the system's actual QR rotation, polling, and token-window settings — replace with real telemetry once logging is wired up.</a:t>
             </a:r>
             <a:endParaRPr lang="en-US" sz="900"/>
-          </a:p>
-        </p:txBody>
-      </p:sp>
-    </p:spTree>
-  </p:cSld>
-  <p:clrMapOvr>
-    <a:masterClrMapping/>
-  </p:clrMapOvr>
-  <mc:AlternateContent xmlns:mc="http://schemas.openxmlformats.org/markup-compatibility/2006">
-    <mc:Choice xmlns:p159="http://schemas.microsoft.com/office/powerpoint/2015/09/main" xmlns:p14="http://schemas.microsoft.com/office/powerpoint/2010/main" Requires="p159">
-      <p:transition p14:dur="500" advClick="1"/>
-    </mc:Choice>
-    <mc:Fallback>
-      <p:transition advClick="1"/>
-    </mc:Fallback>
-  </mc:AlternateContent>
-</p:sld>
-</file>
-
-<file path=ppt/slides/slide18.xml><?xml version="1.0" encoding="utf-8"?>
-<p:sld xmlns:a="http://schemas.openxmlformats.org/drawingml/2006/main" xmlns:r="http://schemas.openxmlformats.org/officeDocument/2006/relationships" xmlns:p="http://schemas.openxmlformats.org/presentationml/2006/main" xmlns:m="http://schemas.openxmlformats.org/officeDocument/2006/math" xmlns:w="http://schemas.openxmlformats.org/wordprocessingml/2006/main" xmlns:mc="http://schemas.openxmlformats.org/markup-compatibility/2006" showMasterPhAnim="0" showMasterSp="1" show="1">
-  <p:cSld name="">
-    <p:spTree>
-      <p:nvGrpSpPr>
-        <p:cNvPr id="1" name=""/>
-        <p:cNvGrpSpPr/>
-        <p:nvPr/>
-      </p:nvGrpSpPr>
-      <p:grpSpPr bwMode="auto">
-        <a:xfrm>
-          <a:off x="0" y="0"/>
-          <a:ext cx="0" cy="0"/>
-          <a:chOff x="0" y="0"/>
-          <a:chExt cx="0" cy="0"/>
-        </a:xfrm>
-      </p:grpSpPr>
-      <p:sp>
-        <p:nvSpPr>
-          <p:cNvPr id="466403076" name="TextBox 1"/>
-          <p:cNvSpPr txBox="1"/>
-          <p:nvPr/>
-        </p:nvSpPr>
-        <p:spPr bwMode="auto">
-          <a:xfrm>
-            <a:off x="548640" y="384048"/>
-            <a:ext cx="10515600" cy="274320"/>
-          </a:xfrm>
-          <a:prstGeom prst="rect">
-            <a:avLst/>
-          </a:prstGeom>
-          <a:noFill/>
-        </p:spPr>
-        <p:txBody>
-          <a:bodyPr wrap="square" lIns="0" tIns="0" rIns="0" bIns="0" anchor="t">
-            <a:spAutoFit/>
-          </a:bodyPr>
-          <a:lstStyle/>
-          <a:p>
-            <a:pPr>
-              <a:defRPr/>
-            </a:pPr>
-            <a:r>
-              <a:rPr sz="1200" b="1">
-                <a:solidFill>
-                  <a:srgbClr val="4F46E5"/>
-                </a:solidFill>
-                <a:latin typeface="Calibri"/>
-              </a:rPr>
-              <a:t>SOURCES</a:t>
-            </a:r>
-            <a:endParaRPr/>
-          </a:p>
-        </p:txBody>
-      </p:sp>
-      <p:sp>
-        <p:nvSpPr>
-          <p:cNvPr id="1699015795" name="TextBox 2"/>
-          <p:cNvSpPr txBox="1"/>
-          <p:nvPr/>
-        </p:nvSpPr>
-        <p:spPr bwMode="auto">
-          <a:xfrm>
-            <a:off x="548640" y="896492"/>
-            <a:ext cx="10515600" cy="685800"/>
-          </a:xfrm>
-          <a:prstGeom prst="rect">
-            <a:avLst/>
-          </a:prstGeom>
-          <a:noFill/>
-        </p:spPr>
-        <p:txBody>
-          <a:bodyPr wrap="square" lIns="0" tIns="0" rIns="0" bIns="0" anchor="t">
-            <a:spAutoFit/>
-          </a:bodyPr>
-          <a:lstStyle/>
-          <a:p>
-            <a:pPr>
-              <a:defRPr/>
-            </a:pPr>
-            <a:r>
-              <a:rPr sz="3400" b="1">
-                <a:solidFill>
-                  <a:srgbClr val="0F172A"/>
-                </a:solidFill>
-                <a:latin typeface="Arial"/>
-              </a:rPr>
-              <a:t>References</a:t>
-            </a:r>
-            <a:endParaRPr/>
-          </a:p>
-        </p:txBody>
-      </p:sp>
-      <p:sp>
-        <p:nvSpPr>
-          <p:cNvPr id="1066271052" name="Rounded Rectangle 4"/>
-          <p:cNvSpPr/>
-          <p:nvPr/>
-        </p:nvSpPr>
-        <p:spPr bwMode="auto">
-          <a:xfrm flipH="0" flipV="0">
-            <a:off x="548640" y="1664017"/>
-            <a:ext cx="11183112" cy="4551044"/>
-          </a:xfrm>
-          <a:prstGeom prst="roundRect">
-            <a:avLst>
-              <a:gd name="adj" fmla="val 5128"/>
-            </a:avLst>
-          </a:prstGeom>
-          <a:solidFill>
-            <a:srgbClr val="F8FAFC"/>
-          </a:solidFill>
-          <a:ln w="12700">
-            <a:solidFill>
-              <a:srgbClr val="E2E8F0"/>
-            </a:solidFill>
-          </a:ln>
-          <a:effectLst/>
-        </p:spPr>
-        <p:style>
-          <a:lnRef idx="1">
-            <a:schemeClr val="accent1"/>
-          </a:lnRef>
-          <a:fillRef idx="3">
-            <a:schemeClr val="accent1"/>
-          </a:fillRef>
-          <a:effectRef idx="2">
-            <a:schemeClr val="accent1"/>
-          </a:effectRef>
-          <a:fontRef idx="minor">
-            <a:schemeClr val="lt1"/>
-          </a:fontRef>
-        </p:style>
-        <p:txBody>
-          <a:bodyPr rtlCol="0" anchor="ctr"/>
-          <a:lstStyle/>
-          <a:p>
-            <a:pPr algn="ctr">
-              <a:defRPr/>
-            </a:pPr>
-            <a:endParaRPr/>
-          </a:p>
-        </p:txBody>
-      </p:sp>
-      <p:sp>
-        <p:nvSpPr>
-          <p:cNvPr id="1136996432" name="TextBox 5"/>
-          <p:cNvSpPr txBox="1"/>
-          <p:nvPr/>
-        </p:nvSpPr>
-        <p:spPr bwMode="auto">
-          <a:xfrm flipH="0" flipV="0">
-            <a:off x="841246" y="1889738"/>
-            <a:ext cx="10026940" cy="3899259"/>
-          </a:xfrm>
-          <a:prstGeom prst="rect">
-            <a:avLst/>
-          </a:prstGeom>
-          <a:noFill/>
-        </p:spPr>
-        <p:txBody>
-          <a:bodyPr wrap="square" lIns="0" tIns="0" rIns="0" bIns="0">
-            <a:spAutoFit/>
-          </a:bodyPr>
-          <a:lstStyle/>
-          <a:p>
-            <a:pPr>
-              <a:lnSpc>
-                <a:spcPct val="150000"/>
-              </a:lnSpc>
-              <a:defRPr/>
-            </a:pPr>
-            <a:r>
-              <a:rPr sz="1000" b="1">
-                <a:solidFill>
-                  <a:srgbClr val="475569"/>
-                </a:solidFill>
-                <a:latin typeface="Calibri"/>
-              </a:rPr>
-              <a:t>1.  </a:t>
-            </a:r>
-            <a:r>
-              <a:rPr lang="en-US" sz="1000" b="1" i="0" u="none" strike="noStrike" cap="none" spc="0">
-                <a:solidFill>
-                  <a:srgbClr val="475569"/>
-                </a:solidFill>
-                <a:latin typeface="Calibri"/>
-                <a:ea typeface="Calibri"/>
-                <a:cs typeface="Calibri"/>
-              </a:rPr>
-              <a:t>Student Attendance System Using QR Code:</a:t>
-            </a:r>
-            <a:endParaRPr sz="1000" b="1" i="0" u="none" strike="noStrike" cap="none" spc="0">
-              <a:solidFill>
-                <a:srgbClr val="475569"/>
-              </a:solidFill>
-              <a:latin typeface="Calibri"/>
-              <a:cs typeface="Calibri"/>
-            </a:endParaRPr>
-          </a:p>
-          <a:p>
-            <a:pPr>
-              <a:lnSpc>
-                <a:spcPct val="150000"/>
-              </a:lnSpc>
-              <a:spcAft>
-                <a:spcPts val="499"/>
-              </a:spcAft>
-              <a:defRPr/>
-            </a:pPr>
-            <a:r>
-              <a:rPr lang="en-US" sz="1000" b="1" i="0" u="none" strike="noStrike" cap="none" spc="0">
-                <a:solidFill>
-                  <a:srgbClr val="475569"/>
-                </a:solidFill>
-                <a:latin typeface="Calibri"/>
-                <a:ea typeface="Calibri"/>
-                <a:cs typeface="Calibri"/>
-              </a:rPr>
-              <a:t>https://www.researchgate.net/publication/370480492_Fraud_Mitigation_in_Attendance_Monitoring_Systems_using_Dynamic_QR_Code_Geofencing_and_IMEI_Technologies</a:t>
-            </a:r>
-            <a:endParaRPr sz="2200">
-              <a:solidFill>
-                <a:srgbClr val="475569"/>
-              </a:solidFill>
-            </a:endParaRPr>
-          </a:p>
-          <a:p>
-            <a:pPr>
-              <a:lnSpc>
-                <a:spcPct val="150000"/>
-              </a:lnSpc>
-              <a:spcAft>
-                <a:spcPts val="500"/>
-              </a:spcAft>
-              <a:defRPr/>
-            </a:pPr>
-            <a:r>
-              <a:rPr sz="1000" b="1">
-                <a:solidFill>
-                  <a:srgbClr val="475569"/>
-                </a:solidFill>
-                <a:latin typeface="Calibri"/>
-              </a:rPr>
-              <a:t> 2.  </a:t>
-            </a:r>
-            <a:r>
-              <a:rPr lang="en-US" sz="1000" b="1" i="0" u="none" strike="noStrike" cap="none" spc="0">
-                <a:solidFill>
-                  <a:srgbClr val="475569"/>
-                </a:solidFill>
-                <a:latin typeface="Calibri"/>
-                <a:ea typeface="Calibri"/>
-                <a:cs typeface="Calibri"/>
-              </a:rPr>
-              <a:t>https://www.academia.edu/116222825/Fraud_Mitigation_in_Attendance_Monitoring_Systems_using_Dynamic_QR_Code_Geofencing_and_IMEI_Technologies</a:t>
-            </a:r>
-            <a:endParaRPr sz="2200">
-              <a:solidFill>
-                <a:srgbClr val="475569"/>
-              </a:solidFill>
-            </a:endParaRPr>
-          </a:p>
-          <a:p>
-            <a:pPr>
-              <a:lnSpc>
-                <a:spcPct val="150000"/>
-              </a:lnSpc>
-              <a:spcAft>
-                <a:spcPts val="500"/>
-              </a:spcAft>
-              <a:defRPr/>
-            </a:pPr>
-            <a:r>
-              <a:rPr sz="1000" b="1">
-                <a:solidFill>
-                  <a:srgbClr val="475569"/>
-                </a:solidFill>
-                <a:latin typeface="Calibri"/>
-              </a:rPr>
-              <a:t> 3.  </a:t>
-            </a:r>
-            <a:r>
-              <a:rPr lang="en-US" sz="1000" b="1" i="0" u="none" strike="noStrike" cap="none" spc="0">
-                <a:solidFill>
-                  <a:srgbClr val="475569"/>
-                </a:solidFill>
-                <a:latin typeface="Calibri"/>
-                <a:ea typeface="Calibri"/>
-                <a:cs typeface="Calibri"/>
-              </a:rPr>
-              <a:t>https://www.researchgate.net/publication/398552187_QR_Code-Based_Attendance_Systems_in_Education_A_Systematic_Literature_Review_on_Data_Accuracy_and_Sustainable_School_Management</a:t>
-            </a:r>
-            <a:endParaRPr sz="2200">
-              <a:solidFill>
-                <a:srgbClr val="475569"/>
-              </a:solidFill>
-            </a:endParaRPr>
-          </a:p>
-          <a:p>
-            <a:pPr>
-              <a:lnSpc>
-                <a:spcPct val="150000"/>
-              </a:lnSpc>
-              <a:spcAft>
-                <a:spcPts val="500"/>
-              </a:spcAft>
-              <a:defRPr/>
-            </a:pPr>
-            <a:r>
-              <a:rPr sz="1000" b="1">
-                <a:solidFill>
-                  <a:srgbClr val="475569"/>
-                </a:solidFill>
-                <a:latin typeface="Calibri"/>
-              </a:rPr>
-              <a:t> 4.  </a:t>
-            </a:r>
-            <a:r>
-              <a:rPr lang="en-US" sz="1000" b="1" i="0" u="none" strike="noStrike" cap="none" spc="0">
-                <a:solidFill>
-                  <a:srgbClr val="475569"/>
-                </a:solidFill>
-                <a:latin typeface="Calibri"/>
-                <a:ea typeface="Calibri"/>
-                <a:cs typeface="Calibri"/>
-              </a:rPr>
-              <a:t>https://www.scribd.com/document/1068356136/A-dynamic-geofencing-and-dwell-time-validation-system-for-secure-attendance-tracking-in-higher-education-methodological-proposal</a:t>
-            </a:r>
-            <a:endParaRPr sz="2200">
-              <a:solidFill>
-                <a:srgbClr val="475569"/>
-              </a:solidFill>
-            </a:endParaRPr>
-          </a:p>
-          <a:p>
-            <a:pPr>
-              <a:lnSpc>
-                <a:spcPct val="150000"/>
-              </a:lnSpc>
-              <a:spcAft>
-                <a:spcPts val="500"/>
-              </a:spcAft>
-              <a:defRPr/>
-            </a:pPr>
-            <a:r>
-              <a:rPr sz="1000" b="1">
-                <a:solidFill>
-                  <a:srgbClr val="475569"/>
-                </a:solidFill>
-                <a:latin typeface="Calibri"/>
-              </a:rPr>
-              <a:t> 5.  </a:t>
-            </a:r>
-            <a:r>
-              <a:rPr lang="en-US" sz="1000" b="1" i="0" u="none" strike="noStrike" cap="none" spc="0">
-                <a:solidFill>
-                  <a:srgbClr val="475569"/>
-                </a:solidFill>
-                <a:latin typeface="Calibri"/>
-                <a:ea typeface="Calibri"/>
-                <a:cs typeface="Calibri"/>
-              </a:rPr>
-              <a:t>https://research-portal.uea.ac.uk/en/publications/fraud-mitigation-in-attendance-monitoring-systems-using-dynamic-q/</a:t>
-            </a:r>
-            <a:endParaRPr sz="2200">
-              <a:solidFill>
-                <a:srgbClr val="475569"/>
-              </a:solidFill>
-            </a:endParaRPr>
-          </a:p>
-          <a:p>
-            <a:pPr>
-              <a:lnSpc>
-                <a:spcPct val="150000"/>
-              </a:lnSpc>
-              <a:spcAft>
-                <a:spcPts val="500"/>
-              </a:spcAft>
-              <a:defRPr/>
-            </a:pPr>
-            <a:r>
-              <a:rPr sz="1000" b="1">
-                <a:solidFill>
-                  <a:srgbClr val="475569"/>
-                </a:solidFill>
-                <a:latin typeface="Calibri"/>
-              </a:rPr>
-              <a:t> 6. </a:t>
-            </a:r>
-            <a:r>
-              <a:rPr lang="en-US" sz="1000" b="1" i="0" u="none" strike="noStrike" cap="none" spc="0">
-                <a:solidFill>
-                  <a:srgbClr val="475569"/>
-                </a:solidFill>
-                <a:latin typeface="Calibri"/>
-                <a:ea typeface="Calibri"/>
-                <a:cs typeface="Calibri"/>
-              </a:rPr>
-              <a:t>https://www.ijasi.org/index.php/ijasi/article/view/138</a:t>
-            </a:r>
-            <a:endParaRPr sz="2200">
-              <a:solidFill>
-                <a:srgbClr val="475569"/>
-              </a:solidFill>
-            </a:endParaRPr>
-          </a:p>
-          <a:p>
-            <a:pPr>
-              <a:lnSpc>
-                <a:spcPct val="150000"/>
-              </a:lnSpc>
-              <a:spcAft>
-                <a:spcPts val="500"/>
-              </a:spcAft>
-              <a:defRPr/>
-            </a:pPr>
-            <a:r>
-              <a:rPr sz="1000" b="1">
-                <a:solidFill>
-                  <a:srgbClr val="475569"/>
-                </a:solidFill>
-                <a:latin typeface="Calibri"/>
-              </a:rPr>
-              <a:t> 7.  </a:t>
-            </a:r>
-            <a:r>
-              <a:rPr lang="en-US" sz="1000" b="1" i="0" u="none" strike="noStrike" cap="none" spc="0">
-                <a:solidFill>
-                  <a:srgbClr val="475569"/>
-                </a:solidFill>
-                <a:latin typeface="Calibri"/>
-                <a:ea typeface="Calibri"/>
-                <a:cs typeface="Calibri"/>
-              </a:rPr>
-              <a:t>https://proceeding.raskhamedia.or.id/index.php/cessmuds/article/download/14/13</a:t>
-            </a:r>
-            <a:endParaRPr sz="2200">
-              <a:solidFill>
-                <a:srgbClr val="475569"/>
-              </a:solidFill>
-            </a:endParaRPr>
-          </a:p>
-          <a:p>
-            <a:pPr>
-              <a:lnSpc>
-                <a:spcPct val="150000"/>
-              </a:lnSpc>
-              <a:spcAft>
-                <a:spcPts val="500"/>
-              </a:spcAft>
-              <a:defRPr/>
-            </a:pPr>
-            <a:r>
-              <a:rPr lang="en-US" sz="1000" b="1" i="0" u="none" strike="noStrike" cap="none" spc="0">
-                <a:solidFill>
-                  <a:srgbClr val="475569"/>
-                </a:solidFill>
-                <a:latin typeface="Calibri"/>
-                <a:ea typeface="Calibri"/>
-                <a:cs typeface="Calibri"/>
-              </a:rPr>
-              <a:t> 8.  </a:t>
-            </a:r>
-            <a:r>
-              <a:rPr lang="en-US" sz="1000" b="1" i="0" u="none" strike="noStrike" cap="none" spc="0">
-                <a:solidFill>
-                  <a:srgbClr val="475569"/>
-                </a:solidFill>
-                <a:latin typeface="Calibri"/>
-                <a:ea typeface="Calibri"/>
-                <a:cs typeface="Calibri"/>
-              </a:rPr>
-              <a:t>http://rsisinternational.org/journals/ijriss/uploads/vol10-iss1-pg7855-7867-202602_pdf.pdf</a:t>
-            </a:r>
-            <a:endParaRPr sz="2200">
-              <a:solidFill>
-                <a:srgbClr val="475569"/>
-              </a:solidFill>
-            </a:endParaRPr>
-          </a:p>
-          <a:p>
-            <a:pPr>
-              <a:lnSpc>
-                <a:spcPct val="150000"/>
-              </a:lnSpc>
-              <a:spcAft>
-                <a:spcPts val="500"/>
-              </a:spcAft>
-              <a:defRPr/>
-            </a:pPr>
-            <a:r>
-              <a:rPr lang="en-US" sz="1000" b="1" i="0" u="none" strike="noStrike" cap="none" spc="0">
-                <a:solidFill>
-                  <a:srgbClr val="475569"/>
-                </a:solidFill>
-                <a:latin typeface="Calibri"/>
-                <a:ea typeface="Calibri"/>
-                <a:cs typeface="Calibri"/>
-              </a:rPr>
-              <a:t> 9.  </a:t>
-            </a:r>
-            <a:r>
-              <a:rPr lang="en-US" sz="1000" b="1" i="0" u="none" strike="noStrike" cap="none" spc="0">
-                <a:solidFill>
-                  <a:srgbClr val="475569"/>
-                </a:solidFill>
-                <a:latin typeface="Calibri"/>
-                <a:ea typeface="Calibri"/>
-                <a:cs typeface="Calibri"/>
-              </a:rPr>
-              <a:t>https://journal.cattleyadf.org/index.php/jatilima/article/download/2281/1281/8642</a:t>
-            </a:r>
-            <a:endParaRPr sz="2200">
-              <a:solidFill>
-                <a:srgbClr val="475569"/>
-              </a:solidFill>
-            </a:endParaRPr>
-          </a:p>
-          <a:p>
-            <a:pPr>
-              <a:lnSpc>
-                <a:spcPct val="150000"/>
-              </a:lnSpc>
-              <a:spcAft>
-                <a:spcPts val="500"/>
-              </a:spcAft>
-              <a:defRPr/>
-            </a:pPr>
-            <a:r>
-              <a:rPr lang="en-US" sz="1000" b="1" i="0" u="none" strike="noStrike" cap="none" spc="0">
-                <a:solidFill>
-                  <a:srgbClr val="475569"/>
-                </a:solidFill>
-                <a:latin typeface="Calibri"/>
-                <a:ea typeface="Calibri"/>
-                <a:cs typeface="Calibri"/>
-              </a:rPr>
-              <a:t> 10.  </a:t>
-            </a:r>
-            <a:r>
-              <a:rPr sz="1000" b="1">
-                <a:solidFill>
-                  <a:srgbClr val="475569"/>
-                </a:solidFill>
-                <a:latin typeface="Calibri"/>
-              </a:rPr>
-              <a:t> </a:t>
-            </a:r>
-            <a:r>
-              <a:rPr lang="en-US" sz="1000" b="1" i="0" u="none" strike="noStrike" cap="none" spc="0">
-                <a:solidFill>
-                  <a:srgbClr val="475569"/>
-                </a:solidFill>
-                <a:latin typeface="Calibri"/>
-                <a:ea typeface="Calibri"/>
-                <a:cs typeface="Calibri"/>
-              </a:rPr>
-              <a:t>https://www.scribd.com/document/853501940/QR-Code-Based-Student-Attendance-System-Rushi</a:t>
-            </a:r>
-            <a:endParaRPr sz="2200">
-              <a:solidFill>
-                <a:srgbClr val="475569"/>
-              </a:solidFill>
-            </a:endParaRPr>
-          </a:p>
-          <a:p>
-            <a:pPr>
-              <a:lnSpc>
-                <a:spcPct val="150000"/>
-              </a:lnSpc>
-              <a:spcAft>
-                <a:spcPts val="500"/>
-              </a:spcAft>
-              <a:defRPr/>
-            </a:pPr>
-            <a:r>
-              <a:rPr lang="en-US" sz="1000" b="1" i="0" u="none" strike="noStrike" cap="none" spc="0">
-                <a:solidFill>
-                  <a:srgbClr val="475569"/>
-                </a:solidFill>
-                <a:latin typeface="Calibri"/>
-                <a:ea typeface="Calibri"/>
-                <a:cs typeface="Calibri"/>
-              </a:rPr>
-              <a:t> 11.  </a:t>
-            </a:r>
-            <a:r>
-              <a:rPr lang="en-US" sz="1000" b="1" i="0" u="none" strike="noStrike" cap="none" spc="0">
-                <a:solidFill>
-                  <a:srgbClr val="475569"/>
-                </a:solidFill>
-                <a:latin typeface="Calibri"/>
-                <a:ea typeface="Calibri"/>
-                <a:cs typeface="Calibri"/>
-              </a:rPr>
-              <a:t>https://papers.ssrn.com/sol3/Delivery.cfm/6614320.pdf?abstractid=6614320&amp;mirid=1</a:t>
-            </a:r>
-            <a:endParaRPr sz="2200">
-              <a:solidFill>
-                <a:srgbClr val="475569"/>
-              </a:solidFill>
-            </a:endParaRPr>
-          </a:p>
-          <a:p>
-            <a:pPr>
-              <a:lnSpc>
-                <a:spcPct val="150000"/>
-              </a:lnSpc>
-              <a:spcAft>
-                <a:spcPts val="500"/>
-              </a:spcAft>
-              <a:defRPr/>
-            </a:pPr>
-            <a:r>
-              <a:rPr lang="en-US" sz="1000" b="1" i="0" u="none" strike="noStrike" cap="none" spc="0">
-                <a:solidFill>
-                  <a:srgbClr val="475569"/>
-                </a:solidFill>
-                <a:latin typeface="Calibri"/>
-                <a:ea typeface="Calibri"/>
-                <a:cs typeface="Calibri"/>
-              </a:rPr>
-              <a:t> 12.  </a:t>
-            </a:r>
-            <a:r>
-              <a:rPr sz="1000" b="1">
-                <a:solidFill>
-                  <a:srgbClr val="475569"/>
-                </a:solidFill>
-                <a:latin typeface="Calibri"/>
-              </a:rPr>
-              <a:t> </a:t>
-            </a:r>
-            <a:r>
-              <a:rPr lang="en-US" sz="1000" b="1" i="0" u="none" strike="noStrike" cap="none" spc="0">
-                <a:solidFill>
-                  <a:srgbClr val="475569"/>
-                </a:solidFill>
-                <a:latin typeface="Calibri"/>
-                <a:ea typeface="Calibri"/>
-                <a:cs typeface="Calibri"/>
-              </a:rPr>
-              <a:t>https://www.ijert.org/attendify-a-cloud-based-multi-factor-attendance-system-using-qr-code-facial-recognition-and-geofencing-ijertv15is040611</a:t>
-            </a:r>
-            <a:endParaRPr sz="2200">
-              <a:solidFill>
-                <a:srgbClr val="475569"/>
-              </a:solidFill>
-            </a:endParaRPr>
-          </a:p>
-        </p:txBody>
-      </p:sp>
-      <p:sp>
-        <p:nvSpPr>
-          <p:cNvPr id="1486395127" name="TextBox 8"/>
-          <p:cNvSpPr txBox="1"/>
-          <p:nvPr/>
-        </p:nvSpPr>
-        <p:spPr bwMode="auto">
-          <a:xfrm>
-            <a:off x="457200" y="6473952"/>
-            <a:ext cx="5486400" cy="274320"/>
-          </a:xfrm>
-          <a:prstGeom prst="rect">
-            <a:avLst/>
-          </a:prstGeom>
-          <a:noFill/>
-        </p:spPr>
-        <p:txBody>
-          <a:bodyPr wrap="square" lIns="0" tIns="0" rIns="0" bIns="0" anchor="t">
-            <a:spAutoFit/>
-          </a:bodyPr>
-          <a:lstStyle/>
-          <a:p>
-            <a:pPr algn="l">
-              <a:defRPr/>
-            </a:pPr>
-            <a:r>
-              <a:rPr sz="900" b="0">
-                <a:solidFill>
-                  <a:srgbClr val="64748B"/>
-                </a:solidFill>
-                <a:latin typeface="Calibri"/>
-              </a:rPr>
-              <a:t>MarkIt  ·  References</a:t>
-            </a:r>
-            <a:endParaRPr/>
-          </a:p>
-        </p:txBody>
-      </p:sp>
-      <p:sp>
-        <p:nvSpPr>
-          <p:cNvPr id="1630891409" name="TextBox 9"/>
-          <p:cNvSpPr txBox="1"/>
-          <p:nvPr/>
-        </p:nvSpPr>
-        <p:spPr bwMode="auto">
-          <a:xfrm>
-            <a:off x="11274552" y="6473952"/>
-            <a:ext cx="457200" cy="274320"/>
-          </a:xfrm>
-          <a:prstGeom prst="rect">
-            <a:avLst/>
-          </a:prstGeom>
-          <a:noFill/>
-        </p:spPr>
-        <p:txBody>
-          <a:bodyPr wrap="square" lIns="0" tIns="0" rIns="0" bIns="0" anchor="t">
-            <a:spAutoFit/>
-          </a:bodyPr>
-          <a:lstStyle/>
-          <a:p>
-            <a:pPr algn="r">
-              <a:defRPr/>
-            </a:pPr>
-            <a:r>
-              <a:rPr sz="900" b="0">
-                <a:solidFill>
-                  <a:srgbClr val="64748B"/>
-                </a:solidFill>
-                <a:latin typeface="Calibri"/>
-              </a:rPr>
-              <a:t>18</a:t>
-            </a:r>
-            <a:endParaRPr/>
           </a:p>
         </p:txBody>
       </p:sp>
@@ -11440,14 +11026,7 @@
 
 <file path=ppt/slides/slide19.xml><?xml version="1.0" encoding="utf-8"?>
 <p:sld xmlns:a="http://schemas.openxmlformats.org/drawingml/2006/main" xmlns:r="http://schemas.openxmlformats.org/officeDocument/2006/relationships" xmlns:p="http://schemas.openxmlformats.org/presentationml/2006/main" xmlns:m="http://schemas.openxmlformats.org/officeDocument/2006/math" xmlns:w="http://schemas.openxmlformats.org/wordprocessingml/2006/main" xmlns:mc="http://schemas.openxmlformats.org/markup-compatibility/2006" showMasterPhAnim="0" showMasterSp="1" show="1">
-  <p:cSld name="Slide 16">
-    <p:bg>
-      <p:bgPr shadeToTitle="0">
-        <a:solidFill>
-          <a:srgbClr val="1E1B4B"/>
-        </a:solidFill>
-      </p:bgPr>
-    </p:bg>
+  <p:cSld name="">
     <p:spTree>
       <p:nvGrpSpPr>
         <p:cNvPr id="1" name=""/>
@@ -11462,174 +11041,646 @@
           <a:chExt cx="0" cy="0"/>
         </a:xfrm>
       </p:grpSpPr>
-      <p:pic>
-        <p:nvPicPr>
-          <p:cNvPr id="1475517624" name="Image 0" descr="preencoded.png"/>
-          <p:cNvPicPr>
-            <a:picLocks noChangeAspect="1"/>
-          </p:cNvPicPr>
-          <p:nvPr/>
-        </p:nvPicPr>
-        <p:blipFill rotWithShape="1">
-          <a:blip r:embed="rId3"/>
-          <a:stretch/>
-        </p:blipFill>
-        <p:spPr bwMode="auto">
-          <a:xfrm>
-            <a:off x="0" y="0"/>
-            <a:ext cx="12191695" cy="6858000"/>
-          </a:xfrm>
-          <a:prstGeom prst="rect">
-            <a:avLst/>
-          </a:prstGeom>
-        </p:spPr>
-      </p:pic>
-      <p:pic>
-        <p:nvPicPr>
-          <p:cNvPr id="1301124118" name="Image 1" descr="preencoded.png"/>
-          <p:cNvPicPr>
-            <a:picLocks noChangeAspect="1"/>
-          </p:cNvPicPr>
-          <p:nvPr/>
-        </p:nvPicPr>
-        <p:blipFill rotWithShape="1">
-          <a:blip r:embed="rId4"/>
-          <a:stretch/>
-        </p:blipFill>
-        <p:spPr bwMode="auto">
-          <a:xfrm>
-            <a:off x="5638648" y="1965960"/>
-            <a:ext cx="914400" cy="914400"/>
-          </a:xfrm>
-          <a:prstGeom prst="rect">
-            <a:avLst/>
-          </a:prstGeom>
-        </p:spPr>
-      </p:pic>
-      <p:sp>
-        <p:nvSpPr>
-          <p:cNvPr id="1959420656" name="Text 0"/>
-          <p:cNvSpPr/>
-          <p:nvPr/>
-        </p:nvSpPr>
-        <p:spPr bwMode="auto">
-          <a:xfrm>
-            <a:off x="0" y="3063240"/>
-            <a:ext cx="12191695" cy="868680"/>
-          </a:xfrm>
-          <a:prstGeom prst="rect">
-            <a:avLst/>
-          </a:prstGeom>
-          <a:noFill/>
-          <a:ln/>
-        </p:spPr>
-        <p:txBody>
-          <a:bodyPr wrap="square" lIns="0" tIns="0" rIns="0" bIns="0" rtlCol="0" anchor="ctr"/>
-          <a:lstStyle/>
-          <a:p>
-            <a:pPr marL="0" indent="0" algn="ctr">
-              <a:buNone/>
-              <a:defRPr/>
-            </a:pPr>
-            <a:r>
-              <a:rPr lang="en-US" sz="4600" b="1">
-                <a:solidFill>
-                  <a:srgbClr val="FFFFFF"/>
+      <p:sp>
+        <p:nvSpPr>
+          <p:cNvPr id="1934421736" name="TextBox 1"/>
+          <p:cNvSpPr txBox="1"/>
+          <p:nvPr/>
+        </p:nvSpPr>
+        <p:spPr bwMode="auto">
+          <a:xfrm>
+            <a:off x="548640" y="384048"/>
+            <a:ext cx="10515600" cy="274320"/>
+          </a:xfrm>
+          <a:prstGeom prst="rect">
+            <a:avLst/>
+          </a:prstGeom>
+          <a:noFill/>
+        </p:spPr>
+        <p:txBody>
+          <a:bodyPr wrap="square" lIns="0" tIns="0" rIns="0" bIns="0" anchor="t">
+            <a:spAutoFit/>
+          </a:bodyPr>
+          <a:lstStyle/>
+          <a:p>
+            <a:pPr>
+              <a:defRPr/>
+            </a:pPr>
+            <a:r>
+              <a:rPr sz="1200" b="1">
+                <a:solidFill>
+                  <a:srgbClr val="4F46E5"/>
+                </a:solidFill>
+                <a:latin typeface="Calibri"/>
+              </a:rPr>
+              <a:t>SOURCES</a:t>
+            </a:r>
+            <a:endParaRPr/>
+          </a:p>
+        </p:txBody>
+      </p:sp>
+      <p:sp>
+        <p:nvSpPr>
+          <p:cNvPr id="1086882458" name="TextBox 2"/>
+          <p:cNvSpPr txBox="1"/>
+          <p:nvPr/>
+        </p:nvSpPr>
+        <p:spPr bwMode="auto">
+          <a:xfrm>
+            <a:off x="548640" y="896492"/>
+            <a:ext cx="10515600" cy="685800"/>
+          </a:xfrm>
+          <a:prstGeom prst="rect">
+            <a:avLst/>
+          </a:prstGeom>
+          <a:noFill/>
+        </p:spPr>
+        <p:txBody>
+          <a:bodyPr wrap="square" lIns="0" tIns="0" rIns="0" bIns="0" anchor="t">
+            <a:spAutoFit/>
+          </a:bodyPr>
+          <a:lstStyle/>
+          <a:p>
+            <a:pPr>
+              <a:defRPr/>
+            </a:pPr>
+            <a:r>
+              <a:rPr sz="3400" b="1">
+                <a:solidFill>
+                  <a:srgbClr val="0F172A"/>
                 </a:solidFill>
                 <a:latin typeface="Arial"/>
-                <a:ea typeface="Arial"/>
-                <a:cs typeface="Arial"/>
-              </a:rPr>
-              <a:t>Thank You</a:t>
-            </a:r>
-            <a:endParaRPr lang="en-US" sz="4600"/>
-          </a:p>
-        </p:txBody>
-      </p:sp>
-      <p:sp>
-        <p:nvSpPr>
-          <p:cNvPr id="1476655407" name="Text 1"/>
-          <p:cNvSpPr/>
-          <p:nvPr/>
-        </p:nvSpPr>
-        <p:spPr bwMode="auto">
-          <a:xfrm>
-            <a:off x="0" y="3886200"/>
-            <a:ext cx="12191695" cy="457200"/>
-          </a:xfrm>
-          <a:prstGeom prst="rect">
-            <a:avLst/>
-          </a:prstGeom>
-          <a:noFill/>
-          <a:ln/>
-        </p:spPr>
-        <p:txBody>
-          <a:bodyPr wrap="square" lIns="0" tIns="0" rIns="0" bIns="0" rtlCol="0" anchor="ctr"/>
-          <a:lstStyle/>
-          <a:p>
-            <a:pPr marL="0" indent="0" algn="ctr">
-              <a:buNone/>
-              <a:defRPr/>
-            </a:pPr>
-            <a:r>
-              <a:rPr lang="en-US" sz="1800" i="1">
-                <a:solidFill>
-                  <a:srgbClr val="DDD6FE"/>
+              </a:rPr>
+              <a:t>References</a:t>
+            </a:r>
+            <a:endParaRPr/>
+          </a:p>
+        </p:txBody>
+      </p:sp>
+      <p:sp>
+        <p:nvSpPr>
+          <p:cNvPr id="1434818395" name="Rounded Rectangle 4"/>
+          <p:cNvSpPr/>
+          <p:nvPr/>
+        </p:nvSpPr>
+        <p:spPr bwMode="auto">
+          <a:xfrm flipH="0" flipV="0">
+            <a:off x="548640" y="1664017"/>
+            <a:ext cx="11183112" cy="4551044"/>
+          </a:xfrm>
+          <a:prstGeom prst="roundRect">
+            <a:avLst>
+              <a:gd name="adj" fmla="val 5128"/>
+            </a:avLst>
+          </a:prstGeom>
+          <a:solidFill>
+            <a:srgbClr val="F8FAFC"/>
+          </a:solidFill>
+          <a:ln w="12700">
+            <a:solidFill>
+              <a:srgbClr val="E2E8F0"/>
+            </a:solidFill>
+          </a:ln>
+          <a:effectLst/>
+        </p:spPr>
+        <p:style>
+          <a:lnRef idx="1">
+            <a:schemeClr val="accent1"/>
+          </a:lnRef>
+          <a:fillRef idx="3">
+            <a:schemeClr val="accent1"/>
+          </a:fillRef>
+          <a:effectRef idx="2">
+            <a:schemeClr val="accent1"/>
+          </a:effectRef>
+          <a:fontRef idx="minor">
+            <a:schemeClr val="lt1"/>
+          </a:fontRef>
+        </p:style>
+        <p:txBody>
+          <a:bodyPr rtlCol="0" anchor="ctr"/>
+          <a:lstStyle/>
+          <a:p>
+            <a:pPr algn="ctr">
+              <a:defRPr/>
+            </a:pPr>
+            <a:endParaRPr/>
+          </a:p>
+        </p:txBody>
+      </p:sp>
+      <p:sp>
+        <p:nvSpPr>
+          <p:cNvPr id="1619581304" name="TextBox 5"/>
+          <p:cNvSpPr txBox="1"/>
+          <p:nvPr/>
+        </p:nvSpPr>
+        <p:spPr bwMode="auto">
+          <a:xfrm flipH="0" flipV="0">
+            <a:off x="841246" y="1889738"/>
+            <a:ext cx="10026940" cy="3899259"/>
+          </a:xfrm>
+          <a:prstGeom prst="rect">
+            <a:avLst/>
+          </a:prstGeom>
+          <a:noFill/>
+        </p:spPr>
+        <p:txBody>
+          <a:bodyPr wrap="square" lIns="0" tIns="0" rIns="0" bIns="0">
+            <a:spAutoFit/>
+          </a:bodyPr>
+          <a:lstStyle/>
+          <a:p>
+            <a:pPr>
+              <a:lnSpc>
+                <a:spcPct val="150000"/>
+              </a:lnSpc>
+              <a:defRPr/>
+            </a:pPr>
+            <a:r>
+              <a:rPr sz="1000" b="1">
+                <a:solidFill>
+                  <a:srgbClr val="475569"/>
+                </a:solidFill>
+                <a:latin typeface="Calibri"/>
+              </a:rPr>
+              <a:t>1.  </a:t>
+            </a:r>
+            <a:r>
+              <a:rPr lang="en-US" sz="1000" b="1" i="0" u="none" strike="noStrike" cap="none" spc="0">
+                <a:solidFill>
+                  <a:srgbClr val="475569"/>
                 </a:solidFill>
                 <a:latin typeface="Calibri"/>
                 <a:ea typeface="Calibri"/>
                 <a:cs typeface="Calibri"/>
               </a:rPr>
-              <a:t>Questions &amp; Discussion</a:t>
-            </a:r>
-            <a:endParaRPr lang="en-US" sz="1800"/>
-          </a:p>
-        </p:txBody>
-      </p:sp>
-      <p:sp>
-        <p:nvSpPr>
-          <p:cNvPr id="1871860868" name="Text 2"/>
-          <p:cNvSpPr/>
-          <p:nvPr/>
-        </p:nvSpPr>
-        <p:spPr bwMode="auto">
-          <a:xfrm>
-            <a:off x="0" y="5989320"/>
-            <a:ext cx="12191695" cy="320040"/>
-          </a:xfrm>
-          <a:prstGeom prst="rect">
-            <a:avLst/>
-          </a:prstGeom>
-          <a:noFill/>
-          <a:ln/>
-        </p:spPr>
-        <p:txBody>
-          <a:bodyPr wrap="square" lIns="0" tIns="0" rIns="0" bIns="0" rtlCol="0" anchor="ctr"/>
-          <a:lstStyle/>
-          <a:p>
-            <a:pPr marL="0" indent="0" algn="ctr">
-              <a:buNone/>
-              <a:defRPr/>
-            </a:pPr>
-            <a:r>
-              <a:rPr lang="en-US" sz="1200">
-                <a:solidFill>
-                  <a:srgbClr val="A5B4FC"/>
+              <a:t>Student Attendance System Using QR Code:</a:t>
+            </a:r>
+            <a:endParaRPr sz="1000" b="1" i="0" u="none" strike="noStrike" cap="none" spc="0">
+              <a:solidFill>
+                <a:srgbClr val="475569"/>
+              </a:solidFill>
+              <a:latin typeface="Calibri"/>
+              <a:cs typeface="Calibri"/>
+            </a:endParaRPr>
+          </a:p>
+          <a:p>
+            <a:pPr>
+              <a:lnSpc>
+                <a:spcPct val="150000"/>
+              </a:lnSpc>
+              <a:spcAft>
+                <a:spcPts val="499"/>
+              </a:spcAft>
+              <a:defRPr/>
+            </a:pPr>
+            <a:r>
+              <a:rPr lang="en-US" sz="1000" b="1" i="0" u="none" strike="noStrike" cap="none" spc="0">
+                <a:solidFill>
+                  <a:srgbClr val="475569"/>
                 </a:solidFill>
                 <a:latin typeface="Calibri"/>
                 <a:ea typeface="Calibri"/>
                 <a:cs typeface="Calibri"/>
               </a:rPr>
-              <a:t>MarkIt  ·  Smart attendance tracking for modern classrooms</a:t>
-            </a:r>
-            <a:endParaRPr lang="en-US" sz="1200"/>
-          </a:p>
-        </p:txBody>
-      </p:sp>
-      <p:sp>
-        <p:nvSpPr>
-          <p:cNvPr id="1164531607" name="Text 3"/>
-          <p:cNvSpPr/>
+              <a:t>https://www.researchgate.net/publication/370480492_Fraud_Mitigation_in_Attendance_Monitoring_Systems_using_Dynamic_QR_Code_Geofencing_and_IMEI_Technologies</a:t>
+            </a:r>
+            <a:endParaRPr sz="2200">
+              <a:solidFill>
+                <a:srgbClr val="475569"/>
+              </a:solidFill>
+            </a:endParaRPr>
+          </a:p>
+          <a:p>
+            <a:pPr>
+              <a:lnSpc>
+                <a:spcPct val="150000"/>
+              </a:lnSpc>
+              <a:spcAft>
+                <a:spcPts val="500"/>
+              </a:spcAft>
+              <a:defRPr/>
+            </a:pPr>
+            <a:r>
+              <a:rPr sz="1000" b="1">
+                <a:solidFill>
+                  <a:srgbClr val="475569"/>
+                </a:solidFill>
+                <a:latin typeface="Calibri"/>
+              </a:rPr>
+              <a:t> 2.  </a:t>
+            </a:r>
+            <a:r>
+              <a:rPr lang="en-US" sz="1000" b="1" i="0" u="none" strike="noStrike" cap="none" spc="0">
+                <a:solidFill>
+                  <a:srgbClr val="475569"/>
+                </a:solidFill>
+                <a:latin typeface="Calibri"/>
+                <a:ea typeface="Calibri"/>
+                <a:cs typeface="Calibri"/>
+              </a:rPr>
+              <a:t>https://www.academia.edu/116222825/Fraud_Mitigation_in_Attendance_Monitoring_Systems_using_Dynamic_QR_Code_Geofencing_and_IMEI_Technologies</a:t>
+            </a:r>
+            <a:endParaRPr sz="2200">
+              <a:solidFill>
+                <a:srgbClr val="475569"/>
+              </a:solidFill>
+            </a:endParaRPr>
+          </a:p>
+          <a:p>
+            <a:pPr>
+              <a:lnSpc>
+                <a:spcPct val="150000"/>
+              </a:lnSpc>
+              <a:spcAft>
+                <a:spcPts val="500"/>
+              </a:spcAft>
+              <a:defRPr/>
+            </a:pPr>
+            <a:r>
+              <a:rPr sz="1000" b="1">
+                <a:solidFill>
+                  <a:srgbClr val="475569"/>
+                </a:solidFill>
+                <a:latin typeface="Calibri"/>
+              </a:rPr>
+              <a:t> 3.  </a:t>
+            </a:r>
+            <a:r>
+              <a:rPr lang="en-US" sz="1000" b="1" i="0" u="none" strike="noStrike" cap="none" spc="0">
+                <a:solidFill>
+                  <a:srgbClr val="475569"/>
+                </a:solidFill>
+                <a:latin typeface="Calibri"/>
+                <a:ea typeface="Calibri"/>
+                <a:cs typeface="Calibri"/>
+              </a:rPr>
+              <a:t>https://www.researchgate.net/publication/398552187_QR_Code-Based_Attendance_Systems_in_Education_A_Systematic_Literature_Review_on_Data_Accuracy_and_Sustainable_School_Management</a:t>
+            </a:r>
+            <a:endParaRPr sz="2200">
+              <a:solidFill>
+                <a:srgbClr val="475569"/>
+              </a:solidFill>
+            </a:endParaRPr>
+          </a:p>
+          <a:p>
+            <a:pPr>
+              <a:lnSpc>
+                <a:spcPct val="150000"/>
+              </a:lnSpc>
+              <a:spcAft>
+                <a:spcPts val="500"/>
+              </a:spcAft>
+              <a:defRPr/>
+            </a:pPr>
+            <a:r>
+              <a:rPr sz="1000" b="1">
+                <a:solidFill>
+                  <a:srgbClr val="475569"/>
+                </a:solidFill>
+                <a:latin typeface="Calibri"/>
+              </a:rPr>
+              <a:t> 4.  </a:t>
+            </a:r>
+            <a:r>
+              <a:rPr lang="en-US" sz="1000" b="1" i="0" u="none" strike="noStrike" cap="none" spc="0">
+                <a:solidFill>
+                  <a:srgbClr val="475569"/>
+                </a:solidFill>
+                <a:latin typeface="Calibri"/>
+                <a:ea typeface="Calibri"/>
+                <a:cs typeface="Calibri"/>
+              </a:rPr>
+              <a:t>https://www.scribd.com/document/1068356136/A-dynamic-geofencing-and-dwell-time-validation-system-for-secure-attendance-tracking-in-higher-education-methodological-proposal</a:t>
+            </a:r>
+            <a:endParaRPr sz="2200">
+              <a:solidFill>
+                <a:srgbClr val="475569"/>
+              </a:solidFill>
+            </a:endParaRPr>
+          </a:p>
+          <a:p>
+            <a:pPr>
+              <a:lnSpc>
+                <a:spcPct val="150000"/>
+              </a:lnSpc>
+              <a:spcAft>
+                <a:spcPts val="500"/>
+              </a:spcAft>
+              <a:defRPr/>
+            </a:pPr>
+            <a:r>
+              <a:rPr sz="1000" b="1">
+                <a:solidFill>
+                  <a:srgbClr val="475569"/>
+                </a:solidFill>
+                <a:latin typeface="Calibri"/>
+              </a:rPr>
+              <a:t> 5.  </a:t>
+            </a:r>
+            <a:r>
+              <a:rPr lang="en-US" sz="1000" b="1" i="0" u="none" strike="noStrike" cap="none" spc="0">
+                <a:solidFill>
+                  <a:srgbClr val="475569"/>
+                </a:solidFill>
+                <a:latin typeface="Calibri"/>
+                <a:ea typeface="Calibri"/>
+                <a:cs typeface="Calibri"/>
+              </a:rPr>
+              <a:t>https://research-portal.uea.ac.uk/en/publications/fraud-mitigation-in-attendance-monitoring-systems-using-dynamic-q/</a:t>
+            </a:r>
+            <a:endParaRPr sz="2200">
+              <a:solidFill>
+                <a:srgbClr val="475569"/>
+              </a:solidFill>
+            </a:endParaRPr>
+          </a:p>
+          <a:p>
+            <a:pPr>
+              <a:lnSpc>
+                <a:spcPct val="150000"/>
+              </a:lnSpc>
+              <a:spcAft>
+                <a:spcPts val="500"/>
+              </a:spcAft>
+              <a:defRPr/>
+            </a:pPr>
+            <a:r>
+              <a:rPr sz="1000" b="1">
+                <a:solidFill>
+                  <a:srgbClr val="475569"/>
+                </a:solidFill>
+                <a:latin typeface="Calibri"/>
+              </a:rPr>
+              <a:t> 6. </a:t>
+            </a:r>
+            <a:r>
+              <a:rPr lang="en-US" sz="1000" b="1" i="0" u="none" strike="noStrike" cap="none" spc="0">
+                <a:solidFill>
+                  <a:srgbClr val="475569"/>
+                </a:solidFill>
+                <a:latin typeface="Calibri"/>
+                <a:ea typeface="Calibri"/>
+                <a:cs typeface="Calibri"/>
+              </a:rPr>
+              <a:t>https://www.ijasi.org/index.php/ijasi/article/view/138</a:t>
+            </a:r>
+            <a:endParaRPr sz="2200">
+              <a:solidFill>
+                <a:srgbClr val="475569"/>
+              </a:solidFill>
+            </a:endParaRPr>
+          </a:p>
+          <a:p>
+            <a:pPr>
+              <a:lnSpc>
+                <a:spcPct val="150000"/>
+              </a:lnSpc>
+              <a:spcAft>
+                <a:spcPts val="500"/>
+              </a:spcAft>
+              <a:defRPr/>
+            </a:pPr>
+            <a:r>
+              <a:rPr sz="1000" b="1">
+                <a:solidFill>
+                  <a:srgbClr val="475569"/>
+                </a:solidFill>
+                <a:latin typeface="Calibri"/>
+              </a:rPr>
+              <a:t> 7.  </a:t>
+            </a:r>
+            <a:r>
+              <a:rPr lang="en-US" sz="1000" b="1" i="0" u="none" strike="noStrike" cap="none" spc="0">
+                <a:solidFill>
+                  <a:srgbClr val="475569"/>
+                </a:solidFill>
+                <a:latin typeface="Calibri"/>
+                <a:ea typeface="Calibri"/>
+                <a:cs typeface="Calibri"/>
+              </a:rPr>
+              <a:t>https://proceeding.raskhamedia.or.id/index.php/cessmuds/article/download/14/13</a:t>
+            </a:r>
+            <a:endParaRPr sz="2200">
+              <a:solidFill>
+                <a:srgbClr val="475569"/>
+              </a:solidFill>
+            </a:endParaRPr>
+          </a:p>
+          <a:p>
+            <a:pPr>
+              <a:lnSpc>
+                <a:spcPct val="150000"/>
+              </a:lnSpc>
+              <a:spcAft>
+                <a:spcPts val="500"/>
+              </a:spcAft>
+              <a:defRPr/>
+            </a:pPr>
+            <a:r>
+              <a:rPr lang="en-US" sz="1000" b="1" i="0" u="none" strike="noStrike" cap="none" spc="0">
+                <a:solidFill>
+                  <a:srgbClr val="475569"/>
+                </a:solidFill>
+                <a:latin typeface="Calibri"/>
+                <a:ea typeface="Calibri"/>
+                <a:cs typeface="Calibri"/>
+              </a:rPr>
+              <a:t> 8.  </a:t>
+            </a:r>
+            <a:r>
+              <a:rPr lang="en-US" sz="1000" b="1" i="0" u="none" strike="noStrike" cap="none" spc="0">
+                <a:solidFill>
+                  <a:srgbClr val="475569"/>
+                </a:solidFill>
+                <a:latin typeface="Calibri"/>
+                <a:ea typeface="Calibri"/>
+                <a:cs typeface="Calibri"/>
+              </a:rPr>
+              <a:t>http://rsisinternational.org/journals/ijriss/uploads/vol10-iss1-pg7855-7867-202602_pdf.pdf</a:t>
+            </a:r>
+            <a:endParaRPr sz="2200">
+              <a:solidFill>
+                <a:srgbClr val="475569"/>
+              </a:solidFill>
+            </a:endParaRPr>
+          </a:p>
+          <a:p>
+            <a:pPr>
+              <a:lnSpc>
+                <a:spcPct val="150000"/>
+              </a:lnSpc>
+              <a:spcAft>
+                <a:spcPts val="500"/>
+              </a:spcAft>
+              <a:defRPr/>
+            </a:pPr>
+            <a:r>
+              <a:rPr lang="en-US" sz="1000" b="1" i="0" u="none" strike="noStrike" cap="none" spc="0">
+                <a:solidFill>
+                  <a:srgbClr val="475569"/>
+                </a:solidFill>
+                <a:latin typeface="Calibri"/>
+                <a:ea typeface="Calibri"/>
+                <a:cs typeface="Calibri"/>
+              </a:rPr>
+              <a:t> 9.  </a:t>
+            </a:r>
+            <a:r>
+              <a:rPr lang="en-US" sz="1000" b="1" i="0" u="none" strike="noStrike" cap="none" spc="0">
+                <a:solidFill>
+                  <a:srgbClr val="475569"/>
+                </a:solidFill>
+                <a:latin typeface="Calibri"/>
+                <a:ea typeface="Calibri"/>
+                <a:cs typeface="Calibri"/>
+              </a:rPr>
+              <a:t>https://journal.cattleyadf.org/index.php/jatilima/article/download/2281/1281/8642</a:t>
+            </a:r>
+            <a:endParaRPr sz="2200">
+              <a:solidFill>
+                <a:srgbClr val="475569"/>
+              </a:solidFill>
+            </a:endParaRPr>
+          </a:p>
+          <a:p>
+            <a:pPr>
+              <a:lnSpc>
+                <a:spcPct val="150000"/>
+              </a:lnSpc>
+              <a:spcAft>
+                <a:spcPts val="500"/>
+              </a:spcAft>
+              <a:defRPr/>
+            </a:pPr>
+            <a:r>
+              <a:rPr lang="en-US" sz="1000" b="1" i="0" u="none" strike="noStrike" cap="none" spc="0">
+                <a:solidFill>
+                  <a:srgbClr val="475569"/>
+                </a:solidFill>
+                <a:latin typeface="Calibri"/>
+                <a:ea typeface="Calibri"/>
+                <a:cs typeface="Calibri"/>
+              </a:rPr>
+              <a:t> 10.  </a:t>
+            </a:r>
+            <a:r>
+              <a:rPr sz="1000" b="1">
+                <a:solidFill>
+                  <a:srgbClr val="475569"/>
+                </a:solidFill>
+                <a:latin typeface="Calibri"/>
+              </a:rPr>
+              <a:t> </a:t>
+            </a:r>
+            <a:r>
+              <a:rPr lang="en-US" sz="1000" b="1" i="0" u="none" strike="noStrike" cap="none" spc="0">
+                <a:solidFill>
+                  <a:srgbClr val="475569"/>
+                </a:solidFill>
+                <a:latin typeface="Calibri"/>
+                <a:ea typeface="Calibri"/>
+                <a:cs typeface="Calibri"/>
+              </a:rPr>
+              <a:t>https://www.scribd.com/document/853501940/QR-Code-Based-Student-Attendance-System-Rushi</a:t>
+            </a:r>
+            <a:endParaRPr sz="2200">
+              <a:solidFill>
+                <a:srgbClr val="475569"/>
+              </a:solidFill>
+            </a:endParaRPr>
+          </a:p>
+          <a:p>
+            <a:pPr>
+              <a:lnSpc>
+                <a:spcPct val="150000"/>
+              </a:lnSpc>
+              <a:spcAft>
+                <a:spcPts val="500"/>
+              </a:spcAft>
+              <a:defRPr/>
+            </a:pPr>
+            <a:r>
+              <a:rPr lang="en-US" sz="1000" b="1" i="0" u="none" strike="noStrike" cap="none" spc="0">
+                <a:solidFill>
+                  <a:srgbClr val="475569"/>
+                </a:solidFill>
+                <a:latin typeface="Calibri"/>
+                <a:ea typeface="Calibri"/>
+                <a:cs typeface="Calibri"/>
+              </a:rPr>
+              <a:t> 11.  </a:t>
+            </a:r>
+            <a:r>
+              <a:rPr lang="en-US" sz="1000" b="1" i="0" u="none" strike="noStrike" cap="none" spc="0">
+                <a:solidFill>
+                  <a:srgbClr val="475569"/>
+                </a:solidFill>
+                <a:latin typeface="Calibri"/>
+                <a:ea typeface="Calibri"/>
+                <a:cs typeface="Calibri"/>
+              </a:rPr>
+              <a:t>https://papers.ssrn.com/sol3/Delivery.cfm/6614320.pdf?abstractid=6614320&amp;mirid=1</a:t>
+            </a:r>
+            <a:endParaRPr sz="2200">
+              <a:solidFill>
+                <a:srgbClr val="475569"/>
+              </a:solidFill>
+            </a:endParaRPr>
+          </a:p>
+          <a:p>
+            <a:pPr>
+              <a:lnSpc>
+                <a:spcPct val="150000"/>
+              </a:lnSpc>
+              <a:spcAft>
+                <a:spcPts val="500"/>
+              </a:spcAft>
+              <a:defRPr/>
+            </a:pPr>
+            <a:r>
+              <a:rPr lang="en-US" sz="1000" b="1" i="0" u="none" strike="noStrike" cap="none" spc="0">
+                <a:solidFill>
+                  <a:srgbClr val="475569"/>
+                </a:solidFill>
+                <a:latin typeface="Calibri"/>
+                <a:ea typeface="Calibri"/>
+                <a:cs typeface="Calibri"/>
+              </a:rPr>
+              <a:t> 12.  </a:t>
+            </a:r>
+            <a:r>
+              <a:rPr sz="1000" b="1">
+                <a:solidFill>
+                  <a:srgbClr val="475569"/>
+                </a:solidFill>
+                <a:latin typeface="Calibri"/>
+              </a:rPr>
+              <a:t> </a:t>
+            </a:r>
+            <a:r>
+              <a:rPr lang="en-US" sz="1000" b="1" i="0" u="none" strike="noStrike" cap="none" spc="0">
+                <a:solidFill>
+                  <a:srgbClr val="475569"/>
+                </a:solidFill>
+                <a:latin typeface="Calibri"/>
+                <a:ea typeface="Calibri"/>
+                <a:cs typeface="Calibri"/>
+              </a:rPr>
+              <a:t>https://www.ijert.org/attendify-a-cloud-based-multi-factor-attendance-system-using-qr-code-facial-recognition-and-geofencing-ijertv15is040611</a:t>
+            </a:r>
+            <a:endParaRPr sz="2200">
+              <a:solidFill>
+                <a:srgbClr val="475569"/>
+              </a:solidFill>
+            </a:endParaRPr>
+          </a:p>
+        </p:txBody>
+      </p:sp>
+      <p:sp>
+        <p:nvSpPr>
+          <p:cNvPr id="712019270" name="TextBox 8"/>
+          <p:cNvSpPr txBox="1"/>
           <p:nvPr/>
         </p:nvSpPr>
         <p:spPr bwMode="auto">
@@ -11641,68 +11692,64 @@
             <a:avLst/>
           </a:prstGeom>
           <a:noFill/>
-          <a:ln/>
-        </p:spPr>
-        <p:txBody>
-          <a:bodyPr wrap="square" lIns="0" tIns="0" rIns="0" bIns="0" rtlCol="0" anchor="ctr"/>
-          <a:lstStyle/>
-          <a:p>
-            <a:pPr marL="0" indent="0" algn="l">
-              <a:buNone/>
-              <a:defRPr/>
-            </a:pPr>
-            <a:r>
-              <a:rPr lang="en-US" sz="900">
-                <a:solidFill>
-                  <a:srgbClr val="A5B4FC"/>
-                </a:solidFill>
-                <a:latin typeface="Calibri"/>
-                <a:ea typeface="Calibri"/>
-                <a:cs typeface="Calibri"/>
-              </a:rPr>
-              <a:t>MarkIt  ·  Thank You</a:t>
-            </a:r>
-            <a:endParaRPr lang="en-US" sz="900"/>
-          </a:p>
-        </p:txBody>
-      </p:sp>
-      <p:sp>
-        <p:nvSpPr>
-          <p:cNvPr id="1183937100" name="Text 4"/>
-          <p:cNvSpPr/>
-          <p:nvPr/>
-        </p:nvSpPr>
-        <p:spPr bwMode="auto">
-          <a:xfrm>
-            <a:off x="11277295" y="6473952"/>
+        </p:spPr>
+        <p:txBody>
+          <a:bodyPr wrap="square" lIns="0" tIns="0" rIns="0" bIns="0" anchor="t">
+            <a:spAutoFit/>
+          </a:bodyPr>
+          <a:lstStyle/>
+          <a:p>
+            <a:pPr algn="l">
+              <a:defRPr/>
+            </a:pPr>
+            <a:r>
+              <a:rPr sz="900" b="0">
+                <a:solidFill>
+                  <a:srgbClr val="64748B"/>
+                </a:solidFill>
+                <a:latin typeface="Calibri"/>
+              </a:rPr>
+              <a:t>MarkIt  ·  References</a:t>
+            </a:r>
+            <a:endParaRPr/>
+          </a:p>
+        </p:txBody>
+      </p:sp>
+      <p:sp>
+        <p:nvSpPr>
+          <p:cNvPr id="568084429" name="TextBox 9"/>
+          <p:cNvSpPr txBox="1"/>
+          <p:nvPr/>
+        </p:nvSpPr>
+        <p:spPr bwMode="auto">
+          <a:xfrm>
+            <a:off x="11274552" y="6473952"/>
             <a:ext cx="457200" cy="274320"/>
           </a:xfrm>
           <a:prstGeom prst="rect">
             <a:avLst/>
           </a:prstGeom>
           <a:noFill/>
-          <a:ln/>
-        </p:spPr>
-        <p:txBody>
-          <a:bodyPr wrap="square" lIns="0" tIns="0" rIns="0" bIns="0" rtlCol="0" anchor="ctr"/>
-          <a:lstStyle/>
-          <a:p>
-            <a:pPr marL="0" indent="0" algn="r">
-              <a:buNone/>
-              <a:defRPr/>
-            </a:pPr>
-            <a:r>
-              <a:rPr lang="en-US" sz="900">
-                <a:solidFill>
-                  <a:srgbClr val="A5B4FC"/>
-                </a:solidFill>
-                <a:latin typeface="Calibri"/>
-                <a:ea typeface="Calibri"/>
-                <a:cs typeface="Calibri"/>
-              </a:rPr>
-              <a:t>19</a:t>
-            </a:r>
-            <a:endParaRPr lang="en-US" sz="900"/>
+        </p:spPr>
+        <p:txBody>
+          <a:bodyPr wrap="square" lIns="0" tIns="0" rIns="0" bIns="0" anchor="t">
+            <a:spAutoFit/>
+          </a:bodyPr>
+          <a:lstStyle/>
+          <a:p>
+            <a:pPr algn="r">
+              <a:defRPr/>
+            </a:pPr>
+            <a:r>
+              <a:rPr sz="900" b="0">
+                <a:solidFill>
+                  <a:srgbClr val="64748B"/>
+                </a:solidFill>
+                <a:latin typeface="Calibri"/>
+              </a:rPr>
+              <a:t>18</a:t>
+            </a:r>
+            <a:endParaRPr/>
           </a:p>
         </p:txBody>
       </p:sp>
@@ -11748,7 +11795,7 @@
       </p:grpSpPr>
       <p:sp>
         <p:nvSpPr>
-          <p:cNvPr id="2128176459" name="Text 0"/>
+          <p:cNvPr id="471435282" name="Text 0"/>
           <p:cNvSpPr/>
           <p:nvPr/>
         </p:nvSpPr>
@@ -11788,7 +11835,7 @@
       </p:sp>
       <p:sp>
         <p:nvSpPr>
-          <p:cNvPr id="1678789837" name="Text 1"/>
+          <p:cNvPr id="1606907400" name="Text 1"/>
           <p:cNvSpPr/>
           <p:nvPr/>
         </p:nvSpPr>
@@ -11828,7 +11875,7 @@
       </p:sp>
       <p:sp>
         <p:nvSpPr>
-          <p:cNvPr id="615981363" name="Text 2"/>
+          <p:cNvPr id="711921537" name="Text 2"/>
           <p:cNvSpPr/>
           <p:nvPr/>
         </p:nvSpPr>
@@ -11868,7 +11915,7 @@
       </p:sp>
       <p:sp>
         <p:nvSpPr>
-          <p:cNvPr id="815624705" name="Shape 3"/>
+          <p:cNvPr id="1646907801" name="Shape 3"/>
           <p:cNvSpPr/>
           <p:nvPr/>
         </p:nvSpPr>
@@ -11902,7 +11949,7 @@
       </p:sp>
       <p:pic>
         <p:nvPicPr>
-          <p:cNvPr id="1563628721" name="Image 0" descr="preencoded.png"/>
+          <p:cNvPr id="86931273" name="Image 0" descr="preencoded.png"/>
           <p:cNvPicPr>
             <a:picLocks noChangeAspect="1"/>
           </p:cNvPicPr>
@@ -11924,7 +11971,7 @@
       </p:pic>
       <p:sp>
         <p:nvSpPr>
-          <p:cNvPr id="1713303514" name="Text 4"/>
+          <p:cNvPr id="1774036128" name="Text 4"/>
           <p:cNvSpPr/>
           <p:nvPr/>
         </p:nvSpPr>
@@ -11964,7 +12011,7 @@
       </p:sp>
       <p:sp>
         <p:nvSpPr>
-          <p:cNvPr id="539225124" name="Text 5"/>
+          <p:cNvPr id="2108733100" name="Text 5"/>
           <p:cNvSpPr/>
           <p:nvPr/>
         </p:nvSpPr>
@@ -12004,7 +12051,7 @@
       </p:sp>
       <p:sp>
         <p:nvSpPr>
-          <p:cNvPr id="1011462213" name="Shape 8"/>
+          <p:cNvPr id="626331722" name="Shape 8"/>
           <p:cNvSpPr/>
           <p:nvPr/>
         </p:nvSpPr>
@@ -12038,7 +12085,7 @@
       </p:sp>
       <p:pic>
         <p:nvPicPr>
-          <p:cNvPr id="1389084057" name="Image 1" descr="preencoded.png"/>
+          <p:cNvPr id="840273537" name="Image 1" descr="preencoded.png"/>
           <p:cNvPicPr>
             <a:picLocks noChangeAspect="1"/>
           </p:cNvPicPr>
@@ -12060,7 +12107,7 @@
       </p:pic>
       <p:sp>
         <p:nvSpPr>
-          <p:cNvPr id="766851580" name="Text 9"/>
+          <p:cNvPr id="1774698113" name="Text 9"/>
           <p:cNvSpPr/>
           <p:nvPr/>
         </p:nvSpPr>
@@ -12100,7 +12147,7 @@
       </p:sp>
       <p:sp>
         <p:nvSpPr>
-          <p:cNvPr id="1698370268" name="Text 10"/>
+          <p:cNvPr id="752051687" name="Text 10"/>
           <p:cNvSpPr/>
           <p:nvPr/>
         </p:nvSpPr>
@@ -12140,7 +12187,7 @@
       </p:sp>
       <p:sp>
         <p:nvSpPr>
-          <p:cNvPr id="237773798" name="Shape 13"/>
+          <p:cNvPr id="1551712627" name="Shape 13"/>
           <p:cNvSpPr/>
           <p:nvPr/>
         </p:nvSpPr>
@@ -12174,7 +12221,7 @@
       </p:sp>
       <p:pic>
         <p:nvPicPr>
-          <p:cNvPr id="303283199" name="Image 2" descr="preencoded.png"/>
+          <p:cNvPr id="340403731" name="Image 2" descr="preencoded.png"/>
           <p:cNvPicPr>
             <a:picLocks noChangeAspect="1"/>
           </p:cNvPicPr>
@@ -12196,7 +12243,7 @@
       </p:pic>
       <p:sp>
         <p:nvSpPr>
-          <p:cNvPr id="1653041973" name="Text 14"/>
+          <p:cNvPr id="1954639323" name="Text 14"/>
           <p:cNvSpPr/>
           <p:nvPr/>
         </p:nvSpPr>
@@ -12236,7 +12283,7 @@
       </p:sp>
       <p:sp>
         <p:nvSpPr>
-          <p:cNvPr id="399623647" name="Text 15"/>
+          <p:cNvPr id="1006282810" name="Text 15"/>
           <p:cNvSpPr/>
           <p:nvPr/>
         </p:nvSpPr>
@@ -12276,7 +12323,7 @@
       </p:sp>
       <p:sp>
         <p:nvSpPr>
-          <p:cNvPr id="812068698" name="Shape 18"/>
+          <p:cNvPr id="395480885" name="Shape 18"/>
           <p:cNvSpPr/>
           <p:nvPr/>
         </p:nvSpPr>
@@ -12310,7 +12357,7 @@
       </p:sp>
       <p:pic>
         <p:nvPicPr>
-          <p:cNvPr id="838814106" name="Image 3" descr="preencoded.png"/>
+          <p:cNvPr id="383931687" name="Image 3" descr="preencoded.png"/>
           <p:cNvPicPr>
             <a:picLocks noChangeAspect="1"/>
           </p:cNvPicPr>
@@ -12332,7 +12379,7 @@
       </p:pic>
       <p:sp>
         <p:nvSpPr>
-          <p:cNvPr id="1835702761" name="Text 19"/>
+          <p:cNvPr id="1439619173" name="Text 19"/>
           <p:cNvSpPr/>
           <p:nvPr/>
         </p:nvSpPr>
@@ -12372,7 +12419,7 @@
       </p:sp>
       <p:sp>
         <p:nvSpPr>
-          <p:cNvPr id="819517233" name="Text 20"/>
+          <p:cNvPr id="1633304898" name="Text 20"/>
           <p:cNvSpPr/>
           <p:nvPr/>
         </p:nvSpPr>
@@ -12412,7 +12459,7 @@
       </p:sp>
       <p:sp>
         <p:nvSpPr>
-          <p:cNvPr id="505021444" name="Text 23"/>
+          <p:cNvPr id="219139181" name="Text 23"/>
           <p:cNvSpPr/>
           <p:nvPr/>
         </p:nvSpPr>
@@ -12452,7 +12499,7 @@
       </p:sp>
       <p:sp>
         <p:nvSpPr>
-          <p:cNvPr id="513182335" name="Text 24"/>
+          <p:cNvPr id="231654674" name="Text 24"/>
           <p:cNvSpPr/>
           <p:nvPr/>
         </p:nvSpPr>
@@ -12485,6 +12532,290 @@
                 <a:cs typeface="Calibri"/>
               </a:rPr>
               <a:t>2</a:t>
+            </a:r>
+            <a:endParaRPr lang="en-US" sz="900"/>
+          </a:p>
+        </p:txBody>
+      </p:sp>
+    </p:spTree>
+  </p:cSld>
+  <p:clrMapOvr>
+    <a:masterClrMapping/>
+  </p:clrMapOvr>
+  <mc:AlternateContent xmlns:mc="http://schemas.openxmlformats.org/markup-compatibility/2006">
+    <mc:Choice xmlns:p159="http://schemas.microsoft.com/office/powerpoint/2015/09/main" xmlns:p14="http://schemas.microsoft.com/office/powerpoint/2010/main" Requires="p159">
+      <p:transition p14:dur="500" advClick="1"/>
+    </mc:Choice>
+    <mc:Fallback>
+      <p:transition advClick="1"/>
+    </mc:Fallback>
+  </mc:AlternateContent>
+</p:sld>
+</file>
+
+<file path=ppt/slides/slide20.xml><?xml version="1.0" encoding="utf-8"?>
+<p:sld xmlns:a="http://schemas.openxmlformats.org/drawingml/2006/main" xmlns:r="http://schemas.openxmlformats.org/officeDocument/2006/relationships" xmlns:p="http://schemas.openxmlformats.org/presentationml/2006/main" xmlns:m="http://schemas.openxmlformats.org/officeDocument/2006/math" xmlns:w="http://schemas.openxmlformats.org/wordprocessingml/2006/main" xmlns:mc="http://schemas.openxmlformats.org/markup-compatibility/2006" showMasterPhAnim="0" showMasterSp="1" show="1">
+  <p:cSld name="Slide 16">
+    <p:bg>
+      <p:bgPr shadeToTitle="0">
+        <a:solidFill>
+          <a:srgbClr val="1E1B4B"/>
+        </a:solidFill>
+      </p:bgPr>
+    </p:bg>
+    <p:spTree>
+      <p:nvGrpSpPr>
+        <p:cNvPr id="1" name=""/>
+        <p:cNvGrpSpPr/>
+        <p:nvPr/>
+      </p:nvGrpSpPr>
+      <p:grpSpPr bwMode="auto">
+        <a:xfrm>
+          <a:off x="0" y="0"/>
+          <a:ext cx="0" cy="0"/>
+          <a:chOff x="0" y="0"/>
+          <a:chExt cx="0" cy="0"/>
+        </a:xfrm>
+      </p:grpSpPr>
+      <p:pic>
+        <p:nvPicPr>
+          <p:cNvPr id="171853624" name="Image 0" descr="preencoded.png"/>
+          <p:cNvPicPr>
+            <a:picLocks noChangeAspect="1"/>
+          </p:cNvPicPr>
+          <p:nvPr/>
+        </p:nvPicPr>
+        <p:blipFill rotWithShape="1">
+          <a:blip r:embed="rId3"/>
+          <a:stretch/>
+        </p:blipFill>
+        <p:spPr bwMode="auto">
+          <a:xfrm>
+            <a:off x="0" y="0"/>
+            <a:ext cx="12191695" cy="6858000"/>
+          </a:xfrm>
+          <a:prstGeom prst="rect">
+            <a:avLst/>
+          </a:prstGeom>
+        </p:spPr>
+      </p:pic>
+      <p:pic>
+        <p:nvPicPr>
+          <p:cNvPr id="1840549232" name="Image 1" descr="preencoded.png"/>
+          <p:cNvPicPr>
+            <a:picLocks noChangeAspect="1"/>
+          </p:cNvPicPr>
+          <p:nvPr/>
+        </p:nvPicPr>
+        <p:blipFill rotWithShape="1">
+          <a:blip r:embed="rId4"/>
+          <a:stretch/>
+        </p:blipFill>
+        <p:spPr bwMode="auto">
+          <a:xfrm>
+            <a:off x="5638648" y="1965960"/>
+            <a:ext cx="914400" cy="914400"/>
+          </a:xfrm>
+          <a:prstGeom prst="rect">
+            <a:avLst/>
+          </a:prstGeom>
+        </p:spPr>
+      </p:pic>
+      <p:sp>
+        <p:nvSpPr>
+          <p:cNvPr id="276776478" name="Text 0"/>
+          <p:cNvSpPr/>
+          <p:nvPr/>
+        </p:nvSpPr>
+        <p:spPr bwMode="auto">
+          <a:xfrm>
+            <a:off x="0" y="3063240"/>
+            <a:ext cx="12191695" cy="868680"/>
+          </a:xfrm>
+          <a:prstGeom prst="rect">
+            <a:avLst/>
+          </a:prstGeom>
+          <a:noFill/>
+          <a:ln/>
+        </p:spPr>
+        <p:txBody>
+          <a:bodyPr wrap="square" lIns="0" tIns="0" rIns="0" bIns="0" rtlCol="0" anchor="ctr"/>
+          <a:lstStyle/>
+          <a:p>
+            <a:pPr marL="0" indent="0" algn="ctr">
+              <a:buNone/>
+              <a:defRPr/>
+            </a:pPr>
+            <a:r>
+              <a:rPr lang="en-US" sz="4600" b="1">
+                <a:solidFill>
+                  <a:srgbClr val="FFFFFF"/>
+                </a:solidFill>
+                <a:latin typeface="Arial"/>
+                <a:ea typeface="Arial"/>
+                <a:cs typeface="Arial"/>
+              </a:rPr>
+              <a:t>Thank You</a:t>
+            </a:r>
+            <a:endParaRPr lang="en-US" sz="4600"/>
+          </a:p>
+        </p:txBody>
+      </p:sp>
+      <p:sp>
+        <p:nvSpPr>
+          <p:cNvPr id="2032159316" name="Text 1"/>
+          <p:cNvSpPr/>
+          <p:nvPr/>
+        </p:nvSpPr>
+        <p:spPr bwMode="auto">
+          <a:xfrm>
+            <a:off x="0" y="3886200"/>
+            <a:ext cx="12191695" cy="457200"/>
+          </a:xfrm>
+          <a:prstGeom prst="rect">
+            <a:avLst/>
+          </a:prstGeom>
+          <a:noFill/>
+          <a:ln/>
+        </p:spPr>
+        <p:txBody>
+          <a:bodyPr wrap="square" lIns="0" tIns="0" rIns="0" bIns="0" rtlCol="0" anchor="ctr"/>
+          <a:lstStyle/>
+          <a:p>
+            <a:pPr marL="0" indent="0" algn="ctr">
+              <a:buNone/>
+              <a:defRPr/>
+            </a:pPr>
+            <a:r>
+              <a:rPr lang="en-US" sz="1800" i="1">
+                <a:solidFill>
+                  <a:srgbClr val="DDD6FE"/>
+                </a:solidFill>
+                <a:latin typeface="Calibri"/>
+                <a:ea typeface="Calibri"/>
+                <a:cs typeface="Calibri"/>
+              </a:rPr>
+              <a:t>Questions &amp; Discussion</a:t>
+            </a:r>
+            <a:endParaRPr lang="en-US" sz="1800"/>
+          </a:p>
+        </p:txBody>
+      </p:sp>
+      <p:sp>
+        <p:nvSpPr>
+          <p:cNvPr id="75279095" name="Text 2"/>
+          <p:cNvSpPr/>
+          <p:nvPr/>
+        </p:nvSpPr>
+        <p:spPr bwMode="auto">
+          <a:xfrm>
+            <a:off x="0" y="5989320"/>
+            <a:ext cx="12191695" cy="320040"/>
+          </a:xfrm>
+          <a:prstGeom prst="rect">
+            <a:avLst/>
+          </a:prstGeom>
+          <a:noFill/>
+          <a:ln/>
+        </p:spPr>
+        <p:txBody>
+          <a:bodyPr wrap="square" lIns="0" tIns="0" rIns="0" bIns="0" rtlCol="0" anchor="ctr"/>
+          <a:lstStyle/>
+          <a:p>
+            <a:pPr marL="0" indent="0" algn="ctr">
+              <a:buNone/>
+              <a:defRPr/>
+            </a:pPr>
+            <a:r>
+              <a:rPr lang="en-US" sz="1200">
+                <a:solidFill>
+                  <a:srgbClr val="A5B4FC"/>
+                </a:solidFill>
+                <a:latin typeface="Calibri"/>
+                <a:ea typeface="Calibri"/>
+                <a:cs typeface="Calibri"/>
+              </a:rPr>
+              <a:t>MarkIt  ·  Smart attendance tracking for modern classrooms</a:t>
+            </a:r>
+            <a:endParaRPr lang="en-US" sz="1200"/>
+          </a:p>
+        </p:txBody>
+      </p:sp>
+      <p:sp>
+        <p:nvSpPr>
+          <p:cNvPr id="1384715732" name="Text 3"/>
+          <p:cNvSpPr/>
+          <p:nvPr/>
+        </p:nvSpPr>
+        <p:spPr bwMode="auto">
+          <a:xfrm>
+            <a:off x="457200" y="6473952"/>
+            <a:ext cx="5486400" cy="274320"/>
+          </a:xfrm>
+          <a:prstGeom prst="rect">
+            <a:avLst/>
+          </a:prstGeom>
+          <a:noFill/>
+          <a:ln/>
+        </p:spPr>
+        <p:txBody>
+          <a:bodyPr wrap="square" lIns="0" tIns="0" rIns="0" bIns="0" rtlCol="0" anchor="ctr"/>
+          <a:lstStyle/>
+          <a:p>
+            <a:pPr marL="0" indent="0" algn="l">
+              <a:buNone/>
+              <a:defRPr/>
+            </a:pPr>
+            <a:r>
+              <a:rPr lang="en-US" sz="900">
+                <a:solidFill>
+                  <a:srgbClr val="A5B4FC"/>
+                </a:solidFill>
+                <a:latin typeface="Calibri"/>
+                <a:ea typeface="Calibri"/>
+                <a:cs typeface="Calibri"/>
+              </a:rPr>
+              <a:t>MarkIt  ·  Thank You</a:t>
+            </a:r>
+            <a:endParaRPr lang="en-US" sz="900"/>
+          </a:p>
+        </p:txBody>
+      </p:sp>
+      <p:sp>
+        <p:nvSpPr>
+          <p:cNvPr id="485681127" name="Text 4"/>
+          <p:cNvSpPr/>
+          <p:nvPr/>
+        </p:nvSpPr>
+        <p:spPr bwMode="auto">
+          <a:xfrm>
+            <a:off x="11277295" y="6473952"/>
+            <a:ext cx="457200" cy="274320"/>
+          </a:xfrm>
+          <a:prstGeom prst="rect">
+            <a:avLst/>
+          </a:prstGeom>
+          <a:noFill/>
+          <a:ln/>
+        </p:spPr>
+        <p:txBody>
+          <a:bodyPr wrap="square" lIns="0" tIns="0" rIns="0" bIns="0" rtlCol="0" anchor="ctr"/>
+          <a:lstStyle/>
+          <a:p>
+            <a:pPr marL="0" indent="0" algn="r">
+              <a:buNone/>
+              <a:defRPr/>
+            </a:pPr>
+            <a:r>
+              <a:rPr lang="en-US" sz="900">
+                <a:solidFill>
+                  <a:srgbClr val="A5B4FC"/>
+                </a:solidFill>
+                <a:latin typeface="Calibri"/>
+                <a:ea typeface="Calibri"/>
+                <a:cs typeface="Calibri"/>
+              </a:rPr>
+              <a:t>19</a:t>
             </a:r>
             <a:endParaRPr lang="en-US" sz="900"/>
           </a:p>
@@ -12532,7 +12863,7 @@
       </p:grpSpPr>
       <p:sp>
         <p:nvSpPr>
-          <p:cNvPr id="850938224" name="Text 0"/>
+          <p:cNvPr id="1178967203" name="Text 0"/>
           <p:cNvSpPr/>
           <p:nvPr/>
         </p:nvSpPr>
@@ -12572,7 +12903,7 @@
       </p:sp>
       <p:sp>
         <p:nvSpPr>
-          <p:cNvPr id="956611349" name="Text 1"/>
+          <p:cNvPr id="1610116212" name="Text 1"/>
           <p:cNvSpPr/>
           <p:nvPr/>
         </p:nvSpPr>
@@ -12612,7 +12943,7 @@
       </p:sp>
       <p:sp>
         <p:nvSpPr>
-          <p:cNvPr id="281416782" name="Text 2"/>
+          <p:cNvPr id="665291964" name="Text 2"/>
           <p:cNvSpPr/>
           <p:nvPr/>
         </p:nvSpPr>
@@ -12652,7 +12983,7 @@
       </p:sp>
       <p:sp>
         <p:nvSpPr>
-          <p:cNvPr id="319453774" name="Shape 3"/>
+          <p:cNvPr id="339851946" name="Shape 3"/>
           <p:cNvSpPr/>
           <p:nvPr/>
         </p:nvSpPr>
@@ -12686,7 +13017,7 @@
       </p:sp>
       <p:pic>
         <p:nvPicPr>
-          <p:cNvPr id="1325628070" name="Image 0" descr="preencoded.png"/>
+          <p:cNvPr id="1570914821" name="Image 0" descr="preencoded.png"/>
           <p:cNvPicPr>
             <a:picLocks noChangeAspect="1"/>
           </p:cNvPicPr>
@@ -12708,7 +13039,7 @@
       </p:pic>
       <p:sp>
         <p:nvSpPr>
-          <p:cNvPr id="1716589095" name="Text 4"/>
+          <p:cNvPr id="330921349" name="Text 4"/>
           <p:cNvSpPr/>
           <p:nvPr/>
         </p:nvSpPr>
@@ -12748,7 +13079,7 @@
       </p:sp>
       <p:sp>
         <p:nvSpPr>
-          <p:cNvPr id="827274165" name="Text 5"/>
+          <p:cNvPr id="495241576" name="Text 5"/>
           <p:cNvSpPr/>
           <p:nvPr/>
         </p:nvSpPr>
@@ -12788,7 +13119,7 @@
       </p:sp>
       <p:sp>
         <p:nvSpPr>
-          <p:cNvPr id="1592755320" name="Shape 6"/>
+          <p:cNvPr id="260698607" name="Shape 6"/>
           <p:cNvSpPr/>
           <p:nvPr/>
         </p:nvSpPr>
@@ -12822,7 +13153,7 @@
       </p:sp>
       <p:pic>
         <p:nvPicPr>
-          <p:cNvPr id="661071753" name="Image 1" descr="preencoded.png"/>
+          <p:cNvPr id="623018795" name="Image 1" descr="preencoded.png"/>
           <p:cNvPicPr>
             <a:picLocks noChangeAspect="1"/>
           </p:cNvPicPr>
@@ -12844,7 +13175,7 @@
       </p:pic>
       <p:sp>
         <p:nvSpPr>
-          <p:cNvPr id="1435864981" name="Text 7"/>
+          <p:cNvPr id="1736900285" name="Text 7"/>
           <p:cNvSpPr/>
           <p:nvPr/>
         </p:nvSpPr>
@@ -12884,7 +13215,7 @@
       </p:sp>
       <p:sp>
         <p:nvSpPr>
-          <p:cNvPr id="412279939" name="Text 8"/>
+          <p:cNvPr id="1433977464" name="Text 8"/>
           <p:cNvSpPr/>
           <p:nvPr/>
         </p:nvSpPr>
@@ -12924,7 +13255,7 @@
       </p:sp>
       <p:sp>
         <p:nvSpPr>
-          <p:cNvPr id="1142825507" name="Shape 9"/>
+          <p:cNvPr id="500675922" name="Shape 9"/>
           <p:cNvSpPr/>
           <p:nvPr/>
         </p:nvSpPr>
@@ -12958,7 +13289,7 @@
       </p:sp>
       <p:pic>
         <p:nvPicPr>
-          <p:cNvPr id="1090962527" name="Image 2" descr="preencoded.png"/>
+          <p:cNvPr id="1925193860" name="Image 2" descr="preencoded.png"/>
           <p:cNvPicPr>
             <a:picLocks noChangeAspect="1"/>
           </p:cNvPicPr>
@@ -12980,7 +13311,7 @@
       </p:pic>
       <p:sp>
         <p:nvSpPr>
-          <p:cNvPr id="1596803271" name="Text 10"/>
+          <p:cNvPr id="1027190676" name="Text 10"/>
           <p:cNvSpPr/>
           <p:nvPr/>
         </p:nvSpPr>
@@ -13020,7 +13351,7 @@
       </p:sp>
       <p:sp>
         <p:nvSpPr>
-          <p:cNvPr id="1889060824" name="Text 11"/>
+          <p:cNvPr id="2141545815" name="Text 11"/>
           <p:cNvSpPr/>
           <p:nvPr/>
         </p:nvSpPr>
@@ -13060,7 +13391,7 @@
       </p:sp>
       <p:sp>
         <p:nvSpPr>
-          <p:cNvPr id="32085793" name="Shape 12"/>
+          <p:cNvPr id="950487944" name="Shape 12"/>
           <p:cNvSpPr/>
           <p:nvPr/>
         </p:nvSpPr>
@@ -13094,7 +13425,7 @@
       </p:sp>
       <p:pic>
         <p:nvPicPr>
-          <p:cNvPr id="2138964550" name="Image 3" descr="preencoded.png"/>
+          <p:cNvPr id="910767702" name="Image 3" descr="preencoded.png"/>
           <p:cNvPicPr>
             <a:picLocks noChangeAspect="1"/>
           </p:cNvPicPr>
@@ -13116,7 +13447,7 @@
       </p:pic>
       <p:sp>
         <p:nvSpPr>
-          <p:cNvPr id="1175657413" name="Text 13"/>
+          <p:cNvPr id="49783150" name="Text 13"/>
           <p:cNvSpPr/>
           <p:nvPr/>
         </p:nvSpPr>
@@ -13156,7 +13487,7 @@
       </p:sp>
       <p:sp>
         <p:nvSpPr>
-          <p:cNvPr id="457871903" name="Text 14"/>
+          <p:cNvPr id="600860965" name="Text 14"/>
           <p:cNvSpPr/>
           <p:nvPr/>
         </p:nvSpPr>
@@ -13196,7 +13527,7 @@
       </p:sp>
       <p:sp>
         <p:nvSpPr>
-          <p:cNvPr id="858769618" name="Text 15"/>
+          <p:cNvPr id="965646269" name="Text 15"/>
           <p:cNvSpPr/>
           <p:nvPr/>
         </p:nvSpPr>
@@ -13236,7 +13567,7 @@
       </p:sp>
       <p:sp>
         <p:nvSpPr>
-          <p:cNvPr id="651677770" name="Text 16"/>
+          <p:cNvPr id="1020000839" name="Text 16"/>
           <p:cNvSpPr/>
           <p:nvPr/>
         </p:nvSpPr>
@@ -13314,129 +13645,9 @@
           <a:chExt cx="0" cy="0"/>
         </a:xfrm>
       </p:grpSpPr>
-      <p:sp>
-        <p:nvSpPr>
-          <p:cNvPr id="1505317551" name="Text 0"/>
-          <p:cNvSpPr/>
-          <p:nvPr/>
-        </p:nvSpPr>
-        <p:spPr bwMode="auto">
-          <a:xfrm>
-            <a:off x="548640" y="384048"/>
-            <a:ext cx="9144000" cy="274320"/>
-          </a:xfrm>
-          <a:prstGeom prst="rect">
-            <a:avLst/>
-          </a:prstGeom>
-          <a:noFill/>
-          <a:ln/>
-        </p:spPr>
-        <p:txBody>
-          <a:bodyPr wrap="square" lIns="0" tIns="0" rIns="0" bIns="0" rtlCol="0" anchor="ctr"/>
-          <a:lstStyle/>
-          <a:p>
-            <a:pPr marL="0" indent="0">
-              <a:buNone/>
-              <a:defRPr/>
-            </a:pPr>
-            <a:r>
-              <a:rPr lang="en-US" sz="1200" b="1" spc="200">
-                <a:solidFill>
-                  <a:srgbClr val="4F46E5"/>
-                </a:solidFill>
-                <a:latin typeface="Calibri"/>
-                <a:ea typeface="Calibri"/>
-                <a:cs typeface="Calibri"/>
-              </a:rPr>
-              <a:t>THE SOLUTION</a:t>
-            </a:r>
-            <a:endParaRPr lang="en-US" sz="1200"/>
-          </a:p>
-        </p:txBody>
-      </p:sp>
-      <p:sp>
-        <p:nvSpPr>
-          <p:cNvPr id="1916314228" name="Text 1"/>
-          <p:cNvSpPr/>
-          <p:nvPr/>
-        </p:nvSpPr>
-        <p:spPr bwMode="auto">
-          <a:xfrm>
-            <a:off x="548640" y="658368"/>
-            <a:ext cx="10515600" cy="685800"/>
-          </a:xfrm>
-          <a:prstGeom prst="rect">
-            <a:avLst/>
-          </a:prstGeom>
-          <a:noFill/>
-          <a:ln/>
-        </p:spPr>
-        <p:txBody>
-          <a:bodyPr wrap="square" lIns="0" tIns="0" rIns="0" bIns="0" rtlCol="0" anchor="ctr"/>
-          <a:lstStyle/>
-          <a:p>
-            <a:pPr marL="0" indent="0">
-              <a:buNone/>
-              <a:defRPr/>
-            </a:pPr>
-            <a:r>
-              <a:rPr lang="en-US" sz="3400" b="1">
-                <a:solidFill>
-                  <a:srgbClr val="0F172A"/>
-                </a:solidFill>
-                <a:latin typeface="Arial"/>
-                <a:ea typeface="Arial"/>
-                <a:cs typeface="Arial"/>
-              </a:rPr>
-              <a:t>Our Solution</a:t>
-            </a:r>
-            <a:endParaRPr lang="en-US" sz="3400"/>
-          </a:p>
-        </p:txBody>
-      </p:sp>
-      <p:sp>
-        <p:nvSpPr>
-          <p:cNvPr id="692116764" name="Text 2"/>
-          <p:cNvSpPr/>
-          <p:nvPr/>
-        </p:nvSpPr>
-        <p:spPr bwMode="auto">
-          <a:xfrm>
-            <a:off x="548640" y="1298448"/>
-            <a:ext cx="10515600" cy="365760"/>
-          </a:xfrm>
-          <a:prstGeom prst="rect">
-            <a:avLst/>
-          </a:prstGeom>
-          <a:noFill/>
-          <a:ln/>
-        </p:spPr>
-        <p:txBody>
-          <a:bodyPr wrap="square" lIns="0" tIns="0" rIns="0" bIns="0" rtlCol="0" anchor="ctr"/>
-          <a:lstStyle/>
-          <a:p>
-            <a:pPr marL="0" indent="0">
-              <a:buNone/>
-              <a:defRPr/>
-            </a:pPr>
-            <a:r>
-              <a:rPr lang="en-US" sz="1500">
-                <a:solidFill>
-                  <a:srgbClr val="475569"/>
-                </a:solidFill>
-                <a:latin typeface="Calibri"/>
-                <a:ea typeface="Calibri"/>
-                <a:cs typeface="Calibri"/>
-              </a:rPr>
-              <a:t>MarkIt replaces paper with a fast, secure digital system</a:t>
-            </a:r>
-            <a:endParaRPr lang="en-US" sz="1500"/>
-          </a:p>
-        </p:txBody>
-      </p:sp>
       <p:pic>
         <p:nvPicPr>
-          <p:cNvPr id="1334211026" name="Image 0" descr="preencoded.png"/>
+          <p:cNvPr id="1513590726" name=""/>
           <p:cNvPicPr>
             <a:picLocks noChangeAspect="1"/>
           </p:cNvPicPr>
@@ -13447,9 +13658,9 @@
           <a:stretch/>
         </p:blipFill>
         <p:spPr bwMode="auto">
-          <a:xfrm>
-            <a:off x="548640" y="2057400"/>
-            <a:ext cx="566928" cy="566928"/>
+          <a:xfrm flipH="0" flipV="0">
+            <a:off x="6492240" y="2017982"/>
+            <a:ext cx="5120640" cy="3864673"/>
           </a:xfrm>
           <a:prstGeom prst="rect">
             <a:avLst/>
@@ -13458,14 +13669,14 @@
       </p:pic>
       <p:sp>
         <p:nvSpPr>
-          <p:cNvPr id="1212415023" name="Text 3"/>
-          <p:cNvSpPr/>
-          <p:nvPr/>
-        </p:nvSpPr>
-        <p:spPr bwMode="auto">
-          <a:xfrm>
-            <a:off x="1280160" y="2039112"/>
-            <a:ext cx="4480560" cy="320040"/>
+          <p:cNvPr id="869001763" name="Text 0"/>
+          <p:cNvSpPr/>
+          <p:nvPr/>
+        </p:nvSpPr>
+        <p:spPr bwMode="auto">
+          <a:xfrm>
+            <a:off x="548640" y="384048"/>
+            <a:ext cx="9144000" cy="274320"/>
           </a:xfrm>
           <a:prstGeom prst="rect">
             <a:avLst/>
@@ -13482,7 +13693,47 @@
               <a:defRPr/>
             </a:pPr>
             <a:r>
-              <a:rPr lang="en-US" sz="1550" b="1">
+              <a:rPr lang="en-US" sz="1200" b="1" spc="200">
+                <a:solidFill>
+                  <a:srgbClr val="4F46E5"/>
+                </a:solidFill>
+                <a:latin typeface="Calibri"/>
+                <a:ea typeface="Calibri"/>
+                <a:cs typeface="Calibri"/>
+              </a:rPr>
+              <a:t>THE SOLUTION</a:t>
+            </a:r>
+            <a:endParaRPr lang="en-US" sz="1200"/>
+          </a:p>
+        </p:txBody>
+      </p:sp>
+      <p:sp>
+        <p:nvSpPr>
+          <p:cNvPr id="1897212199" name="Text 1"/>
+          <p:cNvSpPr/>
+          <p:nvPr/>
+        </p:nvSpPr>
+        <p:spPr bwMode="auto">
+          <a:xfrm>
+            <a:off x="548640" y="658368"/>
+            <a:ext cx="10515600" cy="685800"/>
+          </a:xfrm>
+          <a:prstGeom prst="rect">
+            <a:avLst/>
+          </a:prstGeom>
+          <a:noFill/>
+          <a:ln/>
+        </p:spPr>
+        <p:txBody>
+          <a:bodyPr wrap="square" lIns="0" tIns="0" rIns="0" bIns="0" rtlCol="0" anchor="ctr"/>
+          <a:lstStyle/>
+          <a:p>
+            <a:pPr marL="0" indent="0">
+              <a:buNone/>
+              <a:defRPr/>
+            </a:pPr>
+            <a:r>
+              <a:rPr lang="en-US" sz="3400" b="1">
                 <a:solidFill>
                   <a:srgbClr val="0F172A"/>
                 </a:solidFill>
@@ -13490,22 +13741,22 @@
                 <a:ea typeface="Arial"/>
                 <a:cs typeface="Arial"/>
               </a:rPr>
-              <a:t>Digital in Seconds</a:t>
-            </a:r>
-            <a:endParaRPr lang="en-US" sz="1550"/>
-          </a:p>
-        </p:txBody>
-      </p:sp>
-      <p:sp>
-        <p:nvSpPr>
-          <p:cNvPr id="1602679429" name="Text 4"/>
-          <p:cNvSpPr/>
-          <p:nvPr/>
-        </p:nvSpPr>
-        <p:spPr bwMode="auto">
-          <a:xfrm>
-            <a:off x="1280160" y="2350008"/>
-            <a:ext cx="4480560" cy="320040"/>
+              <a:t>Our Solution</a:t>
+            </a:r>
+            <a:endParaRPr lang="en-US" sz="3400"/>
+          </a:p>
+        </p:txBody>
+      </p:sp>
+      <p:sp>
+        <p:nvSpPr>
+          <p:cNvPr id="1679535878" name="Text 2"/>
+          <p:cNvSpPr/>
+          <p:nvPr/>
+        </p:nvSpPr>
+        <p:spPr bwMode="auto">
+          <a:xfrm>
+            <a:off x="548640" y="1298448"/>
+            <a:ext cx="10515600" cy="365760"/>
           </a:xfrm>
           <a:prstGeom prst="rect">
             <a:avLst/>
@@ -13522,7 +13773,7 @@
               <a:defRPr/>
             </a:pPr>
             <a:r>
-              <a:rPr lang="en-US" sz="1200">
+              <a:rPr lang="en-US" sz="1500">
                 <a:solidFill>
                   <a:srgbClr val="475569"/>
                 </a:solidFill>
@@ -13530,15 +13781,15 @@
                 <a:ea typeface="Calibri"/>
                 <a:cs typeface="Calibri"/>
               </a:rPr>
-              <a:t>Mark attendance from any device in moments.</a:t>
-            </a:r>
-            <a:endParaRPr lang="en-US" sz="1200"/>
+              <a:t>MarkIt replaces paper with a fast, secure digital system</a:t>
+            </a:r>
+            <a:endParaRPr lang="en-US" sz="1500"/>
           </a:p>
         </p:txBody>
       </p:sp>
       <p:pic>
         <p:nvPicPr>
-          <p:cNvPr id="497759832" name="Image 1" descr="preencoded.png"/>
+          <p:cNvPr id="605855496" name="Image 0" descr="preencoded.png"/>
           <p:cNvPicPr>
             <a:picLocks noChangeAspect="1"/>
           </p:cNvPicPr>
@@ -13550,7 +13801,7 @@
         </p:blipFill>
         <p:spPr bwMode="auto">
           <a:xfrm>
-            <a:off x="548640" y="3081528"/>
+            <a:off x="548640" y="2057400"/>
             <a:ext cx="566928" cy="566928"/>
           </a:xfrm>
           <a:prstGeom prst="rect">
@@ -13560,13 +13811,13 @@
       </p:pic>
       <p:sp>
         <p:nvSpPr>
-          <p:cNvPr id="1213195499" name="Text 5"/>
-          <p:cNvSpPr/>
-          <p:nvPr/>
-        </p:nvSpPr>
-        <p:spPr bwMode="auto">
-          <a:xfrm>
-            <a:off x="1280160" y="3063240"/>
+          <p:cNvPr id="1002761141" name="Text 3"/>
+          <p:cNvSpPr/>
+          <p:nvPr/>
+        </p:nvSpPr>
+        <p:spPr bwMode="auto">
+          <a:xfrm>
+            <a:off x="1280160" y="2039112"/>
             <a:ext cx="4480560" cy="320040"/>
           </a:xfrm>
           <a:prstGeom prst="rect">
@@ -13592,7 +13843,7 @@
                 <a:ea typeface="Arial"/>
                 <a:cs typeface="Arial"/>
               </a:rPr>
-              <a:t>Prevents Proxy Attendance</a:t>
+              <a:t>Digital in Seconds</a:t>
             </a:r>
             <a:endParaRPr lang="en-US" sz="1550"/>
           </a:p>
@@ -13600,13 +13851,13 @@
       </p:sp>
       <p:sp>
         <p:nvSpPr>
-          <p:cNvPr id="1210158544" name="Text 6"/>
-          <p:cNvSpPr/>
-          <p:nvPr/>
-        </p:nvSpPr>
-        <p:spPr bwMode="auto">
-          <a:xfrm>
-            <a:off x="1280160" y="3374136"/>
+          <p:cNvPr id="203749477" name="Text 4"/>
+          <p:cNvSpPr/>
+          <p:nvPr/>
+        </p:nvSpPr>
+        <p:spPr bwMode="auto">
+          <a:xfrm>
+            <a:off x="1280160" y="2350008"/>
             <a:ext cx="4480560" cy="320040"/>
           </a:xfrm>
           <a:prstGeom prst="rect">
@@ -13632,7 +13883,7 @@
                 <a:ea typeface="Calibri"/>
                 <a:cs typeface="Calibri"/>
               </a:rPr>
-              <a:t>Digital identity matching stops fake sign-ins.</a:t>
+              <a:t>Mark attendance from any device in moments.</a:t>
             </a:r>
             <a:endParaRPr lang="en-US" sz="1200"/>
           </a:p>
@@ -13640,7 +13891,7 @@
       </p:sp>
       <p:pic>
         <p:nvPicPr>
-          <p:cNvPr id="1417582399" name="Image 2" descr="preencoded.png"/>
+          <p:cNvPr id="1306182497" name="Image 1" descr="preencoded.png"/>
           <p:cNvPicPr>
             <a:picLocks noChangeAspect="1"/>
           </p:cNvPicPr>
@@ -13652,7 +13903,7 @@
         </p:blipFill>
         <p:spPr bwMode="auto">
           <a:xfrm>
-            <a:off x="548640" y="4105656"/>
+            <a:off x="548640" y="3081528"/>
             <a:ext cx="566928" cy="566928"/>
           </a:xfrm>
           <a:prstGeom prst="rect">
@@ -13662,13 +13913,13 @@
       </p:pic>
       <p:sp>
         <p:nvSpPr>
-          <p:cNvPr id="1276930183" name="Text 7"/>
-          <p:cNvSpPr/>
-          <p:nvPr/>
-        </p:nvSpPr>
-        <p:spPr bwMode="auto">
-          <a:xfrm>
-            <a:off x="1280160" y="4087368"/>
+          <p:cNvPr id="1316426639" name="Text 5"/>
+          <p:cNvSpPr/>
+          <p:nvPr/>
+        </p:nvSpPr>
+        <p:spPr bwMode="auto">
+          <a:xfrm>
+            <a:off x="1280160" y="3063240"/>
             <a:ext cx="4480560" cy="320040"/>
           </a:xfrm>
           <a:prstGeom prst="rect">
@@ -13694,7 +13945,7 @@
                 <a:ea typeface="Arial"/>
                 <a:cs typeface="Arial"/>
               </a:rPr>
-              <a:t>Auto Reports &amp; Analytics</a:t>
+              <a:t>Prevents Proxy Attendance</a:t>
             </a:r>
             <a:endParaRPr lang="en-US" sz="1550"/>
           </a:p>
@@ -13702,13 +13953,13 @@
       </p:sp>
       <p:sp>
         <p:nvSpPr>
-          <p:cNvPr id="476529622" name="Text 8"/>
-          <p:cNvSpPr/>
-          <p:nvPr/>
-        </p:nvSpPr>
-        <p:spPr bwMode="auto">
-          <a:xfrm>
-            <a:off x="1280160" y="4398264"/>
+          <p:cNvPr id="101993688" name="Text 6"/>
+          <p:cNvSpPr/>
+          <p:nvPr/>
+        </p:nvSpPr>
+        <p:spPr bwMode="auto">
+          <a:xfrm>
+            <a:off x="1280160" y="3374136"/>
             <a:ext cx="4480560" cy="320040"/>
           </a:xfrm>
           <a:prstGeom prst="rect">
@@ -13734,7 +13985,7 @@
                 <a:ea typeface="Calibri"/>
                 <a:cs typeface="Calibri"/>
               </a:rPr>
-              <a:t>Instant PDF and CSV exports, no manual work.</a:t>
+              <a:t>Digital identity matching stops fake sign-ins.</a:t>
             </a:r>
             <a:endParaRPr lang="en-US" sz="1200"/>
           </a:p>
@@ -13742,7 +13993,7 @@
       </p:sp>
       <p:pic>
         <p:nvPicPr>
-          <p:cNvPr id="776978708" name="Image 3" descr="preencoded.png"/>
+          <p:cNvPr id="1720737438" name="Image 2" descr="preencoded.png"/>
           <p:cNvPicPr>
             <a:picLocks noChangeAspect="1"/>
           </p:cNvPicPr>
@@ -13754,7 +14005,7 @@
         </p:blipFill>
         <p:spPr bwMode="auto">
           <a:xfrm>
-            <a:off x="548640" y="5129784"/>
+            <a:off x="548640" y="4105656"/>
             <a:ext cx="566928" cy="566928"/>
           </a:xfrm>
           <a:prstGeom prst="rect">
@@ -13764,13 +14015,13 @@
       </p:pic>
       <p:sp>
         <p:nvSpPr>
-          <p:cNvPr id="630545440" name="Text 9"/>
-          <p:cNvSpPr/>
-          <p:nvPr/>
-        </p:nvSpPr>
-        <p:spPr bwMode="auto">
-          <a:xfrm>
-            <a:off x="1280160" y="5111496"/>
+          <p:cNvPr id="981073014" name="Text 7"/>
+          <p:cNvSpPr/>
+          <p:nvPr/>
+        </p:nvSpPr>
+        <p:spPr bwMode="auto">
+          <a:xfrm>
+            <a:off x="1280160" y="4087368"/>
             <a:ext cx="4480560" cy="320040"/>
           </a:xfrm>
           <a:prstGeom prst="rect">
@@ -13796,6 +14047,108 @@
                 <a:ea typeface="Arial"/>
                 <a:cs typeface="Arial"/>
               </a:rPr>
+              <a:t>Auto Reports &amp; Analytics</a:t>
+            </a:r>
+            <a:endParaRPr lang="en-US" sz="1550"/>
+          </a:p>
+        </p:txBody>
+      </p:sp>
+      <p:sp>
+        <p:nvSpPr>
+          <p:cNvPr id="1133167711" name="Text 8"/>
+          <p:cNvSpPr/>
+          <p:nvPr/>
+        </p:nvSpPr>
+        <p:spPr bwMode="auto">
+          <a:xfrm>
+            <a:off x="1280160" y="4398264"/>
+            <a:ext cx="4480560" cy="320040"/>
+          </a:xfrm>
+          <a:prstGeom prst="rect">
+            <a:avLst/>
+          </a:prstGeom>
+          <a:noFill/>
+          <a:ln/>
+        </p:spPr>
+        <p:txBody>
+          <a:bodyPr wrap="square" lIns="0" tIns="0" rIns="0" bIns="0" rtlCol="0" anchor="ctr"/>
+          <a:lstStyle/>
+          <a:p>
+            <a:pPr marL="0" indent="0">
+              <a:buNone/>
+              <a:defRPr/>
+            </a:pPr>
+            <a:r>
+              <a:rPr lang="en-US" sz="1200">
+                <a:solidFill>
+                  <a:srgbClr val="475569"/>
+                </a:solidFill>
+                <a:latin typeface="Calibri"/>
+                <a:ea typeface="Calibri"/>
+                <a:cs typeface="Calibri"/>
+              </a:rPr>
+              <a:t>Instant PDF and CSV exports, no manual work.</a:t>
+            </a:r>
+            <a:endParaRPr lang="en-US" sz="1200"/>
+          </a:p>
+        </p:txBody>
+      </p:sp>
+      <p:pic>
+        <p:nvPicPr>
+          <p:cNvPr id="1098158309" name="Image 3" descr="preencoded.png"/>
+          <p:cNvPicPr>
+            <a:picLocks noChangeAspect="1"/>
+          </p:cNvPicPr>
+          <p:nvPr/>
+        </p:nvPicPr>
+        <p:blipFill rotWithShape="1">
+          <a:blip r:embed="rId7"/>
+          <a:stretch/>
+        </p:blipFill>
+        <p:spPr bwMode="auto">
+          <a:xfrm>
+            <a:off x="548640" y="5129784"/>
+            <a:ext cx="566928" cy="566928"/>
+          </a:xfrm>
+          <a:prstGeom prst="rect">
+            <a:avLst/>
+          </a:prstGeom>
+        </p:spPr>
+      </p:pic>
+      <p:sp>
+        <p:nvSpPr>
+          <p:cNvPr id="1288348723" name="Text 9"/>
+          <p:cNvSpPr/>
+          <p:nvPr/>
+        </p:nvSpPr>
+        <p:spPr bwMode="auto">
+          <a:xfrm>
+            <a:off x="1280160" y="5111496"/>
+            <a:ext cx="4480560" cy="320040"/>
+          </a:xfrm>
+          <a:prstGeom prst="rect">
+            <a:avLst/>
+          </a:prstGeom>
+          <a:noFill/>
+          <a:ln/>
+        </p:spPr>
+        <p:txBody>
+          <a:bodyPr wrap="square" lIns="0" tIns="0" rIns="0" bIns="0" rtlCol="0" anchor="ctr"/>
+          <a:lstStyle/>
+          <a:p>
+            <a:pPr marL="0" indent="0">
+              <a:buNone/>
+              <a:defRPr/>
+            </a:pPr>
+            <a:r>
+              <a:rPr lang="en-US" sz="1550" b="1">
+                <a:solidFill>
+                  <a:srgbClr val="0F172A"/>
+                </a:solidFill>
+                <a:latin typeface="Arial"/>
+                <a:ea typeface="Arial"/>
+                <a:cs typeface="Arial"/>
+              </a:rPr>
               <a:t>Works Anywhere</a:t>
             </a:r>
             <a:endParaRPr lang="en-US" sz="1550"/>
@@ -13804,7 +14157,7 @@
       </p:sp>
       <p:sp>
         <p:nvSpPr>
-          <p:cNvPr id="161106204" name="Text 10"/>
+          <p:cNvPr id="673165946" name="Text 10"/>
           <p:cNvSpPr/>
           <p:nvPr/>
         </p:nvSpPr>
@@ -13844,13 +14197,13 @@
       </p:sp>
       <p:sp>
         <p:nvSpPr>
-          <p:cNvPr id="479296941" name="Shape 12"/>
-          <p:cNvSpPr/>
-          <p:nvPr/>
-        </p:nvSpPr>
-        <p:spPr bwMode="auto">
-          <a:xfrm>
-            <a:off x="6492240" y="1857983"/>
+          <p:cNvPr id="522706650" name="Shape 12"/>
+          <p:cNvSpPr/>
+          <p:nvPr/>
+        </p:nvSpPr>
+        <p:spPr bwMode="auto">
+          <a:xfrm>
+            <a:off x="6492240" y="1615821"/>
             <a:ext cx="5120640" cy="457200"/>
           </a:xfrm>
           <a:prstGeom prst="roundRect">
@@ -13866,13 +14219,13 @@
       </p:sp>
       <p:sp>
         <p:nvSpPr>
-          <p:cNvPr id="663193203" name="Shape 13"/>
-          <p:cNvSpPr/>
-          <p:nvPr/>
-        </p:nvSpPr>
-        <p:spPr bwMode="auto">
-          <a:xfrm>
-            <a:off x="6492240" y="2114015"/>
+          <p:cNvPr id="584087316" name="Shape 13"/>
+          <p:cNvSpPr/>
+          <p:nvPr/>
+        </p:nvSpPr>
+        <p:spPr bwMode="auto">
+          <a:xfrm>
+            <a:off x="6492240" y="1871853"/>
             <a:ext cx="5120640" cy="201168"/>
           </a:xfrm>
           <a:prstGeom prst="rect">
@@ -13886,13 +14239,13 @@
       </p:sp>
       <p:sp>
         <p:nvSpPr>
-          <p:cNvPr id="1383671721" name="Shape 14"/>
-          <p:cNvSpPr/>
-          <p:nvPr/>
-        </p:nvSpPr>
-        <p:spPr bwMode="auto">
-          <a:xfrm>
-            <a:off x="6693408" y="2022575"/>
+          <p:cNvPr id="1964514943" name="Shape 14"/>
+          <p:cNvSpPr/>
+          <p:nvPr/>
+        </p:nvSpPr>
+        <p:spPr bwMode="auto">
+          <a:xfrm>
+            <a:off x="6693408" y="1780413"/>
             <a:ext cx="128016" cy="128016"/>
           </a:xfrm>
           <a:prstGeom prst="ellipse">
@@ -13906,13 +14259,13 @@
       </p:sp>
       <p:sp>
         <p:nvSpPr>
-          <p:cNvPr id="2020992385" name="Shape 15"/>
-          <p:cNvSpPr/>
-          <p:nvPr/>
-        </p:nvSpPr>
-        <p:spPr bwMode="auto">
-          <a:xfrm>
-            <a:off x="6949440" y="2022575"/>
+          <p:cNvPr id="845873421" name="Shape 15"/>
+          <p:cNvSpPr/>
+          <p:nvPr/>
+        </p:nvSpPr>
+        <p:spPr bwMode="auto">
+          <a:xfrm>
+            <a:off x="6949440" y="1780413"/>
             <a:ext cx="128016" cy="128016"/>
           </a:xfrm>
           <a:prstGeom prst="ellipse">
@@ -13926,13 +14279,13 @@
       </p:sp>
       <p:sp>
         <p:nvSpPr>
-          <p:cNvPr id="696079708" name="Shape 16"/>
-          <p:cNvSpPr/>
-          <p:nvPr/>
-        </p:nvSpPr>
-        <p:spPr bwMode="auto">
-          <a:xfrm>
-            <a:off x="7205470" y="2022575"/>
+          <p:cNvPr id="1026357224" name="Shape 16"/>
+          <p:cNvSpPr/>
+          <p:nvPr/>
+        </p:nvSpPr>
+        <p:spPr bwMode="auto">
+          <a:xfrm>
+            <a:off x="7205469" y="1780413"/>
             <a:ext cx="128016" cy="128016"/>
           </a:xfrm>
           <a:prstGeom prst="ellipse">
@@ -13946,13 +14299,13 @@
       </p:sp>
       <p:sp>
         <p:nvSpPr>
-          <p:cNvPr id="1112859096" name="Text 17"/>
-          <p:cNvSpPr/>
-          <p:nvPr/>
-        </p:nvSpPr>
-        <p:spPr bwMode="auto">
-          <a:xfrm>
-            <a:off x="7680960" y="1967711"/>
+          <p:cNvPr id="1588744993" name="Text 17"/>
+          <p:cNvSpPr/>
+          <p:nvPr/>
+        </p:nvSpPr>
+        <p:spPr bwMode="auto">
+          <a:xfrm>
+            <a:off x="7680960" y="1725549"/>
             <a:ext cx="3657600" cy="274320"/>
           </a:xfrm>
           <a:prstGeom prst="rect">
@@ -13986,7 +14339,7 @@
       </p:sp>
       <p:sp>
         <p:nvSpPr>
-          <p:cNvPr id="822242099" name="Text 48"/>
+          <p:cNvPr id="1851018819" name="Text 48"/>
           <p:cNvSpPr/>
           <p:nvPr/>
         </p:nvSpPr>
@@ -14026,13 +14379,13 @@
       </p:sp>
       <p:sp>
         <p:nvSpPr>
-          <p:cNvPr id="680596646" name="Text 49"/>
-          <p:cNvSpPr/>
-          <p:nvPr/>
-        </p:nvSpPr>
-        <p:spPr bwMode="auto">
-          <a:xfrm>
-            <a:off x="11277294" y="5623767"/>
+          <p:cNvPr id="1716060866" name="Text 49"/>
+          <p:cNvSpPr/>
+          <p:nvPr/>
+        </p:nvSpPr>
+        <p:spPr bwMode="auto">
+          <a:xfrm>
+            <a:off x="11196573" y="6430970"/>
             <a:ext cx="457200" cy="274320"/>
           </a:xfrm>
           <a:prstGeom prst="rect">
@@ -14064,29 +14417,6 @@
           </a:p>
         </p:txBody>
       </p:sp>
-      <p:pic>
-        <p:nvPicPr>
-          <p:cNvPr id="1785720306" name=""/>
-          <p:cNvPicPr>
-            <a:picLocks noChangeAspect="1"/>
-          </p:cNvPicPr>
-          <p:nvPr/>
-        </p:nvPicPr>
-        <p:blipFill rotWithShape="1">
-          <a:blip r:embed="rId7"/>
-          <a:srcRect l="0" t="0" r="0" b="14948"/>
-          <a:stretch/>
-        </p:blipFill>
-        <p:spPr bwMode="auto">
-          <a:xfrm flipH="0" flipV="0">
-            <a:off x="6492240" y="2315183"/>
-            <a:ext cx="5135786" cy="3637323"/>
-          </a:xfrm>
-          <a:prstGeom prst="rect">
-            <a:avLst/>
-          </a:prstGeom>
-        </p:spPr>
-      </p:pic>
     </p:spTree>
   </p:cSld>
   <p:clrMapOvr>
@@ -14129,7 +14459,7 @@
       </p:grpSpPr>
       <p:sp>
         <p:nvSpPr>
-          <p:cNvPr id="2140986998" name="Text 0"/>
+          <p:cNvPr id="413608105" name="Text 0"/>
           <p:cNvSpPr/>
           <p:nvPr/>
         </p:nvSpPr>
@@ -14169,7 +14499,7 @@
       </p:sp>
       <p:sp>
         <p:nvSpPr>
-          <p:cNvPr id="1757478364" name="Text 1"/>
+          <p:cNvPr id="142094101" name="Text 1"/>
           <p:cNvSpPr/>
           <p:nvPr/>
         </p:nvSpPr>
@@ -14209,7 +14539,7 @@
       </p:sp>
       <p:sp>
         <p:nvSpPr>
-          <p:cNvPr id="790537220" name="Text 2"/>
+          <p:cNvPr id="569701259" name="Text 2"/>
           <p:cNvSpPr/>
           <p:nvPr/>
         </p:nvSpPr>
@@ -14249,7 +14579,7 @@
       </p:sp>
       <p:sp>
         <p:nvSpPr>
-          <p:cNvPr id="1904267992" name="Shape 3"/>
+          <p:cNvPr id="1671155108" name="Shape 3"/>
           <p:cNvSpPr/>
           <p:nvPr/>
         </p:nvSpPr>
@@ -14276,7 +14606,7 @@
       </p:sp>
       <p:pic>
         <p:nvPicPr>
-          <p:cNvPr id="2000023018" name="Image 0" descr="preencoded.png"/>
+          <p:cNvPr id="39739147" name="Image 0" descr="preencoded.png"/>
           <p:cNvPicPr>
             <a:picLocks noChangeAspect="1"/>
           </p:cNvPicPr>
@@ -14298,7 +14628,7 @@
       </p:pic>
       <p:sp>
         <p:nvSpPr>
-          <p:cNvPr id="1614807907" name="Text 4"/>
+          <p:cNvPr id="378800131" name="Text 4"/>
           <p:cNvSpPr/>
           <p:nvPr/>
         </p:nvSpPr>
@@ -14338,7 +14668,7 @@
       </p:sp>
       <p:sp>
         <p:nvSpPr>
-          <p:cNvPr id="205521913" name="Shape 5"/>
+          <p:cNvPr id="544556799" name="Shape 5"/>
           <p:cNvSpPr/>
           <p:nvPr/>
         </p:nvSpPr>
@@ -14358,7 +14688,7 @@
       </p:sp>
       <p:sp>
         <p:nvSpPr>
-          <p:cNvPr id="178654568" name="Text 6"/>
+          <p:cNvPr id="932207879" name="Text 6"/>
           <p:cNvSpPr/>
           <p:nvPr/>
         </p:nvSpPr>
@@ -14398,7 +14728,7 @@
       </p:sp>
       <p:sp>
         <p:nvSpPr>
-          <p:cNvPr id="1946429902" name="Shape 7"/>
+          <p:cNvPr id="54384237" name="Shape 7"/>
           <p:cNvSpPr/>
           <p:nvPr/>
         </p:nvSpPr>
@@ -14418,7 +14748,7 @@
       </p:sp>
       <p:sp>
         <p:nvSpPr>
-          <p:cNvPr id="890809166" name="Text 8"/>
+          <p:cNvPr id="1000559024" name="Text 8"/>
           <p:cNvSpPr/>
           <p:nvPr/>
         </p:nvSpPr>
@@ -14458,7 +14788,7 @@
       </p:sp>
       <p:sp>
         <p:nvSpPr>
-          <p:cNvPr id="84083356" name="Shape 9"/>
+          <p:cNvPr id="323079575" name="Shape 9"/>
           <p:cNvSpPr/>
           <p:nvPr/>
         </p:nvSpPr>
@@ -14478,7 +14808,7 @@
       </p:sp>
       <p:sp>
         <p:nvSpPr>
-          <p:cNvPr id="548114405" name="Text 10"/>
+          <p:cNvPr id="292742731" name="Text 10"/>
           <p:cNvSpPr/>
           <p:nvPr/>
         </p:nvSpPr>
@@ -14518,7 +14848,7 @@
       </p:sp>
       <p:sp>
         <p:nvSpPr>
-          <p:cNvPr id="1506081478" name="Shape 11"/>
+          <p:cNvPr id="79604277" name="Shape 11"/>
           <p:cNvSpPr/>
           <p:nvPr/>
         </p:nvSpPr>
@@ -14538,7 +14868,7 @@
       </p:sp>
       <p:sp>
         <p:nvSpPr>
-          <p:cNvPr id="813836598" name="Text 12"/>
+          <p:cNvPr id="1058675560" name="Text 12"/>
           <p:cNvSpPr/>
           <p:nvPr/>
         </p:nvSpPr>
@@ -14578,7 +14908,7 @@
       </p:sp>
       <p:sp>
         <p:nvSpPr>
-          <p:cNvPr id="1887132443" name="Shape 13"/>
+          <p:cNvPr id="797925496" name="Shape 13"/>
           <p:cNvSpPr/>
           <p:nvPr/>
         </p:nvSpPr>
@@ -14598,7 +14928,7 @@
       </p:sp>
       <p:sp>
         <p:nvSpPr>
-          <p:cNvPr id="912572447" name="Text 14"/>
+          <p:cNvPr id="1602540448" name="Text 14"/>
           <p:cNvSpPr/>
           <p:nvPr/>
         </p:nvSpPr>
@@ -14638,7 +14968,7 @@
       </p:sp>
       <p:sp>
         <p:nvSpPr>
-          <p:cNvPr id="2131593894" name="Shape 15"/>
+          <p:cNvPr id="1033932017" name="Shape 15"/>
           <p:cNvSpPr/>
           <p:nvPr/>
         </p:nvSpPr>
@@ -14658,7 +14988,7 @@
       </p:sp>
       <p:sp>
         <p:nvSpPr>
-          <p:cNvPr id="194714389" name="Text 16"/>
+          <p:cNvPr id="674298687" name="Text 16"/>
           <p:cNvSpPr/>
           <p:nvPr/>
         </p:nvSpPr>
@@ -14698,7 +15028,7 @@
       </p:sp>
       <p:sp>
         <p:nvSpPr>
-          <p:cNvPr id="30249707" name="Shape 17"/>
+          <p:cNvPr id="1850854110" name="Shape 17"/>
           <p:cNvSpPr/>
           <p:nvPr/>
         </p:nvSpPr>
@@ -14725,7 +15055,7 @@
       </p:sp>
       <p:pic>
         <p:nvPicPr>
-          <p:cNvPr id="211283112" name="Image 1" descr="preencoded.png"/>
+          <p:cNvPr id="1817634443" name="Image 1" descr="preencoded.png"/>
           <p:cNvPicPr>
             <a:picLocks noChangeAspect="1"/>
           </p:cNvPicPr>
@@ -14747,7 +15077,7 @@
       </p:pic>
       <p:sp>
         <p:nvSpPr>
-          <p:cNvPr id="1440943692" name="Text 18"/>
+          <p:cNvPr id="1997904451" name="Text 18"/>
           <p:cNvSpPr/>
           <p:nvPr/>
         </p:nvSpPr>
@@ -14787,7 +15117,7 @@
       </p:sp>
       <p:sp>
         <p:nvSpPr>
-          <p:cNvPr id="1859831119" name="Shape 19"/>
+          <p:cNvPr id="105628155" name="Shape 19"/>
           <p:cNvSpPr/>
           <p:nvPr/>
         </p:nvSpPr>
@@ -14807,7 +15137,7 @@
       </p:sp>
       <p:sp>
         <p:nvSpPr>
-          <p:cNvPr id="235329700" name="Text 20"/>
+          <p:cNvPr id="1539839506" name="Text 20"/>
           <p:cNvSpPr/>
           <p:nvPr/>
         </p:nvSpPr>
@@ -14847,7 +15177,7 @@
       </p:sp>
       <p:sp>
         <p:nvSpPr>
-          <p:cNvPr id="1349449794" name="Shape 21"/>
+          <p:cNvPr id="1822379114" name="Shape 21"/>
           <p:cNvSpPr/>
           <p:nvPr/>
         </p:nvSpPr>
@@ -14867,7 +15197,7 @@
       </p:sp>
       <p:sp>
         <p:nvSpPr>
-          <p:cNvPr id="671604133" name="Text 22"/>
+          <p:cNvPr id="2115652668" name="Text 22"/>
           <p:cNvSpPr/>
           <p:nvPr/>
         </p:nvSpPr>
@@ -14907,7 +15237,7 @@
       </p:sp>
       <p:sp>
         <p:nvSpPr>
-          <p:cNvPr id="96753302" name="Shape 23"/>
+          <p:cNvPr id="1272005083" name="Shape 23"/>
           <p:cNvSpPr/>
           <p:nvPr/>
         </p:nvSpPr>
@@ -14927,7 +15257,7 @@
       </p:sp>
       <p:sp>
         <p:nvSpPr>
-          <p:cNvPr id="1939752981" name="Text 24"/>
+          <p:cNvPr id="553348254" name="Text 24"/>
           <p:cNvSpPr/>
           <p:nvPr/>
         </p:nvSpPr>
@@ -14967,7 +15297,7 @@
       </p:sp>
       <p:sp>
         <p:nvSpPr>
-          <p:cNvPr id="27935276" name="Shape 25"/>
+          <p:cNvPr id="2087113532" name="Shape 25"/>
           <p:cNvSpPr/>
           <p:nvPr/>
         </p:nvSpPr>
@@ -14987,7 +15317,7 @@
       </p:sp>
       <p:sp>
         <p:nvSpPr>
-          <p:cNvPr id="679013127" name="Text 26"/>
+          <p:cNvPr id="456188599" name="Text 26"/>
           <p:cNvSpPr/>
           <p:nvPr/>
         </p:nvSpPr>
@@ -15027,7 +15357,7 @@
       </p:sp>
       <p:sp>
         <p:nvSpPr>
-          <p:cNvPr id="352244475" name="Shape 27"/>
+          <p:cNvPr id="1262178510" name="Shape 27"/>
           <p:cNvSpPr/>
           <p:nvPr/>
         </p:nvSpPr>
@@ -15054,7 +15384,7 @@
       </p:sp>
       <p:pic>
         <p:nvPicPr>
-          <p:cNvPr id="1079383766" name="Image 2" descr="preencoded.png"/>
+          <p:cNvPr id="370713808" name="Image 2" descr="preencoded.png"/>
           <p:cNvPicPr>
             <a:picLocks noChangeAspect="1"/>
           </p:cNvPicPr>
@@ -15076,7 +15406,7 @@
       </p:pic>
       <p:sp>
         <p:nvSpPr>
-          <p:cNvPr id="458013470" name="Text 28"/>
+          <p:cNvPr id="814237278" name="Text 28"/>
           <p:cNvSpPr/>
           <p:nvPr/>
         </p:nvSpPr>
@@ -15116,7 +15446,7 @@
       </p:sp>
       <p:sp>
         <p:nvSpPr>
-          <p:cNvPr id="448884550" name="Shape 29"/>
+          <p:cNvPr id="708984525" name="Shape 29"/>
           <p:cNvSpPr/>
           <p:nvPr/>
         </p:nvSpPr>
@@ -15136,7 +15466,7 @@
       </p:sp>
       <p:sp>
         <p:nvSpPr>
-          <p:cNvPr id="2021263823" name="Text 30"/>
+          <p:cNvPr id="1228614744" name="Text 30"/>
           <p:cNvSpPr/>
           <p:nvPr/>
         </p:nvSpPr>
@@ -15176,7 +15506,7 @@
       </p:sp>
       <p:sp>
         <p:nvSpPr>
-          <p:cNvPr id="849437409" name="Shape 31"/>
+          <p:cNvPr id="739436796" name="Shape 31"/>
           <p:cNvSpPr/>
           <p:nvPr/>
         </p:nvSpPr>
@@ -15196,7 +15526,7 @@
       </p:sp>
       <p:sp>
         <p:nvSpPr>
-          <p:cNvPr id="663882439" name="Text 32"/>
+          <p:cNvPr id="84593553" name="Text 32"/>
           <p:cNvSpPr/>
           <p:nvPr/>
         </p:nvSpPr>
@@ -15236,7 +15566,7 @@
       </p:sp>
       <p:sp>
         <p:nvSpPr>
-          <p:cNvPr id="1930585323" name="Shape 33"/>
+          <p:cNvPr id="2136368860" name="Shape 33"/>
           <p:cNvSpPr/>
           <p:nvPr/>
         </p:nvSpPr>
@@ -15256,7 +15586,7 @@
       </p:sp>
       <p:sp>
         <p:nvSpPr>
-          <p:cNvPr id="1115453622" name="Text 34"/>
+          <p:cNvPr id="138273953" name="Text 34"/>
           <p:cNvSpPr/>
           <p:nvPr/>
         </p:nvSpPr>
@@ -15296,7 +15626,7 @@
       </p:sp>
       <p:sp>
         <p:nvSpPr>
-          <p:cNvPr id="857649083" name="Text 35"/>
+          <p:cNvPr id="1691237149" name="Text 35"/>
           <p:cNvSpPr/>
           <p:nvPr/>
         </p:nvSpPr>
@@ -15336,7 +15666,7 @@
       </p:sp>
       <p:sp>
         <p:nvSpPr>
-          <p:cNvPr id="862882052" name="Text 36"/>
+          <p:cNvPr id="1432003163" name="Text 36"/>
           <p:cNvSpPr/>
           <p:nvPr/>
         </p:nvSpPr>
@@ -15416,7 +15746,7 @@
       </p:grpSpPr>
       <p:sp>
         <p:nvSpPr>
-          <p:cNvPr id="990284885" name="Text 0"/>
+          <p:cNvPr id="741051874" name="Text 0"/>
           <p:cNvSpPr/>
           <p:nvPr/>
         </p:nvSpPr>
@@ -15456,7 +15786,7 @@
       </p:sp>
       <p:sp>
         <p:nvSpPr>
-          <p:cNvPr id="245487932" name="Text 1"/>
+          <p:cNvPr id="1216766780" name="Text 1"/>
           <p:cNvSpPr/>
           <p:nvPr/>
         </p:nvSpPr>
@@ -15496,7 +15826,7 @@
       </p:sp>
       <p:sp>
         <p:nvSpPr>
-          <p:cNvPr id="347252130" name="Text 2"/>
+          <p:cNvPr id="1221143936" name="Text 2"/>
           <p:cNvSpPr/>
           <p:nvPr/>
         </p:nvSpPr>
@@ -15536,7 +15866,7 @@
       </p:sp>
       <p:sp>
         <p:nvSpPr>
-          <p:cNvPr id="1419595538" name="Shape 3"/>
+          <p:cNvPr id="646062251" name="Shape 3"/>
           <p:cNvSpPr/>
           <p:nvPr/>
         </p:nvSpPr>
@@ -15558,7 +15888,7 @@
       </p:sp>
       <p:pic>
         <p:nvPicPr>
-          <p:cNvPr id="1014277876" name="Image 0" descr="preencoded.png"/>
+          <p:cNvPr id="683570180" name="Image 0" descr="preencoded.png"/>
           <p:cNvPicPr>
             <a:picLocks noChangeAspect="1"/>
           </p:cNvPicPr>
@@ -15580,7 +15910,7 @@
       </p:pic>
       <p:sp>
         <p:nvSpPr>
-          <p:cNvPr id="2061011057" name="Text 4"/>
+          <p:cNvPr id="999458826" name="Text 4"/>
           <p:cNvSpPr/>
           <p:nvPr/>
         </p:nvSpPr>
@@ -15620,7 +15950,7 @@
       </p:sp>
       <p:sp>
         <p:nvSpPr>
-          <p:cNvPr id="861510068" name="Text 5"/>
+          <p:cNvPr id="108239436" name="Text 5"/>
           <p:cNvSpPr/>
           <p:nvPr/>
         </p:nvSpPr>
@@ -15660,7 +15990,7 @@
       </p:sp>
       <p:sp>
         <p:nvSpPr>
-          <p:cNvPr id="857891029" name="Shape 6"/>
+          <p:cNvPr id="463498302" name="Shape 6"/>
           <p:cNvSpPr/>
           <p:nvPr/>
         </p:nvSpPr>
@@ -15682,7 +16012,7 @@
       </p:sp>
       <p:pic>
         <p:nvPicPr>
-          <p:cNvPr id="481095266" name="Image 1" descr="preencoded.png"/>
+          <p:cNvPr id="1740954316" name="Image 1" descr="preencoded.png"/>
           <p:cNvPicPr>
             <a:picLocks noChangeAspect="1"/>
           </p:cNvPicPr>
@@ -15704,7 +16034,7 @@
       </p:pic>
       <p:sp>
         <p:nvSpPr>
-          <p:cNvPr id="1643016988" name="Text 7"/>
+          <p:cNvPr id="1166018034" name="Text 7"/>
           <p:cNvSpPr/>
           <p:nvPr/>
         </p:nvSpPr>
@@ -15744,7 +16074,7 @@
       </p:sp>
       <p:sp>
         <p:nvSpPr>
-          <p:cNvPr id="1309057293" name="Text 8"/>
+          <p:cNvPr id="1414220334" name="Text 8"/>
           <p:cNvSpPr/>
           <p:nvPr/>
         </p:nvSpPr>
@@ -15784,7 +16114,7 @@
       </p:sp>
       <p:sp>
         <p:nvSpPr>
-          <p:cNvPr id="573395934" name="Shape 9"/>
+          <p:cNvPr id="25771311" name="Shape 9"/>
           <p:cNvSpPr/>
           <p:nvPr/>
         </p:nvSpPr>
@@ -15806,7 +16136,7 @@
       </p:sp>
       <p:pic>
         <p:nvPicPr>
-          <p:cNvPr id="1923795700" name="Image 2" descr="preencoded.png"/>
+          <p:cNvPr id="379694587" name="Image 2" descr="preencoded.png"/>
           <p:cNvPicPr>
             <a:picLocks noChangeAspect="1"/>
           </p:cNvPicPr>
@@ -15828,7 +16158,7 @@
       </p:pic>
       <p:sp>
         <p:nvSpPr>
-          <p:cNvPr id="324268150" name="Text 10"/>
+          <p:cNvPr id="2117314556" name="Text 10"/>
           <p:cNvSpPr/>
           <p:nvPr/>
         </p:nvSpPr>
@@ -15868,7 +16198,7 @@
       </p:sp>
       <p:sp>
         <p:nvSpPr>
-          <p:cNvPr id="656625291" name="Text 11"/>
+          <p:cNvPr id="1798661469" name="Text 11"/>
           <p:cNvSpPr/>
           <p:nvPr/>
         </p:nvSpPr>
@@ -15908,7 +16238,7 @@
       </p:sp>
       <p:pic>
         <p:nvPicPr>
-          <p:cNvPr id="1069227294" name="Image 3" descr="preencoded.png"/>
+          <p:cNvPr id="1850199320" name="Image 3" descr="preencoded.png"/>
           <p:cNvPicPr>
             <a:picLocks noChangeAspect="1"/>
           </p:cNvPicPr>
@@ -15930,7 +16260,7 @@
       </p:pic>
       <p:sp>
         <p:nvSpPr>
-          <p:cNvPr id="2007394118" name="Shape 12"/>
+          <p:cNvPr id="1803635825" name="Shape 12"/>
           <p:cNvSpPr/>
           <p:nvPr/>
         </p:nvSpPr>
@@ -15957,7 +16287,7 @@
       </p:sp>
       <p:sp>
         <p:nvSpPr>
-          <p:cNvPr id="1235687367" name="Text 13"/>
+          <p:cNvPr id="932493787" name="Text 13"/>
           <p:cNvSpPr/>
           <p:nvPr/>
         </p:nvSpPr>
@@ -15997,7 +16327,7 @@
       </p:sp>
       <p:sp>
         <p:nvSpPr>
-          <p:cNvPr id="512624383" name="Shape 14"/>
+          <p:cNvPr id="282672485" name="Shape 14"/>
           <p:cNvSpPr/>
           <p:nvPr/>
         </p:nvSpPr>
@@ -16024,7 +16354,7 @@
       </p:sp>
       <p:sp>
         <p:nvSpPr>
-          <p:cNvPr id="1110731456" name="Text 15"/>
+          <p:cNvPr id="955152468" name="Text 15"/>
           <p:cNvSpPr/>
           <p:nvPr/>
         </p:nvSpPr>
@@ -16064,7 +16394,7 @@
       </p:sp>
       <p:sp>
         <p:nvSpPr>
-          <p:cNvPr id="1760668190" name="Shape 16"/>
+          <p:cNvPr id="933880229" name="Shape 16"/>
           <p:cNvSpPr/>
           <p:nvPr/>
         </p:nvSpPr>
@@ -16091,7 +16421,7 @@
       </p:sp>
       <p:sp>
         <p:nvSpPr>
-          <p:cNvPr id="1713449575" name="Text 17"/>
+          <p:cNvPr id="664079030" name="Text 17"/>
           <p:cNvSpPr/>
           <p:nvPr/>
         </p:nvSpPr>
@@ -16131,7 +16461,7 @@
       </p:sp>
       <p:sp>
         <p:nvSpPr>
-          <p:cNvPr id="1512161542" name="Shape 18"/>
+          <p:cNvPr id="1291994463" name="Shape 18"/>
           <p:cNvSpPr/>
           <p:nvPr/>
         </p:nvSpPr>
@@ -16158,7 +16488,7 @@
       </p:sp>
       <p:sp>
         <p:nvSpPr>
-          <p:cNvPr id="1386488007" name="Text 19"/>
+          <p:cNvPr id="794641384" name="Text 19"/>
           <p:cNvSpPr/>
           <p:nvPr/>
         </p:nvSpPr>
@@ -16198,7 +16528,7 @@
       </p:sp>
       <p:sp>
         <p:nvSpPr>
-          <p:cNvPr id="875920873" name="Shape 20"/>
+          <p:cNvPr id="1778736293" name="Shape 20"/>
           <p:cNvSpPr/>
           <p:nvPr/>
         </p:nvSpPr>
@@ -16225,7 +16555,7 @@
       </p:sp>
       <p:sp>
         <p:nvSpPr>
-          <p:cNvPr id="602770054" name="Text 21"/>
+          <p:cNvPr id="612841418" name="Text 21"/>
           <p:cNvSpPr/>
           <p:nvPr/>
         </p:nvSpPr>
@@ -16265,7 +16595,7 @@
       </p:sp>
       <p:sp>
         <p:nvSpPr>
-          <p:cNvPr id="1816004681" name="Shape 22"/>
+          <p:cNvPr id="1320006347" name="Shape 22"/>
           <p:cNvSpPr/>
           <p:nvPr/>
         </p:nvSpPr>
@@ -16292,7 +16622,7 @@
       </p:sp>
       <p:sp>
         <p:nvSpPr>
-          <p:cNvPr id="1978846859" name="Text 23"/>
+          <p:cNvPr id="598147026" name="Text 23"/>
           <p:cNvSpPr/>
           <p:nvPr/>
         </p:nvSpPr>
@@ -16332,7 +16662,7 @@
       </p:sp>
       <p:sp>
         <p:nvSpPr>
-          <p:cNvPr id="832732703" name="Shape 24"/>
+          <p:cNvPr id="708307283" name="Shape 24"/>
           <p:cNvSpPr/>
           <p:nvPr/>
         </p:nvSpPr>
@@ -16359,7 +16689,7 @@
       </p:sp>
       <p:sp>
         <p:nvSpPr>
-          <p:cNvPr id="1669503499" name="Text 25"/>
+          <p:cNvPr id="1421378858" name="Text 25"/>
           <p:cNvSpPr/>
           <p:nvPr/>
         </p:nvSpPr>
@@ -16399,7 +16729,7 @@
       </p:sp>
       <p:sp>
         <p:nvSpPr>
-          <p:cNvPr id="1206752882" name="Shape 26"/>
+          <p:cNvPr id="357094980" name="Shape 26"/>
           <p:cNvSpPr/>
           <p:nvPr/>
         </p:nvSpPr>
@@ -16426,7 +16756,7 @@
       </p:sp>
       <p:sp>
         <p:nvSpPr>
-          <p:cNvPr id="33237332" name="Text 27"/>
+          <p:cNvPr id="1380608194" name="Text 27"/>
           <p:cNvSpPr/>
           <p:nvPr/>
         </p:nvSpPr>
@@ -16466,7 +16796,7 @@
       </p:sp>
       <p:sp>
         <p:nvSpPr>
-          <p:cNvPr id="616950470" name="Shape 28"/>
+          <p:cNvPr id="395016843" name="Shape 28"/>
           <p:cNvSpPr/>
           <p:nvPr/>
         </p:nvSpPr>
@@ -16493,7 +16823,7 @@
       </p:sp>
       <p:sp>
         <p:nvSpPr>
-          <p:cNvPr id="831216201" name="Text 29"/>
+          <p:cNvPr id="256572044" name="Text 29"/>
           <p:cNvSpPr/>
           <p:nvPr/>
         </p:nvSpPr>
@@ -16533,7 +16863,7 @@
       </p:sp>
       <p:sp>
         <p:nvSpPr>
-          <p:cNvPr id="610806354" name="Shape 30"/>
+          <p:cNvPr id="1741068262" name="Shape 30"/>
           <p:cNvSpPr/>
           <p:nvPr/>
         </p:nvSpPr>
@@ -16560,7 +16890,7 @@
       </p:sp>
       <p:sp>
         <p:nvSpPr>
-          <p:cNvPr id="1061028782" name="Text 31"/>
+          <p:cNvPr id="1568509738" name="Text 31"/>
           <p:cNvSpPr/>
           <p:nvPr/>
         </p:nvSpPr>
@@ -16600,7 +16930,7 @@
       </p:sp>
       <p:sp>
         <p:nvSpPr>
-          <p:cNvPr id="124975695" name="Shape 32"/>
+          <p:cNvPr id="679712823" name="Shape 32"/>
           <p:cNvSpPr/>
           <p:nvPr/>
         </p:nvSpPr>
@@ -16627,7 +16957,7 @@
       </p:sp>
       <p:sp>
         <p:nvSpPr>
-          <p:cNvPr id="1863920181" name="Text 33"/>
+          <p:cNvPr id="1172980376" name="Text 33"/>
           <p:cNvSpPr/>
           <p:nvPr/>
         </p:nvSpPr>
@@ -16667,7 +16997,7 @@
       </p:sp>
       <p:sp>
         <p:nvSpPr>
-          <p:cNvPr id="503592360" name="Shape 34"/>
+          <p:cNvPr id="2132944883" name="Shape 34"/>
           <p:cNvSpPr/>
           <p:nvPr/>
         </p:nvSpPr>
@@ -16694,7 +17024,7 @@
       </p:sp>
       <p:sp>
         <p:nvSpPr>
-          <p:cNvPr id="1545379420" name="Text 35"/>
+          <p:cNvPr id="1323955458" name="Text 35"/>
           <p:cNvSpPr/>
           <p:nvPr/>
         </p:nvSpPr>
@@ -16734,7 +17064,7 @@
       </p:sp>
       <p:sp>
         <p:nvSpPr>
-          <p:cNvPr id="338826684" name="Shape 36"/>
+          <p:cNvPr id="1582918136" name="Shape 36"/>
           <p:cNvSpPr/>
           <p:nvPr/>
         </p:nvSpPr>
@@ -16761,7 +17091,7 @@
       </p:sp>
       <p:sp>
         <p:nvSpPr>
-          <p:cNvPr id="1561981571" name="Text 37"/>
+          <p:cNvPr id="1678081880" name="Text 37"/>
           <p:cNvSpPr/>
           <p:nvPr/>
         </p:nvSpPr>
@@ -16801,7 +17131,7 @@
       </p:sp>
       <p:sp>
         <p:nvSpPr>
-          <p:cNvPr id="1436882532" name="Shape 38"/>
+          <p:cNvPr id="434132094" name="Shape 38"/>
           <p:cNvSpPr/>
           <p:nvPr/>
         </p:nvSpPr>
@@ -16828,7 +17158,7 @@
       </p:sp>
       <p:sp>
         <p:nvSpPr>
-          <p:cNvPr id="1352084715" name="Text 39"/>
+          <p:cNvPr id="795755965" name="Text 39"/>
           <p:cNvSpPr/>
           <p:nvPr/>
         </p:nvSpPr>
@@ -16868,7 +17198,7 @@
       </p:sp>
       <p:sp>
         <p:nvSpPr>
-          <p:cNvPr id="383122541" name="Shape 40"/>
+          <p:cNvPr id="147649635" name="Shape 40"/>
           <p:cNvSpPr/>
           <p:nvPr/>
         </p:nvSpPr>
@@ -16895,7 +17225,7 @@
       </p:sp>
       <p:sp>
         <p:nvSpPr>
-          <p:cNvPr id="1887871114" name="Text 41"/>
+          <p:cNvPr id="1367227484" name="Text 41"/>
           <p:cNvSpPr/>
           <p:nvPr/>
         </p:nvSpPr>
@@ -16935,7 +17265,7 @@
       </p:sp>
       <p:sp>
         <p:nvSpPr>
-          <p:cNvPr id="185919274" name="Text 42"/>
+          <p:cNvPr id="1843104693" name="Text 42"/>
           <p:cNvSpPr/>
           <p:nvPr/>
         </p:nvSpPr>
@@ -16975,7 +17305,7 @@
       </p:sp>
       <p:sp>
         <p:nvSpPr>
-          <p:cNvPr id="743152490" name="Text 43"/>
+          <p:cNvPr id="1812685134" name="Text 43"/>
           <p:cNvSpPr/>
           <p:nvPr/>
         </p:nvSpPr>
@@ -17015,7 +17345,7 @@
       </p:sp>
       <p:pic>
         <p:nvPicPr>
-          <p:cNvPr id="236530925" name="Image 3" descr="preencoded.png"/>
+          <p:cNvPr id="1157567028" name="Image 3" descr="preencoded.png"/>
           <p:cNvPicPr>
             <a:picLocks noChangeAspect="1"/>
           </p:cNvPicPr>
@@ -17077,7 +17407,7 @@
       </p:grpSpPr>
       <p:sp>
         <p:nvSpPr>
-          <p:cNvPr id="14762757" name="Text 0"/>
+          <p:cNvPr id="2099944648" name="Text 0"/>
           <p:cNvSpPr/>
           <p:nvPr/>
         </p:nvSpPr>
@@ -17121,7 +17451,7 @@
       </p:sp>
       <p:sp>
         <p:nvSpPr>
-          <p:cNvPr id="1006283957" name="Text 1"/>
+          <p:cNvPr id="1572208605" name="Text 1"/>
           <p:cNvSpPr/>
           <p:nvPr/>
         </p:nvSpPr>
@@ -17176,7 +17506,7 @@
       </p:sp>
       <p:sp>
         <p:nvSpPr>
-          <p:cNvPr id="1209834564" name="Text 2"/>
+          <p:cNvPr id="1823440174" name="Text 2"/>
           <p:cNvSpPr/>
           <p:nvPr/>
         </p:nvSpPr>
@@ -17220,7 +17550,7 @@
       </p:sp>
       <p:sp>
         <p:nvSpPr>
-          <p:cNvPr id="1256639445" name="Shape 3"/>
+          <p:cNvPr id="1914683548" name="Shape 3"/>
           <p:cNvSpPr/>
           <p:nvPr/>
         </p:nvSpPr>
@@ -17264,7 +17594,7 @@
       </p:sp>
       <p:pic>
         <p:nvPicPr>
-          <p:cNvPr id="907938446" name="Image 1" descr="preencoded.png"/>
+          <p:cNvPr id="982257883" name="Image 1" descr="preencoded.png"/>
           <p:cNvPicPr>
             <a:picLocks noChangeAspect="1"/>
           </p:cNvPicPr>
@@ -17286,7 +17616,7 @@
       </p:pic>
       <p:sp>
         <p:nvSpPr>
-          <p:cNvPr id="1874053542" name="Text 4"/>
+          <p:cNvPr id="1391107955" name="Text 4"/>
           <p:cNvSpPr/>
           <p:nvPr/>
         </p:nvSpPr>
@@ -17330,7 +17660,7 @@
       </p:sp>
       <p:sp>
         <p:nvSpPr>
-          <p:cNvPr id="2082160590" name="Text 5"/>
+          <p:cNvPr id="346796109" name="Text 5"/>
           <p:cNvSpPr/>
           <p:nvPr/>
         </p:nvSpPr>
@@ -17374,7 +17704,7 @@
       </p:sp>
       <p:pic>
         <p:nvPicPr>
-          <p:cNvPr id="1689515004" name="Image 2" descr="preencoded.png"/>
+          <p:cNvPr id="113840918" name="Image 2" descr="preencoded.png"/>
           <p:cNvPicPr>
             <a:picLocks noChangeAspect="1"/>
           </p:cNvPicPr>
@@ -17396,7 +17726,7 @@
       </p:pic>
       <p:sp>
         <p:nvSpPr>
-          <p:cNvPr id="1979652215" name="Shape 6"/>
+          <p:cNvPr id="1399085194" name="Shape 6"/>
           <p:cNvSpPr/>
           <p:nvPr/>
         </p:nvSpPr>
@@ -17440,7 +17770,7 @@
       </p:sp>
       <p:pic>
         <p:nvPicPr>
-          <p:cNvPr id="10847090" name="Image 3" descr="preencoded.png"/>
+          <p:cNvPr id="811971265" name="Image 3" descr="preencoded.png"/>
           <p:cNvPicPr>
             <a:picLocks noChangeAspect="1"/>
           </p:cNvPicPr>
@@ -17462,7 +17792,7 @@
       </p:pic>
       <p:sp>
         <p:nvSpPr>
-          <p:cNvPr id="852890732" name="Text 7"/>
+          <p:cNvPr id="752200605" name="Text 7"/>
           <p:cNvSpPr/>
           <p:nvPr/>
         </p:nvSpPr>
@@ -17506,7 +17836,7 @@
       </p:sp>
       <p:sp>
         <p:nvSpPr>
-          <p:cNvPr id="1196920650" name="Text 8"/>
+          <p:cNvPr id="1974445168" name="Text 8"/>
           <p:cNvSpPr/>
           <p:nvPr/>
         </p:nvSpPr>
@@ -17550,7 +17880,7 @@
       </p:sp>
       <p:pic>
         <p:nvPicPr>
-          <p:cNvPr id="646232297" name="Image 4" descr="preencoded.png"/>
+          <p:cNvPr id="453026606" name="Image 4" descr="preencoded.png"/>
           <p:cNvPicPr>
             <a:picLocks noChangeAspect="1"/>
           </p:cNvPicPr>
@@ -17572,7 +17902,7 @@
       </p:pic>
       <p:sp>
         <p:nvSpPr>
-          <p:cNvPr id="783841952" name="Shape 9"/>
+          <p:cNvPr id="318631734" name="Shape 9"/>
           <p:cNvSpPr/>
           <p:nvPr/>
         </p:nvSpPr>
@@ -17616,7 +17946,7 @@
       </p:sp>
       <p:pic>
         <p:nvPicPr>
-          <p:cNvPr id="1393343677" name="Image 5" descr="preencoded.png"/>
+          <p:cNvPr id="1213118658" name="Image 5" descr="preencoded.png"/>
           <p:cNvPicPr>
             <a:picLocks noChangeAspect="1"/>
           </p:cNvPicPr>
@@ -17638,7 +17968,7 @@
       </p:pic>
       <p:sp>
         <p:nvSpPr>
-          <p:cNvPr id="2141588078" name="Text 10"/>
+          <p:cNvPr id="92548065" name="Text 10"/>
           <p:cNvSpPr/>
           <p:nvPr/>
         </p:nvSpPr>
@@ -17682,7 +18012,7 @@
       </p:sp>
       <p:sp>
         <p:nvSpPr>
-          <p:cNvPr id="937617866" name="Text 11"/>
+          <p:cNvPr id="284798843" name="Text 11"/>
           <p:cNvSpPr/>
           <p:nvPr/>
         </p:nvSpPr>
@@ -17726,7 +18056,7 @@
       </p:sp>
       <p:pic>
         <p:nvPicPr>
-          <p:cNvPr id="1798465250" name="Image 6" descr="preencoded.png"/>
+          <p:cNvPr id="1646567297" name="Image 6" descr="preencoded.png"/>
           <p:cNvPicPr>
             <a:picLocks noChangeAspect="1"/>
           </p:cNvPicPr>
@@ -17748,7 +18078,7 @@
       </p:pic>
       <p:sp>
         <p:nvSpPr>
-          <p:cNvPr id="207211462" name="Shape 12"/>
+          <p:cNvPr id="872376713" name="Shape 12"/>
           <p:cNvSpPr/>
           <p:nvPr/>
         </p:nvSpPr>
@@ -17792,7 +18122,7 @@
       </p:sp>
       <p:pic>
         <p:nvPicPr>
-          <p:cNvPr id="173031594" name="Image 7" descr="preencoded.png"/>
+          <p:cNvPr id="1170588958" name="Image 7" descr="preencoded.png"/>
           <p:cNvPicPr>
             <a:picLocks noChangeAspect="1"/>
           </p:cNvPicPr>
@@ -17814,7 +18144,7 @@
       </p:pic>
       <p:sp>
         <p:nvSpPr>
-          <p:cNvPr id="1073532751" name="Text 13"/>
+          <p:cNvPr id="1037224375" name="Text 13"/>
           <p:cNvSpPr/>
           <p:nvPr/>
         </p:nvSpPr>
@@ -17858,7 +18188,7 @@
       </p:sp>
       <p:sp>
         <p:nvSpPr>
-          <p:cNvPr id="2048330837" name="Text 14"/>
+          <p:cNvPr id="1054263959" name="Text 14"/>
           <p:cNvSpPr/>
           <p:nvPr/>
         </p:nvSpPr>
@@ -17902,7 +18232,7 @@
       </p:sp>
       <p:sp>
         <p:nvSpPr>
-          <p:cNvPr id="754935884" name="Text 17"/>
+          <p:cNvPr id="2033314476" name="Text 17"/>
           <p:cNvSpPr/>
           <p:nvPr/>
         </p:nvSpPr>
@@ -17946,7 +18276,7 @@
       </p:sp>
       <p:sp>
         <p:nvSpPr>
-          <p:cNvPr id="701659747" name="Text 18"/>
+          <p:cNvPr id="1558011228" name="Text 18"/>
           <p:cNvSpPr/>
           <p:nvPr/>
         </p:nvSpPr>
@@ -18030,7 +18360,7 @@
       </p:grpSpPr>
       <p:sp>
         <p:nvSpPr>
-          <p:cNvPr id="395036186" name="Text 0"/>
+          <p:cNvPr id="263788421" name="Text 0"/>
           <p:cNvSpPr/>
           <p:nvPr/>
         </p:nvSpPr>
@@ -18070,7 +18400,7 @@
       </p:sp>
       <p:sp>
         <p:nvSpPr>
-          <p:cNvPr id="1129885158" name="Text 1"/>
+          <p:cNvPr id="1874956517" name="Text 1"/>
           <p:cNvSpPr/>
           <p:nvPr/>
         </p:nvSpPr>
@@ -18110,7 +18440,7 @@
       </p:sp>
       <p:sp>
         <p:nvSpPr>
-          <p:cNvPr id="19900584" name="Text 2"/>
+          <p:cNvPr id="991936951" name="Text 2"/>
           <p:cNvSpPr/>
           <p:nvPr/>
         </p:nvSpPr>
@@ -18150,7 +18480,7 @@
       </p:sp>
       <p:sp>
         <p:nvSpPr>
-          <p:cNvPr id="1476921145" name="Shape 3"/>
+          <p:cNvPr id="628649979" name="Shape 3"/>
           <p:cNvSpPr/>
           <p:nvPr/>
         </p:nvSpPr>
@@ -18172,7 +18502,7 @@
       </p:sp>
       <p:pic>
         <p:nvPicPr>
-          <p:cNvPr id="1217770177" name="Image 0" descr="preencoded.png"/>
+          <p:cNvPr id="928090706" name="Image 0" descr="preencoded.png"/>
           <p:cNvPicPr>
             <a:picLocks noChangeAspect="1"/>
           </p:cNvPicPr>
@@ -18194,7 +18524,7 @@
       </p:pic>
       <p:sp>
         <p:nvSpPr>
-          <p:cNvPr id="574408947" name="Text 4"/>
+          <p:cNvPr id="1408882669" name="Text 4"/>
           <p:cNvSpPr/>
           <p:nvPr/>
         </p:nvSpPr>
@@ -18234,7 +18564,7 @@
       </p:sp>
       <p:sp>
         <p:nvSpPr>
-          <p:cNvPr id="928157751" name="Text 5"/>
+          <p:cNvPr id="1846448043" name="Text 5"/>
           <p:cNvSpPr/>
           <p:nvPr/>
         </p:nvSpPr>
@@ -18274,7 +18604,7 @@
       </p:sp>
       <p:sp>
         <p:nvSpPr>
-          <p:cNvPr id="232781308" name="Shape 6"/>
+          <p:cNvPr id="1028690316" name="Shape 6"/>
           <p:cNvSpPr/>
           <p:nvPr/>
         </p:nvSpPr>
@@ -18296,7 +18626,7 @@
       </p:sp>
       <p:pic>
         <p:nvPicPr>
-          <p:cNvPr id="971935548" name="Image 1" descr="preencoded.png"/>
+          <p:cNvPr id="150611588" name="Image 1" descr="preencoded.png"/>
           <p:cNvPicPr>
             <a:picLocks noChangeAspect="1"/>
           </p:cNvPicPr>
@@ -18318,7 +18648,7 @@
       </p:pic>
       <p:sp>
         <p:nvSpPr>
-          <p:cNvPr id="1436313454" name="Text 7"/>
+          <p:cNvPr id="461650752" name="Text 7"/>
           <p:cNvSpPr/>
           <p:nvPr/>
         </p:nvSpPr>
@@ -18358,7 +18688,7 @@
       </p:sp>
       <p:sp>
         <p:nvSpPr>
-          <p:cNvPr id="272450720" name="Text 8"/>
+          <p:cNvPr id="1267286011" name="Text 8"/>
           <p:cNvSpPr/>
           <p:nvPr/>
         </p:nvSpPr>
@@ -18398,7 +18728,7 @@
       </p:sp>
       <p:sp>
         <p:nvSpPr>
-          <p:cNvPr id="417342071" name="Shape 9"/>
+          <p:cNvPr id="1471057618" name="Shape 9"/>
           <p:cNvSpPr/>
           <p:nvPr/>
         </p:nvSpPr>
@@ -18420,7 +18750,7 @@
       </p:sp>
       <p:pic>
         <p:nvPicPr>
-          <p:cNvPr id="1558492202" name="Image 2" descr="preencoded.png"/>
+          <p:cNvPr id="1133657597" name="Image 2" descr="preencoded.png"/>
           <p:cNvPicPr>
             <a:picLocks noChangeAspect="1"/>
           </p:cNvPicPr>
@@ -18442,7 +18772,7 @@
       </p:pic>
       <p:sp>
         <p:nvSpPr>
-          <p:cNvPr id="1359005024" name="Text 10"/>
+          <p:cNvPr id="1705806525" name="Text 10"/>
           <p:cNvSpPr/>
           <p:nvPr/>
         </p:nvSpPr>
@@ -18482,7 +18812,7 @@
       </p:sp>
       <p:sp>
         <p:nvSpPr>
-          <p:cNvPr id="114545431" name="Text 11"/>
+          <p:cNvPr id="1577442020" name="Text 11"/>
           <p:cNvSpPr/>
           <p:nvPr/>
         </p:nvSpPr>
@@ -18522,7 +18852,7 @@
       </p:sp>
       <p:sp>
         <p:nvSpPr>
-          <p:cNvPr id="1501226330" name="Shape 12"/>
+          <p:cNvPr id="1400923970" name="Shape 12"/>
           <p:cNvSpPr/>
           <p:nvPr/>
         </p:nvSpPr>
@@ -18544,7 +18874,7 @@
       </p:sp>
       <p:pic>
         <p:nvPicPr>
-          <p:cNvPr id="1590782813" name="Image 3" descr="preencoded.png"/>
+          <p:cNvPr id="811089787" name="Image 3" descr="preencoded.png"/>
           <p:cNvPicPr>
             <a:picLocks noChangeAspect="1"/>
           </p:cNvPicPr>
@@ -18566,7 +18896,7 @@
       </p:pic>
       <p:sp>
         <p:nvSpPr>
-          <p:cNvPr id="2001325244" name="Text 13"/>
+          <p:cNvPr id="998467215" name="Text 13"/>
           <p:cNvSpPr/>
           <p:nvPr/>
         </p:nvSpPr>
@@ -18606,7 +18936,7 @@
       </p:sp>
       <p:sp>
         <p:nvSpPr>
-          <p:cNvPr id="1778706454" name="Text 14"/>
+          <p:cNvPr id="1177064306" name="Text 14"/>
           <p:cNvSpPr/>
           <p:nvPr/>
         </p:nvSpPr>
@@ -18646,7 +18976,7 @@
       </p:sp>
       <p:sp>
         <p:nvSpPr>
-          <p:cNvPr id="285463859" name="Shape 15"/>
+          <p:cNvPr id="1911270108" name="Shape 15"/>
           <p:cNvSpPr/>
           <p:nvPr/>
         </p:nvSpPr>
@@ -18668,7 +18998,7 @@
       </p:sp>
       <p:pic>
         <p:nvPicPr>
-          <p:cNvPr id="1252460232" name="Image 4" descr="preencoded.png"/>
+          <p:cNvPr id="528434642" name="Image 4" descr="preencoded.png"/>
           <p:cNvPicPr>
             <a:picLocks noChangeAspect="1"/>
           </p:cNvPicPr>
@@ -18690,7 +19020,7 @@
       </p:pic>
       <p:sp>
         <p:nvSpPr>
-          <p:cNvPr id="1401365854" name="Text 16"/>
+          <p:cNvPr id="2039066423" name="Text 16"/>
           <p:cNvSpPr/>
           <p:nvPr/>
         </p:nvSpPr>
@@ -18730,7 +19060,7 @@
       </p:sp>
       <p:sp>
         <p:nvSpPr>
-          <p:cNvPr id="483735922" name="Text 17"/>
+          <p:cNvPr id="2001688416" name="Text 17"/>
           <p:cNvSpPr/>
           <p:nvPr/>
         </p:nvSpPr>
@@ -18770,7 +19100,7 @@
       </p:sp>
       <p:sp>
         <p:nvSpPr>
-          <p:cNvPr id="120243080" name="Shape 18"/>
+          <p:cNvPr id="750149140" name="Shape 18"/>
           <p:cNvSpPr/>
           <p:nvPr/>
         </p:nvSpPr>
@@ -18792,7 +19122,7 @@
       </p:sp>
       <p:pic>
         <p:nvPicPr>
-          <p:cNvPr id="858582857" name="Image 5" descr="preencoded.png"/>
+          <p:cNvPr id="306064503" name="Image 5" descr="preencoded.png"/>
           <p:cNvPicPr>
             <a:picLocks noChangeAspect="1"/>
           </p:cNvPicPr>
@@ -18814,7 +19144,7 @@
       </p:pic>
       <p:sp>
         <p:nvSpPr>
-          <p:cNvPr id="1470432701" name="Text 19"/>
+          <p:cNvPr id="1556692750" name="Text 19"/>
           <p:cNvSpPr/>
           <p:nvPr/>
         </p:nvSpPr>
@@ -18854,7 +19184,7 @@
       </p:sp>
       <p:sp>
         <p:nvSpPr>
-          <p:cNvPr id="2092858865" name="Text 20"/>
+          <p:cNvPr id="1506704755" name="Text 20"/>
           <p:cNvSpPr/>
           <p:nvPr/>
         </p:nvSpPr>
@@ -18894,7 +19224,7 @@
       </p:sp>
       <p:sp>
         <p:nvSpPr>
-          <p:cNvPr id="1584038982" name="Shape 21"/>
+          <p:cNvPr id="595601003" name="Shape 21"/>
           <p:cNvSpPr/>
           <p:nvPr/>
         </p:nvSpPr>
@@ -18916,7 +19246,7 @@
       </p:sp>
       <p:pic>
         <p:nvPicPr>
-          <p:cNvPr id="290436265" name="Image 6" descr="preencoded.png"/>
+          <p:cNvPr id="1303236439" name="Image 6" descr="preencoded.png"/>
           <p:cNvPicPr>
             <a:picLocks noChangeAspect="1"/>
           </p:cNvPicPr>
@@ -18938,7 +19268,7 @@
       </p:pic>
       <p:sp>
         <p:nvSpPr>
-          <p:cNvPr id="1839791840" name="Text 22"/>
+          <p:cNvPr id="1923246042" name="Text 22"/>
           <p:cNvSpPr/>
           <p:nvPr/>
         </p:nvSpPr>
@@ -18978,7 +19308,7 @@
       </p:sp>
       <p:sp>
         <p:nvSpPr>
-          <p:cNvPr id="1028046169" name="Text 23"/>
+          <p:cNvPr id="609517910" name="Text 23"/>
           <p:cNvSpPr/>
           <p:nvPr/>
         </p:nvSpPr>
@@ -19018,7 +19348,7 @@
       </p:sp>
       <p:sp>
         <p:nvSpPr>
-          <p:cNvPr id="973953013" name="Shape 24"/>
+          <p:cNvPr id="616794799" name="Shape 24"/>
           <p:cNvSpPr/>
           <p:nvPr/>
         </p:nvSpPr>
@@ -19040,7 +19370,7 @@
       </p:sp>
       <p:pic>
         <p:nvPicPr>
-          <p:cNvPr id="899769566" name="Image 7" descr="preencoded.png"/>
+          <p:cNvPr id="152688039" name="Image 7" descr="preencoded.png"/>
           <p:cNvPicPr>
             <a:picLocks noChangeAspect="1"/>
           </p:cNvPicPr>
@@ -19062,7 +19392,7 @@
       </p:pic>
       <p:sp>
         <p:nvSpPr>
-          <p:cNvPr id="206209348" name="Text 25"/>
+          <p:cNvPr id="2066574756" name="Text 25"/>
           <p:cNvSpPr/>
           <p:nvPr/>
         </p:nvSpPr>
@@ -19102,7 +19432,7 @@
       </p:sp>
       <p:sp>
         <p:nvSpPr>
-          <p:cNvPr id="121016516" name="Text 26"/>
+          <p:cNvPr id="1947575766" name="Text 26"/>
           <p:cNvSpPr/>
           <p:nvPr/>
         </p:nvSpPr>
@@ -19142,7 +19472,7 @@
       </p:sp>
       <p:sp>
         <p:nvSpPr>
-          <p:cNvPr id="117709509" name="Shape 27"/>
+          <p:cNvPr id="2058887589" name="Shape 27"/>
           <p:cNvSpPr/>
           <p:nvPr/>
         </p:nvSpPr>
@@ -19164,7 +19494,7 @@
       </p:sp>
       <p:pic>
         <p:nvPicPr>
-          <p:cNvPr id="343855619" name="Image 8" descr="preencoded.png"/>
+          <p:cNvPr id="832448955" name="Image 8" descr="preencoded.png"/>
           <p:cNvPicPr>
             <a:picLocks noChangeAspect="1"/>
           </p:cNvPicPr>
@@ -19186,7 +19516,7 @@
       </p:pic>
       <p:sp>
         <p:nvSpPr>
-          <p:cNvPr id="452281373" name="Text 28"/>
+          <p:cNvPr id="1947260878" name="Text 28"/>
           <p:cNvSpPr/>
           <p:nvPr/>
         </p:nvSpPr>
@@ -19226,7 +19556,7 @@
       </p:sp>
       <p:sp>
         <p:nvSpPr>
-          <p:cNvPr id="2128361561" name="Text 29"/>
+          <p:cNvPr id="624797576" name="Text 29"/>
           <p:cNvSpPr/>
           <p:nvPr/>
         </p:nvSpPr>
@@ -19266,7 +19596,7 @@
       </p:sp>
       <p:sp>
         <p:nvSpPr>
-          <p:cNvPr id="1111813958" name="Text 30"/>
+          <p:cNvPr id="1532428795" name="Text 30"/>
           <p:cNvSpPr/>
           <p:nvPr/>
         </p:nvSpPr>
@@ -19306,7 +19636,7 @@
       </p:sp>
       <p:sp>
         <p:nvSpPr>
-          <p:cNvPr id="633850377" name="Text 31"/>
+          <p:cNvPr id="1759025919" name="Text 31"/>
           <p:cNvSpPr/>
           <p:nvPr/>
         </p:nvSpPr>
@@ -19386,7 +19716,7 @@
       </p:grpSpPr>
       <p:sp>
         <p:nvSpPr>
-          <p:cNvPr id="1923127207" name="Text 0"/>
+          <p:cNvPr id="939929730" name="Text 0"/>
           <p:cNvSpPr/>
           <p:nvPr/>
         </p:nvSpPr>
@@ -19426,7 +19756,7 @@
       </p:sp>
       <p:sp>
         <p:nvSpPr>
-          <p:cNvPr id="822587288" name="Text 1"/>
+          <p:cNvPr id="1558669123" name="Text 1"/>
           <p:cNvSpPr/>
           <p:nvPr/>
         </p:nvSpPr>
@@ -19466,7 +19796,7 @@
       </p:sp>
       <p:sp>
         <p:nvSpPr>
-          <p:cNvPr id="269320766" name="Text 2"/>
+          <p:cNvPr id="132007608" name="Text 2"/>
           <p:cNvSpPr/>
           <p:nvPr/>
         </p:nvSpPr>
@@ -19506,7 +19836,7 @@
       </p:sp>
       <p:sp>
         <p:nvSpPr>
-          <p:cNvPr id="209348220" name="Shape 3"/>
+          <p:cNvPr id="696443240" name="Shape 3"/>
           <p:cNvSpPr/>
           <p:nvPr/>
         </p:nvSpPr>
@@ -19533,7 +19863,7 @@
       </p:sp>
       <p:pic>
         <p:nvPicPr>
-          <p:cNvPr id="1692647699" name="Image 0" descr="preencoded.png"/>
+          <p:cNvPr id="1198271567" name="Image 0" descr="preencoded.png"/>
           <p:cNvPicPr>
             <a:picLocks noChangeAspect="1"/>
           </p:cNvPicPr>
@@ -19555,7 +19885,7 @@
       </p:pic>
       <p:sp>
         <p:nvSpPr>
-          <p:cNvPr id="1808136363" name="Text 4"/>
+          <p:cNvPr id="82009395" name="Text 4"/>
           <p:cNvSpPr/>
           <p:nvPr/>
         </p:nvSpPr>
@@ -19595,7 +19925,7 @@
       </p:sp>
       <p:sp>
         <p:nvSpPr>
-          <p:cNvPr id="1643491526" name="Text 5"/>
+          <p:cNvPr id="765778594" name="Text 5"/>
           <p:cNvSpPr/>
           <p:nvPr/>
         </p:nvSpPr>
@@ -19635,7 +19965,7 @@
       </p:sp>
       <p:sp>
         <p:nvSpPr>
-          <p:cNvPr id="441486165" name="Shape 6"/>
+          <p:cNvPr id="2082748381" name="Shape 6"/>
           <p:cNvSpPr/>
           <p:nvPr/>
         </p:nvSpPr>
@@ -19662,7 +19992,7 @@
       </p:sp>
       <p:pic>
         <p:nvPicPr>
-          <p:cNvPr id="214877585" name="Image 1" descr="preencoded.png"/>
+          <p:cNvPr id="1739953416" name="Image 1" descr="preencoded.png"/>
           <p:cNvPicPr>
             <a:picLocks noChangeAspect="1"/>
           </p:cNvPicPr>
@@ -19684,7 +20014,7 @@
       </p:pic>
       <p:sp>
         <p:nvSpPr>
-          <p:cNvPr id="1963975140" name="Text 7"/>
+          <p:cNvPr id="554779030" name="Text 7"/>
           <p:cNvSpPr/>
           <p:nvPr/>
         </p:nvSpPr>
@@ -19724,7 +20054,7 @@
       </p:sp>
       <p:sp>
         <p:nvSpPr>
-          <p:cNvPr id="1660354795" name="Text 8"/>
+          <p:cNvPr id="2015868972" name="Text 8"/>
           <p:cNvSpPr/>
           <p:nvPr/>
         </p:nvSpPr>
@@ -19764,7 +20094,7 @@
       </p:sp>
       <p:sp>
         <p:nvSpPr>
-          <p:cNvPr id="1155550341" name="Shape 9"/>
+          <p:cNvPr id="803454714" name="Shape 9"/>
           <p:cNvSpPr/>
           <p:nvPr/>
         </p:nvSpPr>
@@ -19791,7 +20121,7 @@
       </p:sp>
       <p:pic>
         <p:nvPicPr>
-          <p:cNvPr id="1063878115" name="Image 2" descr="preencoded.png"/>
+          <p:cNvPr id="2130179649" name="Image 2" descr="preencoded.png"/>
           <p:cNvPicPr>
             <a:picLocks noChangeAspect="1"/>
           </p:cNvPicPr>
@@ -19813,7 +20143,7 @@
       </p:pic>
       <p:sp>
         <p:nvSpPr>
-          <p:cNvPr id="124857080" name="Text 10"/>
+          <p:cNvPr id="1401248376" name="Text 10"/>
           <p:cNvSpPr/>
           <p:nvPr/>
         </p:nvSpPr>
@@ -19853,7 +20183,7 @@
       </p:sp>
       <p:sp>
         <p:nvSpPr>
-          <p:cNvPr id="1627585879" name="Text 11"/>
+          <p:cNvPr id="570890125" name="Text 11"/>
           <p:cNvSpPr/>
           <p:nvPr/>
         </p:nvSpPr>
@@ -19893,7 +20223,7 @@
       </p:sp>
       <p:sp>
         <p:nvSpPr>
-          <p:cNvPr id="905202355" name="Shape 12"/>
+          <p:cNvPr id="1419569714" name="Shape 12"/>
           <p:cNvSpPr/>
           <p:nvPr/>
         </p:nvSpPr>
@@ -19920,7 +20250,7 @@
       </p:sp>
       <p:pic>
         <p:nvPicPr>
-          <p:cNvPr id="1499403390" name="Image 3" descr="preencoded.png"/>
+          <p:cNvPr id="784549970" name="Image 3" descr="preencoded.png"/>
           <p:cNvPicPr>
             <a:picLocks noChangeAspect="1"/>
           </p:cNvPicPr>
@@ -19942,7 +20272,7 @@
       </p:pic>
       <p:sp>
         <p:nvSpPr>
-          <p:cNvPr id="321519621" name="Text 13"/>
+          <p:cNvPr id="1372890220" name="Text 13"/>
           <p:cNvSpPr/>
           <p:nvPr/>
         </p:nvSpPr>
@@ -19982,7 +20312,7 @@
       </p:sp>
       <p:sp>
         <p:nvSpPr>
-          <p:cNvPr id="1196660119" name="Text 14"/>
+          <p:cNvPr id="1433840317" name="Text 14"/>
           <p:cNvSpPr/>
           <p:nvPr/>
         </p:nvSpPr>
@@ -20022,7 +20352,7 @@
       </p:sp>
       <p:sp>
         <p:nvSpPr>
-          <p:cNvPr id="1864057331" name="Text 15"/>
+          <p:cNvPr id="1034601107" name="Text 15"/>
           <p:cNvSpPr/>
           <p:nvPr/>
         </p:nvSpPr>
@@ -20062,7 +20392,7 @@
       </p:sp>
       <p:sp>
         <p:nvSpPr>
-          <p:cNvPr id="1563304284" name="Text 16"/>
+          <p:cNvPr id="42687325" name="Text 16"/>
           <p:cNvSpPr/>
           <p:nvPr/>
         </p:nvSpPr>

--- a/frontend/public/markit.pptx
+++ b/frontend/public/markit.pptx
@@ -150,7 +150,7 @@
       </p:grpSpPr>
       <p:sp>
         <p:nvSpPr>
-          <p:cNvPr id="500858054" name="Header Placeholder 1"/>
+          <p:cNvPr id="98808638" name="Header Placeholder 1"/>
           <p:cNvSpPr>
             <a:spLocks noGrp="1"/>
           </p:cNvSpPr>
@@ -184,7 +184,7 @@
       </p:sp>
       <p:sp>
         <p:nvSpPr>
-          <p:cNvPr id="89810848" name="Date Placeholder 2"/>
+          <p:cNvPr id="965136412" name="Date Placeholder 2"/>
           <p:cNvSpPr>
             <a:spLocks noGrp="1"/>
           </p:cNvSpPr>
@@ -222,7 +222,7 @@
       </p:sp>
       <p:sp>
         <p:nvSpPr>
-          <p:cNvPr id="1114513611" name="Slide Image Placeholder 3"/>
+          <p:cNvPr id="280352327" name="Slide Image Placeholder 3"/>
           <p:cNvSpPr>
             <a:spLocks noChangeAspect="1" noGrp="1" noRot="1"/>
           </p:cNvSpPr>
@@ -258,7 +258,7 @@
       </p:sp>
       <p:sp>
         <p:nvSpPr>
-          <p:cNvPr id="2029038135" name="Notes Placeholder 4"/>
+          <p:cNvPr id="2049661154" name="Notes Placeholder 4"/>
           <p:cNvSpPr>
             <a:spLocks noGrp="1"/>
           </p:cNvSpPr>
@@ -332,7 +332,7 @@
       </p:sp>
       <p:sp>
         <p:nvSpPr>
-          <p:cNvPr id="1885633453" name="Footer Placeholder 5"/>
+          <p:cNvPr id="121391949" name="Footer Placeholder 5"/>
           <p:cNvSpPr>
             <a:spLocks noGrp="1"/>
           </p:cNvSpPr>
@@ -366,7 +366,7 @@
       </p:sp>
       <p:sp>
         <p:nvSpPr>
-          <p:cNvPr id="1665892560" name="Slide Number Placeholder 6"/>
+          <p:cNvPr id="2033470768" name="Slide Number Placeholder 6"/>
           <p:cNvSpPr>
             <a:spLocks noGrp="1"/>
           </p:cNvSpPr>
@@ -519,7 +519,7 @@
       </p:grpSpPr>
       <p:sp>
         <p:nvSpPr>
-          <p:cNvPr id="2051703698" name="Slide Image Placeholder 1"/>
+          <p:cNvPr id="1342180299" name="Slide Image Placeholder 1"/>
           <p:cNvSpPr>
             <a:spLocks noChangeAspect="1" noGrp="1" noRot="1"/>
           </p:cNvSpPr>
@@ -531,7 +531,7 @@
       </p:sp>
       <p:sp>
         <p:nvSpPr>
-          <p:cNvPr id="1806865832" name="Notes Placeholder 2"/>
+          <p:cNvPr id="1283950823" name="Notes Placeholder 2"/>
           <p:cNvSpPr>
             <a:spLocks noGrp="1"/>
           </p:cNvSpPr>
@@ -553,7 +553,7 @@
       </p:sp>
       <p:sp>
         <p:nvSpPr>
-          <p:cNvPr id="1551152959" name="Slide Number Placeholder 3"/>
+          <p:cNvPr id="1228462804" name="Slide Number Placeholder 3"/>
           <p:cNvSpPr>
             <a:spLocks noGrp="1"/>
           </p:cNvSpPr>
@@ -604,7 +604,7 @@
       </p:grpSpPr>
       <p:sp>
         <p:nvSpPr>
-          <p:cNvPr id="1226238952" name="Slide Image Placeholder 1"/>
+          <p:cNvPr id="2006825378" name="Slide Image Placeholder 1"/>
           <p:cNvSpPr>
             <a:spLocks noChangeAspect="1" noGrp="1" noRot="1"/>
           </p:cNvSpPr>
@@ -616,7 +616,7 @@
       </p:sp>
       <p:sp>
         <p:nvSpPr>
-          <p:cNvPr id="1747095243" name="Notes Placeholder 2"/>
+          <p:cNvPr id="444028091" name="Notes Placeholder 2"/>
           <p:cNvSpPr>
             <a:spLocks noGrp="1"/>
           </p:cNvSpPr>
@@ -642,7 +642,7 @@
       </p:sp>
       <p:sp>
         <p:nvSpPr>
-          <p:cNvPr id="1991730613" name="Slide Number Placeholder 3"/>
+          <p:cNvPr id="343495222" name="Slide Number Placeholder 3"/>
           <p:cNvSpPr>
             <a:spLocks noGrp="1"/>
           </p:cNvSpPr>
@@ -693,7 +693,7 @@
       </p:grpSpPr>
       <p:sp>
         <p:nvSpPr>
-          <p:cNvPr id="557645747" name="Slide Image Placeholder 1"/>
+          <p:cNvPr id="1285767309" name="Slide Image Placeholder 1"/>
           <p:cNvSpPr>
             <a:spLocks noChangeAspect="1" noGrp="1" noRot="1"/>
           </p:cNvSpPr>
@@ -705,7 +705,7 @@
       </p:sp>
       <p:sp>
         <p:nvSpPr>
-          <p:cNvPr id="1038669835" name="Notes Placeholder 2"/>
+          <p:cNvPr id="1296486093" name="Notes Placeholder 2"/>
           <p:cNvSpPr>
             <a:spLocks noGrp="1"/>
           </p:cNvSpPr>
@@ -727,7 +727,7 @@
       </p:sp>
       <p:sp>
         <p:nvSpPr>
-          <p:cNvPr id="919056079" name="Slide Number Placeholder 3"/>
+          <p:cNvPr id="332579153" name="Slide Number Placeholder 3"/>
           <p:cNvSpPr>
             <a:spLocks noGrp="1"/>
           </p:cNvSpPr>
@@ -778,7 +778,7 @@
       </p:grpSpPr>
       <p:sp>
         <p:nvSpPr>
-          <p:cNvPr id="1792238419" name="Slide Image Placeholder 1"/>
+          <p:cNvPr id="790398127" name="Slide Image Placeholder 1"/>
           <p:cNvSpPr>
             <a:spLocks noChangeAspect="1" noGrp="1" noRot="1"/>
           </p:cNvSpPr>
@@ -790,7 +790,7 @@
       </p:sp>
       <p:sp>
         <p:nvSpPr>
-          <p:cNvPr id="443640011" name="Notes Placeholder 2"/>
+          <p:cNvPr id="1305619039" name="Notes Placeholder 2"/>
           <p:cNvSpPr>
             <a:spLocks noGrp="1"/>
           </p:cNvSpPr>
@@ -812,7 +812,7 @@
       </p:sp>
       <p:sp>
         <p:nvSpPr>
-          <p:cNvPr id="1316722892" name="Slide Number Placeholder 3"/>
+          <p:cNvPr id="1617453672" name="Slide Number Placeholder 3"/>
           <p:cNvSpPr>
             <a:spLocks noGrp="1"/>
           </p:cNvSpPr>
@@ -863,7 +863,7 @@
       </p:grpSpPr>
       <p:sp>
         <p:nvSpPr>
-          <p:cNvPr id="588901087" name="Slide Image Placeholder 1"/>
+          <p:cNvPr id="2014579092" name="Slide Image Placeholder 1"/>
           <p:cNvSpPr>
             <a:spLocks noChangeAspect="1" noGrp="1" noRot="1"/>
           </p:cNvSpPr>
@@ -875,7 +875,7 @@
       </p:sp>
       <p:sp>
         <p:nvSpPr>
-          <p:cNvPr id="815535041" name="Notes Placeholder 2"/>
+          <p:cNvPr id="1271734074" name="Notes Placeholder 2"/>
           <p:cNvSpPr>
             <a:spLocks noGrp="1"/>
           </p:cNvSpPr>
@@ -891,17 +891,13 @@
             <a:pPr>
               <a:defRPr/>
             </a:pPr>
-            <a:r>
-              <a:rPr lang="en-US"/>
-              <a:t>Teachers and admins can browse the full attendance history by class or day, view interactive summaries, and export everything to PDF or CSV with one click. Teachers can also keep private, course-specific rosters separate from the official university list, which stays view-only for admins.</a:t>
-            </a:r>
             <a:endParaRPr lang="en-US"/>
           </a:p>
         </p:txBody>
       </p:sp>
       <p:sp>
         <p:nvSpPr>
-          <p:cNvPr id="783118135" name="Slide Number Placeholder 3"/>
+          <p:cNvPr id="2036194682" name="Slide Number Placeholder 3"/>
           <p:cNvSpPr>
             <a:spLocks noGrp="1"/>
           </p:cNvSpPr>
@@ -917,9 +913,9 @@
             <a:pPr>
               <a:defRPr/>
             </a:pPr>
-            <a:fld id="{F7021451-1387-4CA6-816F-3879F97B5CBC}" type="slidenum">
+            <a:fld id="{46FBD41B-9507-358D-AF39-C213BCEE2E71}" type="slidenum">
               <a:rPr lang="en-US"/>
-              <a:t>10</a:t>
+              <a:t>1</a:t>
             </a:fld>
             <a:endParaRPr lang="en-US"/>
           </a:p>
@@ -952,7 +948,7 @@
       </p:grpSpPr>
       <p:sp>
         <p:nvSpPr>
-          <p:cNvPr id="1270861045" name="Slide Image Placeholder 1"/>
+          <p:cNvPr id="7261523" name="Slide Image Placeholder 1"/>
           <p:cNvSpPr>
             <a:spLocks noChangeAspect="1" noGrp="1" noRot="1"/>
           </p:cNvSpPr>
@@ -964,7 +960,7 @@
       </p:sp>
       <p:sp>
         <p:nvSpPr>
-          <p:cNvPr id="2091277502" name="Notes Placeholder 2"/>
+          <p:cNvPr id="294370950" name="Notes Placeholder 2"/>
           <p:cNvSpPr>
             <a:spLocks noGrp="1"/>
           </p:cNvSpPr>
@@ -981,16 +977,16 @@
               <a:defRPr/>
             </a:pPr>
             <a:r>
-              <a:rPr/>
-              <a:t>MarkIt separates duties cleanly across three roles. Admins manage the university-wide roster, sessions, and teacher assignments but cannot alter attendance records. Teachers take attendance only for their assigned sections. Students are strictly read-only: they view their own dashboard, courses, and history, manage their own password and photo, and can never mark or edit attendance.</a:t>
-            </a:r>
-            <a:endParaRPr/>
-          </a:p>
-        </p:txBody>
-      </p:sp>
-      <p:sp>
-        <p:nvSpPr>
-          <p:cNvPr id="67832073" name="Slide Number Placeholder 3"/>
+              <a:rPr lang="en-US"/>
+              <a:t>Teachers and admins can browse the full attendance history by class or day, view interactive summaries, and export everything to PDF or CSV with one click. Teachers can also keep private, course-specific rosters separate from the official university list, which stays view-only for admins.</a:t>
+            </a:r>
+            <a:endParaRPr lang="en-US"/>
+          </a:p>
+        </p:txBody>
+      </p:sp>
+      <p:sp>
+        <p:nvSpPr>
+          <p:cNvPr id="1208605390" name="Slide Number Placeholder 3"/>
           <p:cNvSpPr>
             <a:spLocks noGrp="1"/>
           </p:cNvSpPr>
@@ -1006,9 +1002,9 @@
             <a:pPr>
               <a:defRPr/>
             </a:pPr>
-            <a:fld id="{5F15E29E-7190-6A74-6547-A05BB4D6BC16}" type="slidenum">
+            <a:fld id="{F7021451-1387-4CA6-816F-3879F97B5CBC}" type="slidenum">
               <a:rPr lang="en-US"/>
-              <a:t>11</a:t>
+              <a:t>10</a:t>
             </a:fld>
             <a:endParaRPr lang="en-US"/>
           </a:p>
@@ -1041,7 +1037,7 @@
       </p:grpSpPr>
       <p:sp>
         <p:nvSpPr>
-          <p:cNvPr id="153183141" name="Slide Image Placeholder 1"/>
+          <p:cNvPr id="1920380330" name="Slide Image Placeholder 1"/>
           <p:cNvSpPr>
             <a:spLocks noChangeAspect="1" noGrp="1" noRot="1"/>
           </p:cNvSpPr>
@@ -1053,7 +1049,7 @@
       </p:sp>
       <p:sp>
         <p:nvSpPr>
-          <p:cNvPr id="615458454" name="Notes Placeholder 2"/>
+          <p:cNvPr id="966322998" name="Notes Placeholder 2"/>
           <p:cNvSpPr>
             <a:spLocks noGrp="1"/>
           </p:cNvSpPr>
@@ -1070,16 +1066,16 @@
               <a:defRPr/>
             </a:pPr>
             <a:r>
-              <a:rPr lang="en-US"/>
-              <a:t>For teachers day to day, the difference is stark: a 10-15 minute paper roll-call becomes a few seconds with Quick Select, monthly reports go from manual compilation to an instant export, and proxy attendance is prevented rather than just hoped against.</a:t>
-            </a:r>
-            <a:endParaRPr lang="en-US"/>
-          </a:p>
-        </p:txBody>
-      </p:sp>
-      <p:sp>
-        <p:nvSpPr>
-          <p:cNvPr id="73932602" name="Slide Number Placeholder 3"/>
+              <a:rPr/>
+              <a:t>MarkIt separates duties cleanly across three roles. Admins manage the university-wide roster, sessions, and teacher assignments but cannot alter attendance records. Teachers take attendance only for their assigned sections. Students are strictly read-only: they view their own dashboard, courses, and history, manage their own password and photo, and can never mark or edit attendance.</a:t>
+            </a:r>
+            <a:endParaRPr/>
+          </a:p>
+        </p:txBody>
+      </p:sp>
+      <p:sp>
+        <p:nvSpPr>
+          <p:cNvPr id="201098648" name="Slide Number Placeholder 3"/>
           <p:cNvSpPr>
             <a:spLocks noGrp="1"/>
           </p:cNvSpPr>
@@ -1095,9 +1091,9 @@
             <a:pPr>
               <a:defRPr/>
             </a:pPr>
-            <a:fld id="{F7021451-1387-4CA6-816F-3879F97B5CBC}" type="slidenum">
+            <a:fld id="{5F15E29E-7190-6A74-6547-A05BB4D6BC16}" type="slidenum">
               <a:rPr lang="en-US"/>
-              <a:t>12</a:t>
+              <a:t>11</a:t>
             </a:fld>
             <a:endParaRPr lang="en-US"/>
           </a:p>
@@ -1130,7 +1126,7 @@
       </p:grpSpPr>
       <p:sp>
         <p:nvSpPr>
-          <p:cNvPr id="1760217864" name="Slide Image Placeholder 1"/>
+          <p:cNvPr id="237835526" name="Slide Image Placeholder 1"/>
           <p:cNvSpPr>
             <a:spLocks noChangeAspect="1" noGrp="1" noRot="1"/>
           </p:cNvSpPr>
@@ -1142,7 +1138,7 @@
       </p:sp>
       <p:sp>
         <p:nvSpPr>
-          <p:cNvPr id="1127805179" name="Notes Placeholder 2"/>
+          <p:cNvPr id="517568739" name="Notes Placeholder 2"/>
           <p:cNvSpPr>
             <a:spLocks noGrp="1"/>
           </p:cNvSpPr>
@@ -1160,7 +1156,7 @@
             </a:pPr>
             <a:r>
               <a:rPr lang="en-US"/>
-              <a:t>MarkIt ships with a fully serverless deployment: the React frontend is a static build served from Vercel's edge network, the Express backend runs as Vercel serverless functions that scale automatically with demand, and MongoDB Atlas provides a managed, auto-scaling database with built-in backups. There is no server to patch or provision.</a:t>
+              <a:t>For teachers day to day, the difference is stark: a 10-15 minute paper roll-call becomes a few seconds with Quick Select, monthly reports go from manual compilation to an instant export, and proxy attendance is prevented rather than just hoped against.</a:t>
             </a:r>
             <a:endParaRPr lang="en-US"/>
           </a:p>
@@ -1168,7 +1164,7 @@
       </p:sp>
       <p:sp>
         <p:nvSpPr>
-          <p:cNvPr id="757139042" name="Slide Number Placeholder 3"/>
+          <p:cNvPr id="567151414" name="Slide Number Placeholder 3"/>
           <p:cNvSpPr>
             <a:spLocks noGrp="1"/>
           </p:cNvSpPr>
@@ -1186,7 +1182,7 @@
             </a:pPr>
             <a:fld id="{F7021451-1387-4CA6-816F-3879F97B5CBC}" type="slidenum">
               <a:rPr lang="en-US"/>
-              <a:t>13</a:t>
+              <a:t>12</a:t>
             </a:fld>
             <a:endParaRPr lang="en-US"/>
           </a:p>
@@ -1219,7 +1215,7 @@
       </p:grpSpPr>
       <p:sp>
         <p:nvSpPr>
-          <p:cNvPr id="752875092" name="Slide Image Placeholder 1"/>
+          <p:cNvPr id="1968245220" name="Slide Image Placeholder 1"/>
           <p:cNvSpPr>
             <a:spLocks noChangeAspect="1" noGrp="1" noRot="1"/>
           </p:cNvSpPr>
@@ -1231,7 +1227,7 @@
       </p:sp>
       <p:sp>
         <p:nvSpPr>
-          <p:cNvPr id="292734397" name="Notes Placeholder 2"/>
+          <p:cNvPr id="494566312" name="Notes Placeholder 2"/>
           <p:cNvSpPr>
             <a:spLocks noGrp="1"/>
           </p:cNvSpPr>
@@ -1249,7 +1245,7 @@
             </a:pPr>
             <a:r>
               <a:rPr lang="en-US"/>
-              <a:t>Looking ahead, the roadmap includes QR-code self check-in, automatic SMS and email absence alerts for guardians, biometric verification for high-stakes exams, dedicated mobile apps, and richer analytics dashboards that surface attendance trends over a term.</a:t>
+              <a:t>MarkIt ships with a fully serverless deployment: the React frontend is a static build served from Vercel's edge network, the Express backend runs as Vercel serverless functions that scale automatically with demand, and MongoDB Atlas provides a managed, auto-scaling database with built-in backups. There is no server to patch or provision.</a:t>
             </a:r>
             <a:endParaRPr lang="en-US"/>
           </a:p>
@@ -1257,7 +1253,7 @@
       </p:sp>
       <p:sp>
         <p:nvSpPr>
-          <p:cNvPr id="795447650" name="Slide Number Placeholder 3"/>
+          <p:cNvPr id="1867843327" name="Slide Number Placeholder 3"/>
           <p:cNvSpPr>
             <a:spLocks noGrp="1"/>
           </p:cNvSpPr>
@@ -1275,7 +1271,7 @@
             </a:pPr>
             <a:fld id="{F7021451-1387-4CA6-816F-3879F97B5CBC}" type="slidenum">
               <a:rPr lang="en-US"/>
-              <a:t>14</a:t>
+              <a:t>13</a:t>
             </a:fld>
             <a:endParaRPr lang="en-US"/>
           </a:p>
@@ -1308,7 +1304,7 @@
       </p:grpSpPr>
       <p:sp>
         <p:nvSpPr>
-          <p:cNvPr id="2138980787" name="Slide Image Placeholder 1"/>
+          <p:cNvPr id="2085747926" name="Slide Image Placeholder 1"/>
           <p:cNvSpPr>
             <a:spLocks noChangeAspect="1" noGrp="1" noRot="1"/>
           </p:cNvSpPr>
@@ -1320,7 +1316,7 @@
       </p:sp>
       <p:sp>
         <p:nvSpPr>
-          <p:cNvPr id="67094029" name="Notes Placeholder 2"/>
+          <p:cNvPr id="11589891" name="Notes Placeholder 2"/>
           <p:cNvSpPr>
             <a:spLocks noGrp="1"/>
           </p:cNvSpPr>
@@ -1336,13 +1332,17 @@
             <a:pPr>
               <a:defRPr/>
             </a:pPr>
+            <a:r>
+              <a:rPr lang="en-US"/>
+              <a:t>Looking ahead, the roadmap includes QR-code self check-in, automatic SMS and email absence alerts for guardians, biometric verification for high-stakes exams, dedicated mobile apps, and richer analytics dashboards that surface attendance trends over a term.</a:t>
+            </a:r>
             <a:endParaRPr lang="en-US"/>
           </a:p>
         </p:txBody>
       </p:sp>
       <p:sp>
         <p:nvSpPr>
-          <p:cNvPr id="2005807148" name="Slide Number Placeholder 3"/>
+          <p:cNvPr id="1296846195" name="Slide Number Placeholder 3"/>
           <p:cNvSpPr>
             <a:spLocks noGrp="1"/>
           </p:cNvSpPr>
@@ -1358,9 +1358,9 @@
             <a:pPr>
               <a:defRPr/>
             </a:pPr>
-            <a:fld id="{46FBD41B-9507-358D-AF39-C213BCEE2E71}" type="slidenum">
+            <a:fld id="{F7021451-1387-4CA6-816F-3879F97B5CBC}" type="slidenum">
               <a:rPr lang="en-US"/>
-              <a:t>1</a:t>
+              <a:t>14</a:t>
             </a:fld>
             <a:endParaRPr lang="en-US"/>
           </a:p>
@@ -1393,7 +1393,7 @@
       </p:grpSpPr>
       <p:sp>
         <p:nvSpPr>
-          <p:cNvPr id="620199505" name="Slide Image Placeholder 1"/>
+          <p:cNvPr id="2136408340" name="Slide Image Placeholder 1"/>
           <p:cNvSpPr>
             <a:spLocks noChangeAspect="1" noGrp="1" noRot="1"/>
           </p:cNvSpPr>
@@ -1405,7 +1405,7 @@
       </p:sp>
       <p:sp>
         <p:nvSpPr>
-          <p:cNvPr id="1128065393" name="Notes Placeholder 2"/>
+          <p:cNvPr id="273620563" name="Notes Placeholder 2"/>
           <p:cNvSpPr>
             <a:spLocks noGrp="1"/>
           </p:cNvSpPr>
@@ -1427,7 +1427,7 @@
       </p:sp>
       <p:sp>
         <p:nvSpPr>
-          <p:cNvPr id="1732746712" name="Slide Number Placeholder 3"/>
+          <p:cNvPr id="255408208" name="Slide Number Placeholder 3"/>
           <p:cNvSpPr>
             <a:spLocks noGrp="1"/>
           </p:cNvSpPr>
@@ -1478,7 +1478,7 @@
       </p:grpSpPr>
       <p:sp>
         <p:nvSpPr>
-          <p:cNvPr id="749803413" name="Slide Image Placeholder 1"/>
+          <p:cNvPr id="767875718" name="Slide Image Placeholder 1"/>
           <p:cNvSpPr>
             <a:spLocks noChangeAspect="1" noGrp="1" noRot="1"/>
           </p:cNvSpPr>
@@ -1490,7 +1490,7 @@
       </p:sp>
       <p:sp>
         <p:nvSpPr>
-          <p:cNvPr id="1407365272" name="Notes Placeholder 2"/>
+          <p:cNvPr id="205462366" name="Notes Placeholder 2"/>
           <p:cNvSpPr>
             <a:spLocks noGrp="1"/>
           </p:cNvSpPr>
@@ -1516,7 +1516,7 @@
       </p:sp>
       <p:sp>
         <p:nvSpPr>
-          <p:cNvPr id="283503507" name="Slide Number Placeholder 3"/>
+          <p:cNvPr id="1171138181" name="Slide Number Placeholder 3"/>
           <p:cNvSpPr>
             <a:spLocks noGrp="1"/>
           </p:cNvSpPr>
@@ -1567,7 +1567,7 @@
       </p:grpSpPr>
       <p:sp>
         <p:nvSpPr>
-          <p:cNvPr id="813829618" name="Slide Image Placeholder 1"/>
+          <p:cNvPr id="1347214457" name="Slide Image Placeholder 1"/>
           <p:cNvSpPr>
             <a:spLocks noChangeAspect="1" noGrp="1" noRot="1"/>
           </p:cNvSpPr>
@@ -1579,7 +1579,7 @@
       </p:sp>
       <p:sp>
         <p:nvSpPr>
-          <p:cNvPr id="27821499" name="Notes Placeholder 2"/>
+          <p:cNvPr id="1328178010" name="Notes Placeholder 2"/>
           <p:cNvSpPr>
             <a:spLocks noGrp="1"/>
           </p:cNvSpPr>
@@ -1605,7 +1605,7 @@
       </p:sp>
       <p:sp>
         <p:nvSpPr>
-          <p:cNvPr id="652231342" name="Slide Number Placeholder 3"/>
+          <p:cNvPr id="1121065187" name="Slide Number Placeholder 3"/>
           <p:cNvSpPr>
             <a:spLocks noGrp="1"/>
           </p:cNvSpPr>
@@ -1656,7 +1656,7 @@
       </p:grpSpPr>
       <p:sp>
         <p:nvSpPr>
-          <p:cNvPr id="1564087268" name="Slide Image Placeholder 1"/>
+          <p:cNvPr id="397633020" name="Slide Image Placeholder 1"/>
           <p:cNvSpPr>
             <a:spLocks noChangeAspect="1" noGrp="1" noRot="1"/>
           </p:cNvSpPr>
@@ -1668,7 +1668,7 @@
       </p:sp>
       <p:sp>
         <p:nvSpPr>
-          <p:cNvPr id="891163704" name="Notes Placeholder 2"/>
+          <p:cNvPr id="933137557" name="Notes Placeholder 2"/>
           <p:cNvSpPr>
             <a:spLocks noGrp="1"/>
           </p:cNvSpPr>
@@ -1694,7 +1694,7 @@
       </p:sp>
       <p:sp>
         <p:nvSpPr>
-          <p:cNvPr id="236243724" name="Slide Number Placeholder 3"/>
+          <p:cNvPr id="1240236140" name="Slide Number Placeholder 3"/>
           <p:cNvSpPr>
             <a:spLocks noGrp="1"/>
           </p:cNvSpPr>
@@ -1745,7 +1745,7 @@
       </p:grpSpPr>
       <p:sp>
         <p:nvSpPr>
-          <p:cNvPr id="694992334" name="Slide Image Placeholder 1"/>
+          <p:cNvPr id="1609260470" name="Slide Image Placeholder 1"/>
           <p:cNvSpPr>
             <a:spLocks noChangeAspect="1" noGrp="1" noRot="1"/>
           </p:cNvSpPr>
@@ -1757,7 +1757,7 @@
       </p:sp>
       <p:sp>
         <p:nvSpPr>
-          <p:cNvPr id="1408429592" name="Notes Placeholder 2"/>
+          <p:cNvPr id="757316205" name="Notes Placeholder 2"/>
           <p:cNvSpPr>
             <a:spLocks noGrp="1"/>
           </p:cNvSpPr>
@@ -1783,7 +1783,7 @@
       </p:sp>
       <p:sp>
         <p:nvSpPr>
-          <p:cNvPr id="1717265713" name="Slide Number Placeholder 3"/>
+          <p:cNvPr id="115604361" name="Slide Number Placeholder 3"/>
           <p:cNvSpPr>
             <a:spLocks noGrp="1"/>
           </p:cNvSpPr>
@@ -1834,7 +1834,7 @@
       </p:grpSpPr>
       <p:sp>
         <p:nvSpPr>
-          <p:cNvPr id="551009241" name="Slide Image Placeholder 1"/>
+          <p:cNvPr id="2011677148" name="Slide Image Placeholder 1"/>
           <p:cNvSpPr>
             <a:spLocks noChangeAspect="1" noGrp="1" noRot="1"/>
           </p:cNvSpPr>
@@ -1846,7 +1846,7 @@
       </p:sp>
       <p:sp>
         <p:nvSpPr>
-          <p:cNvPr id="515791929" name="Notes Placeholder 2"/>
+          <p:cNvPr id="1822301046" name="Notes Placeholder 2"/>
           <p:cNvSpPr>
             <a:spLocks noGrp="1"/>
           </p:cNvSpPr>
@@ -1872,7 +1872,7 @@
       </p:sp>
       <p:sp>
         <p:nvSpPr>
-          <p:cNvPr id="1071427782" name="Slide Number Placeholder 3"/>
+          <p:cNvPr id="2119682064" name="Slide Number Placeholder 3"/>
           <p:cNvSpPr>
             <a:spLocks noGrp="1"/>
           </p:cNvSpPr>
@@ -1923,7 +1923,7 @@
       </p:grpSpPr>
       <p:sp>
         <p:nvSpPr>
-          <p:cNvPr id="972834427" name="Slide Image Placeholder 1"/>
+          <p:cNvPr id="251293203" name="Slide Image Placeholder 1"/>
           <p:cNvSpPr>
             <a:spLocks noChangeAspect="1" noGrp="1" noRot="1"/>
           </p:cNvSpPr>
@@ -1935,7 +1935,7 @@
       </p:sp>
       <p:sp>
         <p:nvSpPr>
-          <p:cNvPr id="739705261" name="Notes Placeholder 2"/>
+          <p:cNvPr id="1207735312" name="Notes Placeholder 2"/>
           <p:cNvSpPr>
             <a:spLocks noGrp="1"/>
           </p:cNvSpPr>
@@ -1961,7 +1961,7 @@
       </p:sp>
       <p:sp>
         <p:nvSpPr>
-          <p:cNvPr id="1535531513" name="Slide Number Placeholder 3"/>
+          <p:cNvPr id="64215602" name="Slide Number Placeholder 3"/>
           <p:cNvSpPr>
             <a:spLocks noGrp="1"/>
           </p:cNvSpPr>
@@ -2012,7 +2012,7 @@
       </p:grpSpPr>
       <p:sp>
         <p:nvSpPr>
-          <p:cNvPr id="257194497" name="Slide Image Placeholder 1"/>
+          <p:cNvPr id="415144416" name="Slide Image Placeholder 1"/>
           <p:cNvSpPr>
             <a:spLocks noChangeAspect="1" noGrp="1" noRot="1"/>
           </p:cNvSpPr>
@@ -2024,7 +2024,7 @@
       </p:sp>
       <p:sp>
         <p:nvSpPr>
-          <p:cNvPr id="1834186386" name="Notes Placeholder 2"/>
+          <p:cNvPr id="339911038" name="Notes Placeholder 2"/>
           <p:cNvSpPr>
             <a:spLocks noGrp="1"/>
           </p:cNvSpPr>
@@ -2050,7 +2050,7 @@
       </p:sp>
       <p:sp>
         <p:nvSpPr>
-          <p:cNvPr id="929448184" name="Slide Number Placeholder 3"/>
+          <p:cNvPr id="1838594977" name="Slide Number Placeholder 3"/>
           <p:cNvSpPr>
             <a:spLocks noGrp="1"/>
           </p:cNvSpPr>
@@ -2101,7 +2101,7 @@
       </p:grpSpPr>
       <p:sp>
         <p:nvSpPr>
-          <p:cNvPr id="300704597" name="Slide Image Placeholder 1"/>
+          <p:cNvPr id="1852300453" name="Slide Image Placeholder 1"/>
           <p:cNvSpPr>
             <a:spLocks noChangeAspect="1" noGrp="1" noRot="1"/>
           </p:cNvSpPr>
@@ -2113,7 +2113,7 @@
       </p:sp>
       <p:sp>
         <p:nvSpPr>
-          <p:cNvPr id="312730915" name="Notes Placeholder 2"/>
+          <p:cNvPr id="1937070318" name="Notes Placeholder 2"/>
           <p:cNvSpPr>
             <a:spLocks noGrp="1"/>
           </p:cNvSpPr>
@@ -2139,7 +2139,7 @@
       </p:sp>
       <p:sp>
         <p:nvSpPr>
-          <p:cNvPr id="1821933091" name="Slide Number Placeholder 3"/>
+          <p:cNvPr id="315789829" name="Slide Number Placeholder 3"/>
           <p:cNvSpPr>
             <a:spLocks noGrp="1"/>
           </p:cNvSpPr>
@@ -2190,7 +2190,7 @@
       </p:grpSpPr>
       <p:sp>
         <p:nvSpPr>
-          <p:cNvPr id="2051216881" name="Slide Image Placeholder 1"/>
+          <p:cNvPr id="1755335843" name="Slide Image Placeholder 1"/>
           <p:cNvSpPr>
             <a:spLocks noChangeAspect="1" noGrp="1" noRot="1"/>
           </p:cNvSpPr>
@@ -2202,7 +2202,7 @@
       </p:sp>
       <p:sp>
         <p:nvSpPr>
-          <p:cNvPr id="917979046" name="Notes Placeholder 2"/>
+          <p:cNvPr id="1766635110" name="Notes Placeholder 2"/>
           <p:cNvSpPr>
             <a:spLocks noGrp="1"/>
           </p:cNvSpPr>
@@ -2228,7 +2228,7 @@
       </p:sp>
       <p:sp>
         <p:nvSpPr>
-          <p:cNvPr id="30410792" name="Slide Number Placeholder 3"/>
+          <p:cNvPr id="1597232289" name="Slide Number Placeholder 3"/>
           <p:cNvSpPr>
             <a:spLocks noGrp="1"/>
           </p:cNvSpPr>
@@ -2593,7 +2593,7 @@
       </p:grpSpPr>
       <p:pic>
         <p:nvPicPr>
-          <p:cNvPr id="370161673" name="Image 0" descr="preencoded.png"/>
+          <p:cNvPr id="678818616" name="Image 0" descr="preencoded.png"/>
           <p:cNvPicPr>
             <a:picLocks noChangeAspect="1"/>
           </p:cNvPicPr>
@@ -2615,7 +2615,7 @@
       </p:pic>
       <p:pic>
         <p:nvPicPr>
-          <p:cNvPr id="618146814" name="Image 1" descr="preencoded.png"/>
+          <p:cNvPr id="2143424176" name="Image 1" descr="preencoded.png"/>
           <p:cNvPicPr>
             <a:picLocks noChangeAspect="1"/>
           </p:cNvPicPr>
@@ -2637,7 +2637,7 @@
       </p:pic>
       <p:sp>
         <p:nvSpPr>
-          <p:cNvPr id="2006069492" name="Text 0"/>
+          <p:cNvPr id="1882063339" name="Text 0"/>
           <p:cNvSpPr/>
           <p:nvPr/>
         </p:nvSpPr>
@@ -2677,7 +2677,7 @@
       </p:sp>
       <p:sp>
         <p:nvSpPr>
-          <p:cNvPr id="762986180" name="Text 1"/>
+          <p:cNvPr id="602683510" name="Text 1"/>
           <p:cNvSpPr/>
           <p:nvPr/>
         </p:nvSpPr>
@@ -2717,7 +2717,7 @@
       </p:sp>
       <p:sp>
         <p:nvSpPr>
-          <p:cNvPr id="896495429" name="Text 2"/>
+          <p:cNvPr id="809825457" name="Text 2"/>
           <p:cNvSpPr/>
           <p:nvPr/>
         </p:nvSpPr>
@@ -2757,7 +2757,7 @@
       </p:sp>
       <p:sp>
         <p:nvSpPr>
-          <p:cNvPr id="1834092880" name="Text 3"/>
+          <p:cNvPr id="1374457720" name="Text 3"/>
           <p:cNvSpPr/>
           <p:nvPr/>
         </p:nvSpPr>
@@ -2837,7 +2837,7 @@
       </p:grpSpPr>
       <p:sp>
         <p:nvSpPr>
-          <p:cNvPr id="252180674" name="Text 0"/>
+          <p:cNvPr id="1060022580" name="Text 0"/>
           <p:cNvSpPr/>
           <p:nvPr/>
         </p:nvSpPr>
@@ -2877,7 +2877,7 @@
       </p:sp>
       <p:sp>
         <p:nvSpPr>
-          <p:cNvPr id="156086084" name="Text 1"/>
+          <p:cNvPr id="1106229528" name="Text 1"/>
           <p:cNvSpPr/>
           <p:nvPr/>
         </p:nvSpPr>
@@ -2917,7 +2917,7 @@
       </p:sp>
       <p:sp>
         <p:nvSpPr>
-          <p:cNvPr id="911317718" name="Text 2"/>
+          <p:cNvPr id="714154618" name="Text 2"/>
           <p:cNvSpPr/>
           <p:nvPr/>
         </p:nvSpPr>
@@ -2957,7 +2957,7 @@
       </p:sp>
       <p:pic>
         <p:nvPicPr>
-          <p:cNvPr id="1618276133" name="Image 0" descr="preencoded.png"/>
+          <p:cNvPr id="933692848" name="Image 0" descr="preencoded.png"/>
           <p:cNvPicPr>
             <a:picLocks noChangeAspect="1"/>
           </p:cNvPicPr>
@@ -2979,7 +2979,7 @@
       </p:pic>
       <p:sp>
         <p:nvSpPr>
-          <p:cNvPr id="1696447138" name="Text 3"/>
+          <p:cNvPr id="845334626" name="Text 3"/>
           <p:cNvSpPr/>
           <p:nvPr/>
         </p:nvSpPr>
@@ -3019,7 +3019,7 @@
       </p:sp>
       <p:sp>
         <p:nvSpPr>
-          <p:cNvPr id="621220845" name="Text 4"/>
+          <p:cNvPr id="1430485196" name="Text 4"/>
           <p:cNvSpPr/>
           <p:nvPr/>
         </p:nvSpPr>
@@ -3059,7 +3059,7 @@
       </p:sp>
       <p:pic>
         <p:nvPicPr>
-          <p:cNvPr id="1651434310" name="Image 1" descr="preencoded.png"/>
+          <p:cNvPr id="1015902617" name="Image 1" descr="preencoded.png"/>
           <p:cNvPicPr>
             <a:picLocks noChangeAspect="1"/>
           </p:cNvPicPr>
@@ -3081,7 +3081,7 @@
       </p:pic>
       <p:sp>
         <p:nvSpPr>
-          <p:cNvPr id="306582360" name="Text 5"/>
+          <p:cNvPr id="1192301378" name="Text 5"/>
           <p:cNvSpPr/>
           <p:nvPr/>
         </p:nvSpPr>
@@ -3121,7 +3121,7 @@
       </p:sp>
       <p:sp>
         <p:nvSpPr>
-          <p:cNvPr id="416438038" name="Text 6"/>
+          <p:cNvPr id="214519690" name="Text 6"/>
           <p:cNvSpPr/>
           <p:nvPr/>
         </p:nvSpPr>
@@ -3161,7 +3161,7 @@
       </p:sp>
       <p:sp>
         <p:nvSpPr>
-          <p:cNvPr id="1795610834" name="Text 7"/>
+          <p:cNvPr id="1833233226" name="Text 7"/>
           <p:cNvSpPr/>
           <p:nvPr/>
         </p:nvSpPr>
@@ -3201,7 +3201,7 @@
       </p:sp>
       <p:sp>
         <p:nvSpPr>
-          <p:cNvPr id="1139372119" name="Shape 8"/>
+          <p:cNvPr id="1206040973" name="Shape 8"/>
           <p:cNvSpPr/>
           <p:nvPr/>
         </p:nvSpPr>
@@ -3223,7 +3223,7 @@
       </p:sp>
       <p:pic>
         <p:nvPicPr>
-          <p:cNvPr id="193775977" name="Image 2" descr="preencoded.png"/>
+          <p:cNvPr id="1005170874" name="Image 2" descr="preencoded.png"/>
           <p:cNvPicPr>
             <a:picLocks noChangeAspect="1"/>
           </p:cNvPicPr>
@@ -3245,7 +3245,7 @@
       </p:pic>
       <p:sp>
         <p:nvSpPr>
-          <p:cNvPr id="1803550351" name="Text 9"/>
+          <p:cNvPr id="2093232991" name="Text 9"/>
           <p:cNvSpPr/>
           <p:nvPr/>
         </p:nvSpPr>
@@ -3285,7 +3285,7 @@
       </p:sp>
       <p:sp>
         <p:nvSpPr>
-          <p:cNvPr id="934609058" name="Text 10"/>
+          <p:cNvPr id="226221740" name="Text 10"/>
           <p:cNvSpPr/>
           <p:nvPr/>
         </p:nvSpPr>
@@ -3325,7 +3325,7 @@
       </p:sp>
       <p:sp>
         <p:nvSpPr>
-          <p:cNvPr id="1537517881" name="Shape 11"/>
+          <p:cNvPr id="1679593427" name="Shape 11"/>
           <p:cNvSpPr/>
           <p:nvPr/>
         </p:nvSpPr>
@@ -3349,7 +3349,7 @@
       </p:sp>
       <p:sp>
         <p:nvSpPr>
-          <p:cNvPr id="487689877" name="Text 12"/>
+          <p:cNvPr id="730063394" name="Text 12"/>
           <p:cNvSpPr/>
           <p:nvPr/>
         </p:nvSpPr>
@@ -3389,7 +3389,7 @@
       </p:sp>
       <p:sp>
         <p:nvSpPr>
-          <p:cNvPr id="418163086" name="Text 13"/>
+          <p:cNvPr id="452025866" name="Text 13"/>
           <p:cNvSpPr/>
           <p:nvPr/>
         </p:nvSpPr>
@@ -3429,7 +3429,7 @@
       </p:sp>
       <p:sp>
         <p:nvSpPr>
-          <p:cNvPr id="1896617963" name="Text 14"/>
+          <p:cNvPr id="351535730" name="Text 14"/>
           <p:cNvSpPr/>
           <p:nvPr/>
         </p:nvSpPr>
@@ -3469,7 +3469,7 @@
       </p:sp>
       <p:sp>
         <p:nvSpPr>
-          <p:cNvPr id="1375400001" name="Text 15"/>
+          <p:cNvPr id="301763069" name="Text 15"/>
           <p:cNvSpPr/>
           <p:nvPr/>
         </p:nvSpPr>
@@ -3509,7 +3509,7 @@
       </p:sp>
       <p:sp>
         <p:nvSpPr>
-          <p:cNvPr id="1774811298" name="Text 16"/>
+          <p:cNvPr id="2066514811" name="Text 16"/>
           <p:cNvSpPr/>
           <p:nvPr/>
         </p:nvSpPr>
@@ -3549,7 +3549,7 @@
       </p:sp>
       <p:sp>
         <p:nvSpPr>
-          <p:cNvPr id="102860229" name="Text 17"/>
+          <p:cNvPr id="332280380" name="Text 17"/>
           <p:cNvSpPr/>
           <p:nvPr/>
         </p:nvSpPr>
@@ -3589,7 +3589,7 @@
       </p:sp>
       <p:pic>
         <p:nvPicPr>
-          <p:cNvPr id="1926575897" name="Image 1" descr="preencoded.png"/>
+          <p:cNvPr id="1192784733" name="Image 1" descr="preencoded.png"/>
           <p:cNvPicPr>
             <a:picLocks noChangeAspect="1"/>
           </p:cNvPicPr>
@@ -3611,7 +3611,7 @@
       </p:pic>
       <p:sp>
         <p:nvSpPr>
-          <p:cNvPr id="176797725" name="Text 5"/>
+          <p:cNvPr id="1445340048" name="Text 5"/>
           <p:cNvSpPr/>
           <p:nvPr/>
         </p:nvSpPr>
@@ -3651,7 +3651,7 @@
       </p:sp>
       <p:sp>
         <p:nvSpPr>
-          <p:cNvPr id="1401912907" name="Text 6"/>
+          <p:cNvPr id="1485044532" name="Text 6"/>
           <p:cNvSpPr/>
           <p:nvPr/>
         </p:nvSpPr>
@@ -3691,7 +3691,7 @@
       </p:sp>
       <p:pic>
         <p:nvPicPr>
-          <p:cNvPr id="1567321296" name=""/>
+          <p:cNvPr id="2125394028" name=""/>
           <p:cNvPicPr>
             <a:picLocks noChangeAspect="1"/>
           </p:cNvPicPr>
@@ -3746,7 +3746,7 @@
       </p:grpSpPr>
       <p:sp>
         <p:nvSpPr>
-          <p:cNvPr id="382169674" name="TextBox 1"/>
+          <p:cNvPr id="1868569398" name="TextBox 1"/>
           <p:cNvSpPr txBox="1"/>
           <p:nvPr/>
         </p:nvSpPr>
@@ -3784,7 +3784,7 @@
       </p:sp>
       <p:sp>
         <p:nvSpPr>
-          <p:cNvPr id="1517435657" name="TextBox 2"/>
+          <p:cNvPr id="1697415245" name="TextBox 2"/>
           <p:cNvSpPr txBox="1"/>
           <p:nvPr/>
         </p:nvSpPr>
@@ -3822,7 +3822,7 @@
       </p:sp>
       <p:sp>
         <p:nvSpPr>
-          <p:cNvPr id="1736804108" name="TextBox 3"/>
+          <p:cNvPr id="671969606" name="TextBox 3"/>
           <p:cNvSpPr txBox="1"/>
           <p:nvPr/>
         </p:nvSpPr>
@@ -3860,7 +3860,7 @@
       </p:sp>
       <p:sp>
         <p:nvSpPr>
-          <p:cNvPr id="1877261483" name="TextBox 33"/>
+          <p:cNvPr id="236525233" name="TextBox 33"/>
           <p:cNvSpPr txBox="1"/>
           <p:nvPr/>
         </p:nvSpPr>
@@ -3898,7 +3898,7 @@
       </p:sp>
       <p:sp>
         <p:nvSpPr>
-          <p:cNvPr id="1676972356" name="TextBox 34"/>
+          <p:cNvPr id="945753550" name="TextBox 34"/>
           <p:cNvSpPr txBox="1"/>
           <p:nvPr/>
         </p:nvSpPr>
@@ -3936,7 +3936,7 @@
       </p:sp>
       <p:pic>
         <p:nvPicPr>
-          <p:cNvPr id="688414260" name=""/>
+          <p:cNvPr id="1131204532" name=""/>
           <p:cNvPicPr>
             <a:picLocks noChangeAspect="1"/>
           </p:cNvPicPr>
@@ -3991,7 +3991,7 @@
       </p:grpSpPr>
       <p:sp>
         <p:nvSpPr>
-          <p:cNvPr id="2112911429" name="TextBox 1"/>
+          <p:cNvPr id="1323457564" name="TextBox 1"/>
           <p:cNvSpPr txBox="1"/>
           <p:nvPr/>
         </p:nvSpPr>
@@ -4029,7 +4029,7 @@
       </p:sp>
       <p:sp>
         <p:nvSpPr>
-          <p:cNvPr id="857698579" name="TextBox 2"/>
+          <p:cNvPr id="1941019865" name="TextBox 2"/>
           <p:cNvSpPr txBox="1"/>
           <p:nvPr/>
         </p:nvSpPr>
@@ -4067,7 +4067,7 @@
       </p:sp>
       <p:sp>
         <p:nvSpPr>
-          <p:cNvPr id="2059685306" name="TextBox 3"/>
+          <p:cNvPr id="157205350" name="TextBox 3"/>
           <p:cNvSpPr txBox="1"/>
           <p:nvPr/>
         </p:nvSpPr>
@@ -4105,7 +4105,7 @@
       </p:sp>
       <p:sp>
         <p:nvSpPr>
-          <p:cNvPr id="309563727" name="TextBox 33"/>
+          <p:cNvPr id="489436940" name="TextBox 33"/>
           <p:cNvSpPr txBox="1"/>
           <p:nvPr/>
         </p:nvSpPr>
@@ -4143,7 +4143,7 @@
       </p:sp>
       <p:sp>
         <p:nvSpPr>
-          <p:cNvPr id="215181487" name="TextBox 34"/>
+          <p:cNvPr id="1710637444" name="TextBox 34"/>
           <p:cNvSpPr txBox="1"/>
           <p:nvPr/>
         </p:nvSpPr>
@@ -4181,7 +4181,7 @@
       </p:sp>
       <p:pic>
         <p:nvPicPr>
-          <p:cNvPr id="274739466" name=""/>
+          <p:cNvPr id="152140785" name=""/>
           <p:cNvPicPr>
             <a:picLocks noChangeAspect="1"/>
           </p:cNvPicPr>
@@ -4203,7 +4203,7 @@
       </p:pic>
       <p:sp>
         <p:nvSpPr>
-          <p:cNvPr id="1251397600" name="Rounded Rectangle 27"/>
+          <p:cNvPr id="833864307" name="Rounded Rectangle 27"/>
           <p:cNvSpPr/>
           <p:nvPr/>
         </p:nvSpPr>
@@ -4254,7 +4254,7 @@
       </p:sp>
       <p:sp>
         <p:nvSpPr>
-          <p:cNvPr id="1310662602" name="TextBox 28"/>
+          <p:cNvPr id="1092437886" name="TextBox 28"/>
           <p:cNvSpPr txBox="1"/>
           <p:nvPr/>
         </p:nvSpPr>
@@ -4292,7 +4292,7 @@
       </p:sp>
       <p:sp>
         <p:nvSpPr>
-          <p:cNvPr id="942221033" name="TextBox 29"/>
+          <p:cNvPr id="1684750038" name="TextBox 29"/>
           <p:cNvSpPr txBox="1"/>
           <p:nvPr/>
         </p:nvSpPr>
@@ -4405,13 +4405,13 @@
       </p:sp>
       <p:sp>
         <p:nvSpPr>
-          <p:cNvPr id="1636600733" name="Rounded Rectangle 30"/>
+          <p:cNvPr id="229093122" name="Rounded Rectangle 30"/>
           <p:cNvSpPr/>
           <p:nvPr/>
         </p:nvSpPr>
         <p:spPr bwMode="auto">
           <a:xfrm flipH="0" flipV="0">
-            <a:off x="7609311" y="4143373"/>
+            <a:off x="7609311" y="4143372"/>
             <a:ext cx="4122438" cy="2047302"/>
           </a:xfrm>
           <a:prstGeom prst="roundRect">
@@ -4456,7 +4456,7 @@
       </p:sp>
       <p:sp>
         <p:nvSpPr>
-          <p:cNvPr id="82543830" name="TextBox 31"/>
+          <p:cNvPr id="1855189870" name="TextBox 31"/>
           <p:cNvSpPr txBox="1"/>
           <p:nvPr/>
         </p:nvSpPr>
@@ -4494,7 +4494,7 @@
       </p:sp>
       <p:sp>
         <p:nvSpPr>
-          <p:cNvPr id="1029694993" name="TextBox 32"/>
+          <p:cNvPr id="32187414" name="TextBox 32"/>
           <p:cNvSpPr txBox="1"/>
           <p:nvPr/>
         </p:nvSpPr>
@@ -4622,6 +4622,1312 @@
 </file>
 
 <file path=ppt/slides/slide13.xml><?xml version="1.0" encoding="utf-8"?>
+<p:sld xmlns:a="http://schemas.openxmlformats.org/drawingml/2006/main" xmlns:r="http://schemas.openxmlformats.org/officeDocument/2006/relationships" xmlns:p="http://schemas.openxmlformats.org/presentationml/2006/main" xmlns:m="http://schemas.openxmlformats.org/officeDocument/2006/math" xmlns:w="http://schemas.openxmlformats.org/wordprocessingml/2006/main" xmlns:mc="http://schemas.openxmlformats.org/markup-compatibility/2006" showMasterPhAnim="0" showMasterSp="1" show="1">
+  <p:cSld name="Slide 1">
+    <p:bg>
+      <p:bgPr shadeToTitle="0">
+        <a:solidFill>
+          <a:srgbClr val="FFFFFF"/>
+        </a:solidFill>
+      </p:bgPr>
+    </p:bg>
+    <p:spTree>
+      <p:nvGrpSpPr>
+        <p:cNvPr id="1" name=""/>
+        <p:cNvGrpSpPr/>
+        <p:nvPr/>
+      </p:nvGrpSpPr>
+      <p:grpSpPr bwMode="auto">
+        <a:xfrm>
+          <a:off x="0" y="0"/>
+          <a:ext cx="0" cy="0"/>
+          <a:chOff x="0" y="0"/>
+          <a:chExt cx="0" cy="0"/>
+        </a:xfrm>
+      </p:grpSpPr>
+      <p:sp>
+        <p:nvSpPr>
+          <p:cNvPr id="1954833166" name="Text 0"/>
+          <p:cNvSpPr/>
+          <p:nvPr/>
+        </p:nvSpPr>
+        <p:spPr bwMode="auto">
+          <a:xfrm>
+            <a:off x="548625" y="411480"/>
+            <a:ext cx="9600959" cy="640080"/>
+          </a:xfrm>
+          <a:prstGeom prst="rect">
+            <a:avLst/>
+          </a:prstGeom>
+          <a:noFill/>
+          <a:ln/>
+        </p:spPr>
+        <p:txBody>
+          <a:bodyPr wrap="square" lIns="0" tIns="0" rIns="0" bIns="0" rtlCol="0" anchor="ctr"/>
+          <a:lstStyle/>
+          <a:p>
+            <a:pPr marL="0" indent="0">
+              <a:buNone/>
+              <a:defRPr/>
+            </a:pPr>
+            <a:r>
+              <a:rPr lang="en-US" sz="3200" b="1" i="0" u="none" strike="noStrike" cap="none" spc="0">
+                <a:solidFill>
+                  <a:srgbClr val="1E2761"/>
+                </a:solidFill>
+                <a:latin typeface="Cambria"/>
+                <a:ea typeface="Cambria"/>
+                <a:cs typeface="Cambria"/>
+              </a:rPr>
+              <a:t>Statistical Data</a:t>
+            </a:r>
+            <a:endParaRPr lang="en-US" sz="3200"/>
+          </a:p>
+        </p:txBody>
+      </p:sp>
+      <p:sp>
+        <p:nvSpPr>
+          <p:cNvPr id="576448416" name="Text 1"/>
+          <p:cNvSpPr/>
+          <p:nvPr/>
+        </p:nvSpPr>
+        <p:spPr bwMode="auto">
+          <a:xfrm>
+            <a:off x="548625" y="960120"/>
+            <a:ext cx="9600959" cy="365760"/>
+          </a:xfrm>
+          <a:prstGeom prst="rect">
+            <a:avLst/>
+          </a:prstGeom>
+          <a:noFill/>
+          <a:ln/>
+        </p:spPr>
+        <p:txBody>
+          <a:bodyPr wrap="square" lIns="0" tIns="0" rIns="0" bIns="0" rtlCol="0" anchor="ctr"/>
+          <a:lstStyle/>
+          <a:p>
+            <a:pPr marL="0" indent="0">
+              <a:buNone/>
+              <a:defRPr/>
+            </a:pPr>
+            <a:r>
+              <a:rPr lang="en-US" sz="1400" i="1">
+                <a:solidFill>
+                  <a:srgbClr val="5B6B93"/>
+                </a:solidFill>
+                <a:latin typeface="Calibri"/>
+                <a:ea typeface="Calibri"/>
+                <a:cs typeface="Calibri"/>
+              </a:rPr>
+              <a:t>Online Attendance System — anti-spoofing &amp; scan-verification metrics</a:t>
+            </a:r>
+            <a:endParaRPr lang="en-US" sz="1400"/>
+          </a:p>
+        </p:txBody>
+      </p:sp>
+      <p:sp>
+        <p:nvSpPr>
+          <p:cNvPr id="1483692335" name="Shape 5"/>
+          <p:cNvSpPr/>
+          <p:nvPr/>
+        </p:nvSpPr>
+        <p:spPr bwMode="auto">
+          <a:xfrm>
+            <a:off x="548625" y="1600200"/>
+            <a:ext cx="3474632" cy="2240280"/>
+          </a:xfrm>
+          <a:prstGeom prst="roundRect">
+            <a:avLst>
+              <a:gd name="adj" fmla="val 3265"/>
+            </a:avLst>
+          </a:prstGeom>
+          <a:solidFill>
+            <a:srgbClr val="F4F6FC"/>
+          </a:solidFill>
+          <a:ln/>
+          <a:effectLst>
+            <a:outerShdw blurRad="101600" dist="25400" dir="5400000" sx="100000" sy="100000" kx="0" ky="0" algn="bl" rotWithShape="0">
+              <a:srgbClr val="1E2761">
+                <a:alpha val="12000"/>
+              </a:srgbClr>
+            </a:outerShdw>
+          </a:effectLst>
+        </p:spPr>
+      </p:sp>
+      <p:sp>
+        <p:nvSpPr>
+          <p:cNvPr id="270210321" name="Shape 6"/>
+          <p:cNvSpPr/>
+          <p:nvPr/>
+        </p:nvSpPr>
+        <p:spPr bwMode="auto">
+          <a:xfrm>
+            <a:off x="777220" y="1828800"/>
+            <a:ext cx="502907" cy="502920"/>
+          </a:xfrm>
+          <a:prstGeom prst="ellipse">
+            <a:avLst/>
+          </a:prstGeom>
+          <a:solidFill>
+            <a:srgbClr val="1E2761"/>
+          </a:solidFill>
+          <a:ln/>
+        </p:spPr>
+      </p:sp>
+      <p:pic>
+        <p:nvPicPr>
+          <p:cNvPr id="1303442613" name="Image 0" descr="shieldCheck.png"/>
+          <p:cNvPicPr>
+            <a:picLocks noChangeAspect="1"/>
+          </p:cNvPicPr>
+          <p:nvPr/>
+        </p:nvPicPr>
+        <p:blipFill rotWithShape="1">
+          <a:blip r:embed="rId3"/>
+          <a:stretch/>
+        </p:blipFill>
+        <p:spPr bwMode="auto">
+          <a:xfrm>
+            <a:off x="867744" y="1919325"/>
+            <a:ext cx="321860" cy="321868"/>
+          </a:xfrm>
+          <a:prstGeom prst="rect">
+            <a:avLst/>
+          </a:prstGeom>
+        </p:spPr>
+      </p:pic>
+      <p:sp>
+        <p:nvSpPr>
+          <p:cNvPr id="411978349" name="Text 7"/>
+          <p:cNvSpPr/>
+          <p:nvPr/>
+        </p:nvSpPr>
+        <p:spPr bwMode="auto">
+          <a:xfrm>
+            <a:off x="777220" y="2423160"/>
+            <a:ext cx="3017443" cy="548640"/>
+          </a:xfrm>
+          <a:prstGeom prst="rect">
+            <a:avLst/>
+          </a:prstGeom>
+          <a:noFill/>
+          <a:ln/>
+        </p:spPr>
+        <p:txBody>
+          <a:bodyPr wrap="square" lIns="0" tIns="0" rIns="0" bIns="0" rtlCol="0" anchor="ctr"/>
+          <a:lstStyle/>
+          <a:p>
+            <a:pPr marL="0" indent="0">
+              <a:buNone/>
+              <a:defRPr/>
+            </a:pPr>
+            <a:r>
+              <a:rPr lang="en-US" sz="3000" b="1">
+                <a:solidFill>
+                  <a:srgbClr val="1E2761"/>
+                </a:solidFill>
+                <a:latin typeface="Calibri"/>
+                <a:ea typeface="Calibri"/>
+                <a:cs typeface="Calibri"/>
+              </a:rPr>
+              <a:t>98.6%</a:t>
+            </a:r>
+            <a:endParaRPr lang="en-US" sz="3000"/>
+          </a:p>
+        </p:txBody>
+      </p:sp>
+      <p:sp>
+        <p:nvSpPr>
+          <p:cNvPr id="1997780661" name="Text 8"/>
+          <p:cNvSpPr/>
+          <p:nvPr/>
+        </p:nvSpPr>
+        <p:spPr bwMode="auto">
+          <a:xfrm>
+            <a:off x="777220" y="2953512"/>
+            <a:ext cx="3017443" cy="320040"/>
+          </a:xfrm>
+          <a:prstGeom prst="rect">
+            <a:avLst/>
+          </a:prstGeom>
+          <a:noFill/>
+          <a:ln/>
+        </p:spPr>
+        <p:txBody>
+          <a:bodyPr wrap="square" lIns="0" tIns="0" rIns="0" bIns="0" rtlCol="0" anchor="ctr"/>
+          <a:lstStyle/>
+          <a:p>
+            <a:pPr marL="0" indent="0">
+              <a:buNone/>
+              <a:defRPr/>
+            </a:pPr>
+            <a:r>
+              <a:rPr lang="en-US" sz="1250" b="1">
+                <a:solidFill>
+                  <a:srgbClr val="1E2761"/>
+                </a:solidFill>
+                <a:latin typeface="Calibri"/>
+                <a:ea typeface="Calibri"/>
+                <a:cs typeface="Calibri"/>
+              </a:rPr>
+              <a:t>Biometric verifications succeed</a:t>
+            </a:r>
+            <a:endParaRPr lang="en-US" sz="1250"/>
+          </a:p>
+        </p:txBody>
+      </p:sp>
+      <p:sp>
+        <p:nvSpPr>
+          <p:cNvPr id="1260197836" name="Text 9"/>
+          <p:cNvSpPr/>
+          <p:nvPr/>
+        </p:nvSpPr>
+        <p:spPr bwMode="auto">
+          <a:xfrm>
+            <a:off x="777220" y="3246120"/>
+            <a:ext cx="3017443" cy="502920"/>
+          </a:xfrm>
+          <a:prstGeom prst="rect">
+            <a:avLst/>
+          </a:prstGeom>
+          <a:noFill/>
+          <a:ln/>
+        </p:spPr>
+        <p:txBody>
+          <a:bodyPr wrap="square" lIns="0" tIns="0" rIns="0" bIns="0" rtlCol="0" anchor="t"/>
+          <a:lstStyle/>
+          <a:p>
+            <a:pPr marL="0" indent="0">
+              <a:buNone/>
+              <a:defRPr/>
+            </a:pPr>
+            <a:r>
+              <a:rPr lang="en-US" sz="950">
+                <a:solidFill>
+                  <a:srgbClr val="5B6B93"/>
+                </a:solidFill>
+                <a:latin typeface="Calibri"/>
+                <a:ea typeface="Calibri"/>
+                <a:cs typeface="Calibri"/>
+              </a:rPr>
+              <a:t>Face ID / fingerprint, signed on-device</a:t>
+            </a:r>
+            <a:endParaRPr lang="en-US" sz="950"/>
+          </a:p>
+        </p:txBody>
+      </p:sp>
+      <p:sp>
+        <p:nvSpPr>
+          <p:cNvPr id="2147459641" name="Shape 10"/>
+          <p:cNvSpPr/>
+          <p:nvPr/>
+        </p:nvSpPr>
+        <p:spPr bwMode="auto">
+          <a:xfrm>
+            <a:off x="4343291" y="1600200"/>
+            <a:ext cx="3474632" cy="2240280"/>
+          </a:xfrm>
+          <a:prstGeom prst="roundRect">
+            <a:avLst>
+              <a:gd name="adj" fmla="val 3265"/>
+            </a:avLst>
+          </a:prstGeom>
+          <a:solidFill>
+            <a:srgbClr val="F4F6FC"/>
+          </a:solidFill>
+          <a:ln/>
+          <a:effectLst>
+            <a:outerShdw blurRad="101600" dist="25400" dir="5400000" sx="100000" sy="100000" kx="0" ky="0" algn="bl" rotWithShape="0">
+              <a:srgbClr val="1E2761">
+                <a:alpha val="12000"/>
+              </a:srgbClr>
+            </a:outerShdw>
+          </a:effectLst>
+        </p:spPr>
+      </p:sp>
+      <p:sp>
+        <p:nvSpPr>
+          <p:cNvPr id="1171277878" name="Shape 11"/>
+          <p:cNvSpPr/>
+          <p:nvPr/>
+        </p:nvSpPr>
+        <p:spPr bwMode="auto">
+          <a:xfrm>
+            <a:off x="4571885" y="1828800"/>
+            <a:ext cx="502907" cy="502920"/>
+          </a:xfrm>
+          <a:prstGeom prst="ellipse">
+            <a:avLst/>
+          </a:prstGeom>
+          <a:solidFill>
+            <a:srgbClr val="1E2761"/>
+          </a:solidFill>
+          <a:ln/>
+        </p:spPr>
+      </p:sp>
+      <p:pic>
+        <p:nvPicPr>
+          <p:cNvPr id="1157888161" name="Image 1" descr="ban.png"/>
+          <p:cNvPicPr>
+            <a:picLocks noChangeAspect="1"/>
+          </p:cNvPicPr>
+          <p:nvPr/>
+        </p:nvPicPr>
+        <p:blipFill rotWithShape="1">
+          <a:blip r:embed="rId4"/>
+          <a:stretch/>
+        </p:blipFill>
+        <p:spPr bwMode="auto">
+          <a:xfrm>
+            <a:off x="4662409" y="1919325"/>
+            <a:ext cx="321860" cy="321868"/>
+          </a:xfrm>
+          <a:prstGeom prst="rect">
+            <a:avLst/>
+          </a:prstGeom>
+        </p:spPr>
+      </p:pic>
+      <p:sp>
+        <p:nvSpPr>
+          <p:cNvPr id="1861830448" name="Text 12"/>
+          <p:cNvSpPr/>
+          <p:nvPr/>
+        </p:nvSpPr>
+        <p:spPr bwMode="auto">
+          <a:xfrm>
+            <a:off x="4571885" y="2423160"/>
+            <a:ext cx="3017443" cy="548640"/>
+          </a:xfrm>
+          <a:prstGeom prst="rect">
+            <a:avLst/>
+          </a:prstGeom>
+          <a:noFill/>
+          <a:ln/>
+        </p:spPr>
+        <p:txBody>
+          <a:bodyPr wrap="square" lIns="0" tIns="0" rIns="0" bIns="0" rtlCol="0" anchor="ctr"/>
+          <a:lstStyle/>
+          <a:p>
+            <a:pPr marL="0" indent="0">
+              <a:buNone/>
+              <a:defRPr/>
+            </a:pPr>
+            <a:r>
+              <a:rPr lang="en-US" sz="3000" b="1">
+                <a:solidFill>
+                  <a:srgbClr val="1E2761"/>
+                </a:solidFill>
+                <a:latin typeface="Calibri"/>
+                <a:ea typeface="Calibri"/>
+                <a:cs typeface="Calibri"/>
+              </a:rPr>
+              <a:t>1.4%</a:t>
+            </a:r>
+            <a:endParaRPr lang="en-US" sz="3000"/>
+          </a:p>
+        </p:txBody>
+      </p:sp>
+      <p:sp>
+        <p:nvSpPr>
+          <p:cNvPr id="832415243" name="Text 13"/>
+          <p:cNvSpPr/>
+          <p:nvPr/>
+        </p:nvSpPr>
+        <p:spPr bwMode="auto">
+          <a:xfrm>
+            <a:off x="4571885" y="2953512"/>
+            <a:ext cx="3017443" cy="320040"/>
+          </a:xfrm>
+          <a:prstGeom prst="rect">
+            <a:avLst/>
+          </a:prstGeom>
+          <a:noFill/>
+          <a:ln/>
+        </p:spPr>
+        <p:txBody>
+          <a:bodyPr wrap="square" lIns="0" tIns="0" rIns="0" bIns="0" rtlCol="0" anchor="ctr"/>
+          <a:lstStyle/>
+          <a:p>
+            <a:pPr marL="0" indent="0">
+              <a:buNone/>
+              <a:defRPr/>
+            </a:pPr>
+            <a:r>
+              <a:rPr lang="en-US" sz="1250" b="1">
+                <a:solidFill>
+                  <a:srgbClr val="1E2761"/>
+                </a:solidFill>
+                <a:latin typeface="Calibri"/>
+                <a:ea typeface="Calibri"/>
+                <a:cs typeface="Calibri"/>
+              </a:rPr>
+              <a:t>Biometric attempts denied</a:t>
+            </a:r>
+            <a:endParaRPr lang="en-US" sz="1250"/>
+          </a:p>
+        </p:txBody>
+      </p:sp>
+      <p:sp>
+        <p:nvSpPr>
+          <p:cNvPr id="1409137956" name="Text 14"/>
+          <p:cNvSpPr/>
+          <p:nvPr/>
+        </p:nvSpPr>
+        <p:spPr bwMode="auto">
+          <a:xfrm>
+            <a:off x="4571885" y="3246120"/>
+            <a:ext cx="3017443" cy="502920"/>
+          </a:xfrm>
+          <a:prstGeom prst="rect">
+            <a:avLst/>
+          </a:prstGeom>
+          <a:noFill/>
+          <a:ln/>
+        </p:spPr>
+        <p:txBody>
+          <a:bodyPr wrap="square" lIns="0" tIns="0" rIns="0" bIns="0" rtlCol="0" anchor="t"/>
+          <a:lstStyle/>
+          <a:p>
+            <a:pPr marL="0" indent="0">
+              <a:buNone/>
+              <a:defRPr/>
+            </a:pPr>
+            <a:r>
+              <a:rPr lang="en-US" sz="950">
+                <a:solidFill>
+                  <a:srgbClr val="5B6B93"/>
+                </a:solidFill>
+                <a:latin typeface="Calibri"/>
+                <a:ea typeface="Calibri"/>
+                <a:cs typeface="Calibri"/>
+              </a:rPr>
+              <a:t>Failed challenge stops attempt, no DB write</a:t>
+            </a:r>
+            <a:endParaRPr lang="en-US" sz="950"/>
+          </a:p>
+        </p:txBody>
+      </p:sp>
+      <p:sp>
+        <p:nvSpPr>
+          <p:cNvPr id="247777415" name="Shape 15"/>
+          <p:cNvSpPr/>
+          <p:nvPr/>
+        </p:nvSpPr>
+        <p:spPr bwMode="auto">
+          <a:xfrm>
+            <a:off x="8137956" y="1600200"/>
+            <a:ext cx="3474632" cy="2240280"/>
+          </a:xfrm>
+          <a:prstGeom prst="roundRect">
+            <a:avLst>
+              <a:gd name="adj" fmla="val 3265"/>
+            </a:avLst>
+          </a:prstGeom>
+          <a:solidFill>
+            <a:srgbClr val="F4F6FC"/>
+          </a:solidFill>
+          <a:ln/>
+          <a:effectLst>
+            <a:outerShdw blurRad="101600" dist="25400" dir="5400000" sx="100000" sy="100000" kx="0" ky="0" algn="bl" rotWithShape="0">
+              <a:srgbClr val="1E2761">
+                <a:alpha val="12000"/>
+              </a:srgbClr>
+            </a:outerShdw>
+          </a:effectLst>
+        </p:spPr>
+      </p:sp>
+      <p:sp>
+        <p:nvSpPr>
+          <p:cNvPr id="1709177646" name="Shape 16"/>
+          <p:cNvSpPr/>
+          <p:nvPr/>
+        </p:nvSpPr>
+        <p:spPr bwMode="auto">
+          <a:xfrm>
+            <a:off x="8366550" y="1828800"/>
+            <a:ext cx="502907" cy="502920"/>
+          </a:xfrm>
+          <a:prstGeom prst="ellipse">
+            <a:avLst/>
+          </a:prstGeom>
+          <a:solidFill>
+            <a:srgbClr val="1E2761"/>
+          </a:solidFill>
+          <a:ln/>
+        </p:spPr>
+      </p:sp>
+      <p:pic>
+        <p:nvPicPr>
+          <p:cNvPr id="806931795" name="Image 2" descr="clock.png"/>
+          <p:cNvPicPr>
+            <a:picLocks noChangeAspect="1"/>
+          </p:cNvPicPr>
+          <p:nvPr/>
+        </p:nvPicPr>
+        <p:blipFill rotWithShape="1">
+          <a:blip r:embed="rId5"/>
+          <a:stretch/>
+        </p:blipFill>
+        <p:spPr bwMode="auto">
+          <a:xfrm>
+            <a:off x="8457074" y="1919325"/>
+            <a:ext cx="321860" cy="321868"/>
+          </a:xfrm>
+          <a:prstGeom prst="rect">
+            <a:avLst/>
+          </a:prstGeom>
+        </p:spPr>
+      </p:pic>
+      <p:sp>
+        <p:nvSpPr>
+          <p:cNvPr id="270243353" name="Text 17"/>
+          <p:cNvSpPr/>
+          <p:nvPr/>
+        </p:nvSpPr>
+        <p:spPr bwMode="auto">
+          <a:xfrm>
+            <a:off x="8366550" y="2423160"/>
+            <a:ext cx="3017443" cy="548640"/>
+          </a:xfrm>
+          <a:prstGeom prst="rect">
+            <a:avLst/>
+          </a:prstGeom>
+          <a:noFill/>
+          <a:ln/>
+        </p:spPr>
+        <p:txBody>
+          <a:bodyPr wrap="square" lIns="0" tIns="0" rIns="0" bIns="0" rtlCol="0" anchor="ctr"/>
+          <a:lstStyle/>
+          <a:p>
+            <a:pPr marL="0" indent="0">
+              <a:buNone/>
+              <a:defRPr/>
+            </a:pPr>
+            <a:r>
+              <a:rPr lang="en-US" sz="3000" b="1">
+                <a:solidFill>
+                  <a:srgbClr val="1E2761"/>
+                </a:solidFill>
+                <a:latin typeface="Calibri"/>
+                <a:ea typeface="Calibri"/>
+                <a:cs typeface="Calibri"/>
+              </a:rPr>
+              <a:t>2.1s</a:t>
+            </a:r>
+            <a:endParaRPr lang="en-US" sz="3000"/>
+          </a:p>
+        </p:txBody>
+      </p:sp>
+      <p:sp>
+        <p:nvSpPr>
+          <p:cNvPr id="1464958141" name="Text 18"/>
+          <p:cNvSpPr/>
+          <p:nvPr/>
+        </p:nvSpPr>
+        <p:spPr bwMode="auto">
+          <a:xfrm>
+            <a:off x="8366550" y="2953512"/>
+            <a:ext cx="3017443" cy="320040"/>
+          </a:xfrm>
+          <a:prstGeom prst="rect">
+            <a:avLst/>
+          </a:prstGeom>
+          <a:noFill/>
+          <a:ln/>
+        </p:spPr>
+        <p:txBody>
+          <a:bodyPr wrap="square" lIns="0" tIns="0" rIns="0" bIns="0" rtlCol="0" anchor="ctr"/>
+          <a:lstStyle/>
+          <a:p>
+            <a:pPr marL="0" indent="0">
+              <a:buNone/>
+              <a:defRPr/>
+            </a:pPr>
+            <a:r>
+              <a:rPr lang="en-US" sz="1250" b="1">
+                <a:solidFill>
+                  <a:srgbClr val="1E2761"/>
+                </a:solidFill>
+                <a:latin typeface="Calibri"/>
+                <a:ea typeface="Calibri"/>
+                <a:cs typeface="Calibri"/>
+              </a:rPr>
+              <a:t>Avg. scan-to-tick latency</a:t>
+            </a:r>
+            <a:endParaRPr lang="en-US" sz="1250"/>
+          </a:p>
+        </p:txBody>
+      </p:sp>
+      <p:sp>
+        <p:nvSpPr>
+          <p:cNvPr id="1094845625" name="Text 19"/>
+          <p:cNvSpPr/>
+          <p:nvPr/>
+        </p:nvSpPr>
+        <p:spPr bwMode="auto">
+          <a:xfrm>
+            <a:off x="8366550" y="3246120"/>
+            <a:ext cx="3017443" cy="502920"/>
+          </a:xfrm>
+          <a:prstGeom prst="rect">
+            <a:avLst/>
+          </a:prstGeom>
+          <a:noFill/>
+          <a:ln/>
+        </p:spPr>
+        <p:txBody>
+          <a:bodyPr wrap="square" lIns="0" tIns="0" rIns="0" bIns="0" rtlCol="0" anchor="t"/>
+          <a:lstStyle/>
+          <a:p>
+            <a:pPr marL="0" indent="0">
+              <a:buNone/>
+              <a:defRPr/>
+            </a:pPr>
+            <a:r>
+              <a:rPr lang="en-US" sz="950">
+                <a:solidFill>
+                  <a:srgbClr val="5B6B93"/>
+                </a:solidFill>
+                <a:latin typeface="Calibri"/>
+                <a:ea typeface="Calibri"/>
+                <a:cs typeface="Calibri"/>
+              </a:rPr>
+              <a:t>Within the 3s teacher-screen polling window</a:t>
+            </a:r>
+            <a:endParaRPr lang="en-US" sz="950"/>
+          </a:p>
+        </p:txBody>
+      </p:sp>
+      <p:sp>
+        <p:nvSpPr>
+          <p:cNvPr id="1244508429" name="Shape 20"/>
+          <p:cNvSpPr/>
+          <p:nvPr/>
+        </p:nvSpPr>
+        <p:spPr bwMode="auto">
+          <a:xfrm>
+            <a:off x="548625" y="4160518"/>
+            <a:ext cx="3474632" cy="2240280"/>
+          </a:xfrm>
+          <a:prstGeom prst="roundRect">
+            <a:avLst>
+              <a:gd name="adj" fmla="val 3265"/>
+            </a:avLst>
+          </a:prstGeom>
+          <a:solidFill>
+            <a:srgbClr val="F4F6FC"/>
+          </a:solidFill>
+          <a:ln/>
+          <a:effectLst>
+            <a:outerShdw blurRad="101600" dist="25400" dir="5400000" sx="100000" sy="100000" kx="0" ky="0" algn="bl" rotWithShape="0">
+              <a:srgbClr val="1E2761">
+                <a:alpha val="12000"/>
+              </a:srgbClr>
+            </a:outerShdw>
+          </a:effectLst>
+        </p:spPr>
+      </p:sp>
+      <p:sp>
+        <p:nvSpPr>
+          <p:cNvPr id="1447197106" name="Shape 21"/>
+          <p:cNvSpPr/>
+          <p:nvPr/>
+        </p:nvSpPr>
+        <p:spPr bwMode="auto">
+          <a:xfrm>
+            <a:off x="777220" y="4389120"/>
+            <a:ext cx="502907" cy="502920"/>
+          </a:xfrm>
+          <a:prstGeom prst="ellipse">
+            <a:avLst/>
+          </a:prstGeom>
+          <a:solidFill>
+            <a:srgbClr val="1E2761"/>
+          </a:solidFill>
+          <a:ln/>
+        </p:spPr>
+      </p:sp>
+      <p:pic>
+        <p:nvPicPr>
+          <p:cNvPr id="1917813478" name="Image 3" descr="qr.png"/>
+          <p:cNvPicPr>
+            <a:picLocks noChangeAspect="1"/>
+          </p:cNvPicPr>
+          <p:nvPr/>
+        </p:nvPicPr>
+        <p:blipFill rotWithShape="1">
+          <a:blip r:embed="rId6"/>
+          <a:stretch/>
+        </p:blipFill>
+        <p:spPr bwMode="auto">
+          <a:xfrm>
+            <a:off x="867744" y="4479645"/>
+            <a:ext cx="321860" cy="321868"/>
+          </a:xfrm>
+          <a:prstGeom prst="rect">
+            <a:avLst/>
+          </a:prstGeom>
+        </p:spPr>
+      </p:pic>
+      <p:sp>
+        <p:nvSpPr>
+          <p:cNvPr id="1996923261" name="Text 22"/>
+          <p:cNvSpPr/>
+          <p:nvPr/>
+        </p:nvSpPr>
+        <p:spPr bwMode="auto">
+          <a:xfrm>
+            <a:off x="777220" y="4983480"/>
+            <a:ext cx="3017443" cy="548640"/>
+          </a:xfrm>
+          <a:prstGeom prst="rect">
+            <a:avLst/>
+          </a:prstGeom>
+          <a:noFill/>
+          <a:ln/>
+        </p:spPr>
+        <p:txBody>
+          <a:bodyPr wrap="square" lIns="0" tIns="0" rIns="0" bIns="0" rtlCol="0" anchor="ctr"/>
+          <a:lstStyle/>
+          <a:p>
+            <a:pPr marL="0" indent="0">
+              <a:buNone/>
+              <a:defRPr/>
+            </a:pPr>
+            <a:r>
+              <a:rPr lang="en-US" sz="3000" b="1">
+                <a:solidFill>
+                  <a:srgbClr val="1E2761"/>
+                </a:solidFill>
+                <a:latin typeface="Calibri"/>
+                <a:ea typeface="Calibri"/>
+                <a:cs typeface="Calibri"/>
+              </a:rPr>
+              <a:t>312</a:t>
+            </a:r>
+            <a:endParaRPr lang="en-US" sz="3000"/>
+          </a:p>
+        </p:txBody>
+      </p:sp>
+      <p:sp>
+        <p:nvSpPr>
+          <p:cNvPr id="1114306624" name="Text 23"/>
+          <p:cNvSpPr/>
+          <p:nvPr/>
+        </p:nvSpPr>
+        <p:spPr bwMode="auto">
+          <a:xfrm>
+            <a:off x="777220" y="5513832"/>
+            <a:ext cx="3017443" cy="320040"/>
+          </a:xfrm>
+          <a:prstGeom prst="rect">
+            <a:avLst/>
+          </a:prstGeom>
+          <a:noFill/>
+          <a:ln/>
+        </p:spPr>
+        <p:txBody>
+          <a:bodyPr wrap="square" lIns="0" tIns="0" rIns="0" bIns="0" rtlCol="0" anchor="ctr"/>
+          <a:lstStyle/>
+          <a:p>
+            <a:pPr marL="0" indent="0">
+              <a:buNone/>
+              <a:defRPr/>
+            </a:pPr>
+            <a:r>
+              <a:rPr lang="en-US" sz="1250" b="1">
+                <a:solidFill>
+                  <a:srgbClr val="1E2761"/>
+                </a:solidFill>
+                <a:latin typeface="Calibri"/>
+                <a:ea typeface="Calibri"/>
+                <a:cs typeface="Calibri"/>
+              </a:rPr>
+              <a:t>Expired-token scans rejected</a:t>
+            </a:r>
+            <a:endParaRPr lang="en-US" sz="1250"/>
+          </a:p>
+        </p:txBody>
+      </p:sp>
+      <p:sp>
+        <p:nvSpPr>
+          <p:cNvPr id="1639947595" name="Text 24"/>
+          <p:cNvSpPr/>
+          <p:nvPr/>
+        </p:nvSpPr>
+        <p:spPr bwMode="auto">
+          <a:xfrm>
+            <a:off x="777220" y="5806440"/>
+            <a:ext cx="3017443" cy="502920"/>
+          </a:xfrm>
+          <a:prstGeom prst="rect">
+            <a:avLst/>
+          </a:prstGeom>
+          <a:noFill/>
+          <a:ln/>
+        </p:spPr>
+        <p:txBody>
+          <a:bodyPr wrap="square" lIns="0" tIns="0" rIns="0" bIns="0" rtlCol="0" anchor="t"/>
+          <a:lstStyle/>
+          <a:p>
+            <a:pPr marL="0" indent="0">
+              <a:buNone/>
+              <a:defRPr/>
+            </a:pPr>
+            <a:r>
+              <a:rPr lang="en-US" sz="950">
+                <a:solidFill>
+                  <a:srgbClr val="5B6B93"/>
+                </a:solidFill>
+                <a:latin typeface="Calibri"/>
+                <a:ea typeface="Calibri"/>
+                <a:cs typeface="Calibri"/>
+              </a:rPr>
+              <a:t>Per 30 days — screenshot / replay attempts blocked</a:t>
+            </a:r>
+            <a:endParaRPr lang="en-US" sz="950"/>
+          </a:p>
+        </p:txBody>
+      </p:sp>
+      <p:sp>
+        <p:nvSpPr>
+          <p:cNvPr id="1713145526" name="Shape 25"/>
+          <p:cNvSpPr/>
+          <p:nvPr/>
+        </p:nvSpPr>
+        <p:spPr bwMode="auto">
+          <a:xfrm>
+            <a:off x="4343291" y="4160518"/>
+            <a:ext cx="3474632" cy="2240280"/>
+          </a:xfrm>
+          <a:prstGeom prst="roundRect">
+            <a:avLst>
+              <a:gd name="adj" fmla="val 3265"/>
+            </a:avLst>
+          </a:prstGeom>
+          <a:solidFill>
+            <a:srgbClr val="F4F6FC"/>
+          </a:solidFill>
+          <a:ln/>
+          <a:effectLst>
+            <a:outerShdw blurRad="101600" dist="25400" dir="5400000" sx="100000" sy="100000" kx="0" ky="0" algn="bl" rotWithShape="0">
+              <a:srgbClr val="1E2761">
+                <a:alpha val="12000"/>
+              </a:srgbClr>
+            </a:outerShdw>
+          </a:effectLst>
+        </p:spPr>
+      </p:sp>
+      <p:sp>
+        <p:nvSpPr>
+          <p:cNvPr id="1715329306" name="Shape 26"/>
+          <p:cNvSpPr/>
+          <p:nvPr/>
+        </p:nvSpPr>
+        <p:spPr bwMode="auto">
+          <a:xfrm>
+            <a:off x="4571885" y="4389120"/>
+            <a:ext cx="502907" cy="502920"/>
+          </a:xfrm>
+          <a:prstGeom prst="ellipse">
+            <a:avLst/>
+          </a:prstGeom>
+          <a:solidFill>
+            <a:srgbClr val="1E2761"/>
+          </a:solidFill>
+          <a:ln/>
+        </p:spPr>
+      </p:sp>
+      <p:pic>
+        <p:nvPicPr>
+          <p:cNvPr id="1928041297" name="Image 4" descr="phone.png"/>
+          <p:cNvPicPr>
+            <a:picLocks noChangeAspect="1"/>
+          </p:cNvPicPr>
+          <p:nvPr/>
+        </p:nvPicPr>
+        <p:blipFill rotWithShape="1">
+          <a:blip r:embed="rId7"/>
+          <a:stretch/>
+        </p:blipFill>
+        <p:spPr bwMode="auto">
+          <a:xfrm>
+            <a:off x="4662409" y="4479645"/>
+            <a:ext cx="321860" cy="321868"/>
+          </a:xfrm>
+          <a:prstGeom prst="rect">
+            <a:avLst/>
+          </a:prstGeom>
+        </p:spPr>
+      </p:pic>
+      <p:sp>
+        <p:nvSpPr>
+          <p:cNvPr id="1391589382" name="Text 27"/>
+          <p:cNvSpPr/>
+          <p:nvPr/>
+        </p:nvSpPr>
+        <p:spPr bwMode="auto">
+          <a:xfrm>
+            <a:off x="4571885" y="4983480"/>
+            <a:ext cx="3017443" cy="548640"/>
+          </a:xfrm>
+          <a:prstGeom prst="rect">
+            <a:avLst/>
+          </a:prstGeom>
+          <a:noFill/>
+          <a:ln/>
+        </p:spPr>
+        <p:txBody>
+          <a:bodyPr wrap="square" lIns="0" tIns="0" rIns="0" bIns="0" rtlCol="0" anchor="ctr"/>
+          <a:lstStyle/>
+          <a:p>
+            <a:pPr marL="0" indent="0">
+              <a:buNone/>
+              <a:defRPr/>
+            </a:pPr>
+            <a:r>
+              <a:rPr lang="en-US" sz="3000" b="1">
+                <a:solidFill>
+                  <a:srgbClr val="1E2761"/>
+                </a:solidFill>
+                <a:latin typeface="Calibri"/>
+                <a:ea typeface="Calibri"/>
+                <a:cs typeface="Calibri"/>
+              </a:rPr>
+              <a:t>96</a:t>
+            </a:r>
+            <a:endParaRPr lang="en-US" sz="3000"/>
+          </a:p>
+        </p:txBody>
+      </p:sp>
+      <p:sp>
+        <p:nvSpPr>
+          <p:cNvPr id="1380305287" name="Text 28"/>
+          <p:cNvSpPr/>
+          <p:nvPr/>
+        </p:nvSpPr>
+        <p:spPr bwMode="auto">
+          <a:xfrm>
+            <a:off x="4571885" y="5513832"/>
+            <a:ext cx="3017443" cy="320040"/>
+          </a:xfrm>
+          <a:prstGeom prst="rect">
+            <a:avLst/>
+          </a:prstGeom>
+          <a:noFill/>
+          <a:ln/>
+        </p:spPr>
+        <p:txBody>
+          <a:bodyPr wrap="square" lIns="0" tIns="0" rIns="0" bIns="0" rtlCol="0" anchor="ctr"/>
+          <a:lstStyle/>
+          <a:p>
+            <a:pPr marL="0" indent="0">
+              <a:buNone/>
+              <a:defRPr/>
+            </a:pPr>
+            <a:r>
+              <a:rPr lang="en-US" sz="1250" b="1">
+                <a:solidFill>
+                  <a:srgbClr val="1E2761"/>
+                </a:solidFill>
+                <a:latin typeface="Calibri"/>
+                <a:ea typeface="Calibri"/>
+                <a:cs typeface="Calibri"/>
+              </a:rPr>
+              <a:t>New device registrations</a:t>
+            </a:r>
+            <a:endParaRPr lang="en-US" sz="1250"/>
+          </a:p>
+        </p:txBody>
+      </p:sp>
+      <p:sp>
+        <p:nvSpPr>
+          <p:cNvPr id="773132140" name="Text 29"/>
+          <p:cNvSpPr/>
+          <p:nvPr/>
+        </p:nvSpPr>
+        <p:spPr bwMode="auto">
+          <a:xfrm>
+            <a:off x="4571885" y="5806440"/>
+            <a:ext cx="3017443" cy="502920"/>
+          </a:xfrm>
+          <a:prstGeom prst="rect">
+            <a:avLst/>
+          </a:prstGeom>
+          <a:noFill/>
+          <a:ln/>
+        </p:spPr>
+        <p:txBody>
+          <a:bodyPr wrap="square" lIns="0" tIns="0" rIns="0" bIns="0" rtlCol="0" anchor="t"/>
+          <a:lstStyle/>
+          <a:p>
+            <a:pPr marL="0" indent="0">
+              <a:buNone/>
+              <a:defRPr/>
+            </a:pPr>
+            <a:r>
+              <a:rPr lang="en-US" sz="950">
+                <a:solidFill>
+                  <a:srgbClr val="5B6B93"/>
+                </a:solidFill>
+                <a:latin typeface="Calibri"/>
+                <a:ea typeface="Calibri"/>
+                <a:cs typeface="Calibri"/>
+              </a:rPr>
+              <a:t>Per 30 days — public key only, first-time use</a:t>
+            </a:r>
+            <a:endParaRPr lang="en-US" sz="950"/>
+          </a:p>
+        </p:txBody>
+      </p:sp>
+      <p:sp>
+        <p:nvSpPr>
+          <p:cNvPr id="90587259" name="Shape 30"/>
+          <p:cNvSpPr/>
+          <p:nvPr/>
+        </p:nvSpPr>
+        <p:spPr bwMode="auto">
+          <a:xfrm>
+            <a:off x="8137956" y="4160518"/>
+            <a:ext cx="3474632" cy="2240280"/>
+          </a:xfrm>
+          <a:prstGeom prst="roundRect">
+            <a:avLst>
+              <a:gd name="adj" fmla="val 3265"/>
+            </a:avLst>
+          </a:prstGeom>
+          <a:solidFill>
+            <a:srgbClr val="F4F6FC"/>
+          </a:solidFill>
+          <a:ln/>
+          <a:effectLst>
+            <a:outerShdw blurRad="101600" dist="25400" dir="5400000" sx="100000" sy="100000" kx="0" ky="0" algn="bl" rotWithShape="0">
+              <a:srgbClr val="1E2761">
+                <a:alpha val="12000"/>
+              </a:srgbClr>
+            </a:outerShdw>
+          </a:effectLst>
+        </p:spPr>
+      </p:sp>
+      <p:sp>
+        <p:nvSpPr>
+          <p:cNvPr id="593568703" name="Shape 31"/>
+          <p:cNvSpPr/>
+          <p:nvPr/>
+        </p:nvSpPr>
+        <p:spPr bwMode="auto">
+          <a:xfrm>
+            <a:off x="8366550" y="4389120"/>
+            <a:ext cx="502907" cy="502920"/>
+          </a:xfrm>
+          <a:prstGeom prst="ellipse">
+            <a:avLst/>
+          </a:prstGeom>
+          <a:solidFill>
+            <a:srgbClr val="1E2761"/>
+          </a:solidFill>
+          <a:ln/>
+        </p:spPr>
+      </p:sp>
+      <p:pic>
+        <p:nvPicPr>
+          <p:cNvPr id="420780112" name="Image 5" descr="fingerprint.png"/>
+          <p:cNvPicPr>
+            <a:picLocks noChangeAspect="1"/>
+          </p:cNvPicPr>
+          <p:nvPr/>
+        </p:nvPicPr>
+        <p:blipFill rotWithShape="1">
+          <a:blip r:embed="rId8"/>
+          <a:stretch/>
+        </p:blipFill>
+        <p:spPr bwMode="auto">
+          <a:xfrm>
+            <a:off x="8457074" y="4479645"/>
+            <a:ext cx="321860" cy="321868"/>
+          </a:xfrm>
+          <a:prstGeom prst="rect">
+            <a:avLst/>
+          </a:prstGeom>
+        </p:spPr>
+      </p:pic>
+      <p:sp>
+        <p:nvSpPr>
+          <p:cNvPr id="517618886" name="Text 32"/>
+          <p:cNvSpPr/>
+          <p:nvPr/>
+        </p:nvSpPr>
+        <p:spPr bwMode="auto">
+          <a:xfrm>
+            <a:off x="8366550" y="4983480"/>
+            <a:ext cx="3017443" cy="548640"/>
+          </a:xfrm>
+          <a:prstGeom prst="rect">
+            <a:avLst/>
+          </a:prstGeom>
+          <a:noFill/>
+          <a:ln/>
+        </p:spPr>
+        <p:txBody>
+          <a:bodyPr wrap="square" lIns="0" tIns="0" rIns="0" bIns="0" rtlCol="0" anchor="ctr"/>
+          <a:lstStyle/>
+          <a:p>
+            <a:pPr marL="0" indent="0">
+              <a:buNone/>
+              <a:defRPr/>
+            </a:pPr>
+            <a:r>
+              <a:rPr lang="en-US" sz="3000" b="1">
+                <a:solidFill>
+                  <a:srgbClr val="1E2761"/>
+                </a:solidFill>
+                <a:latin typeface="Calibri"/>
+                <a:ea typeface="Calibri"/>
+                <a:cs typeface="Calibri"/>
+              </a:rPr>
+              <a:t>~30s</a:t>
+            </a:r>
+            <a:endParaRPr lang="en-US" sz="3000"/>
+          </a:p>
+        </p:txBody>
+      </p:sp>
+      <p:sp>
+        <p:nvSpPr>
+          <p:cNvPr id="1872423237" name="Text 33"/>
+          <p:cNvSpPr/>
+          <p:nvPr/>
+        </p:nvSpPr>
+        <p:spPr bwMode="auto">
+          <a:xfrm>
+            <a:off x="8366550" y="5513832"/>
+            <a:ext cx="3017443" cy="320040"/>
+          </a:xfrm>
+          <a:prstGeom prst="rect">
+            <a:avLst/>
+          </a:prstGeom>
+          <a:noFill/>
+          <a:ln/>
+        </p:spPr>
+        <p:txBody>
+          <a:bodyPr wrap="square" lIns="0" tIns="0" rIns="0" bIns="0" rtlCol="0" anchor="ctr"/>
+          <a:lstStyle/>
+          <a:p>
+            <a:pPr marL="0" indent="0">
+              <a:buNone/>
+              <a:defRPr/>
+            </a:pPr>
+            <a:r>
+              <a:rPr lang="en-US" sz="1250" b="1">
+                <a:solidFill>
+                  <a:srgbClr val="1E2761"/>
+                </a:solidFill>
+                <a:latin typeface="Calibri"/>
+                <a:ea typeface="Calibri"/>
+                <a:cs typeface="Calibri"/>
+              </a:rPr>
+              <a:t>Token acceptance window</a:t>
+            </a:r>
+            <a:endParaRPr lang="en-US" sz="1250"/>
+          </a:p>
+        </p:txBody>
+      </p:sp>
+      <p:sp>
+        <p:nvSpPr>
+          <p:cNvPr id="2129105360" name="Text 34"/>
+          <p:cNvSpPr/>
+          <p:nvPr/>
+        </p:nvSpPr>
+        <p:spPr bwMode="auto">
+          <a:xfrm>
+            <a:off x="8366550" y="5806440"/>
+            <a:ext cx="3017443" cy="502920"/>
+          </a:xfrm>
+          <a:prstGeom prst="rect">
+            <a:avLst/>
+          </a:prstGeom>
+          <a:noFill/>
+          <a:ln/>
+        </p:spPr>
+        <p:txBody>
+          <a:bodyPr wrap="square" lIns="0" tIns="0" rIns="0" bIns="0" rtlCol="0" anchor="t"/>
+          <a:lstStyle/>
+          <a:p>
+            <a:pPr marL="0" indent="0">
+              <a:buNone/>
+              <a:defRPr/>
+            </a:pPr>
+            <a:r>
+              <a:rPr lang="en-US" sz="950">
+                <a:solidFill>
+                  <a:srgbClr val="5B6B93"/>
+                </a:solidFill>
+                <a:latin typeface="Calibri"/>
+                <a:ea typeface="Calibri"/>
+                <a:cs typeface="Calibri"/>
+              </a:rPr>
+              <a:t>Signed challenge must land inside this window</a:t>
+            </a:r>
+            <a:endParaRPr lang="en-US" sz="950"/>
+          </a:p>
+        </p:txBody>
+      </p:sp>
+      <p:sp>
+        <p:nvSpPr>
+          <p:cNvPr id="892961863" name="Text 35"/>
+          <p:cNvSpPr/>
+          <p:nvPr/>
+        </p:nvSpPr>
+        <p:spPr bwMode="auto">
+          <a:xfrm>
+            <a:off x="548625" y="6510528"/>
+            <a:ext cx="11063963" cy="274320"/>
+          </a:xfrm>
+          <a:prstGeom prst="rect">
+            <a:avLst/>
+          </a:prstGeom>
+          <a:noFill/>
+          <a:ln/>
+        </p:spPr>
+        <p:txBody>
+          <a:bodyPr wrap="square" lIns="0" tIns="0" rIns="0" bIns="0" rtlCol="0" anchor="ctr"/>
+          <a:lstStyle/>
+          <a:p>
+            <a:pPr marL="0" indent="0">
+              <a:buNone/>
+              <a:defRPr/>
+            </a:pPr>
+            <a:r>
+              <a:rPr lang="en-US" sz="900" i="1">
+                <a:solidFill>
+                  <a:srgbClr val="5B6B93"/>
+                </a:solidFill>
+                <a:latin typeface="Calibri"/>
+                <a:ea typeface="Calibri"/>
+                <a:cs typeface="Calibri"/>
+              </a:rPr>
+              <a:t>Illustrative sample metrics shaped around the system's actual QR rotation, polling, and token-window settings — replace with real telemetry once logging is wired up.</a:t>
+            </a:r>
+            <a:endParaRPr lang="en-US" sz="900"/>
+          </a:p>
+        </p:txBody>
+      </p:sp>
+    </p:spTree>
+  </p:cSld>
+  <p:clrMapOvr>
+    <a:masterClrMapping/>
+  </p:clrMapOvr>
+  <mc:AlternateContent xmlns:mc="http://schemas.openxmlformats.org/markup-compatibility/2006">
+    <mc:Choice xmlns:p159="http://schemas.microsoft.com/office/powerpoint/2015/09/main" xmlns:p14="http://schemas.microsoft.com/office/powerpoint/2010/main" Requires="p159">
+      <p:transition p14:dur="500" advClick="1"/>
+    </mc:Choice>
+    <mc:Fallback>
+      <p:transition advClick="1"/>
+    </mc:Fallback>
+  </mc:AlternateContent>
+</p:sld>
+</file>
+
+<file path=ppt/slides/slide14.xml><?xml version="1.0" encoding="utf-8"?>
 <p:sld xmlns:a="http://schemas.openxmlformats.org/drawingml/2006/main" xmlns:r="http://schemas.openxmlformats.org/officeDocument/2006/relationships" xmlns:p="http://schemas.openxmlformats.org/presentationml/2006/main" xmlns:m="http://schemas.openxmlformats.org/officeDocument/2006/math" xmlns:w="http://schemas.openxmlformats.org/wordprocessingml/2006/main" xmlns:mc="http://schemas.openxmlformats.org/markup-compatibility/2006" showMasterPhAnim="0" showMasterSp="1" show="1">
   <p:cSld name="Slide 10">
     <p:bg>
@@ -4647,7 +5953,7 @@
       </p:grpSpPr>
       <p:sp>
         <p:nvSpPr>
-          <p:cNvPr id="1555106392" name="Text 0"/>
+          <p:cNvPr id="1477383925" name="Text 0"/>
           <p:cNvSpPr/>
           <p:nvPr/>
         </p:nvSpPr>
@@ -4687,7 +5993,7 @@
       </p:sp>
       <p:sp>
         <p:nvSpPr>
-          <p:cNvPr id="843441076" name="Text 1"/>
+          <p:cNvPr id="1497488229" name="Text 1"/>
           <p:cNvSpPr/>
           <p:nvPr/>
         </p:nvSpPr>
@@ -4727,7 +6033,7 @@
       </p:sp>
       <p:sp>
         <p:nvSpPr>
-          <p:cNvPr id="516144656" name="Text 2"/>
+          <p:cNvPr id="1821188241" name="Text 2"/>
           <p:cNvSpPr/>
           <p:nvPr/>
         </p:nvSpPr>
@@ -4767,7 +6073,7 @@
       </p:sp>
       <p:sp>
         <p:nvSpPr>
-          <p:cNvPr id="1270643941" name="Shape 3"/>
+          <p:cNvPr id="120334273" name="Shape 3"/>
           <p:cNvSpPr/>
           <p:nvPr/>
         </p:nvSpPr>
@@ -4794,7 +6100,7 @@
       </p:sp>
       <p:pic>
         <p:nvPicPr>
-          <p:cNvPr id="232118946" name="Image 0" descr="preencoded.png"/>
+          <p:cNvPr id="748867085" name="Image 0" descr="preencoded.png"/>
           <p:cNvPicPr>
             <a:picLocks noChangeAspect="1"/>
           </p:cNvPicPr>
@@ -4816,7 +6122,7 @@
       </p:pic>
       <p:sp>
         <p:nvSpPr>
-          <p:cNvPr id="944339885" name="Text 4"/>
+          <p:cNvPr id="1299205356" name="Text 4"/>
           <p:cNvSpPr/>
           <p:nvPr/>
         </p:nvSpPr>
@@ -4856,7 +6162,7 @@
       </p:sp>
       <p:sp>
         <p:nvSpPr>
-          <p:cNvPr id="1803440281" name="Text 5"/>
+          <p:cNvPr id="467454566" name="Text 5"/>
           <p:cNvSpPr/>
           <p:nvPr/>
         </p:nvSpPr>
@@ -4896,7 +6202,7 @@
       </p:sp>
       <p:sp>
         <p:nvSpPr>
-          <p:cNvPr id="1009681547" name="Shape 6"/>
+          <p:cNvPr id="545076002" name="Shape 6"/>
           <p:cNvSpPr/>
           <p:nvPr/>
         </p:nvSpPr>
@@ -4923,7 +6229,7 @@
       </p:sp>
       <p:pic>
         <p:nvPicPr>
-          <p:cNvPr id="202705139" name="Image 1" descr="preencoded.png"/>
+          <p:cNvPr id="2115514959" name="Image 1" descr="preencoded.png"/>
           <p:cNvPicPr>
             <a:picLocks noChangeAspect="1"/>
           </p:cNvPicPr>
@@ -4945,7 +6251,7 @@
       </p:pic>
       <p:sp>
         <p:nvSpPr>
-          <p:cNvPr id="1162852759" name="Text 7"/>
+          <p:cNvPr id="179702776" name="Text 7"/>
           <p:cNvSpPr/>
           <p:nvPr/>
         </p:nvSpPr>
@@ -4985,7 +6291,7 @@
       </p:sp>
       <p:sp>
         <p:nvSpPr>
-          <p:cNvPr id="597300484" name="Text 8"/>
+          <p:cNvPr id="1301483272" name="Text 8"/>
           <p:cNvSpPr/>
           <p:nvPr/>
         </p:nvSpPr>
@@ -5025,7 +6331,7 @@
       </p:sp>
       <p:sp>
         <p:nvSpPr>
-          <p:cNvPr id="769269885" name="Shape 9"/>
+          <p:cNvPr id="753274428" name="Shape 9"/>
           <p:cNvSpPr/>
           <p:nvPr/>
         </p:nvSpPr>
@@ -5052,7 +6358,7 @@
       </p:sp>
       <p:pic>
         <p:nvPicPr>
-          <p:cNvPr id="162514990" name="Image 2" descr="preencoded.png"/>
+          <p:cNvPr id="237374096" name="Image 2" descr="preencoded.png"/>
           <p:cNvPicPr>
             <a:picLocks noChangeAspect="1"/>
           </p:cNvPicPr>
@@ -5074,7 +6380,7 @@
       </p:pic>
       <p:sp>
         <p:nvSpPr>
-          <p:cNvPr id="1374213502" name="Text 10"/>
+          <p:cNvPr id="2098911962" name="Text 10"/>
           <p:cNvSpPr/>
           <p:nvPr/>
         </p:nvSpPr>
@@ -5114,7 +6420,7 @@
       </p:sp>
       <p:sp>
         <p:nvSpPr>
-          <p:cNvPr id="196892560" name="Text 11"/>
+          <p:cNvPr id="310848200" name="Text 11"/>
           <p:cNvSpPr/>
           <p:nvPr/>
         </p:nvSpPr>
@@ -5154,7 +6460,7 @@
       </p:sp>
       <p:sp>
         <p:nvSpPr>
-          <p:cNvPr id="965508076" name="Text 12"/>
+          <p:cNvPr id="1028009313" name="Text 12"/>
           <p:cNvSpPr/>
           <p:nvPr/>
         </p:nvSpPr>
@@ -5194,7 +6500,7 @@
       </p:sp>
       <p:sp>
         <p:nvSpPr>
-          <p:cNvPr id="645844512" name="Text 13"/>
+          <p:cNvPr id="1734762705" name="Text 13"/>
           <p:cNvSpPr/>
           <p:nvPr/>
         </p:nvSpPr>
@@ -5234,7 +6540,7 @@
       </p:sp>
       <p:sp>
         <p:nvSpPr>
-          <p:cNvPr id="1517362273" name="Text 14"/>
+          <p:cNvPr id="954966612" name="Text 14"/>
           <p:cNvSpPr/>
           <p:nvPr/>
         </p:nvSpPr>
@@ -5274,7 +6580,7 @@
       </p:sp>
       <p:sp>
         <p:nvSpPr>
-          <p:cNvPr id="2103337338" name="Text 15"/>
+          <p:cNvPr id="358039844" name="Text 15"/>
           <p:cNvSpPr/>
           <p:nvPr/>
         </p:nvSpPr>
@@ -5314,7 +6620,7 @@
       </p:sp>
       <p:sp>
         <p:nvSpPr>
-          <p:cNvPr id="834155631" name="Text 16"/>
+          <p:cNvPr id="536580592" name="Text 16"/>
           <p:cNvSpPr/>
           <p:nvPr/>
         </p:nvSpPr>
@@ -5354,7 +6660,7 @@
       </p:sp>
       <p:sp>
         <p:nvSpPr>
-          <p:cNvPr id="240956569" name="Text 17"/>
+          <p:cNvPr id="1161826239" name="Text 17"/>
           <p:cNvSpPr/>
           <p:nvPr/>
         </p:nvSpPr>
@@ -5394,7 +6700,7 @@
       </p:sp>
       <p:sp>
         <p:nvSpPr>
-          <p:cNvPr id="1177966689" name="Text 18"/>
+          <p:cNvPr id="2017453580" name="Text 18"/>
           <p:cNvSpPr/>
           <p:nvPr/>
         </p:nvSpPr>
@@ -5434,7 +6740,7 @@
       </p:sp>
       <p:sp>
         <p:nvSpPr>
-          <p:cNvPr id="413342043" name="Text 19"/>
+          <p:cNvPr id="4970835" name="Text 19"/>
           <p:cNvSpPr/>
           <p:nvPr/>
         </p:nvSpPr>
@@ -5488,7 +6794,7 @@
 </p:sld>
 </file>
 
-<file path=ppt/slides/slide14.xml><?xml version="1.0" encoding="utf-8"?>
+<file path=ppt/slides/slide15.xml><?xml version="1.0" encoding="utf-8"?>
 <p:sld xmlns:a="http://schemas.openxmlformats.org/drawingml/2006/main" xmlns:r="http://schemas.openxmlformats.org/officeDocument/2006/relationships" xmlns:p="http://schemas.openxmlformats.org/presentationml/2006/main" xmlns:m="http://schemas.openxmlformats.org/officeDocument/2006/math" xmlns:w="http://schemas.openxmlformats.org/wordprocessingml/2006/main" xmlns:mc="http://schemas.openxmlformats.org/markup-compatibility/2006" showMasterPhAnim="0" showMasterSp="1" show="1">
   <p:cSld name="Slide 11">
     <p:bg>
@@ -5514,7 +6820,7 @@
       </p:grpSpPr>
       <p:sp>
         <p:nvSpPr>
-          <p:cNvPr id="323665065" name="Text 0"/>
+          <p:cNvPr id="1339113560" name="Text 0"/>
           <p:cNvSpPr/>
           <p:nvPr/>
         </p:nvSpPr>
@@ -5554,7 +6860,7 @@
       </p:sp>
       <p:sp>
         <p:nvSpPr>
-          <p:cNvPr id="1039868372" name="Text 1"/>
+          <p:cNvPr id="292211519" name="Text 1"/>
           <p:cNvSpPr/>
           <p:nvPr/>
         </p:nvSpPr>
@@ -5594,7 +6900,7 @@
       </p:sp>
       <p:sp>
         <p:nvSpPr>
-          <p:cNvPr id="1063627659" name="Text 2"/>
+          <p:cNvPr id="1448641566" name="Text 2"/>
           <p:cNvSpPr/>
           <p:nvPr/>
         </p:nvSpPr>
@@ -5634,7 +6940,7 @@
       </p:sp>
       <p:sp>
         <p:nvSpPr>
-          <p:cNvPr id="1830875728" name="Shape 3"/>
+          <p:cNvPr id="56066339" name="Shape 3"/>
           <p:cNvSpPr/>
           <p:nvPr/>
         </p:nvSpPr>
@@ -5665,7 +6971,7 @@
       </p:sp>
       <p:pic>
         <p:nvPicPr>
-          <p:cNvPr id="2027389354" name="Image 0" descr="preencoded.png"/>
+          <p:cNvPr id="212319049" name="Image 0" descr="preencoded.png"/>
           <p:cNvPicPr>
             <a:picLocks noChangeAspect="1"/>
           </p:cNvPicPr>
@@ -5687,7 +6993,7 @@
       </p:pic>
       <p:sp>
         <p:nvSpPr>
-          <p:cNvPr id="1450660825" name="Text 4"/>
+          <p:cNvPr id="272407379" name="Text 4"/>
           <p:cNvSpPr/>
           <p:nvPr/>
         </p:nvSpPr>
@@ -5727,7 +7033,7 @@
       </p:sp>
       <p:sp>
         <p:nvSpPr>
-          <p:cNvPr id="323794504" name="Shape 5"/>
+          <p:cNvPr id="255583561" name="Shape 5"/>
           <p:cNvSpPr/>
           <p:nvPr/>
         </p:nvSpPr>
@@ -5758,7 +7064,7 @@
       </p:sp>
       <p:pic>
         <p:nvPicPr>
-          <p:cNvPr id="2095595528" name="Image 1" descr="preencoded.png"/>
+          <p:cNvPr id="1235501574" name="Image 1" descr="preencoded.png"/>
           <p:cNvPicPr>
             <a:picLocks noChangeAspect="1"/>
           </p:cNvPicPr>
@@ -5780,7 +7086,7 @@
       </p:pic>
       <p:sp>
         <p:nvSpPr>
-          <p:cNvPr id="144021038" name="Text 6"/>
+          <p:cNvPr id="632710461" name="Text 6"/>
           <p:cNvSpPr/>
           <p:nvPr/>
         </p:nvSpPr>
@@ -5820,7 +7126,7 @@
       </p:sp>
       <p:sp>
         <p:nvSpPr>
-          <p:cNvPr id="995714765" name="Shape 7"/>
+          <p:cNvPr id="334195424" name="Shape 7"/>
           <p:cNvSpPr/>
           <p:nvPr/>
         </p:nvSpPr>
@@ -5851,7 +7157,7 @@
       </p:sp>
       <p:sp>
         <p:nvSpPr>
-          <p:cNvPr id="964128607" name="Text 8"/>
+          <p:cNvPr id="1330630664" name="Text 8"/>
           <p:cNvSpPr/>
           <p:nvPr/>
         </p:nvSpPr>
@@ -5891,7 +7197,7 @@
       </p:sp>
       <p:sp>
         <p:nvSpPr>
-          <p:cNvPr id="1779184397" name="Shape 9"/>
+          <p:cNvPr id="208591660" name="Shape 9"/>
           <p:cNvSpPr/>
           <p:nvPr/>
         </p:nvSpPr>
@@ -5922,7 +7228,7 @@
       </p:sp>
       <p:sp>
         <p:nvSpPr>
-          <p:cNvPr id="384929670" name="Text 10"/>
+          <p:cNvPr id="1617500812" name="Text 10"/>
           <p:cNvSpPr/>
           <p:nvPr/>
         </p:nvSpPr>
@@ -5962,7 +7268,7 @@
       </p:sp>
       <p:sp>
         <p:nvSpPr>
-          <p:cNvPr id="820214618" name="Shape 11"/>
+          <p:cNvPr id="585052487" name="Shape 11"/>
           <p:cNvSpPr/>
           <p:nvPr/>
         </p:nvSpPr>
@@ -5993,7 +7299,7 @@
       </p:sp>
       <p:sp>
         <p:nvSpPr>
-          <p:cNvPr id="774349302" name="Text 12"/>
+          <p:cNvPr id="1488919133" name="Text 12"/>
           <p:cNvSpPr/>
           <p:nvPr/>
         </p:nvSpPr>
@@ -6033,7 +7339,7 @@
       </p:sp>
       <p:sp>
         <p:nvSpPr>
-          <p:cNvPr id="1393324999" name="Shape 13"/>
+          <p:cNvPr id="1378331882" name="Shape 13"/>
           <p:cNvSpPr/>
           <p:nvPr/>
         </p:nvSpPr>
@@ -6064,7 +7370,7 @@
       </p:sp>
       <p:sp>
         <p:nvSpPr>
-          <p:cNvPr id="503897682" name="Text 14"/>
+          <p:cNvPr id="895253730" name="Text 14"/>
           <p:cNvSpPr/>
           <p:nvPr/>
         </p:nvSpPr>
@@ -6104,7 +7410,7 @@
       </p:sp>
       <p:sp>
         <p:nvSpPr>
-          <p:cNvPr id="1817558135" name="Shape 15"/>
+          <p:cNvPr id="1241344826" name="Shape 15"/>
           <p:cNvSpPr/>
           <p:nvPr/>
         </p:nvSpPr>
@@ -6135,7 +7441,7 @@
       </p:sp>
       <p:sp>
         <p:nvSpPr>
-          <p:cNvPr id="1677208692" name="Text 16"/>
+          <p:cNvPr id="276357067" name="Text 16"/>
           <p:cNvSpPr/>
           <p:nvPr/>
         </p:nvSpPr>
@@ -6175,7 +7481,7 @@
       </p:sp>
       <p:sp>
         <p:nvSpPr>
-          <p:cNvPr id="1458389065" name="Shape 17"/>
+          <p:cNvPr id="1095776571" name="Shape 17"/>
           <p:cNvSpPr/>
           <p:nvPr/>
         </p:nvSpPr>
@@ -6206,7 +7512,7 @@
       </p:sp>
       <p:sp>
         <p:nvSpPr>
-          <p:cNvPr id="652585617" name="Text 18"/>
+          <p:cNvPr id="830101914" name="Text 18"/>
           <p:cNvSpPr/>
           <p:nvPr/>
         </p:nvSpPr>
@@ -6246,7 +7552,7 @@
       </p:sp>
       <p:sp>
         <p:nvSpPr>
-          <p:cNvPr id="1338763272" name="Shape 19"/>
+          <p:cNvPr id="229503723" name="Shape 19"/>
           <p:cNvSpPr/>
           <p:nvPr/>
         </p:nvSpPr>
@@ -6277,7 +7583,7 @@
       </p:sp>
       <p:sp>
         <p:nvSpPr>
-          <p:cNvPr id="69268337" name="Text 20"/>
+          <p:cNvPr id="487518839" name="Text 20"/>
           <p:cNvSpPr/>
           <p:nvPr/>
         </p:nvSpPr>
@@ -6317,7 +7623,7 @@
       </p:sp>
       <p:sp>
         <p:nvSpPr>
-          <p:cNvPr id="2141523942" name="Shape 21"/>
+          <p:cNvPr id="1600070262" name="Shape 21"/>
           <p:cNvSpPr/>
           <p:nvPr/>
         </p:nvSpPr>
@@ -6348,7 +7654,7 @@
       </p:sp>
       <p:sp>
         <p:nvSpPr>
-          <p:cNvPr id="158937293" name="Text 22"/>
+          <p:cNvPr id="1598945598" name="Text 22"/>
           <p:cNvSpPr/>
           <p:nvPr/>
         </p:nvSpPr>
@@ -6388,7 +7694,7 @@
       </p:sp>
       <p:sp>
         <p:nvSpPr>
-          <p:cNvPr id="1813704463" name="Shape 23"/>
+          <p:cNvPr id="1695152124" name="Shape 23"/>
           <p:cNvSpPr/>
           <p:nvPr/>
         </p:nvSpPr>
@@ -6419,7 +7725,7 @@
       </p:sp>
       <p:sp>
         <p:nvSpPr>
-          <p:cNvPr id="566545283" name="Text 24"/>
+          <p:cNvPr id="1967910384" name="Text 24"/>
           <p:cNvSpPr/>
           <p:nvPr/>
         </p:nvSpPr>
@@ -6459,7 +7765,7 @@
       </p:sp>
       <p:sp>
         <p:nvSpPr>
-          <p:cNvPr id="170585383" name="Shape 25"/>
+          <p:cNvPr id="580829483" name="Shape 25"/>
           <p:cNvSpPr/>
           <p:nvPr/>
         </p:nvSpPr>
@@ -6490,7 +7796,7 @@
       </p:sp>
       <p:sp>
         <p:nvSpPr>
-          <p:cNvPr id="818929464" name="Text 26"/>
+          <p:cNvPr id="2056828569" name="Text 26"/>
           <p:cNvSpPr/>
           <p:nvPr/>
         </p:nvSpPr>
@@ -6530,7 +7836,7 @@
       </p:sp>
       <p:sp>
         <p:nvSpPr>
-          <p:cNvPr id="1233913165" name="Text 29"/>
+          <p:cNvPr id="250526477" name="Text 29"/>
           <p:cNvSpPr/>
           <p:nvPr/>
         </p:nvSpPr>
@@ -6570,7 +7876,7 @@
       </p:sp>
       <p:sp>
         <p:nvSpPr>
-          <p:cNvPr id="1203271816" name="Text 30"/>
+          <p:cNvPr id="716954257" name="Text 30"/>
           <p:cNvSpPr/>
           <p:nvPr/>
         </p:nvSpPr>
@@ -6610,7 +7916,7 @@
       </p:sp>
       <p:sp>
         <p:nvSpPr>
-          <p:cNvPr id="380547442" name="Shape 5"/>
+          <p:cNvPr id="860723040" name="Shape 5"/>
           <p:cNvSpPr/>
           <p:nvPr/>
         </p:nvSpPr>
@@ -6641,7 +7947,7 @@
       </p:sp>
       <p:sp>
         <p:nvSpPr>
-          <p:cNvPr id="1313177332" name="Text 6"/>
+          <p:cNvPr id="1698502259" name="Text 6"/>
           <p:cNvSpPr/>
           <p:nvPr/>
         </p:nvSpPr>
@@ -6681,7 +7987,7 @@
       </p:sp>
       <p:pic>
         <p:nvPicPr>
-          <p:cNvPr id="7118470" name="Image 1" descr="preencoded.png"/>
+          <p:cNvPr id="1478432166" name="Image 1" descr="preencoded.png"/>
           <p:cNvPicPr>
             <a:picLocks noChangeAspect="1"/>
           </p:cNvPicPr>
@@ -6703,7 +8009,7 @@
       </p:pic>
       <p:sp>
         <p:nvSpPr>
-          <p:cNvPr id="743031638" name="Shape 9"/>
+          <p:cNvPr id="1120355435" name="Shape 9"/>
           <p:cNvSpPr/>
           <p:nvPr/>
         </p:nvSpPr>
@@ -6734,7 +8040,7 @@
       </p:sp>
       <p:sp>
         <p:nvSpPr>
-          <p:cNvPr id="1150475302" name="Text 10"/>
+          <p:cNvPr id="1716099723" name="Text 10"/>
           <p:cNvSpPr/>
           <p:nvPr/>
         </p:nvSpPr>
@@ -6774,7 +8080,7 @@
       </p:sp>
       <p:sp>
         <p:nvSpPr>
-          <p:cNvPr id="429015640" name="Shape 13"/>
+          <p:cNvPr id="2066689011" name="Shape 13"/>
           <p:cNvSpPr/>
           <p:nvPr/>
         </p:nvSpPr>
@@ -6805,7 +8111,7 @@
       </p:sp>
       <p:sp>
         <p:nvSpPr>
-          <p:cNvPr id="1812811135" name="Text 14"/>
+          <p:cNvPr id="1918015364" name="Text 14"/>
           <p:cNvSpPr/>
           <p:nvPr/>
         </p:nvSpPr>
@@ -6845,7 +8151,7 @@
       </p:sp>
       <p:sp>
         <p:nvSpPr>
-          <p:cNvPr id="1640724801" name="Shape 17"/>
+          <p:cNvPr id="1134470314" name="Shape 17"/>
           <p:cNvSpPr/>
           <p:nvPr/>
         </p:nvSpPr>
@@ -6876,7 +8182,7 @@
       </p:sp>
       <p:sp>
         <p:nvSpPr>
-          <p:cNvPr id="1204179055" name="Text 18"/>
+          <p:cNvPr id="348909876" name="Text 18"/>
           <p:cNvSpPr/>
           <p:nvPr/>
         </p:nvSpPr>
@@ -6916,7 +8222,7 @@
       </p:sp>
       <p:sp>
         <p:nvSpPr>
-          <p:cNvPr id="1394532279" name="Shape 21"/>
+          <p:cNvPr id="1769903945" name="Shape 21"/>
           <p:cNvSpPr/>
           <p:nvPr/>
         </p:nvSpPr>
@@ -6947,7 +8253,7 @@
       </p:sp>
       <p:sp>
         <p:nvSpPr>
-          <p:cNvPr id="2002473528" name="Text 22"/>
+          <p:cNvPr id="881599857" name="Text 22"/>
           <p:cNvSpPr/>
           <p:nvPr/>
         </p:nvSpPr>
@@ -6987,7 +8293,7 @@
       </p:sp>
       <p:sp>
         <p:nvSpPr>
-          <p:cNvPr id="309737992" name="Shape 25"/>
+          <p:cNvPr id="2057842100" name="Shape 25"/>
           <p:cNvSpPr/>
           <p:nvPr/>
         </p:nvSpPr>
@@ -7018,7 +8324,7 @@
       </p:sp>
       <p:sp>
         <p:nvSpPr>
-          <p:cNvPr id="2094107702" name="Text 26"/>
+          <p:cNvPr id="1971697162" name="Text 26"/>
           <p:cNvSpPr/>
           <p:nvPr/>
         </p:nvSpPr>
@@ -7072,7 +8378,7 @@
 </p:sld>
 </file>
 
-<file path=ppt/slides/slide15.xml><?xml version="1.0" encoding="utf-8"?>
+<file path=ppt/slides/slide16.xml><?xml version="1.0" encoding="utf-8"?>
 <p:sld xmlns:a="http://schemas.openxmlformats.org/drawingml/2006/main" xmlns:r="http://schemas.openxmlformats.org/officeDocument/2006/relationships" xmlns:p="http://schemas.openxmlformats.org/presentationml/2006/main" xmlns:m="http://schemas.openxmlformats.org/officeDocument/2006/math" xmlns:w="http://schemas.openxmlformats.org/wordprocessingml/2006/main" xmlns:mc="http://schemas.openxmlformats.org/markup-compatibility/2006" showMasterPhAnim="0" showMasterSp="1" show="1">
   <p:cSld name="Slide 12">
     <p:bg>
@@ -7098,7 +8404,7 @@
       </p:grpSpPr>
       <p:sp>
         <p:nvSpPr>
-          <p:cNvPr id="1285912001" name="Text 0"/>
+          <p:cNvPr id="1439298940" name="Text 0"/>
           <p:cNvSpPr/>
           <p:nvPr/>
         </p:nvSpPr>
@@ -7138,7 +8444,7 @@
       </p:sp>
       <p:sp>
         <p:nvSpPr>
-          <p:cNvPr id="893700580" name="Text 1"/>
+          <p:cNvPr id="824159275" name="Text 1"/>
           <p:cNvSpPr/>
           <p:nvPr/>
         </p:nvSpPr>
@@ -7178,7 +8484,7 @@
       </p:sp>
       <p:sp>
         <p:nvSpPr>
-          <p:cNvPr id="1638605303" name="Text 2"/>
+          <p:cNvPr id="1281838237" name="Text 2"/>
           <p:cNvSpPr/>
           <p:nvPr/>
         </p:nvSpPr>
@@ -7218,7 +8524,7 @@
       </p:sp>
       <p:sp>
         <p:nvSpPr>
-          <p:cNvPr id="490641621" name="Shape 3"/>
+          <p:cNvPr id="498463904" name="Shape 3"/>
           <p:cNvSpPr/>
           <p:nvPr/>
         </p:nvSpPr>
@@ -7240,7 +8546,7 @@
       </p:sp>
       <p:sp>
         <p:nvSpPr>
-          <p:cNvPr id="2067826101" name="Text 4"/>
+          <p:cNvPr id="429871338" name="Text 4"/>
           <p:cNvSpPr/>
           <p:nvPr/>
         </p:nvSpPr>
@@ -7280,7 +8586,7 @@
       </p:sp>
       <p:sp>
         <p:nvSpPr>
-          <p:cNvPr id="261400660" name="Shape 5"/>
+          <p:cNvPr id="1171079111" name="Shape 5"/>
           <p:cNvSpPr/>
           <p:nvPr/>
         </p:nvSpPr>
@@ -7302,7 +8608,7 @@
       </p:sp>
       <p:sp>
         <p:nvSpPr>
-          <p:cNvPr id="1886403877" name="Text 6"/>
+          <p:cNvPr id="1916811396" name="Text 6"/>
           <p:cNvSpPr/>
           <p:nvPr/>
         </p:nvSpPr>
@@ -7342,7 +8648,7 @@
       </p:sp>
       <p:sp>
         <p:nvSpPr>
-          <p:cNvPr id="1554400430" name="Shape 7"/>
+          <p:cNvPr id="243487162" name="Shape 7"/>
           <p:cNvSpPr/>
           <p:nvPr/>
         </p:nvSpPr>
@@ -7369,7 +8675,7 @@
       </p:sp>
       <p:pic>
         <p:nvPicPr>
-          <p:cNvPr id="517986320" name="Image 0" descr="preencoded.png"/>
+          <p:cNvPr id="451937739" name="Image 0" descr="preencoded.png"/>
           <p:cNvPicPr>
             <a:picLocks noChangeAspect="1"/>
           </p:cNvPicPr>
@@ -7391,7 +8697,7 @@
       </p:pic>
       <p:sp>
         <p:nvSpPr>
-          <p:cNvPr id="472861076" name="Text 8"/>
+          <p:cNvPr id="853911511" name="Text 8"/>
           <p:cNvSpPr/>
           <p:nvPr/>
         </p:nvSpPr>
@@ -7431,7 +8737,7 @@
       </p:sp>
       <p:sp>
         <p:nvSpPr>
-          <p:cNvPr id="1115625295" name="Shape 9"/>
+          <p:cNvPr id="2020037212" name="Shape 9"/>
           <p:cNvSpPr/>
           <p:nvPr/>
         </p:nvSpPr>
@@ -7453,7 +8759,7 @@
       </p:sp>
       <p:pic>
         <p:nvPicPr>
-          <p:cNvPr id="276619523" name="Image 1" descr="preencoded.png"/>
+          <p:cNvPr id="891404612" name="Image 1" descr="preencoded.png"/>
           <p:cNvPicPr>
             <a:picLocks noChangeAspect="1"/>
           </p:cNvPicPr>
@@ -7475,7 +8781,7 @@
       </p:pic>
       <p:sp>
         <p:nvSpPr>
-          <p:cNvPr id="1357583058" name="Text 10"/>
+          <p:cNvPr id="810216320" name="Text 10"/>
           <p:cNvSpPr/>
           <p:nvPr/>
         </p:nvSpPr>
@@ -7515,7 +8821,7 @@
       </p:sp>
       <p:pic>
         <p:nvPicPr>
-          <p:cNvPr id="1918268937" name="Image 2" descr="preencoded.png"/>
+          <p:cNvPr id="929572377" name="Image 2" descr="preencoded.png"/>
           <p:cNvPicPr>
             <a:picLocks noChangeAspect="1"/>
           </p:cNvPicPr>
@@ -7537,7 +8843,7 @@
       </p:pic>
       <p:sp>
         <p:nvSpPr>
-          <p:cNvPr id="1426842098" name="Shape 11"/>
+          <p:cNvPr id="395278963" name="Shape 11"/>
           <p:cNvSpPr/>
           <p:nvPr/>
         </p:nvSpPr>
@@ -7564,7 +8870,7 @@
       </p:sp>
       <p:pic>
         <p:nvPicPr>
-          <p:cNvPr id="1721207671" name="Image 3" descr="preencoded.png"/>
+          <p:cNvPr id="304928782" name="Image 3" descr="preencoded.png"/>
           <p:cNvPicPr>
             <a:picLocks noChangeAspect="1"/>
           </p:cNvPicPr>
@@ -7586,7 +8892,7 @@
       </p:pic>
       <p:sp>
         <p:nvSpPr>
-          <p:cNvPr id="260710137" name="Text 12"/>
+          <p:cNvPr id="22378187" name="Text 12"/>
           <p:cNvSpPr/>
           <p:nvPr/>
         </p:nvSpPr>
@@ -7626,7 +8932,7 @@
       </p:sp>
       <p:sp>
         <p:nvSpPr>
-          <p:cNvPr id="1805847328" name="Shape 13"/>
+          <p:cNvPr id="1599493564" name="Shape 13"/>
           <p:cNvSpPr/>
           <p:nvPr/>
         </p:nvSpPr>
@@ -7648,7 +8954,7 @@
       </p:sp>
       <p:pic>
         <p:nvPicPr>
-          <p:cNvPr id="1698303158" name="Image 4" descr="preencoded.png"/>
+          <p:cNvPr id="1437264360" name="Image 4" descr="preencoded.png"/>
           <p:cNvPicPr>
             <a:picLocks noChangeAspect="1"/>
           </p:cNvPicPr>
@@ -7670,7 +8976,7 @@
       </p:pic>
       <p:sp>
         <p:nvSpPr>
-          <p:cNvPr id="663634340" name="Text 14"/>
+          <p:cNvPr id="1084547237" name="Text 14"/>
           <p:cNvSpPr/>
           <p:nvPr/>
         </p:nvSpPr>
@@ -7710,7 +9016,7 @@
       </p:sp>
       <p:pic>
         <p:nvPicPr>
-          <p:cNvPr id="1905501594" name="Image 5" descr="preencoded.png"/>
+          <p:cNvPr id="1940846385" name="Image 5" descr="preencoded.png"/>
           <p:cNvPicPr>
             <a:picLocks noChangeAspect="1"/>
           </p:cNvPicPr>
@@ -7732,7 +9038,7 @@
       </p:pic>
       <p:sp>
         <p:nvSpPr>
-          <p:cNvPr id="1633079293" name="Shape 15"/>
+          <p:cNvPr id="1865395899" name="Shape 15"/>
           <p:cNvSpPr/>
           <p:nvPr/>
         </p:nvSpPr>
@@ -7759,7 +9065,7 @@
       </p:sp>
       <p:pic>
         <p:nvPicPr>
-          <p:cNvPr id="1880012600" name="Image 6" descr="preencoded.png"/>
+          <p:cNvPr id="248021853" name="Image 6" descr="preencoded.png"/>
           <p:cNvPicPr>
             <a:picLocks noChangeAspect="1"/>
           </p:cNvPicPr>
@@ -7781,7 +9087,7 @@
       </p:pic>
       <p:sp>
         <p:nvSpPr>
-          <p:cNvPr id="97932304" name="Text 16"/>
+          <p:cNvPr id="866521448" name="Text 16"/>
           <p:cNvSpPr/>
           <p:nvPr/>
         </p:nvSpPr>
@@ -7821,7 +9127,7 @@
       </p:sp>
       <p:sp>
         <p:nvSpPr>
-          <p:cNvPr id="508898561" name="Shape 17"/>
+          <p:cNvPr id="1066573829" name="Shape 17"/>
           <p:cNvSpPr/>
           <p:nvPr/>
         </p:nvSpPr>
@@ -7843,7 +9149,7 @@
       </p:sp>
       <p:pic>
         <p:nvPicPr>
-          <p:cNvPr id="1791838451" name="Image 7" descr="preencoded.png"/>
+          <p:cNvPr id="751430080" name="Image 7" descr="preencoded.png"/>
           <p:cNvPicPr>
             <a:picLocks noChangeAspect="1"/>
           </p:cNvPicPr>
@@ -7865,7 +9171,7 @@
       </p:pic>
       <p:sp>
         <p:nvSpPr>
-          <p:cNvPr id="1498874664" name="Text 18"/>
+          <p:cNvPr id="520589325" name="Text 18"/>
           <p:cNvSpPr/>
           <p:nvPr/>
         </p:nvSpPr>
@@ -7905,7 +9211,7 @@
       </p:sp>
       <p:pic>
         <p:nvPicPr>
-          <p:cNvPr id="847348489" name="Image 8" descr="preencoded.png"/>
+          <p:cNvPr id="1709904245" name="Image 8" descr="preencoded.png"/>
           <p:cNvPicPr>
             <a:picLocks noChangeAspect="1"/>
           </p:cNvPicPr>
@@ -7927,7 +9233,7 @@
       </p:pic>
       <p:sp>
         <p:nvSpPr>
-          <p:cNvPr id="1953729026" name="Shape 19"/>
+          <p:cNvPr id="1482478608" name="Shape 19"/>
           <p:cNvSpPr/>
           <p:nvPr/>
         </p:nvSpPr>
@@ -7954,7 +9260,7 @@
       </p:sp>
       <p:pic>
         <p:nvPicPr>
-          <p:cNvPr id="1931022953" name="Image 9" descr="preencoded.png"/>
+          <p:cNvPr id="1455644422" name="Image 9" descr="preencoded.png"/>
           <p:cNvPicPr>
             <a:picLocks noChangeAspect="1"/>
           </p:cNvPicPr>
@@ -7976,7 +9282,7 @@
       </p:pic>
       <p:sp>
         <p:nvSpPr>
-          <p:cNvPr id="1106649639" name="Text 20"/>
+          <p:cNvPr id="404647472" name="Text 20"/>
           <p:cNvSpPr/>
           <p:nvPr/>
         </p:nvSpPr>
@@ -8016,7 +9322,7 @@
       </p:sp>
       <p:sp>
         <p:nvSpPr>
-          <p:cNvPr id="12158433" name="Shape 21"/>
+          <p:cNvPr id="1129110238" name="Shape 21"/>
           <p:cNvSpPr/>
           <p:nvPr/>
         </p:nvSpPr>
@@ -8038,7 +9344,7 @@
       </p:sp>
       <p:pic>
         <p:nvPicPr>
-          <p:cNvPr id="324649955" name="Image 10" descr="preencoded.png"/>
+          <p:cNvPr id="542607690" name="Image 10" descr="preencoded.png"/>
           <p:cNvPicPr>
             <a:picLocks noChangeAspect="1"/>
           </p:cNvPicPr>
@@ -8060,7 +9366,7 @@
       </p:pic>
       <p:sp>
         <p:nvSpPr>
-          <p:cNvPr id="1161221996" name="Text 22"/>
+          <p:cNvPr id="1219393957" name="Text 22"/>
           <p:cNvSpPr/>
           <p:nvPr/>
         </p:nvSpPr>
@@ -8100,7 +9406,7 @@
       </p:sp>
       <p:pic>
         <p:nvPicPr>
-          <p:cNvPr id="101360355" name="Image 11" descr="preencoded.png"/>
+          <p:cNvPr id="740237523" name="Image 11" descr="preencoded.png"/>
           <p:cNvPicPr>
             <a:picLocks noChangeAspect="1"/>
           </p:cNvPicPr>
@@ -8122,7 +9428,7 @@
       </p:pic>
       <p:sp>
         <p:nvSpPr>
-          <p:cNvPr id="964697904" name="Text 23"/>
+          <p:cNvPr id="64731284" name="Text 23"/>
           <p:cNvSpPr/>
           <p:nvPr/>
         </p:nvSpPr>
@@ -8162,7 +9468,7 @@
       </p:sp>
       <p:sp>
         <p:nvSpPr>
-          <p:cNvPr id="1758896381" name="Text 24"/>
+          <p:cNvPr id="2048627610" name="Text 24"/>
           <p:cNvSpPr/>
           <p:nvPr/>
         </p:nvSpPr>
@@ -8216,7 +9522,7 @@
 </p:sld>
 </file>
 
-<file path=ppt/slides/slide16.xml><?xml version="1.0" encoding="utf-8"?>
+<file path=ppt/slides/slide17.xml><?xml version="1.0" encoding="utf-8"?>
 <p:sld xmlns:a="http://schemas.openxmlformats.org/drawingml/2006/main" xmlns:r="http://schemas.openxmlformats.org/officeDocument/2006/relationships" xmlns:p="http://schemas.openxmlformats.org/presentationml/2006/main" xmlns:m="http://schemas.openxmlformats.org/officeDocument/2006/math" xmlns:w="http://schemas.openxmlformats.org/wordprocessingml/2006/main" xmlns:mc="http://schemas.openxmlformats.org/markup-compatibility/2006" showMasterPhAnim="0" showMasterSp="1" show="1">
   <p:cSld name="Slide 13">
     <p:bg>
@@ -8242,7 +9548,7 @@
       </p:grpSpPr>
       <p:sp>
         <p:nvSpPr>
-          <p:cNvPr id="1054047271" name="Text 0"/>
+          <p:cNvPr id="728689316" name="Text 0"/>
           <p:cNvSpPr/>
           <p:nvPr/>
         </p:nvSpPr>
@@ -8286,7 +9592,7 @@
       </p:sp>
       <p:sp>
         <p:nvSpPr>
-          <p:cNvPr id="1646126991" name="Text 1"/>
+          <p:cNvPr id="1558926275" name="Text 1"/>
           <p:cNvSpPr/>
           <p:nvPr/>
         </p:nvSpPr>
@@ -8330,7 +9636,7 @@
       </p:sp>
       <p:sp>
         <p:nvSpPr>
-          <p:cNvPr id="2088511702" name="Text 2"/>
+          <p:cNvPr id="1906233480" name="Text 2"/>
           <p:cNvSpPr/>
           <p:nvPr/>
         </p:nvSpPr>
@@ -8374,7 +9680,7 @@
       </p:sp>
       <p:sp>
         <p:nvSpPr>
-          <p:cNvPr id="870240640" name="Shape 3"/>
+          <p:cNvPr id="2126190283" name="Shape 3"/>
           <p:cNvSpPr/>
           <p:nvPr/>
         </p:nvSpPr>
@@ -8418,7 +9724,7 @@
       </p:sp>
       <p:pic>
         <p:nvPicPr>
-          <p:cNvPr id="687472282" name="Image 1" descr="preencoded.png"/>
+          <p:cNvPr id="533566196" name="Image 1" descr="preencoded.png"/>
           <p:cNvPicPr>
             <a:picLocks noChangeAspect="1"/>
           </p:cNvPicPr>
@@ -8440,7 +9746,7 @@
       </p:pic>
       <p:sp>
         <p:nvSpPr>
-          <p:cNvPr id="616662899" name="Text 4"/>
+          <p:cNvPr id="1827197375" name="Text 4"/>
           <p:cNvSpPr/>
           <p:nvPr/>
         </p:nvSpPr>
@@ -8484,7 +9790,7 @@
       </p:sp>
       <p:sp>
         <p:nvSpPr>
-          <p:cNvPr id="1458695600" name="Text 5"/>
+          <p:cNvPr id="1169425144" name="Text 5"/>
           <p:cNvSpPr/>
           <p:nvPr/>
         </p:nvSpPr>
@@ -8528,7 +9834,7 @@
       </p:sp>
       <p:pic>
         <p:nvPicPr>
-          <p:cNvPr id="1619896171" name="Image 2" descr="preencoded.png"/>
+          <p:cNvPr id="74329457" name="Image 2" descr="preencoded.png"/>
           <p:cNvPicPr>
             <a:picLocks noChangeAspect="1"/>
           </p:cNvPicPr>
@@ -8550,7 +9856,7 @@
       </p:pic>
       <p:sp>
         <p:nvSpPr>
-          <p:cNvPr id="570923223" name="Shape 6"/>
+          <p:cNvPr id="1528420373" name="Shape 6"/>
           <p:cNvSpPr/>
           <p:nvPr/>
         </p:nvSpPr>
@@ -8594,7 +9900,7 @@
       </p:sp>
       <p:pic>
         <p:nvPicPr>
-          <p:cNvPr id="842850208" name="Image 3" descr="preencoded.png"/>
+          <p:cNvPr id="530321822" name="Image 3" descr="preencoded.png"/>
           <p:cNvPicPr>
             <a:picLocks noChangeAspect="1"/>
           </p:cNvPicPr>
@@ -8616,7 +9922,7 @@
       </p:pic>
       <p:sp>
         <p:nvSpPr>
-          <p:cNvPr id="2096475622" name="Text 7"/>
+          <p:cNvPr id="1249741392" name="Text 7"/>
           <p:cNvSpPr/>
           <p:nvPr/>
         </p:nvSpPr>
@@ -8660,7 +9966,7 @@
       </p:sp>
       <p:sp>
         <p:nvSpPr>
-          <p:cNvPr id="1253703631" name="Text 8"/>
+          <p:cNvPr id="360569309" name="Text 8"/>
           <p:cNvSpPr/>
           <p:nvPr/>
         </p:nvSpPr>
@@ -8704,7 +10010,7 @@
       </p:sp>
       <p:pic>
         <p:nvPicPr>
-          <p:cNvPr id="1102486125" name="Image 4" descr="preencoded.png"/>
+          <p:cNvPr id="1116766572" name="Image 4" descr="preencoded.png"/>
           <p:cNvPicPr>
             <a:picLocks noChangeAspect="1"/>
           </p:cNvPicPr>
@@ -8726,7 +10032,7 @@
       </p:pic>
       <p:sp>
         <p:nvSpPr>
-          <p:cNvPr id="479803" name="Shape 9"/>
+          <p:cNvPr id="449184524" name="Shape 9"/>
           <p:cNvSpPr/>
           <p:nvPr/>
         </p:nvSpPr>
@@ -8770,7 +10076,7 @@
       </p:sp>
       <p:pic>
         <p:nvPicPr>
-          <p:cNvPr id="1433020278" name="Image 5" descr="preencoded.png"/>
+          <p:cNvPr id="1695607077" name="Image 5" descr="preencoded.png"/>
           <p:cNvPicPr>
             <a:picLocks noChangeAspect="1"/>
           </p:cNvPicPr>
@@ -8792,7 +10098,7 @@
       </p:pic>
       <p:sp>
         <p:nvSpPr>
-          <p:cNvPr id="1937971886" name="Text 10"/>
+          <p:cNvPr id="1831057722" name="Text 10"/>
           <p:cNvSpPr/>
           <p:nvPr/>
         </p:nvSpPr>
@@ -8836,7 +10142,7 @@
       </p:sp>
       <p:sp>
         <p:nvSpPr>
-          <p:cNvPr id="1170663096" name="Text 11"/>
+          <p:cNvPr id="1415608223" name="Text 11"/>
           <p:cNvSpPr/>
           <p:nvPr/>
         </p:nvSpPr>
@@ -8880,7 +10186,7 @@
       </p:sp>
       <p:sp>
         <p:nvSpPr>
-          <p:cNvPr id="344153557" name="Text 12"/>
+          <p:cNvPr id="189410177" name="Text 12"/>
           <p:cNvSpPr/>
           <p:nvPr/>
         </p:nvSpPr>
@@ -8924,7 +10230,7 @@
       </p:sp>
       <p:sp>
         <p:nvSpPr>
-          <p:cNvPr id="1296426069" name="Text 13"/>
+          <p:cNvPr id="980179471" name="Text 13"/>
           <p:cNvSpPr/>
           <p:nvPr/>
         </p:nvSpPr>
@@ -8982,7 +10288,7 @@
 </p:sld>
 </file>
 
-<file path=ppt/slides/slide17.xml><?xml version="1.0" encoding="utf-8"?>
+<file path=ppt/slides/slide18.xml><?xml version="1.0" encoding="utf-8"?>
 <p:sld xmlns:a="http://schemas.openxmlformats.org/drawingml/2006/main" xmlns:r="http://schemas.openxmlformats.org/officeDocument/2006/relationships" xmlns:p="http://schemas.openxmlformats.org/presentationml/2006/main" xmlns:m="http://schemas.openxmlformats.org/officeDocument/2006/math" xmlns:w="http://schemas.openxmlformats.org/wordprocessingml/2006/main" xmlns:mc="http://schemas.openxmlformats.org/markup-compatibility/2006" showMasterPhAnim="0" showMasterSp="1" show="1">
   <p:cSld name="Slide 14">
     <p:bg>
@@ -9008,7 +10314,7 @@
       </p:grpSpPr>
       <p:sp>
         <p:nvSpPr>
-          <p:cNvPr id="1523609990" name="Text 0"/>
+          <p:cNvPr id="375715820" name="Text 0"/>
           <p:cNvSpPr/>
           <p:nvPr/>
         </p:nvSpPr>
@@ -9048,7 +10354,7 @@
       </p:sp>
       <p:sp>
         <p:nvSpPr>
-          <p:cNvPr id="1274310721" name="Text 1"/>
+          <p:cNvPr id="299130957" name="Text 1"/>
           <p:cNvSpPr/>
           <p:nvPr/>
         </p:nvSpPr>
@@ -9088,7 +10394,7 @@
       </p:sp>
       <p:sp>
         <p:nvSpPr>
-          <p:cNvPr id="1531671494" name="Text 2"/>
+          <p:cNvPr id="377348448" name="Text 2"/>
           <p:cNvSpPr/>
           <p:nvPr/>
         </p:nvSpPr>
@@ -9128,7 +10434,7 @@
       </p:sp>
       <p:sp>
         <p:nvSpPr>
-          <p:cNvPr id="1483208597" name="Text 18"/>
+          <p:cNvPr id="1813674631" name="Text 18"/>
           <p:cNvSpPr/>
           <p:nvPr/>
         </p:nvSpPr>
@@ -9168,7 +10474,7 @@
       </p:sp>
       <p:sp>
         <p:nvSpPr>
-          <p:cNvPr id="844817201" name="Text 19"/>
+          <p:cNvPr id="432990239" name="Text 19"/>
           <p:cNvSpPr/>
           <p:nvPr/>
         </p:nvSpPr>
@@ -9208,7 +10514,7 @@
       </p:sp>
       <p:sp>
         <p:nvSpPr>
-          <p:cNvPr id="1707347303" name="Shape 6"/>
+          <p:cNvPr id="428568428" name="Shape 6"/>
           <p:cNvSpPr/>
           <p:nvPr/>
         </p:nvSpPr>
@@ -9230,7 +10536,7 @@
       </p:sp>
       <p:pic>
         <p:nvPicPr>
-          <p:cNvPr id="803669266" name="Image 1" descr="preencoded.png"/>
+          <p:cNvPr id="682115370" name="Image 1" descr="preencoded.png"/>
           <p:cNvPicPr>
             <a:picLocks noChangeAspect="1"/>
           </p:cNvPicPr>
@@ -9252,7 +10558,7 @@
       </p:pic>
       <p:sp>
         <p:nvSpPr>
-          <p:cNvPr id="1676541733" name="Text 7"/>
+          <p:cNvPr id="1256586781" name="Text 7"/>
           <p:cNvSpPr/>
           <p:nvPr/>
         </p:nvSpPr>
@@ -9292,7 +10598,7 @@
       </p:sp>
       <p:sp>
         <p:nvSpPr>
-          <p:cNvPr id="279425583" name="Text 8"/>
+          <p:cNvPr id="189112031" name="Text 8"/>
           <p:cNvSpPr/>
           <p:nvPr/>
         </p:nvSpPr>
@@ -9332,7 +10638,7 @@
       </p:sp>
       <p:sp>
         <p:nvSpPr>
-          <p:cNvPr id="675038367" name="Shape 9"/>
+          <p:cNvPr id="395725786" name="Shape 9"/>
           <p:cNvSpPr/>
           <p:nvPr/>
         </p:nvSpPr>
@@ -9354,7 +10660,7 @@
       </p:sp>
       <p:pic>
         <p:nvPicPr>
-          <p:cNvPr id="746707388" name="Image 2" descr="preencoded.png"/>
+          <p:cNvPr id="201040768" name="Image 2" descr="preencoded.png"/>
           <p:cNvPicPr>
             <a:picLocks noChangeAspect="1"/>
           </p:cNvPicPr>
@@ -9376,7 +10682,7 @@
       </p:pic>
       <p:sp>
         <p:nvSpPr>
-          <p:cNvPr id="1066671676" name="Text 10"/>
+          <p:cNvPr id="2144570523" name="Text 10"/>
           <p:cNvSpPr/>
           <p:nvPr/>
         </p:nvSpPr>
@@ -9416,7 +10722,7 @@
       </p:sp>
       <p:sp>
         <p:nvSpPr>
-          <p:cNvPr id="680557794" name="Text 11"/>
+          <p:cNvPr id="450655426" name="Text 11"/>
           <p:cNvSpPr/>
           <p:nvPr/>
         </p:nvSpPr>
@@ -9456,7 +10762,7 @@
       </p:sp>
       <p:sp>
         <p:nvSpPr>
-          <p:cNvPr id="1562000481" name="Shape 12"/>
+          <p:cNvPr id="1462776761" name="Shape 12"/>
           <p:cNvSpPr/>
           <p:nvPr/>
         </p:nvSpPr>
@@ -9478,7 +10784,7 @@
       </p:sp>
       <p:pic>
         <p:nvPicPr>
-          <p:cNvPr id="1043770939" name="Image 3" descr="preencoded.png"/>
+          <p:cNvPr id="727910061" name="Image 3" descr="preencoded.png"/>
           <p:cNvPicPr>
             <a:picLocks noChangeAspect="1"/>
           </p:cNvPicPr>
@@ -9500,7 +10806,7 @@
       </p:pic>
       <p:sp>
         <p:nvSpPr>
-          <p:cNvPr id="1893673707" name="Text 13"/>
+          <p:cNvPr id="291111449" name="Text 13"/>
           <p:cNvSpPr/>
           <p:nvPr/>
         </p:nvSpPr>
@@ -9540,7 +10846,7 @@
       </p:sp>
       <p:sp>
         <p:nvSpPr>
-          <p:cNvPr id="310529238" name="Text 14"/>
+          <p:cNvPr id="1594712884" name="Text 14"/>
           <p:cNvSpPr/>
           <p:nvPr/>
         </p:nvSpPr>
@@ -9580,7 +10886,7 @@
       </p:sp>
       <p:sp>
         <p:nvSpPr>
-          <p:cNvPr id="1844576749" name="Shape 15"/>
+          <p:cNvPr id="173754278" name="Shape 15"/>
           <p:cNvSpPr/>
           <p:nvPr/>
         </p:nvSpPr>
@@ -9602,7 +10908,7 @@
       </p:sp>
       <p:pic>
         <p:nvPicPr>
-          <p:cNvPr id="218024376" name="Image 4" descr="preencoded.png"/>
+          <p:cNvPr id="401250586" name="Image 4" descr="preencoded.png"/>
           <p:cNvPicPr>
             <a:picLocks noChangeAspect="1"/>
           </p:cNvPicPr>
@@ -9624,7 +10930,7 @@
       </p:pic>
       <p:sp>
         <p:nvSpPr>
-          <p:cNvPr id="1960784844" name="Text 16"/>
+          <p:cNvPr id="858719906" name="Text 16"/>
           <p:cNvSpPr/>
           <p:nvPr/>
         </p:nvSpPr>
@@ -9664,7 +10970,7 @@
       </p:sp>
       <p:sp>
         <p:nvSpPr>
-          <p:cNvPr id="870698225" name="Text 17"/>
+          <p:cNvPr id="2052147977" name="Text 17"/>
           <p:cNvSpPr/>
           <p:nvPr/>
         </p:nvSpPr>
@@ -9699,1312 +11005,6 @@
               <a:t>Dashboards surfacing attendance patterns over time.</a:t>
             </a:r>
             <a:endParaRPr lang="en-US" sz="1000"/>
-          </a:p>
-        </p:txBody>
-      </p:sp>
-    </p:spTree>
-  </p:cSld>
-  <p:clrMapOvr>
-    <a:masterClrMapping/>
-  </p:clrMapOvr>
-  <mc:AlternateContent xmlns:mc="http://schemas.openxmlformats.org/markup-compatibility/2006">
-    <mc:Choice xmlns:p159="http://schemas.microsoft.com/office/powerpoint/2015/09/main" xmlns:p14="http://schemas.microsoft.com/office/powerpoint/2010/main" Requires="p159">
-      <p:transition p14:dur="500" advClick="1"/>
-    </mc:Choice>
-    <mc:Fallback>
-      <p:transition advClick="1"/>
-    </mc:Fallback>
-  </mc:AlternateContent>
-</p:sld>
-</file>
-
-<file path=ppt/slides/slide18.xml><?xml version="1.0" encoding="utf-8"?>
-<p:sld xmlns:a="http://schemas.openxmlformats.org/drawingml/2006/main" xmlns:r="http://schemas.openxmlformats.org/officeDocument/2006/relationships" xmlns:p="http://schemas.openxmlformats.org/presentationml/2006/main" xmlns:m="http://schemas.openxmlformats.org/officeDocument/2006/math" xmlns:w="http://schemas.openxmlformats.org/wordprocessingml/2006/main" xmlns:mc="http://schemas.openxmlformats.org/markup-compatibility/2006" showMasterPhAnim="0" showMasterSp="1" show="1">
-  <p:cSld name="Slide 1">
-    <p:bg>
-      <p:bgPr shadeToTitle="0">
-        <a:solidFill>
-          <a:srgbClr val="FFFFFF"/>
-        </a:solidFill>
-      </p:bgPr>
-    </p:bg>
-    <p:spTree>
-      <p:nvGrpSpPr>
-        <p:cNvPr id="1" name=""/>
-        <p:cNvGrpSpPr/>
-        <p:nvPr/>
-      </p:nvGrpSpPr>
-      <p:grpSpPr bwMode="auto">
-        <a:xfrm>
-          <a:off x="0" y="0"/>
-          <a:ext cx="0" cy="0"/>
-          <a:chOff x="0" y="0"/>
-          <a:chExt cx="0" cy="0"/>
-        </a:xfrm>
-      </p:grpSpPr>
-      <p:sp>
-        <p:nvSpPr>
-          <p:cNvPr id="770571526" name="Text 0"/>
-          <p:cNvSpPr/>
-          <p:nvPr/>
-        </p:nvSpPr>
-        <p:spPr bwMode="auto">
-          <a:xfrm>
-            <a:off x="548625" y="411480"/>
-            <a:ext cx="9600959" cy="640080"/>
-          </a:xfrm>
-          <a:prstGeom prst="rect">
-            <a:avLst/>
-          </a:prstGeom>
-          <a:noFill/>
-          <a:ln/>
-        </p:spPr>
-        <p:txBody>
-          <a:bodyPr wrap="square" lIns="0" tIns="0" rIns="0" bIns="0" rtlCol="0" anchor="ctr"/>
-          <a:lstStyle/>
-          <a:p>
-            <a:pPr marL="0" indent="0">
-              <a:buNone/>
-              <a:defRPr/>
-            </a:pPr>
-            <a:r>
-              <a:rPr lang="en-US" sz="3200" b="1" i="0" u="none" strike="noStrike" cap="none" spc="0">
-                <a:solidFill>
-                  <a:srgbClr val="1E2761"/>
-                </a:solidFill>
-                <a:latin typeface="Cambria"/>
-                <a:ea typeface="Cambria"/>
-                <a:cs typeface="Cambria"/>
-              </a:rPr>
-              <a:t>Statistical Data</a:t>
-            </a:r>
-            <a:endParaRPr lang="en-US" sz="3200"/>
-          </a:p>
-        </p:txBody>
-      </p:sp>
-      <p:sp>
-        <p:nvSpPr>
-          <p:cNvPr id="281819236" name="Text 1"/>
-          <p:cNvSpPr/>
-          <p:nvPr/>
-        </p:nvSpPr>
-        <p:spPr bwMode="auto">
-          <a:xfrm>
-            <a:off x="548625" y="960120"/>
-            <a:ext cx="9600959" cy="365760"/>
-          </a:xfrm>
-          <a:prstGeom prst="rect">
-            <a:avLst/>
-          </a:prstGeom>
-          <a:noFill/>
-          <a:ln/>
-        </p:spPr>
-        <p:txBody>
-          <a:bodyPr wrap="square" lIns="0" tIns="0" rIns="0" bIns="0" rtlCol="0" anchor="ctr"/>
-          <a:lstStyle/>
-          <a:p>
-            <a:pPr marL="0" indent="0">
-              <a:buNone/>
-              <a:defRPr/>
-            </a:pPr>
-            <a:r>
-              <a:rPr lang="en-US" sz="1400" i="1">
-                <a:solidFill>
-                  <a:srgbClr val="5B6B93"/>
-                </a:solidFill>
-                <a:latin typeface="Calibri"/>
-                <a:ea typeface="Calibri"/>
-                <a:cs typeface="Calibri"/>
-              </a:rPr>
-              <a:t>Online Attendance System — anti-spoofing &amp; scan-verification metrics</a:t>
-            </a:r>
-            <a:endParaRPr lang="en-US" sz="1400"/>
-          </a:p>
-        </p:txBody>
-      </p:sp>
-      <p:sp>
-        <p:nvSpPr>
-          <p:cNvPr id="2055085229" name="Shape 5"/>
-          <p:cNvSpPr/>
-          <p:nvPr/>
-        </p:nvSpPr>
-        <p:spPr bwMode="auto">
-          <a:xfrm>
-            <a:off x="548625" y="1600200"/>
-            <a:ext cx="3474632" cy="2240280"/>
-          </a:xfrm>
-          <a:prstGeom prst="roundRect">
-            <a:avLst>
-              <a:gd name="adj" fmla="val 3265"/>
-            </a:avLst>
-          </a:prstGeom>
-          <a:solidFill>
-            <a:srgbClr val="F4F6FC"/>
-          </a:solidFill>
-          <a:ln/>
-          <a:effectLst>
-            <a:outerShdw blurRad="101600" dist="25400" dir="5400000" sx="100000" sy="100000" kx="0" ky="0" algn="bl" rotWithShape="0">
-              <a:srgbClr val="1E2761">
-                <a:alpha val="12000"/>
-              </a:srgbClr>
-            </a:outerShdw>
-          </a:effectLst>
-        </p:spPr>
-      </p:sp>
-      <p:sp>
-        <p:nvSpPr>
-          <p:cNvPr id="1896132992" name="Shape 6"/>
-          <p:cNvSpPr/>
-          <p:nvPr/>
-        </p:nvSpPr>
-        <p:spPr bwMode="auto">
-          <a:xfrm>
-            <a:off x="777220" y="1828800"/>
-            <a:ext cx="502907" cy="502920"/>
-          </a:xfrm>
-          <a:prstGeom prst="ellipse">
-            <a:avLst/>
-          </a:prstGeom>
-          <a:solidFill>
-            <a:srgbClr val="1E2761"/>
-          </a:solidFill>
-          <a:ln/>
-        </p:spPr>
-      </p:sp>
-      <p:pic>
-        <p:nvPicPr>
-          <p:cNvPr id="1108003513" name="Image 0" descr="shieldCheck.png"/>
-          <p:cNvPicPr>
-            <a:picLocks noChangeAspect="1"/>
-          </p:cNvPicPr>
-          <p:nvPr/>
-        </p:nvPicPr>
-        <p:blipFill rotWithShape="1">
-          <a:blip r:embed="rId3"/>
-          <a:stretch/>
-        </p:blipFill>
-        <p:spPr bwMode="auto">
-          <a:xfrm>
-            <a:off x="867744" y="1919325"/>
-            <a:ext cx="321860" cy="321868"/>
-          </a:xfrm>
-          <a:prstGeom prst="rect">
-            <a:avLst/>
-          </a:prstGeom>
-        </p:spPr>
-      </p:pic>
-      <p:sp>
-        <p:nvSpPr>
-          <p:cNvPr id="954115414" name="Text 7"/>
-          <p:cNvSpPr/>
-          <p:nvPr/>
-        </p:nvSpPr>
-        <p:spPr bwMode="auto">
-          <a:xfrm>
-            <a:off x="777220" y="2423160"/>
-            <a:ext cx="3017443" cy="548640"/>
-          </a:xfrm>
-          <a:prstGeom prst="rect">
-            <a:avLst/>
-          </a:prstGeom>
-          <a:noFill/>
-          <a:ln/>
-        </p:spPr>
-        <p:txBody>
-          <a:bodyPr wrap="square" lIns="0" tIns="0" rIns="0" bIns="0" rtlCol="0" anchor="ctr"/>
-          <a:lstStyle/>
-          <a:p>
-            <a:pPr marL="0" indent="0">
-              <a:buNone/>
-              <a:defRPr/>
-            </a:pPr>
-            <a:r>
-              <a:rPr lang="en-US" sz="3000" b="1">
-                <a:solidFill>
-                  <a:srgbClr val="1E2761"/>
-                </a:solidFill>
-                <a:latin typeface="Calibri"/>
-                <a:ea typeface="Calibri"/>
-                <a:cs typeface="Calibri"/>
-              </a:rPr>
-              <a:t>98.6%</a:t>
-            </a:r>
-            <a:endParaRPr lang="en-US" sz="3000"/>
-          </a:p>
-        </p:txBody>
-      </p:sp>
-      <p:sp>
-        <p:nvSpPr>
-          <p:cNvPr id="278879778" name="Text 8"/>
-          <p:cNvSpPr/>
-          <p:nvPr/>
-        </p:nvSpPr>
-        <p:spPr bwMode="auto">
-          <a:xfrm>
-            <a:off x="777220" y="2953512"/>
-            <a:ext cx="3017443" cy="320040"/>
-          </a:xfrm>
-          <a:prstGeom prst="rect">
-            <a:avLst/>
-          </a:prstGeom>
-          <a:noFill/>
-          <a:ln/>
-        </p:spPr>
-        <p:txBody>
-          <a:bodyPr wrap="square" lIns="0" tIns="0" rIns="0" bIns="0" rtlCol="0" anchor="ctr"/>
-          <a:lstStyle/>
-          <a:p>
-            <a:pPr marL="0" indent="0">
-              <a:buNone/>
-              <a:defRPr/>
-            </a:pPr>
-            <a:r>
-              <a:rPr lang="en-US" sz="1250" b="1">
-                <a:solidFill>
-                  <a:srgbClr val="1E2761"/>
-                </a:solidFill>
-                <a:latin typeface="Calibri"/>
-                <a:ea typeface="Calibri"/>
-                <a:cs typeface="Calibri"/>
-              </a:rPr>
-              <a:t>Biometric verifications succeed</a:t>
-            </a:r>
-            <a:endParaRPr lang="en-US" sz="1250"/>
-          </a:p>
-        </p:txBody>
-      </p:sp>
-      <p:sp>
-        <p:nvSpPr>
-          <p:cNvPr id="1000732988" name="Text 9"/>
-          <p:cNvSpPr/>
-          <p:nvPr/>
-        </p:nvSpPr>
-        <p:spPr bwMode="auto">
-          <a:xfrm>
-            <a:off x="777220" y="3246120"/>
-            <a:ext cx="3017443" cy="502920"/>
-          </a:xfrm>
-          <a:prstGeom prst="rect">
-            <a:avLst/>
-          </a:prstGeom>
-          <a:noFill/>
-          <a:ln/>
-        </p:spPr>
-        <p:txBody>
-          <a:bodyPr wrap="square" lIns="0" tIns="0" rIns="0" bIns="0" rtlCol="0" anchor="t"/>
-          <a:lstStyle/>
-          <a:p>
-            <a:pPr marL="0" indent="0">
-              <a:buNone/>
-              <a:defRPr/>
-            </a:pPr>
-            <a:r>
-              <a:rPr lang="en-US" sz="950">
-                <a:solidFill>
-                  <a:srgbClr val="5B6B93"/>
-                </a:solidFill>
-                <a:latin typeface="Calibri"/>
-                <a:ea typeface="Calibri"/>
-                <a:cs typeface="Calibri"/>
-              </a:rPr>
-              <a:t>Face ID / fingerprint, signed on-device</a:t>
-            </a:r>
-            <a:endParaRPr lang="en-US" sz="950"/>
-          </a:p>
-        </p:txBody>
-      </p:sp>
-      <p:sp>
-        <p:nvSpPr>
-          <p:cNvPr id="1441007722" name="Shape 10"/>
-          <p:cNvSpPr/>
-          <p:nvPr/>
-        </p:nvSpPr>
-        <p:spPr bwMode="auto">
-          <a:xfrm>
-            <a:off x="4343291" y="1600200"/>
-            <a:ext cx="3474632" cy="2240280"/>
-          </a:xfrm>
-          <a:prstGeom prst="roundRect">
-            <a:avLst>
-              <a:gd name="adj" fmla="val 3265"/>
-            </a:avLst>
-          </a:prstGeom>
-          <a:solidFill>
-            <a:srgbClr val="F4F6FC"/>
-          </a:solidFill>
-          <a:ln/>
-          <a:effectLst>
-            <a:outerShdw blurRad="101600" dist="25400" dir="5400000" sx="100000" sy="100000" kx="0" ky="0" algn="bl" rotWithShape="0">
-              <a:srgbClr val="1E2761">
-                <a:alpha val="12000"/>
-              </a:srgbClr>
-            </a:outerShdw>
-          </a:effectLst>
-        </p:spPr>
-      </p:sp>
-      <p:sp>
-        <p:nvSpPr>
-          <p:cNvPr id="1116976517" name="Shape 11"/>
-          <p:cNvSpPr/>
-          <p:nvPr/>
-        </p:nvSpPr>
-        <p:spPr bwMode="auto">
-          <a:xfrm>
-            <a:off x="4571885" y="1828800"/>
-            <a:ext cx="502907" cy="502920"/>
-          </a:xfrm>
-          <a:prstGeom prst="ellipse">
-            <a:avLst/>
-          </a:prstGeom>
-          <a:solidFill>
-            <a:srgbClr val="1E2761"/>
-          </a:solidFill>
-          <a:ln/>
-        </p:spPr>
-      </p:sp>
-      <p:pic>
-        <p:nvPicPr>
-          <p:cNvPr id="2140804440" name="Image 1" descr="ban.png"/>
-          <p:cNvPicPr>
-            <a:picLocks noChangeAspect="1"/>
-          </p:cNvPicPr>
-          <p:nvPr/>
-        </p:nvPicPr>
-        <p:blipFill rotWithShape="1">
-          <a:blip r:embed="rId4"/>
-          <a:stretch/>
-        </p:blipFill>
-        <p:spPr bwMode="auto">
-          <a:xfrm>
-            <a:off x="4662409" y="1919325"/>
-            <a:ext cx="321860" cy="321868"/>
-          </a:xfrm>
-          <a:prstGeom prst="rect">
-            <a:avLst/>
-          </a:prstGeom>
-        </p:spPr>
-      </p:pic>
-      <p:sp>
-        <p:nvSpPr>
-          <p:cNvPr id="1172952048" name="Text 12"/>
-          <p:cNvSpPr/>
-          <p:nvPr/>
-        </p:nvSpPr>
-        <p:spPr bwMode="auto">
-          <a:xfrm>
-            <a:off x="4571885" y="2423160"/>
-            <a:ext cx="3017443" cy="548640"/>
-          </a:xfrm>
-          <a:prstGeom prst="rect">
-            <a:avLst/>
-          </a:prstGeom>
-          <a:noFill/>
-          <a:ln/>
-        </p:spPr>
-        <p:txBody>
-          <a:bodyPr wrap="square" lIns="0" tIns="0" rIns="0" bIns="0" rtlCol="0" anchor="ctr"/>
-          <a:lstStyle/>
-          <a:p>
-            <a:pPr marL="0" indent="0">
-              <a:buNone/>
-              <a:defRPr/>
-            </a:pPr>
-            <a:r>
-              <a:rPr lang="en-US" sz="3000" b="1">
-                <a:solidFill>
-                  <a:srgbClr val="1E2761"/>
-                </a:solidFill>
-                <a:latin typeface="Calibri"/>
-                <a:ea typeface="Calibri"/>
-                <a:cs typeface="Calibri"/>
-              </a:rPr>
-              <a:t>1.4%</a:t>
-            </a:r>
-            <a:endParaRPr lang="en-US" sz="3000"/>
-          </a:p>
-        </p:txBody>
-      </p:sp>
-      <p:sp>
-        <p:nvSpPr>
-          <p:cNvPr id="1901710812" name="Text 13"/>
-          <p:cNvSpPr/>
-          <p:nvPr/>
-        </p:nvSpPr>
-        <p:spPr bwMode="auto">
-          <a:xfrm>
-            <a:off x="4571885" y="2953512"/>
-            <a:ext cx="3017443" cy="320040"/>
-          </a:xfrm>
-          <a:prstGeom prst="rect">
-            <a:avLst/>
-          </a:prstGeom>
-          <a:noFill/>
-          <a:ln/>
-        </p:spPr>
-        <p:txBody>
-          <a:bodyPr wrap="square" lIns="0" tIns="0" rIns="0" bIns="0" rtlCol="0" anchor="ctr"/>
-          <a:lstStyle/>
-          <a:p>
-            <a:pPr marL="0" indent="0">
-              <a:buNone/>
-              <a:defRPr/>
-            </a:pPr>
-            <a:r>
-              <a:rPr lang="en-US" sz="1250" b="1">
-                <a:solidFill>
-                  <a:srgbClr val="1E2761"/>
-                </a:solidFill>
-                <a:latin typeface="Calibri"/>
-                <a:ea typeface="Calibri"/>
-                <a:cs typeface="Calibri"/>
-              </a:rPr>
-              <a:t>Biometric attempts denied</a:t>
-            </a:r>
-            <a:endParaRPr lang="en-US" sz="1250"/>
-          </a:p>
-        </p:txBody>
-      </p:sp>
-      <p:sp>
-        <p:nvSpPr>
-          <p:cNvPr id="1842363599" name="Text 14"/>
-          <p:cNvSpPr/>
-          <p:nvPr/>
-        </p:nvSpPr>
-        <p:spPr bwMode="auto">
-          <a:xfrm>
-            <a:off x="4571885" y="3246120"/>
-            <a:ext cx="3017443" cy="502920"/>
-          </a:xfrm>
-          <a:prstGeom prst="rect">
-            <a:avLst/>
-          </a:prstGeom>
-          <a:noFill/>
-          <a:ln/>
-        </p:spPr>
-        <p:txBody>
-          <a:bodyPr wrap="square" lIns="0" tIns="0" rIns="0" bIns="0" rtlCol="0" anchor="t"/>
-          <a:lstStyle/>
-          <a:p>
-            <a:pPr marL="0" indent="0">
-              <a:buNone/>
-              <a:defRPr/>
-            </a:pPr>
-            <a:r>
-              <a:rPr lang="en-US" sz="950">
-                <a:solidFill>
-                  <a:srgbClr val="5B6B93"/>
-                </a:solidFill>
-                <a:latin typeface="Calibri"/>
-                <a:ea typeface="Calibri"/>
-                <a:cs typeface="Calibri"/>
-              </a:rPr>
-              <a:t>Failed challenge stops attempt, no DB write</a:t>
-            </a:r>
-            <a:endParaRPr lang="en-US" sz="950"/>
-          </a:p>
-        </p:txBody>
-      </p:sp>
-      <p:sp>
-        <p:nvSpPr>
-          <p:cNvPr id="44770837" name="Shape 15"/>
-          <p:cNvSpPr/>
-          <p:nvPr/>
-        </p:nvSpPr>
-        <p:spPr bwMode="auto">
-          <a:xfrm>
-            <a:off x="8137956" y="1600200"/>
-            <a:ext cx="3474632" cy="2240280"/>
-          </a:xfrm>
-          <a:prstGeom prst="roundRect">
-            <a:avLst>
-              <a:gd name="adj" fmla="val 3265"/>
-            </a:avLst>
-          </a:prstGeom>
-          <a:solidFill>
-            <a:srgbClr val="F4F6FC"/>
-          </a:solidFill>
-          <a:ln/>
-          <a:effectLst>
-            <a:outerShdw blurRad="101600" dist="25400" dir="5400000" sx="100000" sy="100000" kx="0" ky="0" algn="bl" rotWithShape="0">
-              <a:srgbClr val="1E2761">
-                <a:alpha val="12000"/>
-              </a:srgbClr>
-            </a:outerShdw>
-          </a:effectLst>
-        </p:spPr>
-      </p:sp>
-      <p:sp>
-        <p:nvSpPr>
-          <p:cNvPr id="1058309546" name="Shape 16"/>
-          <p:cNvSpPr/>
-          <p:nvPr/>
-        </p:nvSpPr>
-        <p:spPr bwMode="auto">
-          <a:xfrm>
-            <a:off x="8366550" y="1828800"/>
-            <a:ext cx="502907" cy="502920"/>
-          </a:xfrm>
-          <a:prstGeom prst="ellipse">
-            <a:avLst/>
-          </a:prstGeom>
-          <a:solidFill>
-            <a:srgbClr val="1E2761"/>
-          </a:solidFill>
-          <a:ln/>
-        </p:spPr>
-      </p:sp>
-      <p:pic>
-        <p:nvPicPr>
-          <p:cNvPr id="1428647665" name="Image 2" descr="clock.png"/>
-          <p:cNvPicPr>
-            <a:picLocks noChangeAspect="1"/>
-          </p:cNvPicPr>
-          <p:nvPr/>
-        </p:nvPicPr>
-        <p:blipFill rotWithShape="1">
-          <a:blip r:embed="rId5"/>
-          <a:stretch/>
-        </p:blipFill>
-        <p:spPr bwMode="auto">
-          <a:xfrm>
-            <a:off x="8457074" y="1919325"/>
-            <a:ext cx="321860" cy="321868"/>
-          </a:xfrm>
-          <a:prstGeom prst="rect">
-            <a:avLst/>
-          </a:prstGeom>
-        </p:spPr>
-      </p:pic>
-      <p:sp>
-        <p:nvSpPr>
-          <p:cNvPr id="1536826190" name="Text 17"/>
-          <p:cNvSpPr/>
-          <p:nvPr/>
-        </p:nvSpPr>
-        <p:spPr bwMode="auto">
-          <a:xfrm>
-            <a:off x="8366550" y="2423160"/>
-            <a:ext cx="3017443" cy="548640"/>
-          </a:xfrm>
-          <a:prstGeom prst="rect">
-            <a:avLst/>
-          </a:prstGeom>
-          <a:noFill/>
-          <a:ln/>
-        </p:spPr>
-        <p:txBody>
-          <a:bodyPr wrap="square" lIns="0" tIns="0" rIns="0" bIns="0" rtlCol="0" anchor="ctr"/>
-          <a:lstStyle/>
-          <a:p>
-            <a:pPr marL="0" indent="0">
-              <a:buNone/>
-              <a:defRPr/>
-            </a:pPr>
-            <a:r>
-              <a:rPr lang="en-US" sz="3000" b="1">
-                <a:solidFill>
-                  <a:srgbClr val="1E2761"/>
-                </a:solidFill>
-                <a:latin typeface="Calibri"/>
-                <a:ea typeface="Calibri"/>
-                <a:cs typeface="Calibri"/>
-              </a:rPr>
-              <a:t>2.1s</a:t>
-            </a:r>
-            <a:endParaRPr lang="en-US" sz="3000"/>
-          </a:p>
-        </p:txBody>
-      </p:sp>
-      <p:sp>
-        <p:nvSpPr>
-          <p:cNvPr id="539994455" name="Text 18"/>
-          <p:cNvSpPr/>
-          <p:nvPr/>
-        </p:nvSpPr>
-        <p:spPr bwMode="auto">
-          <a:xfrm>
-            <a:off x="8366550" y="2953512"/>
-            <a:ext cx="3017443" cy="320040"/>
-          </a:xfrm>
-          <a:prstGeom prst="rect">
-            <a:avLst/>
-          </a:prstGeom>
-          <a:noFill/>
-          <a:ln/>
-        </p:spPr>
-        <p:txBody>
-          <a:bodyPr wrap="square" lIns="0" tIns="0" rIns="0" bIns="0" rtlCol="0" anchor="ctr"/>
-          <a:lstStyle/>
-          <a:p>
-            <a:pPr marL="0" indent="0">
-              <a:buNone/>
-              <a:defRPr/>
-            </a:pPr>
-            <a:r>
-              <a:rPr lang="en-US" sz="1250" b="1">
-                <a:solidFill>
-                  <a:srgbClr val="1E2761"/>
-                </a:solidFill>
-                <a:latin typeface="Calibri"/>
-                <a:ea typeface="Calibri"/>
-                <a:cs typeface="Calibri"/>
-              </a:rPr>
-              <a:t>Avg. scan-to-tick latency</a:t>
-            </a:r>
-            <a:endParaRPr lang="en-US" sz="1250"/>
-          </a:p>
-        </p:txBody>
-      </p:sp>
-      <p:sp>
-        <p:nvSpPr>
-          <p:cNvPr id="1677647139" name="Text 19"/>
-          <p:cNvSpPr/>
-          <p:nvPr/>
-        </p:nvSpPr>
-        <p:spPr bwMode="auto">
-          <a:xfrm>
-            <a:off x="8366550" y="3246120"/>
-            <a:ext cx="3017443" cy="502920"/>
-          </a:xfrm>
-          <a:prstGeom prst="rect">
-            <a:avLst/>
-          </a:prstGeom>
-          <a:noFill/>
-          <a:ln/>
-        </p:spPr>
-        <p:txBody>
-          <a:bodyPr wrap="square" lIns="0" tIns="0" rIns="0" bIns="0" rtlCol="0" anchor="t"/>
-          <a:lstStyle/>
-          <a:p>
-            <a:pPr marL="0" indent="0">
-              <a:buNone/>
-              <a:defRPr/>
-            </a:pPr>
-            <a:r>
-              <a:rPr lang="en-US" sz="950">
-                <a:solidFill>
-                  <a:srgbClr val="5B6B93"/>
-                </a:solidFill>
-                <a:latin typeface="Calibri"/>
-                <a:ea typeface="Calibri"/>
-                <a:cs typeface="Calibri"/>
-              </a:rPr>
-              <a:t>Within the 3s teacher-screen polling window</a:t>
-            </a:r>
-            <a:endParaRPr lang="en-US" sz="950"/>
-          </a:p>
-        </p:txBody>
-      </p:sp>
-      <p:sp>
-        <p:nvSpPr>
-          <p:cNvPr id="661726934" name="Shape 20"/>
-          <p:cNvSpPr/>
-          <p:nvPr/>
-        </p:nvSpPr>
-        <p:spPr bwMode="auto">
-          <a:xfrm>
-            <a:off x="548625" y="4160518"/>
-            <a:ext cx="3474632" cy="2240280"/>
-          </a:xfrm>
-          <a:prstGeom prst="roundRect">
-            <a:avLst>
-              <a:gd name="adj" fmla="val 3265"/>
-            </a:avLst>
-          </a:prstGeom>
-          <a:solidFill>
-            <a:srgbClr val="F4F6FC"/>
-          </a:solidFill>
-          <a:ln/>
-          <a:effectLst>
-            <a:outerShdw blurRad="101600" dist="25400" dir="5400000" sx="100000" sy="100000" kx="0" ky="0" algn="bl" rotWithShape="0">
-              <a:srgbClr val="1E2761">
-                <a:alpha val="12000"/>
-              </a:srgbClr>
-            </a:outerShdw>
-          </a:effectLst>
-        </p:spPr>
-      </p:sp>
-      <p:sp>
-        <p:nvSpPr>
-          <p:cNvPr id="300100848" name="Shape 21"/>
-          <p:cNvSpPr/>
-          <p:nvPr/>
-        </p:nvSpPr>
-        <p:spPr bwMode="auto">
-          <a:xfrm>
-            <a:off x="777220" y="4389120"/>
-            <a:ext cx="502907" cy="502920"/>
-          </a:xfrm>
-          <a:prstGeom prst="ellipse">
-            <a:avLst/>
-          </a:prstGeom>
-          <a:solidFill>
-            <a:srgbClr val="1E2761"/>
-          </a:solidFill>
-          <a:ln/>
-        </p:spPr>
-      </p:sp>
-      <p:pic>
-        <p:nvPicPr>
-          <p:cNvPr id="611029356" name="Image 3" descr="qr.png"/>
-          <p:cNvPicPr>
-            <a:picLocks noChangeAspect="1"/>
-          </p:cNvPicPr>
-          <p:nvPr/>
-        </p:nvPicPr>
-        <p:blipFill rotWithShape="1">
-          <a:blip r:embed="rId6"/>
-          <a:stretch/>
-        </p:blipFill>
-        <p:spPr bwMode="auto">
-          <a:xfrm>
-            <a:off x="867744" y="4479645"/>
-            <a:ext cx="321860" cy="321868"/>
-          </a:xfrm>
-          <a:prstGeom prst="rect">
-            <a:avLst/>
-          </a:prstGeom>
-        </p:spPr>
-      </p:pic>
-      <p:sp>
-        <p:nvSpPr>
-          <p:cNvPr id="1552030793" name="Text 22"/>
-          <p:cNvSpPr/>
-          <p:nvPr/>
-        </p:nvSpPr>
-        <p:spPr bwMode="auto">
-          <a:xfrm>
-            <a:off x="777220" y="4983480"/>
-            <a:ext cx="3017443" cy="548640"/>
-          </a:xfrm>
-          <a:prstGeom prst="rect">
-            <a:avLst/>
-          </a:prstGeom>
-          <a:noFill/>
-          <a:ln/>
-        </p:spPr>
-        <p:txBody>
-          <a:bodyPr wrap="square" lIns="0" tIns="0" rIns="0" bIns="0" rtlCol="0" anchor="ctr"/>
-          <a:lstStyle/>
-          <a:p>
-            <a:pPr marL="0" indent="0">
-              <a:buNone/>
-              <a:defRPr/>
-            </a:pPr>
-            <a:r>
-              <a:rPr lang="en-US" sz="3000" b="1">
-                <a:solidFill>
-                  <a:srgbClr val="1E2761"/>
-                </a:solidFill>
-                <a:latin typeface="Calibri"/>
-                <a:ea typeface="Calibri"/>
-                <a:cs typeface="Calibri"/>
-              </a:rPr>
-              <a:t>312</a:t>
-            </a:r>
-            <a:endParaRPr lang="en-US" sz="3000"/>
-          </a:p>
-        </p:txBody>
-      </p:sp>
-      <p:sp>
-        <p:nvSpPr>
-          <p:cNvPr id="636995486" name="Text 23"/>
-          <p:cNvSpPr/>
-          <p:nvPr/>
-        </p:nvSpPr>
-        <p:spPr bwMode="auto">
-          <a:xfrm>
-            <a:off x="777220" y="5513832"/>
-            <a:ext cx="3017443" cy="320040"/>
-          </a:xfrm>
-          <a:prstGeom prst="rect">
-            <a:avLst/>
-          </a:prstGeom>
-          <a:noFill/>
-          <a:ln/>
-        </p:spPr>
-        <p:txBody>
-          <a:bodyPr wrap="square" lIns="0" tIns="0" rIns="0" bIns="0" rtlCol="0" anchor="ctr"/>
-          <a:lstStyle/>
-          <a:p>
-            <a:pPr marL="0" indent="0">
-              <a:buNone/>
-              <a:defRPr/>
-            </a:pPr>
-            <a:r>
-              <a:rPr lang="en-US" sz="1250" b="1">
-                <a:solidFill>
-                  <a:srgbClr val="1E2761"/>
-                </a:solidFill>
-                <a:latin typeface="Calibri"/>
-                <a:ea typeface="Calibri"/>
-                <a:cs typeface="Calibri"/>
-              </a:rPr>
-              <a:t>Expired-token scans rejected</a:t>
-            </a:r>
-            <a:endParaRPr lang="en-US" sz="1250"/>
-          </a:p>
-        </p:txBody>
-      </p:sp>
-      <p:sp>
-        <p:nvSpPr>
-          <p:cNvPr id="891331238" name="Text 24"/>
-          <p:cNvSpPr/>
-          <p:nvPr/>
-        </p:nvSpPr>
-        <p:spPr bwMode="auto">
-          <a:xfrm>
-            <a:off x="777220" y="5806440"/>
-            <a:ext cx="3017443" cy="502920"/>
-          </a:xfrm>
-          <a:prstGeom prst="rect">
-            <a:avLst/>
-          </a:prstGeom>
-          <a:noFill/>
-          <a:ln/>
-        </p:spPr>
-        <p:txBody>
-          <a:bodyPr wrap="square" lIns="0" tIns="0" rIns="0" bIns="0" rtlCol="0" anchor="t"/>
-          <a:lstStyle/>
-          <a:p>
-            <a:pPr marL="0" indent="0">
-              <a:buNone/>
-              <a:defRPr/>
-            </a:pPr>
-            <a:r>
-              <a:rPr lang="en-US" sz="950">
-                <a:solidFill>
-                  <a:srgbClr val="5B6B93"/>
-                </a:solidFill>
-                <a:latin typeface="Calibri"/>
-                <a:ea typeface="Calibri"/>
-                <a:cs typeface="Calibri"/>
-              </a:rPr>
-              <a:t>Per 30 days — screenshot / replay attempts blocked</a:t>
-            </a:r>
-            <a:endParaRPr lang="en-US" sz="950"/>
-          </a:p>
-        </p:txBody>
-      </p:sp>
-      <p:sp>
-        <p:nvSpPr>
-          <p:cNvPr id="614556470" name="Shape 25"/>
-          <p:cNvSpPr/>
-          <p:nvPr/>
-        </p:nvSpPr>
-        <p:spPr bwMode="auto">
-          <a:xfrm>
-            <a:off x="4343291" y="4160518"/>
-            <a:ext cx="3474632" cy="2240280"/>
-          </a:xfrm>
-          <a:prstGeom prst="roundRect">
-            <a:avLst>
-              <a:gd name="adj" fmla="val 3265"/>
-            </a:avLst>
-          </a:prstGeom>
-          <a:solidFill>
-            <a:srgbClr val="F4F6FC"/>
-          </a:solidFill>
-          <a:ln/>
-          <a:effectLst>
-            <a:outerShdw blurRad="101600" dist="25400" dir="5400000" sx="100000" sy="100000" kx="0" ky="0" algn="bl" rotWithShape="0">
-              <a:srgbClr val="1E2761">
-                <a:alpha val="12000"/>
-              </a:srgbClr>
-            </a:outerShdw>
-          </a:effectLst>
-        </p:spPr>
-      </p:sp>
-      <p:sp>
-        <p:nvSpPr>
-          <p:cNvPr id="1303912834" name="Shape 26"/>
-          <p:cNvSpPr/>
-          <p:nvPr/>
-        </p:nvSpPr>
-        <p:spPr bwMode="auto">
-          <a:xfrm>
-            <a:off x="4571885" y="4389120"/>
-            <a:ext cx="502907" cy="502920"/>
-          </a:xfrm>
-          <a:prstGeom prst="ellipse">
-            <a:avLst/>
-          </a:prstGeom>
-          <a:solidFill>
-            <a:srgbClr val="1E2761"/>
-          </a:solidFill>
-          <a:ln/>
-        </p:spPr>
-      </p:sp>
-      <p:pic>
-        <p:nvPicPr>
-          <p:cNvPr id="84527758" name="Image 4" descr="phone.png"/>
-          <p:cNvPicPr>
-            <a:picLocks noChangeAspect="1"/>
-          </p:cNvPicPr>
-          <p:nvPr/>
-        </p:nvPicPr>
-        <p:blipFill rotWithShape="1">
-          <a:blip r:embed="rId7"/>
-          <a:stretch/>
-        </p:blipFill>
-        <p:spPr bwMode="auto">
-          <a:xfrm>
-            <a:off x="4662409" y="4479645"/>
-            <a:ext cx="321860" cy="321868"/>
-          </a:xfrm>
-          <a:prstGeom prst="rect">
-            <a:avLst/>
-          </a:prstGeom>
-        </p:spPr>
-      </p:pic>
-      <p:sp>
-        <p:nvSpPr>
-          <p:cNvPr id="1525602589" name="Text 27"/>
-          <p:cNvSpPr/>
-          <p:nvPr/>
-        </p:nvSpPr>
-        <p:spPr bwMode="auto">
-          <a:xfrm>
-            <a:off x="4571885" y="4983480"/>
-            <a:ext cx="3017443" cy="548640"/>
-          </a:xfrm>
-          <a:prstGeom prst="rect">
-            <a:avLst/>
-          </a:prstGeom>
-          <a:noFill/>
-          <a:ln/>
-        </p:spPr>
-        <p:txBody>
-          <a:bodyPr wrap="square" lIns="0" tIns="0" rIns="0" bIns="0" rtlCol="0" anchor="ctr"/>
-          <a:lstStyle/>
-          <a:p>
-            <a:pPr marL="0" indent="0">
-              <a:buNone/>
-              <a:defRPr/>
-            </a:pPr>
-            <a:r>
-              <a:rPr lang="en-US" sz="3000" b="1">
-                <a:solidFill>
-                  <a:srgbClr val="1E2761"/>
-                </a:solidFill>
-                <a:latin typeface="Calibri"/>
-                <a:ea typeface="Calibri"/>
-                <a:cs typeface="Calibri"/>
-              </a:rPr>
-              <a:t>96</a:t>
-            </a:r>
-            <a:endParaRPr lang="en-US" sz="3000"/>
-          </a:p>
-        </p:txBody>
-      </p:sp>
-      <p:sp>
-        <p:nvSpPr>
-          <p:cNvPr id="623868941" name="Text 28"/>
-          <p:cNvSpPr/>
-          <p:nvPr/>
-        </p:nvSpPr>
-        <p:spPr bwMode="auto">
-          <a:xfrm>
-            <a:off x="4571885" y="5513832"/>
-            <a:ext cx="3017443" cy="320040"/>
-          </a:xfrm>
-          <a:prstGeom prst="rect">
-            <a:avLst/>
-          </a:prstGeom>
-          <a:noFill/>
-          <a:ln/>
-        </p:spPr>
-        <p:txBody>
-          <a:bodyPr wrap="square" lIns="0" tIns="0" rIns="0" bIns="0" rtlCol="0" anchor="ctr"/>
-          <a:lstStyle/>
-          <a:p>
-            <a:pPr marL="0" indent="0">
-              <a:buNone/>
-              <a:defRPr/>
-            </a:pPr>
-            <a:r>
-              <a:rPr lang="en-US" sz="1250" b="1">
-                <a:solidFill>
-                  <a:srgbClr val="1E2761"/>
-                </a:solidFill>
-                <a:latin typeface="Calibri"/>
-                <a:ea typeface="Calibri"/>
-                <a:cs typeface="Calibri"/>
-              </a:rPr>
-              <a:t>New device registrations</a:t>
-            </a:r>
-            <a:endParaRPr lang="en-US" sz="1250"/>
-          </a:p>
-        </p:txBody>
-      </p:sp>
-      <p:sp>
-        <p:nvSpPr>
-          <p:cNvPr id="930101415" name="Text 29"/>
-          <p:cNvSpPr/>
-          <p:nvPr/>
-        </p:nvSpPr>
-        <p:spPr bwMode="auto">
-          <a:xfrm>
-            <a:off x="4571885" y="5806440"/>
-            <a:ext cx="3017443" cy="502920"/>
-          </a:xfrm>
-          <a:prstGeom prst="rect">
-            <a:avLst/>
-          </a:prstGeom>
-          <a:noFill/>
-          <a:ln/>
-        </p:spPr>
-        <p:txBody>
-          <a:bodyPr wrap="square" lIns="0" tIns="0" rIns="0" bIns="0" rtlCol="0" anchor="t"/>
-          <a:lstStyle/>
-          <a:p>
-            <a:pPr marL="0" indent="0">
-              <a:buNone/>
-              <a:defRPr/>
-            </a:pPr>
-            <a:r>
-              <a:rPr lang="en-US" sz="950">
-                <a:solidFill>
-                  <a:srgbClr val="5B6B93"/>
-                </a:solidFill>
-                <a:latin typeface="Calibri"/>
-                <a:ea typeface="Calibri"/>
-                <a:cs typeface="Calibri"/>
-              </a:rPr>
-              <a:t>Per 30 days — public key only, first-time use</a:t>
-            </a:r>
-            <a:endParaRPr lang="en-US" sz="950"/>
-          </a:p>
-        </p:txBody>
-      </p:sp>
-      <p:sp>
-        <p:nvSpPr>
-          <p:cNvPr id="2095214932" name="Shape 30"/>
-          <p:cNvSpPr/>
-          <p:nvPr/>
-        </p:nvSpPr>
-        <p:spPr bwMode="auto">
-          <a:xfrm>
-            <a:off x="8137956" y="4160518"/>
-            <a:ext cx="3474632" cy="2240280"/>
-          </a:xfrm>
-          <a:prstGeom prst="roundRect">
-            <a:avLst>
-              <a:gd name="adj" fmla="val 3265"/>
-            </a:avLst>
-          </a:prstGeom>
-          <a:solidFill>
-            <a:srgbClr val="F4F6FC"/>
-          </a:solidFill>
-          <a:ln/>
-          <a:effectLst>
-            <a:outerShdw blurRad="101600" dist="25400" dir="5400000" sx="100000" sy="100000" kx="0" ky="0" algn="bl" rotWithShape="0">
-              <a:srgbClr val="1E2761">
-                <a:alpha val="12000"/>
-              </a:srgbClr>
-            </a:outerShdw>
-          </a:effectLst>
-        </p:spPr>
-      </p:sp>
-      <p:sp>
-        <p:nvSpPr>
-          <p:cNvPr id="123546357" name="Shape 31"/>
-          <p:cNvSpPr/>
-          <p:nvPr/>
-        </p:nvSpPr>
-        <p:spPr bwMode="auto">
-          <a:xfrm>
-            <a:off x="8366550" y="4389120"/>
-            <a:ext cx="502907" cy="502920"/>
-          </a:xfrm>
-          <a:prstGeom prst="ellipse">
-            <a:avLst/>
-          </a:prstGeom>
-          <a:solidFill>
-            <a:srgbClr val="1E2761"/>
-          </a:solidFill>
-          <a:ln/>
-        </p:spPr>
-      </p:sp>
-      <p:pic>
-        <p:nvPicPr>
-          <p:cNvPr id="855635134" name="Image 5" descr="fingerprint.png"/>
-          <p:cNvPicPr>
-            <a:picLocks noChangeAspect="1"/>
-          </p:cNvPicPr>
-          <p:nvPr/>
-        </p:nvPicPr>
-        <p:blipFill rotWithShape="1">
-          <a:blip r:embed="rId8"/>
-          <a:stretch/>
-        </p:blipFill>
-        <p:spPr bwMode="auto">
-          <a:xfrm>
-            <a:off x="8457074" y="4479645"/>
-            <a:ext cx="321860" cy="321868"/>
-          </a:xfrm>
-          <a:prstGeom prst="rect">
-            <a:avLst/>
-          </a:prstGeom>
-        </p:spPr>
-      </p:pic>
-      <p:sp>
-        <p:nvSpPr>
-          <p:cNvPr id="442472138" name="Text 32"/>
-          <p:cNvSpPr/>
-          <p:nvPr/>
-        </p:nvSpPr>
-        <p:spPr bwMode="auto">
-          <a:xfrm>
-            <a:off x="8366550" y="4983480"/>
-            <a:ext cx="3017443" cy="548640"/>
-          </a:xfrm>
-          <a:prstGeom prst="rect">
-            <a:avLst/>
-          </a:prstGeom>
-          <a:noFill/>
-          <a:ln/>
-        </p:spPr>
-        <p:txBody>
-          <a:bodyPr wrap="square" lIns="0" tIns="0" rIns="0" bIns="0" rtlCol="0" anchor="ctr"/>
-          <a:lstStyle/>
-          <a:p>
-            <a:pPr marL="0" indent="0">
-              <a:buNone/>
-              <a:defRPr/>
-            </a:pPr>
-            <a:r>
-              <a:rPr lang="en-US" sz="3000" b="1">
-                <a:solidFill>
-                  <a:srgbClr val="1E2761"/>
-                </a:solidFill>
-                <a:latin typeface="Calibri"/>
-                <a:ea typeface="Calibri"/>
-                <a:cs typeface="Calibri"/>
-              </a:rPr>
-              <a:t>~30s</a:t>
-            </a:r>
-            <a:endParaRPr lang="en-US" sz="3000"/>
-          </a:p>
-        </p:txBody>
-      </p:sp>
-      <p:sp>
-        <p:nvSpPr>
-          <p:cNvPr id="1245626241" name="Text 33"/>
-          <p:cNvSpPr/>
-          <p:nvPr/>
-        </p:nvSpPr>
-        <p:spPr bwMode="auto">
-          <a:xfrm>
-            <a:off x="8366550" y="5513832"/>
-            <a:ext cx="3017443" cy="320040"/>
-          </a:xfrm>
-          <a:prstGeom prst="rect">
-            <a:avLst/>
-          </a:prstGeom>
-          <a:noFill/>
-          <a:ln/>
-        </p:spPr>
-        <p:txBody>
-          <a:bodyPr wrap="square" lIns="0" tIns="0" rIns="0" bIns="0" rtlCol="0" anchor="ctr"/>
-          <a:lstStyle/>
-          <a:p>
-            <a:pPr marL="0" indent="0">
-              <a:buNone/>
-              <a:defRPr/>
-            </a:pPr>
-            <a:r>
-              <a:rPr lang="en-US" sz="1250" b="1">
-                <a:solidFill>
-                  <a:srgbClr val="1E2761"/>
-                </a:solidFill>
-                <a:latin typeface="Calibri"/>
-                <a:ea typeface="Calibri"/>
-                <a:cs typeface="Calibri"/>
-              </a:rPr>
-              <a:t>Token acceptance window</a:t>
-            </a:r>
-            <a:endParaRPr lang="en-US" sz="1250"/>
-          </a:p>
-        </p:txBody>
-      </p:sp>
-      <p:sp>
-        <p:nvSpPr>
-          <p:cNvPr id="1076633589" name="Text 34"/>
-          <p:cNvSpPr/>
-          <p:nvPr/>
-        </p:nvSpPr>
-        <p:spPr bwMode="auto">
-          <a:xfrm>
-            <a:off x="8366550" y="5806440"/>
-            <a:ext cx="3017443" cy="502920"/>
-          </a:xfrm>
-          <a:prstGeom prst="rect">
-            <a:avLst/>
-          </a:prstGeom>
-          <a:noFill/>
-          <a:ln/>
-        </p:spPr>
-        <p:txBody>
-          <a:bodyPr wrap="square" lIns="0" tIns="0" rIns="0" bIns="0" rtlCol="0" anchor="t"/>
-          <a:lstStyle/>
-          <a:p>
-            <a:pPr marL="0" indent="0">
-              <a:buNone/>
-              <a:defRPr/>
-            </a:pPr>
-            <a:r>
-              <a:rPr lang="en-US" sz="950">
-                <a:solidFill>
-                  <a:srgbClr val="5B6B93"/>
-                </a:solidFill>
-                <a:latin typeface="Calibri"/>
-                <a:ea typeface="Calibri"/>
-                <a:cs typeface="Calibri"/>
-              </a:rPr>
-              <a:t>Signed challenge must land inside this window</a:t>
-            </a:r>
-            <a:endParaRPr lang="en-US" sz="950"/>
-          </a:p>
-        </p:txBody>
-      </p:sp>
-      <p:sp>
-        <p:nvSpPr>
-          <p:cNvPr id="665110296" name="Text 35"/>
-          <p:cNvSpPr/>
-          <p:nvPr/>
-        </p:nvSpPr>
-        <p:spPr bwMode="auto">
-          <a:xfrm>
-            <a:off x="548625" y="6510528"/>
-            <a:ext cx="11063963" cy="274320"/>
-          </a:xfrm>
-          <a:prstGeom prst="rect">
-            <a:avLst/>
-          </a:prstGeom>
-          <a:noFill/>
-          <a:ln/>
-        </p:spPr>
-        <p:txBody>
-          <a:bodyPr wrap="square" lIns="0" tIns="0" rIns="0" bIns="0" rtlCol="0" anchor="ctr"/>
-          <a:lstStyle/>
-          <a:p>
-            <a:pPr marL="0" indent="0">
-              <a:buNone/>
-              <a:defRPr/>
-            </a:pPr>
-            <a:r>
-              <a:rPr lang="en-US" sz="900" i="1">
-                <a:solidFill>
-                  <a:srgbClr val="5B6B93"/>
-                </a:solidFill>
-                <a:latin typeface="Calibri"/>
-                <a:ea typeface="Calibri"/>
-                <a:cs typeface="Calibri"/>
-              </a:rPr>
-              <a:t>Illustrative sample metrics shaped around the system's actual QR rotation, polling, and token-window settings — replace with real telemetry once logging is wired up.</a:t>
-            </a:r>
-            <a:endParaRPr lang="en-US" sz="900"/>
           </a:p>
         </p:txBody>
       </p:sp>
@@ -11043,7 +11043,7 @@
       </p:grpSpPr>
       <p:sp>
         <p:nvSpPr>
-          <p:cNvPr id="1934421736" name="TextBox 1"/>
+          <p:cNvPr id="544221760" name="TextBox 1"/>
           <p:cNvSpPr txBox="1"/>
           <p:nvPr/>
         </p:nvSpPr>
@@ -11081,7 +11081,7 @@
       </p:sp>
       <p:sp>
         <p:nvSpPr>
-          <p:cNvPr id="1086882458" name="TextBox 2"/>
+          <p:cNvPr id="674828429" name="TextBox 2"/>
           <p:cNvSpPr txBox="1"/>
           <p:nvPr/>
         </p:nvSpPr>
@@ -11119,7 +11119,7 @@
       </p:sp>
       <p:sp>
         <p:nvSpPr>
-          <p:cNvPr id="1434818395" name="Rounded Rectangle 4"/>
+          <p:cNvPr id="449994373" name="Rounded Rectangle 4"/>
           <p:cNvSpPr/>
           <p:nvPr/>
         </p:nvSpPr>
@@ -11170,7 +11170,7 @@
       </p:sp>
       <p:sp>
         <p:nvSpPr>
-          <p:cNvPr id="1619581304" name="TextBox 5"/>
+          <p:cNvPr id="1682109939" name="TextBox 5"/>
           <p:cNvSpPr txBox="1"/>
           <p:nvPr/>
         </p:nvSpPr>
@@ -11679,7 +11679,7 @@
       </p:sp>
       <p:sp>
         <p:nvSpPr>
-          <p:cNvPr id="712019270" name="TextBox 8"/>
+          <p:cNvPr id="1379104270" name="TextBox 8"/>
           <p:cNvSpPr txBox="1"/>
           <p:nvPr/>
         </p:nvSpPr>
@@ -11717,7 +11717,7 @@
       </p:sp>
       <p:sp>
         <p:nvSpPr>
-          <p:cNvPr id="568084429" name="TextBox 9"/>
+          <p:cNvPr id="2126444179" name="TextBox 9"/>
           <p:cNvSpPr txBox="1"/>
           <p:nvPr/>
         </p:nvSpPr>
@@ -11795,7 +11795,7 @@
       </p:grpSpPr>
       <p:sp>
         <p:nvSpPr>
-          <p:cNvPr id="471435282" name="Text 0"/>
+          <p:cNvPr id="1743072393" name="Text 0"/>
           <p:cNvSpPr/>
           <p:nvPr/>
         </p:nvSpPr>
@@ -11835,7 +11835,7 @@
       </p:sp>
       <p:sp>
         <p:nvSpPr>
-          <p:cNvPr id="1606907400" name="Text 1"/>
+          <p:cNvPr id="2113247117" name="Text 1"/>
           <p:cNvSpPr/>
           <p:nvPr/>
         </p:nvSpPr>
@@ -11875,7 +11875,7 @@
       </p:sp>
       <p:sp>
         <p:nvSpPr>
-          <p:cNvPr id="711921537" name="Text 2"/>
+          <p:cNvPr id="1510227987" name="Text 2"/>
           <p:cNvSpPr/>
           <p:nvPr/>
         </p:nvSpPr>
@@ -11915,7 +11915,7 @@
       </p:sp>
       <p:sp>
         <p:nvSpPr>
-          <p:cNvPr id="1646907801" name="Shape 3"/>
+          <p:cNvPr id="1146599035" name="Shape 3"/>
           <p:cNvSpPr/>
           <p:nvPr/>
         </p:nvSpPr>
@@ -11949,7 +11949,7 @@
       </p:sp>
       <p:pic>
         <p:nvPicPr>
-          <p:cNvPr id="86931273" name="Image 0" descr="preencoded.png"/>
+          <p:cNvPr id="1404292662" name="Image 0" descr="preencoded.png"/>
           <p:cNvPicPr>
             <a:picLocks noChangeAspect="1"/>
           </p:cNvPicPr>
@@ -11971,7 +11971,7 @@
       </p:pic>
       <p:sp>
         <p:nvSpPr>
-          <p:cNvPr id="1774036128" name="Text 4"/>
+          <p:cNvPr id="648603340" name="Text 4"/>
           <p:cNvSpPr/>
           <p:nvPr/>
         </p:nvSpPr>
@@ -12011,7 +12011,7 @@
       </p:sp>
       <p:sp>
         <p:nvSpPr>
-          <p:cNvPr id="2108733100" name="Text 5"/>
+          <p:cNvPr id="238804358" name="Text 5"/>
           <p:cNvSpPr/>
           <p:nvPr/>
         </p:nvSpPr>
@@ -12051,7 +12051,7 @@
       </p:sp>
       <p:sp>
         <p:nvSpPr>
-          <p:cNvPr id="626331722" name="Shape 8"/>
+          <p:cNvPr id="1155357617" name="Shape 8"/>
           <p:cNvSpPr/>
           <p:nvPr/>
         </p:nvSpPr>
@@ -12085,7 +12085,7 @@
       </p:sp>
       <p:pic>
         <p:nvPicPr>
-          <p:cNvPr id="840273537" name="Image 1" descr="preencoded.png"/>
+          <p:cNvPr id="2025444558" name="Image 1" descr="preencoded.png"/>
           <p:cNvPicPr>
             <a:picLocks noChangeAspect="1"/>
           </p:cNvPicPr>
@@ -12107,7 +12107,7 @@
       </p:pic>
       <p:sp>
         <p:nvSpPr>
-          <p:cNvPr id="1774698113" name="Text 9"/>
+          <p:cNvPr id="1064283310" name="Text 9"/>
           <p:cNvSpPr/>
           <p:nvPr/>
         </p:nvSpPr>
@@ -12147,7 +12147,7 @@
       </p:sp>
       <p:sp>
         <p:nvSpPr>
-          <p:cNvPr id="752051687" name="Text 10"/>
+          <p:cNvPr id="1475592536" name="Text 10"/>
           <p:cNvSpPr/>
           <p:nvPr/>
         </p:nvSpPr>
@@ -12187,7 +12187,7 @@
       </p:sp>
       <p:sp>
         <p:nvSpPr>
-          <p:cNvPr id="1551712627" name="Shape 13"/>
+          <p:cNvPr id="1447437080" name="Shape 13"/>
           <p:cNvSpPr/>
           <p:nvPr/>
         </p:nvSpPr>
@@ -12221,7 +12221,7 @@
       </p:sp>
       <p:pic>
         <p:nvPicPr>
-          <p:cNvPr id="340403731" name="Image 2" descr="preencoded.png"/>
+          <p:cNvPr id="1760216390" name="Image 2" descr="preencoded.png"/>
           <p:cNvPicPr>
             <a:picLocks noChangeAspect="1"/>
           </p:cNvPicPr>
@@ -12243,7 +12243,7 @@
       </p:pic>
       <p:sp>
         <p:nvSpPr>
-          <p:cNvPr id="1954639323" name="Text 14"/>
+          <p:cNvPr id="753975324" name="Text 14"/>
           <p:cNvSpPr/>
           <p:nvPr/>
         </p:nvSpPr>
@@ -12283,7 +12283,7 @@
       </p:sp>
       <p:sp>
         <p:nvSpPr>
-          <p:cNvPr id="1006282810" name="Text 15"/>
+          <p:cNvPr id="518258992" name="Text 15"/>
           <p:cNvSpPr/>
           <p:nvPr/>
         </p:nvSpPr>
@@ -12323,7 +12323,7 @@
       </p:sp>
       <p:sp>
         <p:nvSpPr>
-          <p:cNvPr id="395480885" name="Shape 18"/>
+          <p:cNvPr id="578646222" name="Shape 18"/>
           <p:cNvSpPr/>
           <p:nvPr/>
         </p:nvSpPr>
@@ -12357,7 +12357,7 @@
       </p:sp>
       <p:pic>
         <p:nvPicPr>
-          <p:cNvPr id="383931687" name="Image 3" descr="preencoded.png"/>
+          <p:cNvPr id="958326864" name="Image 3" descr="preencoded.png"/>
           <p:cNvPicPr>
             <a:picLocks noChangeAspect="1"/>
           </p:cNvPicPr>
@@ -12379,7 +12379,7 @@
       </p:pic>
       <p:sp>
         <p:nvSpPr>
-          <p:cNvPr id="1439619173" name="Text 19"/>
+          <p:cNvPr id="98516880" name="Text 19"/>
           <p:cNvSpPr/>
           <p:nvPr/>
         </p:nvSpPr>
@@ -12419,7 +12419,7 @@
       </p:sp>
       <p:sp>
         <p:nvSpPr>
-          <p:cNvPr id="1633304898" name="Text 20"/>
+          <p:cNvPr id="761041458" name="Text 20"/>
           <p:cNvSpPr/>
           <p:nvPr/>
         </p:nvSpPr>
@@ -12459,7 +12459,7 @@
       </p:sp>
       <p:sp>
         <p:nvSpPr>
-          <p:cNvPr id="219139181" name="Text 23"/>
+          <p:cNvPr id="570608594" name="Text 23"/>
           <p:cNvSpPr/>
           <p:nvPr/>
         </p:nvSpPr>
@@ -12499,7 +12499,7 @@
       </p:sp>
       <p:sp>
         <p:nvSpPr>
-          <p:cNvPr id="231654674" name="Text 24"/>
+          <p:cNvPr id="225484445" name="Text 24"/>
           <p:cNvSpPr/>
           <p:nvPr/>
         </p:nvSpPr>
@@ -12579,7 +12579,7 @@
       </p:grpSpPr>
       <p:pic>
         <p:nvPicPr>
-          <p:cNvPr id="171853624" name="Image 0" descr="preencoded.png"/>
+          <p:cNvPr id="470392184" name="Image 0" descr="preencoded.png"/>
           <p:cNvPicPr>
             <a:picLocks noChangeAspect="1"/>
           </p:cNvPicPr>
@@ -12601,7 +12601,7 @@
       </p:pic>
       <p:pic>
         <p:nvPicPr>
-          <p:cNvPr id="1840549232" name="Image 1" descr="preencoded.png"/>
+          <p:cNvPr id="789012514" name="Image 1" descr="preencoded.png"/>
           <p:cNvPicPr>
             <a:picLocks noChangeAspect="1"/>
           </p:cNvPicPr>
@@ -12623,7 +12623,7 @@
       </p:pic>
       <p:sp>
         <p:nvSpPr>
-          <p:cNvPr id="276776478" name="Text 0"/>
+          <p:cNvPr id="614177658" name="Text 0"/>
           <p:cNvSpPr/>
           <p:nvPr/>
         </p:nvSpPr>
@@ -12663,7 +12663,7 @@
       </p:sp>
       <p:sp>
         <p:nvSpPr>
-          <p:cNvPr id="2032159316" name="Text 1"/>
+          <p:cNvPr id="83970735" name="Text 1"/>
           <p:cNvSpPr/>
           <p:nvPr/>
         </p:nvSpPr>
@@ -12703,7 +12703,7 @@
       </p:sp>
       <p:sp>
         <p:nvSpPr>
-          <p:cNvPr id="75279095" name="Text 2"/>
+          <p:cNvPr id="1508573244" name="Text 2"/>
           <p:cNvSpPr/>
           <p:nvPr/>
         </p:nvSpPr>
@@ -12743,7 +12743,7 @@
       </p:sp>
       <p:sp>
         <p:nvSpPr>
-          <p:cNvPr id="1384715732" name="Text 3"/>
+          <p:cNvPr id="141999341" name="Text 3"/>
           <p:cNvSpPr/>
           <p:nvPr/>
         </p:nvSpPr>
@@ -12783,7 +12783,7 @@
       </p:sp>
       <p:sp>
         <p:nvSpPr>
-          <p:cNvPr id="485681127" name="Text 4"/>
+          <p:cNvPr id="2139993110" name="Text 4"/>
           <p:cNvSpPr/>
           <p:nvPr/>
         </p:nvSpPr>
@@ -12863,7 +12863,7 @@
       </p:grpSpPr>
       <p:sp>
         <p:nvSpPr>
-          <p:cNvPr id="1178967203" name="Text 0"/>
+          <p:cNvPr id="748588889" name="Text 0"/>
           <p:cNvSpPr/>
           <p:nvPr/>
         </p:nvSpPr>
@@ -12903,7 +12903,7 @@
       </p:sp>
       <p:sp>
         <p:nvSpPr>
-          <p:cNvPr id="1610116212" name="Text 1"/>
+          <p:cNvPr id="1617044189" name="Text 1"/>
           <p:cNvSpPr/>
           <p:nvPr/>
         </p:nvSpPr>
@@ -12943,7 +12943,7 @@
       </p:sp>
       <p:sp>
         <p:nvSpPr>
-          <p:cNvPr id="665291964" name="Text 2"/>
+          <p:cNvPr id="980188380" name="Text 2"/>
           <p:cNvSpPr/>
           <p:nvPr/>
         </p:nvSpPr>
@@ -12983,7 +12983,7 @@
       </p:sp>
       <p:sp>
         <p:nvSpPr>
-          <p:cNvPr id="339851946" name="Shape 3"/>
+          <p:cNvPr id="1459484636" name="Shape 3"/>
           <p:cNvSpPr/>
           <p:nvPr/>
         </p:nvSpPr>
@@ -13017,7 +13017,7 @@
       </p:sp>
       <p:pic>
         <p:nvPicPr>
-          <p:cNvPr id="1570914821" name="Image 0" descr="preencoded.png"/>
+          <p:cNvPr id="876281777" name="Image 0" descr="preencoded.png"/>
           <p:cNvPicPr>
             <a:picLocks noChangeAspect="1"/>
           </p:cNvPicPr>
@@ -13039,7 +13039,7 @@
       </p:pic>
       <p:sp>
         <p:nvSpPr>
-          <p:cNvPr id="330921349" name="Text 4"/>
+          <p:cNvPr id="1667949874" name="Text 4"/>
           <p:cNvSpPr/>
           <p:nvPr/>
         </p:nvSpPr>
@@ -13079,7 +13079,7 @@
       </p:sp>
       <p:sp>
         <p:nvSpPr>
-          <p:cNvPr id="495241576" name="Text 5"/>
+          <p:cNvPr id="926273862" name="Text 5"/>
           <p:cNvSpPr/>
           <p:nvPr/>
         </p:nvSpPr>
@@ -13119,7 +13119,7 @@
       </p:sp>
       <p:sp>
         <p:nvSpPr>
-          <p:cNvPr id="260698607" name="Shape 6"/>
+          <p:cNvPr id="94985335" name="Shape 6"/>
           <p:cNvSpPr/>
           <p:nvPr/>
         </p:nvSpPr>
@@ -13153,7 +13153,7 @@
       </p:sp>
       <p:pic>
         <p:nvPicPr>
-          <p:cNvPr id="623018795" name="Image 1" descr="preencoded.png"/>
+          <p:cNvPr id="716375565" name="Image 1" descr="preencoded.png"/>
           <p:cNvPicPr>
             <a:picLocks noChangeAspect="1"/>
           </p:cNvPicPr>
@@ -13175,7 +13175,7 @@
       </p:pic>
       <p:sp>
         <p:nvSpPr>
-          <p:cNvPr id="1736900285" name="Text 7"/>
+          <p:cNvPr id="1734678212" name="Text 7"/>
           <p:cNvSpPr/>
           <p:nvPr/>
         </p:nvSpPr>
@@ -13215,7 +13215,7 @@
       </p:sp>
       <p:sp>
         <p:nvSpPr>
-          <p:cNvPr id="1433977464" name="Text 8"/>
+          <p:cNvPr id="227258211" name="Text 8"/>
           <p:cNvSpPr/>
           <p:nvPr/>
         </p:nvSpPr>
@@ -13255,7 +13255,7 @@
       </p:sp>
       <p:sp>
         <p:nvSpPr>
-          <p:cNvPr id="500675922" name="Shape 9"/>
+          <p:cNvPr id="274713272" name="Shape 9"/>
           <p:cNvSpPr/>
           <p:nvPr/>
         </p:nvSpPr>
@@ -13289,7 +13289,7 @@
       </p:sp>
       <p:pic>
         <p:nvPicPr>
-          <p:cNvPr id="1925193860" name="Image 2" descr="preencoded.png"/>
+          <p:cNvPr id="460457916" name="Image 2" descr="preencoded.png"/>
           <p:cNvPicPr>
             <a:picLocks noChangeAspect="1"/>
           </p:cNvPicPr>
@@ -13311,7 +13311,7 @@
       </p:pic>
       <p:sp>
         <p:nvSpPr>
-          <p:cNvPr id="1027190676" name="Text 10"/>
+          <p:cNvPr id="607474422" name="Text 10"/>
           <p:cNvSpPr/>
           <p:nvPr/>
         </p:nvSpPr>
@@ -13351,7 +13351,7 @@
       </p:sp>
       <p:sp>
         <p:nvSpPr>
-          <p:cNvPr id="2141545815" name="Text 11"/>
+          <p:cNvPr id="131291268" name="Text 11"/>
           <p:cNvSpPr/>
           <p:nvPr/>
         </p:nvSpPr>
@@ -13391,7 +13391,7 @@
       </p:sp>
       <p:sp>
         <p:nvSpPr>
-          <p:cNvPr id="950487944" name="Shape 12"/>
+          <p:cNvPr id="577871412" name="Shape 12"/>
           <p:cNvSpPr/>
           <p:nvPr/>
         </p:nvSpPr>
@@ -13425,7 +13425,7 @@
       </p:sp>
       <p:pic>
         <p:nvPicPr>
-          <p:cNvPr id="910767702" name="Image 3" descr="preencoded.png"/>
+          <p:cNvPr id="1253966303" name="Image 3" descr="preencoded.png"/>
           <p:cNvPicPr>
             <a:picLocks noChangeAspect="1"/>
           </p:cNvPicPr>
@@ -13447,7 +13447,7 @@
       </p:pic>
       <p:sp>
         <p:nvSpPr>
-          <p:cNvPr id="49783150" name="Text 13"/>
+          <p:cNvPr id="345463778" name="Text 13"/>
           <p:cNvSpPr/>
           <p:nvPr/>
         </p:nvSpPr>
@@ -13487,7 +13487,7 @@
       </p:sp>
       <p:sp>
         <p:nvSpPr>
-          <p:cNvPr id="600860965" name="Text 14"/>
+          <p:cNvPr id="1035091534" name="Text 14"/>
           <p:cNvSpPr/>
           <p:nvPr/>
         </p:nvSpPr>
@@ -13527,7 +13527,7 @@
       </p:sp>
       <p:sp>
         <p:nvSpPr>
-          <p:cNvPr id="965646269" name="Text 15"/>
+          <p:cNvPr id="831371258" name="Text 15"/>
           <p:cNvSpPr/>
           <p:nvPr/>
         </p:nvSpPr>
@@ -13567,7 +13567,7 @@
       </p:sp>
       <p:sp>
         <p:nvSpPr>
-          <p:cNvPr id="1020000839" name="Text 16"/>
+          <p:cNvPr id="342412038" name="Text 16"/>
           <p:cNvSpPr/>
           <p:nvPr/>
         </p:nvSpPr>
@@ -13647,7 +13647,7 @@
       </p:grpSpPr>
       <p:pic>
         <p:nvPicPr>
-          <p:cNvPr id="1513590726" name=""/>
+          <p:cNvPr id="413862592" name=""/>
           <p:cNvPicPr>
             <a:picLocks noChangeAspect="1"/>
           </p:cNvPicPr>
@@ -13669,7 +13669,7 @@
       </p:pic>
       <p:sp>
         <p:nvSpPr>
-          <p:cNvPr id="869001763" name="Text 0"/>
+          <p:cNvPr id="1123905568" name="Text 0"/>
           <p:cNvSpPr/>
           <p:nvPr/>
         </p:nvSpPr>
@@ -13709,7 +13709,7 @@
       </p:sp>
       <p:sp>
         <p:nvSpPr>
-          <p:cNvPr id="1897212199" name="Text 1"/>
+          <p:cNvPr id="1060588871" name="Text 1"/>
           <p:cNvSpPr/>
           <p:nvPr/>
         </p:nvSpPr>
@@ -13749,7 +13749,7 @@
       </p:sp>
       <p:sp>
         <p:nvSpPr>
-          <p:cNvPr id="1679535878" name="Text 2"/>
+          <p:cNvPr id="1489425707" name="Text 2"/>
           <p:cNvSpPr/>
           <p:nvPr/>
         </p:nvSpPr>
@@ -13789,7 +13789,7 @@
       </p:sp>
       <p:pic>
         <p:nvPicPr>
-          <p:cNvPr id="605855496" name="Image 0" descr="preencoded.png"/>
+          <p:cNvPr id="1968442079" name="Image 0" descr="preencoded.png"/>
           <p:cNvPicPr>
             <a:picLocks noChangeAspect="1"/>
           </p:cNvPicPr>
@@ -13811,7 +13811,7 @@
       </p:pic>
       <p:sp>
         <p:nvSpPr>
-          <p:cNvPr id="1002761141" name="Text 3"/>
+          <p:cNvPr id="914761796" name="Text 3"/>
           <p:cNvSpPr/>
           <p:nvPr/>
         </p:nvSpPr>
@@ -13851,7 +13851,7 @@
       </p:sp>
       <p:sp>
         <p:nvSpPr>
-          <p:cNvPr id="203749477" name="Text 4"/>
+          <p:cNvPr id="1203256822" name="Text 4"/>
           <p:cNvSpPr/>
           <p:nvPr/>
         </p:nvSpPr>
@@ -13891,7 +13891,7 @@
       </p:sp>
       <p:pic>
         <p:nvPicPr>
-          <p:cNvPr id="1306182497" name="Image 1" descr="preencoded.png"/>
+          <p:cNvPr id="1859148193" name="Image 1" descr="preencoded.png"/>
           <p:cNvPicPr>
             <a:picLocks noChangeAspect="1"/>
           </p:cNvPicPr>
@@ -13913,7 +13913,7 @@
       </p:pic>
       <p:sp>
         <p:nvSpPr>
-          <p:cNvPr id="1316426639" name="Text 5"/>
+          <p:cNvPr id="2096361209" name="Text 5"/>
           <p:cNvSpPr/>
           <p:nvPr/>
         </p:nvSpPr>
@@ -13953,7 +13953,7 @@
       </p:sp>
       <p:sp>
         <p:nvSpPr>
-          <p:cNvPr id="101993688" name="Text 6"/>
+          <p:cNvPr id="1089469360" name="Text 6"/>
           <p:cNvSpPr/>
           <p:nvPr/>
         </p:nvSpPr>
@@ -13993,7 +13993,7 @@
       </p:sp>
       <p:pic>
         <p:nvPicPr>
-          <p:cNvPr id="1720737438" name="Image 2" descr="preencoded.png"/>
+          <p:cNvPr id="718424869" name="Image 2" descr="preencoded.png"/>
           <p:cNvPicPr>
             <a:picLocks noChangeAspect="1"/>
           </p:cNvPicPr>
@@ -14015,7 +14015,7 @@
       </p:pic>
       <p:sp>
         <p:nvSpPr>
-          <p:cNvPr id="981073014" name="Text 7"/>
+          <p:cNvPr id="1293893826" name="Text 7"/>
           <p:cNvSpPr/>
           <p:nvPr/>
         </p:nvSpPr>
@@ -14055,7 +14055,7 @@
       </p:sp>
       <p:sp>
         <p:nvSpPr>
-          <p:cNvPr id="1133167711" name="Text 8"/>
+          <p:cNvPr id="1837209099" name="Text 8"/>
           <p:cNvSpPr/>
           <p:nvPr/>
         </p:nvSpPr>
@@ -14095,7 +14095,7 @@
       </p:sp>
       <p:pic>
         <p:nvPicPr>
-          <p:cNvPr id="1098158309" name="Image 3" descr="preencoded.png"/>
+          <p:cNvPr id="395513888" name="Image 3" descr="preencoded.png"/>
           <p:cNvPicPr>
             <a:picLocks noChangeAspect="1"/>
           </p:cNvPicPr>
@@ -14117,7 +14117,7 @@
       </p:pic>
       <p:sp>
         <p:nvSpPr>
-          <p:cNvPr id="1288348723" name="Text 9"/>
+          <p:cNvPr id="1939097285" name="Text 9"/>
           <p:cNvSpPr/>
           <p:nvPr/>
         </p:nvSpPr>
@@ -14157,7 +14157,7 @@
       </p:sp>
       <p:sp>
         <p:nvSpPr>
-          <p:cNvPr id="673165946" name="Text 10"/>
+          <p:cNvPr id="478830358" name="Text 10"/>
           <p:cNvSpPr/>
           <p:nvPr/>
         </p:nvSpPr>
@@ -14197,7 +14197,7 @@
       </p:sp>
       <p:sp>
         <p:nvSpPr>
-          <p:cNvPr id="522706650" name="Shape 12"/>
+          <p:cNvPr id="717969427" name="Shape 12"/>
           <p:cNvSpPr/>
           <p:nvPr/>
         </p:nvSpPr>
@@ -14219,7 +14219,7 @@
       </p:sp>
       <p:sp>
         <p:nvSpPr>
-          <p:cNvPr id="584087316" name="Shape 13"/>
+          <p:cNvPr id="950620874" name="Shape 13"/>
           <p:cNvSpPr/>
           <p:nvPr/>
         </p:nvSpPr>
@@ -14239,7 +14239,7 @@
       </p:sp>
       <p:sp>
         <p:nvSpPr>
-          <p:cNvPr id="1964514943" name="Shape 14"/>
+          <p:cNvPr id="1725425309" name="Shape 14"/>
           <p:cNvSpPr/>
           <p:nvPr/>
         </p:nvSpPr>
@@ -14259,7 +14259,7 @@
       </p:sp>
       <p:sp>
         <p:nvSpPr>
-          <p:cNvPr id="845873421" name="Shape 15"/>
+          <p:cNvPr id="1779803681" name="Shape 15"/>
           <p:cNvSpPr/>
           <p:nvPr/>
         </p:nvSpPr>
@@ -14279,7 +14279,7 @@
       </p:sp>
       <p:sp>
         <p:nvSpPr>
-          <p:cNvPr id="1026357224" name="Shape 16"/>
+          <p:cNvPr id="878402089" name="Shape 16"/>
           <p:cNvSpPr/>
           <p:nvPr/>
         </p:nvSpPr>
@@ -14299,7 +14299,7 @@
       </p:sp>
       <p:sp>
         <p:nvSpPr>
-          <p:cNvPr id="1588744993" name="Text 17"/>
+          <p:cNvPr id="142564488" name="Text 17"/>
           <p:cNvSpPr/>
           <p:nvPr/>
         </p:nvSpPr>
@@ -14339,7 +14339,7 @@
       </p:sp>
       <p:sp>
         <p:nvSpPr>
-          <p:cNvPr id="1851018819" name="Text 48"/>
+          <p:cNvPr id="638752837" name="Text 48"/>
           <p:cNvSpPr/>
           <p:nvPr/>
         </p:nvSpPr>
@@ -14379,7 +14379,7 @@
       </p:sp>
       <p:sp>
         <p:nvSpPr>
-          <p:cNvPr id="1716060866" name="Text 49"/>
+          <p:cNvPr id="1755165774" name="Text 49"/>
           <p:cNvSpPr/>
           <p:nvPr/>
         </p:nvSpPr>
@@ -14459,7 +14459,7 @@
       </p:grpSpPr>
       <p:sp>
         <p:nvSpPr>
-          <p:cNvPr id="413608105" name="Text 0"/>
+          <p:cNvPr id="955528110" name="Text 0"/>
           <p:cNvSpPr/>
           <p:nvPr/>
         </p:nvSpPr>
@@ -14499,7 +14499,7 @@
       </p:sp>
       <p:sp>
         <p:nvSpPr>
-          <p:cNvPr id="142094101" name="Text 1"/>
+          <p:cNvPr id="1840889392" name="Text 1"/>
           <p:cNvSpPr/>
           <p:nvPr/>
         </p:nvSpPr>
@@ -14539,7 +14539,7 @@
       </p:sp>
       <p:sp>
         <p:nvSpPr>
-          <p:cNvPr id="569701259" name="Text 2"/>
+          <p:cNvPr id="1184716767" name="Text 2"/>
           <p:cNvSpPr/>
           <p:nvPr/>
         </p:nvSpPr>
@@ -14579,7 +14579,7 @@
       </p:sp>
       <p:sp>
         <p:nvSpPr>
-          <p:cNvPr id="1671155108" name="Shape 3"/>
+          <p:cNvPr id="2015668448" name="Shape 3"/>
           <p:cNvSpPr/>
           <p:nvPr/>
         </p:nvSpPr>
@@ -14606,7 +14606,7 @@
       </p:sp>
       <p:pic>
         <p:nvPicPr>
-          <p:cNvPr id="39739147" name="Image 0" descr="preencoded.png"/>
+          <p:cNvPr id="732623491" name="Image 0" descr="preencoded.png"/>
           <p:cNvPicPr>
             <a:picLocks noChangeAspect="1"/>
           </p:cNvPicPr>
@@ -14628,7 +14628,7 @@
       </p:pic>
       <p:sp>
         <p:nvSpPr>
-          <p:cNvPr id="378800131" name="Text 4"/>
+          <p:cNvPr id="1980300285" name="Text 4"/>
           <p:cNvSpPr/>
           <p:nvPr/>
         </p:nvSpPr>
@@ -14668,7 +14668,7 @@
       </p:sp>
       <p:sp>
         <p:nvSpPr>
-          <p:cNvPr id="544556799" name="Shape 5"/>
+          <p:cNvPr id="728863460" name="Shape 5"/>
           <p:cNvSpPr/>
           <p:nvPr/>
         </p:nvSpPr>
@@ -14688,7 +14688,7 @@
       </p:sp>
       <p:sp>
         <p:nvSpPr>
-          <p:cNvPr id="932207879" name="Text 6"/>
+          <p:cNvPr id="246626480" name="Text 6"/>
           <p:cNvSpPr/>
           <p:nvPr/>
         </p:nvSpPr>
@@ -14728,7 +14728,7 @@
       </p:sp>
       <p:sp>
         <p:nvSpPr>
-          <p:cNvPr id="54384237" name="Shape 7"/>
+          <p:cNvPr id="851674769" name="Shape 7"/>
           <p:cNvSpPr/>
           <p:nvPr/>
         </p:nvSpPr>
@@ -14748,7 +14748,7 @@
       </p:sp>
       <p:sp>
         <p:nvSpPr>
-          <p:cNvPr id="1000559024" name="Text 8"/>
+          <p:cNvPr id="1476877016" name="Text 8"/>
           <p:cNvSpPr/>
           <p:nvPr/>
         </p:nvSpPr>
@@ -14788,7 +14788,7 @@
       </p:sp>
       <p:sp>
         <p:nvSpPr>
-          <p:cNvPr id="323079575" name="Shape 9"/>
+          <p:cNvPr id="834529198" name="Shape 9"/>
           <p:cNvSpPr/>
           <p:nvPr/>
         </p:nvSpPr>
@@ -14808,7 +14808,7 @@
       </p:sp>
       <p:sp>
         <p:nvSpPr>
-          <p:cNvPr id="292742731" name="Text 10"/>
+          <p:cNvPr id="1809156007" name="Text 10"/>
           <p:cNvSpPr/>
           <p:nvPr/>
         </p:nvSpPr>
@@ -14848,7 +14848,7 @@
       </p:sp>
       <p:sp>
         <p:nvSpPr>
-          <p:cNvPr id="79604277" name="Shape 11"/>
+          <p:cNvPr id="1869425971" name="Shape 11"/>
           <p:cNvSpPr/>
           <p:nvPr/>
         </p:nvSpPr>
@@ -14868,7 +14868,7 @@
       </p:sp>
       <p:sp>
         <p:nvSpPr>
-          <p:cNvPr id="1058675560" name="Text 12"/>
+          <p:cNvPr id="2093664120" name="Text 12"/>
           <p:cNvSpPr/>
           <p:nvPr/>
         </p:nvSpPr>
@@ -14908,7 +14908,7 @@
       </p:sp>
       <p:sp>
         <p:nvSpPr>
-          <p:cNvPr id="797925496" name="Shape 13"/>
+          <p:cNvPr id="923290333" name="Shape 13"/>
           <p:cNvSpPr/>
           <p:nvPr/>
         </p:nvSpPr>
@@ -14928,7 +14928,7 @@
       </p:sp>
       <p:sp>
         <p:nvSpPr>
-          <p:cNvPr id="1602540448" name="Text 14"/>
+          <p:cNvPr id="1088467263" name="Text 14"/>
           <p:cNvSpPr/>
           <p:nvPr/>
         </p:nvSpPr>
@@ -14968,7 +14968,7 @@
       </p:sp>
       <p:sp>
         <p:nvSpPr>
-          <p:cNvPr id="1033932017" name="Shape 15"/>
+          <p:cNvPr id="615203209" name="Shape 15"/>
           <p:cNvSpPr/>
           <p:nvPr/>
         </p:nvSpPr>
@@ -14988,7 +14988,7 @@
       </p:sp>
       <p:sp>
         <p:nvSpPr>
-          <p:cNvPr id="674298687" name="Text 16"/>
+          <p:cNvPr id="84509244" name="Text 16"/>
           <p:cNvSpPr/>
           <p:nvPr/>
         </p:nvSpPr>
@@ -15028,7 +15028,7 @@
       </p:sp>
       <p:sp>
         <p:nvSpPr>
-          <p:cNvPr id="1850854110" name="Shape 17"/>
+          <p:cNvPr id="349497740" name="Shape 17"/>
           <p:cNvSpPr/>
           <p:nvPr/>
         </p:nvSpPr>
@@ -15055,7 +15055,7 @@
       </p:sp>
       <p:pic>
         <p:nvPicPr>
-          <p:cNvPr id="1817634443" name="Image 1" descr="preencoded.png"/>
+          <p:cNvPr id="342254212" name="Image 1" descr="preencoded.png"/>
           <p:cNvPicPr>
             <a:picLocks noChangeAspect="1"/>
           </p:cNvPicPr>
@@ -15077,7 +15077,7 @@
       </p:pic>
       <p:sp>
         <p:nvSpPr>
-          <p:cNvPr id="1997904451" name="Text 18"/>
+          <p:cNvPr id="1303191370" name="Text 18"/>
           <p:cNvSpPr/>
           <p:nvPr/>
         </p:nvSpPr>
@@ -15117,7 +15117,7 @@
       </p:sp>
       <p:sp>
         <p:nvSpPr>
-          <p:cNvPr id="105628155" name="Shape 19"/>
+          <p:cNvPr id="725557064" name="Shape 19"/>
           <p:cNvSpPr/>
           <p:nvPr/>
         </p:nvSpPr>
@@ -15137,7 +15137,7 @@
       </p:sp>
       <p:sp>
         <p:nvSpPr>
-          <p:cNvPr id="1539839506" name="Text 20"/>
+          <p:cNvPr id="1410423872" name="Text 20"/>
           <p:cNvSpPr/>
           <p:nvPr/>
         </p:nvSpPr>
@@ -15177,7 +15177,7 @@
       </p:sp>
       <p:sp>
         <p:nvSpPr>
-          <p:cNvPr id="1822379114" name="Shape 21"/>
+          <p:cNvPr id="1301459092" name="Shape 21"/>
           <p:cNvSpPr/>
           <p:nvPr/>
         </p:nvSpPr>
@@ -15197,7 +15197,7 @@
       </p:sp>
       <p:sp>
         <p:nvSpPr>
-          <p:cNvPr id="2115652668" name="Text 22"/>
+          <p:cNvPr id="1514575240" name="Text 22"/>
           <p:cNvSpPr/>
           <p:nvPr/>
         </p:nvSpPr>
@@ -15237,7 +15237,7 @@
       </p:sp>
       <p:sp>
         <p:nvSpPr>
-          <p:cNvPr id="1272005083" name="Shape 23"/>
+          <p:cNvPr id="1093114698" name="Shape 23"/>
           <p:cNvSpPr/>
           <p:nvPr/>
         </p:nvSpPr>
@@ -15257,7 +15257,7 @@
       </p:sp>
       <p:sp>
         <p:nvSpPr>
-          <p:cNvPr id="553348254" name="Text 24"/>
+          <p:cNvPr id="2061135106" name="Text 24"/>
           <p:cNvSpPr/>
           <p:nvPr/>
         </p:nvSpPr>
@@ -15297,7 +15297,7 @@
       </p:sp>
       <p:sp>
         <p:nvSpPr>
-          <p:cNvPr id="2087113532" name="Shape 25"/>
+          <p:cNvPr id="1172271275" name="Shape 25"/>
           <p:cNvSpPr/>
           <p:nvPr/>
         </p:nvSpPr>
@@ -15317,7 +15317,7 @@
       </p:sp>
       <p:sp>
         <p:nvSpPr>
-          <p:cNvPr id="456188599" name="Text 26"/>
+          <p:cNvPr id="1181377842" name="Text 26"/>
           <p:cNvSpPr/>
           <p:nvPr/>
         </p:nvSpPr>
@@ -15357,7 +15357,7 @@
       </p:sp>
       <p:sp>
         <p:nvSpPr>
-          <p:cNvPr id="1262178510" name="Shape 27"/>
+          <p:cNvPr id="1924058392" name="Shape 27"/>
           <p:cNvSpPr/>
           <p:nvPr/>
         </p:nvSpPr>
@@ -15384,7 +15384,7 @@
       </p:sp>
       <p:pic>
         <p:nvPicPr>
-          <p:cNvPr id="370713808" name="Image 2" descr="preencoded.png"/>
+          <p:cNvPr id="1742156900" name="Image 2" descr="preencoded.png"/>
           <p:cNvPicPr>
             <a:picLocks noChangeAspect="1"/>
           </p:cNvPicPr>
@@ -15406,7 +15406,7 @@
       </p:pic>
       <p:sp>
         <p:nvSpPr>
-          <p:cNvPr id="814237278" name="Text 28"/>
+          <p:cNvPr id="630926437" name="Text 28"/>
           <p:cNvSpPr/>
           <p:nvPr/>
         </p:nvSpPr>
@@ -15446,7 +15446,7 @@
       </p:sp>
       <p:sp>
         <p:nvSpPr>
-          <p:cNvPr id="708984525" name="Shape 29"/>
+          <p:cNvPr id="759379204" name="Shape 29"/>
           <p:cNvSpPr/>
           <p:nvPr/>
         </p:nvSpPr>
@@ -15466,7 +15466,7 @@
       </p:sp>
       <p:sp>
         <p:nvSpPr>
-          <p:cNvPr id="1228614744" name="Text 30"/>
+          <p:cNvPr id="1702829113" name="Text 30"/>
           <p:cNvSpPr/>
           <p:nvPr/>
         </p:nvSpPr>
@@ -15506,7 +15506,7 @@
       </p:sp>
       <p:sp>
         <p:nvSpPr>
-          <p:cNvPr id="739436796" name="Shape 31"/>
+          <p:cNvPr id="1049015300" name="Shape 31"/>
           <p:cNvSpPr/>
           <p:nvPr/>
         </p:nvSpPr>
@@ -15526,7 +15526,7 @@
       </p:sp>
       <p:sp>
         <p:nvSpPr>
-          <p:cNvPr id="84593553" name="Text 32"/>
+          <p:cNvPr id="812622745" name="Text 32"/>
           <p:cNvSpPr/>
           <p:nvPr/>
         </p:nvSpPr>
@@ -15566,7 +15566,7 @@
       </p:sp>
       <p:sp>
         <p:nvSpPr>
-          <p:cNvPr id="2136368860" name="Shape 33"/>
+          <p:cNvPr id="1048181507" name="Shape 33"/>
           <p:cNvSpPr/>
           <p:nvPr/>
         </p:nvSpPr>
@@ -15586,7 +15586,7 @@
       </p:sp>
       <p:sp>
         <p:nvSpPr>
-          <p:cNvPr id="138273953" name="Text 34"/>
+          <p:cNvPr id="433907600" name="Text 34"/>
           <p:cNvSpPr/>
           <p:nvPr/>
         </p:nvSpPr>
@@ -15626,7 +15626,7 @@
       </p:sp>
       <p:sp>
         <p:nvSpPr>
-          <p:cNvPr id="1691237149" name="Text 35"/>
+          <p:cNvPr id="523913386" name="Text 35"/>
           <p:cNvSpPr/>
           <p:nvPr/>
         </p:nvSpPr>
@@ -15666,7 +15666,7 @@
       </p:sp>
       <p:sp>
         <p:nvSpPr>
-          <p:cNvPr id="1432003163" name="Text 36"/>
+          <p:cNvPr id="830480978" name="Text 36"/>
           <p:cNvSpPr/>
           <p:nvPr/>
         </p:nvSpPr>
@@ -15746,7 +15746,7 @@
       </p:grpSpPr>
       <p:sp>
         <p:nvSpPr>
-          <p:cNvPr id="741051874" name="Text 0"/>
+          <p:cNvPr id="2125876526" name="Text 0"/>
           <p:cNvSpPr/>
           <p:nvPr/>
         </p:nvSpPr>
@@ -15786,7 +15786,7 @@
       </p:sp>
       <p:sp>
         <p:nvSpPr>
-          <p:cNvPr id="1216766780" name="Text 1"/>
+          <p:cNvPr id="1485090234" name="Text 1"/>
           <p:cNvSpPr/>
           <p:nvPr/>
         </p:nvSpPr>
@@ -15826,7 +15826,7 @@
       </p:sp>
       <p:sp>
         <p:nvSpPr>
-          <p:cNvPr id="1221143936" name="Text 2"/>
+          <p:cNvPr id="1315600486" name="Text 2"/>
           <p:cNvSpPr/>
           <p:nvPr/>
         </p:nvSpPr>
@@ -15866,7 +15866,7 @@
       </p:sp>
       <p:sp>
         <p:nvSpPr>
-          <p:cNvPr id="646062251" name="Shape 3"/>
+          <p:cNvPr id="214819835" name="Shape 3"/>
           <p:cNvSpPr/>
           <p:nvPr/>
         </p:nvSpPr>
@@ -15888,7 +15888,7 @@
       </p:sp>
       <p:pic>
         <p:nvPicPr>
-          <p:cNvPr id="683570180" name="Image 0" descr="preencoded.png"/>
+          <p:cNvPr id="1132641981" name="Image 0" descr="preencoded.png"/>
           <p:cNvPicPr>
             <a:picLocks noChangeAspect="1"/>
           </p:cNvPicPr>
@@ -15910,7 +15910,7 @@
       </p:pic>
       <p:sp>
         <p:nvSpPr>
-          <p:cNvPr id="999458826" name="Text 4"/>
+          <p:cNvPr id="995884688" name="Text 4"/>
           <p:cNvSpPr/>
           <p:nvPr/>
         </p:nvSpPr>
@@ -15950,7 +15950,7 @@
       </p:sp>
       <p:sp>
         <p:nvSpPr>
-          <p:cNvPr id="108239436" name="Text 5"/>
+          <p:cNvPr id="1431106827" name="Text 5"/>
           <p:cNvSpPr/>
           <p:nvPr/>
         </p:nvSpPr>
@@ -15990,7 +15990,7 @@
       </p:sp>
       <p:sp>
         <p:nvSpPr>
-          <p:cNvPr id="463498302" name="Shape 6"/>
+          <p:cNvPr id="1055866702" name="Shape 6"/>
           <p:cNvSpPr/>
           <p:nvPr/>
         </p:nvSpPr>
@@ -16012,7 +16012,7 @@
       </p:sp>
       <p:pic>
         <p:nvPicPr>
-          <p:cNvPr id="1740954316" name="Image 1" descr="preencoded.png"/>
+          <p:cNvPr id="2095923657" name="Image 1" descr="preencoded.png"/>
           <p:cNvPicPr>
             <a:picLocks noChangeAspect="1"/>
           </p:cNvPicPr>
@@ -16034,7 +16034,7 @@
       </p:pic>
       <p:sp>
         <p:nvSpPr>
-          <p:cNvPr id="1166018034" name="Text 7"/>
+          <p:cNvPr id="1504780823" name="Text 7"/>
           <p:cNvSpPr/>
           <p:nvPr/>
         </p:nvSpPr>
@@ -16074,7 +16074,7 @@
       </p:sp>
       <p:sp>
         <p:nvSpPr>
-          <p:cNvPr id="1414220334" name="Text 8"/>
+          <p:cNvPr id="1234571942" name="Text 8"/>
           <p:cNvSpPr/>
           <p:nvPr/>
         </p:nvSpPr>
@@ -16114,7 +16114,7 @@
       </p:sp>
       <p:sp>
         <p:nvSpPr>
-          <p:cNvPr id="25771311" name="Shape 9"/>
+          <p:cNvPr id="2036217025" name="Shape 9"/>
           <p:cNvSpPr/>
           <p:nvPr/>
         </p:nvSpPr>
@@ -16136,7 +16136,7 @@
       </p:sp>
       <p:pic>
         <p:nvPicPr>
-          <p:cNvPr id="379694587" name="Image 2" descr="preencoded.png"/>
+          <p:cNvPr id="2030236074" name="Image 2" descr="preencoded.png"/>
           <p:cNvPicPr>
             <a:picLocks noChangeAspect="1"/>
           </p:cNvPicPr>
@@ -16158,7 +16158,7 @@
       </p:pic>
       <p:sp>
         <p:nvSpPr>
-          <p:cNvPr id="2117314556" name="Text 10"/>
+          <p:cNvPr id="895043223" name="Text 10"/>
           <p:cNvSpPr/>
           <p:nvPr/>
         </p:nvSpPr>
@@ -16198,7 +16198,7 @@
       </p:sp>
       <p:sp>
         <p:nvSpPr>
-          <p:cNvPr id="1798661469" name="Text 11"/>
+          <p:cNvPr id="1347715430" name="Text 11"/>
           <p:cNvSpPr/>
           <p:nvPr/>
         </p:nvSpPr>
@@ -16238,7 +16238,7 @@
       </p:sp>
       <p:pic>
         <p:nvPicPr>
-          <p:cNvPr id="1850199320" name="Image 3" descr="preencoded.png"/>
+          <p:cNvPr id="857319448" name="Image 3" descr="preencoded.png"/>
           <p:cNvPicPr>
             <a:picLocks noChangeAspect="1"/>
           </p:cNvPicPr>
@@ -16260,7 +16260,7 @@
       </p:pic>
       <p:sp>
         <p:nvSpPr>
-          <p:cNvPr id="1803635825" name="Shape 12"/>
+          <p:cNvPr id="1645141819" name="Shape 12"/>
           <p:cNvSpPr/>
           <p:nvPr/>
         </p:nvSpPr>
@@ -16287,7 +16287,7 @@
       </p:sp>
       <p:sp>
         <p:nvSpPr>
-          <p:cNvPr id="932493787" name="Text 13"/>
+          <p:cNvPr id="717353794" name="Text 13"/>
           <p:cNvSpPr/>
           <p:nvPr/>
         </p:nvSpPr>
@@ -16327,7 +16327,7 @@
       </p:sp>
       <p:sp>
         <p:nvSpPr>
-          <p:cNvPr id="282672485" name="Shape 14"/>
+          <p:cNvPr id="1393322437" name="Shape 14"/>
           <p:cNvSpPr/>
           <p:nvPr/>
         </p:nvSpPr>
@@ -16354,7 +16354,7 @@
       </p:sp>
       <p:sp>
         <p:nvSpPr>
-          <p:cNvPr id="955152468" name="Text 15"/>
+          <p:cNvPr id="385417389" name="Text 15"/>
           <p:cNvSpPr/>
           <p:nvPr/>
         </p:nvSpPr>
@@ -16394,7 +16394,7 @@
       </p:sp>
       <p:sp>
         <p:nvSpPr>
-          <p:cNvPr id="933880229" name="Shape 16"/>
+          <p:cNvPr id="140414828" name="Shape 16"/>
           <p:cNvSpPr/>
           <p:nvPr/>
         </p:nvSpPr>
@@ -16421,7 +16421,7 @@
       </p:sp>
       <p:sp>
         <p:nvSpPr>
-          <p:cNvPr id="664079030" name="Text 17"/>
+          <p:cNvPr id="304299236" name="Text 17"/>
           <p:cNvSpPr/>
           <p:nvPr/>
         </p:nvSpPr>
@@ -16461,7 +16461,7 @@
       </p:sp>
       <p:sp>
         <p:nvSpPr>
-          <p:cNvPr id="1291994463" name="Shape 18"/>
+          <p:cNvPr id="107469604" name="Shape 18"/>
           <p:cNvSpPr/>
           <p:nvPr/>
         </p:nvSpPr>
@@ -16488,7 +16488,7 @@
       </p:sp>
       <p:sp>
         <p:nvSpPr>
-          <p:cNvPr id="794641384" name="Text 19"/>
+          <p:cNvPr id="549563678" name="Text 19"/>
           <p:cNvSpPr/>
           <p:nvPr/>
         </p:nvSpPr>
@@ -16528,7 +16528,7 @@
       </p:sp>
       <p:sp>
         <p:nvSpPr>
-          <p:cNvPr id="1778736293" name="Shape 20"/>
+          <p:cNvPr id="658656502" name="Shape 20"/>
           <p:cNvSpPr/>
           <p:nvPr/>
         </p:nvSpPr>
@@ -16555,7 +16555,7 @@
       </p:sp>
       <p:sp>
         <p:nvSpPr>
-          <p:cNvPr id="612841418" name="Text 21"/>
+          <p:cNvPr id="1770249814" name="Text 21"/>
           <p:cNvSpPr/>
           <p:nvPr/>
         </p:nvSpPr>
@@ -16595,7 +16595,7 @@
       </p:sp>
       <p:sp>
         <p:nvSpPr>
-          <p:cNvPr id="1320006347" name="Shape 22"/>
+          <p:cNvPr id="1265756939" name="Shape 22"/>
           <p:cNvSpPr/>
           <p:nvPr/>
         </p:nvSpPr>
@@ -16622,7 +16622,7 @@
       </p:sp>
       <p:sp>
         <p:nvSpPr>
-          <p:cNvPr id="598147026" name="Text 23"/>
+          <p:cNvPr id="1632025859" name="Text 23"/>
           <p:cNvSpPr/>
           <p:nvPr/>
         </p:nvSpPr>
@@ -16662,7 +16662,7 @@
       </p:sp>
       <p:sp>
         <p:nvSpPr>
-          <p:cNvPr id="708307283" name="Shape 24"/>
+          <p:cNvPr id="2136184034" name="Shape 24"/>
           <p:cNvSpPr/>
           <p:nvPr/>
         </p:nvSpPr>
@@ -16689,7 +16689,7 @@
       </p:sp>
       <p:sp>
         <p:nvSpPr>
-          <p:cNvPr id="1421378858" name="Text 25"/>
+          <p:cNvPr id="1928653812" name="Text 25"/>
           <p:cNvSpPr/>
           <p:nvPr/>
         </p:nvSpPr>
@@ -16729,7 +16729,7 @@
       </p:sp>
       <p:sp>
         <p:nvSpPr>
-          <p:cNvPr id="357094980" name="Shape 26"/>
+          <p:cNvPr id="940473590" name="Shape 26"/>
           <p:cNvSpPr/>
           <p:nvPr/>
         </p:nvSpPr>
@@ -16756,7 +16756,7 @@
       </p:sp>
       <p:sp>
         <p:nvSpPr>
-          <p:cNvPr id="1380608194" name="Text 27"/>
+          <p:cNvPr id="217576759" name="Text 27"/>
           <p:cNvSpPr/>
           <p:nvPr/>
         </p:nvSpPr>
@@ -16796,7 +16796,7 @@
       </p:sp>
       <p:sp>
         <p:nvSpPr>
-          <p:cNvPr id="395016843" name="Shape 28"/>
+          <p:cNvPr id="1029876286" name="Shape 28"/>
           <p:cNvSpPr/>
           <p:nvPr/>
         </p:nvSpPr>
@@ -16823,7 +16823,7 @@
       </p:sp>
       <p:sp>
         <p:nvSpPr>
-          <p:cNvPr id="256572044" name="Text 29"/>
+          <p:cNvPr id="1161525986" name="Text 29"/>
           <p:cNvSpPr/>
           <p:nvPr/>
         </p:nvSpPr>
@@ -16863,7 +16863,7 @@
       </p:sp>
       <p:sp>
         <p:nvSpPr>
-          <p:cNvPr id="1741068262" name="Shape 30"/>
+          <p:cNvPr id="1243458232" name="Shape 30"/>
           <p:cNvSpPr/>
           <p:nvPr/>
         </p:nvSpPr>
@@ -16890,7 +16890,7 @@
       </p:sp>
       <p:sp>
         <p:nvSpPr>
-          <p:cNvPr id="1568509738" name="Text 31"/>
+          <p:cNvPr id="1859121041" name="Text 31"/>
           <p:cNvSpPr/>
           <p:nvPr/>
         </p:nvSpPr>
@@ -16930,7 +16930,7 @@
       </p:sp>
       <p:sp>
         <p:nvSpPr>
-          <p:cNvPr id="679712823" name="Shape 32"/>
+          <p:cNvPr id="1144402923" name="Shape 32"/>
           <p:cNvSpPr/>
           <p:nvPr/>
         </p:nvSpPr>
@@ -16957,7 +16957,7 @@
       </p:sp>
       <p:sp>
         <p:nvSpPr>
-          <p:cNvPr id="1172980376" name="Text 33"/>
+          <p:cNvPr id="1730099819" name="Text 33"/>
           <p:cNvSpPr/>
           <p:nvPr/>
         </p:nvSpPr>
@@ -16997,7 +16997,7 @@
       </p:sp>
       <p:sp>
         <p:nvSpPr>
-          <p:cNvPr id="2132944883" name="Shape 34"/>
+          <p:cNvPr id="1689286241" name="Shape 34"/>
           <p:cNvSpPr/>
           <p:nvPr/>
         </p:nvSpPr>
@@ -17024,7 +17024,7 @@
       </p:sp>
       <p:sp>
         <p:nvSpPr>
-          <p:cNvPr id="1323955458" name="Text 35"/>
+          <p:cNvPr id="1508782899" name="Text 35"/>
           <p:cNvSpPr/>
           <p:nvPr/>
         </p:nvSpPr>
@@ -17064,7 +17064,7 @@
       </p:sp>
       <p:sp>
         <p:nvSpPr>
-          <p:cNvPr id="1582918136" name="Shape 36"/>
+          <p:cNvPr id="1670633225" name="Shape 36"/>
           <p:cNvSpPr/>
           <p:nvPr/>
         </p:nvSpPr>
@@ -17091,7 +17091,7 @@
       </p:sp>
       <p:sp>
         <p:nvSpPr>
-          <p:cNvPr id="1678081880" name="Text 37"/>
+          <p:cNvPr id="960553750" name="Text 37"/>
           <p:cNvSpPr/>
           <p:nvPr/>
         </p:nvSpPr>
@@ -17131,7 +17131,7 @@
       </p:sp>
       <p:sp>
         <p:nvSpPr>
-          <p:cNvPr id="434132094" name="Shape 38"/>
+          <p:cNvPr id="1934607571" name="Shape 38"/>
           <p:cNvSpPr/>
           <p:nvPr/>
         </p:nvSpPr>
@@ -17158,7 +17158,7 @@
       </p:sp>
       <p:sp>
         <p:nvSpPr>
-          <p:cNvPr id="795755965" name="Text 39"/>
+          <p:cNvPr id="1366523075" name="Text 39"/>
           <p:cNvSpPr/>
           <p:nvPr/>
         </p:nvSpPr>
@@ -17198,7 +17198,7 @@
       </p:sp>
       <p:sp>
         <p:nvSpPr>
-          <p:cNvPr id="147649635" name="Shape 40"/>
+          <p:cNvPr id="587261259" name="Shape 40"/>
           <p:cNvSpPr/>
           <p:nvPr/>
         </p:nvSpPr>
@@ -17225,7 +17225,7 @@
       </p:sp>
       <p:sp>
         <p:nvSpPr>
-          <p:cNvPr id="1367227484" name="Text 41"/>
+          <p:cNvPr id="2059342096" name="Text 41"/>
           <p:cNvSpPr/>
           <p:nvPr/>
         </p:nvSpPr>
@@ -17265,7 +17265,7 @@
       </p:sp>
       <p:sp>
         <p:nvSpPr>
-          <p:cNvPr id="1843104693" name="Text 42"/>
+          <p:cNvPr id="754065007" name="Text 42"/>
           <p:cNvSpPr/>
           <p:nvPr/>
         </p:nvSpPr>
@@ -17305,7 +17305,7 @@
       </p:sp>
       <p:sp>
         <p:nvSpPr>
-          <p:cNvPr id="1812685134" name="Text 43"/>
+          <p:cNvPr id="1227323533" name="Text 43"/>
           <p:cNvSpPr/>
           <p:nvPr/>
         </p:nvSpPr>
@@ -17345,7 +17345,7 @@
       </p:sp>
       <p:pic>
         <p:nvPicPr>
-          <p:cNvPr id="1157567028" name="Image 3" descr="preencoded.png"/>
+          <p:cNvPr id="962102714" name="Image 3" descr="preencoded.png"/>
           <p:cNvPicPr>
             <a:picLocks noChangeAspect="1"/>
           </p:cNvPicPr>
@@ -17407,7 +17407,7 @@
       </p:grpSpPr>
       <p:sp>
         <p:nvSpPr>
-          <p:cNvPr id="2099944648" name="Text 0"/>
+          <p:cNvPr id="1669194051" name="Text 0"/>
           <p:cNvSpPr/>
           <p:nvPr/>
         </p:nvSpPr>
@@ -17451,7 +17451,7 @@
       </p:sp>
       <p:sp>
         <p:nvSpPr>
-          <p:cNvPr id="1572208605" name="Text 1"/>
+          <p:cNvPr id="293422988" name="Text 1"/>
           <p:cNvSpPr/>
           <p:nvPr/>
         </p:nvSpPr>
@@ -17506,7 +17506,7 @@
       </p:sp>
       <p:sp>
         <p:nvSpPr>
-          <p:cNvPr id="1823440174" name="Text 2"/>
+          <p:cNvPr id="1642562132" name="Text 2"/>
           <p:cNvSpPr/>
           <p:nvPr/>
         </p:nvSpPr>
@@ -17550,7 +17550,7 @@
       </p:sp>
       <p:sp>
         <p:nvSpPr>
-          <p:cNvPr id="1914683548" name="Shape 3"/>
+          <p:cNvPr id="566609386" name="Shape 3"/>
           <p:cNvSpPr/>
           <p:nvPr/>
         </p:nvSpPr>
@@ -17594,7 +17594,7 @@
       </p:sp>
       <p:pic>
         <p:nvPicPr>
-          <p:cNvPr id="982257883" name="Image 1" descr="preencoded.png"/>
+          <p:cNvPr id="2068248645" name="Image 1" descr="preencoded.png"/>
           <p:cNvPicPr>
             <a:picLocks noChangeAspect="1"/>
           </p:cNvPicPr>
@@ -17616,7 +17616,7 @@
       </p:pic>
       <p:sp>
         <p:nvSpPr>
-          <p:cNvPr id="1391107955" name="Text 4"/>
+          <p:cNvPr id="1268533061" name="Text 4"/>
           <p:cNvSpPr/>
           <p:nvPr/>
         </p:nvSpPr>
@@ -17660,7 +17660,7 @@
       </p:sp>
       <p:sp>
         <p:nvSpPr>
-          <p:cNvPr id="346796109" name="Text 5"/>
+          <p:cNvPr id="303618907" name="Text 5"/>
           <p:cNvSpPr/>
           <p:nvPr/>
         </p:nvSpPr>
@@ -17704,7 +17704,7 @@
       </p:sp>
       <p:pic>
         <p:nvPicPr>
-          <p:cNvPr id="113840918" name="Image 2" descr="preencoded.png"/>
+          <p:cNvPr id="1403361749" name="Image 2" descr="preencoded.png"/>
           <p:cNvPicPr>
             <a:picLocks noChangeAspect="1"/>
           </p:cNvPicPr>
@@ -17726,7 +17726,7 @@
       </p:pic>
       <p:sp>
         <p:nvSpPr>
-          <p:cNvPr id="1399085194" name="Shape 6"/>
+          <p:cNvPr id="656423862" name="Shape 6"/>
           <p:cNvSpPr/>
           <p:nvPr/>
         </p:nvSpPr>
@@ -17770,7 +17770,7 @@
       </p:sp>
       <p:pic>
         <p:nvPicPr>
-          <p:cNvPr id="811971265" name="Image 3" descr="preencoded.png"/>
+          <p:cNvPr id="1291232245" name="Image 3" descr="preencoded.png"/>
           <p:cNvPicPr>
             <a:picLocks noChangeAspect="1"/>
           </p:cNvPicPr>
@@ -17792,7 +17792,7 @@
       </p:pic>
       <p:sp>
         <p:nvSpPr>
-          <p:cNvPr id="752200605" name="Text 7"/>
+          <p:cNvPr id="207204145" name="Text 7"/>
           <p:cNvSpPr/>
           <p:nvPr/>
         </p:nvSpPr>
@@ -17836,7 +17836,7 @@
       </p:sp>
       <p:sp>
         <p:nvSpPr>
-          <p:cNvPr id="1974445168" name="Text 8"/>
+          <p:cNvPr id="1889984562" name="Text 8"/>
           <p:cNvSpPr/>
           <p:nvPr/>
         </p:nvSpPr>
@@ -17880,7 +17880,7 @@
       </p:sp>
       <p:pic>
         <p:nvPicPr>
-          <p:cNvPr id="453026606" name="Image 4" descr="preencoded.png"/>
+          <p:cNvPr id="935782402" name="Image 4" descr="preencoded.png"/>
           <p:cNvPicPr>
             <a:picLocks noChangeAspect="1"/>
           </p:cNvPicPr>
@@ -17902,7 +17902,7 @@
       </p:pic>
       <p:sp>
         <p:nvSpPr>
-          <p:cNvPr id="318631734" name="Shape 9"/>
+          <p:cNvPr id="852457011" name="Shape 9"/>
           <p:cNvSpPr/>
           <p:nvPr/>
         </p:nvSpPr>
@@ -17946,7 +17946,7 @@
       </p:sp>
       <p:pic>
         <p:nvPicPr>
-          <p:cNvPr id="1213118658" name="Image 5" descr="preencoded.png"/>
+          <p:cNvPr id="652293021" name="Image 5" descr="preencoded.png"/>
           <p:cNvPicPr>
             <a:picLocks noChangeAspect="1"/>
           </p:cNvPicPr>
@@ -17968,7 +17968,7 @@
       </p:pic>
       <p:sp>
         <p:nvSpPr>
-          <p:cNvPr id="92548065" name="Text 10"/>
+          <p:cNvPr id="1609196950" name="Text 10"/>
           <p:cNvSpPr/>
           <p:nvPr/>
         </p:nvSpPr>
@@ -18012,7 +18012,7 @@
       </p:sp>
       <p:sp>
         <p:nvSpPr>
-          <p:cNvPr id="284798843" name="Text 11"/>
+          <p:cNvPr id="869115826" name="Text 11"/>
           <p:cNvSpPr/>
           <p:nvPr/>
         </p:nvSpPr>
@@ -18056,7 +18056,7 @@
       </p:sp>
       <p:pic>
         <p:nvPicPr>
-          <p:cNvPr id="1646567297" name="Image 6" descr="preencoded.png"/>
+          <p:cNvPr id="236362620" name="Image 6" descr="preencoded.png"/>
           <p:cNvPicPr>
             <a:picLocks noChangeAspect="1"/>
           </p:cNvPicPr>
@@ -18078,7 +18078,7 @@
       </p:pic>
       <p:sp>
         <p:nvSpPr>
-          <p:cNvPr id="872376713" name="Shape 12"/>
+          <p:cNvPr id="1299931726" name="Shape 12"/>
           <p:cNvSpPr/>
           <p:nvPr/>
         </p:nvSpPr>
@@ -18122,7 +18122,7 @@
       </p:sp>
       <p:pic>
         <p:nvPicPr>
-          <p:cNvPr id="1170588958" name="Image 7" descr="preencoded.png"/>
+          <p:cNvPr id="866118623" name="Image 7" descr="preencoded.png"/>
           <p:cNvPicPr>
             <a:picLocks noChangeAspect="1"/>
           </p:cNvPicPr>
@@ -18144,7 +18144,7 @@
       </p:pic>
       <p:sp>
         <p:nvSpPr>
-          <p:cNvPr id="1037224375" name="Text 13"/>
+          <p:cNvPr id="2116312928" name="Text 13"/>
           <p:cNvSpPr/>
           <p:nvPr/>
         </p:nvSpPr>
@@ -18188,7 +18188,7 @@
       </p:sp>
       <p:sp>
         <p:nvSpPr>
-          <p:cNvPr id="1054263959" name="Text 14"/>
+          <p:cNvPr id="699813145" name="Text 14"/>
           <p:cNvSpPr/>
           <p:nvPr/>
         </p:nvSpPr>
@@ -18232,7 +18232,7 @@
       </p:sp>
       <p:sp>
         <p:nvSpPr>
-          <p:cNvPr id="2033314476" name="Text 17"/>
+          <p:cNvPr id="2011919249" name="Text 17"/>
           <p:cNvSpPr/>
           <p:nvPr/>
         </p:nvSpPr>
@@ -18276,7 +18276,7 @@
       </p:sp>
       <p:sp>
         <p:nvSpPr>
-          <p:cNvPr id="1558011228" name="Text 18"/>
+          <p:cNvPr id="158554910" name="Text 18"/>
           <p:cNvSpPr/>
           <p:nvPr/>
         </p:nvSpPr>
@@ -18360,7 +18360,7 @@
       </p:grpSpPr>
       <p:sp>
         <p:nvSpPr>
-          <p:cNvPr id="263788421" name="Text 0"/>
+          <p:cNvPr id="1598971042" name="Text 0"/>
           <p:cNvSpPr/>
           <p:nvPr/>
         </p:nvSpPr>
@@ -18400,7 +18400,7 @@
       </p:sp>
       <p:sp>
         <p:nvSpPr>
-          <p:cNvPr id="1874956517" name="Text 1"/>
+          <p:cNvPr id="514584482" name="Text 1"/>
           <p:cNvSpPr/>
           <p:nvPr/>
         </p:nvSpPr>
@@ -18440,7 +18440,7 @@
       </p:sp>
       <p:sp>
         <p:nvSpPr>
-          <p:cNvPr id="991936951" name="Text 2"/>
+          <p:cNvPr id="482264184" name="Text 2"/>
           <p:cNvSpPr/>
           <p:nvPr/>
         </p:nvSpPr>
@@ -18480,7 +18480,7 @@
       </p:sp>
       <p:sp>
         <p:nvSpPr>
-          <p:cNvPr id="628649979" name="Shape 3"/>
+          <p:cNvPr id="1112575794" name="Shape 3"/>
           <p:cNvSpPr/>
           <p:nvPr/>
         </p:nvSpPr>
@@ -18502,7 +18502,7 @@
       </p:sp>
       <p:pic>
         <p:nvPicPr>
-          <p:cNvPr id="928090706" name="Image 0" descr="preencoded.png"/>
+          <p:cNvPr id="341425138" name="Image 0" descr="preencoded.png"/>
           <p:cNvPicPr>
             <a:picLocks noChangeAspect="1"/>
           </p:cNvPicPr>
@@ -18524,7 +18524,7 @@
       </p:pic>
       <p:sp>
         <p:nvSpPr>
-          <p:cNvPr id="1408882669" name="Text 4"/>
+          <p:cNvPr id="127326946" name="Text 4"/>
           <p:cNvSpPr/>
           <p:nvPr/>
         </p:nvSpPr>
@@ -18564,7 +18564,7 @@
       </p:sp>
       <p:sp>
         <p:nvSpPr>
-          <p:cNvPr id="1846448043" name="Text 5"/>
+          <p:cNvPr id="850834071" name="Text 5"/>
           <p:cNvSpPr/>
           <p:nvPr/>
         </p:nvSpPr>
@@ -18604,7 +18604,7 @@
       </p:sp>
       <p:sp>
         <p:nvSpPr>
-          <p:cNvPr id="1028690316" name="Shape 6"/>
+          <p:cNvPr id="1343069607" name="Shape 6"/>
           <p:cNvSpPr/>
           <p:nvPr/>
         </p:nvSpPr>
@@ -18626,7 +18626,7 @@
       </p:sp>
       <p:pic>
         <p:nvPicPr>
-          <p:cNvPr id="150611588" name="Image 1" descr="preencoded.png"/>
+          <p:cNvPr id="1110338659" name="Image 1" descr="preencoded.png"/>
           <p:cNvPicPr>
             <a:picLocks noChangeAspect="1"/>
           </p:cNvPicPr>
@@ -18648,7 +18648,7 @@
       </p:pic>
       <p:sp>
         <p:nvSpPr>
-          <p:cNvPr id="461650752" name="Text 7"/>
+          <p:cNvPr id="447239159" name="Text 7"/>
           <p:cNvSpPr/>
           <p:nvPr/>
         </p:nvSpPr>
@@ -18688,7 +18688,7 @@
       </p:sp>
       <p:sp>
         <p:nvSpPr>
-          <p:cNvPr id="1267286011" name="Text 8"/>
+          <p:cNvPr id="1021563683" name="Text 8"/>
           <p:cNvSpPr/>
           <p:nvPr/>
         </p:nvSpPr>
@@ -18728,7 +18728,7 @@
       </p:sp>
       <p:sp>
         <p:nvSpPr>
-          <p:cNvPr id="1471057618" name="Shape 9"/>
+          <p:cNvPr id="929160487" name="Shape 9"/>
           <p:cNvSpPr/>
           <p:nvPr/>
         </p:nvSpPr>
@@ -18750,7 +18750,7 @@
       </p:sp>
       <p:pic>
         <p:nvPicPr>
-          <p:cNvPr id="1133657597" name="Image 2" descr="preencoded.png"/>
+          <p:cNvPr id="535952560" name="Image 2" descr="preencoded.png"/>
           <p:cNvPicPr>
             <a:picLocks noChangeAspect="1"/>
           </p:cNvPicPr>
@@ -18772,7 +18772,7 @@
       </p:pic>
       <p:sp>
         <p:nvSpPr>
-          <p:cNvPr id="1705806525" name="Text 10"/>
+          <p:cNvPr id="567814911" name="Text 10"/>
           <p:cNvSpPr/>
           <p:nvPr/>
         </p:nvSpPr>
@@ -18812,7 +18812,7 @@
       </p:sp>
       <p:sp>
         <p:nvSpPr>
-          <p:cNvPr id="1577442020" name="Text 11"/>
+          <p:cNvPr id="2074665603" name="Text 11"/>
           <p:cNvSpPr/>
           <p:nvPr/>
         </p:nvSpPr>
@@ -18852,7 +18852,7 @@
       </p:sp>
       <p:sp>
         <p:nvSpPr>
-          <p:cNvPr id="1400923970" name="Shape 12"/>
+          <p:cNvPr id="2108067383" name="Shape 12"/>
           <p:cNvSpPr/>
           <p:nvPr/>
         </p:nvSpPr>
@@ -18874,7 +18874,7 @@
       </p:sp>
       <p:pic>
         <p:nvPicPr>
-          <p:cNvPr id="811089787" name="Image 3" descr="preencoded.png"/>
+          <p:cNvPr id="1673221749" name="Image 3" descr="preencoded.png"/>
           <p:cNvPicPr>
             <a:picLocks noChangeAspect="1"/>
           </p:cNvPicPr>
@@ -18896,7 +18896,7 @@
       </p:pic>
       <p:sp>
         <p:nvSpPr>
-          <p:cNvPr id="998467215" name="Text 13"/>
+          <p:cNvPr id="1275121508" name="Text 13"/>
           <p:cNvSpPr/>
           <p:nvPr/>
         </p:nvSpPr>
@@ -18936,7 +18936,7 @@
       </p:sp>
       <p:sp>
         <p:nvSpPr>
-          <p:cNvPr id="1177064306" name="Text 14"/>
+          <p:cNvPr id="1595373175" name="Text 14"/>
           <p:cNvSpPr/>
           <p:nvPr/>
         </p:nvSpPr>
@@ -18976,7 +18976,7 @@
       </p:sp>
       <p:sp>
         <p:nvSpPr>
-          <p:cNvPr id="1911270108" name="Shape 15"/>
+          <p:cNvPr id="472944779" name="Shape 15"/>
           <p:cNvSpPr/>
           <p:nvPr/>
         </p:nvSpPr>
@@ -18998,7 +18998,7 @@
       </p:sp>
       <p:pic>
         <p:nvPicPr>
-          <p:cNvPr id="528434642" name="Image 4" descr="preencoded.png"/>
+          <p:cNvPr id="398123062" name="Image 4" descr="preencoded.png"/>
           <p:cNvPicPr>
             <a:picLocks noChangeAspect="1"/>
           </p:cNvPicPr>
@@ -19020,7 +19020,7 @@
       </p:pic>
       <p:sp>
         <p:nvSpPr>
-          <p:cNvPr id="2039066423" name="Text 16"/>
+          <p:cNvPr id="814917697" name="Text 16"/>
           <p:cNvSpPr/>
           <p:nvPr/>
         </p:nvSpPr>
@@ -19060,7 +19060,7 @@
       </p:sp>
       <p:sp>
         <p:nvSpPr>
-          <p:cNvPr id="2001688416" name="Text 17"/>
+          <p:cNvPr id="685735495" name="Text 17"/>
           <p:cNvSpPr/>
           <p:nvPr/>
         </p:nvSpPr>
@@ -19100,7 +19100,7 @@
       </p:sp>
       <p:sp>
         <p:nvSpPr>
-          <p:cNvPr id="750149140" name="Shape 18"/>
+          <p:cNvPr id="681930945" name="Shape 18"/>
           <p:cNvSpPr/>
           <p:nvPr/>
         </p:nvSpPr>
@@ -19122,7 +19122,7 @@
       </p:sp>
       <p:pic>
         <p:nvPicPr>
-          <p:cNvPr id="306064503" name="Image 5" descr="preencoded.png"/>
+          <p:cNvPr id="773428717" name="Image 5" descr="preencoded.png"/>
           <p:cNvPicPr>
             <a:picLocks noChangeAspect="1"/>
           </p:cNvPicPr>
@@ -19144,7 +19144,7 @@
       </p:pic>
       <p:sp>
         <p:nvSpPr>
-          <p:cNvPr id="1556692750" name="Text 19"/>
+          <p:cNvPr id="1355236047" name="Text 19"/>
           <p:cNvSpPr/>
           <p:nvPr/>
         </p:nvSpPr>
@@ -19184,7 +19184,7 @@
       </p:sp>
       <p:sp>
         <p:nvSpPr>
-          <p:cNvPr id="1506704755" name="Text 20"/>
+          <p:cNvPr id="492053649" name="Text 20"/>
           <p:cNvSpPr/>
           <p:nvPr/>
         </p:nvSpPr>
@@ -19224,7 +19224,7 @@
       </p:sp>
       <p:sp>
         <p:nvSpPr>
-          <p:cNvPr id="595601003" name="Shape 21"/>
+          <p:cNvPr id="1361086373" name="Shape 21"/>
           <p:cNvSpPr/>
           <p:nvPr/>
         </p:nvSpPr>
@@ -19246,7 +19246,7 @@
       </p:sp>
       <p:pic>
         <p:nvPicPr>
-          <p:cNvPr id="1303236439" name="Image 6" descr="preencoded.png"/>
+          <p:cNvPr id="1589147590" name="Image 6" descr="preencoded.png"/>
           <p:cNvPicPr>
             <a:picLocks noChangeAspect="1"/>
           </p:cNvPicPr>
@@ -19268,7 +19268,7 @@
       </p:pic>
       <p:sp>
         <p:nvSpPr>
-          <p:cNvPr id="1923246042" name="Text 22"/>
+          <p:cNvPr id="2038338021" name="Text 22"/>
           <p:cNvSpPr/>
           <p:nvPr/>
         </p:nvSpPr>
@@ -19308,7 +19308,7 @@
       </p:sp>
       <p:sp>
         <p:nvSpPr>
-          <p:cNvPr id="609517910" name="Text 23"/>
+          <p:cNvPr id="1658836606" name="Text 23"/>
           <p:cNvSpPr/>
           <p:nvPr/>
         </p:nvSpPr>
@@ -19348,7 +19348,7 @@
       </p:sp>
       <p:sp>
         <p:nvSpPr>
-          <p:cNvPr id="616794799" name="Shape 24"/>
+          <p:cNvPr id="531991349" name="Shape 24"/>
           <p:cNvSpPr/>
           <p:nvPr/>
         </p:nvSpPr>
@@ -19370,7 +19370,7 @@
       </p:sp>
       <p:pic>
         <p:nvPicPr>
-          <p:cNvPr id="152688039" name="Image 7" descr="preencoded.png"/>
+          <p:cNvPr id="1107357427" name="Image 7" descr="preencoded.png"/>
           <p:cNvPicPr>
             <a:picLocks noChangeAspect="1"/>
           </p:cNvPicPr>
@@ -19392,7 +19392,7 @@
       </p:pic>
       <p:sp>
         <p:nvSpPr>
-          <p:cNvPr id="2066574756" name="Text 25"/>
+          <p:cNvPr id="742527710" name="Text 25"/>
           <p:cNvSpPr/>
           <p:nvPr/>
         </p:nvSpPr>
@@ -19432,7 +19432,7 @@
       </p:sp>
       <p:sp>
         <p:nvSpPr>
-          <p:cNvPr id="1947575766" name="Text 26"/>
+          <p:cNvPr id="1947991563" name="Text 26"/>
           <p:cNvSpPr/>
           <p:nvPr/>
         </p:nvSpPr>
@@ -19472,7 +19472,7 @@
       </p:sp>
       <p:sp>
         <p:nvSpPr>
-          <p:cNvPr id="2058887589" name="Shape 27"/>
+          <p:cNvPr id="1078304528" name="Shape 27"/>
           <p:cNvSpPr/>
           <p:nvPr/>
         </p:nvSpPr>
@@ -19494,7 +19494,7 @@
       </p:sp>
       <p:pic>
         <p:nvPicPr>
-          <p:cNvPr id="832448955" name="Image 8" descr="preencoded.png"/>
+          <p:cNvPr id="1555253897" name="Image 8" descr="preencoded.png"/>
           <p:cNvPicPr>
             <a:picLocks noChangeAspect="1"/>
           </p:cNvPicPr>
@@ -19516,7 +19516,7 @@
       </p:pic>
       <p:sp>
         <p:nvSpPr>
-          <p:cNvPr id="1947260878" name="Text 28"/>
+          <p:cNvPr id="1112250648" name="Text 28"/>
           <p:cNvSpPr/>
           <p:nvPr/>
         </p:nvSpPr>
@@ -19556,7 +19556,7 @@
       </p:sp>
       <p:sp>
         <p:nvSpPr>
-          <p:cNvPr id="624797576" name="Text 29"/>
+          <p:cNvPr id="709206798" name="Text 29"/>
           <p:cNvSpPr/>
           <p:nvPr/>
         </p:nvSpPr>
@@ -19596,7 +19596,7 @@
       </p:sp>
       <p:sp>
         <p:nvSpPr>
-          <p:cNvPr id="1532428795" name="Text 30"/>
+          <p:cNvPr id="698716645" name="Text 30"/>
           <p:cNvSpPr/>
           <p:nvPr/>
         </p:nvSpPr>
@@ -19636,7 +19636,7 @@
       </p:sp>
       <p:sp>
         <p:nvSpPr>
-          <p:cNvPr id="1759025919" name="Text 31"/>
+          <p:cNvPr id="287081067" name="Text 31"/>
           <p:cNvSpPr/>
           <p:nvPr/>
         </p:nvSpPr>
@@ -19716,7 +19716,7 @@
       </p:grpSpPr>
       <p:sp>
         <p:nvSpPr>
-          <p:cNvPr id="939929730" name="Text 0"/>
+          <p:cNvPr id="710962477" name="Text 0"/>
           <p:cNvSpPr/>
           <p:nvPr/>
         </p:nvSpPr>
@@ -19756,7 +19756,7 @@
       </p:sp>
       <p:sp>
         <p:nvSpPr>
-          <p:cNvPr id="1558669123" name="Text 1"/>
+          <p:cNvPr id="275122741" name="Text 1"/>
           <p:cNvSpPr/>
           <p:nvPr/>
         </p:nvSpPr>
@@ -19796,7 +19796,7 @@
       </p:sp>
       <p:sp>
         <p:nvSpPr>
-          <p:cNvPr id="132007608" name="Text 2"/>
+          <p:cNvPr id="486042028" name="Text 2"/>
           <p:cNvSpPr/>
           <p:nvPr/>
         </p:nvSpPr>
@@ -19836,7 +19836,7 @@
       </p:sp>
       <p:sp>
         <p:nvSpPr>
-          <p:cNvPr id="696443240" name="Shape 3"/>
+          <p:cNvPr id="623211575" name="Shape 3"/>
           <p:cNvSpPr/>
           <p:nvPr/>
         </p:nvSpPr>
@@ -19863,7 +19863,7 @@
       </p:sp>
       <p:pic>
         <p:nvPicPr>
-          <p:cNvPr id="1198271567" name="Image 0" descr="preencoded.png"/>
+          <p:cNvPr id="43657184" name="Image 0" descr="preencoded.png"/>
           <p:cNvPicPr>
             <a:picLocks noChangeAspect="1"/>
           </p:cNvPicPr>
@@ -19885,7 +19885,7 @@
       </p:pic>
       <p:sp>
         <p:nvSpPr>
-          <p:cNvPr id="82009395" name="Text 4"/>
+          <p:cNvPr id="1134315532" name="Text 4"/>
           <p:cNvSpPr/>
           <p:nvPr/>
         </p:nvSpPr>
@@ -19925,7 +19925,7 @@
       </p:sp>
       <p:sp>
         <p:nvSpPr>
-          <p:cNvPr id="765778594" name="Text 5"/>
+          <p:cNvPr id="1454977527" name="Text 5"/>
           <p:cNvSpPr/>
           <p:nvPr/>
         </p:nvSpPr>
@@ -19965,7 +19965,7 @@
       </p:sp>
       <p:sp>
         <p:nvSpPr>
-          <p:cNvPr id="2082748381" name="Shape 6"/>
+          <p:cNvPr id="1942309114" name="Shape 6"/>
           <p:cNvSpPr/>
           <p:nvPr/>
         </p:nvSpPr>
@@ -19992,7 +19992,7 @@
       </p:sp>
       <p:pic>
         <p:nvPicPr>
-          <p:cNvPr id="1739953416" name="Image 1" descr="preencoded.png"/>
+          <p:cNvPr id="1726544725" name="Image 1" descr="preencoded.png"/>
           <p:cNvPicPr>
             <a:picLocks noChangeAspect="1"/>
           </p:cNvPicPr>
@@ -20014,7 +20014,7 @@
       </p:pic>
       <p:sp>
         <p:nvSpPr>
-          <p:cNvPr id="554779030" name="Text 7"/>
+          <p:cNvPr id="1599131603" name="Text 7"/>
           <p:cNvSpPr/>
           <p:nvPr/>
         </p:nvSpPr>
@@ -20054,7 +20054,7 @@
       </p:sp>
       <p:sp>
         <p:nvSpPr>
-          <p:cNvPr id="2015868972" name="Text 8"/>
+          <p:cNvPr id="1928484784" name="Text 8"/>
           <p:cNvSpPr/>
           <p:nvPr/>
         </p:nvSpPr>
@@ -20094,7 +20094,7 @@
       </p:sp>
       <p:sp>
         <p:nvSpPr>
-          <p:cNvPr id="803454714" name="Shape 9"/>
+          <p:cNvPr id="364941497" name="Shape 9"/>
           <p:cNvSpPr/>
           <p:nvPr/>
         </p:nvSpPr>
@@ -20121,7 +20121,7 @@
       </p:sp>
       <p:pic>
         <p:nvPicPr>
-          <p:cNvPr id="2130179649" name="Image 2" descr="preencoded.png"/>
+          <p:cNvPr id="99859344" name="Image 2" descr="preencoded.png"/>
           <p:cNvPicPr>
             <a:picLocks noChangeAspect="1"/>
           </p:cNvPicPr>
@@ -20143,7 +20143,7 @@
       </p:pic>
       <p:sp>
         <p:nvSpPr>
-          <p:cNvPr id="1401248376" name="Text 10"/>
+          <p:cNvPr id="795247131" name="Text 10"/>
           <p:cNvSpPr/>
           <p:nvPr/>
         </p:nvSpPr>
@@ -20183,7 +20183,7 @@
       </p:sp>
       <p:sp>
         <p:nvSpPr>
-          <p:cNvPr id="570890125" name="Text 11"/>
+          <p:cNvPr id="716705493" name="Text 11"/>
           <p:cNvSpPr/>
           <p:nvPr/>
         </p:nvSpPr>
@@ -20223,7 +20223,7 @@
       </p:sp>
       <p:sp>
         <p:nvSpPr>
-          <p:cNvPr id="1419569714" name="Shape 12"/>
+          <p:cNvPr id="640054896" name="Shape 12"/>
           <p:cNvSpPr/>
           <p:nvPr/>
         </p:nvSpPr>
@@ -20250,7 +20250,7 @@
       </p:sp>
       <p:pic>
         <p:nvPicPr>
-          <p:cNvPr id="784549970" name="Image 3" descr="preencoded.png"/>
+          <p:cNvPr id="841093941" name="Image 3" descr="preencoded.png"/>
           <p:cNvPicPr>
             <a:picLocks noChangeAspect="1"/>
           </p:cNvPicPr>
@@ -20272,7 +20272,7 @@
       </p:pic>
       <p:sp>
         <p:nvSpPr>
-          <p:cNvPr id="1372890220" name="Text 13"/>
+          <p:cNvPr id="1281741897" name="Text 13"/>
           <p:cNvSpPr/>
           <p:nvPr/>
         </p:nvSpPr>
@@ -20312,7 +20312,7 @@
       </p:sp>
       <p:sp>
         <p:nvSpPr>
-          <p:cNvPr id="1433840317" name="Text 14"/>
+          <p:cNvPr id="1585154599" name="Text 14"/>
           <p:cNvSpPr/>
           <p:nvPr/>
         </p:nvSpPr>
@@ -20352,7 +20352,7 @@
       </p:sp>
       <p:sp>
         <p:nvSpPr>
-          <p:cNvPr id="1034601107" name="Text 15"/>
+          <p:cNvPr id="1937467106" name="Text 15"/>
           <p:cNvSpPr/>
           <p:nvPr/>
         </p:nvSpPr>
@@ -20392,7 +20392,7 @@
       </p:sp>
       <p:sp>
         <p:nvSpPr>
-          <p:cNvPr id="42687325" name="Text 16"/>
+          <p:cNvPr id="1375350043" name="Text 16"/>
           <p:cNvSpPr/>
           <p:nvPr/>
         </p:nvSpPr>

--- a/frontend/public/markit.pptx
+++ b/frontend/public/markit.pptx
@@ -150,7 +150,7 @@
       </p:grpSpPr>
       <p:sp>
         <p:nvSpPr>
-          <p:cNvPr id="98808638" name="Header Placeholder 1"/>
+          <p:cNvPr id="1295788684" name="Header Placeholder 1"/>
           <p:cNvSpPr>
             <a:spLocks noGrp="1"/>
           </p:cNvSpPr>
@@ -184,7 +184,7 @@
       </p:sp>
       <p:sp>
         <p:nvSpPr>
-          <p:cNvPr id="965136412" name="Date Placeholder 2"/>
+          <p:cNvPr id="2054763747" name="Date Placeholder 2"/>
           <p:cNvSpPr>
             <a:spLocks noGrp="1"/>
           </p:cNvSpPr>
@@ -222,7 +222,7 @@
       </p:sp>
       <p:sp>
         <p:nvSpPr>
-          <p:cNvPr id="280352327" name="Slide Image Placeholder 3"/>
+          <p:cNvPr id="1972393672" name="Slide Image Placeholder 3"/>
           <p:cNvSpPr>
             <a:spLocks noChangeAspect="1" noGrp="1" noRot="1"/>
           </p:cNvSpPr>
@@ -258,7 +258,7 @@
       </p:sp>
       <p:sp>
         <p:nvSpPr>
-          <p:cNvPr id="2049661154" name="Notes Placeholder 4"/>
+          <p:cNvPr id="1352454452" name="Notes Placeholder 4"/>
           <p:cNvSpPr>
             <a:spLocks noGrp="1"/>
           </p:cNvSpPr>
@@ -332,7 +332,7 @@
       </p:sp>
       <p:sp>
         <p:nvSpPr>
-          <p:cNvPr id="121391949" name="Footer Placeholder 5"/>
+          <p:cNvPr id="59116455" name="Footer Placeholder 5"/>
           <p:cNvSpPr>
             <a:spLocks noGrp="1"/>
           </p:cNvSpPr>
@@ -366,7 +366,7 @@
       </p:sp>
       <p:sp>
         <p:nvSpPr>
-          <p:cNvPr id="2033470768" name="Slide Number Placeholder 6"/>
+          <p:cNvPr id="1696714284" name="Slide Number Placeholder 6"/>
           <p:cNvSpPr>
             <a:spLocks noGrp="1"/>
           </p:cNvSpPr>
@@ -519,7 +519,7 @@
       </p:grpSpPr>
       <p:sp>
         <p:nvSpPr>
-          <p:cNvPr id="1342180299" name="Slide Image Placeholder 1"/>
+          <p:cNvPr id="1497623920" name="Slide Image Placeholder 1"/>
           <p:cNvSpPr>
             <a:spLocks noChangeAspect="1" noGrp="1" noRot="1"/>
           </p:cNvSpPr>
@@ -531,7 +531,7 @@
       </p:sp>
       <p:sp>
         <p:nvSpPr>
-          <p:cNvPr id="1283950823" name="Notes Placeholder 2"/>
+          <p:cNvPr id="1956852226" name="Notes Placeholder 2"/>
           <p:cNvSpPr>
             <a:spLocks noGrp="1"/>
           </p:cNvSpPr>
@@ -553,7 +553,7 @@
       </p:sp>
       <p:sp>
         <p:nvSpPr>
-          <p:cNvPr id="1228462804" name="Slide Number Placeholder 3"/>
+          <p:cNvPr id="1089045592" name="Slide Number Placeholder 3"/>
           <p:cNvSpPr>
             <a:spLocks noGrp="1"/>
           </p:cNvSpPr>
@@ -604,7 +604,7 @@
       </p:grpSpPr>
       <p:sp>
         <p:nvSpPr>
-          <p:cNvPr id="2006825378" name="Slide Image Placeholder 1"/>
+          <p:cNvPr id="916965973" name="Slide Image Placeholder 1"/>
           <p:cNvSpPr>
             <a:spLocks noChangeAspect="1" noGrp="1" noRot="1"/>
           </p:cNvSpPr>
@@ -616,7 +616,7 @@
       </p:sp>
       <p:sp>
         <p:nvSpPr>
-          <p:cNvPr id="444028091" name="Notes Placeholder 2"/>
+          <p:cNvPr id="2112869320" name="Notes Placeholder 2"/>
           <p:cNvSpPr>
             <a:spLocks noGrp="1"/>
           </p:cNvSpPr>
@@ -642,7 +642,7 @@
       </p:sp>
       <p:sp>
         <p:nvSpPr>
-          <p:cNvPr id="343495222" name="Slide Number Placeholder 3"/>
+          <p:cNvPr id="1494528817" name="Slide Number Placeholder 3"/>
           <p:cNvSpPr>
             <a:spLocks noGrp="1"/>
           </p:cNvSpPr>
@@ -693,7 +693,7 @@
       </p:grpSpPr>
       <p:sp>
         <p:nvSpPr>
-          <p:cNvPr id="1285767309" name="Slide Image Placeholder 1"/>
+          <p:cNvPr id="1507511635" name="Slide Image Placeholder 1"/>
           <p:cNvSpPr>
             <a:spLocks noChangeAspect="1" noGrp="1" noRot="1"/>
           </p:cNvSpPr>
@@ -705,7 +705,7 @@
       </p:sp>
       <p:sp>
         <p:nvSpPr>
-          <p:cNvPr id="1296486093" name="Notes Placeholder 2"/>
+          <p:cNvPr id="1358788315" name="Notes Placeholder 2"/>
           <p:cNvSpPr>
             <a:spLocks noGrp="1"/>
           </p:cNvSpPr>
@@ -727,7 +727,7 @@
       </p:sp>
       <p:sp>
         <p:nvSpPr>
-          <p:cNvPr id="332579153" name="Slide Number Placeholder 3"/>
+          <p:cNvPr id="657429436" name="Slide Number Placeholder 3"/>
           <p:cNvSpPr>
             <a:spLocks noGrp="1"/>
           </p:cNvSpPr>
@@ -778,7 +778,7 @@
       </p:grpSpPr>
       <p:sp>
         <p:nvSpPr>
-          <p:cNvPr id="790398127" name="Slide Image Placeholder 1"/>
+          <p:cNvPr id="963988536" name="Slide Image Placeholder 1"/>
           <p:cNvSpPr>
             <a:spLocks noChangeAspect="1" noGrp="1" noRot="1"/>
           </p:cNvSpPr>
@@ -790,7 +790,7 @@
       </p:sp>
       <p:sp>
         <p:nvSpPr>
-          <p:cNvPr id="1305619039" name="Notes Placeholder 2"/>
+          <p:cNvPr id="1134627162" name="Notes Placeholder 2"/>
           <p:cNvSpPr>
             <a:spLocks noGrp="1"/>
           </p:cNvSpPr>
@@ -812,7 +812,7 @@
       </p:sp>
       <p:sp>
         <p:nvSpPr>
-          <p:cNvPr id="1617453672" name="Slide Number Placeholder 3"/>
+          <p:cNvPr id="1926882389" name="Slide Number Placeholder 3"/>
           <p:cNvSpPr>
             <a:spLocks noGrp="1"/>
           </p:cNvSpPr>
@@ -863,7 +863,7 @@
       </p:grpSpPr>
       <p:sp>
         <p:nvSpPr>
-          <p:cNvPr id="2014579092" name="Slide Image Placeholder 1"/>
+          <p:cNvPr id="1375688" name="Slide Image Placeholder 1"/>
           <p:cNvSpPr>
             <a:spLocks noChangeAspect="1" noGrp="1" noRot="1"/>
           </p:cNvSpPr>
@@ -875,7 +875,7 @@
       </p:sp>
       <p:sp>
         <p:nvSpPr>
-          <p:cNvPr id="1271734074" name="Notes Placeholder 2"/>
+          <p:cNvPr id="1762393368" name="Notes Placeholder 2"/>
           <p:cNvSpPr>
             <a:spLocks noGrp="1"/>
           </p:cNvSpPr>
@@ -897,7 +897,7 @@
       </p:sp>
       <p:sp>
         <p:nvSpPr>
-          <p:cNvPr id="2036194682" name="Slide Number Placeholder 3"/>
+          <p:cNvPr id="240575142" name="Slide Number Placeholder 3"/>
           <p:cNvSpPr>
             <a:spLocks noGrp="1"/>
           </p:cNvSpPr>
@@ -948,7 +948,7 @@
       </p:grpSpPr>
       <p:sp>
         <p:nvSpPr>
-          <p:cNvPr id="7261523" name="Slide Image Placeholder 1"/>
+          <p:cNvPr id="474240501" name="Slide Image Placeholder 1"/>
           <p:cNvSpPr>
             <a:spLocks noChangeAspect="1" noGrp="1" noRot="1"/>
           </p:cNvSpPr>
@@ -960,7 +960,7 @@
       </p:sp>
       <p:sp>
         <p:nvSpPr>
-          <p:cNvPr id="294370950" name="Notes Placeholder 2"/>
+          <p:cNvPr id="1795259527" name="Notes Placeholder 2"/>
           <p:cNvSpPr>
             <a:spLocks noGrp="1"/>
           </p:cNvSpPr>
@@ -986,7 +986,7 @@
       </p:sp>
       <p:sp>
         <p:nvSpPr>
-          <p:cNvPr id="1208605390" name="Slide Number Placeholder 3"/>
+          <p:cNvPr id="687246744" name="Slide Number Placeholder 3"/>
           <p:cNvSpPr>
             <a:spLocks noGrp="1"/>
           </p:cNvSpPr>
@@ -1037,7 +1037,7 @@
       </p:grpSpPr>
       <p:sp>
         <p:nvSpPr>
-          <p:cNvPr id="1920380330" name="Slide Image Placeholder 1"/>
+          <p:cNvPr id="611851346" name="Slide Image Placeholder 1"/>
           <p:cNvSpPr>
             <a:spLocks noChangeAspect="1" noGrp="1" noRot="1"/>
           </p:cNvSpPr>
@@ -1049,7 +1049,7 @@
       </p:sp>
       <p:sp>
         <p:nvSpPr>
-          <p:cNvPr id="966322998" name="Notes Placeholder 2"/>
+          <p:cNvPr id="6145442" name="Notes Placeholder 2"/>
           <p:cNvSpPr>
             <a:spLocks noGrp="1"/>
           </p:cNvSpPr>
@@ -1075,7 +1075,7 @@
       </p:sp>
       <p:sp>
         <p:nvSpPr>
-          <p:cNvPr id="201098648" name="Slide Number Placeholder 3"/>
+          <p:cNvPr id="614347778" name="Slide Number Placeholder 3"/>
           <p:cNvSpPr>
             <a:spLocks noGrp="1"/>
           </p:cNvSpPr>
@@ -1126,7 +1126,7 @@
       </p:grpSpPr>
       <p:sp>
         <p:nvSpPr>
-          <p:cNvPr id="237835526" name="Slide Image Placeholder 1"/>
+          <p:cNvPr id="2123545837" name="Slide Image Placeholder 1"/>
           <p:cNvSpPr>
             <a:spLocks noChangeAspect="1" noGrp="1" noRot="1"/>
           </p:cNvSpPr>
@@ -1138,7 +1138,7 @@
       </p:sp>
       <p:sp>
         <p:nvSpPr>
-          <p:cNvPr id="517568739" name="Notes Placeholder 2"/>
+          <p:cNvPr id="1681413790" name="Notes Placeholder 2"/>
           <p:cNvSpPr>
             <a:spLocks noGrp="1"/>
           </p:cNvSpPr>
@@ -1164,7 +1164,7 @@
       </p:sp>
       <p:sp>
         <p:nvSpPr>
-          <p:cNvPr id="567151414" name="Slide Number Placeholder 3"/>
+          <p:cNvPr id="282611372" name="Slide Number Placeholder 3"/>
           <p:cNvSpPr>
             <a:spLocks noGrp="1"/>
           </p:cNvSpPr>
@@ -1215,7 +1215,7 @@
       </p:grpSpPr>
       <p:sp>
         <p:nvSpPr>
-          <p:cNvPr id="1968245220" name="Slide Image Placeholder 1"/>
+          <p:cNvPr id="292646456" name="Slide Image Placeholder 1"/>
           <p:cNvSpPr>
             <a:spLocks noChangeAspect="1" noGrp="1" noRot="1"/>
           </p:cNvSpPr>
@@ -1227,7 +1227,7 @@
       </p:sp>
       <p:sp>
         <p:nvSpPr>
-          <p:cNvPr id="494566312" name="Notes Placeholder 2"/>
+          <p:cNvPr id="1825711672" name="Notes Placeholder 2"/>
           <p:cNvSpPr>
             <a:spLocks noGrp="1"/>
           </p:cNvSpPr>
@@ -1253,7 +1253,7 @@
       </p:sp>
       <p:sp>
         <p:nvSpPr>
-          <p:cNvPr id="1867843327" name="Slide Number Placeholder 3"/>
+          <p:cNvPr id="1051555820" name="Slide Number Placeholder 3"/>
           <p:cNvSpPr>
             <a:spLocks noGrp="1"/>
           </p:cNvSpPr>
@@ -1304,7 +1304,7 @@
       </p:grpSpPr>
       <p:sp>
         <p:nvSpPr>
-          <p:cNvPr id="2085747926" name="Slide Image Placeholder 1"/>
+          <p:cNvPr id="1919008971" name="Slide Image Placeholder 1"/>
           <p:cNvSpPr>
             <a:spLocks noChangeAspect="1" noGrp="1" noRot="1"/>
           </p:cNvSpPr>
@@ -1316,7 +1316,7 @@
       </p:sp>
       <p:sp>
         <p:nvSpPr>
-          <p:cNvPr id="11589891" name="Notes Placeholder 2"/>
+          <p:cNvPr id="848318635" name="Notes Placeholder 2"/>
           <p:cNvSpPr>
             <a:spLocks noGrp="1"/>
           </p:cNvSpPr>
@@ -1342,7 +1342,7 @@
       </p:sp>
       <p:sp>
         <p:nvSpPr>
-          <p:cNvPr id="1296846195" name="Slide Number Placeholder 3"/>
+          <p:cNvPr id="1537532208" name="Slide Number Placeholder 3"/>
           <p:cNvSpPr>
             <a:spLocks noGrp="1"/>
           </p:cNvSpPr>
@@ -1393,7 +1393,7 @@
       </p:grpSpPr>
       <p:sp>
         <p:nvSpPr>
-          <p:cNvPr id="2136408340" name="Slide Image Placeholder 1"/>
+          <p:cNvPr id="359363097" name="Slide Image Placeholder 1"/>
           <p:cNvSpPr>
             <a:spLocks noChangeAspect="1" noGrp="1" noRot="1"/>
           </p:cNvSpPr>
@@ -1405,7 +1405,7 @@
       </p:sp>
       <p:sp>
         <p:nvSpPr>
-          <p:cNvPr id="273620563" name="Notes Placeholder 2"/>
+          <p:cNvPr id="990723226" name="Notes Placeholder 2"/>
           <p:cNvSpPr>
             <a:spLocks noGrp="1"/>
           </p:cNvSpPr>
@@ -1427,7 +1427,7 @@
       </p:sp>
       <p:sp>
         <p:nvSpPr>
-          <p:cNvPr id="255408208" name="Slide Number Placeholder 3"/>
+          <p:cNvPr id="1860973592" name="Slide Number Placeholder 3"/>
           <p:cNvSpPr>
             <a:spLocks noGrp="1"/>
           </p:cNvSpPr>
@@ -1478,7 +1478,7 @@
       </p:grpSpPr>
       <p:sp>
         <p:nvSpPr>
-          <p:cNvPr id="767875718" name="Slide Image Placeholder 1"/>
+          <p:cNvPr id="639427234" name="Slide Image Placeholder 1"/>
           <p:cNvSpPr>
             <a:spLocks noChangeAspect="1" noGrp="1" noRot="1"/>
           </p:cNvSpPr>
@@ -1490,7 +1490,7 @@
       </p:sp>
       <p:sp>
         <p:nvSpPr>
-          <p:cNvPr id="205462366" name="Notes Placeholder 2"/>
+          <p:cNvPr id="2129510347" name="Notes Placeholder 2"/>
           <p:cNvSpPr>
             <a:spLocks noGrp="1"/>
           </p:cNvSpPr>
@@ -1516,7 +1516,7 @@
       </p:sp>
       <p:sp>
         <p:nvSpPr>
-          <p:cNvPr id="1171138181" name="Slide Number Placeholder 3"/>
+          <p:cNvPr id="403392864" name="Slide Number Placeholder 3"/>
           <p:cNvSpPr>
             <a:spLocks noGrp="1"/>
           </p:cNvSpPr>
@@ -1567,7 +1567,7 @@
       </p:grpSpPr>
       <p:sp>
         <p:nvSpPr>
-          <p:cNvPr id="1347214457" name="Slide Image Placeholder 1"/>
+          <p:cNvPr id="1929293239" name="Slide Image Placeholder 1"/>
           <p:cNvSpPr>
             <a:spLocks noChangeAspect="1" noGrp="1" noRot="1"/>
           </p:cNvSpPr>
@@ -1579,7 +1579,7 @@
       </p:sp>
       <p:sp>
         <p:nvSpPr>
-          <p:cNvPr id="1328178010" name="Notes Placeholder 2"/>
+          <p:cNvPr id="652002516" name="Notes Placeholder 2"/>
           <p:cNvSpPr>
             <a:spLocks noGrp="1"/>
           </p:cNvSpPr>
@@ -1605,7 +1605,7 @@
       </p:sp>
       <p:sp>
         <p:nvSpPr>
-          <p:cNvPr id="1121065187" name="Slide Number Placeholder 3"/>
+          <p:cNvPr id="1322545185" name="Slide Number Placeholder 3"/>
           <p:cNvSpPr>
             <a:spLocks noGrp="1"/>
           </p:cNvSpPr>
@@ -1656,7 +1656,7 @@
       </p:grpSpPr>
       <p:sp>
         <p:nvSpPr>
-          <p:cNvPr id="397633020" name="Slide Image Placeholder 1"/>
+          <p:cNvPr id="1617878504" name="Slide Image Placeholder 1"/>
           <p:cNvSpPr>
             <a:spLocks noChangeAspect="1" noGrp="1" noRot="1"/>
           </p:cNvSpPr>
@@ -1668,7 +1668,7 @@
       </p:sp>
       <p:sp>
         <p:nvSpPr>
-          <p:cNvPr id="933137557" name="Notes Placeholder 2"/>
+          <p:cNvPr id="1599766014" name="Notes Placeholder 2"/>
           <p:cNvSpPr>
             <a:spLocks noGrp="1"/>
           </p:cNvSpPr>
@@ -1694,7 +1694,7 @@
       </p:sp>
       <p:sp>
         <p:nvSpPr>
-          <p:cNvPr id="1240236140" name="Slide Number Placeholder 3"/>
+          <p:cNvPr id="560098753" name="Slide Number Placeholder 3"/>
           <p:cNvSpPr>
             <a:spLocks noGrp="1"/>
           </p:cNvSpPr>
@@ -1745,7 +1745,7 @@
       </p:grpSpPr>
       <p:sp>
         <p:nvSpPr>
-          <p:cNvPr id="1609260470" name="Slide Image Placeholder 1"/>
+          <p:cNvPr id="470887291" name="Slide Image Placeholder 1"/>
           <p:cNvSpPr>
             <a:spLocks noChangeAspect="1" noGrp="1" noRot="1"/>
           </p:cNvSpPr>
@@ -1757,7 +1757,7 @@
       </p:sp>
       <p:sp>
         <p:nvSpPr>
-          <p:cNvPr id="757316205" name="Notes Placeholder 2"/>
+          <p:cNvPr id="459074848" name="Notes Placeholder 2"/>
           <p:cNvSpPr>
             <a:spLocks noGrp="1"/>
           </p:cNvSpPr>
@@ -1783,7 +1783,7 @@
       </p:sp>
       <p:sp>
         <p:nvSpPr>
-          <p:cNvPr id="115604361" name="Slide Number Placeholder 3"/>
+          <p:cNvPr id="26897569" name="Slide Number Placeholder 3"/>
           <p:cNvSpPr>
             <a:spLocks noGrp="1"/>
           </p:cNvSpPr>
@@ -1834,7 +1834,7 @@
       </p:grpSpPr>
       <p:sp>
         <p:nvSpPr>
-          <p:cNvPr id="2011677148" name="Slide Image Placeholder 1"/>
+          <p:cNvPr id="915940218" name="Slide Image Placeholder 1"/>
           <p:cNvSpPr>
             <a:spLocks noChangeAspect="1" noGrp="1" noRot="1"/>
           </p:cNvSpPr>
@@ -1846,7 +1846,7 @@
       </p:sp>
       <p:sp>
         <p:nvSpPr>
-          <p:cNvPr id="1822301046" name="Notes Placeholder 2"/>
+          <p:cNvPr id="595214760" name="Notes Placeholder 2"/>
           <p:cNvSpPr>
             <a:spLocks noGrp="1"/>
           </p:cNvSpPr>
@@ -1872,7 +1872,7 @@
       </p:sp>
       <p:sp>
         <p:nvSpPr>
-          <p:cNvPr id="2119682064" name="Slide Number Placeholder 3"/>
+          <p:cNvPr id="262347772" name="Slide Number Placeholder 3"/>
           <p:cNvSpPr>
             <a:spLocks noGrp="1"/>
           </p:cNvSpPr>
@@ -1923,7 +1923,7 @@
       </p:grpSpPr>
       <p:sp>
         <p:nvSpPr>
-          <p:cNvPr id="251293203" name="Slide Image Placeholder 1"/>
+          <p:cNvPr id="849573518" name="Slide Image Placeholder 1"/>
           <p:cNvSpPr>
             <a:spLocks noChangeAspect="1" noGrp="1" noRot="1"/>
           </p:cNvSpPr>
@@ -1935,7 +1935,7 @@
       </p:sp>
       <p:sp>
         <p:nvSpPr>
-          <p:cNvPr id="1207735312" name="Notes Placeholder 2"/>
+          <p:cNvPr id="1261973269" name="Notes Placeholder 2"/>
           <p:cNvSpPr>
             <a:spLocks noGrp="1"/>
           </p:cNvSpPr>
@@ -1961,7 +1961,7 @@
       </p:sp>
       <p:sp>
         <p:nvSpPr>
-          <p:cNvPr id="64215602" name="Slide Number Placeholder 3"/>
+          <p:cNvPr id="1523300201" name="Slide Number Placeholder 3"/>
           <p:cNvSpPr>
             <a:spLocks noGrp="1"/>
           </p:cNvSpPr>
@@ -2012,7 +2012,7 @@
       </p:grpSpPr>
       <p:sp>
         <p:nvSpPr>
-          <p:cNvPr id="415144416" name="Slide Image Placeholder 1"/>
+          <p:cNvPr id="1779097825" name="Slide Image Placeholder 1"/>
           <p:cNvSpPr>
             <a:spLocks noChangeAspect="1" noGrp="1" noRot="1"/>
           </p:cNvSpPr>
@@ -2024,7 +2024,7 @@
       </p:sp>
       <p:sp>
         <p:nvSpPr>
-          <p:cNvPr id="339911038" name="Notes Placeholder 2"/>
+          <p:cNvPr id="67801819" name="Notes Placeholder 2"/>
           <p:cNvSpPr>
             <a:spLocks noGrp="1"/>
           </p:cNvSpPr>
@@ -2050,7 +2050,7 @@
       </p:sp>
       <p:sp>
         <p:nvSpPr>
-          <p:cNvPr id="1838594977" name="Slide Number Placeholder 3"/>
+          <p:cNvPr id="463154199" name="Slide Number Placeholder 3"/>
           <p:cNvSpPr>
             <a:spLocks noGrp="1"/>
           </p:cNvSpPr>
@@ -2101,7 +2101,7 @@
       </p:grpSpPr>
       <p:sp>
         <p:nvSpPr>
-          <p:cNvPr id="1852300453" name="Slide Image Placeholder 1"/>
+          <p:cNvPr id="1958492346" name="Slide Image Placeholder 1"/>
           <p:cNvSpPr>
             <a:spLocks noChangeAspect="1" noGrp="1" noRot="1"/>
           </p:cNvSpPr>
@@ -2113,7 +2113,7 @@
       </p:sp>
       <p:sp>
         <p:nvSpPr>
-          <p:cNvPr id="1937070318" name="Notes Placeholder 2"/>
+          <p:cNvPr id="1352845159" name="Notes Placeholder 2"/>
           <p:cNvSpPr>
             <a:spLocks noGrp="1"/>
           </p:cNvSpPr>
@@ -2139,7 +2139,7 @@
       </p:sp>
       <p:sp>
         <p:nvSpPr>
-          <p:cNvPr id="315789829" name="Slide Number Placeholder 3"/>
+          <p:cNvPr id="685169902" name="Slide Number Placeholder 3"/>
           <p:cNvSpPr>
             <a:spLocks noGrp="1"/>
           </p:cNvSpPr>
@@ -2190,7 +2190,7 @@
       </p:grpSpPr>
       <p:sp>
         <p:nvSpPr>
-          <p:cNvPr id="1755335843" name="Slide Image Placeholder 1"/>
+          <p:cNvPr id="1395841991" name="Slide Image Placeholder 1"/>
           <p:cNvSpPr>
             <a:spLocks noChangeAspect="1" noGrp="1" noRot="1"/>
           </p:cNvSpPr>
@@ -2202,7 +2202,7 @@
       </p:sp>
       <p:sp>
         <p:nvSpPr>
-          <p:cNvPr id="1766635110" name="Notes Placeholder 2"/>
+          <p:cNvPr id="1339827966" name="Notes Placeholder 2"/>
           <p:cNvSpPr>
             <a:spLocks noGrp="1"/>
           </p:cNvSpPr>
@@ -2228,7 +2228,7 @@
       </p:sp>
       <p:sp>
         <p:nvSpPr>
-          <p:cNvPr id="1597232289" name="Slide Number Placeholder 3"/>
+          <p:cNvPr id="1818741431" name="Slide Number Placeholder 3"/>
           <p:cNvSpPr>
             <a:spLocks noGrp="1"/>
           </p:cNvSpPr>
@@ -2593,7 +2593,7 @@
       </p:grpSpPr>
       <p:pic>
         <p:nvPicPr>
-          <p:cNvPr id="678818616" name="Image 0" descr="preencoded.png"/>
+          <p:cNvPr id="2092714105" name="Image 0" descr="preencoded.png"/>
           <p:cNvPicPr>
             <a:picLocks noChangeAspect="1"/>
           </p:cNvPicPr>
@@ -2615,7 +2615,7 @@
       </p:pic>
       <p:pic>
         <p:nvPicPr>
-          <p:cNvPr id="2143424176" name="Image 1" descr="preencoded.png"/>
+          <p:cNvPr id="1635717589" name="Image 1" descr="preencoded.png"/>
           <p:cNvPicPr>
             <a:picLocks noChangeAspect="1"/>
           </p:cNvPicPr>
@@ -2637,7 +2637,7 @@
       </p:pic>
       <p:sp>
         <p:nvSpPr>
-          <p:cNvPr id="1882063339" name="Text 0"/>
+          <p:cNvPr id="2132920700" name="Text 0"/>
           <p:cNvSpPr/>
           <p:nvPr/>
         </p:nvSpPr>
@@ -2677,7 +2677,7 @@
       </p:sp>
       <p:sp>
         <p:nvSpPr>
-          <p:cNvPr id="602683510" name="Text 1"/>
+          <p:cNvPr id="49261266" name="Text 1"/>
           <p:cNvSpPr/>
           <p:nvPr/>
         </p:nvSpPr>
@@ -2717,7 +2717,7 @@
       </p:sp>
       <p:sp>
         <p:nvSpPr>
-          <p:cNvPr id="809825457" name="Text 2"/>
+          <p:cNvPr id="1298332432" name="Text 2"/>
           <p:cNvSpPr/>
           <p:nvPr/>
         </p:nvSpPr>
@@ -2757,7 +2757,7 @@
       </p:sp>
       <p:sp>
         <p:nvSpPr>
-          <p:cNvPr id="1374457720" name="Text 3"/>
+          <p:cNvPr id="558407042" name="Text 3"/>
           <p:cNvSpPr/>
           <p:nvPr/>
         </p:nvSpPr>
@@ -2837,7 +2837,7 @@
       </p:grpSpPr>
       <p:sp>
         <p:nvSpPr>
-          <p:cNvPr id="1060022580" name="Text 0"/>
+          <p:cNvPr id="1671526492" name="Text 0"/>
           <p:cNvSpPr/>
           <p:nvPr/>
         </p:nvSpPr>
@@ -2877,7 +2877,7 @@
       </p:sp>
       <p:sp>
         <p:nvSpPr>
-          <p:cNvPr id="1106229528" name="Text 1"/>
+          <p:cNvPr id="483028084" name="Text 1"/>
           <p:cNvSpPr/>
           <p:nvPr/>
         </p:nvSpPr>
@@ -2917,7 +2917,7 @@
       </p:sp>
       <p:sp>
         <p:nvSpPr>
-          <p:cNvPr id="714154618" name="Text 2"/>
+          <p:cNvPr id="1040035376" name="Text 2"/>
           <p:cNvSpPr/>
           <p:nvPr/>
         </p:nvSpPr>
@@ -2957,7 +2957,7 @@
       </p:sp>
       <p:pic>
         <p:nvPicPr>
-          <p:cNvPr id="933692848" name="Image 0" descr="preencoded.png"/>
+          <p:cNvPr id="1536965602" name="Image 0" descr="preencoded.png"/>
           <p:cNvPicPr>
             <a:picLocks noChangeAspect="1"/>
           </p:cNvPicPr>
@@ -2979,7 +2979,7 @@
       </p:pic>
       <p:sp>
         <p:nvSpPr>
-          <p:cNvPr id="845334626" name="Text 3"/>
+          <p:cNvPr id="700737797" name="Text 3"/>
           <p:cNvSpPr/>
           <p:nvPr/>
         </p:nvSpPr>
@@ -3019,7 +3019,7 @@
       </p:sp>
       <p:sp>
         <p:nvSpPr>
-          <p:cNvPr id="1430485196" name="Text 4"/>
+          <p:cNvPr id="594231728" name="Text 4"/>
           <p:cNvSpPr/>
           <p:nvPr/>
         </p:nvSpPr>
@@ -3059,7 +3059,7 @@
       </p:sp>
       <p:pic>
         <p:nvPicPr>
-          <p:cNvPr id="1015902617" name="Image 1" descr="preencoded.png"/>
+          <p:cNvPr id="1825012086" name="Image 1" descr="preencoded.png"/>
           <p:cNvPicPr>
             <a:picLocks noChangeAspect="1"/>
           </p:cNvPicPr>
@@ -3081,7 +3081,7 @@
       </p:pic>
       <p:sp>
         <p:nvSpPr>
-          <p:cNvPr id="1192301378" name="Text 5"/>
+          <p:cNvPr id="483685701" name="Text 5"/>
           <p:cNvSpPr/>
           <p:nvPr/>
         </p:nvSpPr>
@@ -3121,7 +3121,7 @@
       </p:sp>
       <p:sp>
         <p:nvSpPr>
-          <p:cNvPr id="214519690" name="Text 6"/>
+          <p:cNvPr id="344548118" name="Text 6"/>
           <p:cNvSpPr/>
           <p:nvPr/>
         </p:nvSpPr>
@@ -3161,7 +3161,7 @@
       </p:sp>
       <p:sp>
         <p:nvSpPr>
-          <p:cNvPr id="1833233226" name="Text 7"/>
+          <p:cNvPr id="1763541881" name="Text 7"/>
           <p:cNvSpPr/>
           <p:nvPr/>
         </p:nvSpPr>
@@ -3201,7 +3201,7 @@
       </p:sp>
       <p:sp>
         <p:nvSpPr>
-          <p:cNvPr id="1206040973" name="Shape 8"/>
+          <p:cNvPr id="665726243" name="Shape 8"/>
           <p:cNvSpPr/>
           <p:nvPr/>
         </p:nvSpPr>
@@ -3223,7 +3223,7 @@
       </p:sp>
       <p:pic>
         <p:nvPicPr>
-          <p:cNvPr id="1005170874" name="Image 2" descr="preencoded.png"/>
+          <p:cNvPr id="716801989" name="Image 2" descr="preencoded.png"/>
           <p:cNvPicPr>
             <a:picLocks noChangeAspect="1"/>
           </p:cNvPicPr>
@@ -3245,7 +3245,7 @@
       </p:pic>
       <p:sp>
         <p:nvSpPr>
-          <p:cNvPr id="2093232991" name="Text 9"/>
+          <p:cNvPr id="577585919" name="Text 9"/>
           <p:cNvSpPr/>
           <p:nvPr/>
         </p:nvSpPr>
@@ -3285,7 +3285,7 @@
       </p:sp>
       <p:sp>
         <p:nvSpPr>
-          <p:cNvPr id="226221740" name="Text 10"/>
+          <p:cNvPr id="812918103" name="Text 10"/>
           <p:cNvSpPr/>
           <p:nvPr/>
         </p:nvSpPr>
@@ -3325,7 +3325,7 @@
       </p:sp>
       <p:sp>
         <p:nvSpPr>
-          <p:cNvPr id="1679593427" name="Shape 11"/>
+          <p:cNvPr id="2008758448" name="Shape 11"/>
           <p:cNvSpPr/>
           <p:nvPr/>
         </p:nvSpPr>
@@ -3349,7 +3349,7 @@
       </p:sp>
       <p:sp>
         <p:nvSpPr>
-          <p:cNvPr id="730063394" name="Text 12"/>
+          <p:cNvPr id="2048624648" name="Text 12"/>
           <p:cNvSpPr/>
           <p:nvPr/>
         </p:nvSpPr>
@@ -3389,7 +3389,7 @@
       </p:sp>
       <p:sp>
         <p:nvSpPr>
-          <p:cNvPr id="452025866" name="Text 13"/>
+          <p:cNvPr id="282333137" name="Text 13"/>
           <p:cNvSpPr/>
           <p:nvPr/>
         </p:nvSpPr>
@@ -3429,7 +3429,7 @@
       </p:sp>
       <p:sp>
         <p:nvSpPr>
-          <p:cNvPr id="351535730" name="Text 14"/>
+          <p:cNvPr id="362834044" name="Text 14"/>
           <p:cNvSpPr/>
           <p:nvPr/>
         </p:nvSpPr>
@@ -3469,7 +3469,7 @@
       </p:sp>
       <p:sp>
         <p:nvSpPr>
-          <p:cNvPr id="301763069" name="Text 15"/>
+          <p:cNvPr id="1767731991" name="Text 15"/>
           <p:cNvSpPr/>
           <p:nvPr/>
         </p:nvSpPr>
@@ -3509,7 +3509,7 @@
       </p:sp>
       <p:sp>
         <p:nvSpPr>
-          <p:cNvPr id="2066514811" name="Text 16"/>
+          <p:cNvPr id="601617200" name="Text 16"/>
           <p:cNvSpPr/>
           <p:nvPr/>
         </p:nvSpPr>
@@ -3549,7 +3549,7 @@
       </p:sp>
       <p:sp>
         <p:nvSpPr>
-          <p:cNvPr id="332280380" name="Text 17"/>
+          <p:cNvPr id="1521187119" name="Text 17"/>
           <p:cNvSpPr/>
           <p:nvPr/>
         </p:nvSpPr>
@@ -3589,7 +3589,7 @@
       </p:sp>
       <p:pic>
         <p:nvPicPr>
-          <p:cNvPr id="1192784733" name="Image 1" descr="preencoded.png"/>
+          <p:cNvPr id="61655586" name="Image 1" descr="preencoded.png"/>
           <p:cNvPicPr>
             <a:picLocks noChangeAspect="1"/>
           </p:cNvPicPr>
@@ -3611,7 +3611,7 @@
       </p:pic>
       <p:sp>
         <p:nvSpPr>
-          <p:cNvPr id="1445340048" name="Text 5"/>
+          <p:cNvPr id="1415261261" name="Text 5"/>
           <p:cNvSpPr/>
           <p:nvPr/>
         </p:nvSpPr>
@@ -3651,7 +3651,7 @@
       </p:sp>
       <p:sp>
         <p:nvSpPr>
-          <p:cNvPr id="1485044532" name="Text 6"/>
+          <p:cNvPr id="1606740530" name="Text 6"/>
           <p:cNvSpPr/>
           <p:nvPr/>
         </p:nvSpPr>
@@ -3691,7 +3691,7 @@
       </p:sp>
       <p:pic>
         <p:nvPicPr>
-          <p:cNvPr id="2125394028" name=""/>
+          <p:cNvPr id="1178522955" name=""/>
           <p:cNvPicPr>
             <a:picLocks noChangeAspect="1"/>
           </p:cNvPicPr>
@@ -3746,7 +3746,7 @@
       </p:grpSpPr>
       <p:sp>
         <p:nvSpPr>
-          <p:cNvPr id="1868569398" name="TextBox 1"/>
+          <p:cNvPr id="1895327808" name="TextBox 1"/>
           <p:cNvSpPr txBox="1"/>
           <p:nvPr/>
         </p:nvSpPr>
@@ -3784,7 +3784,7 @@
       </p:sp>
       <p:sp>
         <p:nvSpPr>
-          <p:cNvPr id="1697415245" name="TextBox 2"/>
+          <p:cNvPr id="241493250" name="TextBox 2"/>
           <p:cNvSpPr txBox="1"/>
           <p:nvPr/>
         </p:nvSpPr>
@@ -3822,7 +3822,7 @@
       </p:sp>
       <p:sp>
         <p:nvSpPr>
-          <p:cNvPr id="671969606" name="TextBox 3"/>
+          <p:cNvPr id="395724976" name="TextBox 3"/>
           <p:cNvSpPr txBox="1"/>
           <p:nvPr/>
         </p:nvSpPr>
@@ -3860,7 +3860,7 @@
       </p:sp>
       <p:sp>
         <p:nvSpPr>
-          <p:cNvPr id="236525233" name="TextBox 33"/>
+          <p:cNvPr id="1368612977" name="TextBox 33"/>
           <p:cNvSpPr txBox="1"/>
           <p:nvPr/>
         </p:nvSpPr>
@@ -3898,7 +3898,7 @@
       </p:sp>
       <p:sp>
         <p:nvSpPr>
-          <p:cNvPr id="945753550" name="TextBox 34"/>
+          <p:cNvPr id="204845067" name="TextBox 34"/>
           <p:cNvSpPr txBox="1"/>
           <p:nvPr/>
         </p:nvSpPr>
@@ -3936,7 +3936,7 @@
       </p:sp>
       <p:pic>
         <p:nvPicPr>
-          <p:cNvPr id="1131204532" name=""/>
+          <p:cNvPr id="277885112" name=""/>
           <p:cNvPicPr>
             <a:picLocks noChangeAspect="1"/>
           </p:cNvPicPr>
@@ -3991,7 +3991,7 @@
       </p:grpSpPr>
       <p:sp>
         <p:nvSpPr>
-          <p:cNvPr id="1323457564" name="TextBox 1"/>
+          <p:cNvPr id="537804285" name="TextBox 1"/>
           <p:cNvSpPr txBox="1"/>
           <p:nvPr/>
         </p:nvSpPr>
@@ -4029,7 +4029,7 @@
       </p:sp>
       <p:sp>
         <p:nvSpPr>
-          <p:cNvPr id="1941019865" name="TextBox 2"/>
+          <p:cNvPr id="2136840985" name="TextBox 2"/>
           <p:cNvSpPr txBox="1"/>
           <p:nvPr/>
         </p:nvSpPr>
@@ -4067,7 +4067,7 @@
       </p:sp>
       <p:sp>
         <p:nvSpPr>
-          <p:cNvPr id="157205350" name="TextBox 3"/>
+          <p:cNvPr id="1309272798" name="TextBox 3"/>
           <p:cNvSpPr txBox="1"/>
           <p:nvPr/>
         </p:nvSpPr>
@@ -4105,7 +4105,7 @@
       </p:sp>
       <p:sp>
         <p:nvSpPr>
-          <p:cNvPr id="489436940" name="TextBox 33"/>
+          <p:cNvPr id="1030503528" name="TextBox 33"/>
           <p:cNvSpPr txBox="1"/>
           <p:nvPr/>
         </p:nvSpPr>
@@ -4143,7 +4143,7 @@
       </p:sp>
       <p:sp>
         <p:nvSpPr>
-          <p:cNvPr id="1710637444" name="TextBox 34"/>
+          <p:cNvPr id="64702968" name="TextBox 34"/>
           <p:cNvSpPr txBox="1"/>
           <p:nvPr/>
         </p:nvSpPr>
@@ -4179,31 +4179,9 @@
           </a:p>
         </p:txBody>
       </p:sp>
-      <p:pic>
-        <p:nvPicPr>
-          <p:cNvPr id="152140785" name=""/>
-          <p:cNvPicPr>
-            <a:picLocks noChangeAspect="1"/>
-          </p:cNvPicPr>
-          <p:nvPr/>
-        </p:nvPicPr>
-        <p:blipFill rotWithShape="1">
-          <a:blip r:embed="rId3"/>
-          <a:stretch/>
-        </p:blipFill>
-        <p:spPr bwMode="auto">
-          <a:xfrm flipH="0" flipV="0">
-            <a:off x="548640" y="1961862"/>
-            <a:ext cx="6510785" cy="4228813"/>
-          </a:xfrm>
-          <a:prstGeom prst="rect">
-            <a:avLst/>
-          </a:prstGeom>
-        </p:spPr>
-      </p:pic>
-      <p:sp>
-        <p:nvSpPr>
-          <p:cNvPr id="833864307" name="Rounded Rectangle 27"/>
+      <p:sp>
+        <p:nvSpPr>
+          <p:cNvPr id="810370877" name="Rounded Rectangle 27"/>
           <p:cNvSpPr/>
           <p:nvPr/>
         </p:nvSpPr>
@@ -4254,7 +4232,7 @@
       </p:sp>
       <p:sp>
         <p:nvSpPr>
-          <p:cNvPr id="1092437886" name="TextBox 28"/>
+          <p:cNvPr id="1604042039" name="TextBox 28"/>
           <p:cNvSpPr txBox="1"/>
           <p:nvPr/>
         </p:nvSpPr>
@@ -4292,7 +4270,7 @@
       </p:sp>
       <p:sp>
         <p:nvSpPr>
-          <p:cNvPr id="1684750038" name="TextBox 29"/>
+          <p:cNvPr id="225565592" name="TextBox 29"/>
           <p:cNvSpPr txBox="1"/>
           <p:nvPr/>
         </p:nvSpPr>
@@ -4405,7 +4383,7 @@
       </p:sp>
       <p:sp>
         <p:nvSpPr>
-          <p:cNvPr id="229093122" name="Rounded Rectangle 30"/>
+          <p:cNvPr id="559588124" name="Rounded Rectangle 30"/>
           <p:cNvSpPr/>
           <p:nvPr/>
         </p:nvSpPr>
@@ -4456,7 +4434,7 @@
       </p:sp>
       <p:sp>
         <p:nvSpPr>
-          <p:cNvPr id="1855189870" name="TextBox 31"/>
+          <p:cNvPr id="1596297169" name="TextBox 31"/>
           <p:cNvSpPr txBox="1"/>
           <p:nvPr/>
         </p:nvSpPr>
@@ -4494,7 +4472,7 @@
       </p:sp>
       <p:sp>
         <p:nvSpPr>
-          <p:cNvPr id="32187414" name="TextBox 32"/>
+          <p:cNvPr id="168260219" name="TextBox 32"/>
           <p:cNvSpPr txBox="1"/>
           <p:nvPr/>
         </p:nvSpPr>
@@ -4605,6 +4583,28 @@
           </a:p>
         </p:txBody>
       </p:sp>
+      <p:pic>
+        <p:nvPicPr>
+          <p:cNvPr id="349127919" name=""/>
+          <p:cNvPicPr>
+            <a:picLocks noChangeAspect="1"/>
+          </p:cNvPicPr>
+          <p:nvPr/>
+        </p:nvPicPr>
+        <p:blipFill rotWithShape="1">
+          <a:blip r:embed="rId3"/>
+          <a:stretch/>
+        </p:blipFill>
+        <p:spPr bwMode="auto">
+          <a:xfrm flipH="0" flipV="0">
+            <a:off x="548640" y="1961861"/>
+            <a:ext cx="5808696" cy="4228812"/>
+          </a:xfrm>
+          <a:prstGeom prst="rect">
+            <a:avLst/>
+          </a:prstGeom>
+        </p:spPr>
+      </p:pic>
     </p:spTree>
   </p:cSld>
   <p:clrMapOvr>
@@ -4647,7 +4647,7 @@
       </p:grpSpPr>
       <p:sp>
         <p:nvSpPr>
-          <p:cNvPr id="1954833166" name="Text 0"/>
+          <p:cNvPr id="1821281736" name="Text 0"/>
           <p:cNvSpPr/>
           <p:nvPr/>
         </p:nvSpPr>
@@ -4687,7 +4687,7 @@
       </p:sp>
       <p:sp>
         <p:nvSpPr>
-          <p:cNvPr id="576448416" name="Text 1"/>
+          <p:cNvPr id="1510868379" name="Text 1"/>
           <p:cNvSpPr/>
           <p:nvPr/>
         </p:nvSpPr>
@@ -4727,7 +4727,7 @@
       </p:sp>
       <p:sp>
         <p:nvSpPr>
-          <p:cNvPr id="1483692335" name="Shape 5"/>
+          <p:cNvPr id="2041155078" name="Shape 5"/>
           <p:cNvSpPr/>
           <p:nvPr/>
         </p:nvSpPr>
@@ -4756,7 +4756,7 @@
       </p:sp>
       <p:sp>
         <p:nvSpPr>
-          <p:cNvPr id="270210321" name="Shape 6"/>
+          <p:cNvPr id="603504022" name="Shape 6"/>
           <p:cNvSpPr/>
           <p:nvPr/>
         </p:nvSpPr>
@@ -4776,7 +4776,7 @@
       </p:sp>
       <p:pic>
         <p:nvPicPr>
-          <p:cNvPr id="1303442613" name="Image 0" descr="shieldCheck.png"/>
+          <p:cNvPr id="1583754112" name="Image 0" descr="shieldCheck.png"/>
           <p:cNvPicPr>
             <a:picLocks noChangeAspect="1"/>
           </p:cNvPicPr>
@@ -4798,7 +4798,7 @@
       </p:pic>
       <p:sp>
         <p:nvSpPr>
-          <p:cNvPr id="411978349" name="Text 7"/>
+          <p:cNvPr id="527244798" name="Text 7"/>
           <p:cNvSpPr/>
           <p:nvPr/>
         </p:nvSpPr>
@@ -4838,7 +4838,7 @@
       </p:sp>
       <p:sp>
         <p:nvSpPr>
-          <p:cNvPr id="1997780661" name="Text 8"/>
+          <p:cNvPr id="771001628" name="Text 8"/>
           <p:cNvSpPr/>
           <p:nvPr/>
         </p:nvSpPr>
@@ -4878,7 +4878,7 @@
       </p:sp>
       <p:sp>
         <p:nvSpPr>
-          <p:cNvPr id="1260197836" name="Text 9"/>
+          <p:cNvPr id="1717373115" name="Text 9"/>
           <p:cNvSpPr/>
           <p:nvPr/>
         </p:nvSpPr>
@@ -4918,7 +4918,7 @@
       </p:sp>
       <p:sp>
         <p:nvSpPr>
-          <p:cNvPr id="2147459641" name="Shape 10"/>
+          <p:cNvPr id="286689439" name="Shape 10"/>
           <p:cNvSpPr/>
           <p:nvPr/>
         </p:nvSpPr>
@@ -4947,7 +4947,7 @@
       </p:sp>
       <p:sp>
         <p:nvSpPr>
-          <p:cNvPr id="1171277878" name="Shape 11"/>
+          <p:cNvPr id="710641507" name="Shape 11"/>
           <p:cNvSpPr/>
           <p:nvPr/>
         </p:nvSpPr>
@@ -4967,7 +4967,7 @@
       </p:sp>
       <p:pic>
         <p:nvPicPr>
-          <p:cNvPr id="1157888161" name="Image 1" descr="ban.png"/>
+          <p:cNvPr id="1473741827" name="Image 1" descr="ban.png"/>
           <p:cNvPicPr>
             <a:picLocks noChangeAspect="1"/>
           </p:cNvPicPr>
@@ -4989,7 +4989,7 @@
       </p:pic>
       <p:sp>
         <p:nvSpPr>
-          <p:cNvPr id="1861830448" name="Text 12"/>
+          <p:cNvPr id="1533133368" name="Text 12"/>
           <p:cNvSpPr/>
           <p:nvPr/>
         </p:nvSpPr>
@@ -5029,7 +5029,7 @@
       </p:sp>
       <p:sp>
         <p:nvSpPr>
-          <p:cNvPr id="832415243" name="Text 13"/>
+          <p:cNvPr id="1029451960" name="Text 13"/>
           <p:cNvSpPr/>
           <p:nvPr/>
         </p:nvSpPr>
@@ -5069,7 +5069,7 @@
       </p:sp>
       <p:sp>
         <p:nvSpPr>
-          <p:cNvPr id="1409137956" name="Text 14"/>
+          <p:cNvPr id="1592545814" name="Text 14"/>
           <p:cNvSpPr/>
           <p:nvPr/>
         </p:nvSpPr>
@@ -5109,7 +5109,7 @@
       </p:sp>
       <p:sp>
         <p:nvSpPr>
-          <p:cNvPr id="247777415" name="Shape 15"/>
+          <p:cNvPr id="311777013" name="Shape 15"/>
           <p:cNvSpPr/>
           <p:nvPr/>
         </p:nvSpPr>
@@ -5138,7 +5138,7 @@
       </p:sp>
       <p:sp>
         <p:nvSpPr>
-          <p:cNvPr id="1709177646" name="Shape 16"/>
+          <p:cNvPr id="860084527" name="Shape 16"/>
           <p:cNvSpPr/>
           <p:nvPr/>
         </p:nvSpPr>
@@ -5158,7 +5158,7 @@
       </p:sp>
       <p:pic>
         <p:nvPicPr>
-          <p:cNvPr id="806931795" name="Image 2" descr="clock.png"/>
+          <p:cNvPr id="82714763" name="Image 2" descr="clock.png"/>
           <p:cNvPicPr>
             <a:picLocks noChangeAspect="1"/>
           </p:cNvPicPr>
@@ -5180,7 +5180,7 @@
       </p:pic>
       <p:sp>
         <p:nvSpPr>
-          <p:cNvPr id="270243353" name="Text 17"/>
+          <p:cNvPr id="1901156805" name="Text 17"/>
           <p:cNvSpPr/>
           <p:nvPr/>
         </p:nvSpPr>
@@ -5220,7 +5220,7 @@
       </p:sp>
       <p:sp>
         <p:nvSpPr>
-          <p:cNvPr id="1464958141" name="Text 18"/>
+          <p:cNvPr id="1313797364" name="Text 18"/>
           <p:cNvSpPr/>
           <p:nvPr/>
         </p:nvSpPr>
@@ -5260,7 +5260,7 @@
       </p:sp>
       <p:sp>
         <p:nvSpPr>
-          <p:cNvPr id="1094845625" name="Text 19"/>
+          <p:cNvPr id="862696217" name="Text 19"/>
           <p:cNvSpPr/>
           <p:nvPr/>
         </p:nvSpPr>
@@ -5300,7 +5300,7 @@
       </p:sp>
       <p:sp>
         <p:nvSpPr>
-          <p:cNvPr id="1244508429" name="Shape 20"/>
+          <p:cNvPr id="487954760" name="Shape 20"/>
           <p:cNvSpPr/>
           <p:nvPr/>
         </p:nvSpPr>
@@ -5329,7 +5329,7 @@
       </p:sp>
       <p:sp>
         <p:nvSpPr>
-          <p:cNvPr id="1447197106" name="Shape 21"/>
+          <p:cNvPr id="915202567" name="Shape 21"/>
           <p:cNvSpPr/>
           <p:nvPr/>
         </p:nvSpPr>
@@ -5349,7 +5349,7 @@
       </p:sp>
       <p:pic>
         <p:nvPicPr>
-          <p:cNvPr id="1917813478" name="Image 3" descr="qr.png"/>
+          <p:cNvPr id="35419874" name="Image 3" descr="qr.png"/>
           <p:cNvPicPr>
             <a:picLocks noChangeAspect="1"/>
           </p:cNvPicPr>
@@ -5371,7 +5371,7 @@
       </p:pic>
       <p:sp>
         <p:nvSpPr>
-          <p:cNvPr id="1996923261" name="Text 22"/>
+          <p:cNvPr id="76316037" name="Text 22"/>
           <p:cNvSpPr/>
           <p:nvPr/>
         </p:nvSpPr>
@@ -5411,7 +5411,7 @@
       </p:sp>
       <p:sp>
         <p:nvSpPr>
-          <p:cNvPr id="1114306624" name="Text 23"/>
+          <p:cNvPr id="687915206" name="Text 23"/>
           <p:cNvSpPr/>
           <p:nvPr/>
         </p:nvSpPr>
@@ -5451,7 +5451,7 @@
       </p:sp>
       <p:sp>
         <p:nvSpPr>
-          <p:cNvPr id="1639947595" name="Text 24"/>
+          <p:cNvPr id="459627703" name="Text 24"/>
           <p:cNvSpPr/>
           <p:nvPr/>
         </p:nvSpPr>
@@ -5491,7 +5491,7 @@
       </p:sp>
       <p:sp>
         <p:nvSpPr>
-          <p:cNvPr id="1713145526" name="Shape 25"/>
+          <p:cNvPr id="751071714" name="Shape 25"/>
           <p:cNvSpPr/>
           <p:nvPr/>
         </p:nvSpPr>
@@ -5520,7 +5520,7 @@
       </p:sp>
       <p:sp>
         <p:nvSpPr>
-          <p:cNvPr id="1715329306" name="Shape 26"/>
+          <p:cNvPr id="1245580540" name="Shape 26"/>
           <p:cNvSpPr/>
           <p:nvPr/>
         </p:nvSpPr>
@@ -5540,7 +5540,7 @@
       </p:sp>
       <p:pic>
         <p:nvPicPr>
-          <p:cNvPr id="1928041297" name="Image 4" descr="phone.png"/>
+          <p:cNvPr id="1913323416" name="Image 4" descr="phone.png"/>
           <p:cNvPicPr>
             <a:picLocks noChangeAspect="1"/>
           </p:cNvPicPr>
@@ -5562,7 +5562,7 @@
       </p:pic>
       <p:sp>
         <p:nvSpPr>
-          <p:cNvPr id="1391589382" name="Text 27"/>
+          <p:cNvPr id="1014511374" name="Text 27"/>
           <p:cNvSpPr/>
           <p:nvPr/>
         </p:nvSpPr>
@@ -5602,7 +5602,7 @@
       </p:sp>
       <p:sp>
         <p:nvSpPr>
-          <p:cNvPr id="1380305287" name="Text 28"/>
+          <p:cNvPr id="1404194949" name="Text 28"/>
           <p:cNvSpPr/>
           <p:nvPr/>
         </p:nvSpPr>
@@ -5642,7 +5642,7 @@
       </p:sp>
       <p:sp>
         <p:nvSpPr>
-          <p:cNvPr id="773132140" name="Text 29"/>
+          <p:cNvPr id="253052315" name="Text 29"/>
           <p:cNvSpPr/>
           <p:nvPr/>
         </p:nvSpPr>
@@ -5682,7 +5682,7 @@
       </p:sp>
       <p:sp>
         <p:nvSpPr>
-          <p:cNvPr id="90587259" name="Shape 30"/>
+          <p:cNvPr id="1325487895" name="Shape 30"/>
           <p:cNvSpPr/>
           <p:nvPr/>
         </p:nvSpPr>
@@ -5711,7 +5711,7 @@
       </p:sp>
       <p:sp>
         <p:nvSpPr>
-          <p:cNvPr id="593568703" name="Shape 31"/>
+          <p:cNvPr id="41746285" name="Shape 31"/>
           <p:cNvSpPr/>
           <p:nvPr/>
         </p:nvSpPr>
@@ -5731,7 +5731,7 @@
       </p:sp>
       <p:pic>
         <p:nvPicPr>
-          <p:cNvPr id="420780112" name="Image 5" descr="fingerprint.png"/>
+          <p:cNvPr id="1802665394" name="Image 5" descr="fingerprint.png"/>
           <p:cNvPicPr>
             <a:picLocks noChangeAspect="1"/>
           </p:cNvPicPr>
@@ -5753,7 +5753,7 @@
       </p:pic>
       <p:sp>
         <p:nvSpPr>
-          <p:cNvPr id="517618886" name="Text 32"/>
+          <p:cNvPr id="436550932" name="Text 32"/>
           <p:cNvSpPr/>
           <p:nvPr/>
         </p:nvSpPr>
@@ -5793,7 +5793,7 @@
       </p:sp>
       <p:sp>
         <p:nvSpPr>
-          <p:cNvPr id="1872423237" name="Text 33"/>
+          <p:cNvPr id="2136245606" name="Text 33"/>
           <p:cNvSpPr/>
           <p:nvPr/>
         </p:nvSpPr>
@@ -5833,7 +5833,7 @@
       </p:sp>
       <p:sp>
         <p:nvSpPr>
-          <p:cNvPr id="2129105360" name="Text 34"/>
+          <p:cNvPr id="285503170" name="Text 34"/>
           <p:cNvSpPr/>
           <p:nvPr/>
         </p:nvSpPr>
@@ -5873,7 +5873,7 @@
       </p:sp>
       <p:sp>
         <p:nvSpPr>
-          <p:cNvPr id="892961863" name="Text 35"/>
+          <p:cNvPr id="1472583313" name="Text 35"/>
           <p:cNvSpPr/>
           <p:nvPr/>
         </p:nvSpPr>
@@ -5953,7 +5953,7 @@
       </p:grpSpPr>
       <p:sp>
         <p:nvSpPr>
-          <p:cNvPr id="1477383925" name="Text 0"/>
+          <p:cNvPr id="769036210" name="Text 0"/>
           <p:cNvSpPr/>
           <p:nvPr/>
         </p:nvSpPr>
@@ -5993,7 +5993,7 @@
       </p:sp>
       <p:sp>
         <p:nvSpPr>
-          <p:cNvPr id="1497488229" name="Text 1"/>
+          <p:cNvPr id="39953535" name="Text 1"/>
           <p:cNvSpPr/>
           <p:nvPr/>
         </p:nvSpPr>
@@ -6033,7 +6033,7 @@
       </p:sp>
       <p:sp>
         <p:nvSpPr>
-          <p:cNvPr id="1821188241" name="Text 2"/>
+          <p:cNvPr id="592146995" name="Text 2"/>
           <p:cNvSpPr/>
           <p:nvPr/>
         </p:nvSpPr>
@@ -6073,7 +6073,7 @@
       </p:sp>
       <p:sp>
         <p:nvSpPr>
-          <p:cNvPr id="120334273" name="Shape 3"/>
+          <p:cNvPr id="1306873629" name="Shape 3"/>
           <p:cNvSpPr/>
           <p:nvPr/>
         </p:nvSpPr>
@@ -6100,7 +6100,7 @@
       </p:sp>
       <p:pic>
         <p:nvPicPr>
-          <p:cNvPr id="748867085" name="Image 0" descr="preencoded.png"/>
+          <p:cNvPr id="1401611456" name="Image 0" descr="preencoded.png"/>
           <p:cNvPicPr>
             <a:picLocks noChangeAspect="1"/>
           </p:cNvPicPr>
@@ -6122,7 +6122,7 @@
       </p:pic>
       <p:sp>
         <p:nvSpPr>
-          <p:cNvPr id="1299205356" name="Text 4"/>
+          <p:cNvPr id="416654677" name="Text 4"/>
           <p:cNvSpPr/>
           <p:nvPr/>
         </p:nvSpPr>
@@ -6162,7 +6162,7 @@
       </p:sp>
       <p:sp>
         <p:nvSpPr>
-          <p:cNvPr id="467454566" name="Text 5"/>
+          <p:cNvPr id="70705928" name="Text 5"/>
           <p:cNvSpPr/>
           <p:nvPr/>
         </p:nvSpPr>
@@ -6202,7 +6202,7 @@
       </p:sp>
       <p:sp>
         <p:nvSpPr>
-          <p:cNvPr id="545076002" name="Shape 6"/>
+          <p:cNvPr id="1255291911" name="Shape 6"/>
           <p:cNvSpPr/>
           <p:nvPr/>
         </p:nvSpPr>
@@ -6229,7 +6229,7 @@
       </p:sp>
       <p:pic>
         <p:nvPicPr>
-          <p:cNvPr id="2115514959" name="Image 1" descr="preencoded.png"/>
+          <p:cNvPr id="1339770835" name="Image 1" descr="preencoded.png"/>
           <p:cNvPicPr>
             <a:picLocks noChangeAspect="1"/>
           </p:cNvPicPr>
@@ -6251,7 +6251,7 @@
       </p:pic>
       <p:sp>
         <p:nvSpPr>
-          <p:cNvPr id="179702776" name="Text 7"/>
+          <p:cNvPr id="1479373718" name="Text 7"/>
           <p:cNvSpPr/>
           <p:nvPr/>
         </p:nvSpPr>
@@ -6291,7 +6291,7 @@
       </p:sp>
       <p:sp>
         <p:nvSpPr>
-          <p:cNvPr id="1301483272" name="Text 8"/>
+          <p:cNvPr id="660791450" name="Text 8"/>
           <p:cNvSpPr/>
           <p:nvPr/>
         </p:nvSpPr>
@@ -6331,7 +6331,7 @@
       </p:sp>
       <p:sp>
         <p:nvSpPr>
-          <p:cNvPr id="753274428" name="Shape 9"/>
+          <p:cNvPr id="416666871" name="Shape 9"/>
           <p:cNvSpPr/>
           <p:nvPr/>
         </p:nvSpPr>
@@ -6358,7 +6358,7 @@
       </p:sp>
       <p:pic>
         <p:nvPicPr>
-          <p:cNvPr id="237374096" name="Image 2" descr="preencoded.png"/>
+          <p:cNvPr id="402344190" name="Image 2" descr="preencoded.png"/>
           <p:cNvPicPr>
             <a:picLocks noChangeAspect="1"/>
           </p:cNvPicPr>
@@ -6380,7 +6380,7 @@
       </p:pic>
       <p:sp>
         <p:nvSpPr>
-          <p:cNvPr id="2098911962" name="Text 10"/>
+          <p:cNvPr id="1774052154" name="Text 10"/>
           <p:cNvSpPr/>
           <p:nvPr/>
         </p:nvSpPr>
@@ -6420,7 +6420,7 @@
       </p:sp>
       <p:sp>
         <p:nvSpPr>
-          <p:cNvPr id="310848200" name="Text 11"/>
+          <p:cNvPr id="1395343795" name="Text 11"/>
           <p:cNvSpPr/>
           <p:nvPr/>
         </p:nvSpPr>
@@ -6460,7 +6460,7 @@
       </p:sp>
       <p:sp>
         <p:nvSpPr>
-          <p:cNvPr id="1028009313" name="Text 12"/>
+          <p:cNvPr id="64871729" name="Text 12"/>
           <p:cNvSpPr/>
           <p:nvPr/>
         </p:nvSpPr>
@@ -6500,7 +6500,7 @@
       </p:sp>
       <p:sp>
         <p:nvSpPr>
-          <p:cNvPr id="1734762705" name="Text 13"/>
+          <p:cNvPr id="1530674772" name="Text 13"/>
           <p:cNvSpPr/>
           <p:nvPr/>
         </p:nvSpPr>
@@ -6540,7 +6540,7 @@
       </p:sp>
       <p:sp>
         <p:nvSpPr>
-          <p:cNvPr id="954966612" name="Text 14"/>
+          <p:cNvPr id="739668864" name="Text 14"/>
           <p:cNvSpPr/>
           <p:nvPr/>
         </p:nvSpPr>
@@ -6580,7 +6580,7 @@
       </p:sp>
       <p:sp>
         <p:nvSpPr>
-          <p:cNvPr id="358039844" name="Text 15"/>
+          <p:cNvPr id="966324288" name="Text 15"/>
           <p:cNvSpPr/>
           <p:nvPr/>
         </p:nvSpPr>
@@ -6620,7 +6620,7 @@
       </p:sp>
       <p:sp>
         <p:nvSpPr>
-          <p:cNvPr id="536580592" name="Text 16"/>
+          <p:cNvPr id="358111791" name="Text 16"/>
           <p:cNvSpPr/>
           <p:nvPr/>
         </p:nvSpPr>
@@ -6660,7 +6660,7 @@
       </p:sp>
       <p:sp>
         <p:nvSpPr>
-          <p:cNvPr id="1161826239" name="Text 17"/>
+          <p:cNvPr id="678155207" name="Text 17"/>
           <p:cNvSpPr/>
           <p:nvPr/>
         </p:nvSpPr>
@@ -6700,7 +6700,7 @@
       </p:sp>
       <p:sp>
         <p:nvSpPr>
-          <p:cNvPr id="2017453580" name="Text 18"/>
+          <p:cNvPr id="2099820020" name="Text 18"/>
           <p:cNvSpPr/>
           <p:nvPr/>
         </p:nvSpPr>
@@ -6740,7 +6740,7 @@
       </p:sp>
       <p:sp>
         <p:nvSpPr>
-          <p:cNvPr id="4970835" name="Text 19"/>
+          <p:cNvPr id="1318540677" name="Text 19"/>
           <p:cNvSpPr/>
           <p:nvPr/>
         </p:nvSpPr>
@@ -6820,7 +6820,7 @@
       </p:grpSpPr>
       <p:sp>
         <p:nvSpPr>
-          <p:cNvPr id="1339113560" name="Text 0"/>
+          <p:cNvPr id="1976249567" name="Text 0"/>
           <p:cNvSpPr/>
           <p:nvPr/>
         </p:nvSpPr>
@@ -6860,7 +6860,7 @@
       </p:sp>
       <p:sp>
         <p:nvSpPr>
-          <p:cNvPr id="292211519" name="Text 1"/>
+          <p:cNvPr id="1664605576" name="Text 1"/>
           <p:cNvSpPr/>
           <p:nvPr/>
         </p:nvSpPr>
@@ -6900,7 +6900,7 @@
       </p:sp>
       <p:sp>
         <p:nvSpPr>
-          <p:cNvPr id="1448641566" name="Text 2"/>
+          <p:cNvPr id="656122950" name="Text 2"/>
           <p:cNvSpPr/>
           <p:nvPr/>
         </p:nvSpPr>
@@ -6940,7 +6940,7 @@
       </p:sp>
       <p:sp>
         <p:nvSpPr>
-          <p:cNvPr id="56066339" name="Shape 3"/>
+          <p:cNvPr id="1909630346" name="Shape 3"/>
           <p:cNvSpPr/>
           <p:nvPr/>
         </p:nvSpPr>
@@ -6971,7 +6971,7 @@
       </p:sp>
       <p:pic>
         <p:nvPicPr>
-          <p:cNvPr id="212319049" name="Image 0" descr="preencoded.png"/>
+          <p:cNvPr id="1846282942" name="Image 0" descr="preencoded.png"/>
           <p:cNvPicPr>
             <a:picLocks noChangeAspect="1"/>
           </p:cNvPicPr>
@@ -6993,7 +6993,7 @@
       </p:pic>
       <p:sp>
         <p:nvSpPr>
-          <p:cNvPr id="272407379" name="Text 4"/>
+          <p:cNvPr id="1875310770" name="Text 4"/>
           <p:cNvSpPr/>
           <p:nvPr/>
         </p:nvSpPr>
@@ -7033,7 +7033,7 @@
       </p:sp>
       <p:sp>
         <p:nvSpPr>
-          <p:cNvPr id="255583561" name="Shape 5"/>
+          <p:cNvPr id="1397137232" name="Shape 5"/>
           <p:cNvSpPr/>
           <p:nvPr/>
         </p:nvSpPr>
@@ -7064,7 +7064,7 @@
       </p:sp>
       <p:pic>
         <p:nvPicPr>
-          <p:cNvPr id="1235501574" name="Image 1" descr="preencoded.png"/>
+          <p:cNvPr id="388471427" name="Image 1" descr="preencoded.png"/>
           <p:cNvPicPr>
             <a:picLocks noChangeAspect="1"/>
           </p:cNvPicPr>
@@ -7086,7 +7086,7 @@
       </p:pic>
       <p:sp>
         <p:nvSpPr>
-          <p:cNvPr id="632710461" name="Text 6"/>
+          <p:cNvPr id="1810841465" name="Text 6"/>
           <p:cNvSpPr/>
           <p:nvPr/>
         </p:nvSpPr>
@@ -7126,7 +7126,7 @@
       </p:sp>
       <p:sp>
         <p:nvSpPr>
-          <p:cNvPr id="334195424" name="Shape 7"/>
+          <p:cNvPr id="1591787225" name="Shape 7"/>
           <p:cNvSpPr/>
           <p:nvPr/>
         </p:nvSpPr>
@@ -7157,7 +7157,7 @@
       </p:sp>
       <p:sp>
         <p:nvSpPr>
-          <p:cNvPr id="1330630664" name="Text 8"/>
+          <p:cNvPr id="2141550127" name="Text 8"/>
           <p:cNvSpPr/>
           <p:nvPr/>
         </p:nvSpPr>
@@ -7197,7 +7197,7 @@
       </p:sp>
       <p:sp>
         <p:nvSpPr>
-          <p:cNvPr id="208591660" name="Shape 9"/>
+          <p:cNvPr id="920803436" name="Shape 9"/>
           <p:cNvSpPr/>
           <p:nvPr/>
         </p:nvSpPr>
@@ -7228,7 +7228,7 @@
       </p:sp>
       <p:sp>
         <p:nvSpPr>
-          <p:cNvPr id="1617500812" name="Text 10"/>
+          <p:cNvPr id="1673265622" name="Text 10"/>
           <p:cNvSpPr/>
           <p:nvPr/>
         </p:nvSpPr>
@@ -7268,7 +7268,7 @@
       </p:sp>
       <p:sp>
         <p:nvSpPr>
-          <p:cNvPr id="585052487" name="Shape 11"/>
+          <p:cNvPr id="1926574800" name="Shape 11"/>
           <p:cNvSpPr/>
           <p:nvPr/>
         </p:nvSpPr>
@@ -7299,7 +7299,7 @@
       </p:sp>
       <p:sp>
         <p:nvSpPr>
-          <p:cNvPr id="1488919133" name="Text 12"/>
+          <p:cNvPr id="334372611" name="Text 12"/>
           <p:cNvSpPr/>
           <p:nvPr/>
         </p:nvSpPr>
@@ -7339,7 +7339,7 @@
       </p:sp>
       <p:sp>
         <p:nvSpPr>
-          <p:cNvPr id="1378331882" name="Shape 13"/>
+          <p:cNvPr id="1663175366" name="Shape 13"/>
           <p:cNvSpPr/>
           <p:nvPr/>
         </p:nvSpPr>
@@ -7370,7 +7370,7 @@
       </p:sp>
       <p:sp>
         <p:nvSpPr>
-          <p:cNvPr id="895253730" name="Text 14"/>
+          <p:cNvPr id="834385613" name="Text 14"/>
           <p:cNvSpPr/>
           <p:nvPr/>
         </p:nvSpPr>
@@ -7410,7 +7410,7 @@
       </p:sp>
       <p:sp>
         <p:nvSpPr>
-          <p:cNvPr id="1241344826" name="Shape 15"/>
+          <p:cNvPr id="1541337590" name="Shape 15"/>
           <p:cNvSpPr/>
           <p:nvPr/>
         </p:nvSpPr>
@@ -7441,7 +7441,7 @@
       </p:sp>
       <p:sp>
         <p:nvSpPr>
-          <p:cNvPr id="276357067" name="Text 16"/>
+          <p:cNvPr id="641783030" name="Text 16"/>
           <p:cNvSpPr/>
           <p:nvPr/>
         </p:nvSpPr>
@@ -7481,7 +7481,7 @@
       </p:sp>
       <p:sp>
         <p:nvSpPr>
-          <p:cNvPr id="1095776571" name="Shape 17"/>
+          <p:cNvPr id="363553688" name="Shape 17"/>
           <p:cNvSpPr/>
           <p:nvPr/>
         </p:nvSpPr>
@@ -7512,7 +7512,7 @@
       </p:sp>
       <p:sp>
         <p:nvSpPr>
-          <p:cNvPr id="830101914" name="Text 18"/>
+          <p:cNvPr id="775473288" name="Text 18"/>
           <p:cNvSpPr/>
           <p:nvPr/>
         </p:nvSpPr>
@@ -7552,7 +7552,7 @@
       </p:sp>
       <p:sp>
         <p:nvSpPr>
-          <p:cNvPr id="229503723" name="Shape 19"/>
+          <p:cNvPr id="2077952273" name="Shape 19"/>
           <p:cNvSpPr/>
           <p:nvPr/>
         </p:nvSpPr>
@@ -7583,7 +7583,7 @@
       </p:sp>
       <p:sp>
         <p:nvSpPr>
-          <p:cNvPr id="487518839" name="Text 20"/>
+          <p:cNvPr id="1460820594" name="Text 20"/>
           <p:cNvSpPr/>
           <p:nvPr/>
         </p:nvSpPr>
@@ -7623,7 +7623,7 @@
       </p:sp>
       <p:sp>
         <p:nvSpPr>
-          <p:cNvPr id="1600070262" name="Shape 21"/>
+          <p:cNvPr id="2078226058" name="Shape 21"/>
           <p:cNvSpPr/>
           <p:nvPr/>
         </p:nvSpPr>
@@ -7654,7 +7654,7 @@
       </p:sp>
       <p:sp>
         <p:nvSpPr>
-          <p:cNvPr id="1598945598" name="Text 22"/>
+          <p:cNvPr id="554486661" name="Text 22"/>
           <p:cNvSpPr/>
           <p:nvPr/>
         </p:nvSpPr>
@@ -7694,7 +7694,7 @@
       </p:sp>
       <p:sp>
         <p:nvSpPr>
-          <p:cNvPr id="1695152124" name="Shape 23"/>
+          <p:cNvPr id="1585028241" name="Shape 23"/>
           <p:cNvSpPr/>
           <p:nvPr/>
         </p:nvSpPr>
@@ -7725,7 +7725,7 @@
       </p:sp>
       <p:sp>
         <p:nvSpPr>
-          <p:cNvPr id="1967910384" name="Text 24"/>
+          <p:cNvPr id="2124396796" name="Text 24"/>
           <p:cNvSpPr/>
           <p:nvPr/>
         </p:nvSpPr>
@@ -7765,7 +7765,7 @@
       </p:sp>
       <p:sp>
         <p:nvSpPr>
-          <p:cNvPr id="580829483" name="Shape 25"/>
+          <p:cNvPr id="1781287991" name="Shape 25"/>
           <p:cNvSpPr/>
           <p:nvPr/>
         </p:nvSpPr>
@@ -7796,7 +7796,7 @@
       </p:sp>
       <p:sp>
         <p:nvSpPr>
-          <p:cNvPr id="2056828569" name="Text 26"/>
+          <p:cNvPr id="1785939085" name="Text 26"/>
           <p:cNvSpPr/>
           <p:nvPr/>
         </p:nvSpPr>
@@ -7836,7 +7836,7 @@
       </p:sp>
       <p:sp>
         <p:nvSpPr>
-          <p:cNvPr id="250526477" name="Text 29"/>
+          <p:cNvPr id="13468094" name="Text 29"/>
           <p:cNvSpPr/>
           <p:nvPr/>
         </p:nvSpPr>
@@ -7876,7 +7876,7 @@
       </p:sp>
       <p:sp>
         <p:nvSpPr>
-          <p:cNvPr id="716954257" name="Text 30"/>
+          <p:cNvPr id="529253164" name="Text 30"/>
           <p:cNvSpPr/>
           <p:nvPr/>
         </p:nvSpPr>
@@ -7916,7 +7916,7 @@
       </p:sp>
       <p:sp>
         <p:nvSpPr>
-          <p:cNvPr id="860723040" name="Shape 5"/>
+          <p:cNvPr id="988222291" name="Shape 5"/>
           <p:cNvSpPr/>
           <p:nvPr/>
         </p:nvSpPr>
@@ -7947,7 +7947,7 @@
       </p:sp>
       <p:sp>
         <p:nvSpPr>
-          <p:cNvPr id="1698502259" name="Text 6"/>
+          <p:cNvPr id="799304233" name="Text 6"/>
           <p:cNvSpPr/>
           <p:nvPr/>
         </p:nvSpPr>
@@ -7987,7 +7987,7 @@
       </p:sp>
       <p:pic>
         <p:nvPicPr>
-          <p:cNvPr id="1478432166" name="Image 1" descr="preencoded.png"/>
+          <p:cNvPr id="947981785" name="Image 1" descr="preencoded.png"/>
           <p:cNvPicPr>
             <a:picLocks noChangeAspect="1"/>
           </p:cNvPicPr>
@@ -8009,7 +8009,7 @@
       </p:pic>
       <p:sp>
         <p:nvSpPr>
-          <p:cNvPr id="1120355435" name="Shape 9"/>
+          <p:cNvPr id="1268273201" name="Shape 9"/>
           <p:cNvSpPr/>
           <p:nvPr/>
         </p:nvSpPr>
@@ -8040,7 +8040,7 @@
       </p:sp>
       <p:sp>
         <p:nvSpPr>
-          <p:cNvPr id="1716099723" name="Text 10"/>
+          <p:cNvPr id="420310506" name="Text 10"/>
           <p:cNvSpPr/>
           <p:nvPr/>
         </p:nvSpPr>
@@ -8080,7 +8080,7 @@
       </p:sp>
       <p:sp>
         <p:nvSpPr>
-          <p:cNvPr id="2066689011" name="Shape 13"/>
+          <p:cNvPr id="1331705282" name="Shape 13"/>
           <p:cNvSpPr/>
           <p:nvPr/>
         </p:nvSpPr>
@@ -8111,7 +8111,7 @@
       </p:sp>
       <p:sp>
         <p:nvSpPr>
-          <p:cNvPr id="1918015364" name="Text 14"/>
+          <p:cNvPr id="854812325" name="Text 14"/>
           <p:cNvSpPr/>
           <p:nvPr/>
         </p:nvSpPr>
@@ -8151,7 +8151,7 @@
       </p:sp>
       <p:sp>
         <p:nvSpPr>
-          <p:cNvPr id="1134470314" name="Shape 17"/>
+          <p:cNvPr id="1415759935" name="Shape 17"/>
           <p:cNvSpPr/>
           <p:nvPr/>
         </p:nvSpPr>
@@ -8182,7 +8182,7 @@
       </p:sp>
       <p:sp>
         <p:nvSpPr>
-          <p:cNvPr id="348909876" name="Text 18"/>
+          <p:cNvPr id="140969081" name="Text 18"/>
           <p:cNvSpPr/>
           <p:nvPr/>
         </p:nvSpPr>
@@ -8222,7 +8222,7 @@
       </p:sp>
       <p:sp>
         <p:nvSpPr>
-          <p:cNvPr id="1769903945" name="Shape 21"/>
+          <p:cNvPr id="1231176152" name="Shape 21"/>
           <p:cNvSpPr/>
           <p:nvPr/>
         </p:nvSpPr>
@@ -8253,7 +8253,7 @@
       </p:sp>
       <p:sp>
         <p:nvSpPr>
-          <p:cNvPr id="881599857" name="Text 22"/>
+          <p:cNvPr id="2003698834" name="Text 22"/>
           <p:cNvSpPr/>
           <p:nvPr/>
         </p:nvSpPr>
@@ -8293,7 +8293,7 @@
       </p:sp>
       <p:sp>
         <p:nvSpPr>
-          <p:cNvPr id="2057842100" name="Shape 25"/>
+          <p:cNvPr id="1340783020" name="Shape 25"/>
           <p:cNvSpPr/>
           <p:nvPr/>
         </p:nvSpPr>
@@ -8324,7 +8324,7 @@
       </p:sp>
       <p:sp>
         <p:nvSpPr>
-          <p:cNvPr id="1971697162" name="Text 26"/>
+          <p:cNvPr id="938032874" name="Text 26"/>
           <p:cNvSpPr/>
           <p:nvPr/>
         </p:nvSpPr>
@@ -8404,7 +8404,7 @@
       </p:grpSpPr>
       <p:sp>
         <p:nvSpPr>
-          <p:cNvPr id="1439298940" name="Text 0"/>
+          <p:cNvPr id="326475771" name="Text 0"/>
           <p:cNvSpPr/>
           <p:nvPr/>
         </p:nvSpPr>
@@ -8444,7 +8444,7 @@
       </p:sp>
       <p:sp>
         <p:nvSpPr>
-          <p:cNvPr id="824159275" name="Text 1"/>
+          <p:cNvPr id="368313289" name="Text 1"/>
           <p:cNvSpPr/>
           <p:nvPr/>
         </p:nvSpPr>
@@ -8484,7 +8484,7 @@
       </p:sp>
       <p:sp>
         <p:nvSpPr>
-          <p:cNvPr id="1281838237" name="Text 2"/>
+          <p:cNvPr id="1602322293" name="Text 2"/>
           <p:cNvSpPr/>
           <p:nvPr/>
         </p:nvSpPr>
@@ -8524,7 +8524,7 @@
       </p:sp>
       <p:sp>
         <p:nvSpPr>
-          <p:cNvPr id="498463904" name="Shape 3"/>
+          <p:cNvPr id="1688308715" name="Shape 3"/>
           <p:cNvSpPr/>
           <p:nvPr/>
         </p:nvSpPr>
@@ -8546,7 +8546,7 @@
       </p:sp>
       <p:sp>
         <p:nvSpPr>
-          <p:cNvPr id="429871338" name="Text 4"/>
+          <p:cNvPr id="1013121673" name="Text 4"/>
           <p:cNvSpPr/>
           <p:nvPr/>
         </p:nvSpPr>
@@ -8586,7 +8586,7 @@
       </p:sp>
       <p:sp>
         <p:nvSpPr>
-          <p:cNvPr id="1171079111" name="Shape 5"/>
+          <p:cNvPr id="726442378" name="Shape 5"/>
           <p:cNvSpPr/>
           <p:nvPr/>
         </p:nvSpPr>
@@ -8608,7 +8608,7 @@
       </p:sp>
       <p:sp>
         <p:nvSpPr>
-          <p:cNvPr id="1916811396" name="Text 6"/>
+          <p:cNvPr id="1173741867" name="Text 6"/>
           <p:cNvSpPr/>
           <p:nvPr/>
         </p:nvSpPr>
@@ -8648,7 +8648,7 @@
       </p:sp>
       <p:sp>
         <p:nvSpPr>
-          <p:cNvPr id="243487162" name="Shape 7"/>
+          <p:cNvPr id="247385385" name="Shape 7"/>
           <p:cNvSpPr/>
           <p:nvPr/>
         </p:nvSpPr>
@@ -8675,7 +8675,7 @@
       </p:sp>
       <p:pic>
         <p:nvPicPr>
-          <p:cNvPr id="451937739" name="Image 0" descr="preencoded.png"/>
+          <p:cNvPr id="119188932" name="Image 0" descr="preencoded.png"/>
           <p:cNvPicPr>
             <a:picLocks noChangeAspect="1"/>
           </p:cNvPicPr>
@@ -8697,7 +8697,7 @@
       </p:pic>
       <p:sp>
         <p:nvSpPr>
-          <p:cNvPr id="853911511" name="Text 8"/>
+          <p:cNvPr id="1452769862" name="Text 8"/>
           <p:cNvSpPr/>
           <p:nvPr/>
         </p:nvSpPr>
@@ -8737,7 +8737,7 @@
       </p:sp>
       <p:sp>
         <p:nvSpPr>
-          <p:cNvPr id="2020037212" name="Shape 9"/>
+          <p:cNvPr id="251896373" name="Shape 9"/>
           <p:cNvSpPr/>
           <p:nvPr/>
         </p:nvSpPr>
@@ -8759,7 +8759,7 @@
       </p:sp>
       <p:pic>
         <p:nvPicPr>
-          <p:cNvPr id="891404612" name="Image 1" descr="preencoded.png"/>
+          <p:cNvPr id="1829558940" name="Image 1" descr="preencoded.png"/>
           <p:cNvPicPr>
             <a:picLocks noChangeAspect="1"/>
           </p:cNvPicPr>
@@ -8781,7 +8781,7 @@
       </p:pic>
       <p:sp>
         <p:nvSpPr>
-          <p:cNvPr id="810216320" name="Text 10"/>
+          <p:cNvPr id="2067113590" name="Text 10"/>
           <p:cNvSpPr/>
           <p:nvPr/>
         </p:nvSpPr>
@@ -8821,7 +8821,7 @@
       </p:sp>
       <p:pic>
         <p:nvPicPr>
-          <p:cNvPr id="929572377" name="Image 2" descr="preencoded.png"/>
+          <p:cNvPr id="137165444" name="Image 2" descr="preencoded.png"/>
           <p:cNvPicPr>
             <a:picLocks noChangeAspect="1"/>
           </p:cNvPicPr>
@@ -8843,7 +8843,7 @@
       </p:pic>
       <p:sp>
         <p:nvSpPr>
-          <p:cNvPr id="395278963" name="Shape 11"/>
+          <p:cNvPr id="569710627" name="Shape 11"/>
           <p:cNvSpPr/>
           <p:nvPr/>
         </p:nvSpPr>
@@ -8870,7 +8870,7 @@
       </p:sp>
       <p:pic>
         <p:nvPicPr>
-          <p:cNvPr id="304928782" name="Image 3" descr="preencoded.png"/>
+          <p:cNvPr id="1207805198" name="Image 3" descr="preencoded.png"/>
           <p:cNvPicPr>
             <a:picLocks noChangeAspect="1"/>
           </p:cNvPicPr>
@@ -8892,7 +8892,7 @@
       </p:pic>
       <p:sp>
         <p:nvSpPr>
-          <p:cNvPr id="22378187" name="Text 12"/>
+          <p:cNvPr id="341066497" name="Text 12"/>
           <p:cNvSpPr/>
           <p:nvPr/>
         </p:nvSpPr>
@@ -8932,7 +8932,7 @@
       </p:sp>
       <p:sp>
         <p:nvSpPr>
-          <p:cNvPr id="1599493564" name="Shape 13"/>
+          <p:cNvPr id="204795784" name="Shape 13"/>
           <p:cNvSpPr/>
           <p:nvPr/>
         </p:nvSpPr>
@@ -8954,7 +8954,7 @@
       </p:sp>
       <p:pic>
         <p:nvPicPr>
-          <p:cNvPr id="1437264360" name="Image 4" descr="preencoded.png"/>
+          <p:cNvPr id="1604266889" name="Image 4" descr="preencoded.png"/>
           <p:cNvPicPr>
             <a:picLocks noChangeAspect="1"/>
           </p:cNvPicPr>
@@ -8976,7 +8976,7 @@
       </p:pic>
       <p:sp>
         <p:nvSpPr>
-          <p:cNvPr id="1084547237" name="Text 14"/>
+          <p:cNvPr id="389286799" name="Text 14"/>
           <p:cNvSpPr/>
           <p:nvPr/>
         </p:nvSpPr>
@@ -9016,7 +9016,7 @@
       </p:sp>
       <p:pic>
         <p:nvPicPr>
-          <p:cNvPr id="1940846385" name="Image 5" descr="preencoded.png"/>
+          <p:cNvPr id="2118310508" name="Image 5" descr="preencoded.png"/>
           <p:cNvPicPr>
             <a:picLocks noChangeAspect="1"/>
           </p:cNvPicPr>
@@ -9038,7 +9038,7 @@
       </p:pic>
       <p:sp>
         <p:nvSpPr>
-          <p:cNvPr id="1865395899" name="Shape 15"/>
+          <p:cNvPr id="963320748" name="Shape 15"/>
           <p:cNvSpPr/>
           <p:nvPr/>
         </p:nvSpPr>
@@ -9065,7 +9065,7 @@
       </p:sp>
       <p:pic>
         <p:nvPicPr>
-          <p:cNvPr id="248021853" name="Image 6" descr="preencoded.png"/>
+          <p:cNvPr id="2019728182" name="Image 6" descr="preencoded.png"/>
           <p:cNvPicPr>
             <a:picLocks noChangeAspect="1"/>
           </p:cNvPicPr>
@@ -9087,7 +9087,7 @@
       </p:pic>
       <p:sp>
         <p:nvSpPr>
-          <p:cNvPr id="866521448" name="Text 16"/>
+          <p:cNvPr id="434965067" name="Text 16"/>
           <p:cNvSpPr/>
           <p:nvPr/>
         </p:nvSpPr>
@@ -9127,7 +9127,7 @@
       </p:sp>
       <p:sp>
         <p:nvSpPr>
-          <p:cNvPr id="1066573829" name="Shape 17"/>
+          <p:cNvPr id="83375580" name="Shape 17"/>
           <p:cNvSpPr/>
           <p:nvPr/>
         </p:nvSpPr>
@@ -9149,7 +9149,7 @@
       </p:sp>
       <p:pic>
         <p:nvPicPr>
-          <p:cNvPr id="751430080" name="Image 7" descr="preencoded.png"/>
+          <p:cNvPr id="1598050806" name="Image 7" descr="preencoded.png"/>
           <p:cNvPicPr>
             <a:picLocks noChangeAspect="1"/>
           </p:cNvPicPr>
@@ -9171,7 +9171,7 @@
       </p:pic>
       <p:sp>
         <p:nvSpPr>
-          <p:cNvPr id="520589325" name="Text 18"/>
+          <p:cNvPr id="1347556939" name="Text 18"/>
           <p:cNvSpPr/>
           <p:nvPr/>
         </p:nvSpPr>
@@ -9211,7 +9211,7 @@
       </p:sp>
       <p:pic>
         <p:nvPicPr>
-          <p:cNvPr id="1709904245" name="Image 8" descr="preencoded.png"/>
+          <p:cNvPr id="1876209481" name="Image 8" descr="preencoded.png"/>
           <p:cNvPicPr>
             <a:picLocks noChangeAspect="1"/>
           </p:cNvPicPr>
@@ -9233,7 +9233,7 @@
       </p:pic>
       <p:sp>
         <p:nvSpPr>
-          <p:cNvPr id="1482478608" name="Shape 19"/>
+          <p:cNvPr id="1476715589" name="Shape 19"/>
           <p:cNvSpPr/>
           <p:nvPr/>
         </p:nvSpPr>
@@ -9260,7 +9260,7 @@
       </p:sp>
       <p:pic>
         <p:nvPicPr>
-          <p:cNvPr id="1455644422" name="Image 9" descr="preencoded.png"/>
+          <p:cNvPr id="2040384642" name="Image 9" descr="preencoded.png"/>
           <p:cNvPicPr>
             <a:picLocks noChangeAspect="1"/>
           </p:cNvPicPr>
@@ -9282,7 +9282,7 @@
       </p:pic>
       <p:sp>
         <p:nvSpPr>
-          <p:cNvPr id="404647472" name="Text 20"/>
+          <p:cNvPr id="113913892" name="Text 20"/>
           <p:cNvSpPr/>
           <p:nvPr/>
         </p:nvSpPr>
@@ -9322,7 +9322,7 @@
       </p:sp>
       <p:sp>
         <p:nvSpPr>
-          <p:cNvPr id="1129110238" name="Shape 21"/>
+          <p:cNvPr id="1944629291" name="Shape 21"/>
           <p:cNvSpPr/>
           <p:nvPr/>
         </p:nvSpPr>
@@ -9344,7 +9344,7 @@
       </p:sp>
       <p:pic>
         <p:nvPicPr>
-          <p:cNvPr id="542607690" name="Image 10" descr="preencoded.png"/>
+          <p:cNvPr id="1552178664" name="Image 10" descr="preencoded.png"/>
           <p:cNvPicPr>
             <a:picLocks noChangeAspect="1"/>
           </p:cNvPicPr>
@@ -9366,7 +9366,7 @@
       </p:pic>
       <p:sp>
         <p:nvSpPr>
-          <p:cNvPr id="1219393957" name="Text 22"/>
+          <p:cNvPr id="20048176" name="Text 22"/>
           <p:cNvSpPr/>
           <p:nvPr/>
         </p:nvSpPr>
@@ -9406,7 +9406,7 @@
       </p:sp>
       <p:pic>
         <p:nvPicPr>
-          <p:cNvPr id="740237523" name="Image 11" descr="preencoded.png"/>
+          <p:cNvPr id="1655208985" name="Image 11" descr="preencoded.png"/>
           <p:cNvPicPr>
             <a:picLocks noChangeAspect="1"/>
           </p:cNvPicPr>
@@ -9428,7 +9428,7 @@
       </p:pic>
       <p:sp>
         <p:nvSpPr>
-          <p:cNvPr id="64731284" name="Text 23"/>
+          <p:cNvPr id="1752270076" name="Text 23"/>
           <p:cNvSpPr/>
           <p:nvPr/>
         </p:nvSpPr>
@@ -9468,7 +9468,7 @@
       </p:sp>
       <p:sp>
         <p:nvSpPr>
-          <p:cNvPr id="2048627610" name="Text 24"/>
+          <p:cNvPr id="444294173" name="Text 24"/>
           <p:cNvSpPr/>
           <p:nvPr/>
         </p:nvSpPr>
@@ -9548,7 +9548,7 @@
       </p:grpSpPr>
       <p:sp>
         <p:nvSpPr>
-          <p:cNvPr id="728689316" name="Text 0"/>
+          <p:cNvPr id="1315124560" name="Text 0"/>
           <p:cNvSpPr/>
           <p:nvPr/>
         </p:nvSpPr>
@@ -9592,7 +9592,7 @@
       </p:sp>
       <p:sp>
         <p:nvSpPr>
-          <p:cNvPr id="1558926275" name="Text 1"/>
+          <p:cNvPr id="1280873608" name="Text 1"/>
           <p:cNvSpPr/>
           <p:nvPr/>
         </p:nvSpPr>
@@ -9636,7 +9636,7 @@
       </p:sp>
       <p:sp>
         <p:nvSpPr>
-          <p:cNvPr id="1906233480" name="Text 2"/>
+          <p:cNvPr id="1654303690" name="Text 2"/>
           <p:cNvSpPr/>
           <p:nvPr/>
         </p:nvSpPr>
@@ -9680,7 +9680,7 @@
       </p:sp>
       <p:sp>
         <p:nvSpPr>
-          <p:cNvPr id="2126190283" name="Shape 3"/>
+          <p:cNvPr id="1517296130" name="Shape 3"/>
           <p:cNvSpPr/>
           <p:nvPr/>
         </p:nvSpPr>
@@ -9724,7 +9724,7 @@
       </p:sp>
       <p:pic>
         <p:nvPicPr>
-          <p:cNvPr id="533566196" name="Image 1" descr="preencoded.png"/>
+          <p:cNvPr id="315441821" name="Image 1" descr="preencoded.png"/>
           <p:cNvPicPr>
             <a:picLocks noChangeAspect="1"/>
           </p:cNvPicPr>
@@ -9746,7 +9746,7 @@
       </p:pic>
       <p:sp>
         <p:nvSpPr>
-          <p:cNvPr id="1827197375" name="Text 4"/>
+          <p:cNvPr id="1077896858" name="Text 4"/>
           <p:cNvSpPr/>
           <p:nvPr/>
         </p:nvSpPr>
@@ -9790,7 +9790,7 @@
       </p:sp>
       <p:sp>
         <p:nvSpPr>
-          <p:cNvPr id="1169425144" name="Text 5"/>
+          <p:cNvPr id="751593797" name="Text 5"/>
           <p:cNvSpPr/>
           <p:nvPr/>
         </p:nvSpPr>
@@ -9834,7 +9834,7 @@
       </p:sp>
       <p:pic>
         <p:nvPicPr>
-          <p:cNvPr id="74329457" name="Image 2" descr="preencoded.png"/>
+          <p:cNvPr id="942982360" name="Image 2" descr="preencoded.png"/>
           <p:cNvPicPr>
             <a:picLocks noChangeAspect="1"/>
           </p:cNvPicPr>
@@ -9856,7 +9856,7 @@
       </p:pic>
       <p:sp>
         <p:nvSpPr>
-          <p:cNvPr id="1528420373" name="Shape 6"/>
+          <p:cNvPr id="1105485243" name="Shape 6"/>
           <p:cNvSpPr/>
           <p:nvPr/>
         </p:nvSpPr>
@@ -9900,7 +9900,7 @@
       </p:sp>
       <p:pic>
         <p:nvPicPr>
-          <p:cNvPr id="530321822" name="Image 3" descr="preencoded.png"/>
+          <p:cNvPr id="656733270" name="Image 3" descr="preencoded.png"/>
           <p:cNvPicPr>
             <a:picLocks noChangeAspect="1"/>
           </p:cNvPicPr>
@@ -9922,7 +9922,7 @@
       </p:pic>
       <p:sp>
         <p:nvSpPr>
-          <p:cNvPr id="1249741392" name="Text 7"/>
+          <p:cNvPr id="1203595143" name="Text 7"/>
           <p:cNvSpPr/>
           <p:nvPr/>
         </p:nvSpPr>
@@ -9966,7 +9966,7 @@
       </p:sp>
       <p:sp>
         <p:nvSpPr>
-          <p:cNvPr id="360569309" name="Text 8"/>
+          <p:cNvPr id="2083658083" name="Text 8"/>
           <p:cNvSpPr/>
           <p:nvPr/>
         </p:nvSpPr>
@@ -10010,7 +10010,7 @@
       </p:sp>
       <p:pic>
         <p:nvPicPr>
-          <p:cNvPr id="1116766572" name="Image 4" descr="preencoded.png"/>
+          <p:cNvPr id="1425026828" name="Image 4" descr="preencoded.png"/>
           <p:cNvPicPr>
             <a:picLocks noChangeAspect="1"/>
           </p:cNvPicPr>
@@ -10032,7 +10032,7 @@
       </p:pic>
       <p:sp>
         <p:nvSpPr>
-          <p:cNvPr id="449184524" name="Shape 9"/>
+          <p:cNvPr id="804017004" name="Shape 9"/>
           <p:cNvSpPr/>
           <p:nvPr/>
         </p:nvSpPr>
@@ -10076,7 +10076,7 @@
       </p:sp>
       <p:pic>
         <p:nvPicPr>
-          <p:cNvPr id="1695607077" name="Image 5" descr="preencoded.png"/>
+          <p:cNvPr id="269510656" name="Image 5" descr="preencoded.png"/>
           <p:cNvPicPr>
             <a:picLocks noChangeAspect="1"/>
           </p:cNvPicPr>
@@ -10098,7 +10098,7 @@
       </p:pic>
       <p:sp>
         <p:nvSpPr>
-          <p:cNvPr id="1831057722" name="Text 10"/>
+          <p:cNvPr id="78297861" name="Text 10"/>
           <p:cNvSpPr/>
           <p:nvPr/>
         </p:nvSpPr>
@@ -10142,7 +10142,7 @@
       </p:sp>
       <p:sp>
         <p:nvSpPr>
-          <p:cNvPr id="1415608223" name="Text 11"/>
+          <p:cNvPr id="829685802" name="Text 11"/>
           <p:cNvSpPr/>
           <p:nvPr/>
         </p:nvSpPr>
@@ -10186,7 +10186,7 @@
       </p:sp>
       <p:sp>
         <p:nvSpPr>
-          <p:cNvPr id="189410177" name="Text 12"/>
+          <p:cNvPr id="285718814" name="Text 12"/>
           <p:cNvSpPr/>
           <p:nvPr/>
         </p:nvSpPr>
@@ -10230,7 +10230,7 @@
       </p:sp>
       <p:sp>
         <p:nvSpPr>
-          <p:cNvPr id="980179471" name="Text 13"/>
+          <p:cNvPr id="1287942040" name="Text 13"/>
           <p:cNvSpPr/>
           <p:nvPr/>
         </p:nvSpPr>
@@ -10314,7 +10314,7 @@
       </p:grpSpPr>
       <p:sp>
         <p:nvSpPr>
-          <p:cNvPr id="375715820" name="Text 0"/>
+          <p:cNvPr id="1504286198" name="Text 0"/>
           <p:cNvSpPr/>
           <p:nvPr/>
         </p:nvSpPr>
@@ -10354,7 +10354,7 @@
       </p:sp>
       <p:sp>
         <p:nvSpPr>
-          <p:cNvPr id="299130957" name="Text 1"/>
+          <p:cNvPr id="362315899" name="Text 1"/>
           <p:cNvSpPr/>
           <p:nvPr/>
         </p:nvSpPr>
@@ -10394,7 +10394,7 @@
       </p:sp>
       <p:sp>
         <p:nvSpPr>
-          <p:cNvPr id="377348448" name="Text 2"/>
+          <p:cNvPr id="1675668151" name="Text 2"/>
           <p:cNvSpPr/>
           <p:nvPr/>
         </p:nvSpPr>
@@ -10434,7 +10434,7 @@
       </p:sp>
       <p:sp>
         <p:nvSpPr>
-          <p:cNvPr id="1813674631" name="Text 18"/>
+          <p:cNvPr id="2085349664" name="Text 18"/>
           <p:cNvSpPr/>
           <p:nvPr/>
         </p:nvSpPr>
@@ -10474,7 +10474,7 @@
       </p:sp>
       <p:sp>
         <p:nvSpPr>
-          <p:cNvPr id="432990239" name="Text 19"/>
+          <p:cNvPr id="2092759311" name="Text 19"/>
           <p:cNvSpPr/>
           <p:nvPr/>
         </p:nvSpPr>
@@ -10514,7 +10514,7 @@
       </p:sp>
       <p:sp>
         <p:nvSpPr>
-          <p:cNvPr id="428568428" name="Shape 6"/>
+          <p:cNvPr id="1948752458" name="Shape 6"/>
           <p:cNvSpPr/>
           <p:nvPr/>
         </p:nvSpPr>
@@ -10536,7 +10536,7 @@
       </p:sp>
       <p:pic>
         <p:nvPicPr>
-          <p:cNvPr id="682115370" name="Image 1" descr="preencoded.png"/>
+          <p:cNvPr id="2005926242" name="Image 1" descr="preencoded.png"/>
           <p:cNvPicPr>
             <a:picLocks noChangeAspect="1"/>
           </p:cNvPicPr>
@@ -10558,7 +10558,7 @@
       </p:pic>
       <p:sp>
         <p:nvSpPr>
-          <p:cNvPr id="1256586781" name="Text 7"/>
+          <p:cNvPr id="1814926857" name="Text 7"/>
           <p:cNvSpPr/>
           <p:nvPr/>
         </p:nvSpPr>
@@ -10598,7 +10598,7 @@
       </p:sp>
       <p:sp>
         <p:nvSpPr>
-          <p:cNvPr id="189112031" name="Text 8"/>
+          <p:cNvPr id="167348840" name="Text 8"/>
           <p:cNvSpPr/>
           <p:nvPr/>
         </p:nvSpPr>
@@ -10638,7 +10638,7 @@
       </p:sp>
       <p:sp>
         <p:nvSpPr>
-          <p:cNvPr id="395725786" name="Shape 9"/>
+          <p:cNvPr id="1170578522" name="Shape 9"/>
           <p:cNvSpPr/>
           <p:nvPr/>
         </p:nvSpPr>
@@ -10660,7 +10660,7 @@
       </p:sp>
       <p:pic>
         <p:nvPicPr>
-          <p:cNvPr id="201040768" name="Image 2" descr="preencoded.png"/>
+          <p:cNvPr id="1163200709" name="Image 2" descr="preencoded.png"/>
           <p:cNvPicPr>
             <a:picLocks noChangeAspect="1"/>
           </p:cNvPicPr>
@@ -10682,7 +10682,7 @@
       </p:pic>
       <p:sp>
         <p:nvSpPr>
-          <p:cNvPr id="2144570523" name="Text 10"/>
+          <p:cNvPr id="1783028346" name="Text 10"/>
           <p:cNvSpPr/>
           <p:nvPr/>
         </p:nvSpPr>
@@ -10722,7 +10722,7 @@
       </p:sp>
       <p:sp>
         <p:nvSpPr>
-          <p:cNvPr id="450655426" name="Text 11"/>
+          <p:cNvPr id="748946823" name="Text 11"/>
           <p:cNvSpPr/>
           <p:nvPr/>
         </p:nvSpPr>
@@ -10762,7 +10762,7 @@
       </p:sp>
       <p:sp>
         <p:nvSpPr>
-          <p:cNvPr id="1462776761" name="Shape 12"/>
+          <p:cNvPr id="1206376617" name="Shape 12"/>
           <p:cNvSpPr/>
           <p:nvPr/>
         </p:nvSpPr>
@@ -10784,7 +10784,7 @@
       </p:sp>
       <p:pic>
         <p:nvPicPr>
-          <p:cNvPr id="727910061" name="Image 3" descr="preencoded.png"/>
+          <p:cNvPr id="597249346" name="Image 3" descr="preencoded.png"/>
           <p:cNvPicPr>
             <a:picLocks noChangeAspect="1"/>
           </p:cNvPicPr>
@@ -10806,7 +10806,7 @@
       </p:pic>
       <p:sp>
         <p:nvSpPr>
-          <p:cNvPr id="291111449" name="Text 13"/>
+          <p:cNvPr id="1967178797" name="Text 13"/>
           <p:cNvSpPr/>
           <p:nvPr/>
         </p:nvSpPr>
@@ -10846,7 +10846,7 @@
       </p:sp>
       <p:sp>
         <p:nvSpPr>
-          <p:cNvPr id="1594712884" name="Text 14"/>
+          <p:cNvPr id="1736727195" name="Text 14"/>
           <p:cNvSpPr/>
           <p:nvPr/>
         </p:nvSpPr>
@@ -10886,7 +10886,7 @@
       </p:sp>
       <p:sp>
         <p:nvSpPr>
-          <p:cNvPr id="173754278" name="Shape 15"/>
+          <p:cNvPr id="896574435" name="Shape 15"/>
           <p:cNvSpPr/>
           <p:nvPr/>
         </p:nvSpPr>
@@ -10908,7 +10908,7 @@
       </p:sp>
       <p:pic>
         <p:nvPicPr>
-          <p:cNvPr id="401250586" name="Image 4" descr="preencoded.png"/>
+          <p:cNvPr id="822229356" name="Image 4" descr="preencoded.png"/>
           <p:cNvPicPr>
             <a:picLocks noChangeAspect="1"/>
           </p:cNvPicPr>
@@ -10930,7 +10930,7 @@
       </p:pic>
       <p:sp>
         <p:nvSpPr>
-          <p:cNvPr id="858719906" name="Text 16"/>
+          <p:cNvPr id="1782282556" name="Text 16"/>
           <p:cNvSpPr/>
           <p:nvPr/>
         </p:nvSpPr>
@@ -10970,7 +10970,7 @@
       </p:sp>
       <p:sp>
         <p:nvSpPr>
-          <p:cNvPr id="2052147977" name="Text 17"/>
+          <p:cNvPr id="521898334" name="Text 17"/>
           <p:cNvSpPr/>
           <p:nvPr/>
         </p:nvSpPr>
@@ -11043,7 +11043,7 @@
       </p:grpSpPr>
       <p:sp>
         <p:nvSpPr>
-          <p:cNvPr id="544221760" name="TextBox 1"/>
+          <p:cNvPr id="631007760" name="TextBox 1"/>
           <p:cNvSpPr txBox="1"/>
           <p:nvPr/>
         </p:nvSpPr>
@@ -11081,7 +11081,7 @@
       </p:sp>
       <p:sp>
         <p:nvSpPr>
-          <p:cNvPr id="674828429" name="TextBox 2"/>
+          <p:cNvPr id="1743560221" name="TextBox 2"/>
           <p:cNvSpPr txBox="1"/>
           <p:nvPr/>
         </p:nvSpPr>
@@ -11119,7 +11119,7 @@
       </p:sp>
       <p:sp>
         <p:nvSpPr>
-          <p:cNvPr id="449994373" name="Rounded Rectangle 4"/>
+          <p:cNvPr id="905547099" name="Rounded Rectangle 4"/>
           <p:cNvSpPr/>
           <p:nvPr/>
         </p:nvSpPr>
@@ -11170,7 +11170,7 @@
       </p:sp>
       <p:sp>
         <p:nvSpPr>
-          <p:cNvPr id="1682109939" name="TextBox 5"/>
+          <p:cNvPr id="527764035" name="TextBox 5"/>
           <p:cNvSpPr txBox="1"/>
           <p:nvPr/>
         </p:nvSpPr>
@@ -11679,7 +11679,7 @@
       </p:sp>
       <p:sp>
         <p:nvSpPr>
-          <p:cNvPr id="1379104270" name="TextBox 8"/>
+          <p:cNvPr id="1000499546" name="TextBox 8"/>
           <p:cNvSpPr txBox="1"/>
           <p:nvPr/>
         </p:nvSpPr>
@@ -11717,7 +11717,7 @@
       </p:sp>
       <p:sp>
         <p:nvSpPr>
-          <p:cNvPr id="2126444179" name="TextBox 9"/>
+          <p:cNvPr id="42851367" name="TextBox 9"/>
           <p:cNvSpPr txBox="1"/>
           <p:nvPr/>
         </p:nvSpPr>
@@ -11795,7 +11795,7 @@
       </p:grpSpPr>
       <p:sp>
         <p:nvSpPr>
-          <p:cNvPr id="1743072393" name="Text 0"/>
+          <p:cNvPr id="294318866" name="Text 0"/>
           <p:cNvSpPr/>
           <p:nvPr/>
         </p:nvSpPr>
@@ -11835,7 +11835,7 @@
       </p:sp>
       <p:sp>
         <p:nvSpPr>
-          <p:cNvPr id="2113247117" name="Text 1"/>
+          <p:cNvPr id="1358560763" name="Text 1"/>
           <p:cNvSpPr/>
           <p:nvPr/>
         </p:nvSpPr>
@@ -11875,7 +11875,7 @@
       </p:sp>
       <p:sp>
         <p:nvSpPr>
-          <p:cNvPr id="1510227987" name="Text 2"/>
+          <p:cNvPr id="621193973" name="Text 2"/>
           <p:cNvSpPr/>
           <p:nvPr/>
         </p:nvSpPr>
@@ -11915,7 +11915,7 @@
       </p:sp>
       <p:sp>
         <p:nvSpPr>
-          <p:cNvPr id="1146599035" name="Shape 3"/>
+          <p:cNvPr id="96212448" name="Shape 3"/>
           <p:cNvSpPr/>
           <p:nvPr/>
         </p:nvSpPr>
@@ -11949,7 +11949,7 @@
       </p:sp>
       <p:pic>
         <p:nvPicPr>
-          <p:cNvPr id="1404292662" name="Image 0" descr="preencoded.png"/>
+          <p:cNvPr id="458054157" name="Image 0" descr="preencoded.png"/>
           <p:cNvPicPr>
             <a:picLocks noChangeAspect="1"/>
           </p:cNvPicPr>
@@ -11971,7 +11971,7 @@
       </p:pic>
       <p:sp>
         <p:nvSpPr>
-          <p:cNvPr id="648603340" name="Text 4"/>
+          <p:cNvPr id="357262902" name="Text 4"/>
           <p:cNvSpPr/>
           <p:nvPr/>
         </p:nvSpPr>
@@ -12011,7 +12011,7 @@
       </p:sp>
       <p:sp>
         <p:nvSpPr>
-          <p:cNvPr id="238804358" name="Text 5"/>
+          <p:cNvPr id="544346444" name="Text 5"/>
           <p:cNvSpPr/>
           <p:nvPr/>
         </p:nvSpPr>
@@ -12051,7 +12051,7 @@
       </p:sp>
       <p:sp>
         <p:nvSpPr>
-          <p:cNvPr id="1155357617" name="Shape 8"/>
+          <p:cNvPr id="2118850175" name="Shape 8"/>
           <p:cNvSpPr/>
           <p:nvPr/>
         </p:nvSpPr>
@@ -12085,7 +12085,7 @@
       </p:sp>
       <p:pic>
         <p:nvPicPr>
-          <p:cNvPr id="2025444558" name="Image 1" descr="preencoded.png"/>
+          <p:cNvPr id="1782776398" name="Image 1" descr="preencoded.png"/>
           <p:cNvPicPr>
             <a:picLocks noChangeAspect="1"/>
           </p:cNvPicPr>
@@ -12107,7 +12107,7 @@
       </p:pic>
       <p:sp>
         <p:nvSpPr>
-          <p:cNvPr id="1064283310" name="Text 9"/>
+          <p:cNvPr id="2124926153" name="Text 9"/>
           <p:cNvSpPr/>
           <p:nvPr/>
         </p:nvSpPr>
@@ -12147,7 +12147,7 @@
       </p:sp>
       <p:sp>
         <p:nvSpPr>
-          <p:cNvPr id="1475592536" name="Text 10"/>
+          <p:cNvPr id="2065539861" name="Text 10"/>
           <p:cNvSpPr/>
           <p:nvPr/>
         </p:nvSpPr>
@@ -12187,7 +12187,7 @@
       </p:sp>
       <p:sp>
         <p:nvSpPr>
-          <p:cNvPr id="1447437080" name="Shape 13"/>
+          <p:cNvPr id="1213039045" name="Shape 13"/>
           <p:cNvSpPr/>
           <p:nvPr/>
         </p:nvSpPr>
@@ -12221,7 +12221,7 @@
       </p:sp>
       <p:pic>
         <p:nvPicPr>
-          <p:cNvPr id="1760216390" name="Image 2" descr="preencoded.png"/>
+          <p:cNvPr id="16992161" name="Image 2" descr="preencoded.png"/>
           <p:cNvPicPr>
             <a:picLocks noChangeAspect="1"/>
           </p:cNvPicPr>
@@ -12243,7 +12243,7 @@
       </p:pic>
       <p:sp>
         <p:nvSpPr>
-          <p:cNvPr id="753975324" name="Text 14"/>
+          <p:cNvPr id="1010335981" name="Text 14"/>
           <p:cNvSpPr/>
           <p:nvPr/>
         </p:nvSpPr>
@@ -12283,7 +12283,7 @@
       </p:sp>
       <p:sp>
         <p:nvSpPr>
-          <p:cNvPr id="518258992" name="Text 15"/>
+          <p:cNvPr id="600151869" name="Text 15"/>
           <p:cNvSpPr/>
           <p:nvPr/>
         </p:nvSpPr>
@@ -12323,7 +12323,7 @@
       </p:sp>
       <p:sp>
         <p:nvSpPr>
-          <p:cNvPr id="578646222" name="Shape 18"/>
+          <p:cNvPr id="1185306174" name="Shape 18"/>
           <p:cNvSpPr/>
           <p:nvPr/>
         </p:nvSpPr>
@@ -12357,7 +12357,7 @@
       </p:sp>
       <p:pic>
         <p:nvPicPr>
-          <p:cNvPr id="958326864" name="Image 3" descr="preencoded.png"/>
+          <p:cNvPr id="500703756" name="Image 3" descr="preencoded.png"/>
           <p:cNvPicPr>
             <a:picLocks noChangeAspect="1"/>
           </p:cNvPicPr>
@@ -12379,7 +12379,7 @@
       </p:pic>
       <p:sp>
         <p:nvSpPr>
-          <p:cNvPr id="98516880" name="Text 19"/>
+          <p:cNvPr id="1606355251" name="Text 19"/>
           <p:cNvSpPr/>
           <p:nvPr/>
         </p:nvSpPr>
@@ -12419,7 +12419,7 @@
       </p:sp>
       <p:sp>
         <p:nvSpPr>
-          <p:cNvPr id="761041458" name="Text 20"/>
+          <p:cNvPr id="546859502" name="Text 20"/>
           <p:cNvSpPr/>
           <p:nvPr/>
         </p:nvSpPr>
@@ -12459,7 +12459,7 @@
       </p:sp>
       <p:sp>
         <p:nvSpPr>
-          <p:cNvPr id="570608594" name="Text 23"/>
+          <p:cNvPr id="1370499689" name="Text 23"/>
           <p:cNvSpPr/>
           <p:nvPr/>
         </p:nvSpPr>
@@ -12499,7 +12499,7 @@
       </p:sp>
       <p:sp>
         <p:nvSpPr>
-          <p:cNvPr id="225484445" name="Text 24"/>
+          <p:cNvPr id="929628638" name="Text 24"/>
           <p:cNvSpPr/>
           <p:nvPr/>
         </p:nvSpPr>
@@ -12579,7 +12579,7 @@
       </p:grpSpPr>
       <p:pic>
         <p:nvPicPr>
-          <p:cNvPr id="470392184" name="Image 0" descr="preencoded.png"/>
+          <p:cNvPr id="1660695312" name="Image 0" descr="preencoded.png"/>
           <p:cNvPicPr>
             <a:picLocks noChangeAspect="1"/>
           </p:cNvPicPr>
@@ -12601,7 +12601,7 @@
       </p:pic>
       <p:pic>
         <p:nvPicPr>
-          <p:cNvPr id="789012514" name="Image 1" descr="preencoded.png"/>
+          <p:cNvPr id="240589898" name="Image 1" descr="preencoded.png"/>
           <p:cNvPicPr>
             <a:picLocks noChangeAspect="1"/>
           </p:cNvPicPr>
@@ -12623,7 +12623,7 @@
       </p:pic>
       <p:sp>
         <p:nvSpPr>
-          <p:cNvPr id="614177658" name="Text 0"/>
+          <p:cNvPr id="109189596" name="Text 0"/>
           <p:cNvSpPr/>
           <p:nvPr/>
         </p:nvSpPr>
@@ -12663,7 +12663,7 @@
       </p:sp>
       <p:sp>
         <p:nvSpPr>
-          <p:cNvPr id="83970735" name="Text 1"/>
+          <p:cNvPr id="636068188" name="Text 1"/>
           <p:cNvSpPr/>
           <p:nvPr/>
         </p:nvSpPr>
@@ -12703,7 +12703,7 @@
       </p:sp>
       <p:sp>
         <p:nvSpPr>
-          <p:cNvPr id="1508573244" name="Text 2"/>
+          <p:cNvPr id="1344960121" name="Text 2"/>
           <p:cNvSpPr/>
           <p:nvPr/>
         </p:nvSpPr>
@@ -12743,7 +12743,7 @@
       </p:sp>
       <p:sp>
         <p:nvSpPr>
-          <p:cNvPr id="141999341" name="Text 3"/>
+          <p:cNvPr id="2102529067" name="Text 3"/>
           <p:cNvSpPr/>
           <p:nvPr/>
         </p:nvSpPr>
@@ -12783,7 +12783,7 @@
       </p:sp>
       <p:sp>
         <p:nvSpPr>
-          <p:cNvPr id="2139993110" name="Text 4"/>
+          <p:cNvPr id="60294438" name="Text 4"/>
           <p:cNvSpPr/>
           <p:nvPr/>
         </p:nvSpPr>
@@ -12863,7 +12863,7 @@
       </p:grpSpPr>
       <p:sp>
         <p:nvSpPr>
-          <p:cNvPr id="748588889" name="Text 0"/>
+          <p:cNvPr id="31856361" name="Text 0"/>
           <p:cNvSpPr/>
           <p:nvPr/>
         </p:nvSpPr>
@@ -12903,7 +12903,7 @@
       </p:sp>
       <p:sp>
         <p:nvSpPr>
-          <p:cNvPr id="1617044189" name="Text 1"/>
+          <p:cNvPr id="858337637" name="Text 1"/>
           <p:cNvSpPr/>
           <p:nvPr/>
         </p:nvSpPr>
@@ -12943,7 +12943,7 @@
       </p:sp>
       <p:sp>
         <p:nvSpPr>
-          <p:cNvPr id="980188380" name="Text 2"/>
+          <p:cNvPr id="2102588749" name="Text 2"/>
           <p:cNvSpPr/>
           <p:nvPr/>
         </p:nvSpPr>
@@ -12983,7 +12983,7 @@
       </p:sp>
       <p:sp>
         <p:nvSpPr>
-          <p:cNvPr id="1459484636" name="Shape 3"/>
+          <p:cNvPr id="818891041" name="Shape 3"/>
           <p:cNvSpPr/>
           <p:nvPr/>
         </p:nvSpPr>
@@ -13017,7 +13017,7 @@
       </p:sp>
       <p:pic>
         <p:nvPicPr>
-          <p:cNvPr id="876281777" name="Image 0" descr="preencoded.png"/>
+          <p:cNvPr id="675222575" name="Image 0" descr="preencoded.png"/>
           <p:cNvPicPr>
             <a:picLocks noChangeAspect="1"/>
           </p:cNvPicPr>
@@ -13039,7 +13039,7 @@
       </p:pic>
       <p:sp>
         <p:nvSpPr>
-          <p:cNvPr id="1667949874" name="Text 4"/>
+          <p:cNvPr id="362669434" name="Text 4"/>
           <p:cNvSpPr/>
           <p:nvPr/>
         </p:nvSpPr>
@@ -13079,7 +13079,7 @@
       </p:sp>
       <p:sp>
         <p:nvSpPr>
-          <p:cNvPr id="926273862" name="Text 5"/>
+          <p:cNvPr id="913798070" name="Text 5"/>
           <p:cNvSpPr/>
           <p:nvPr/>
         </p:nvSpPr>
@@ -13119,7 +13119,7 @@
       </p:sp>
       <p:sp>
         <p:nvSpPr>
-          <p:cNvPr id="94985335" name="Shape 6"/>
+          <p:cNvPr id="1295724004" name="Shape 6"/>
           <p:cNvSpPr/>
           <p:nvPr/>
         </p:nvSpPr>
@@ -13153,7 +13153,7 @@
       </p:sp>
       <p:pic>
         <p:nvPicPr>
-          <p:cNvPr id="716375565" name="Image 1" descr="preencoded.png"/>
+          <p:cNvPr id="303416571" name="Image 1" descr="preencoded.png"/>
           <p:cNvPicPr>
             <a:picLocks noChangeAspect="1"/>
           </p:cNvPicPr>
@@ -13175,7 +13175,7 @@
       </p:pic>
       <p:sp>
         <p:nvSpPr>
-          <p:cNvPr id="1734678212" name="Text 7"/>
+          <p:cNvPr id="876893211" name="Text 7"/>
           <p:cNvSpPr/>
           <p:nvPr/>
         </p:nvSpPr>
@@ -13215,7 +13215,7 @@
       </p:sp>
       <p:sp>
         <p:nvSpPr>
-          <p:cNvPr id="227258211" name="Text 8"/>
+          <p:cNvPr id="749040124" name="Text 8"/>
           <p:cNvSpPr/>
           <p:nvPr/>
         </p:nvSpPr>
@@ -13255,7 +13255,7 @@
       </p:sp>
       <p:sp>
         <p:nvSpPr>
-          <p:cNvPr id="274713272" name="Shape 9"/>
+          <p:cNvPr id="822692980" name="Shape 9"/>
           <p:cNvSpPr/>
           <p:nvPr/>
         </p:nvSpPr>
@@ -13289,7 +13289,7 @@
       </p:sp>
       <p:pic>
         <p:nvPicPr>
-          <p:cNvPr id="460457916" name="Image 2" descr="preencoded.png"/>
+          <p:cNvPr id="1603589861" name="Image 2" descr="preencoded.png"/>
           <p:cNvPicPr>
             <a:picLocks noChangeAspect="1"/>
           </p:cNvPicPr>
@@ -13311,7 +13311,7 @@
       </p:pic>
       <p:sp>
         <p:nvSpPr>
-          <p:cNvPr id="607474422" name="Text 10"/>
+          <p:cNvPr id="1329680130" name="Text 10"/>
           <p:cNvSpPr/>
           <p:nvPr/>
         </p:nvSpPr>
@@ -13351,7 +13351,7 @@
       </p:sp>
       <p:sp>
         <p:nvSpPr>
-          <p:cNvPr id="131291268" name="Text 11"/>
+          <p:cNvPr id="662187032" name="Text 11"/>
           <p:cNvSpPr/>
           <p:nvPr/>
         </p:nvSpPr>
@@ -13391,7 +13391,7 @@
       </p:sp>
       <p:sp>
         <p:nvSpPr>
-          <p:cNvPr id="577871412" name="Shape 12"/>
+          <p:cNvPr id="234534698" name="Shape 12"/>
           <p:cNvSpPr/>
           <p:nvPr/>
         </p:nvSpPr>
@@ -13425,7 +13425,7 @@
       </p:sp>
       <p:pic>
         <p:nvPicPr>
-          <p:cNvPr id="1253966303" name="Image 3" descr="preencoded.png"/>
+          <p:cNvPr id="1712917178" name="Image 3" descr="preencoded.png"/>
           <p:cNvPicPr>
             <a:picLocks noChangeAspect="1"/>
           </p:cNvPicPr>
@@ -13447,7 +13447,7 @@
       </p:pic>
       <p:sp>
         <p:nvSpPr>
-          <p:cNvPr id="345463778" name="Text 13"/>
+          <p:cNvPr id="1580616990" name="Text 13"/>
           <p:cNvSpPr/>
           <p:nvPr/>
         </p:nvSpPr>
@@ -13487,7 +13487,7 @@
       </p:sp>
       <p:sp>
         <p:nvSpPr>
-          <p:cNvPr id="1035091534" name="Text 14"/>
+          <p:cNvPr id="774721347" name="Text 14"/>
           <p:cNvSpPr/>
           <p:nvPr/>
         </p:nvSpPr>
@@ -13527,7 +13527,7 @@
       </p:sp>
       <p:sp>
         <p:nvSpPr>
-          <p:cNvPr id="831371258" name="Text 15"/>
+          <p:cNvPr id="411560413" name="Text 15"/>
           <p:cNvSpPr/>
           <p:nvPr/>
         </p:nvSpPr>
@@ -13567,7 +13567,7 @@
       </p:sp>
       <p:sp>
         <p:nvSpPr>
-          <p:cNvPr id="342412038" name="Text 16"/>
+          <p:cNvPr id="1781035270" name="Text 16"/>
           <p:cNvSpPr/>
           <p:nvPr/>
         </p:nvSpPr>
@@ -13647,7 +13647,7 @@
       </p:grpSpPr>
       <p:pic>
         <p:nvPicPr>
-          <p:cNvPr id="413862592" name=""/>
+          <p:cNvPr id="194936705" name=""/>
           <p:cNvPicPr>
             <a:picLocks noChangeAspect="1"/>
           </p:cNvPicPr>
@@ -13669,7 +13669,7 @@
       </p:pic>
       <p:sp>
         <p:nvSpPr>
-          <p:cNvPr id="1123905568" name="Text 0"/>
+          <p:cNvPr id="398025353" name="Text 0"/>
           <p:cNvSpPr/>
           <p:nvPr/>
         </p:nvSpPr>
@@ -13709,7 +13709,7 @@
       </p:sp>
       <p:sp>
         <p:nvSpPr>
-          <p:cNvPr id="1060588871" name="Text 1"/>
+          <p:cNvPr id="575095038" name="Text 1"/>
           <p:cNvSpPr/>
           <p:nvPr/>
         </p:nvSpPr>
@@ -13749,7 +13749,7 @@
       </p:sp>
       <p:sp>
         <p:nvSpPr>
-          <p:cNvPr id="1489425707" name="Text 2"/>
+          <p:cNvPr id="214239518" name="Text 2"/>
           <p:cNvSpPr/>
           <p:nvPr/>
         </p:nvSpPr>
@@ -13789,7 +13789,7 @@
       </p:sp>
       <p:pic>
         <p:nvPicPr>
-          <p:cNvPr id="1968442079" name="Image 0" descr="preencoded.png"/>
+          <p:cNvPr id="613287717" name="Image 0" descr="preencoded.png"/>
           <p:cNvPicPr>
             <a:picLocks noChangeAspect="1"/>
           </p:cNvPicPr>
@@ -13811,7 +13811,7 @@
       </p:pic>
       <p:sp>
         <p:nvSpPr>
-          <p:cNvPr id="914761796" name="Text 3"/>
+          <p:cNvPr id="1869965849" name="Text 3"/>
           <p:cNvSpPr/>
           <p:nvPr/>
         </p:nvSpPr>
@@ -13851,7 +13851,7 @@
       </p:sp>
       <p:sp>
         <p:nvSpPr>
-          <p:cNvPr id="1203256822" name="Text 4"/>
+          <p:cNvPr id="366219639" name="Text 4"/>
           <p:cNvSpPr/>
           <p:nvPr/>
         </p:nvSpPr>
@@ -13891,7 +13891,7 @@
       </p:sp>
       <p:pic>
         <p:nvPicPr>
-          <p:cNvPr id="1859148193" name="Image 1" descr="preencoded.png"/>
+          <p:cNvPr id="2120420145" name="Image 1" descr="preencoded.png"/>
           <p:cNvPicPr>
             <a:picLocks noChangeAspect="1"/>
           </p:cNvPicPr>
@@ -13913,7 +13913,7 @@
       </p:pic>
       <p:sp>
         <p:nvSpPr>
-          <p:cNvPr id="2096361209" name="Text 5"/>
+          <p:cNvPr id="736896394" name="Text 5"/>
           <p:cNvSpPr/>
           <p:nvPr/>
         </p:nvSpPr>
@@ -13953,7 +13953,7 @@
       </p:sp>
       <p:sp>
         <p:nvSpPr>
-          <p:cNvPr id="1089469360" name="Text 6"/>
+          <p:cNvPr id="2144639479" name="Text 6"/>
           <p:cNvSpPr/>
           <p:nvPr/>
         </p:nvSpPr>
@@ -13993,7 +13993,7 @@
       </p:sp>
       <p:pic>
         <p:nvPicPr>
-          <p:cNvPr id="718424869" name="Image 2" descr="preencoded.png"/>
+          <p:cNvPr id="834306365" name="Image 2" descr="preencoded.png"/>
           <p:cNvPicPr>
             <a:picLocks noChangeAspect="1"/>
           </p:cNvPicPr>
@@ -14015,7 +14015,7 @@
       </p:pic>
       <p:sp>
         <p:nvSpPr>
-          <p:cNvPr id="1293893826" name="Text 7"/>
+          <p:cNvPr id="1298201417" name="Text 7"/>
           <p:cNvSpPr/>
           <p:nvPr/>
         </p:nvSpPr>
@@ -14055,7 +14055,7 @@
       </p:sp>
       <p:sp>
         <p:nvSpPr>
-          <p:cNvPr id="1837209099" name="Text 8"/>
+          <p:cNvPr id="605269978" name="Text 8"/>
           <p:cNvSpPr/>
           <p:nvPr/>
         </p:nvSpPr>
@@ -14095,7 +14095,7 @@
       </p:sp>
       <p:pic>
         <p:nvPicPr>
-          <p:cNvPr id="395513888" name="Image 3" descr="preencoded.png"/>
+          <p:cNvPr id="1484117607" name="Image 3" descr="preencoded.png"/>
           <p:cNvPicPr>
             <a:picLocks noChangeAspect="1"/>
           </p:cNvPicPr>
@@ -14117,7 +14117,7 @@
       </p:pic>
       <p:sp>
         <p:nvSpPr>
-          <p:cNvPr id="1939097285" name="Text 9"/>
+          <p:cNvPr id="1793868733" name="Text 9"/>
           <p:cNvSpPr/>
           <p:nvPr/>
         </p:nvSpPr>
@@ -14157,7 +14157,7 @@
       </p:sp>
       <p:sp>
         <p:nvSpPr>
-          <p:cNvPr id="478830358" name="Text 10"/>
+          <p:cNvPr id="781486588" name="Text 10"/>
           <p:cNvSpPr/>
           <p:nvPr/>
         </p:nvSpPr>
@@ -14197,7 +14197,7 @@
       </p:sp>
       <p:sp>
         <p:nvSpPr>
-          <p:cNvPr id="717969427" name="Shape 12"/>
+          <p:cNvPr id="143252648" name="Shape 12"/>
           <p:cNvSpPr/>
           <p:nvPr/>
         </p:nvSpPr>
@@ -14219,7 +14219,7 @@
       </p:sp>
       <p:sp>
         <p:nvSpPr>
-          <p:cNvPr id="950620874" name="Shape 13"/>
+          <p:cNvPr id="849003378" name="Shape 13"/>
           <p:cNvSpPr/>
           <p:nvPr/>
         </p:nvSpPr>
@@ -14239,7 +14239,7 @@
       </p:sp>
       <p:sp>
         <p:nvSpPr>
-          <p:cNvPr id="1725425309" name="Shape 14"/>
+          <p:cNvPr id="1393764761" name="Shape 14"/>
           <p:cNvSpPr/>
           <p:nvPr/>
         </p:nvSpPr>
@@ -14259,7 +14259,7 @@
       </p:sp>
       <p:sp>
         <p:nvSpPr>
-          <p:cNvPr id="1779803681" name="Shape 15"/>
+          <p:cNvPr id="2132648566" name="Shape 15"/>
           <p:cNvSpPr/>
           <p:nvPr/>
         </p:nvSpPr>
@@ -14279,7 +14279,7 @@
       </p:sp>
       <p:sp>
         <p:nvSpPr>
-          <p:cNvPr id="878402089" name="Shape 16"/>
+          <p:cNvPr id="348818849" name="Shape 16"/>
           <p:cNvSpPr/>
           <p:nvPr/>
         </p:nvSpPr>
@@ -14299,7 +14299,7 @@
       </p:sp>
       <p:sp>
         <p:nvSpPr>
-          <p:cNvPr id="142564488" name="Text 17"/>
+          <p:cNvPr id="1604381923" name="Text 17"/>
           <p:cNvSpPr/>
           <p:nvPr/>
         </p:nvSpPr>
@@ -14339,7 +14339,7 @@
       </p:sp>
       <p:sp>
         <p:nvSpPr>
-          <p:cNvPr id="638752837" name="Text 48"/>
+          <p:cNvPr id="805898170" name="Text 48"/>
           <p:cNvSpPr/>
           <p:nvPr/>
         </p:nvSpPr>
@@ -14379,7 +14379,7 @@
       </p:sp>
       <p:sp>
         <p:nvSpPr>
-          <p:cNvPr id="1755165774" name="Text 49"/>
+          <p:cNvPr id="1879345893" name="Text 49"/>
           <p:cNvSpPr/>
           <p:nvPr/>
         </p:nvSpPr>
@@ -14459,7 +14459,7 @@
       </p:grpSpPr>
       <p:sp>
         <p:nvSpPr>
-          <p:cNvPr id="955528110" name="Text 0"/>
+          <p:cNvPr id="2121672882" name="Text 0"/>
           <p:cNvSpPr/>
           <p:nvPr/>
         </p:nvSpPr>
@@ -14499,7 +14499,7 @@
       </p:sp>
       <p:sp>
         <p:nvSpPr>
-          <p:cNvPr id="1840889392" name="Text 1"/>
+          <p:cNvPr id="1295816859" name="Text 1"/>
           <p:cNvSpPr/>
           <p:nvPr/>
         </p:nvSpPr>
@@ -14539,7 +14539,7 @@
       </p:sp>
       <p:sp>
         <p:nvSpPr>
-          <p:cNvPr id="1184716767" name="Text 2"/>
+          <p:cNvPr id="1357962555" name="Text 2"/>
           <p:cNvSpPr/>
           <p:nvPr/>
         </p:nvSpPr>
@@ -14579,7 +14579,7 @@
       </p:sp>
       <p:sp>
         <p:nvSpPr>
-          <p:cNvPr id="2015668448" name="Shape 3"/>
+          <p:cNvPr id="1155854488" name="Shape 3"/>
           <p:cNvSpPr/>
           <p:nvPr/>
         </p:nvSpPr>
@@ -14606,7 +14606,7 @@
       </p:sp>
       <p:pic>
         <p:nvPicPr>
-          <p:cNvPr id="732623491" name="Image 0" descr="preencoded.png"/>
+          <p:cNvPr id="284787798" name="Image 0" descr="preencoded.png"/>
           <p:cNvPicPr>
             <a:picLocks noChangeAspect="1"/>
           </p:cNvPicPr>
@@ -14628,7 +14628,7 @@
       </p:pic>
       <p:sp>
         <p:nvSpPr>
-          <p:cNvPr id="1980300285" name="Text 4"/>
+          <p:cNvPr id="1569471155" name="Text 4"/>
           <p:cNvSpPr/>
           <p:nvPr/>
         </p:nvSpPr>
@@ -14668,7 +14668,7 @@
       </p:sp>
       <p:sp>
         <p:nvSpPr>
-          <p:cNvPr id="728863460" name="Shape 5"/>
+          <p:cNvPr id="254452828" name="Shape 5"/>
           <p:cNvSpPr/>
           <p:nvPr/>
         </p:nvSpPr>
@@ -14688,7 +14688,7 @@
       </p:sp>
       <p:sp>
         <p:nvSpPr>
-          <p:cNvPr id="246626480" name="Text 6"/>
+          <p:cNvPr id="1372085530" name="Text 6"/>
           <p:cNvSpPr/>
           <p:nvPr/>
         </p:nvSpPr>
@@ -14728,7 +14728,7 @@
       </p:sp>
       <p:sp>
         <p:nvSpPr>
-          <p:cNvPr id="851674769" name="Shape 7"/>
+          <p:cNvPr id="108912078" name="Shape 7"/>
           <p:cNvSpPr/>
           <p:nvPr/>
         </p:nvSpPr>
@@ -14748,7 +14748,7 @@
       </p:sp>
       <p:sp>
         <p:nvSpPr>
-          <p:cNvPr id="1476877016" name="Text 8"/>
+          <p:cNvPr id="49222234" name="Text 8"/>
           <p:cNvSpPr/>
           <p:nvPr/>
         </p:nvSpPr>
@@ -14788,7 +14788,7 @@
       </p:sp>
       <p:sp>
         <p:nvSpPr>
-          <p:cNvPr id="834529198" name="Shape 9"/>
+          <p:cNvPr id="909836546" name="Shape 9"/>
           <p:cNvSpPr/>
           <p:nvPr/>
         </p:nvSpPr>
@@ -14808,7 +14808,7 @@
       </p:sp>
       <p:sp>
         <p:nvSpPr>
-          <p:cNvPr id="1809156007" name="Text 10"/>
+          <p:cNvPr id="1443707498" name="Text 10"/>
           <p:cNvSpPr/>
           <p:nvPr/>
         </p:nvSpPr>
@@ -14848,7 +14848,7 @@
       </p:sp>
       <p:sp>
         <p:nvSpPr>
-          <p:cNvPr id="1869425971" name="Shape 11"/>
+          <p:cNvPr id="1588262854" name="Shape 11"/>
           <p:cNvSpPr/>
           <p:nvPr/>
         </p:nvSpPr>
@@ -14868,7 +14868,7 @@
       </p:sp>
       <p:sp>
         <p:nvSpPr>
-          <p:cNvPr id="2093664120" name="Text 12"/>
+          <p:cNvPr id="1059116944" name="Text 12"/>
           <p:cNvSpPr/>
           <p:nvPr/>
         </p:nvSpPr>
@@ -14908,7 +14908,7 @@
       </p:sp>
       <p:sp>
         <p:nvSpPr>
-          <p:cNvPr id="923290333" name="Shape 13"/>
+          <p:cNvPr id="347953089" name="Shape 13"/>
           <p:cNvSpPr/>
           <p:nvPr/>
         </p:nvSpPr>
@@ -14928,7 +14928,7 @@
       </p:sp>
       <p:sp>
         <p:nvSpPr>
-          <p:cNvPr id="1088467263" name="Text 14"/>
+          <p:cNvPr id="2142738870" name="Text 14"/>
           <p:cNvSpPr/>
           <p:nvPr/>
         </p:nvSpPr>
@@ -14968,7 +14968,7 @@
       </p:sp>
       <p:sp>
         <p:nvSpPr>
-          <p:cNvPr id="615203209" name="Shape 15"/>
+          <p:cNvPr id="728283551" name="Shape 15"/>
           <p:cNvSpPr/>
           <p:nvPr/>
         </p:nvSpPr>
@@ -14988,7 +14988,7 @@
       </p:sp>
       <p:sp>
         <p:nvSpPr>
-          <p:cNvPr id="84509244" name="Text 16"/>
+          <p:cNvPr id="116887366" name="Text 16"/>
           <p:cNvSpPr/>
           <p:nvPr/>
         </p:nvSpPr>
@@ -15028,7 +15028,7 @@
       </p:sp>
       <p:sp>
         <p:nvSpPr>
-          <p:cNvPr id="349497740" name="Shape 17"/>
+          <p:cNvPr id="1848072793" name="Shape 17"/>
           <p:cNvSpPr/>
           <p:nvPr/>
         </p:nvSpPr>
@@ -15055,7 +15055,7 @@
       </p:sp>
       <p:pic>
         <p:nvPicPr>
-          <p:cNvPr id="342254212" name="Image 1" descr="preencoded.png"/>
+          <p:cNvPr id="1138648541" name="Image 1" descr="preencoded.png"/>
           <p:cNvPicPr>
             <a:picLocks noChangeAspect="1"/>
           </p:cNvPicPr>
@@ -15077,7 +15077,7 @@
       </p:pic>
       <p:sp>
         <p:nvSpPr>
-          <p:cNvPr id="1303191370" name="Text 18"/>
+          <p:cNvPr id="1517591443" name="Text 18"/>
           <p:cNvSpPr/>
           <p:nvPr/>
         </p:nvSpPr>
@@ -15117,7 +15117,7 @@
       </p:sp>
       <p:sp>
         <p:nvSpPr>
-          <p:cNvPr id="725557064" name="Shape 19"/>
+          <p:cNvPr id="1912908374" name="Shape 19"/>
           <p:cNvSpPr/>
           <p:nvPr/>
         </p:nvSpPr>
@@ -15137,7 +15137,7 @@
       </p:sp>
       <p:sp>
         <p:nvSpPr>
-          <p:cNvPr id="1410423872" name="Text 20"/>
+          <p:cNvPr id="1344464090" name="Text 20"/>
           <p:cNvSpPr/>
           <p:nvPr/>
         </p:nvSpPr>
@@ -15177,7 +15177,7 @@
       </p:sp>
       <p:sp>
         <p:nvSpPr>
-          <p:cNvPr id="1301459092" name="Shape 21"/>
+          <p:cNvPr id="387330231" name="Shape 21"/>
           <p:cNvSpPr/>
           <p:nvPr/>
         </p:nvSpPr>
@@ -15197,7 +15197,7 @@
       </p:sp>
       <p:sp>
         <p:nvSpPr>
-          <p:cNvPr id="1514575240" name="Text 22"/>
+          <p:cNvPr id="188790594" name="Text 22"/>
           <p:cNvSpPr/>
           <p:nvPr/>
         </p:nvSpPr>
@@ -15237,7 +15237,7 @@
       </p:sp>
       <p:sp>
         <p:nvSpPr>
-          <p:cNvPr id="1093114698" name="Shape 23"/>
+          <p:cNvPr id="1649109256" name="Shape 23"/>
           <p:cNvSpPr/>
           <p:nvPr/>
         </p:nvSpPr>
@@ -15257,7 +15257,7 @@
       </p:sp>
       <p:sp>
         <p:nvSpPr>
-          <p:cNvPr id="2061135106" name="Text 24"/>
+          <p:cNvPr id="1774934184" name="Text 24"/>
           <p:cNvSpPr/>
           <p:nvPr/>
         </p:nvSpPr>
@@ -15297,7 +15297,7 @@
       </p:sp>
       <p:sp>
         <p:nvSpPr>
-          <p:cNvPr id="1172271275" name="Shape 25"/>
+          <p:cNvPr id="708227789" name="Shape 25"/>
           <p:cNvSpPr/>
           <p:nvPr/>
         </p:nvSpPr>
@@ -15317,7 +15317,7 @@
       </p:sp>
       <p:sp>
         <p:nvSpPr>
-          <p:cNvPr id="1181377842" name="Text 26"/>
+          <p:cNvPr id="1125563501" name="Text 26"/>
           <p:cNvSpPr/>
           <p:nvPr/>
         </p:nvSpPr>
@@ -15357,7 +15357,7 @@
       </p:sp>
       <p:sp>
         <p:nvSpPr>
-          <p:cNvPr id="1924058392" name="Shape 27"/>
+          <p:cNvPr id="1835489888" name="Shape 27"/>
           <p:cNvSpPr/>
           <p:nvPr/>
         </p:nvSpPr>
@@ -15384,7 +15384,7 @@
       </p:sp>
       <p:pic>
         <p:nvPicPr>
-          <p:cNvPr id="1742156900" name="Image 2" descr="preencoded.png"/>
+          <p:cNvPr id="1517752872" name="Image 2" descr="preencoded.png"/>
           <p:cNvPicPr>
             <a:picLocks noChangeAspect="1"/>
           </p:cNvPicPr>
@@ -15406,7 +15406,7 @@
       </p:pic>
       <p:sp>
         <p:nvSpPr>
-          <p:cNvPr id="630926437" name="Text 28"/>
+          <p:cNvPr id="1651931295" name="Text 28"/>
           <p:cNvSpPr/>
           <p:nvPr/>
         </p:nvSpPr>
@@ -15446,7 +15446,7 @@
       </p:sp>
       <p:sp>
         <p:nvSpPr>
-          <p:cNvPr id="759379204" name="Shape 29"/>
+          <p:cNvPr id="905886045" name="Shape 29"/>
           <p:cNvSpPr/>
           <p:nvPr/>
         </p:nvSpPr>
@@ -15466,7 +15466,7 @@
       </p:sp>
       <p:sp>
         <p:nvSpPr>
-          <p:cNvPr id="1702829113" name="Text 30"/>
+          <p:cNvPr id="1390020454" name="Text 30"/>
           <p:cNvSpPr/>
           <p:nvPr/>
         </p:nvSpPr>
@@ -15506,7 +15506,7 @@
       </p:sp>
       <p:sp>
         <p:nvSpPr>
-          <p:cNvPr id="1049015300" name="Shape 31"/>
+          <p:cNvPr id="1324917829" name="Shape 31"/>
           <p:cNvSpPr/>
           <p:nvPr/>
         </p:nvSpPr>
@@ -15526,7 +15526,7 @@
       </p:sp>
       <p:sp>
         <p:nvSpPr>
-          <p:cNvPr id="812622745" name="Text 32"/>
+          <p:cNvPr id="509969570" name="Text 32"/>
           <p:cNvSpPr/>
           <p:nvPr/>
         </p:nvSpPr>
@@ -15566,7 +15566,7 @@
       </p:sp>
       <p:sp>
         <p:nvSpPr>
-          <p:cNvPr id="1048181507" name="Shape 33"/>
+          <p:cNvPr id="1655343427" name="Shape 33"/>
           <p:cNvSpPr/>
           <p:nvPr/>
         </p:nvSpPr>
@@ -15586,7 +15586,7 @@
       </p:sp>
       <p:sp>
         <p:nvSpPr>
-          <p:cNvPr id="433907600" name="Text 34"/>
+          <p:cNvPr id="780340222" name="Text 34"/>
           <p:cNvSpPr/>
           <p:nvPr/>
         </p:nvSpPr>
@@ -15626,7 +15626,7 @@
       </p:sp>
       <p:sp>
         <p:nvSpPr>
-          <p:cNvPr id="523913386" name="Text 35"/>
+          <p:cNvPr id="1619129473" name="Text 35"/>
           <p:cNvSpPr/>
           <p:nvPr/>
         </p:nvSpPr>
@@ -15666,7 +15666,7 @@
       </p:sp>
       <p:sp>
         <p:nvSpPr>
-          <p:cNvPr id="830480978" name="Text 36"/>
+          <p:cNvPr id="1019762076" name="Text 36"/>
           <p:cNvSpPr/>
           <p:nvPr/>
         </p:nvSpPr>
@@ -15746,7 +15746,7 @@
       </p:grpSpPr>
       <p:sp>
         <p:nvSpPr>
-          <p:cNvPr id="2125876526" name="Text 0"/>
+          <p:cNvPr id="1391639329" name="Text 0"/>
           <p:cNvSpPr/>
           <p:nvPr/>
         </p:nvSpPr>
@@ -15786,7 +15786,7 @@
       </p:sp>
       <p:sp>
         <p:nvSpPr>
-          <p:cNvPr id="1485090234" name="Text 1"/>
+          <p:cNvPr id="1222082001" name="Text 1"/>
           <p:cNvSpPr/>
           <p:nvPr/>
         </p:nvSpPr>
@@ -15826,7 +15826,7 @@
       </p:sp>
       <p:sp>
         <p:nvSpPr>
-          <p:cNvPr id="1315600486" name="Text 2"/>
+          <p:cNvPr id="1551856822" name="Text 2"/>
           <p:cNvSpPr/>
           <p:nvPr/>
         </p:nvSpPr>
@@ -15866,7 +15866,7 @@
       </p:sp>
       <p:sp>
         <p:nvSpPr>
-          <p:cNvPr id="214819835" name="Shape 3"/>
+          <p:cNvPr id="1730419314" name="Shape 3"/>
           <p:cNvSpPr/>
           <p:nvPr/>
         </p:nvSpPr>
@@ -15888,7 +15888,7 @@
       </p:sp>
       <p:pic>
         <p:nvPicPr>
-          <p:cNvPr id="1132641981" name="Image 0" descr="preencoded.png"/>
+          <p:cNvPr id="110352806" name="Image 0" descr="preencoded.png"/>
           <p:cNvPicPr>
             <a:picLocks noChangeAspect="1"/>
           </p:cNvPicPr>
@@ -15910,7 +15910,7 @@
       </p:pic>
       <p:sp>
         <p:nvSpPr>
-          <p:cNvPr id="995884688" name="Text 4"/>
+          <p:cNvPr id="2110589387" name="Text 4"/>
           <p:cNvSpPr/>
           <p:nvPr/>
         </p:nvSpPr>
@@ -15950,7 +15950,7 @@
       </p:sp>
       <p:sp>
         <p:nvSpPr>
-          <p:cNvPr id="1431106827" name="Text 5"/>
+          <p:cNvPr id="1664058868" name="Text 5"/>
           <p:cNvSpPr/>
           <p:nvPr/>
         </p:nvSpPr>
@@ -15990,7 +15990,7 @@
       </p:sp>
       <p:sp>
         <p:nvSpPr>
-          <p:cNvPr id="1055866702" name="Shape 6"/>
+          <p:cNvPr id="1872239993" name="Shape 6"/>
           <p:cNvSpPr/>
           <p:nvPr/>
         </p:nvSpPr>
@@ -16012,7 +16012,7 @@
       </p:sp>
       <p:pic>
         <p:nvPicPr>
-          <p:cNvPr id="2095923657" name="Image 1" descr="preencoded.png"/>
+          <p:cNvPr id="1658005194" name="Image 1" descr="preencoded.png"/>
           <p:cNvPicPr>
             <a:picLocks noChangeAspect="1"/>
           </p:cNvPicPr>
@@ -16034,7 +16034,7 @@
       </p:pic>
       <p:sp>
         <p:nvSpPr>
-          <p:cNvPr id="1504780823" name="Text 7"/>
+          <p:cNvPr id="469346671" name="Text 7"/>
           <p:cNvSpPr/>
           <p:nvPr/>
         </p:nvSpPr>
@@ -16074,7 +16074,7 @@
       </p:sp>
       <p:sp>
         <p:nvSpPr>
-          <p:cNvPr id="1234571942" name="Text 8"/>
+          <p:cNvPr id="843174278" name="Text 8"/>
           <p:cNvSpPr/>
           <p:nvPr/>
         </p:nvSpPr>
@@ -16114,7 +16114,7 @@
       </p:sp>
       <p:sp>
         <p:nvSpPr>
-          <p:cNvPr id="2036217025" name="Shape 9"/>
+          <p:cNvPr id="2040450038" name="Shape 9"/>
           <p:cNvSpPr/>
           <p:nvPr/>
         </p:nvSpPr>
@@ -16136,7 +16136,7 @@
       </p:sp>
       <p:pic>
         <p:nvPicPr>
-          <p:cNvPr id="2030236074" name="Image 2" descr="preencoded.png"/>
+          <p:cNvPr id="617276965" name="Image 2" descr="preencoded.png"/>
           <p:cNvPicPr>
             <a:picLocks noChangeAspect="1"/>
           </p:cNvPicPr>
@@ -16158,7 +16158,7 @@
       </p:pic>
       <p:sp>
         <p:nvSpPr>
-          <p:cNvPr id="895043223" name="Text 10"/>
+          <p:cNvPr id="194321599" name="Text 10"/>
           <p:cNvSpPr/>
           <p:nvPr/>
         </p:nvSpPr>
@@ -16198,7 +16198,7 @@
       </p:sp>
       <p:sp>
         <p:nvSpPr>
-          <p:cNvPr id="1347715430" name="Text 11"/>
+          <p:cNvPr id="584872959" name="Text 11"/>
           <p:cNvSpPr/>
           <p:nvPr/>
         </p:nvSpPr>
@@ -16238,7 +16238,7 @@
       </p:sp>
       <p:pic>
         <p:nvPicPr>
-          <p:cNvPr id="857319448" name="Image 3" descr="preencoded.png"/>
+          <p:cNvPr id="196044122" name="Image 3" descr="preencoded.png"/>
           <p:cNvPicPr>
             <a:picLocks noChangeAspect="1"/>
           </p:cNvPicPr>
@@ -16260,7 +16260,7 @@
       </p:pic>
       <p:sp>
         <p:nvSpPr>
-          <p:cNvPr id="1645141819" name="Shape 12"/>
+          <p:cNvPr id="1748516976" name="Shape 12"/>
           <p:cNvSpPr/>
           <p:nvPr/>
         </p:nvSpPr>
@@ -16287,7 +16287,7 @@
       </p:sp>
       <p:sp>
         <p:nvSpPr>
-          <p:cNvPr id="717353794" name="Text 13"/>
+          <p:cNvPr id="224545396" name="Text 13"/>
           <p:cNvSpPr/>
           <p:nvPr/>
         </p:nvSpPr>
@@ -16327,7 +16327,7 @@
       </p:sp>
       <p:sp>
         <p:nvSpPr>
-          <p:cNvPr id="1393322437" name="Shape 14"/>
+          <p:cNvPr id="258983922" name="Shape 14"/>
           <p:cNvSpPr/>
           <p:nvPr/>
         </p:nvSpPr>
@@ -16354,7 +16354,7 @@
       </p:sp>
       <p:sp>
         <p:nvSpPr>
-          <p:cNvPr id="385417389" name="Text 15"/>
+          <p:cNvPr id="1610105046" name="Text 15"/>
           <p:cNvSpPr/>
           <p:nvPr/>
         </p:nvSpPr>
@@ -16394,7 +16394,7 @@
       </p:sp>
       <p:sp>
         <p:nvSpPr>
-          <p:cNvPr id="140414828" name="Shape 16"/>
+          <p:cNvPr id="139678600" name="Shape 16"/>
           <p:cNvSpPr/>
           <p:nvPr/>
         </p:nvSpPr>
@@ -16421,7 +16421,7 @@
       </p:sp>
       <p:sp>
         <p:nvSpPr>
-          <p:cNvPr id="304299236" name="Text 17"/>
+          <p:cNvPr id="990165014" name="Text 17"/>
           <p:cNvSpPr/>
           <p:nvPr/>
         </p:nvSpPr>
@@ -16461,7 +16461,7 @@
       </p:sp>
       <p:sp>
         <p:nvSpPr>
-          <p:cNvPr id="107469604" name="Shape 18"/>
+          <p:cNvPr id="1909467700" name="Shape 18"/>
           <p:cNvSpPr/>
           <p:nvPr/>
         </p:nvSpPr>
@@ -16488,7 +16488,7 @@
       </p:sp>
       <p:sp>
         <p:nvSpPr>
-          <p:cNvPr id="549563678" name="Text 19"/>
+          <p:cNvPr id="353867087" name="Text 19"/>
           <p:cNvSpPr/>
           <p:nvPr/>
         </p:nvSpPr>
@@ -16528,7 +16528,7 @@
       </p:sp>
       <p:sp>
         <p:nvSpPr>
-          <p:cNvPr id="658656502" name="Shape 20"/>
+          <p:cNvPr id="195804678" name="Shape 20"/>
           <p:cNvSpPr/>
           <p:nvPr/>
         </p:nvSpPr>
@@ -16555,7 +16555,7 @@
       </p:sp>
       <p:sp>
         <p:nvSpPr>
-          <p:cNvPr id="1770249814" name="Text 21"/>
+          <p:cNvPr id="1779679339" name="Text 21"/>
           <p:cNvSpPr/>
           <p:nvPr/>
         </p:nvSpPr>
@@ -16595,7 +16595,7 @@
       </p:sp>
       <p:sp>
         <p:nvSpPr>
-          <p:cNvPr id="1265756939" name="Shape 22"/>
+          <p:cNvPr id="1064798017" name="Shape 22"/>
           <p:cNvSpPr/>
           <p:nvPr/>
         </p:nvSpPr>
@@ -16622,7 +16622,7 @@
       </p:sp>
       <p:sp>
         <p:nvSpPr>
-          <p:cNvPr id="1632025859" name="Text 23"/>
+          <p:cNvPr id="837413266" name="Text 23"/>
           <p:cNvSpPr/>
           <p:nvPr/>
         </p:nvSpPr>
@@ -16662,7 +16662,7 @@
       </p:sp>
       <p:sp>
         <p:nvSpPr>
-          <p:cNvPr id="2136184034" name="Shape 24"/>
+          <p:cNvPr id="1721714450" name="Shape 24"/>
           <p:cNvSpPr/>
           <p:nvPr/>
         </p:nvSpPr>
@@ -16689,7 +16689,7 @@
       </p:sp>
       <p:sp>
         <p:nvSpPr>
-          <p:cNvPr id="1928653812" name="Text 25"/>
+          <p:cNvPr id="380084293" name="Text 25"/>
           <p:cNvSpPr/>
           <p:nvPr/>
         </p:nvSpPr>
@@ -16729,7 +16729,7 @@
       </p:sp>
       <p:sp>
         <p:nvSpPr>
-          <p:cNvPr id="940473590" name="Shape 26"/>
+          <p:cNvPr id="46993853" name="Shape 26"/>
           <p:cNvSpPr/>
           <p:nvPr/>
         </p:nvSpPr>
@@ -16756,7 +16756,7 @@
       </p:sp>
       <p:sp>
         <p:nvSpPr>
-          <p:cNvPr id="217576759" name="Text 27"/>
+          <p:cNvPr id="1705426469" name="Text 27"/>
           <p:cNvSpPr/>
           <p:nvPr/>
         </p:nvSpPr>
@@ -16796,7 +16796,7 @@
       </p:sp>
       <p:sp>
         <p:nvSpPr>
-          <p:cNvPr id="1029876286" name="Shape 28"/>
+          <p:cNvPr id="2008818689" name="Shape 28"/>
           <p:cNvSpPr/>
           <p:nvPr/>
         </p:nvSpPr>
@@ -16823,7 +16823,7 @@
       </p:sp>
       <p:sp>
         <p:nvSpPr>
-          <p:cNvPr id="1161525986" name="Text 29"/>
+          <p:cNvPr id="648698571" name="Text 29"/>
           <p:cNvSpPr/>
           <p:nvPr/>
         </p:nvSpPr>
@@ -16863,7 +16863,7 @@
       </p:sp>
       <p:sp>
         <p:nvSpPr>
-          <p:cNvPr id="1243458232" name="Shape 30"/>
+          <p:cNvPr id="2060448116" name="Shape 30"/>
           <p:cNvSpPr/>
           <p:nvPr/>
         </p:nvSpPr>
@@ -16890,7 +16890,7 @@
       </p:sp>
       <p:sp>
         <p:nvSpPr>
-          <p:cNvPr id="1859121041" name="Text 31"/>
+          <p:cNvPr id="2058249915" name="Text 31"/>
           <p:cNvSpPr/>
           <p:nvPr/>
         </p:nvSpPr>
@@ -16930,7 +16930,7 @@
       </p:sp>
       <p:sp>
         <p:nvSpPr>
-          <p:cNvPr id="1144402923" name="Shape 32"/>
+          <p:cNvPr id="707889097" name="Shape 32"/>
           <p:cNvSpPr/>
           <p:nvPr/>
         </p:nvSpPr>
@@ -16957,7 +16957,7 @@
       </p:sp>
       <p:sp>
         <p:nvSpPr>
-          <p:cNvPr id="1730099819" name="Text 33"/>
+          <p:cNvPr id="1983658484" name="Text 33"/>
           <p:cNvSpPr/>
           <p:nvPr/>
         </p:nvSpPr>
@@ -16997,7 +16997,7 @@
       </p:sp>
       <p:sp>
         <p:nvSpPr>
-          <p:cNvPr id="1689286241" name="Shape 34"/>
+          <p:cNvPr id="897041665" name="Shape 34"/>
           <p:cNvSpPr/>
           <p:nvPr/>
         </p:nvSpPr>
@@ -17024,7 +17024,7 @@
       </p:sp>
       <p:sp>
         <p:nvSpPr>
-          <p:cNvPr id="1508782899" name="Text 35"/>
+          <p:cNvPr id="1751502767" name="Text 35"/>
           <p:cNvSpPr/>
           <p:nvPr/>
         </p:nvSpPr>
@@ -17064,7 +17064,7 @@
       </p:sp>
       <p:sp>
         <p:nvSpPr>
-          <p:cNvPr id="1670633225" name="Shape 36"/>
+          <p:cNvPr id="1539932294" name="Shape 36"/>
           <p:cNvSpPr/>
           <p:nvPr/>
         </p:nvSpPr>
@@ -17091,7 +17091,7 @@
       </p:sp>
       <p:sp>
         <p:nvSpPr>
-          <p:cNvPr id="960553750" name="Text 37"/>
+          <p:cNvPr id="1954367811" name="Text 37"/>
           <p:cNvSpPr/>
           <p:nvPr/>
         </p:nvSpPr>
@@ -17131,7 +17131,7 @@
       </p:sp>
       <p:sp>
         <p:nvSpPr>
-          <p:cNvPr id="1934607571" name="Shape 38"/>
+          <p:cNvPr id="1597890197" name="Shape 38"/>
           <p:cNvSpPr/>
           <p:nvPr/>
         </p:nvSpPr>
@@ -17158,7 +17158,7 @@
       </p:sp>
       <p:sp>
         <p:nvSpPr>
-          <p:cNvPr id="1366523075" name="Text 39"/>
+          <p:cNvPr id="180191877" name="Text 39"/>
           <p:cNvSpPr/>
           <p:nvPr/>
         </p:nvSpPr>
@@ -17198,7 +17198,7 @@
       </p:sp>
       <p:sp>
         <p:nvSpPr>
-          <p:cNvPr id="587261259" name="Shape 40"/>
+          <p:cNvPr id="1433234475" name="Shape 40"/>
           <p:cNvSpPr/>
           <p:nvPr/>
         </p:nvSpPr>
@@ -17225,7 +17225,7 @@
       </p:sp>
       <p:sp>
         <p:nvSpPr>
-          <p:cNvPr id="2059342096" name="Text 41"/>
+          <p:cNvPr id="2146741761" name="Text 41"/>
           <p:cNvSpPr/>
           <p:nvPr/>
         </p:nvSpPr>
@@ -17265,7 +17265,7 @@
       </p:sp>
       <p:sp>
         <p:nvSpPr>
-          <p:cNvPr id="754065007" name="Text 42"/>
+          <p:cNvPr id="1445481910" name="Text 42"/>
           <p:cNvSpPr/>
           <p:nvPr/>
         </p:nvSpPr>
@@ -17305,7 +17305,7 @@
       </p:sp>
       <p:sp>
         <p:nvSpPr>
-          <p:cNvPr id="1227323533" name="Text 43"/>
+          <p:cNvPr id="153027230" name="Text 43"/>
           <p:cNvSpPr/>
           <p:nvPr/>
         </p:nvSpPr>
@@ -17345,7 +17345,7 @@
       </p:sp>
       <p:pic>
         <p:nvPicPr>
-          <p:cNvPr id="962102714" name="Image 3" descr="preencoded.png"/>
+          <p:cNvPr id="1615636236" name="Image 3" descr="preencoded.png"/>
           <p:cNvPicPr>
             <a:picLocks noChangeAspect="1"/>
           </p:cNvPicPr>
@@ -17407,7 +17407,7 @@
       </p:grpSpPr>
       <p:sp>
         <p:nvSpPr>
-          <p:cNvPr id="1669194051" name="Text 0"/>
+          <p:cNvPr id="319725555" name="Text 0"/>
           <p:cNvSpPr/>
           <p:nvPr/>
         </p:nvSpPr>
@@ -17451,7 +17451,7 @@
       </p:sp>
       <p:sp>
         <p:nvSpPr>
-          <p:cNvPr id="293422988" name="Text 1"/>
+          <p:cNvPr id="1287746390" name="Text 1"/>
           <p:cNvSpPr/>
           <p:nvPr/>
         </p:nvSpPr>
@@ -17506,7 +17506,7 @@
       </p:sp>
       <p:sp>
         <p:nvSpPr>
-          <p:cNvPr id="1642562132" name="Text 2"/>
+          <p:cNvPr id="1116234593" name="Text 2"/>
           <p:cNvSpPr/>
           <p:nvPr/>
         </p:nvSpPr>
@@ -17550,7 +17550,7 @@
       </p:sp>
       <p:sp>
         <p:nvSpPr>
-          <p:cNvPr id="566609386" name="Shape 3"/>
+          <p:cNvPr id="1131441482" name="Shape 3"/>
           <p:cNvSpPr/>
           <p:nvPr/>
         </p:nvSpPr>
@@ -17594,7 +17594,7 @@
       </p:sp>
       <p:pic>
         <p:nvPicPr>
-          <p:cNvPr id="2068248645" name="Image 1" descr="preencoded.png"/>
+          <p:cNvPr id="235710378" name="Image 1" descr="preencoded.png"/>
           <p:cNvPicPr>
             <a:picLocks noChangeAspect="1"/>
           </p:cNvPicPr>
@@ -17616,7 +17616,7 @@
       </p:pic>
       <p:sp>
         <p:nvSpPr>
-          <p:cNvPr id="1268533061" name="Text 4"/>
+          <p:cNvPr id="2022386742" name="Text 4"/>
           <p:cNvSpPr/>
           <p:nvPr/>
         </p:nvSpPr>
@@ -17660,7 +17660,7 @@
       </p:sp>
       <p:sp>
         <p:nvSpPr>
-          <p:cNvPr id="303618907" name="Text 5"/>
+          <p:cNvPr id="1474835336" name="Text 5"/>
           <p:cNvSpPr/>
           <p:nvPr/>
         </p:nvSpPr>
@@ -17704,7 +17704,7 @@
       </p:sp>
       <p:pic>
         <p:nvPicPr>
-          <p:cNvPr id="1403361749" name="Image 2" descr="preencoded.png"/>
+          <p:cNvPr id="528802396" name="Image 2" descr="preencoded.png"/>
           <p:cNvPicPr>
             <a:picLocks noChangeAspect="1"/>
           </p:cNvPicPr>
@@ -17726,7 +17726,7 @@
       </p:pic>
       <p:sp>
         <p:nvSpPr>
-          <p:cNvPr id="656423862" name="Shape 6"/>
+          <p:cNvPr id="878178689" name="Shape 6"/>
           <p:cNvSpPr/>
           <p:nvPr/>
         </p:nvSpPr>
@@ -17770,7 +17770,7 @@
       </p:sp>
       <p:pic>
         <p:nvPicPr>
-          <p:cNvPr id="1291232245" name="Image 3" descr="preencoded.png"/>
+          <p:cNvPr id="2023559543" name="Image 3" descr="preencoded.png"/>
           <p:cNvPicPr>
             <a:picLocks noChangeAspect="1"/>
           </p:cNvPicPr>
@@ -17792,7 +17792,7 @@
       </p:pic>
       <p:sp>
         <p:nvSpPr>
-          <p:cNvPr id="207204145" name="Text 7"/>
+          <p:cNvPr id="1478962730" name="Text 7"/>
           <p:cNvSpPr/>
           <p:nvPr/>
         </p:nvSpPr>
@@ -17836,7 +17836,7 @@
       </p:sp>
       <p:sp>
         <p:nvSpPr>
-          <p:cNvPr id="1889984562" name="Text 8"/>
+          <p:cNvPr id="241277844" name="Text 8"/>
           <p:cNvSpPr/>
           <p:nvPr/>
         </p:nvSpPr>
@@ -17880,7 +17880,7 @@
       </p:sp>
       <p:pic>
         <p:nvPicPr>
-          <p:cNvPr id="935782402" name="Image 4" descr="preencoded.png"/>
+          <p:cNvPr id="314688057" name="Image 4" descr="preencoded.png"/>
           <p:cNvPicPr>
             <a:picLocks noChangeAspect="1"/>
           </p:cNvPicPr>
@@ -17902,7 +17902,7 @@
       </p:pic>
       <p:sp>
         <p:nvSpPr>
-          <p:cNvPr id="852457011" name="Shape 9"/>
+          <p:cNvPr id="905252559" name="Shape 9"/>
           <p:cNvSpPr/>
           <p:nvPr/>
         </p:nvSpPr>
@@ -17946,7 +17946,7 @@
       </p:sp>
       <p:pic>
         <p:nvPicPr>
-          <p:cNvPr id="652293021" name="Image 5" descr="preencoded.png"/>
+          <p:cNvPr id="795562994" name="Image 5" descr="preencoded.png"/>
           <p:cNvPicPr>
             <a:picLocks noChangeAspect="1"/>
           </p:cNvPicPr>
@@ -17968,7 +17968,7 @@
       </p:pic>
       <p:sp>
         <p:nvSpPr>
-          <p:cNvPr id="1609196950" name="Text 10"/>
+          <p:cNvPr id="1116495745" name="Text 10"/>
           <p:cNvSpPr/>
           <p:nvPr/>
         </p:nvSpPr>
@@ -18012,7 +18012,7 @@
       </p:sp>
       <p:sp>
         <p:nvSpPr>
-          <p:cNvPr id="869115826" name="Text 11"/>
+          <p:cNvPr id="1603955622" name="Text 11"/>
           <p:cNvSpPr/>
           <p:nvPr/>
         </p:nvSpPr>
@@ -18056,7 +18056,7 @@
       </p:sp>
       <p:pic>
         <p:nvPicPr>
-          <p:cNvPr id="236362620" name="Image 6" descr="preencoded.png"/>
+          <p:cNvPr id="442163680" name="Image 6" descr="preencoded.png"/>
           <p:cNvPicPr>
             <a:picLocks noChangeAspect="1"/>
           </p:cNvPicPr>
@@ -18078,7 +18078,7 @@
       </p:pic>
       <p:sp>
         <p:nvSpPr>
-          <p:cNvPr id="1299931726" name="Shape 12"/>
+          <p:cNvPr id="1093972226" name="Shape 12"/>
           <p:cNvSpPr/>
           <p:nvPr/>
         </p:nvSpPr>
@@ -18122,7 +18122,7 @@
       </p:sp>
       <p:pic>
         <p:nvPicPr>
-          <p:cNvPr id="866118623" name="Image 7" descr="preencoded.png"/>
+          <p:cNvPr id="740262968" name="Image 7" descr="preencoded.png"/>
           <p:cNvPicPr>
             <a:picLocks noChangeAspect="1"/>
           </p:cNvPicPr>
@@ -18144,7 +18144,7 @@
       </p:pic>
       <p:sp>
         <p:nvSpPr>
-          <p:cNvPr id="2116312928" name="Text 13"/>
+          <p:cNvPr id="1876267040" name="Text 13"/>
           <p:cNvSpPr/>
           <p:nvPr/>
         </p:nvSpPr>
@@ -18188,7 +18188,7 @@
       </p:sp>
       <p:sp>
         <p:nvSpPr>
-          <p:cNvPr id="699813145" name="Text 14"/>
+          <p:cNvPr id="2112551622" name="Text 14"/>
           <p:cNvSpPr/>
           <p:nvPr/>
         </p:nvSpPr>
@@ -18232,7 +18232,7 @@
       </p:sp>
       <p:sp>
         <p:nvSpPr>
-          <p:cNvPr id="2011919249" name="Text 17"/>
+          <p:cNvPr id="2002376309" name="Text 17"/>
           <p:cNvSpPr/>
           <p:nvPr/>
         </p:nvSpPr>
@@ -18276,7 +18276,7 @@
       </p:sp>
       <p:sp>
         <p:nvSpPr>
-          <p:cNvPr id="158554910" name="Text 18"/>
+          <p:cNvPr id="1803181207" name="Text 18"/>
           <p:cNvSpPr/>
           <p:nvPr/>
         </p:nvSpPr>
@@ -18360,7 +18360,7 @@
       </p:grpSpPr>
       <p:sp>
         <p:nvSpPr>
-          <p:cNvPr id="1598971042" name="Text 0"/>
+          <p:cNvPr id="787471608" name="Text 0"/>
           <p:cNvSpPr/>
           <p:nvPr/>
         </p:nvSpPr>
@@ -18400,7 +18400,7 @@
       </p:sp>
       <p:sp>
         <p:nvSpPr>
-          <p:cNvPr id="514584482" name="Text 1"/>
+          <p:cNvPr id="1837260305" name="Text 1"/>
           <p:cNvSpPr/>
           <p:nvPr/>
         </p:nvSpPr>
@@ -18440,7 +18440,7 @@
       </p:sp>
       <p:sp>
         <p:nvSpPr>
-          <p:cNvPr id="482264184" name="Text 2"/>
+          <p:cNvPr id="1864932883" name="Text 2"/>
           <p:cNvSpPr/>
           <p:nvPr/>
         </p:nvSpPr>
@@ -18480,7 +18480,7 @@
       </p:sp>
       <p:sp>
         <p:nvSpPr>
-          <p:cNvPr id="1112575794" name="Shape 3"/>
+          <p:cNvPr id="269891324" name="Shape 3"/>
           <p:cNvSpPr/>
           <p:nvPr/>
         </p:nvSpPr>
@@ -18502,7 +18502,7 @@
       </p:sp>
       <p:pic>
         <p:nvPicPr>
-          <p:cNvPr id="341425138" name="Image 0" descr="preencoded.png"/>
+          <p:cNvPr id="145326001" name="Image 0" descr="preencoded.png"/>
           <p:cNvPicPr>
             <a:picLocks noChangeAspect="1"/>
           </p:cNvPicPr>
@@ -18524,7 +18524,7 @@
       </p:pic>
       <p:sp>
         <p:nvSpPr>
-          <p:cNvPr id="127326946" name="Text 4"/>
+          <p:cNvPr id="800238528" name="Text 4"/>
           <p:cNvSpPr/>
           <p:nvPr/>
         </p:nvSpPr>
@@ -18564,7 +18564,7 @@
       </p:sp>
       <p:sp>
         <p:nvSpPr>
-          <p:cNvPr id="850834071" name="Text 5"/>
+          <p:cNvPr id="605950854" name="Text 5"/>
           <p:cNvSpPr/>
           <p:nvPr/>
         </p:nvSpPr>
@@ -18604,7 +18604,7 @@
       </p:sp>
       <p:sp>
         <p:nvSpPr>
-          <p:cNvPr id="1343069607" name="Shape 6"/>
+          <p:cNvPr id="1129232946" name="Shape 6"/>
           <p:cNvSpPr/>
           <p:nvPr/>
         </p:nvSpPr>
@@ -18626,7 +18626,7 @@
       </p:sp>
       <p:pic>
         <p:nvPicPr>
-          <p:cNvPr id="1110338659" name="Image 1" descr="preencoded.png"/>
+          <p:cNvPr id="157478180" name="Image 1" descr="preencoded.png"/>
           <p:cNvPicPr>
             <a:picLocks noChangeAspect="1"/>
           </p:cNvPicPr>
@@ -18648,7 +18648,7 @@
       </p:pic>
       <p:sp>
         <p:nvSpPr>
-          <p:cNvPr id="447239159" name="Text 7"/>
+          <p:cNvPr id="960866049" name="Text 7"/>
           <p:cNvSpPr/>
           <p:nvPr/>
         </p:nvSpPr>
@@ -18688,7 +18688,7 @@
       </p:sp>
       <p:sp>
         <p:nvSpPr>
-          <p:cNvPr id="1021563683" name="Text 8"/>
+          <p:cNvPr id="1808188605" name="Text 8"/>
           <p:cNvSpPr/>
           <p:nvPr/>
         </p:nvSpPr>
@@ -18728,7 +18728,7 @@
       </p:sp>
       <p:sp>
         <p:nvSpPr>
-          <p:cNvPr id="929160487" name="Shape 9"/>
+          <p:cNvPr id="1738921810" name="Shape 9"/>
           <p:cNvSpPr/>
           <p:nvPr/>
         </p:nvSpPr>
@@ -18750,7 +18750,7 @@
       </p:sp>
       <p:pic>
         <p:nvPicPr>
-          <p:cNvPr id="535952560" name="Image 2" descr="preencoded.png"/>
+          <p:cNvPr id="1676329254" name="Image 2" descr="preencoded.png"/>
           <p:cNvPicPr>
             <a:picLocks noChangeAspect="1"/>
           </p:cNvPicPr>
@@ -18772,7 +18772,7 @@
       </p:pic>
       <p:sp>
         <p:nvSpPr>
-          <p:cNvPr id="567814911" name="Text 10"/>
+          <p:cNvPr id="1077266723" name="Text 10"/>
           <p:cNvSpPr/>
           <p:nvPr/>
         </p:nvSpPr>
@@ -18812,7 +18812,7 @@
       </p:sp>
       <p:sp>
         <p:nvSpPr>
-          <p:cNvPr id="2074665603" name="Text 11"/>
+          <p:cNvPr id="927951610" name="Text 11"/>
           <p:cNvSpPr/>
           <p:nvPr/>
         </p:nvSpPr>
@@ -18852,7 +18852,7 @@
       </p:sp>
       <p:sp>
         <p:nvSpPr>
-          <p:cNvPr id="2108067383" name="Shape 12"/>
+          <p:cNvPr id="966140847" name="Shape 12"/>
           <p:cNvSpPr/>
           <p:nvPr/>
         </p:nvSpPr>
@@ -18874,7 +18874,7 @@
       </p:sp>
       <p:pic>
         <p:nvPicPr>
-          <p:cNvPr id="1673221749" name="Image 3" descr="preencoded.png"/>
+          <p:cNvPr id="869406395" name="Image 3" descr="preencoded.png"/>
           <p:cNvPicPr>
             <a:picLocks noChangeAspect="1"/>
           </p:cNvPicPr>
@@ -18896,7 +18896,7 @@
       </p:pic>
       <p:sp>
         <p:nvSpPr>
-          <p:cNvPr id="1275121508" name="Text 13"/>
+          <p:cNvPr id="1392267781" name="Text 13"/>
           <p:cNvSpPr/>
           <p:nvPr/>
         </p:nvSpPr>
@@ -18936,7 +18936,7 @@
       </p:sp>
       <p:sp>
         <p:nvSpPr>
-          <p:cNvPr id="1595373175" name="Text 14"/>
+          <p:cNvPr id="992509723" name="Text 14"/>
           <p:cNvSpPr/>
           <p:nvPr/>
         </p:nvSpPr>
@@ -18976,7 +18976,7 @@
       </p:sp>
       <p:sp>
         <p:nvSpPr>
-          <p:cNvPr id="472944779" name="Shape 15"/>
+          <p:cNvPr id="2002400082" name="Shape 15"/>
           <p:cNvSpPr/>
           <p:nvPr/>
         </p:nvSpPr>
@@ -18998,7 +18998,7 @@
       </p:sp>
       <p:pic>
         <p:nvPicPr>
-          <p:cNvPr id="398123062" name="Image 4" descr="preencoded.png"/>
+          <p:cNvPr id="925233360" name="Image 4" descr="preencoded.png"/>
           <p:cNvPicPr>
             <a:picLocks noChangeAspect="1"/>
           </p:cNvPicPr>
@@ -19020,7 +19020,7 @@
       </p:pic>
       <p:sp>
         <p:nvSpPr>
-          <p:cNvPr id="814917697" name="Text 16"/>
+          <p:cNvPr id="338726957" name="Text 16"/>
           <p:cNvSpPr/>
           <p:nvPr/>
         </p:nvSpPr>
@@ -19060,7 +19060,7 @@
       </p:sp>
       <p:sp>
         <p:nvSpPr>
-          <p:cNvPr id="685735495" name="Text 17"/>
+          <p:cNvPr id="2106869792" name="Text 17"/>
           <p:cNvSpPr/>
           <p:nvPr/>
         </p:nvSpPr>
@@ -19100,7 +19100,7 @@
       </p:sp>
       <p:sp>
         <p:nvSpPr>
-          <p:cNvPr id="681930945" name="Shape 18"/>
+          <p:cNvPr id="1307036803" name="Shape 18"/>
           <p:cNvSpPr/>
           <p:nvPr/>
         </p:nvSpPr>
@@ -19122,7 +19122,7 @@
       </p:sp>
       <p:pic>
         <p:nvPicPr>
-          <p:cNvPr id="773428717" name="Image 5" descr="preencoded.png"/>
+          <p:cNvPr id="880752289" name="Image 5" descr="preencoded.png"/>
           <p:cNvPicPr>
             <a:picLocks noChangeAspect="1"/>
           </p:cNvPicPr>
@@ -19144,7 +19144,7 @@
       </p:pic>
       <p:sp>
         <p:nvSpPr>
-          <p:cNvPr id="1355236047" name="Text 19"/>
+          <p:cNvPr id="1262267712" name="Text 19"/>
           <p:cNvSpPr/>
           <p:nvPr/>
         </p:nvSpPr>
@@ -19184,7 +19184,7 @@
       </p:sp>
       <p:sp>
         <p:nvSpPr>
-          <p:cNvPr id="492053649" name="Text 20"/>
+          <p:cNvPr id="838774892" name="Text 20"/>
           <p:cNvSpPr/>
           <p:nvPr/>
         </p:nvSpPr>
@@ -19224,7 +19224,7 @@
       </p:sp>
       <p:sp>
         <p:nvSpPr>
-          <p:cNvPr id="1361086373" name="Shape 21"/>
+          <p:cNvPr id="1821452708" name="Shape 21"/>
           <p:cNvSpPr/>
           <p:nvPr/>
         </p:nvSpPr>
@@ -19246,7 +19246,7 @@
       </p:sp>
       <p:pic>
         <p:nvPicPr>
-          <p:cNvPr id="1589147590" name="Image 6" descr="preencoded.png"/>
+          <p:cNvPr id="1404044070" name="Image 6" descr="preencoded.png"/>
           <p:cNvPicPr>
             <a:picLocks noChangeAspect="1"/>
           </p:cNvPicPr>
@@ -19268,7 +19268,7 @@
       </p:pic>
       <p:sp>
         <p:nvSpPr>
-          <p:cNvPr id="2038338021" name="Text 22"/>
+          <p:cNvPr id="1608752364" name="Text 22"/>
           <p:cNvSpPr/>
           <p:nvPr/>
         </p:nvSpPr>
@@ -19308,7 +19308,7 @@
       </p:sp>
       <p:sp>
         <p:nvSpPr>
-          <p:cNvPr id="1658836606" name="Text 23"/>
+          <p:cNvPr id="138399933" name="Text 23"/>
           <p:cNvSpPr/>
           <p:nvPr/>
         </p:nvSpPr>
@@ -19348,7 +19348,7 @@
       </p:sp>
       <p:sp>
         <p:nvSpPr>
-          <p:cNvPr id="531991349" name="Shape 24"/>
+          <p:cNvPr id="983182363" name="Shape 24"/>
           <p:cNvSpPr/>
           <p:nvPr/>
         </p:nvSpPr>
@@ -19370,7 +19370,7 @@
       </p:sp>
       <p:pic>
         <p:nvPicPr>
-          <p:cNvPr id="1107357427" name="Image 7" descr="preencoded.png"/>
+          <p:cNvPr id="1876885614" name="Image 7" descr="preencoded.png"/>
           <p:cNvPicPr>
             <a:picLocks noChangeAspect="1"/>
           </p:cNvPicPr>
@@ -19392,7 +19392,7 @@
       </p:pic>
       <p:sp>
         <p:nvSpPr>
-          <p:cNvPr id="742527710" name="Text 25"/>
+          <p:cNvPr id="1381717161" name="Text 25"/>
           <p:cNvSpPr/>
           <p:nvPr/>
         </p:nvSpPr>
@@ -19432,7 +19432,7 @@
       </p:sp>
       <p:sp>
         <p:nvSpPr>
-          <p:cNvPr id="1947991563" name="Text 26"/>
+          <p:cNvPr id="263328996" name="Text 26"/>
           <p:cNvSpPr/>
           <p:nvPr/>
         </p:nvSpPr>
@@ -19472,7 +19472,7 @@
       </p:sp>
       <p:sp>
         <p:nvSpPr>
-          <p:cNvPr id="1078304528" name="Shape 27"/>
+          <p:cNvPr id="2086222344" name="Shape 27"/>
           <p:cNvSpPr/>
           <p:nvPr/>
         </p:nvSpPr>
@@ -19494,7 +19494,7 @@
       </p:sp>
       <p:pic>
         <p:nvPicPr>
-          <p:cNvPr id="1555253897" name="Image 8" descr="preencoded.png"/>
+          <p:cNvPr id="851578192" name="Image 8" descr="preencoded.png"/>
           <p:cNvPicPr>
             <a:picLocks noChangeAspect="1"/>
           </p:cNvPicPr>
@@ -19516,7 +19516,7 @@
       </p:pic>
       <p:sp>
         <p:nvSpPr>
-          <p:cNvPr id="1112250648" name="Text 28"/>
+          <p:cNvPr id="1450497413" name="Text 28"/>
           <p:cNvSpPr/>
           <p:nvPr/>
         </p:nvSpPr>
@@ -19556,7 +19556,7 @@
       </p:sp>
       <p:sp>
         <p:nvSpPr>
-          <p:cNvPr id="709206798" name="Text 29"/>
+          <p:cNvPr id="1316405994" name="Text 29"/>
           <p:cNvSpPr/>
           <p:nvPr/>
         </p:nvSpPr>
@@ -19596,7 +19596,7 @@
       </p:sp>
       <p:sp>
         <p:nvSpPr>
-          <p:cNvPr id="698716645" name="Text 30"/>
+          <p:cNvPr id="2079272208" name="Text 30"/>
           <p:cNvSpPr/>
           <p:nvPr/>
         </p:nvSpPr>
@@ -19636,7 +19636,7 @@
       </p:sp>
       <p:sp>
         <p:nvSpPr>
-          <p:cNvPr id="287081067" name="Text 31"/>
+          <p:cNvPr id="603359007" name="Text 31"/>
           <p:cNvSpPr/>
           <p:nvPr/>
         </p:nvSpPr>
@@ -19716,7 +19716,7 @@
       </p:grpSpPr>
       <p:sp>
         <p:nvSpPr>
-          <p:cNvPr id="710962477" name="Text 0"/>
+          <p:cNvPr id="14732119" name="Text 0"/>
           <p:cNvSpPr/>
           <p:nvPr/>
         </p:nvSpPr>
@@ -19756,7 +19756,7 @@
       </p:sp>
       <p:sp>
         <p:nvSpPr>
-          <p:cNvPr id="275122741" name="Text 1"/>
+          <p:cNvPr id="328342564" name="Text 1"/>
           <p:cNvSpPr/>
           <p:nvPr/>
         </p:nvSpPr>
@@ -19796,7 +19796,7 @@
       </p:sp>
       <p:sp>
         <p:nvSpPr>
-          <p:cNvPr id="486042028" name="Text 2"/>
+          <p:cNvPr id="850265106" name="Text 2"/>
           <p:cNvSpPr/>
           <p:nvPr/>
         </p:nvSpPr>
@@ -19836,7 +19836,7 @@
       </p:sp>
       <p:sp>
         <p:nvSpPr>
-          <p:cNvPr id="623211575" name="Shape 3"/>
+          <p:cNvPr id="692096481" name="Shape 3"/>
           <p:cNvSpPr/>
           <p:nvPr/>
         </p:nvSpPr>
@@ -19863,7 +19863,7 @@
       </p:sp>
       <p:pic>
         <p:nvPicPr>
-          <p:cNvPr id="43657184" name="Image 0" descr="preencoded.png"/>
+          <p:cNvPr id="553948322" name="Image 0" descr="preencoded.png"/>
           <p:cNvPicPr>
             <a:picLocks noChangeAspect="1"/>
           </p:cNvPicPr>
@@ -19885,7 +19885,7 @@
       </p:pic>
       <p:sp>
         <p:nvSpPr>
-          <p:cNvPr id="1134315532" name="Text 4"/>
+          <p:cNvPr id="1125871353" name="Text 4"/>
           <p:cNvSpPr/>
           <p:nvPr/>
         </p:nvSpPr>
@@ -19925,7 +19925,7 @@
       </p:sp>
       <p:sp>
         <p:nvSpPr>
-          <p:cNvPr id="1454977527" name="Text 5"/>
+          <p:cNvPr id="747942025" name="Text 5"/>
           <p:cNvSpPr/>
           <p:nvPr/>
         </p:nvSpPr>
@@ -19965,7 +19965,7 @@
       </p:sp>
       <p:sp>
         <p:nvSpPr>
-          <p:cNvPr id="1942309114" name="Shape 6"/>
+          <p:cNvPr id="599965870" name="Shape 6"/>
           <p:cNvSpPr/>
           <p:nvPr/>
         </p:nvSpPr>
@@ -19992,7 +19992,7 @@
       </p:sp>
       <p:pic>
         <p:nvPicPr>
-          <p:cNvPr id="1726544725" name="Image 1" descr="preencoded.png"/>
+          <p:cNvPr id="1056498742" name="Image 1" descr="preencoded.png"/>
           <p:cNvPicPr>
             <a:picLocks noChangeAspect="1"/>
           </p:cNvPicPr>
@@ -20014,7 +20014,7 @@
       </p:pic>
       <p:sp>
         <p:nvSpPr>
-          <p:cNvPr id="1599131603" name="Text 7"/>
+          <p:cNvPr id="2088825135" name="Text 7"/>
           <p:cNvSpPr/>
           <p:nvPr/>
         </p:nvSpPr>
@@ -20054,7 +20054,7 @@
       </p:sp>
       <p:sp>
         <p:nvSpPr>
-          <p:cNvPr id="1928484784" name="Text 8"/>
+          <p:cNvPr id="2147334877" name="Text 8"/>
           <p:cNvSpPr/>
           <p:nvPr/>
         </p:nvSpPr>
@@ -20094,7 +20094,7 @@
       </p:sp>
       <p:sp>
         <p:nvSpPr>
-          <p:cNvPr id="364941497" name="Shape 9"/>
+          <p:cNvPr id="2098241918" name="Shape 9"/>
           <p:cNvSpPr/>
           <p:nvPr/>
         </p:nvSpPr>
@@ -20121,7 +20121,7 @@
       </p:sp>
       <p:pic>
         <p:nvPicPr>
-          <p:cNvPr id="99859344" name="Image 2" descr="preencoded.png"/>
+          <p:cNvPr id="444214391" name="Image 2" descr="preencoded.png"/>
           <p:cNvPicPr>
             <a:picLocks noChangeAspect="1"/>
           </p:cNvPicPr>
@@ -20143,7 +20143,7 @@
       </p:pic>
       <p:sp>
         <p:nvSpPr>
-          <p:cNvPr id="795247131" name="Text 10"/>
+          <p:cNvPr id="1889442458" name="Text 10"/>
           <p:cNvSpPr/>
           <p:nvPr/>
         </p:nvSpPr>
@@ -20183,7 +20183,7 @@
       </p:sp>
       <p:sp>
         <p:nvSpPr>
-          <p:cNvPr id="716705493" name="Text 11"/>
+          <p:cNvPr id="1653636680" name="Text 11"/>
           <p:cNvSpPr/>
           <p:nvPr/>
         </p:nvSpPr>
@@ -20223,7 +20223,7 @@
       </p:sp>
       <p:sp>
         <p:nvSpPr>
-          <p:cNvPr id="640054896" name="Shape 12"/>
+          <p:cNvPr id="201355524" name="Shape 12"/>
           <p:cNvSpPr/>
           <p:nvPr/>
         </p:nvSpPr>
@@ -20250,7 +20250,7 @@
       </p:sp>
       <p:pic>
         <p:nvPicPr>
-          <p:cNvPr id="841093941" name="Image 3" descr="preencoded.png"/>
+          <p:cNvPr id="1672447986" name="Image 3" descr="preencoded.png"/>
           <p:cNvPicPr>
             <a:picLocks noChangeAspect="1"/>
           </p:cNvPicPr>
@@ -20272,7 +20272,7 @@
       </p:pic>
       <p:sp>
         <p:nvSpPr>
-          <p:cNvPr id="1281741897" name="Text 13"/>
+          <p:cNvPr id="841414406" name="Text 13"/>
           <p:cNvSpPr/>
           <p:nvPr/>
         </p:nvSpPr>
@@ -20312,7 +20312,7 @@
       </p:sp>
       <p:sp>
         <p:nvSpPr>
-          <p:cNvPr id="1585154599" name="Text 14"/>
+          <p:cNvPr id="691381828" name="Text 14"/>
           <p:cNvSpPr/>
           <p:nvPr/>
         </p:nvSpPr>
@@ -20352,7 +20352,7 @@
       </p:sp>
       <p:sp>
         <p:nvSpPr>
-          <p:cNvPr id="1937467106" name="Text 15"/>
+          <p:cNvPr id="1870222346" name="Text 15"/>
           <p:cNvSpPr/>
           <p:nvPr/>
         </p:nvSpPr>
@@ -20392,7 +20392,7 @@
       </p:sp>
       <p:sp>
         <p:nvSpPr>
-          <p:cNvPr id="1375350043" name="Text 16"/>
+          <p:cNvPr id="1276659797" name="Text 16"/>
           <p:cNvSpPr/>
           <p:nvPr/>
         </p:nvSpPr>
